--- a/modulo_nc/Panel_No_Conformidades.pptx
+++ b/modulo_nc/Panel_No_Conformidades.pptx
@@ -8011,7 +8011,7 @@
                 <a:ea typeface="Calibri" pitchFamily="34" charset="-122"/>
                 <a:cs typeface="Calibri" pitchFamily="34" charset="-120"/>
               </a:rPr>
-              <a:t>PROYECTO 02</a:t>
+              <a:t>PROYECTO 02 · P2407</a:t>
             </a:r>
             <a:endParaRPr lang="en-US" sz="1300" dirty="0"/>
           </a:p>
@@ -8089,7 +8089,7 @@
                 <a:ea typeface="Calibri" pitchFamily="34" charset="-122"/>
                 <a:cs typeface="Calibri" pitchFamily="34" charset="-120"/>
               </a:rPr>
-              <a:t>Codelco · Hallazgos de calidad y su corrección</a:t>
+              <a:t>CODELCO · Hallazgos de calidad y su corrección</a:t>
             </a:r>
             <a:endParaRPr lang="en-US" sz="1600" dirty="0"/>
           </a:p>
@@ -14160,7 +14160,7 @@
                 <a:ea typeface="Calibri" pitchFamily="34" charset="-122"/>
                 <a:cs typeface="Calibri" pitchFamily="34" charset="-120"/>
               </a:rPr>
-              <a:t>PROYECTO 03</a:t>
+              <a:t>PROYECTO 03 · P2342</a:t>
             </a:r>
             <a:endParaRPr lang="en-US" sz="1300" dirty="0"/>
           </a:p>
@@ -19506,7 +19506,7 @@
                 <a:ea typeface="Calibri" pitchFamily="34" charset="-122"/>
                 <a:cs typeface="Calibri" pitchFamily="34" charset="-120"/>
               </a:rPr>
-              <a:t>Minera Los Pelambres</a:t>
+              <a:t>ANTOFAGASTA MINERALS</a:t>
             </a:r>
             <a:endParaRPr lang="en-US" sz="950" dirty="0"/>
           </a:p>
@@ -19961,7 +19961,7 @@
                 <a:ea typeface="Calibri" pitchFamily="34" charset="-122"/>
                 <a:cs typeface="Calibri" pitchFamily="34" charset="-120"/>
               </a:rPr>
-              <a:t>Codelco</a:t>
+              <a:t>CODELCO</a:t>
             </a:r>
             <a:endParaRPr lang="en-US" sz="950" dirty="0"/>
           </a:p>
@@ -20851,7 +20851,7 @@
                 <a:ea typeface="Calibri" pitchFamily="34" charset="-122"/>
                 <a:cs typeface="Calibri" pitchFamily="34" charset="-120"/>
               </a:rPr>
-              <a:t>Besalco Montajes · no es obra</a:t>
+              <a:t>BESALCO MONTAJES · no es obra</a:t>
             </a:r>
             <a:endParaRPr lang="en-US" sz="950" dirty="0"/>
           </a:p>
@@ -27762,7 +27762,7 @@
                 <a:ea typeface="Calibri" pitchFamily="34" charset="-122"/>
                 <a:cs typeface="Calibri" pitchFamily="34" charset="-120"/>
               </a:rPr>
-              <a:t>PROYECTO 01</a:t>
+              <a:t>PROYECTO 01 · P2416</a:t>
             </a:r>
             <a:endParaRPr lang="en-US" sz="1300" dirty="0"/>
           </a:p>
@@ -27840,7 +27840,7 @@
                 <a:ea typeface="Calibri" pitchFamily="34" charset="-122"/>
                 <a:cs typeface="Calibri" pitchFamily="34" charset="-120"/>
               </a:rPr>
-              <a:t>Minera Los Pelambres · Hallazgos de calidad y su corrección</a:t>
+              <a:t>ANTOFAGASTA MINERALS · Hallazgos de calidad y su corrección</a:t>
             </a:r>
             <a:endParaRPr lang="en-US" sz="1600" dirty="0"/>
           </a:p>

--- a/modulo_nc/Panel_No_Conformidades.pptx
+++ b/modulo_nc/Panel_No_Conformidades.pptx
@@ -216,28 +216,28 @@
                 <c:ptCount val="8"/>
                 <c:lvl>
                   <c:pt idx="0">
-                    <c:v>02-06</c:v>
+                    <c:v>09-06</c:v>
                   </c:pt>
                   <c:pt idx="1">
-                    <c:v>09-06</c:v>
+                    <c:v>16-06</c:v>
                   </c:pt>
                   <c:pt idx="2">
-                    <c:v>16-06</c:v>
+                    <c:v>23-06</c:v>
                   </c:pt>
                   <c:pt idx="3">
-                    <c:v>23-06</c:v>
+                    <c:v>30-06</c:v>
                   </c:pt>
                   <c:pt idx="4">
-                    <c:v>30-06</c:v>
+                    <c:v>07-07</c:v>
                   </c:pt>
                   <c:pt idx="5">
-                    <c:v>07-07</c:v>
+                    <c:v>14-07</c:v>
                   </c:pt>
                   <c:pt idx="6">
-                    <c:v>14-07</c:v>
+                    <c:v>21-07</c:v>
                   </c:pt>
                   <c:pt idx="7">
-                    <c:v>21-07</c:v>
+                    <c:v>28-07</c:v>
                   </c:pt>
                 </c:lvl>
               </c:multiLvlStrCache>
@@ -250,28 +250,28 @@
                 <c:formatCode>General</c:formatCode>
                 <c:ptCount val="8"/>
                 <c:pt idx="0">
-                  <c:v/>
+                  <c:v>2</c:v>
                 </c:pt>
                 <c:pt idx="1">
-                  <c:v>2</c:v>
+                  <c:v/>
                 </c:pt>
                 <c:pt idx="2">
                   <c:v/>
                 </c:pt>
                 <c:pt idx="3">
+                  <c:v>2</c:v>
+                </c:pt>
+                <c:pt idx="4">
                   <c:v>1</c:v>
                 </c:pt>
-                <c:pt idx="4">
+                <c:pt idx="5">
+                  <c:v/>
+                </c:pt>
+                <c:pt idx="6">
                   <c:v>4</c:v>
                 </c:pt>
-                <c:pt idx="5">
+                <c:pt idx="7">
                   <c:v>1</c:v>
-                </c:pt>
-                <c:pt idx="6">
-                  <c:v/>
-                </c:pt>
-                <c:pt idx="7">
-                  <c:v>4</c:v>
                 </c:pt>
               </c:numCache>
             </c:numRef>
@@ -330,28 +330,28 @@
                 <c:ptCount val="8"/>
                 <c:lvl>
                   <c:pt idx="0">
-                    <c:v>02-06</c:v>
+                    <c:v>09-06</c:v>
                   </c:pt>
                   <c:pt idx="1">
-                    <c:v>09-06</c:v>
+                    <c:v>16-06</c:v>
                   </c:pt>
                   <c:pt idx="2">
-                    <c:v>16-06</c:v>
+                    <c:v>23-06</c:v>
                   </c:pt>
                   <c:pt idx="3">
-                    <c:v>23-06</c:v>
+                    <c:v>30-06</c:v>
                   </c:pt>
                   <c:pt idx="4">
-                    <c:v>30-06</c:v>
+                    <c:v>07-07</c:v>
                   </c:pt>
                   <c:pt idx="5">
-                    <c:v>07-07</c:v>
+                    <c:v>14-07</c:v>
                   </c:pt>
                   <c:pt idx="6">
-                    <c:v>14-07</c:v>
+                    <c:v>21-07</c:v>
                   </c:pt>
                   <c:pt idx="7">
-                    <c:v>21-07</c:v>
+                    <c:v>28-07</c:v>
                   </c:pt>
                 </c:lvl>
               </c:multiLvlStrCache>
@@ -364,16 +364,16 @@
                 <c:formatCode>General</c:formatCode>
                 <c:ptCount val="8"/>
                 <c:pt idx="0">
-                  <c:v>1</c:v>
+                  <c:v>2</c:v>
                 </c:pt>
                 <c:pt idx="1">
+                  <c:v/>
+                </c:pt>
+                <c:pt idx="2">
                   <c:v>2</c:v>
                 </c:pt>
-                <c:pt idx="2">
-                  <c:v/>
-                </c:pt>
                 <c:pt idx="3">
-                  <c:v>1</c:v>
+                  <c:v>2</c:v>
                 </c:pt>
                 <c:pt idx="4">
                   <c:v/>
@@ -382,7 +382,7 @@
                   <c:v/>
                 </c:pt>
                 <c:pt idx="6">
-                  <c:v/>
+                  <c:v>1</c:v>
                 </c:pt>
                 <c:pt idx="7">
                   <c:v/>
@@ -757,7 +757,7 @@
                   <c:v>30</c:v>
                 </c:pt>
                 <c:pt idx="1">
-                  <c:v>186</c:v>
+                  <c:v>188</c:v>
                 </c:pt>
                 <c:pt idx="2">
                   <c:v>1</c:v>
@@ -1225,10 +1225,10 @@
                 <c:formatCode>General</c:formatCode>
                 <c:ptCount val="5"/>
                 <c:pt idx="0">
-                  <c:v>255</c:v>
+                  <c:v>266</c:v>
                 </c:pt>
                 <c:pt idx="1">
-                  <c:v>114</c:v>
+                  <c:v>116</c:v>
                 </c:pt>
                 <c:pt idx="2">
                   <c:v>23</c:v>
@@ -1321,10 +1321,10 @@
                 <c:formatCode>General</c:formatCode>
                 <c:ptCount val="5"/>
                 <c:pt idx="0">
-                  <c:v>24</c:v>
+                  <c:v>14</c:v>
                 </c:pt>
                 <c:pt idx="1">
-                  <c:v>5</c:v>
+                  <c:v>4</c:v>
                 </c:pt>
                 <c:pt idx="2">
                   <c:v/>
@@ -1522,7 +1522,7 @@
                 </a:solidFill>
                 <a:latin typeface="Calibri"/>
               </a:rPr>
-              <a:t>Antigüedad de los 30 hallazgos abiertos</a:t>
+              <a:t>Antigüedad de los 19 hallazgos abiertos</a:t>
             </a:r>
           </a:p>
         </c:rich>
@@ -1603,7 +1603,7 @@
                 <c:formatCode>General</c:formatCode>
                 <c:ptCount val="1"/>
                 <c:pt idx="0">
-                  <c:v>9</c:v>
+                  <c:v>7</c:v>
                 </c:pt>
               </c:numCache>
             </c:numRef>
@@ -1747,7 +1747,7 @@
                 <c:formatCode>General</c:formatCode>
                 <c:ptCount val="1"/>
                 <c:pt idx="0">
-                  <c:v>9</c:v>
+                  <c:v>4</c:v>
                 </c:pt>
               </c:numCache>
             </c:numRef>
@@ -1819,7 +1819,7 @@
                 <c:formatCode>General</c:formatCode>
                 <c:ptCount val="1"/>
                 <c:pt idx="0">
-                  <c:v>5</c:v>
+                  <c:v>2</c:v>
                 </c:pt>
               </c:numCache>
             </c:numRef>
@@ -1891,7 +1891,7 @@
                 <c:formatCode>General</c:formatCode>
                 <c:ptCount val="1"/>
                 <c:pt idx="0">
-                  <c:v>2</c:v>
+                  <c:v>1</c:v>
                 </c:pt>
               </c:numCache>
             </c:numRef>
@@ -2608,25 +2608,25 @@
                 <c:formatCode>General</c:formatCode>
                 <c:ptCount val="8"/>
                 <c:pt idx="0">
-                  <c:v>127</c:v>
+                  <c:v>131</c:v>
                 </c:pt>
                 <c:pt idx="1">
                   <c:v>23</c:v>
                 </c:pt>
                 <c:pt idx="2">
-                  <c:v>15</c:v>
+                  <c:v>16</c:v>
                 </c:pt>
                 <c:pt idx="3">
-                  <c:v>10</c:v>
+                  <c:v>11</c:v>
                 </c:pt>
                 <c:pt idx="4">
                   <c:v>9</c:v>
                 </c:pt>
                 <c:pt idx="5">
-                  <c:v>7</c:v>
+                  <c:v>8</c:v>
                 </c:pt>
                 <c:pt idx="6">
-                  <c:v>2</c:v>
+                  <c:v>8</c:v>
                 </c:pt>
                 <c:pt idx="7">
                   <c:v>8</c:v>
@@ -2722,25 +2722,25 @@
                 <c:formatCode>General</c:formatCode>
                 <c:ptCount val="8"/>
                 <c:pt idx="0">
-                  <c:v>12</c:v>
+                  <c:v>9</c:v>
                 </c:pt>
                 <c:pt idx="1">
-                  <c:v>2</c:v>
+                  <c:v>3</c:v>
                 </c:pt>
                 <c:pt idx="2">
-                  <c:v>1</c:v>
+                  <c:v/>
                 </c:pt>
                 <c:pt idx="3">
-                  <c:v>1</c:v>
+                  <c:v/>
                 </c:pt>
                 <c:pt idx="4">
                   <c:v/>
                 </c:pt>
                 <c:pt idx="5">
-                  <c:v>1</c:v>
+                  <c:v/>
                 </c:pt>
                 <c:pt idx="6">
-                  <c:v>6</c:v>
+                  <c:v/>
                 </c:pt>
                 <c:pt idx="7">
                   <c:v/>
@@ -5657,7 +5657,7 @@
                 <a:ea typeface="Calibri" pitchFamily="34" charset="-122"/>
                 <a:cs typeface="Calibri" pitchFamily="34" charset="-120"/>
               </a:rPr>
-              <a:t>436 hallazgos levantados entre 10-02-2023 y 27-07-2026 (Desaladora 95 · Talabre 239 · Arqueros 94 · Oficina Central 8).</a:t>
+              <a:t>438 hallazgos levantados entre 10-02-2023 y 28-07-2026 (Desaladora 95 · Talabre 241 · Arqueros 94 · Oficina Central 8).</a:t>
             </a:r>
             <a:endParaRPr lang="en-US" sz="1350" dirty="0"/>
           </a:p>
@@ -5716,7 +5716,7 @@
                 <a:ea typeface="Cambria" pitchFamily="34" charset="-122"/>
                 <a:cs typeface="Cambria" pitchFamily="34" charset="-120"/>
               </a:rPr>
-              <a:t>93,1%</a:t>
+              <a:t>95,7%</a:t>
             </a:r>
             <a:endParaRPr lang="en-US" sz="3400" dirty="0"/>
           </a:p>
@@ -5794,7 +5794,7 @@
                 <a:ea typeface="Cambria" pitchFamily="34" charset="-122"/>
                 <a:cs typeface="Cambria" pitchFamily="34" charset="-120"/>
               </a:rPr>
-              <a:t>30</a:t>
+              <a:t>19</a:t>
             </a:r>
             <a:endParaRPr lang="en-US" sz="3400" dirty="0"/>
           </a:p>
@@ -6028,7 +6028,7 @@
                 <a:ea typeface="Calibri" pitchFamily="34" charset="-122"/>
                 <a:cs typeface="Calibri" pitchFamily="34" charset="-120"/>
               </a:rPr>
-              <a:t>Corte: 27-07-2026</a:t>
+              <a:t>Corte: 03-08-2026</a:t>
             </a:r>
             <a:endParaRPr lang="en-US" sz="1100" dirty="0"/>
           </a:p>
@@ -6067,7 +6067,7 @@
                 <a:ea typeface="Calibri" pitchFamily="34" charset="-122"/>
                 <a:cs typeface="Calibri" pitchFamily="34" charset="-120"/>
               </a:rPr>
-              <a:t>Fuente: 5640140e-Data_NCR_1.xlsx — hoja «Observaciones» · Corte 27-07-2026 · 436 registros desde 10-02-2023</a:t>
+              <a:t>Fuente: 1e73482e-Data_NCR03082026.xlsx — hoja «Observaciones» · Corte 03-08-2026 · 438 registros desde 10-02-2023</a:t>
             </a:r>
             <a:endParaRPr lang="en-US" sz="850" dirty="0"/>
           </a:p>
@@ -6887,7 +6887,7 @@
                 <a:ea typeface="Calibri" pitchFamily="34" charset="-122"/>
                 <a:cs typeface="Calibri" pitchFamily="34" charset="-120"/>
               </a:rPr>
-              <a:t>76</a:t>
+              <a:t>83</a:t>
             </a:r>
             <a:endParaRPr lang="en-US" sz="1050" dirty="0"/>
           </a:p>
@@ -7242,7 +7242,7 @@
                 <a:ea typeface="Calibri" pitchFamily="34" charset="-122"/>
                 <a:cs typeface="Calibri" pitchFamily="34" charset="-120"/>
               </a:rPr>
-              <a:t>21</a:t>
+              <a:t>28</a:t>
             </a:r>
             <a:endParaRPr lang="en-US" sz="1050" dirty="0"/>
           </a:p>
@@ -7577,7 +7577,7 @@
                 <a:ea typeface="Calibri" pitchFamily="34" charset="-122"/>
                 <a:cs typeface="Calibri" pitchFamily="34" charset="-120"/>
               </a:rPr>
-              <a:t>0</a:t>
+              <a:t>7</a:t>
             </a:r>
             <a:endParaRPr lang="en-US" sz="1050" dirty="0"/>
           </a:p>
@@ -7662,7 +7662,7 @@
             </a:avLst>
           </a:prstGeom>
           <a:solidFill>
-            <a:srgbClr val="12233B"/>
+            <a:srgbClr val="E9EDF2"/>
           </a:solidFill>
           <a:ln/>
         </p:spPr>
@@ -7694,13 +7694,13 @@
             <a:r>
               <a:rPr lang="en-US" sz="1000" b="1" spc="100" kern="0" dirty="0">
                 <a:solidFill>
-                  <a:srgbClr val="E3A55B"/>
-                </a:solidFill>
-                <a:latin typeface="Calibri" pitchFamily="34" charset="0"/>
-                <a:ea typeface="Calibri" pitchFamily="34" charset="-122"/>
-                <a:cs typeface="Calibri" pitchFamily="34" charset="-120"/>
-              </a:rPr>
-              <a:t>SEMANA 21-07-2026 — 27-07-2026</a:t>
+                  <a:srgbClr val="56606E"/>
+                </a:solidFill>
+                <a:latin typeface="Calibri" pitchFamily="34" charset="0"/>
+                <a:ea typeface="Calibri" pitchFamily="34" charset="-122"/>
+                <a:cs typeface="Calibri" pitchFamily="34" charset="-120"/>
+              </a:rPr>
+              <a:t>SEMANA 28-07-2026 — 03-08-2026</a:t>
             </a:r>
             <a:endParaRPr lang="en-US" sz="1000" dirty="0"/>
           </a:p>
@@ -7733,13 +7733,13 @@
             <a:r>
               <a:rPr lang="en-US" sz="1150" dirty="0">
                 <a:solidFill>
-                  <a:srgbClr val="FFFFFF"/>
-                </a:solidFill>
-                <a:latin typeface="Calibri" pitchFamily="34" charset="0"/>
-                <a:ea typeface="Calibri" pitchFamily="34" charset="-122"/>
-                <a:cs typeface="Calibri" pitchFamily="34" charset="-120"/>
-              </a:rPr>
-              <a:t>1 hallazgo nuevo · 0 internos y 1 externo · MECÁNICA 1 · 1 sigue abierto</a:t>
+                  <a:srgbClr val="56606E"/>
+                </a:solidFill>
+                <a:latin typeface="Calibri" pitchFamily="34" charset="0"/>
+                <a:ea typeface="Calibri" pitchFamily="34" charset="-122"/>
+                <a:cs typeface="Calibri" pitchFamily="34" charset="-120"/>
+              </a:rPr>
+              <a:t>Sin hallazgos nuevos en el período.</a:t>
             </a:r>
             <a:endParaRPr lang="en-US" sz="1150" dirty="0"/>
           </a:p>
@@ -7778,7 +7778,7 @@
                 <a:ea typeface="Calibri" pitchFamily="34" charset="-122"/>
                 <a:cs typeface="Calibri" pitchFamily="34" charset="-120"/>
               </a:rPr>
-              <a:t>Fuente: 5640140e-Data_NCR_1.xlsx — hoja «Observaciones» · Corte 27-07-2026 · 436 registros desde 10-02-2023</a:t>
+              <a:t>Fuente: 1e73482e-Data_NCR03082026.xlsx — hoja «Observaciones» · Corte 03-08-2026 · 438 registros desde 10-02-2023</a:t>
             </a:r>
             <a:endParaRPr lang="en-US" sz="850" dirty="0"/>
           </a:p>
@@ -8131,7 +8131,7 @@
                 <a:ea typeface="Calibri" pitchFamily="34" charset="-122"/>
                 <a:cs typeface="Calibri" pitchFamily="34" charset="-120"/>
               </a:rPr>
-              <a:t>239 hallazgos levantados · 53 internos y 186 externos · 12 especialidades involucradas.</a:t>
+              <a:t>241 hallazgos levantados · 53 internos y 188 externos · 12 especialidades involucradas.</a:t>
             </a:r>
             <a:endParaRPr lang="en-US" sz="1350" dirty="0"/>
           </a:p>
@@ -8190,7 +8190,7 @@
                 <a:ea typeface="Cambria" pitchFamily="34" charset="-122"/>
                 <a:cs typeface="Cambria" pitchFamily="34" charset="-120"/>
               </a:rPr>
-              <a:t>89,1%</a:t>
+              <a:t>93,8%</a:t>
             </a:r>
             <a:endParaRPr lang="en-US" sz="3400" dirty="0"/>
           </a:p>
@@ -8268,7 +8268,7 @@
                 <a:ea typeface="Cambria" pitchFamily="34" charset="-122"/>
                 <a:cs typeface="Cambria" pitchFamily="34" charset="-120"/>
               </a:rPr>
-              <a:t>26</a:t>
+              <a:t>15</a:t>
             </a:r>
             <a:endParaRPr lang="en-US" sz="3400" dirty="0"/>
           </a:p>
@@ -8346,7 +8346,7 @@
                 <a:ea typeface="Cambria" pitchFamily="34" charset="-122"/>
                 <a:cs typeface="Cambria" pitchFamily="34" charset="-120"/>
               </a:rPr>
-              <a:t>22 d</a:t>
+              <a:t>23 d</a:t>
             </a:r>
             <a:endParaRPr lang="en-US" sz="3400" dirty="0"/>
           </a:p>
@@ -8424,7 +8424,7 @@
                 <a:ea typeface="Cambria" pitchFamily="34" charset="-122"/>
                 <a:cs typeface="Cambria" pitchFamily="34" charset="-120"/>
               </a:rPr>
-              <a:t>22,2%</a:t>
+              <a:t>22%</a:t>
             </a:r>
             <a:endParaRPr lang="en-US" sz="3400" dirty="0"/>
           </a:p>
@@ -8502,7 +8502,7 @@
                 <a:ea typeface="Calibri" pitchFamily="34" charset="-122"/>
                 <a:cs typeface="Calibri" pitchFamily="34" charset="-120"/>
               </a:rPr>
-              <a:t>Corte: 27-07-2026</a:t>
+              <a:t>Corte: 03-08-2026</a:t>
             </a:r>
             <a:endParaRPr lang="en-US" sz="1100" dirty="0"/>
           </a:p>
@@ -8541,7 +8541,7 @@
                 <a:ea typeface="Calibri" pitchFamily="34" charset="-122"/>
                 <a:cs typeface="Calibri" pitchFamily="34" charset="-120"/>
               </a:rPr>
-              <a:t>Fuente: 5640140e-Data_NCR_1.xlsx — hoja «Observaciones» · Corte 27-07-2026 · 436 registros desde 10-02-2023</a:t>
+              <a:t>Fuente: 1e73482e-Data_NCR03082026.xlsx — hoja «Observaciones» · Corte 03-08-2026 · 438 registros desde 10-02-2023</a:t>
             </a:r>
             <a:endParaRPr lang="en-US" sz="850" dirty="0"/>
           </a:p>
@@ -8807,7 +8807,7 @@
                 <a:ea typeface="Cambria" pitchFamily="34" charset="-122"/>
                 <a:cs typeface="Cambria" pitchFamily="34" charset="-120"/>
               </a:rPr>
-              <a:t>239</a:t>
+              <a:t>241</a:t>
             </a:r>
             <a:endParaRPr lang="en-US" sz="4000" dirty="0"/>
           </a:p>
@@ -8846,7 +8846,7 @@
                 <a:ea typeface="Calibri" pitchFamily="34" charset="-122"/>
                 <a:cs typeface="Calibri" pitchFamily="34" charset="-120"/>
               </a:rPr>
-              <a:t>213 cerrados</a:t>
+              <a:t>226 cerrados</a:t>
             </a:r>
             <a:endParaRPr lang="en-US" sz="1400" dirty="0"/>
           </a:p>
@@ -8924,7 +8924,7 @@
                 <a:ea typeface="Calibri" pitchFamily="34" charset="-122"/>
                 <a:cs typeface="Calibri" pitchFamily="34" charset="-120"/>
               </a:rPr>
-              <a:t>53 internos · 186 externos</a:t>
+              <a:t>53 internos · 188 externos</a:t>
             </a:r>
             <a:endParaRPr lang="en-US" sz="950" dirty="0"/>
           </a:p>
@@ -9017,7 +9017,7 @@
                 <a:ea typeface="Cambria" pitchFamily="34" charset="-122"/>
                 <a:cs typeface="Cambria" pitchFamily="34" charset="-120"/>
               </a:rPr>
-              <a:t>89,1%</a:t>
+              <a:t>93,8%</a:t>
             </a:r>
             <a:endParaRPr lang="en-US" sz="4000" dirty="0"/>
           </a:p>
@@ -9056,7 +9056,7 @@
                 <a:ea typeface="Calibri" pitchFamily="34" charset="-122"/>
                 <a:cs typeface="Calibri" pitchFamily="34" charset="-120"/>
               </a:rPr>
-              <a:t>213/239</a:t>
+              <a:t>226/241</a:t>
             </a:r>
             <a:endParaRPr lang="en-US" sz="1400" dirty="0"/>
           </a:p>
@@ -9134,7 +9134,7 @@
                 <a:ea typeface="Calibri" pitchFamily="34" charset="-122"/>
                 <a:cs typeface="Calibri" pitchFamily="34" charset="-120"/>
               </a:rPr>
-              <a:t>Global del módulo: 93,1%</a:t>
+              <a:t>Global del módulo: 95,7%</a:t>
             </a:r>
             <a:endParaRPr lang="en-US" sz="950" dirty="0"/>
           </a:p>
@@ -9227,7 +9227,7 @@
                 <a:ea typeface="Cambria" pitchFamily="34" charset="-122"/>
                 <a:cs typeface="Cambria" pitchFamily="34" charset="-120"/>
               </a:rPr>
-              <a:t>26</a:t>
+              <a:t>15</a:t>
             </a:r>
             <a:endParaRPr lang="en-US" sz="4000" dirty="0"/>
           </a:p>
@@ -9344,7 +9344,7 @@
                 <a:ea typeface="Calibri" pitchFamily="34" charset="-122"/>
                 <a:cs typeface="Calibri" pitchFamily="34" charset="-120"/>
               </a:rPr>
-              <a:t>6 no aceptado · 16 iniciado · 4 listo para revisión</a:t>
+              <a:t>12 iniciado · 1 no aceptado · 2 listo para revisión</a:t>
             </a:r>
             <a:endParaRPr lang="en-US" sz="950" dirty="0"/>
           </a:p>
@@ -9437,7 +9437,7 @@
                 <a:ea typeface="Cambria" pitchFamily="34" charset="-122"/>
                 <a:cs typeface="Cambria" pitchFamily="34" charset="-120"/>
               </a:rPr>
-              <a:t>22</a:t>
+              <a:t>23</a:t>
             </a:r>
             <a:endParaRPr lang="en-US" sz="4000" dirty="0"/>
           </a:p>
@@ -9554,7 +9554,7 @@
                 <a:ea typeface="Calibri" pitchFamily="34" charset="-122"/>
                 <a:cs typeface="Calibri" pitchFamily="34" charset="-120"/>
               </a:rPr>
-              <a:t>el más lento tomó 269 días</a:t>
+              <a:t>el más lento tomó 389 días</a:t>
             </a:r>
             <a:endParaRPr lang="en-US" sz="950" dirty="0"/>
           </a:p>
@@ -9670,7 +9670,7 @@
                 <a:ea typeface="Cambria" pitchFamily="34" charset="-122"/>
                 <a:cs typeface="Cambria" pitchFamily="34" charset="-120"/>
               </a:rPr>
-              <a:t>22,2%</a:t>
+              <a:t>22%</a:t>
             </a:r>
             <a:endParaRPr lang="en-US" sz="2600" dirty="0"/>
           </a:p>
@@ -9732,7 +9732,7 @@
                 <a:ea typeface="Calibri" pitchFamily="34" charset="-122"/>
                 <a:cs typeface="Calibri" pitchFamily="34" charset="-120"/>
               </a:rPr>
-              <a:t>global del módulo 37,9%</a:t>
+              <a:t>global del módulo 37,8%</a:t>
             </a:r>
             <a:endParaRPr lang="en-US" sz="1000" dirty="0"/>
           </a:p>
@@ -9853,7 +9853,7 @@
                 <a:ea typeface="Calibri" pitchFamily="34" charset="-122"/>
                 <a:cs typeface="Calibri" pitchFamily="34" charset="-120"/>
               </a:rPr>
-              <a:t>9 ab.</a:t>
+              <a:t>3 ab.</a:t>
             </a:r>
             <a:endParaRPr lang="en-US" sz="950" dirty="0"/>
           </a:p>
@@ -9990,7 +9990,7 @@
                 <a:ea typeface="Calibri" pitchFamily="34" charset="-122"/>
                 <a:cs typeface="Calibri" pitchFamily="34" charset="-120"/>
               </a:rPr>
-              <a:t>17 ab.</a:t>
+              <a:t>12 ab.</a:t>
             </a:r>
             <a:endParaRPr lang="en-US" sz="950" dirty="0"/>
           </a:p>
@@ -10029,7 +10029,7 @@
                 <a:ea typeface="Cambria" pitchFamily="34" charset="-122"/>
                 <a:cs typeface="Cambria" pitchFamily="34" charset="-120"/>
               </a:rPr>
-              <a:t>186</a:t>
+              <a:t>188</a:t>
             </a:r>
             <a:endParaRPr lang="en-US" sz="1600" dirty="0"/>
           </a:p>
@@ -10068,7 +10068,7 @@
                 <a:ea typeface="Calibri" pitchFamily="34" charset="-122"/>
                 <a:cs typeface="Calibri" pitchFamily="34" charset="-120"/>
               </a:rPr>
-              <a:t>Fuente: 5640140e-Data_NCR_1.xlsx — hoja «Observaciones» · Corte 27-07-2026 · 436 registros desde 10-02-2023</a:t>
+              <a:t>Fuente: 1e73482e-Data_NCR03082026.xlsx — hoja «Observaciones» · Corte 03-08-2026 · 438 registros desde 10-02-2023</a:t>
             </a:r>
             <a:endParaRPr lang="en-US" sz="850" dirty="0"/>
           </a:p>
@@ -10319,7 +10319,7 @@
                 <a:ea typeface="Calibri" pitchFamily="34" charset="-122"/>
                 <a:cs typeface="Calibri" pitchFamily="34" charset="-120"/>
               </a:rPr>
-              <a:t>26 hallazgos siguen abiertos; 7 con más de 180 días. Se listan del más antiguo al más reciente.</a:t>
+              <a:t>15 hallazgos siguen abiertos; 3 con más de 180 días. Se listan del más antiguo al más reciente.</a:t>
             </a:r>
             <a:endParaRPr lang="en-US" sz="1350" dirty="0"/>
           </a:p>
@@ -10693,7 +10693,7 @@
                 <a:ea typeface="Calibri" pitchFamily="34" charset="-122"/>
                 <a:cs typeface="Calibri" pitchFamily="34" charset="-120"/>
               </a:rPr>
-              <a:t>20</a:t>
+              <a:t>21</a:t>
             </a:r>
             <a:endParaRPr lang="en-US" sz="1050" dirty="0"/>
           </a:p>
@@ -10810,7 +10810,7 @@
                 <a:ea typeface="Calibri" pitchFamily="34" charset="-122"/>
                 <a:cs typeface="Calibri" pitchFamily="34" charset="-120"/>
               </a:rPr>
-              <a:t>ADQUISICIONES</a:t>
+              <a:t>EXPEDITORÍA</a:t>
             </a:r>
             <a:endParaRPr lang="en-US" sz="1050" dirty="0"/>
           </a:p>
@@ -10849,7 +10849,7 @@
                 <a:ea typeface="Calibri" pitchFamily="34" charset="-122"/>
                 <a:cs typeface="Calibri" pitchFamily="34" charset="-120"/>
               </a:rPr>
-              <a:t>Alejandro Rivera G.</a:t>
+              <a:t>Alvaro Cortés V.</a:t>
             </a:r>
             <a:endParaRPr lang="en-US" sz="1050" dirty="0"/>
           </a:p>
@@ -10888,7 +10888,7 @@
                 <a:ea typeface="Calibri" pitchFamily="34" charset="-122"/>
                 <a:cs typeface="Calibri" pitchFamily="34" charset="-120"/>
               </a:rPr>
-              <a:t>No aceptado</a:t>
+              <a:t>Iniciado</a:t>
             </a:r>
             <a:endParaRPr lang="en-US" sz="1050" dirty="0"/>
           </a:p>
@@ -10927,7 +10927,7 @@
                 <a:ea typeface="Calibri" pitchFamily="34" charset="-122"/>
                 <a:cs typeface="Calibri" pitchFamily="34" charset="-120"/>
               </a:rPr>
-              <a:t>385</a:t>
+              <a:t>392</a:t>
             </a:r>
             <a:endParaRPr lang="en-US" sz="1050" dirty="0"/>
           </a:p>
@@ -11048,7 +11048,7 @@
                 <a:ea typeface="Calibri" pitchFamily="34" charset="-122"/>
                 <a:cs typeface="Calibri" pitchFamily="34" charset="-120"/>
               </a:rPr>
-              <a:t>21</a:t>
+              <a:t>72</a:t>
             </a:r>
             <a:endParaRPr lang="en-US" sz="1050" dirty="0"/>
           </a:p>
@@ -11282,7 +11282,7 @@
                 <a:ea typeface="Calibri" pitchFamily="34" charset="-122"/>
                 <a:cs typeface="Calibri" pitchFamily="34" charset="-120"/>
               </a:rPr>
-              <a:t>385</a:t>
+              <a:t>328</a:t>
             </a:r>
             <a:endParaRPr lang="en-US" sz="1050" dirty="0"/>
           </a:p>
@@ -11321,7 +11321,7 @@
                 <a:ea typeface="Calibri" pitchFamily="34" charset="-122"/>
                 <a:cs typeface="Calibri" pitchFamily="34" charset="-120"/>
               </a:rPr>
-              <a:t>Incumplimiento a Plan de Calidad de…</a:t>
+              <a:t>Incumplimiento a la recepción de ma…</a:t>
             </a:r>
             <a:endParaRPr lang="en-US" sz="1000" dirty="0"/>
           </a:p>
@@ -11383,7 +11383,7 @@
                 <a:ea typeface="Calibri" pitchFamily="34" charset="-122"/>
                 <a:cs typeface="Calibri" pitchFamily="34" charset="-120"/>
               </a:rPr>
-              <a:t>71</a:t>
+              <a:t>142</a:t>
             </a:r>
             <a:endParaRPr lang="en-US" sz="1050" dirty="0"/>
           </a:p>
@@ -11500,7 +11500,7 @@
                 <a:ea typeface="Calibri" pitchFamily="34" charset="-122"/>
                 <a:cs typeface="Calibri" pitchFamily="34" charset="-120"/>
               </a:rPr>
-              <a:t>ADQUISICIONES</a:t>
+              <a:t>EXPEDITORÍA</a:t>
             </a:r>
             <a:endParaRPr lang="en-US" sz="1050" dirty="0"/>
           </a:p>
@@ -11539,7 +11539,7 @@
                 <a:ea typeface="Calibri" pitchFamily="34" charset="-122"/>
                 <a:cs typeface="Calibri" pitchFamily="34" charset="-120"/>
               </a:rPr>
-              <a:t>Alejandro Rivera G.</a:t>
+              <a:t>Alvaro Cortés V.</a:t>
             </a:r>
             <a:endParaRPr lang="en-US" sz="1050" dirty="0"/>
           </a:p>
@@ -11578,7 +11578,7 @@
                 <a:ea typeface="Calibri" pitchFamily="34" charset="-122"/>
                 <a:cs typeface="Calibri" pitchFamily="34" charset="-120"/>
               </a:rPr>
-              <a:t>No aceptado</a:t>
+              <a:t>Iniciado</a:t>
             </a:r>
             <a:endParaRPr lang="en-US" sz="1050" dirty="0"/>
           </a:p>
@@ -11617,7 +11617,7 @@
                 <a:ea typeface="Calibri" pitchFamily="34" charset="-122"/>
                 <a:cs typeface="Calibri" pitchFamily="34" charset="-120"/>
               </a:rPr>
-              <a:t>321</a:t>
+              <a:t>224</a:t>
             </a:r>
             <a:endParaRPr lang="en-US" sz="1050" dirty="0"/>
           </a:p>
@@ -11656,7 +11656,7 @@
                 <a:ea typeface="Calibri" pitchFamily="34" charset="-122"/>
                 <a:cs typeface="Calibri" pitchFamily="34" charset="-120"/>
               </a:rPr>
-              <a:t>Incumplimiento pto. 6.1 PIE maestra…</a:t>
+              <a:t>Daños manguerotes en recepción/desc…</a:t>
             </a:r>
             <a:endParaRPr lang="en-US" sz="1000" dirty="0"/>
           </a:p>
@@ -11738,7 +11738,7 @@
                 <a:ea typeface="Calibri" pitchFamily="34" charset="-122"/>
                 <a:cs typeface="Calibri" pitchFamily="34" charset="-120"/>
               </a:rPr>
-              <a:t>72</a:t>
+              <a:t>192</a:t>
             </a:r>
             <a:endParaRPr lang="en-US" sz="1050" dirty="0"/>
           </a:p>
@@ -11810,13 +11810,13 @@
             <a:r>
               <a:rPr lang="en-US" sz="1050" b="1" dirty="0">
                 <a:solidFill>
-                  <a:srgbClr val="2E6FB5"/>
-                </a:solidFill>
-                <a:latin typeface="Calibri" pitchFamily="34" charset="0"/>
-                <a:ea typeface="Calibri" pitchFamily="34" charset="-122"/>
-                <a:cs typeface="Calibri" pitchFamily="34" charset="-120"/>
-              </a:rPr>
-              <a:t>Interna (Besalco)</a:t>
+                  <a:srgbClr val="C87A32"/>
+                </a:solidFill>
+                <a:latin typeface="Calibri" pitchFamily="34" charset="0"/>
+                <a:ea typeface="Calibri" pitchFamily="34" charset="-122"/>
+                <a:cs typeface="Calibri" pitchFamily="34" charset="-120"/>
+              </a:rPr>
+              <a:t>Externa · Cliente</a:t>
             </a:r>
             <a:endParaRPr lang="en-US" sz="1050" dirty="0"/>
           </a:p>
@@ -11855,7 +11855,7 @@
                 <a:ea typeface="Calibri" pitchFamily="34" charset="-122"/>
                 <a:cs typeface="Calibri" pitchFamily="34" charset="-120"/>
               </a:rPr>
-              <a:t>EXPEDITORÍA</a:t>
+              <a:t>OO.CC</a:t>
             </a:r>
             <a:endParaRPr lang="en-US" sz="1050" dirty="0"/>
           </a:p>
@@ -11894,7 +11894,7 @@
                 <a:ea typeface="Calibri" pitchFamily="34" charset="-122"/>
                 <a:cs typeface="Calibri" pitchFamily="34" charset="-120"/>
               </a:rPr>
-              <a:t>Alvaro Cortés V.</a:t>
+              <a:t>Sebastián Ramos</a:t>
             </a:r>
             <a:endParaRPr lang="en-US" sz="1050" dirty="0"/>
           </a:p>
@@ -11964,15 +11964,15 @@
               <a:buNone/>
             </a:pPr>
             <a:r>
-              <a:rPr lang="en-US" sz="1050" b="1" dirty="0">
-                <a:solidFill>
-                  <a:srgbClr val="C0392B"/>
-                </a:solidFill>
-                <a:latin typeface="Calibri" pitchFamily="34" charset="0"/>
-                <a:ea typeface="Calibri" pitchFamily="34" charset="-122"/>
-                <a:cs typeface="Calibri" pitchFamily="34" charset="-120"/>
-              </a:rPr>
-              <a:t>321</a:t>
+              <a:rPr lang="en-US" sz="1050" dirty="0">
+                <a:solidFill>
+                  <a:srgbClr val="1A2433"/>
+                </a:solidFill>
+                <a:latin typeface="Calibri" pitchFamily="34" charset="0"/>
+                <a:ea typeface="Calibri" pitchFamily="34" charset="-122"/>
+                <a:cs typeface="Calibri" pitchFamily="34" charset="-120"/>
+              </a:rPr>
+              <a:t>139</a:t>
             </a:r>
             <a:endParaRPr lang="en-US" sz="1050" dirty="0"/>
           </a:p>
@@ -12011,7 +12011,7 @@
                 <a:ea typeface="Calibri" pitchFamily="34" charset="-122"/>
                 <a:cs typeface="Calibri" pitchFamily="34" charset="-120"/>
               </a:rPr>
-              <a:t>Incumplimiento a la recepción de ma…</a:t>
+              <a:t>Fundaciones sin relleno estructural…</a:t>
             </a:r>
             <a:endParaRPr lang="en-US" sz="1000" dirty="0"/>
           </a:p>
@@ -12073,7 +12073,7 @@
                 <a:ea typeface="Calibri" pitchFamily="34" charset="-122"/>
                 <a:cs typeface="Calibri" pitchFamily="34" charset="-120"/>
               </a:rPr>
-              <a:t>86</a:t>
+              <a:t>198</a:t>
             </a:r>
             <a:endParaRPr lang="en-US" sz="1050" dirty="0"/>
           </a:p>
@@ -12112,7 +12112,7 @@
                 <a:ea typeface="Calibri" pitchFamily="34" charset="-122"/>
                 <a:cs typeface="Calibri" pitchFamily="34" charset="-120"/>
               </a:rPr>
-              <a:t>No Conformidad</a:t>
+              <a:t>Producto No Conforme</a:t>
             </a:r>
             <a:endParaRPr lang="en-US" sz="1050" dirty="0"/>
           </a:p>
@@ -12145,13 +12145,13 @@
             <a:r>
               <a:rPr lang="en-US" sz="1050" b="1" dirty="0">
                 <a:solidFill>
-                  <a:srgbClr val="2E6FB5"/>
-                </a:solidFill>
-                <a:latin typeface="Calibri" pitchFamily="34" charset="0"/>
-                <a:ea typeface="Calibri" pitchFamily="34" charset="-122"/>
-                <a:cs typeface="Calibri" pitchFamily="34" charset="-120"/>
-              </a:rPr>
-              <a:t>Interna (Besalco)</a:t>
+                  <a:srgbClr val="C87A32"/>
+                </a:solidFill>
+                <a:latin typeface="Calibri" pitchFamily="34" charset="0"/>
+                <a:ea typeface="Calibri" pitchFamily="34" charset="-122"/>
+                <a:cs typeface="Calibri" pitchFamily="34" charset="-120"/>
+              </a:rPr>
+              <a:t>Externa · Cliente</a:t>
             </a:r>
             <a:endParaRPr lang="en-US" sz="1050" dirty="0"/>
           </a:p>
@@ -12190,7 +12190,7 @@
                 <a:ea typeface="Calibri" pitchFamily="34" charset="-122"/>
                 <a:cs typeface="Calibri" pitchFamily="34" charset="-120"/>
               </a:rPr>
-              <a:t>ADQUISICIONES</a:t>
+              <a:t>OO.CC</a:t>
             </a:r>
             <a:endParaRPr lang="en-US" sz="1050" dirty="0"/>
           </a:p>
@@ -12229,7 +12229,7 @@
                 <a:ea typeface="Calibri" pitchFamily="34" charset="-122"/>
                 <a:cs typeface="Calibri" pitchFamily="34" charset="-120"/>
               </a:rPr>
-              <a:t>Alejandro Rivera G.</a:t>
+              <a:t>Wladimir Carvajal …</a:t>
             </a:r>
             <a:endParaRPr lang="en-US" sz="1050" dirty="0"/>
           </a:p>
@@ -12268,7 +12268,7 @@
                 <a:ea typeface="Calibri" pitchFamily="34" charset="-122"/>
                 <a:cs typeface="Calibri" pitchFamily="34" charset="-120"/>
               </a:rPr>
-              <a:t>No aceptado</a:t>
+              <a:t>Iniciado</a:t>
             </a:r>
             <a:endParaRPr lang="en-US" sz="1050" dirty="0"/>
           </a:p>
@@ -12299,15 +12299,15 @@
               <a:buNone/>
             </a:pPr>
             <a:r>
-              <a:rPr lang="en-US" sz="1050" b="1" dirty="0">
-                <a:solidFill>
-                  <a:srgbClr val="C0392B"/>
-                </a:solidFill>
-                <a:latin typeface="Calibri" pitchFamily="34" charset="0"/>
-                <a:ea typeface="Calibri" pitchFamily="34" charset="-122"/>
-                <a:cs typeface="Calibri" pitchFamily="34" charset="-120"/>
-              </a:rPr>
-              <a:t>298</a:t>
+              <a:rPr lang="en-US" sz="1050" dirty="0">
+                <a:solidFill>
+                  <a:srgbClr val="1A2433"/>
+                </a:solidFill>
+                <a:latin typeface="Calibri" pitchFamily="34" charset="0"/>
+                <a:ea typeface="Calibri" pitchFamily="34" charset="-122"/>
+                <a:cs typeface="Calibri" pitchFamily="34" charset="-120"/>
+              </a:rPr>
+              <a:t>133</a:t>
             </a:r>
             <a:endParaRPr lang="en-US" sz="1050" dirty="0"/>
           </a:p>
@@ -12346,7 +12346,7 @@
                 <a:ea typeface="Calibri" pitchFamily="34" charset="-122"/>
                 <a:cs typeface="Calibri" pitchFamily="34" charset="-120"/>
               </a:rPr>
-              <a:t>Incumplimiento liberación suministr…</a:t>
+              <a:t>Corte en geomembrana HDPE instalada…</a:t>
             </a:r>
             <a:endParaRPr lang="en-US" sz="1000" dirty="0"/>
           </a:p>
@@ -12428,7 +12428,7 @@
                 <a:ea typeface="Calibri" pitchFamily="34" charset="-122"/>
                 <a:cs typeface="Calibri" pitchFamily="34" charset="-120"/>
               </a:rPr>
-              <a:t>140</a:t>
+              <a:t>205</a:t>
             </a:r>
             <a:endParaRPr lang="en-US" sz="1050" dirty="0"/>
           </a:p>
@@ -12467,7 +12467,7 @@
                 <a:ea typeface="Calibri" pitchFamily="34" charset="-122"/>
                 <a:cs typeface="Calibri" pitchFamily="34" charset="-120"/>
               </a:rPr>
-              <a:t>No Conformidad</a:t>
+              <a:t>Producto No Conforme</a:t>
             </a:r>
             <a:endParaRPr lang="en-US" sz="1050" dirty="0"/>
           </a:p>
@@ -12500,13 +12500,13 @@
             <a:r>
               <a:rPr lang="en-US" sz="1050" b="1" dirty="0">
                 <a:solidFill>
-                  <a:srgbClr val="2E6FB5"/>
-                </a:solidFill>
-                <a:latin typeface="Calibri" pitchFamily="34" charset="0"/>
-                <a:ea typeface="Calibri" pitchFamily="34" charset="-122"/>
-                <a:cs typeface="Calibri" pitchFamily="34" charset="-120"/>
-              </a:rPr>
-              <a:t>Interna (Besalco)</a:t>
+                  <a:srgbClr val="C87A32"/>
+                </a:solidFill>
+                <a:latin typeface="Calibri" pitchFamily="34" charset="0"/>
+                <a:ea typeface="Calibri" pitchFamily="34" charset="-122"/>
+                <a:cs typeface="Calibri" pitchFamily="34" charset="-120"/>
+              </a:rPr>
+              <a:t>Externa · Cliente</a:t>
             </a:r>
             <a:endParaRPr lang="en-US" sz="1050" dirty="0"/>
           </a:p>
@@ -12545,7 +12545,7 @@
                 <a:ea typeface="Calibri" pitchFamily="34" charset="-122"/>
                 <a:cs typeface="Calibri" pitchFamily="34" charset="-120"/>
               </a:rPr>
-              <a:t>ADQUISICIONES</a:t>
+              <a:t>OO.CC</a:t>
             </a:r>
             <a:endParaRPr lang="en-US" sz="1050" dirty="0"/>
           </a:p>
@@ -12584,7 +12584,7 @@
                 <a:ea typeface="Calibri" pitchFamily="34" charset="-122"/>
                 <a:cs typeface="Calibri" pitchFamily="34" charset="-120"/>
               </a:rPr>
-              <a:t>Alejandro Rivera G.</a:t>
+              <a:t>Sebastián Ramos</a:t>
             </a:r>
             <a:endParaRPr lang="en-US" sz="1050" dirty="0"/>
           </a:p>
@@ -12654,15 +12654,15 @@
               <a:buNone/>
             </a:pPr>
             <a:r>
-              <a:rPr lang="en-US" sz="1050" b="1" dirty="0">
-                <a:solidFill>
-                  <a:srgbClr val="C0392B"/>
-                </a:solidFill>
-                <a:latin typeface="Calibri" pitchFamily="34" charset="0"/>
-                <a:ea typeface="Calibri" pitchFamily="34" charset="-122"/>
-                <a:cs typeface="Calibri" pitchFamily="34" charset="-120"/>
-              </a:rPr>
-              <a:t>222</a:t>
+              <a:rPr lang="en-US" sz="1050" dirty="0">
+                <a:solidFill>
+                  <a:srgbClr val="1A2433"/>
+                </a:solidFill>
+                <a:latin typeface="Calibri" pitchFamily="34" charset="0"/>
+                <a:ea typeface="Calibri" pitchFamily="34" charset="-122"/>
+                <a:cs typeface="Calibri" pitchFamily="34" charset="-120"/>
+              </a:rPr>
+              <a:t>119</a:t>
             </a:r>
             <a:endParaRPr lang="en-US" sz="1050" dirty="0"/>
           </a:p>
@@ -12701,7 +12701,7 @@
                 <a:ea typeface="Calibri" pitchFamily="34" charset="-122"/>
                 <a:cs typeface="Calibri" pitchFamily="34" charset="-120"/>
               </a:rPr>
-              <a:t>Incumplimiento al PIE subcontrato S…</a:t>
+              <a:t>Solución proyectada asociada al ele…</a:t>
             </a:r>
             <a:endParaRPr lang="en-US" sz="1000" dirty="0"/>
           </a:p>
@@ -12763,7 +12763,7 @@
                 <a:ea typeface="Calibri" pitchFamily="34" charset="-122"/>
                 <a:cs typeface="Calibri" pitchFamily="34" charset="-120"/>
               </a:rPr>
-              <a:t>142</a:t>
+              <a:t>209</a:t>
             </a:r>
             <a:endParaRPr lang="en-US" sz="1050" dirty="0"/>
           </a:p>
@@ -12835,13 +12835,13 @@
             <a:r>
               <a:rPr lang="en-US" sz="1050" b="1" dirty="0">
                 <a:solidFill>
-                  <a:srgbClr val="2E6FB5"/>
-                </a:solidFill>
-                <a:latin typeface="Calibri" pitchFamily="34" charset="0"/>
-                <a:ea typeface="Calibri" pitchFamily="34" charset="-122"/>
-                <a:cs typeface="Calibri" pitchFamily="34" charset="-120"/>
-              </a:rPr>
-              <a:t>Interna (Besalco)</a:t>
+                  <a:srgbClr val="C87A32"/>
+                </a:solidFill>
+                <a:latin typeface="Calibri" pitchFamily="34" charset="0"/>
+                <a:ea typeface="Calibri" pitchFamily="34" charset="-122"/>
+                <a:cs typeface="Calibri" pitchFamily="34" charset="-120"/>
+              </a:rPr>
+              <a:t>Externa · Cliente</a:t>
             </a:r>
             <a:endParaRPr lang="en-US" sz="1050" dirty="0"/>
           </a:p>
@@ -12880,7 +12880,7 @@
                 <a:ea typeface="Calibri" pitchFamily="34" charset="-122"/>
                 <a:cs typeface="Calibri" pitchFamily="34" charset="-120"/>
               </a:rPr>
-              <a:t>EXPEDITORÍA</a:t>
+              <a:t>OO.CC</a:t>
             </a:r>
             <a:endParaRPr lang="en-US" sz="1050" dirty="0"/>
           </a:p>
@@ -12919,7 +12919,7 @@
                 <a:ea typeface="Calibri" pitchFamily="34" charset="-122"/>
                 <a:cs typeface="Calibri" pitchFamily="34" charset="-120"/>
               </a:rPr>
-              <a:t>Alvaro Cortés V.</a:t>
+              <a:t>Sebastián Ramos</a:t>
             </a:r>
             <a:endParaRPr lang="en-US" sz="1050" dirty="0"/>
           </a:p>
@@ -12989,15 +12989,15 @@
               <a:buNone/>
             </a:pPr>
             <a:r>
-              <a:rPr lang="en-US" sz="1050" b="1" dirty="0">
-                <a:solidFill>
-                  <a:srgbClr val="C0392B"/>
-                </a:solidFill>
-                <a:latin typeface="Calibri" pitchFamily="34" charset="0"/>
-                <a:ea typeface="Calibri" pitchFamily="34" charset="-122"/>
-                <a:cs typeface="Calibri" pitchFamily="34" charset="-120"/>
-              </a:rPr>
-              <a:t>217</a:t>
+              <a:rPr lang="en-US" sz="1050" dirty="0">
+                <a:solidFill>
+                  <a:srgbClr val="1A2433"/>
+                </a:solidFill>
+                <a:latin typeface="Calibri" pitchFamily="34" charset="0"/>
+                <a:ea typeface="Calibri" pitchFamily="34" charset="-122"/>
+                <a:cs typeface="Calibri" pitchFamily="34" charset="-120"/>
+              </a:rPr>
+              <a:t>111</a:t>
             </a:r>
             <a:endParaRPr lang="en-US" sz="1050" dirty="0"/>
           </a:p>
@@ -13036,7 +13036,7 @@
                 <a:ea typeface="Calibri" pitchFamily="34" charset="-122"/>
                 <a:cs typeface="Calibri" pitchFamily="34" charset="-120"/>
               </a:rPr>
-              <a:t>Daños manguerotes en recepción/desc…</a:t>
+              <a:t>Sector Manifold EBMS, Fundaciones F…</a:t>
             </a:r>
             <a:endParaRPr lang="en-US" sz="1000" dirty="0"/>
           </a:p>
@@ -13118,7 +13118,7 @@
                 <a:ea typeface="Calibri" pitchFamily="34" charset="-122"/>
                 <a:cs typeface="Calibri" pitchFamily="34" charset="-120"/>
               </a:rPr>
-              <a:t>182</a:t>
+              <a:t>228</a:t>
             </a:r>
             <a:endParaRPr lang="en-US" sz="1050" dirty="0"/>
           </a:p>
@@ -13157,7 +13157,7 @@
                 <a:ea typeface="Calibri" pitchFamily="34" charset="-122"/>
                 <a:cs typeface="Calibri" pitchFamily="34" charset="-120"/>
               </a:rPr>
-              <a:t>Producto No Conforme</a:t>
+              <a:t>No Conformidad</a:t>
             </a:r>
             <a:endParaRPr lang="en-US" sz="1050" dirty="0"/>
           </a:p>
@@ -13235,7 +13235,7 @@
                 <a:ea typeface="Calibri" pitchFamily="34" charset="-122"/>
                 <a:cs typeface="Calibri" pitchFamily="34" charset="-120"/>
               </a:rPr>
-              <a:t>OO.CC</a:t>
+              <a:t>CALIDAD</a:t>
             </a:r>
             <a:endParaRPr lang="en-US" sz="1050" dirty="0"/>
           </a:p>
@@ -13274,7 +13274,7 @@
                 <a:ea typeface="Calibri" pitchFamily="34" charset="-122"/>
                 <a:cs typeface="Calibri" pitchFamily="34" charset="-120"/>
               </a:rPr>
-              <a:t>Sebastián Ramos</a:t>
+              <a:t>Mauricio Soto B.</a:t>
             </a:r>
             <a:endParaRPr lang="en-US" sz="1050" dirty="0"/>
           </a:p>
@@ -13313,7 +13313,7 @@
                 <a:ea typeface="Calibri" pitchFamily="34" charset="-122"/>
                 <a:cs typeface="Calibri" pitchFamily="34" charset="-120"/>
               </a:rPr>
-              <a:t>Iniciado</a:t>
+              <a:t>Listo para revisi…</a:t>
             </a:r>
             <a:endParaRPr lang="en-US" sz="1050" dirty="0"/>
           </a:p>
@@ -13352,7 +13352,7 @@
                 <a:ea typeface="Calibri" pitchFamily="34" charset="-122"/>
                 <a:cs typeface="Calibri" pitchFamily="34" charset="-120"/>
               </a:rPr>
-              <a:t>160</a:t>
+              <a:t>55</a:t>
             </a:r>
             <a:endParaRPr lang="en-US" sz="1050" dirty="0"/>
           </a:p>
@@ -13391,7 +13391,7 @@
                 <a:ea typeface="Calibri" pitchFamily="34" charset="-122"/>
                 <a:cs typeface="Calibri" pitchFamily="34" charset="-120"/>
               </a:rPr>
-              <a:t>Postes en esquinas eje B/1 y eje B/…</a:t>
+              <a:t>Durante la auditoría se identificar…</a:t>
             </a:r>
             <a:endParaRPr lang="en-US" sz="1000" dirty="0"/>
           </a:p>
@@ -13453,7 +13453,7 @@
                 <a:ea typeface="Calibri" pitchFamily="34" charset="-122"/>
                 <a:cs typeface="Calibri" pitchFamily="34" charset="-120"/>
               </a:rPr>
-              <a:t>192</a:t>
+              <a:t>230</a:t>
             </a:r>
             <a:endParaRPr lang="en-US" sz="1050" dirty="0"/>
           </a:p>
@@ -13570,7 +13570,7 @@
                 <a:ea typeface="Calibri" pitchFamily="34" charset="-122"/>
                 <a:cs typeface="Calibri" pitchFamily="34" charset="-120"/>
               </a:rPr>
-              <a:t>OO.CC</a:t>
+              <a:t>CALIDAD</a:t>
             </a:r>
             <a:endParaRPr lang="en-US" sz="1050" dirty="0"/>
           </a:p>
@@ -13609,7 +13609,7 @@
                 <a:ea typeface="Calibri" pitchFamily="34" charset="-122"/>
                 <a:cs typeface="Calibri" pitchFamily="34" charset="-120"/>
               </a:rPr>
-              <a:t>Sebastián Ramos</a:t>
+              <a:t>Mauricio Soto B.</a:t>
             </a:r>
             <a:endParaRPr lang="en-US" sz="1050" dirty="0"/>
           </a:p>
@@ -13687,7 +13687,7 @@
                 <a:ea typeface="Calibri" pitchFamily="34" charset="-122"/>
                 <a:cs typeface="Calibri" pitchFamily="34" charset="-120"/>
               </a:rPr>
-              <a:t>132</a:t>
+              <a:t>55</a:t>
             </a:r>
             <a:endParaRPr lang="en-US" sz="1050" dirty="0"/>
           </a:p>
@@ -13726,7 +13726,7 @@
                 <a:ea typeface="Calibri" pitchFamily="34" charset="-122"/>
                 <a:cs typeface="Calibri" pitchFamily="34" charset="-120"/>
               </a:rPr>
-              <a:t>Fundaciones sin relleno estructural…</a:t>
+              <a:t>No se evidenció un Plan de Cierre d…</a:t>
             </a:r>
             <a:endParaRPr lang="en-US" sz="1000" dirty="0"/>
           </a:p>
@@ -13788,7 +13788,7 @@
                 <a:ea typeface="Calibri" pitchFamily="34" charset="-122"/>
                 <a:cs typeface="Calibri" pitchFamily="34" charset="-120"/>
               </a:rPr>
-              <a:t>Se listan los 9 más antiguos de 26 abiertos; el detalle completo está en el panel.</a:t>
+              <a:t>Se listan los 9 más antiguos de 15 abiertos; el detalle completo está en el panel.</a:t>
             </a:r>
             <a:endParaRPr lang="en-US" sz="950" dirty="0"/>
           </a:p>
@@ -13849,7 +13849,7 @@
                 <a:ea typeface="Calibri" pitchFamily="34" charset="-122"/>
                 <a:cs typeface="Calibri" pitchFamily="34" charset="-120"/>
               </a:rPr>
-              <a:t>SEMANA 21-07-2026 — 27-07-2026</a:t>
+              <a:t>SEMANA 28-07-2026 — 03-08-2026</a:t>
             </a:r>
             <a:endParaRPr lang="en-US" sz="1000" dirty="0"/>
           </a:p>
@@ -13888,7 +13888,7 @@
                 <a:ea typeface="Calibri" pitchFamily="34" charset="-122"/>
                 <a:cs typeface="Calibri" pitchFamily="34" charset="-120"/>
               </a:rPr>
-              <a:t>3 hallazgos nuevos · 0 internos y 3 externos · OO.CC 3 · 3 siguen abiertos</a:t>
+              <a:t>1 hallazgo nuevo · 0 internos y 1 externo · CALIDAD 1 · 1 sigue abierto</a:t>
             </a:r>
             <a:endParaRPr lang="en-US" sz="1150" dirty="0"/>
           </a:p>
@@ -13927,7 +13927,7 @@
                 <a:ea typeface="Calibri" pitchFamily="34" charset="-122"/>
                 <a:cs typeface="Calibri" pitchFamily="34" charset="-120"/>
               </a:rPr>
-              <a:t>Fuente: 5640140e-Data_NCR_1.xlsx — hoja «Observaciones» · Corte 27-07-2026 · 436 registros desde 10-02-2023</a:t>
+              <a:t>Fuente: 1e73482e-Data_NCR03082026.xlsx — hoja «Observaciones» · Corte 03-08-2026 · 438 registros desde 10-02-2023</a:t>
             </a:r>
             <a:endParaRPr lang="en-US" sz="850" dirty="0"/>
           </a:p>
@@ -14651,7 +14651,7 @@
                 <a:ea typeface="Calibri" pitchFamily="34" charset="-122"/>
                 <a:cs typeface="Calibri" pitchFamily="34" charset="-120"/>
               </a:rPr>
-              <a:t>Corte: 27-07-2026</a:t>
+              <a:t>Corte: 03-08-2026</a:t>
             </a:r>
             <a:endParaRPr lang="en-US" sz="1100" dirty="0"/>
           </a:p>
@@ -14690,7 +14690,7 @@
                 <a:ea typeface="Calibri" pitchFamily="34" charset="-122"/>
                 <a:cs typeface="Calibri" pitchFamily="34" charset="-120"/>
               </a:rPr>
-              <a:t>Fuente: 5640140e-Data_NCR_1.xlsx — hoja «Observaciones» · Corte 27-07-2026 · 436 registros desde 10-02-2023</a:t>
+              <a:t>Fuente: 1e73482e-Data_NCR03082026.xlsx — hoja «Observaciones» · Corte 03-08-2026 · 438 registros desde 10-02-2023</a:t>
             </a:r>
             <a:endParaRPr lang="en-US" sz="850" dirty="0"/>
           </a:p>
@@ -15283,7 +15283,7 @@
                 <a:ea typeface="Calibri" pitchFamily="34" charset="-122"/>
                 <a:cs typeface="Calibri" pitchFamily="34" charset="-120"/>
               </a:rPr>
-              <a:t>Global del módulo: 93,1%</a:t>
+              <a:t>Global del módulo: 95,7%</a:t>
             </a:r>
             <a:endParaRPr lang="en-US" sz="950" dirty="0"/>
           </a:p>
@@ -15881,7 +15881,7 @@
                 <a:ea typeface="Calibri" pitchFamily="34" charset="-122"/>
                 <a:cs typeface="Calibri" pitchFamily="34" charset="-120"/>
               </a:rPr>
-              <a:t>global del módulo 37,9%</a:t>
+              <a:t>global del módulo 37,8%</a:t>
             </a:r>
             <a:endParaRPr lang="en-US" sz="1000" dirty="0"/>
           </a:p>
@@ -16354,7 +16354,7 @@
                 <a:ea typeface="Calibri" pitchFamily="34" charset="-122"/>
                 <a:cs typeface="Calibri" pitchFamily="34" charset="-120"/>
               </a:rPr>
-              <a:t>Fuente: 5640140e-Data_NCR_1.xlsx — hoja «Observaciones» · Corte 27-07-2026 · 436 registros desde 10-02-2023</a:t>
+              <a:t>Fuente: 1e73482e-Data_NCR03082026.xlsx — hoja «Observaciones» · Corte 03-08-2026 · 438 registros desde 10-02-2023</a:t>
             </a:r>
             <a:endParaRPr lang="en-US" sz="850" dirty="0"/>
           </a:p>
@@ -17213,7 +17213,7 @@
                 <a:ea typeface="Calibri" pitchFamily="34" charset="-122"/>
                 <a:cs typeface="Calibri" pitchFamily="34" charset="-120"/>
               </a:rPr>
-              <a:t>63</a:t>
+              <a:t>70</a:t>
             </a:r>
             <a:endParaRPr lang="en-US" sz="1050" dirty="0"/>
           </a:p>
@@ -17336,7 +17336,7 @@
                 <a:ea typeface="Calibri" pitchFamily="34" charset="-122"/>
                 <a:cs typeface="Calibri" pitchFamily="34" charset="-120"/>
               </a:rPr>
-              <a:t>SEMANA 21-07-2026 — 27-07-2026</a:t>
+              <a:t>SEMANA 28-07-2026 — 03-08-2026</a:t>
             </a:r>
             <a:endParaRPr lang="en-US" sz="1000" dirty="0"/>
           </a:p>
@@ -17414,7 +17414,7 @@
                 <a:ea typeface="Calibri" pitchFamily="34" charset="-122"/>
                 <a:cs typeface="Calibri" pitchFamily="34" charset="-120"/>
               </a:rPr>
-              <a:t>Fuente: 5640140e-Data_NCR_1.xlsx — hoja «Observaciones» · Corte 27-07-2026 · 436 registros desde 10-02-2023</a:t>
+              <a:t>Fuente: 1e73482e-Data_NCR03082026.xlsx — hoja «Observaciones» · Corte 03-08-2026 · 438 registros desde 10-02-2023</a:t>
             </a:r>
             <a:endParaRPr lang="en-US" sz="850" dirty="0"/>
           </a:p>
@@ -17719,7 +17719,7 @@
                 <a:ea typeface="Cambria" pitchFamily="34" charset="-122"/>
                 <a:cs typeface="Cambria" pitchFamily="34" charset="-120"/>
               </a:rPr>
-              <a:t>93,1%</a:t>
+              <a:t>95,7%</a:t>
             </a:r>
             <a:endParaRPr lang="en-US" sz="4000" dirty="0"/>
           </a:p>
@@ -17758,7 +17758,7 @@
                 <a:ea typeface="Calibri" pitchFamily="34" charset="-122"/>
                 <a:cs typeface="Calibri" pitchFamily="34" charset="-120"/>
               </a:rPr>
-              <a:t>406/436</a:t>
+              <a:t>419/438</a:t>
             </a:r>
             <a:endParaRPr lang="en-US" sz="1400" dirty="0"/>
           </a:p>
@@ -17836,7 +17836,7 @@
                 <a:ea typeface="Calibri" pitchFamily="34" charset="-122"/>
                 <a:cs typeface="Calibri" pitchFamily="34" charset="-120"/>
               </a:rPr>
-              <a:t>30 abiertos · 7 con más de 180 días</a:t>
+              <a:t>19 abiertos · 3 con más de 180 días</a:t>
             </a:r>
             <a:endParaRPr lang="en-US" sz="950" dirty="0"/>
           </a:p>
@@ -17929,7 +17929,7 @@
                 <a:ea typeface="Cambria" pitchFamily="34" charset="-122"/>
                 <a:cs typeface="Cambria" pitchFamily="34" charset="-120"/>
               </a:rPr>
-              <a:t>30</a:t>
+              <a:t>19</a:t>
             </a:r>
             <a:endParaRPr lang="en-US" sz="4000" dirty="0"/>
           </a:p>
@@ -17968,7 +17968,7 @@
                 <a:ea typeface="Calibri" pitchFamily="34" charset="-122"/>
                 <a:cs typeface="Calibri" pitchFamily="34" charset="-120"/>
               </a:rPr>
-              <a:t>de 436 levantados</a:t>
+              <a:t>de 438 levantados</a:t>
             </a:r>
             <a:endParaRPr lang="en-US" sz="1400" dirty="0"/>
           </a:p>
@@ -18046,7 +18046,7 @@
                 <a:ea typeface="Calibri" pitchFamily="34" charset="-122"/>
                 <a:cs typeface="Calibri" pitchFamily="34" charset="-120"/>
               </a:rPr>
-              <a:t>6 no aceptado · 19 iniciado · 5 listo para revisión</a:t>
+              <a:t>15 iniciado · 1 no aceptado · 3 listo para revisión</a:t>
             </a:r>
             <a:endParaRPr lang="en-US" sz="950" dirty="0"/>
           </a:p>
@@ -18139,7 +18139,7 @@
                 <a:ea typeface="Cambria" pitchFamily="34" charset="-122"/>
                 <a:cs typeface="Cambria" pitchFamily="34" charset="-120"/>
               </a:rPr>
-              <a:t>37,9%</a:t>
+              <a:t>37,8%</a:t>
             </a:r>
             <a:endParaRPr lang="en-US" sz="4000" dirty="0"/>
           </a:p>
@@ -18178,7 +18178,7 @@
                 <a:ea typeface="Calibri" pitchFamily="34" charset="-122"/>
                 <a:cs typeface="Calibri" pitchFamily="34" charset="-120"/>
               </a:rPr>
-              <a:t>162/427 clasificados</a:t>
+              <a:t>162/429 clasificados</a:t>
             </a:r>
             <a:endParaRPr lang="en-US" sz="1400" dirty="0"/>
           </a:p>
@@ -18388,7 +18388,7 @@
                 <a:ea typeface="Calibri" pitchFamily="34" charset="-122"/>
                 <a:cs typeface="Calibri" pitchFamily="34" charset="-120"/>
               </a:rPr>
-              <a:t>256 de 436 con costo</a:t>
+              <a:t>256 de 438 con costo</a:t>
             </a:r>
             <a:endParaRPr lang="en-US" sz="1400" dirty="0"/>
           </a:p>
@@ -18466,7 +18466,7 @@
                 <a:ea typeface="Calibri" pitchFamily="34" charset="-122"/>
                 <a:cs typeface="Calibri" pitchFamily="34" charset="-120"/>
               </a:rPr>
-              <a:t>180 hallazgos no declaran costo: la cifra es un piso</a:t>
+              <a:t>182 hallazgos no declaran costo: la cifra es un piso</a:t>
             </a:r>
             <a:endParaRPr lang="en-US" sz="950" dirty="0"/>
           </a:p>
@@ -18606,7 +18606,7 @@
                 <a:ea typeface="Calibri" pitchFamily="34" charset="-122"/>
                 <a:cs typeface="Calibri" pitchFamily="34" charset="-120"/>
               </a:rPr>
-              <a:t>26 de los 30 hallazgos abiertos (86,7%), y es el único frente donde el cliente levanta más de lo que detecta Besalco (186 externas contra 53 internas).</a:t>
+              <a:t>15 de los 19 hallazgos abiertos (78,9%), y es el único frente donde el cliente levanta más de lo que detecta Besalco (188 externas contra 53 internas).</a:t>
             </a:r>
             <a:endParaRPr lang="en-US" sz="1250" dirty="0"/>
           </a:p>
@@ -18668,7 +18668,7 @@
                 <a:ea typeface="Calibri" pitchFamily="34" charset="-122"/>
                 <a:cs typeface="Calibri" pitchFamily="34" charset="-120"/>
               </a:rPr>
-              <a:t>La semana trajo 4 hallazgos nuevos, ninguno de autodetección.  </a:t>
+              <a:t>La semana trajo 1 hallazgo nuevo, ninguno de autodetección.  </a:t>
             </a:r>
             <a:pPr indent="0" marL="0">
               <a:lnSpc>
@@ -18685,7 +18685,7 @@
                 <a:ea typeface="Calibri" pitchFamily="34" charset="-122"/>
                 <a:cs typeface="Calibri" pitchFamily="34" charset="-120"/>
               </a:rPr>
-              <a:t>21-07-2026 al 27-07-2026: 4 del cliente en OO.CC (3) y MECÁNICA (1). Todos siguen abiertos; la semana anterior entraron 0.</a:t>
+              <a:t>28-07-2026 al 03-08-2026: 1 del cliente en CALIDAD (1). Todos siguen abiertos; la semana anterior entraron 5.</a:t>
             </a:r>
             <a:endParaRPr lang="en-US" sz="1250" dirty="0"/>
           </a:p>
@@ -18764,7 +18764,7 @@
                 <a:ea typeface="Calibri" pitchFamily="34" charset="-122"/>
                 <a:cs typeface="Calibri" pitchFamily="34" charset="-120"/>
               </a:rPr>
-              <a:t>Ninguno de los 30 abiertos trae fecha comprometida —la columna «Fecha De Cierre» solo se llena al cerrar—, así que se reporta la antigüedad: 7 llevan más de 180 días y 2 más de un año.</a:t>
+              <a:t>Ninguno de los 19 abiertos trae fecha comprometida —la columna «Fecha De Cierre» solo se llena al cerrar—, así que se reporta la antigüedad: 3 llevan más de 180 días y 1 más de un año.</a:t>
             </a:r>
             <a:endParaRPr lang="en-US" sz="1250" dirty="0"/>
           </a:p>
@@ -18803,7 +18803,7 @@
                 <a:ea typeface="Calibri" pitchFamily="34" charset="-122"/>
                 <a:cs typeface="Calibri" pitchFamily="34" charset="-120"/>
               </a:rPr>
-              <a:t>Fuente: 5640140e-Data_NCR_1.xlsx — hoja «Observaciones» · Corte 27-07-2026 · 436 registros desde 10-02-2023</a:t>
+              <a:t>Fuente: 1e73482e-Data_NCR03082026.xlsx — hoja «Observaciones» · Corte 03-08-2026 · 438 registros desde 10-02-2023</a:t>
             </a:r>
             <a:endParaRPr lang="en-US" sz="850" dirty="0"/>
           </a:p>
@@ -20000,7 +20000,7 @@
                 <a:ea typeface="Calibri" pitchFamily="34" charset="-122"/>
                 <a:cs typeface="Calibri" pitchFamily="34" charset="-120"/>
               </a:rPr>
-              <a:t>239</a:t>
+              <a:t>241</a:t>
             </a:r>
             <a:endParaRPr lang="en-US" sz="1300" dirty="0"/>
           </a:p>
@@ -20039,7 +20039,7 @@
                 <a:ea typeface="Calibri" pitchFamily="34" charset="-122"/>
                 <a:cs typeface="Calibri" pitchFamily="34" charset="-120"/>
               </a:rPr>
-              <a:t>213</a:t>
+              <a:t>226</a:t>
             </a:r>
             <a:endParaRPr lang="en-US" sz="1300" dirty="0"/>
           </a:p>
@@ -20072,13 +20072,13 @@
             <a:r>
               <a:rPr lang="en-US" sz="1300" dirty="0">
                 <a:solidFill>
-                  <a:srgbClr val="C0392B"/>
-                </a:solidFill>
-                <a:latin typeface="Calibri" pitchFamily="34" charset="0"/>
-                <a:ea typeface="Calibri" pitchFamily="34" charset="-122"/>
-                <a:cs typeface="Calibri" pitchFamily="34" charset="-120"/>
-              </a:rPr>
-              <a:t>26</a:t>
+                  <a:srgbClr val="1A2433"/>
+                </a:solidFill>
+                <a:latin typeface="Calibri" pitchFamily="34" charset="0"/>
+                <a:ea typeface="Calibri" pitchFamily="34" charset="-122"/>
+                <a:cs typeface="Calibri" pitchFamily="34" charset="-120"/>
+              </a:rPr>
+              <a:t>15</a:t>
             </a:r>
             <a:endParaRPr lang="en-US" sz="1300" dirty="0"/>
           </a:p>
@@ -20117,7 +20117,7 @@
                 <a:ea typeface="Calibri" pitchFamily="34" charset="-122"/>
                 <a:cs typeface="Calibri" pitchFamily="34" charset="-120"/>
               </a:rPr>
-              <a:t>89,1%</a:t>
+              <a:t>93,8%</a:t>
             </a:r>
             <a:endParaRPr lang="en-US" sz="1300" dirty="0"/>
           </a:p>
@@ -20195,7 +20195,7 @@
                 <a:ea typeface="Calibri" pitchFamily="34" charset="-122"/>
                 <a:cs typeface="Calibri" pitchFamily="34" charset="-120"/>
               </a:rPr>
-              <a:t>186</a:t>
+              <a:t>188</a:t>
             </a:r>
             <a:endParaRPr lang="en-US" sz="1300" dirty="0"/>
           </a:p>
@@ -20257,7 +20257,7 @@
             </a:avLst>
           </a:prstGeom>
           <a:solidFill>
-            <a:srgbClr val="C0392B"/>
+            <a:srgbClr val="E0A32E"/>
           </a:solidFill>
           <a:ln/>
         </p:spPr>
@@ -20295,7 +20295,7 @@
                 <a:ea typeface="Calibri" pitchFamily="34" charset="-122"/>
                 <a:cs typeface="Calibri" pitchFamily="34" charset="-120"/>
               </a:rPr>
-              <a:t>Crítico</a:t>
+              <a:t>Atención</a:t>
             </a:r>
             <a:endParaRPr lang="en-US" sz="1050" dirty="0"/>
           </a:p>
@@ -21325,7 +21325,7 @@
                 <a:ea typeface="Calibri" pitchFamily="34" charset="-122"/>
                 <a:cs typeface="Calibri" pitchFamily="34" charset="-120"/>
               </a:rPr>
-              <a:t>428</a:t>
+              <a:t>430</a:t>
             </a:r>
             <a:endParaRPr lang="en-US" sz="1300" dirty="0"/>
           </a:p>
@@ -21364,7 +21364,7 @@
                 <a:ea typeface="Calibri" pitchFamily="34" charset="-122"/>
                 <a:cs typeface="Calibri" pitchFamily="34" charset="-120"/>
               </a:rPr>
-              <a:t>398</a:t>
+              <a:t>411</a:t>
             </a:r>
             <a:endParaRPr lang="en-US" sz="1300" dirty="0"/>
           </a:p>
@@ -21403,7 +21403,7 @@
                 <a:ea typeface="Calibri" pitchFamily="34" charset="-122"/>
                 <a:cs typeface="Calibri" pitchFamily="34" charset="-120"/>
               </a:rPr>
-              <a:t>30</a:t>
+              <a:t>19</a:t>
             </a:r>
             <a:endParaRPr lang="en-US" sz="1300" dirty="0"/>
           </a:p>
@@ -21442,7 +21442,7 @@
                 <a:ea typeface="Calibri" pitchFamily="34" charset="-122"/>
                 <a:cs typeface="Calibri" pitchFamily="34" charset="-120"/>
               </a:rPr>
-              <a:t>93%</a:t>
+              <a:t>95,6%</a:t>
             </a:r>
             <a:endParaRPr lang="en-US" sz="1300" dirty="0"/>
           </a:p>
@@ -21520,7 +21520,7 @@
                 <a:ea typeface="Calibri" pitchFamily="34" charset="-122"/>
                 <a:cs typeface="Calibri" pitchFamily="34" charset="-120"/>
               </a:rPr>
-              <a:t>265</a:t>
+              <a:t>267</a:t>
             </a:r>
             <a:endParaRPr lang="en-US" sz="1300" dirty="0"/>
           </a:p>
@@ -21598,7 +21598,7 @@
                 <a:ea typeface="Calibri" pitchFamily="34" charset="-122"/>
                 <a:cs typeface="Calibri" pitchFamily="34" charset="-120"/>
               </a:rPr>
-              <a:t>Mediana de cierre global 28 días · el hallazgo más lento tomó 313 días · 8 hallazgos sin especialidad declarada.</a:t>
+              <a:t>Mediana de cierre global 28 días · el hallazgo más lento tomó 389 días · 8 hallazgos sin especialidad declarada.</a:t>
             </a:r>
             <a:endParaRPr lang="en-US" sz="950" dirty="0"/>
           </a:p>
@@ -21637,7 +21637,7 @@
                 <a:ea typeface="Calibri" pitchFamily="34" charset="-122"/>
                 <a:cs typeface="Calibri" pitchFamily="34" charset="-120"/>
               </a:rPr>
-              <a:t>Fuente: 5640140e-Data_NCR_1.xlsx — hoja «Observaciones» · Corte 27-07-2026 · 436 registros desde 10-02-2023</a:t>
+              <a:t>Fuente: 1e73482e-Data_NCR03082026.xlsx — hoja «Observaciones» · Corte 03-08-2026 · 438 registros desde 10-02-2023</a:t>
             </a:r>
             <a:endParaRPr lang="en-US" sz="850" dirty="0"/>
           </a:p>
@@ -21888,7 +21888,7 @@
                 <a:ea typeface="Calibri" pitchFamily="34" charset="-122"/>
                 <a:cs typeface="Calibri" pitchFamily="34" charset="-120"/>
               </a:rPr>
-              <a:t>Entre el 21-07-2026 y el 27-07-2026 se levantaron 4 hallazgos: 0 internos y 4 externos. Todos siguen abiertos.</a:t>
+              <a:t>Entre el 28-07-2026 y el 03-08-2026 se levantó 1 hallazgo: 0 internos y 1 externo. Sigue abierto.</a:t>
             </a:r>
             <a:endParaRPr lang="en-US" sz="1350" dirty="0"/>
           </a:p>
@@ -22043,7 +22043,7 @@
                 <a:ea typeface="Calibri" pitchFamily="34" charset="-122"/>
                 <a:cs typeface="Calibri" pitchFamily="34" charset="-120"/>
               </a:rPr>
-              <a:t>OO.CC 3  ·  MECÁNICA 1</a:t>
+              <a:t>CALIDAD 1</a:t>
             </a:r>
             <a:endParaRPr lang="en-US" sz="1100" dirty="0"/>
           </a:p>
@@ -22121,7 +22121,7 @@
                 <a:ea typeface="Calibri" pitchFamily="34" charset="-122"/>
                 <a:cs typeface="Calibri" pitchFamily="34" charset="-120"/>
               </a:rPr>
-              <a:t>Talabre 3  ·  Desaladora 1</a:t>
+              <a:t>Talabre 1</a:t>
             </a:r>
             <a:endParaRPr lang="en-US" sz="1100" dirty="0"/>
           </a:p>
@@ -22199,7 +22199,7 @@
                 <a:ea typeface="Calibri" pitchFamily="34" charset="-122"/>
                 <a:cs typeface="Calibri" pitchFamily="34" charset="-120"/>
               </a:rPr>
-              <a:t>Externa · Cliente 4</a:t>
+              <a:t>Externa · Cliente 1</a:t>
             </a:r>
             <a:endParaRPr lang="en-US" sz="1100" dirty="0"/>
           </a:p>
@@ -22277,7 +22277,7 @@
                 <a:ea typeface="Calibri" pitchFamily="34" charset="-122"/>
                 <a:cs typeface="Calibri" pitchFamily="34" charset="-120"/>
               </a:rPr>
-              <a:t>No Conformidad 3  ·  Producto No Conforme 1</a:t>
+              <a:t>No Conformidad 1</a:t>
             </a:r>
             <a:endParaRPr lang="en-US" sz="1100" dirty="0"/>
           </a:p>
@@ -22729,7 +22729,7 @@
                 <a:ea typeface="Calibri" pitchFamily="34" charset="-122"/>
                 <a:cs typeface="Calibri" pitchFamily="34" charset="-120"/>
               </a:rPr>
-              <a:t>21-07-2026</a:t>
+              <a:t>28-07-2026</a:t>
             </a:r>
             <a:endParaRPr lang="en-US" sz="1050" dirty="0"/>
           </a:p>
@@ -22807,7 +22807,7 @@
                 <a:ea typeface="Calibri" pitchFamily="34" charset="-122"/>
                 <a:cs typeface="Calibri" pitchFamily="34" charset="-120"/>
               </a:rPr>
-              <a:t>237 · RNC N°445</a:t>
+              <a:t>241 · RNC N°449</a:t>
             </a:r>
             <a:endParaRPr lang="en-US" sz="1050" dirty="0"/>
           </a:p>
@@ -22924,7 +22924,7 @@
                 <a:ea typeface="Calibri" pitchFamily="34" charset="-122"/>
                 <a:cs typeface="Calibri" pitchFamily="34" charset="-120"/>
               </a:rPr>
-              <a:t>OO.CC</a:t>
+              <a:t>CALIDAD</a:t>
             </a:r>
             <a:endParaRPr lang="en-US" sz="1050" dirty="0"/>
           </a:p>
@@ -22963,7 +22963,7 @@
                 <a:ea typeface="Calibri" pitchFamily="34" charset="-122"/>
                 <a:cs typeface="Calibri" pitchFamily="34" charset="-120"/>
               </a:rPr>
-              <a:t>Mauricio Rocha A.</a:t>
+              <a:t>Daniel Ramirez B.</a:t>
             </a:r>
             <a:endParaRPr lang="en-US" sz="1050" dirty="0"/>
           </a:p>
@@ -23041,7 +23041,7 @@
                 <a:ea typeface="Calibri" pitchFamily="34" charset="-122"/>
                 <a:cs typeface="Calibri" pitchFamily="34" charset="-120"/>
               </a:rPr>
-              <a:t>Arrugas y trampolines en lá…</a:t>
+              <a:t>Registros de construcción n…</a:t>
             </a:r>
             <a:endParaRPr lang="en-US" sz="1000" dirty="0"/>
           </a:p>
@@ -23072,1169 +23072,7 @@
       </p:sp>
       <p:sp>
         <p:nvSpPr>
-          <p:cNvPr id="38" name="Shape 34"/>
-          <p:cNvSpPr/>
-          <p:nvPr/>
-        </p:nvSpPr>
-        <p:spPr>
-          <a:xfrm>
-            <a:off x="457200" y="4709160"/>
-            <a:ext cx="11292840" cy="329184"/>
-          </a:xfrm>
-          <a:prstGeom prst="rect">
-            <a:avLst/>
-          </a:prstGeom>
-          <a:solidFill>
-            <a:srgbClr val="FFFFFF"/>
-          </a:solidFill>
-          <a:ln/>
-        </p:spPr>
-      </p:sp>
-      <p:sp>
-        <p:nvSpPr>
-          <p:cNvPr id="39" name="Text 35"/>
-          <p:cNvSpPr/>
-          <p:nvPr/>
-        </p:nvSpPr>
-        <p:spPr>
-          <a:xfrm>
-            <a:off x="502920" y="4754880"/>
-            <a:ext cx="822960" cy="237744"/>
-          </a:xfrm>
-          <a:prstGeom prst="rect">
-            <a:avLst/>
-          </a:prstGeom>
-          <a:noFill/>
-          <a:ln/>
-        </p:spPr>
-        <p:txBody>
-          <a:bodyPr wrap="square" lIns="0" tIns="0" rIns="0" bIns="0" rtlCol="0" anchor="ctr"/>
-          <a:lstStyle/>
-          <a:p>
-            <a:pPr algn="l" indent="0" marL="0">
-              <a:buNone/>
-            </a:pPr>
-            <a:r>
-              <a:rPr lang="en-US" sz="1050" dirty="0">
-                <a:solidFill>
-                  <a:srgbClr val="1A2433"/>
-                </a:solidFill>
-                <a:latin typeface="Calibri" pitchFamily="34" charset="0"/>
-                <a:ea typeface="Calibri" pitchFamily="34" charset="-122"/>
-                <a:cs typeface="Calibri" pitchFamily="34" charset="-120"/>
-              </a:rPr>
-              <a:t>21-07-2026</a:t>
-            </a:r>
-            <a:endParaRPr lang="en-US" sz="1050" dirty="0"/>
-          </a:p>
-        </p:txBody>
-      </p:sp>
-      <p:sp>
-        <p:nvSpPr>
-          <p:cNvPr id="40" name="Text 36"/>
-          <p:cNvSpPr/>
-          <p:nvPr/>
-        </p:nvSpPr>
-        <p:spPr>
-          <a:xfrm>
-            <a:off x="1371600" y="4754880"/>
-            <a:ext cx="1051560" cy="237744"/>
-          </a:xfrm>
-          <a:prstGeom prst="rect">
-            <a:avLst/>
-          </a:prstGeom>
-          <a:noFill/>
-          <a:ln/>
-        </p:spPr>
-        <p:txBody>
-          <a:bodyPr wrap="square" lIns="0" tIns="0" rIns="0" bIns="0" rtlCol="0" anchor="ctr"/>
-          <a:lstStyle/>
-          <a:p>
-            <a:pPr algn="l" indent="0" marL="0">
-              <a:buNone/>
-            </a:pPr>
-            <a:r>
-              <a:rPr lang="en-US" sz="1050" dirty="0">
-                <a:solidFill>
-                  <a:srgbClr val="1A2433"/>
-                </a:solidFill>
-                <a:latin typeface="Calibri" pitchFamily="34" charset="0"/>
-                <a:ea typeface="Calibri" pitchFamily="34" charset="-122"/>
-                <a:cs typeface="Calibri" pitchFamily="34" charset="-120"/>
-              </a:rPr>
-              <a:t>Talabre</a:t>
-            </a:r>
-            <a:endParaRPr lang="en-US" sz="1050" dirty="0"/>
-          </a:p>
-        </p:txBody>
-      </p:sp>
-      <p:sp>
-        <p:nvSpPr>
-          <p:cNvPr id="41" name="Text 37"/>
-          <p:cNvSpPr/>
-          <p:nvPr/>
-        </p:nvSpPr>
-        <p:spPr>
-          <a:xfrm>
-            <a:off x="2468880" y="4754880"/>
-            <a:ext cx="1051560" cy="237744"/>
-          </a:xfrm>
-          <a:prstGeom prst="rect">
-            <a:avLst/>
-          </a:prstGeom>
-          <a:noFill/>
-          <a:ln/>
-        </p:spPr>
-        <p:txBody>
-          <a:bodyPr wrap="square" lIns="0" tIns="0" rIns="0" bIns="0" rtlCol="0" anchor="ctr"/>
-          <a:lstStyle/>
-          <a:p>
-            <a:pPr algn="l" indent="0" marL="0">
-              <a:buNone/>
-            </a:pPr>
-            <a:r>
-              <a:rPr lang="en-US" sz="1050" dirty="0">
-                <a:solidFill>
-                  <a:srgbClr val="1A2433"/>
-                </a:solidFill>
-                <a:latin typeface="Calibri" pitchFamily="34" charset="0"/>
-                <a:ea typeface="Calibri" pitchFamily="34" charset="-122"/>
-                <a:cs typeface="Calibri" pitchFamily="34" charset="-120"/>
-              </a:rPr>
-              <a:t>238 · PNC N°177</a:t>
-            </a:r>
-            <a:endParaRPr lang="en-US" sz="1050" dirty="0"/>
-          </a:p>
-        </p:txBody>
-      </p:sp>
-      <p:sp>
-        <p:nvSpPr>
-          <p:cNvPr id="42" name="Text 38"/>
-          <p:cNvSpPr/>
-          <p:nvPr/>
-        </p:nvSpPr>
-        <p:spPr>
-          <a:xfrm>
-            <a:off x="3566160" y="4754880"/>
-            <a:ext cx="1371600" cy="237744"/>
-          </a:xfrm>
-          <a:prstGeom prst="rect">
-            <a:avLst/>
-          </a:prstGeom>
-          <a:noFill/>
-          <a:ln/>
-        </p:spPr>
-        <p:txBody>
-          <a:bodyPr wrap="square" lIns="0" tIns="0" rIns="0" bIns="0" rtlCol="0" anchor="ctr"/>
-          <a:lstStyle/>
-          <a:p>
-            <a:pPr algn="l" indent="0" marL="0">
-              <a:buNone/>
-            </a:pPr>
-            <a:r>
-              <a:rPr lang="en-US" sz="1050" dirty="0">
-                <a:solidFill>
-                  <a:srgbClr val="1A2433"/>
-                </a:solidFill>
-                <a:latin typeface="Calibri" pitchFamily="34" charset="0"/>
-                <a:ea typeface="Calibri" pitchFamily="34" charset="-122"/>
-                <a:cs typeface="Calibri" pitchFamily="34" charset="-120"/>
-              </a:rPr>
-              <a:t>Producto No Confor…</a:t>
-            </a:r>
-            <a:endParaRPr lang="en-US" sz="1050" dirty="0"/>
-          </a:p>
-        </p:txBody>
-      </p:sp>
-      <p:sp>
-        <p:nvSpPr>
-          <p:cNvPr id="43" name="Text 39"/>
-          <p:cNvSpPr/>
-          <p:nvPr/>
-        </p:nvSpPr>
-        <p:spPr>
-          <a:xfrm>
-            <a:off x="4983480" y="4754880"/>
-            <a:ext cx="1417320" cy="237744"/>
-          </a:xfrm>
-          <a:prstGeom prst="rect">
-            <a:avLst/>
-          </a:prstGeom>
-          <a:noFill/>
-          <a:ln/>
-        </p:spPr>
-        <p:txBody>
-          <a:bodyPr wrap="square" lIns="0" tIns="0" rIns="0" bIns="0" rtlCol="0" anchor="ctr"/>
-          <a:lstStyle/>
-          <a:p>
-            <a:pPr algn="l" indent="0" marL="0">
-              <a:buNone/>
-            </a:pPr>
-            <a:r>
-              <a:rPr lang="en-US" sz="1050" b="1" dirty="0">
-                <a:solidFill>
-                  <a:srgbClr val="C87A32"/>
-                </a:solidFill>
-                <a:latin typeface="Calibri" pitchFamily="34" charset="0"/>
-                <a:ea typeface="Calibri" pitchFamily="34" charset="-122"/>
-                <a:cs typeface="Calibri" pitchFamily="34" charset="-120"/>
-              </a:rPr>
-              <a:t>Externa · Cliente</a:t>
-            </a:r>
-            <a:endParaRPr lang="en-US" sz="1050" dirty="0"/>
-          </a:p>
-        </p:txBody>
-      </p:sp>
-      <p:sp>
-        <p:nvSpPr>
-          <p:cNvPr id="44" name="Text 40"/>
-          <p:cNvSpPr/>
-          <p:nvPr/>
-        </p:nvSpPr>
-        <p:spPr>
-          <a:xfrm>
-            <a:off x="6446520" y="4754880"/>
-            <a:ext cx="1097280" cy="237744"/>
-          </a:xfrm>
-          <a:prstGeom prst="rect">
-            <a:avLst/>
-          </a:prstGeom>
-          <a:noFill/>
-          <a:ln/>
-        </p:spPr>
-        <p:txBody>
-          <a:bodyPr wrap="square" lIns="0" tIns="0" rIns="0" bIns="0" rtlCol="0" anchor="ctr"/>
-          <a:lstStyle/>
-          <a:p>
-            <a:pPr algn="l" indent="0" marL="0">
-              <a:buNone/>
-            </a:pPr>
-            <a:r>
-              <a:rPr lang="en-US" sz="1050" dirty="0">
-                <a:solidFill>
-                  <a:srgbClr val="1A2433"/>
-                </a:solidFill>
-                <a:latin typeface="Calibri" pitchFamily="34" charset="0"/>
-                <a:ea typeface="Calibri" pitchFamily="34" charset="-122"/>
-                <a:cs typeface="Calibri" pitchFamily="34" charset="-120"/>
-              </a:rPr>
-              <a:t>OO.CC</a:t>
-            </a:r>
-            <a:endParaRPr lang="en-US" sz="1050" dirty="0"/>
-          </a:p>
-        </p:txBody>
-      </p:sp>
-      <p:sp>
-        <p:nvSpPr>
-          <p:cNvPr id="45" name="Text 41"/>
-          <p:cNvSpPr/>
-          <p:nvPr/>
-        </p:nvSpPr>
-        <p:spPr>
-          <a:xfrm>
-            <a:off x="7589520" y="4754880"/>
-            <a:ext cx="1371600" cy="237744"/>
-          </a:xfrm>
-          <a:prstGeom prst="rect">
-            <a:avLst/>
-          </a:prstGeom>
-          <a:noFill/>
-          <a:ln/>
-        </p:spPr>
-        <p:txBody>
-          <a:bodyPr wrap="square" lIns="0" tIns="0" rIns="0" bIns="0" rtlCol="0" anchor="ctr"/>
-          <a:lstStyle/>
-          <a:p>
-            <a:pPr algn="l" indent="0" marL="0">
-              <a:buNone/>
-            </a:pPr>
-            <a:r>
-              <a:rPr lang="en-US" sz="1050" dirty="0">
-                <a:solidFill>
-                  <a:srgbClr val="1A2433"/>
-                </a:solidFill>
-                <a:latin typeface="Calibri" pitchFamily="34" charset="0"/>
-                <a:ea typeface="Calibri" pitchFamily="34" charset="-122"/>
-                <a:cs typeface="Calibri" pitchFamily="34" charset="-120"/>
-              </a:rPr>
-              <a:t>Sebastián Ramos</a:t>
-            </a:r>
-            <a:endParaRPr lang="en-US" sz="1050" dirty="0"/>
-          </a:p>
-        </p:txBody>
-      </p:sp>
-      <p:sp>
-        <p:nvSpPr>
-          <p:cNvPr id="46" name="Text 42"/>
-          <p:cNvSpPr/>
-          <p:nvPr/>
-        </p:nvSpPr>
-        <p:spPr>
-          <a:xfrm>
-            <a:off x="9006840" y="4754880"/>
-            <a:ext cx="868680" cy="237744"/>
-          </a:xfrm>
-          <a:prstGeom prst="rect">
-            <a:avLst/>
-          </a:prstGeom>
-          <a:noFill/>
-          <a:ln/>
-        </p:spPr>
-        <p:txBody>
-          <a:bodyPr wrap="square" lIns="0" tIns="0" rIns="0" bIns="0" rtlCol="0" anchor="ctr"/>
-          <a:lstStyle/>
-          <a:p>
-            <a:pPr algn="l" indent="0" marL="0">
-              <a:buNone/>
-            </a:pPr>
-            <a:r>
-              <a:rPr lang="en-US" sz="1050" dirty="0">
-                <a:solidFill>
-                  <a:srgbClr val="C0392B"/>
-                </a:solidFill>
-                <a:latin typeface="Calibri" pitchFamily="34" charset="0"/>
-                <a:ea typeface="Calibri" pitchFamily="34" charset="-122"/>
-                <a:cs typeface="Calibri" pitchFamily="34" charset="-120"/>
-              </a:rPr>
-              <a:t>Iniciado</a:t>
-            </a:r>
-            <a:endParaRPr lang="en-US" sz="1050" dirty="0"/>
-          </a:p>
-        </p:txBody>
-      </p:sp>
-      <p:sp>
-        <p:nvSpPr>
-          <p:cNvPr id="47" name="Text 43"/>
-          <p:cNvSpPr/>
-          <p:nvPr/>
-        </p:nvSpPr>
-        <p:spPr>
-          <a:xfrm>
-            <a:off x="9921240" y="4754880"/>
-            <a:ext cx="1828800" cy="237744"/>
-          </a:xfrm>
-          <a:prstGeom prst="rect">
-            <a:avLst/>
-          </a:prstGeom>
-          <a:noFill/>
-          <a:ln/>
-        </p:spPr>
-        <p:txBody>
-          <a:bodyPr wrap="square" lIns="0" tIns="0" rIns="0" bIns="0" rtlCol="0" anchor="ctr"/>
-          <a:lstStyle/>
-          <a:p>
-            <a:pPr algn="l" indent="0" marL="0">
-              <a:buNone/>
-            </a:pPr>
-            <a:r>
-              <a:rPr lang="en-US" sz="1000" dirty="0">
-                <a:solidFill>
-                  <a:srgbClr val="1A2433"/>
-                </a:solidFill>
-                <a:latin typeface="Calibri" pitchFamily="34" charset="0"/>
-                <a:ea typeface="Calibri" pitchFamily="34" charset="-122"/>
-                <a:cs typeface="Calibri" pitchFamily="34" charset="-120"/>
-              </a:rPr>
-              <a:t>Relleno en fundaciones FS-0…</a:t>
-            </a:r>
-            <a:endParaRPr lang="en-US" sz="1000" dirty="0"/>
-          </a:p>
-        </p:txBody>
-      </p:sp>
-      <p:sp>
-        <p:nvSpPr>
-          <p:cNvPr id="48" name="Shape 44"/>
-          <p:cNvSpPr/>
-          <p:nvPr/>
-        </p:nvSpPr>
-        <p:spPr>
-          <a:xfrm>
-            <a:off x="502920" y="5029200"/>
-            <a:ext cx="11247120" cy="0"/>
-          </a:xfrm>
-          <a:prstGeom prst="line">
-            <a:avLst/>
-          </a:prstGeom>
-          <a:noFill/>
-          <a:ln w="9525">
-            <a:solidFill>
-              <a:srgbClr val="D9DFE6"/>
-            </a:solidFill>
-            <a:prstDash val="solid"/>
-          </a:ln>
-        </p:spPr>
-      </p:sp>
-      <p:sp>
-        <p:nvSpPr>
-          <p:cNvPr id="49" name="Text 45"/>
-          <p:cNvSpPr/>
-          <p:nvPr/>
-        </p:nvSpPr>
-        <p:spPr>
-          <a:xfrm>
-            <a:off x="502920" y="5084064"/>
-            <a:ext cx="822960" cy="237744"/>
-          </a:xfrm>
-          <a:prstGeom prst="rect">
-            <a:avLst/>
-          </a:prstGeom>
-          <a:noFill/>
-          <a:ln/>
-        </p:spPr>
-        <p:txBody>
-          <a:bodyPr wrap="square" lIns="0" tIns="0" rIns="0" bIns="0" rtlCol="0" anchor="ctr"/>
-          <a:lstStyle/>
-          <a:p>
-            <a:pPr algn="l" indent="0" marL="0">
-              <a:buNone/>
-            </a:pPr>
-            <a:r>
-              <a:rPr lang="en-US" sz="1050" dirty="0">
-                <a:solidFill>
-                  <a:srgbClr val="1A2433"/>
-                </a:solidFill>
-                <a:latin typeface="Calibri" pitchFamily="34" charset="0"/>
-                <a:ea typeface="Calibri" pitchFamily="34" charset="-122"/>
-                <a:cs typeface="Calibri" pitchFamily="34" charset="-120"/>
-              </a:rPr>
-              <a:t>23-07-2026</a:t>
-            </a:r>
-            <a:endParaRPr lang="en-US" sz="1050" dirty="0"/>
-          </a:p>
-        </p:txBody>
-      </p:sp>
-      <p:sp>
-        <p:nvSpPr>
-          <p:cNvPr id="50" name="Text 46"/>
-          <p:cNvSpPr/>
-          <p:nvPr/>
-        </p:nvSpPr>
-        <p:spPr>
-          <a:xfrm>
-            <a:off x="1371600" y="5084064"/>
-            <a:ext cx="1051560" cy="237744"/>
-          </a:xfrm>
-          <a:prstGeom prst="rect">
-            <a:avLst/>
-          </a:prstGeom>
-          <a:noFill/>
-          <a:ln/>
-        </p:spPr>
-        <p:txBody>
-          <a:bodyPr wrap="square" lIns="0" tIns="0" rIns="0" bIns="0" rtlCol="0" anchor="ctr"/>
-          <a:lstStyle/>
-          <a:p>
-            <a:pPr algn="l" indent="0" marL="0">
-              <a:buNone/>
-            </a:pPr>
-            <a:r>
-              <a:rPr lang="en-US" sz="1050" dirty="0">
-                <a:solidFill>
-                  <a:srgbClr val="1A2433"/>
-                </a:solidFill>
-                <a:latin typeface="Calibri" pitchFamily="34" charset="0"/>
-                <a:ea typeface="Calibri" pitchFamily="34" charset="-122"/>
-                <a:cs typeface="Calibri" pitchFamily="34" charset="-120"/>
-              </a:rPr>
-              <a:t>Talabre</a:t>
-            </a:r>
-            <a:endParaRPr lang="en-US" sz="1050" dirty="0"/>
-          </a:p>
-        </p:txBody>
-      </p:sp>
-      <p:sp>
-        <p:nvSpPr>
-          <p:cNvPr id="51" name="Text 47"/>
-          <p:cNvSpPr/>
-          <p:nvPr/>
-        </p:nvSpPr>
-        <p:spPr>
-          <a:xfrm>
-            <a:off x="2468880" y="5084064"/>
-            <a:ext cx="1051560" cy="237744"/>
-          </a:xfrm>
-          <a:prstGeom prst="rect">
-            <a:avLst/>
-          </a:prstGeom>
-          <a:noFill/>
-          <a:ln/>
-        </p:spPr>
-        <p:txBody>
-          <a:bodyPr wrap="square" lIns="0" tIns="0" rIns="0" bIns="0" rtlCol="0" anchor="ctr"/>
-          <a:lstStyle/>
-          <a:p>
-            <a:pPr algn="l" indent="0" marL="0">
-              <a:buNone/>
-            </a:pPr>
-            <a:r>
-              <a:rPr lang="en-US" sz="1050" dirty="0">
-                <a:solidFill>
-                  <a:srgbClr val="1A2433"/>
-                </a:solidFill>
-                <a:latin typeface="Calibri" pitchFamily="34" charset="0"/>
-                <a:ea typeface="Calibri" pitchFamily="34" charset="-122"/>
-                <a:cs typeface="Calibri" pitchFamily="34" charset="-120"/>
-              </a:rPr>
-              <a:t>239 · RNC N°447</a:t>
-            </a:r>
-            <a:endParaRPr lang="en-US" sz="1050" dirty="0"/>
-          </a:p>
-        </p:txBody>
-      </p:sp>
-      <p:sp>
-        <p:nvSpPr>
-          <p:cNvPr id="52" name="Text 48"/>
-          <p:cNvSpPr/>
-          <p:nvPr/>
-        </p:nvSpPr>
-        <p:spPr>
-          <a:xfrm>
-            <a:off x="3566160" y="5084064"/>
-            <a:ext cx="1371600" cy="237744"/>
-          </a:xfrm>
-          <a:prstGeom prst="rect">
-            <a:avLst/>
-          </a:prstGeom>
-          <a:noFill/>
-          <a:ln/>
-        </p:spPr>
-        <p:txBody>
-          <a:bodyPr wrap="square" lIns="0" tIns="0" rIns="0" bIns="0" rtlCol="0" anchor="ctr"/>
-          <a:lstStyle/>
-          <a:p>
-            <a:pPr algn="l" indent="0" marL="0">
-              <a:buNone/>
-            </a:pPr>
-            <a:r>
-              <a:rPr lang="en-US" sz="1050" dirty="0">
-                <a:solidFill>
-                  <a:srgbClr val="1A2433"/>
-                </a:solidFill>
-                <a:latin typeface="Calibri" pitchFamily="34" charset="0"/>
-                <a:ea typeface="Calibri" pitchFamily="34" charset="-122"/>
-                <a:cs typeface="Calibri" pitchFamily="34" charset="-120"/>
-              </a:rPr>
-              <a:t>No Conformidad</a:t>
-            </a:r>
-            <a:endParaRPr lang="en-US" sz="1050" dirty="0"/>
-          </a:p>
-        </p:txBody>
-      </p:sp>
-      <p:sp>
-        <p:nvSpPr>
-          <p:cNvPr id="53" name="Text 49"/>
-          <p:cNvSpPr/>
-          <p:nvPr/>
-        </p:nvSpPr>
-        <p:spPr>
-          <a:xfrm>
-            <a:off x="4983480" y="5084064"/>
-            <a:ext cx="1417320" cy="237744"/>
-          </a:xfrm>
-          <a:prstGeom prst="rect">
-            <a:avLst/>
-          </a:prstGeom>
-          <a:noFill/>
-          <a:ln/>
-        </p:spPr>
-        <p:txBody>
-          <a:bodyPr wrap="square" lIns="0" tIns="0" rIns="0" bIns="0" rtlCol="0" anchor="ctr"/>
-          <a:lstStyle/>
-          <a:p>
-            <a:pPr algn="l" indent="0" marL="0">
-              <a:buNone/>
-            </a:pPr>
-            <a:r>
-              <a:rPr lang="en-US" sz="1050" b="1" dirty="0">
-                <a:solidFill>
-                  <a:srgbClr val="C87A32"/>
-                </a:solidFill>
-                <a:latin typeface="Calibri" pitchFamily="34" charset="0"/>
-                <a:ea typeface="Calibri" pitchFamily="34" charset="-122"/>
-                <a:cs typeface="Calibri" pitchFamily="34" charset="-120"/>
-              </a:rPr>
-              <a:t>Externa · Cliente</a:t>
-            </a:r>
-            <a:endParaRPr lang="en-US" sz="1050" dirty="0"/>
-          </a:p>
-        </p:txBody>
-      </p:sp>
-      <p:sp>
-        <p:nvSpPr>
-          <p:cNvPr id="54" name="Text 50"/>
-          <p:cNvSpPr/>
-          <p:nvPr/>
-        </p:nvSpPr>
-        <p:spPr>
-          <a:xfrm>
-            <a:off x="6446520" y="5084064"/>
-            <a:ext cx="1097280" cy="237744"/>
-          </a:xfrm>
-          <a:prstGeom prst="rect">
-            <a:avLst/>
-          </a:prstGeom>
-          <a:noFill/>
-          <a:ln/>
-        </p:spPr>
-        <p:txBody>
-          <a:bodyPr wrap="square" lIns="0" tIns="0" rIns="0" bIns="0" rtlCol="0" anchor="ctr"/>
-          <a:lstStyle/>
-          <a:p>
-            <a:pPr algn="l" indent="0" marL="0">
-              <a:buNone/>
-            </a:pPr>
-            <a:r>
-              <a:rPr lang="en-US" sz="1050" dirty="0">
-                <a:solidFill>
-                  <a:srgbClr val="1A2433"/>
-                </a:solidFill>
-                <a:latin typeface="Calibri" pitchFamily="34" charset="0"/>
-                <a:ea typeface="Calibri" pitchFamily="34" charset="-122"/>
-                <a:cs typeface="Calibri" pitchFamily="34" charset="-120"/>
-              </a:rPr>
-              <a:t>OO.CC</a:t>
-            </a:r>
-            <a:endParaRPr lang="en-US" sz="1050" dirty="0"/>
-          </a:p>
-        </p:txBody>
-      </p:sp>
-      <p:sp>
-        <p:nvSpPr>
-          <p:cNvPr id="55" name="Text 51"/>
-          <p:cNvSpPr/>
-          <p:nvPr/>
-        </p:nvSpPr>
-        <p:spPr>
-          <a:xfrm>
-            <a:off x="7589520" y="5084064"/>
-            <a:ext cx="1371600" cy="237744"/>
-          </a:xfrm>
-          <a:prstGeom prst="rect">
-            <a:avLst/>
-          </a:prstGeom>
-          <a:noFill/>
-          <a:ln/>
-        </p:spPr>
-        <p:txBody>
-          <a:bodyPr wrap="square" lIns="0" tIns="0" rIns="0" bIns="0" rtlCol="0" anchor="ctr"/>
-          <a:lstStyle/>
-          <a:p>
-            <a:pPr algn="l" indent="0" marL="0">
-              <a:buNone/>
-            </a:pPr>
-            <a:r>
-              <a:rPr lang="en-US" sz="1050" dirty="0">
-                <a:solidFill>
-                  <a:srgbClr val="1A2433"/>
-                </a:solidFill>
-                <a:latin typeface="Calibri" pitchFamily="34" charset="0"/>
-                <a:ea typeface="Calibri" pitchFamily="34" charset="-122"/>
-                <a:cs typeface="Calibri" pitchFamily="34" charset="-120"/>
-              </a:rPr>
-              <a:t>Mauricio Rocha A.</a:t>
-            </a:r>
-            <a:endParaRPr lang="en-US" sz="1050" dirty="0"/>
-          </a:p>
-        </p:txBody>
-      </p:sp>
-      <p:sp>
-        <p:nvSpPr>
-          <p:cNvPr id="56" name="Text 52"/>
-          <p:cNvSpPr/>
-          <p:nvPr/>
-        </p:nvSpPr>
-        <p:spPr>
-          <a:xfrm>
-            <a:off x="9006840" y="5084064"/>
-            <a:ext cx="868680" cy="237744"/>
-          </a:xfrm>
-          <a:prstGeom prst="rect">
-            <a:avLst/>
-          </a:prstGeom>
-          <a:noFill/>
-          <a:ln/>
-        </p:spPr>
-        <p:txBody>
-          <a:bodyPr wrap="square" lIns="0" tIns="0" rIns="0" bIns="0" rtlCol="0" anchor="ctr"/>
-          <a:lstStyle/>
-          <a:p>
-            <a:pPr algn="l" indent="0" marL="0">
-              <a:buNone/>
-            </a:pPr>
-            <a:r>
-              <a:rPr lang="en-US" sz="1050" dirty="0">
-                <a:solidFill>
-                  <a:srgbClr val="C0392B"/>
-                </a:solidFill>
-                <a:latin typeface="Calibri" pitchFamily="34" charset="0"/>
-                <a:ea typeface="Calibri" pitchFamily="34" charset="-122"/>
-                <a:cs typeface="Calibri" pitchFamily="34" charset="-120"/>
-              </a:rPr>
-              <a:t>Iniciado</a:t>
-            </a:r>
-            <a:endParaRPr lang="en-US" sz="1050" dirty="0"/>
-          </a:p>
-        </p:txBody>
-      </p:sp>
-      <p:sp>
-        <p:nvSpPr>
-          <p:cNvPr id="57" name="Text 53"/>
-          <p:cNvSpPr/>
-          <p:nvPr/>
-        </p:nvSpPr>
-        <p:spPr>
-          <a:xfrm>
-            <a:off x="9921240" y="5084064"/>
-            <a:ext cx="1828800" cy="237744"/>
-          </a:xfrm>
-          <a:prstGeom prst="rect">
-            <a:avLst/>
-          </a:prstGeom>
-          <a:noFill/>
-          <a:ln/>
-        </p:spPr>
-        <p:txBody>
-          <a:bodyPr wrap="square" lIns="0" tIns="0" rIns="0" bIns="0" rtlCol="0" anchor="ctr"/>
-          <a:lstStyle/>
-          <a:p>
-            <a:pPr algn="l" indent="0" marL="0">
-              <a:buNone/>
-            </a:pPr>
-            <a:r>
-              <a:rPr lang="en-US" sz="1000" dirty="0">
-                <a:solidFill>
-                  <a:srgbClr val="1A2433"/>
-                </a:solidFill>
-                <a:latin typeface="Calibri" pitchFamily="34" charset="0"/>
-                <a:ea typeface="Calibri" pitchFamily="34" charset="-122"/>
-                <a:cs typeface="Calibri" pitchFamily="34" charset="-120"/>
-              </a:rPr>
-              <a:t>Presencia de daños visibles…</a:t>
-            </a:r>
-            <a:endParaRPr lang="en-US" sz="1000" dirty="0"/>
-          </a:p>
-        </p:txBody>
-      </p:sp>
-      <p:sp>
-        <p:nvSpPr>
-          <p:cNvPr id="58" name="Shape 54"/>
-          <p:cNvSpPr/>
-          <p:nvPr/>
-        </p:nvSpPr>
-        <p:spPr>
-          <a:xfrm>
-            <a:off x="502920" y="5358384"/>
-            <a:ext cx="11247120" cy="0"/>
-          </a:xfrm>
-          <a:prstGeom prst="line">
-            <a:avLst/>
-          </a:prstGeom>
-          <a:noFill/>
-          <a:ln w="9525">
-            <a:solidFill>
-              <a:srgbClr val="D9DFE6"/>
-            </a:solidFill>
-            <a:prstDash val="solid"/>
-          </a:ln>
-        </p:spPr>
-      </p:sp>
-      <p:sp>
-        <p:nvSpPr>
-          <p:cNvPr id="59" name="Shape 55"/>
-          <p:cNvSpPr/>
-          <p:nvPr/>
-        </p:nvSpPr>
-        <p:spPr>
-          <a:xfrm>
-            <a:off x="457200" y="5367528"/>
-            <a:ext cx="11292840" cy="329184"/>
-          </a:xfrm>
-          <a:prstGeom prst="rect">
-            <a:avLst/>
-          </a:prstGeom>
-          <a:solidFill>
-            <a:srgbClr val="FFFFFF"/>
-          </a:solidFill>
-          <a:ln/>
-        </p:spPr>
-      </p:sp>
-      <p:sp>
-        <p:nvSpPr>
-          <p:cNvPr id="60" name="Text 56"/>
-          <p:cNvSpPr/>
-          <p:nvPr/>
-        </p:nvSpPr>
-        <p:spPr>
-          <a:xfrm>
-            <a:off x="502920" y="5413248"/>
-            <a:ext cx="822960" cy="237744"/>
-          </a:xfrm>
-          <a:prstGeom prst="rect">
-            <a:avLst/>
-          </a:prstGeom>
-          <a:noFill/>
-          <a:ln/>
-        </p:spPr>
-        <p:txBody>
-          <a:bodyPr wrap="square" lIns="0" tIns="0" rIns="0" bIns="0" rtlCol="0" anchor="ctr"/>
-          <a:lstStyle/>
-          <a:p>
-            <a:pPr algn="l" indent="0" marL="0">
-              <a:buNone/>
-            </a:pPr>
-            <a:r>
-              <a:rPr lang="en-US" sz="1050" dirty="0">
-                <a:solidFill>
-                  <a:srgbClr val="1A2433"/>
-                </a:solidFill>
-                <a:latin typeface="Calibri" pitchFamily="34" charset="0"/>
-                <a:ea typeface="Calibri" pitchFamily="34" charset="-122"/>
-                <a:cs typeface="Calibri" pitchFamily="34" charset="-120"/>
-              </a:rPr>
-              <a:t>27-07-2026</a:t>
-            </a:r>
-            <a:endParaRPr lang="en-US" sz="1050" dirty="0"/>
-          </a:p>
-        </p:txBody>
-      </p:sp>
-      <p:sp>
-        <p:nvSpPr>
-          <p:cNvPr id="61" name="Text 57"/>
-          <p:cNvSpPr/>
-          <p:nvPr/>
-        </p:nvSpPr>
-        <p:spPr>
-          <a:xfrm>
-            <a:off x="1371600" y="5413248"/>
-            <a:ext cx="1051560" cy="237744"/>
-          </a:xfrm>
-          <a:prstGeom prst="rect">
-            <a:avLst/>
-          </a:prstGeom>
-          <a:noFill/>
-          <a:ln/>
-        </p:spPr>
-        <p:txBody>
-          <a:bodyPr wrap="square" lIns="0" tIns="0" rIns="0" bIns="0" rtlCol="0" anchor="ctr"/>
-          <a:lstStyle/>
-          <a:p>
-            <a:pPr algn="l" indent="0" marL="0">
-              <a:buNone/>
-            </a:pPr>
-            <a:r>
-              <a:rPr lang="en-US" sz="1050" dirty="0">
-                <a:solidFill>
-                  <a:srgbClr val="1A2433"/>
-                </a:solidFill>
-                <a:latin typeface="Calibri" pitchFamily="34" charset="0"/>
-                <a:ea typeface="Calibri" pitchFamily="34" charset="-122"/>
-                <a:cs typeface="Calibri" pitchFamily="34" charset="-120"/>
-              </a:rPr>
-              <a:t>Desaladora</a:t>
-            </a:r>
-            <a:endParaRPr lang="en-US" sz="1050" dirty="0"/>
-          </a:p>
-        </p:txBody>
-      </p:sp>
-      <p:sp>
-        <p:nvSpPr>
-          <p:cNvPr id="62" name="Text 58"/>
-          <p:cNvSpPr/>
-          <p:nvPr/>
-        </p:nvSpPr>
-        <p:spPr>
-          <a:xfrm>
-            <a:off x="2468880" y="5413248"/>
-            <a:ext cx="1051560" cy="237744"/>
-          </a:xfrm>
-          <a:prstGeom prst="rect">
-            <a:avLst/>
-          </a:prstGeom>
-          <a:noFill/>
-          <a:ln/>
-        </p:spPr>
-        <p:txBody>
-          <a:bodyPr wrap="square" lIns="0" tIns="0" rIns="0" bIns="0" rtlCol="0" anchor="ctr"/>
-          <a:lstStyle/>
-          <a:p>
-            <a:pPr algn="l" indent="0" marL="0">
-              <a:buNone/>
-            </a:pPr>
-            <a:r>
-              <a:rPr lang="en-US" sz="1050" dirty="0">
-                <a:solidFill>
-                  <a:srgbClr val="1A2433"/>
-                </a:solidFill>
-                <a:latin typeface="Calibri" pitchFamily="34" charset="0"/>
-                <a:ea typeface="Calibri" pitchFamily="34" charset="-122"/>
-                <a:cs typeface="Calibri" pitchFamily="34" charset="-120"/>
-              </a:rPr>
-              <a:t>95 · NCR-0535</a:t>
-            </a:r>
-            <a:endParaRPr lang="en-US" sz="1050" dirty="0"/>
-          </a:p>
-        </p:txBody>
-      </p:sp>
-      <p:sp>
-        <p:nvSpPr>
-          <p:cNvPr id="63" name="Text 59"/>
-          <p:cNvSpPr/>
-          <p:nvPr/>
-        </p:nvSpPr>
-        <p:spPr>
-          <a:xfrm>
-            <a:off x="3566160" y="5413248"/>
-            <a:ext cx="1371600" cy="237744"/>
-          </a:xfrm>
-          <a:prstGeom prst="rect">
-            <a:avLst/>
-          </a:prstGeom>
-          <a:noFill/>
-          <a:ln/>
-        </p:spPr>
-        <p:txBody>
-          <a:bodyPr wrap="square" lIns="0" tIns="0" rIns="0" bIns="0" rtlCol="0" anchor="ctr"/>
-          <a:lstStyle/>
-          <a:p>
-            <a:pPr algn="l" indent="0" marL="0">
-              <a:buNone/>
-            </a:pPr>
-            <a:r>
-              <a:rPr lang="en-US" sz="1050" dirty="0">
-                <a:solidFill>
-                  <a:srgbClr val="1A2433"/>
-                </a:solidFill>
-                <a:latin typeface="Calibri" pitchFamily="34" charset="0"/>
-                <a:ea typeface="Calibri" pitchFamily="34" charset="-122"/>
-                <a:cs typeface="Calibri" pitchFamily="34" charset="-120"/>
-              </a:rPr>
-              <a:t>No Conformidad</a:t>
-            </a:r>
-            <a:endParaRPr lang="en-US" sz="1050" dirty="0"/>
-          </a:p>
-        </p:txBody>
-      </p:sp>
-      <p:sp>
-        <p:nvSpPr>
-          <p:cNvPr id="64" name="Text 60"/>
-          <p:cNvSpPr/>
-          <p:nvPr/>
-        </p:nvSpPr>
-        <p:spPr>
-          <a:xfrm>
-            <a:off x="4983480" y="5413248"/>
-            <a:ext cx="1417320" cy="237744"/>
-          </a:xfrm>
-          <a:prstGeom prst="rect">
-            <a:avLst/>
-          </a:prstGeom>
-          <a:noFill/>
-          <a:ln/>
-        </p:spPr>
-        <p:txBody>
-          <a:bodyPr wrap="square" lIns="0" tIns="0" rIns="0" bIns="0" rtlCol="0" anchor="ctr"/>
-          <a:lstStyle/>
-          <a:p>
-            <a:pPr algn="l" indent="0" marL="0">
-              <a:buNone/>
-            </a:pPr>
-            <a:r>
-              <a:rPr lang="en-US" sz="1050" b="1" dirty="0">
-                <a:solidFill>
-                  <a:srgbClr val="C87A32"/>
-                </a:solidFill>
-                <a:latin typeface="Calibri" pitchFamily="34" charset="0"/>
-                <a:ea typeface="Calibri" pitchFamily="34" charset="-122"/>
-                <a:cs typeface="Calibri" pitchFamily="34" charset="-120"/>
-              </a:rPr>
-              <a:t>Externa · Cliente</a:t>
-            </a:r>
-            <a:endParaRPr lang="en-US" sz="1050" dirty="0"/>
-          </a:p>
-        </p:txBody>
-      </p:sp>
-      <p:sp>
-        <p:nvSpPr>
-          <p:cNvPr id="65" name="Text 61"/>
-          <p:cNvSpPr/>
-          <p:nvPr/>
-        </p:nvSpPr>
-        <p:spPr>
-          <a:xfrm>
-            <a:off x="6446520" y="5413248"/>
-            <a:ext cx="1097280" cy="237744"/>
-          </a:xfrm>
-          <a:prstGeom prst="rect">
-            <a:avLst/>
-          </a:prstGeom>
-          <a:noFill/>
-          <a:ln/>
-        </p:spPr>
-        <p:txBody>
-          <a:bodyPr wrap="square" lIns="0" tIns="0" rIns="0" bIns="0" rtlCol="0" anchor="ctr"/>
-          <a:lstStyle/>
-          <a:p>
-            <a:pPr algn="l" indent="0" marL="0">
-              <a:buNone/>
-            </a:pPr>
-            <a:r>
-              <a:rPr lang="en-US" sz="1050" dirty="0">
-                <a:solidFill>
-                  <a:srgbClr val="1A2433"/>
-                </a:solidFill>
-                <a:latin typeface="Calibri" pitchFamily="34" charset="0"/>
-                <a:ea typeface="Calibri" pitchFamily="34" charset="-122"/>
-                <a:cs typeface="Calibri" pitchFamily="34" charset="-120"/>
-              </a:rPr>
-              <a:t>MECÁNICA</a:t>
-            </a:r>
-            <a:endParaRPr lang="en-US" sz="1050" dirty="0"/>
-          </a:p>
-        </p:txBody>
-      </p:sp>
-      <p:sp>
-        <p:nvSpPr>
-          <p:cNvPr id="66" name="Text 62"/>
-          <p:cNvSpPr/>
-          <p:nvPr/>
-        </p:nvSpPr>
-        <p:spPr>
-          <a:xfrm>
-            <a:off x="7589520" y="5413248"/>
-            <a:ext cx="1371600" cy="237744"/>
-          </a:xfrm>
-          <a:prstGeom prst="rect">
-            <a:avLst/>
-          </a:prstGeom>
-          <a:noFill/>
-          <a:ln/>
-        </p:spPr>
-        <p:txBody>
-          <a:bodyPr wrap="square" lIns="0" tIns="0" rIns="0" bIns="0" rtlCol="0" anchor="ctr"/>
-          <a:lstStyle/>
-          <a:p>
-            <a:pPr algn="l" indent="0" marL="0">
-              <a:buNone/>
-            </a:pPr>
-            <a:r>
-              <a:rPr lang="en-US" sz="1050" dirty="0">
-                <a:solidFill>
-                  <a:srgbClr val="1A2433"/>
-                </a:solidFill>
-                <a:latin typeface="Calibri" pitchFamily="34" charset="0"/>
-                <a:ea typeface="Calibri" pitchFamily="34" charset="-122"/>
-                <a:cs typeface="Calibri" pitchFamily="34" charset="-120"/>
-              </a:rPr>
-              <a:t>Wilson Jara</a:t>
-            </a:r>
-            <a:endParaRPr lang="en-US" sz="1050" dirty="0"/>
-          </a:p>
-        </p:txBody>
-      </p:sp>
-      <p:sp>
-        <p:nvSpPr>
-          <p:cNvPr id="67" name="Text 63"/>
-          <p:cNvSpPr/>
-          <p:nvPr/>
-        </p:nvSpPr>
-        <p:spPr>
-          <a:xfrm>
-            <a:off x="9006840" y="5413248"/>
-            <a:ext cx="868680" cy="237744"/>
-          </a:xfrm>
-          <a:prstGeom prst="rect">
-            <a:avLst/>
-          </a:prstGeom>
-          <a:noFill/>
-          <a:ln/>
-        </p:spPr>
-        <p:txBody>
-          <a:bodyPr wrap="square" lIns="0" tIns="0" rIns="0" bIns="0" rtlCol="0" anchor="ctr"/>
-          <a:lstStyle/>
-          <a:p>
-            <a:pPr algn="l" indent="0" marL="0">
-              <a:buNone/>
-            </a:pPr>
-            <a:r>
-              <a:rPr lang="en-US" sz="1050" dirty="0">
-                <a:solidFill>
-                  <a:srgbClr val="C0392B"/>
-                </a:solidFill>
-                <a:latin typeface="Calibri" pitchFamily="34" charset="0"/>
-                <a:ea typeface="Calibri" pitchFamily="34" charset="-122"/>
-                <a:cs typeface="Calibri" pitchFamily="34" charset="-120"/>
-              </a:rPr>
-              <a:t>Iniciado</a:t>
-            </a:r>
-            <a:endParaRPr lang="en-US" sz="1050" dirty="0"/>
-          </a:p>
-        </p:txBody>
-      </p:sp>
-      <p:sp>
-        <p:nvSpPr>
-          <p:cNvPr id="68" name="Text 64"/>
-          <p:cNvSpPr/>
-          <p:nvPr/>
-        </p:nvSpPr>
-        <p:spPr>
-          <a:xfrm>
-            <a:off x="9921240" y="5413248"/>
-            <a:ext cx="1828800" cy="237744"/>
-          </a:xfrm>
-          <a:prstGeom prst="rect">
-            <a:avLst/>
-          </a:prstGeom>
-          <a:noFill/>
-          <a:ln/>
-        </p:spPr>
-        <p:txBody>
-          <a:bodyPr wrap="square" lIns="0" tIns="0" rIns="0" bIns="0" rtlCol="0" anchor="ctr"/>
-          <a:lstStyle/>
-          <a:p>
-            <a:pPr algn="l" indent="0" marL="0">
-              <a:buNone/>
-            </a:pPr>
-            <a:r>
-              <a:rPr lang="en-US" sz="1000" dirty="0">
-                <a:solidFill>
-                  <a:srgbClr val="1A2433"/>
-                </a:solidFill>
-                <a:latin typeface="Calibri" pitchFamily="34" charset="0"/>
-                <a:ea typeface="Calibri" pitchFamily="34" charset="-122"/>
-                <a:cs typeface="Calibri" pitchFamily="34" charset="-120"/>
-              </a:rPr>
-              <a:t>Verificación de Preservación</a:t>
-            </a:r>
-            <a:endParaRPr lang="en-US" sz="1000" dirty="0"/>
-          </a:p>
-        </p:txBody>
-      </p:sp>
-      <p:sp>
-        <p:nvSpPr>
-          <p:cNvPr id="69" name="Shape 65"/>
-          <p:cNvSpPr/>
-          <p:nvPr/>
-        </p:nvSpPr>
-        <p:spPr>
-          <a:xfrm>
-            <a:off x="502920" y="5687568"/>
-            <a:ext cx="11247120" cy="0"/>
-          </a:xfrm>
-          <a:prstGeom prst="line">
-            <a:avLst/>
-          </a:prstGeom>
-          <a:noFill/>
-          <a:ln w="9525">
-            <a:solidFill>
-              <a:srgbClr val="D9DFE6"/>
-            </a:solidFill>
-            <a:prstDash val="solid"/>
-          </a:ln>
-        </p:spPr>
-      </p:sp>
-      <p:sp>
-        <p:nvSpPr>
-          <p:cNvPr id="70" name="Text 66"/>
+          <p:cNvPr id="38" name="Text 34"/>
           <p:cNvSpPr/>
           <p:nvPr/>
         </p:nvSpPr>
@@ -24265,7 +23103,7 @@
                 <a:ea typeface="Calibri" pitchFamily="34" charset="-122"/>
                 <a:cs typeface="Calibri" pitchFamily="34" charset="-120"/>
               </a:rPr>
-              <a:t>Fuente: 5640140e-Data_NCR_1.xlsx — hoja «Observaciones» · Corte 27-07-2026 · 436 registros desde 10-02-2023</a:t>
+              <a:t>Fuente: 1e73482e-Data_NCR03082026.xlsx — hoja «Observaciones» · Corte 03-08-2026 · 438 registros desde 10-02-2023</a:t>
             </a:r>
             <a:endParaRPr lang="en-US" sz="850" dirty="0"/>
           </a:p>
@@ -24273,7 +23111,7 @@
       </p:sp>
       <p:sp>
         <p:nvSpPr>
-          <p:cNvPr id="71" name="Text 67"/>
+          <p:cNvPr id="39" name="Text 35"/>
           <p:cNvSpPr/>
           <p:nvPr/>
         </p:nvSpPr>
@@ -24312,7 +23150,7 @@
       </p:sp>
       <p:sp>
         <p:nvSpPr>
-          <p:cNvPr id="72" name="Text 68"/>
+          <p:cNvPr id="40" name="Text 36"/>
           <p:cNvSpPr/>
           <p:nvPr/>
         </p:nvSpPr>
@@ -24516,7 +23354,7 @@
                 <a:ea typeface="Calibri" pitchFamily="34" charset="-122"/>
                 <a:cs typeface="Calibri" pitchFamily="34" charset="-120"/>
               </a:rPr>
-              <a:t>Interna es autodetección: la levanta Besalco antes que nadie. Externa la levanta el cliente —compromete el contrato— o un subcontrato. Autodetección global: 37,9%.</a:t>
+              <a:t>Interna es autodetección: la levanta Besalco antes que nadie. Externa la levanta el cliente —compromete el contrato— o un subcontrato. Autodetección global: 37,8%.</a:t>
             </a:r>
             <a:endParaRPr lang="en-US" sz="1350" dirty="0"/>
           </a:p>
@@ -24726,7 +23564,7 @@
                 <a:ea typeface="Cambria" pitchFamily="34" charset="-122"/>
                 <a:cs typeface="Cambria" pitchFamily="34" charset="-120"/>
               </a:rPr>
-              <a:t>22,2%</a:t>
+              <a:t>22%</a:t>
             </a:r>
             <a:endParaRPr lang="en-US" sz="2400" dirty="0"/>
           </a:p>
@@ -24882,7 +23720,7 @@
                 <a:ea typeface="Calibri" pitchFamily="34" charset="-122"/>
                 <a:cs typeface="Calibri" pitchFamily="34" charset="-120"/>
               </a:rPr>
-              <a:t>Fuente: 5640140e-Data_NCR_1.xlsx — hoja «Observaciones» · Corte 27-07-2026 · 436 registros desde 10-02-2023</a:t>
+              <a:t>Fuente: 1e73482e-Data_NCR03082026.xlsx — hoja «Observaciones» · Corte 03-08-2026 · 438 registros desde 10-02-2023</a:t>
             </a:r>
             <a:endParaRPr lang="en-US" sz="850" dirty="0"/>
           </a:p>
@@ -25133,7 +23971,7 @@
                 <a:ea typeface="Calibri" pitchFamily="34" charset="-122"/>
                 <a:cs typeface="Calibri" pitchFamily="34" charset="-120"/>
               </a:rPr>
-              <a:t>De los 30 hallazgos abiertos, 7 llevan más de 180 días desde que se levantaron y 2 más de un año. La mediana de cierre global es de 28 días.</a:t>
+              <a:t>De los 19 hallazgos abiertos, 3 llevan más de 180 días desde que se levantaron y 1 más de un año. La mediana de cierre global es de 28 días.</a:t>
             </a:r>
             <a:endParaRPr lang="en-US" sz="1350" dirty="0"/>
           </a:p>
@@ -25270,7 +24108,7 @@
                 <a:ea typeface="Calibri" pitchFamily="34" charset="-122"/>
                 <a:cs typeface="Calibri" pitchFamily="34" charset="-120"/>
               </a:rPr>
-              <a:t>Ninguno de los 30 abiertos trae esa fecha: la columna «Fecha De Cierre» del Excel solo se llena al cerrar. El indicador no se puede calcular y el panel lo declara en vez de informar 0 atrasados. En su lugar se usa la antigüedad.</a:t>
+              <a:t>Ninguno de los 19 abiertos trae esa fecha: la columna «Fecha De Cierre» del Excel solo se llena al cerrar. El indicador no se puede calcular y el panel lo declara en vez de informar 0 atrasados. En su lugar se usa la antigüedad.</a:t>
             </a:r>
             <a:endParaRPr lang="en-US" sz="1150" dirty="0"/>
           </a:p>
@@ -25949,7 +24787,7 @@
                 <a:ea typeface="Calibri" pitchFamily="34" charset="-122"/>
                 <a:cs typeface="Calibri" pitchFamily="34" charset="-120"/>
               </a:rPr>
-              <a:t>213</a:t>
+              <a:t>226</a:t>
             </a:r>
             <a:endParaRPr lang="en-US" sz="1150" dirty="0"/>
           </a:p>
@@ -25988,7 +24826,7 @@
                 <a:ea typeface="Calibri" pitchFamily="34" charset="-122"/>
                 <a:cs typeface="Calibri" pitchFamily="34" charset="-120"/>
               </a:rPr>
-              <a:t>22 d</a:t>
+              <a:t>23 d</a:t>
             </a:r>
             <a:endParaRPr lang="en-US" sz="1150" dirty="0"/>
           </a:p>
@@ -26027,7 +24865,7 @@
                 <a:ea typeface="Calibri" pitchFamily="34" charset="-122"/>
                 <a:cs typeface="Calibri" pitchFamily="34" charset="-120"/>
               </a:rPr>
-              <a:t>269 d</a:t>
+              <a:t>389 d</a:t>
             </a:r>
             <a:endParaRPr lang="en-US" sz="1150" dirty="0"/>
           </a:p>
@@ -26060,13 +24898,13 @@
             <a:r>
               <a:rPr lang="en-US" sz="1150" dirty="0">
                 <a:solidFill>
-                  <a:srgbClr val="C0392B"/>
-                </a:solidFill>
-                <a:latin typeface="Calibri" pitchFamily="34" charset="0"/>
-                <a:ea typeface="Calibri" pitchFamily="34" charset="-122"/>
-                <a:cs typeface="Calibri" pitchFamily="34" charset="-120"/>
-              </a:rPr>
-              <a:t>26</a:t>
+                  <a:srgbClr val="1A2433"/>
+                </a:solidFill>
+                <a:latin typeface="Calibri" pitchFamily="34" charset="0"/>
+                <a:ea typeface="Calibri" pitchFamily="34" charset="-122"/>
+                <a:cs typeface="Calibri" pitchFamily="34" charset="-120"/>
+              </a:rPr>
+              <a:t>15</a:t>
             </a:r>
             <a:endParaRPr lang="en-US" sz="1150" dirty="0"/>
           </a:p>
@@ -26690,7 +25528,7 @@
                 <a:ea typeface="Calibri" pitchFamily="34" charset="-122"/>
                 <a:cs typeface="Calibri" pitchFamily="34" charset="-120"/>
               </a:rPr>
-              <a:t>Fuente: 5640140e-Data_NCR_1.xlsx — hoja «Observaciones» · Corte 27-07-2026 · 436 registros desde 10-02-2023</a:t>
+              <a:t>Fuente: 1e73482e-Data_NCR03082026.xlsx — hoja «Observaciones» · Corte 03-08-2026 · 438 registros desde 10-02-2023</a:t>
             </a:r>
             <a:endParaRPr lang="en-US" sz="850" dirty="0"/>
           </a:p>
@@ -27064,7 +25902,7 @@
                 <a:ea typeface="Calibri" pitchFamily="34" charset="-122"/>
                 <a:cs typeface="Calibri" pitchFamily="34" charset="-120"/>
               </a:rPr>
-              <a:t>26 de los 30 hallazgos abiertos (86,7%) y 89,1% de cierre, contra 93,1% global. Es la ruta crítica del módulo.</a:t>
+              <a:t>15 de los 19 hallazgos abiertos (78,9%) y 93,8% de cierre, contra 95,7% global. Es la ruta crítica del módulo.</a:t>
             </a:r>
             <a:endParaRPr lang="en-US" sz="1100" dirty="0"/>
           </a:p>
@@ -27206,7 +26044,7 @@
                 <a:ea typeface="Calibri" pitchFamily="34" charset="-122"/>
                 <a:cs typeface="Calibri" pitchFamily="34" charset="-120"/>
               </a:rPr>
-              <a:t>Solo 22,2% de sus hallazgos los detecta Besalco; el mejor frente va en 59,6%. Lo que no se detecta adentro llega como observación del cliente.</a:t>
+              <a:t>Solo 22% de sus hallazgos los detecta Besalco; el mejor frente va en 59,6%. Lo que no se detecta adentro llega como observación del cliente.</a:t>
             </a:r>
             <a:endParaRPr lang="en-US" sz="1100" dirty="0"/>
           </a:p>
@@ -27306,7 +26144,7 @@
                 <a:ea typeface="Calibri" pitchFamily="34" charset="-122"/>
                 <a:cs typeface="Calibri" pitchFamily="34" charset="-120"/>
               </a:rPr>
-              <a:t>Sacar los 7 hallazgos sobre 180 días</a:t>
+              <a:t>Sacar los 3 hallazgos sobre 180 días</a:t>
             </a:r>
             <a:endParaRPr lang="en-US" sz="1400" dirty="0"/>
           </a:p>
@@ -27348,7 +26186,7 @@
                 <a:ea typeface="Calibri" pitchFamily="34" charset="-122"/>
                 <a:cs typeface="Calibri" pitchFamily="34" charset="-120"/>
               </a:rPr>
-              <a:t>2 de ellos superan el año abiertos. Los tienen a cargo Alejandro Rivera G. (4), Alvaro Cortés V. (3). Es deuda antigua que no se cierra sola.</a:t>
+              <a:t>1 de ellos superan el año abiertos. Los tienen a cargo Alvaro Cortés V. (3). Es deuda antigua que no se cierra sola.</a:t>
             </a:r>
             <a:endParaRPr lang="en-US" sz="1100" dirty="0"/>
           </a:p>
@@ -27529,7 +26367,7 @@
                 <a:ea typeface="Calibri" pitchFamily="34" charset="-122"/>
                 <a:cs typeface="Calibri" pitchFamily="34" charset="-120"/>
               </a:rPr>
-              <a:t>Fuente: 5640140e-Data_NCR_1.xlsx — hoja «Observaciones» · Corte 27-07-2026 · 436 registros desde 10-02-2023</a:t>
+              <a:t>Fuente: 1e73482e-Data_NCR03082026.xlsx — hoja «Observaciones» · Corte 03-08-2026 · 438 registros desde 10-02-2023</a:t>
             </a:r>
             <a:endParaRPr lang="en-US" sz="850" dirty="0"/>
           </a:p>
@@ -28253,7 +27091,7 @@
                 <a:ea typeface="Calibri" pitchFamily="34" charset="-122"/>
                 <a:cs typeface="Calibri" pitchFamily="34" charset="-120"/>
               </a:rPr>
-              <a:t>Corte: 27-07-2026</a:t>
+              <a:t>Corte: 03-08-2026</a:t>
             </a:r>
             <a:endParaRPr lang="en-US" sz="1100" dirty="0"/>
           </a:p>
@@ -28292,7 +27130,7 @@
                 <a:ea typeface="Calibri" pitchFamily="34" charset="-122"/>
                 <a:cs typeface="Calibri" pitchFamily="34" charset="-120"/>
               </a:rPr>
-              <a:t>Fuente: 5640140e-Data_NCR_1.xlsx — hoja «Observaciones» · Corte 27-07-2026 · 436 registros desde 10-02-2023</a:t>
+              <a:t>Fuente: 1e73482e-Data_NCR03082026.xlsx — hoja «Observaciones» · Corte 03-08-2026 · 438 registros desde 10-02-2023</a:t>
             </a:r>
             <a:endParaRPr lang="en-US" sz="850" dirty="0"/>
           </a:p>
@@ -28885,7 +27723,7 @@
                 <a:ea typeface="Calibri" pitchFamily="34" charset="-122"/>
                 <a:cs typeface="Calibri" pitchFamily="34" charset="-120"/>
               </a:rPr>
-              <a:t>Global del módulo: 93,1%</a:t>
+              <a:t>Global del módulo: 95,7%</a:t>
             </a:r>
             <a:endParaRPr lang="en-US" sz="950" dirty="0"/>
           </a:p>
@@ -29483,7 +28321,7 @@
                 <a:ea typeface="Calibri" pitchFamily="34" charset="-122"/>
                 <a:cs typeface="Calibri" pitchFamily="34" charset="-120"/>
               </a:rPr>
-              <a:t>global del módulo 37,9%</a:t>
+              <a:t>global del módulo 37,8%</a:t>
             </a:r>
             <a:endParaRPr lang="en-US" sz="1000" dirty="0"/>
           </a:p>
@@ -30093,7 +28931,7 @@
                 <a:ea typeface="Calibri" pitchFamily="34" charset="-122"/>
                 <a:cs typeface="Calibri" pitchFamily="34" charset="-120"/>
               </a:rPr>
-              <a:t>Fuente: 5640140e-Data_NCR_1.xlsx — hoja «Observaciones» · Corte 27-07-2026 · 436 registros desde 10-02-2023</a:t>
+              <a:t>Fuente: 1e73482e-Data_NCR03082026.xlsx — hoja «Observaciones» · Corte 03-08-2026 · 438 registros desde 10-02-2023</a:t>
             </a:r>
             <a:endParaRPr lang="en-US" sz="850" dirty="0"/>
           </a:p>

--- a/modulo_nc/Panel_No_Conformidades.pptx
+++ b/modulo_nc/Panel_No_Conformidades.pptx
@@ -250,7 +250,7 @@
                 <c:formatCode>General</c:formatCode>
                 <c:ptCount val="8"/>
                 <c:pt idx="0">
-                  <c:v>2</c:v>
+                  <c:v>3</c:v>
                 </c:pt>
                 <c:pt idx="1">
                   <c:v/>
@@ -760,7 +760,7 @@
                   <c:v>188</c:v>
                 </c:pt>
                 <c:pt idx="2">
-                  <c:v>1</c:v>
+                  <c:v>71</c:v>
                 </c:pt>
                 <c:pt idx="3">
                   <c:v/>
@@ -1225,13 +1225,13 @@
                 <c:formatCode>General</c:formatCode>
                 <c:ptCount val="5"/>
                 <c:pt idx="0">
-                  <c:v>266</c:v>
+                  <c:v>279</c:v>
                 </c:pt>
                 <c:pt idx="1">
                   <c:v>116</c:v>
                 </c:pt>
                 <c:pt idx="2">
-                  <c:v>23</c:v>
+                  <c:v>45</c:v>
                 </c:pt>
                 <c:pt idx="3">
                   <c:v>13</c:v>
@@ -1321,13 +1321,13 @@
                 <c:formatCode>General</c:formatCode>
                 <c:ptCount val="5"/>
                 <c:pt idx="0">
-                  <c:v>14</c:v>
+                  <c:v>34</c:v>
                 </c:pt>
                 <c:pt idx="1">
                   <c:v>4</c:v>
                 </c:pt>
                 <c:pt idx="2">
-                  <c:v/>
+                  <c:v>15</c:v>
                 </c:pt>
                 <c:pt idx="3">
                   <c:v>1</c:v>
@@ -1522,7 +1522,7 @@
                 </a:solidFill>
                 <a:latin typeface="Calibri"/>
               </a:rPr>
-              <a:t>Antigüedad de los 19 hallazgos abiertos</a:t>
+              <a:t>Antigüedad de los 54 hallazgos abiertos</a:t>
             </a:r>
           </a:p>
         </c:rich>
@@ -1675,7 +1675,7 @@
                 <c:formatCode>General</c:formatCode>
                 <c:ptCount val="1"/>
                 <c:pt idx="0">
-                  <c:v>5</c:v>
+                  <c:v>12</c:v>
                 </c:pt>
               </c:numCache>
             </c:numRef>
@@ -1747,7 +1747,7 @@
                 <c:formatCode>General</c:formatCode>
                 <c:ptCount val="1"/>
                 <c:pt idx="0">
-                  <c:v>4</c:v>
+                  <c:v>18</c:v>
                 </c:pt>
               </c:numCache>
             </c:numRef>
@@ -1819,7 +1819,7 @@
                 <c:formatCode>General</c:formatCode>
                 <c:ptCount val="1"/>
                 <c:pt idx="0">
-                  <c:v>2</c:v>
+                  <c:v>14</c:v>
                 </c:pt>
               </c:numCache>
             </c:numRef>
@@ -1891,7 +1891,7 @@
                 <c:formatCode>General</c:formatCode>
                 <c:ptCount val="1"/>
                 <c:pt idx="0">
-                  <c:v>1</c:v>
+                  <c:v>3</c:v>
                 </c:pt>
               </c:numCache>
             </c:numRef>
@@ -2932,7 +2932,7 @@
                 </a:solidFill>
                 <a:latin typeface="Calibri"/>
               </a:rPr>
-              <a:t>Especialidades con más hallazgos (8 de 17)</a:t>
+              <a:t>Especialidades con más hallazgos (8 de 18)</a:t>
             </a:r>
           </a:p>
         </c:rich>
@@ -3000,28 +3000,28 @@
                 <c:ptCount val="8"/>
                 <c:lvl>
                   <c:pt idx="0">
+                    <c:v>Sin especialidad</c:v>
+                  </c:pt>
+                  <c:pt idx="1">
                     <c:v>EXPEDITORÍA</c:v>
                   </c:pt>
-                  <c:pt idx="1">
+                  <c:pt idx="2">
                     <c:v>OO.CC</c:v>
                   </c:pt>
-                  <c:pt idx="2">
+                  <c:pt idx="3">
                     <c:v>BODEGA</c:v>
                   </c:pt>
-                  <c:pt idx="3">
+                  <c:pt idx="4">
                     <c:v>SUBCONTRATO</c:v>
                   </c:pt>
-                  <c:pt idx="4">
+                  <c:pt idx="5">
                     <c:v>ESTRUCTURA</c:v>
                   </c:pt>
-                  <c:pt idx="5">
+                  <c:pt idx="6">
                     <c:v>TOPOGRAFÍA</c:v>
                   </c:pt>
-                  <c:pt idx="6">
+                  <c:pt idx="7">
                     <c:v>MECÁNICA</c:v>
-                  </c:pt>
-                  <c:pt idx="7">
-                    <c:v>LOGÍSTICA</c:v>
                   </c:pt>
                 </c:lvl>
               </c:multiLvlStrCache>
@@ -3034,25 +3034,25 @@
                 <c:formatCode>General</c:formatCode>
                 <c:ptCount val="8"/>
                 <c:pt idx="0">
+                  <c:v>35</c:v>
+                </c:pt>
+                <c:pt idx="1">
                   <c:v>37</c:v>
                 </c:pt>
-                <c:pt idx="1">
+                <c:pt idx="2">
                   <c:v>15</c:v>
                 </c:pt>
-                <c:pt idx="2">
+                <c:pt idx="3">
                   <c:v>7</c:v>
                 </c:pt>
-                <c:pt idx="3">
+                <c:pt idx="4">
                   <c:v>6</c:v>
-                </c:pt>
-                <c:pt idx="4">
-                  <c:v>4</c:v>
                 </c:pt>
                 <c:pt idx="5">
                   <c:v>4</c:v>
                 </c:pt>
                 <c:pt idx="6">
-                  <c:v>3</c:v>
+                  <c:v>4</c:v>
                 </c:pt>
                 <c:pt idx="7">
                   <c:v>3</c:v>
@@ -3114,28 +3114,28 @@
                 <c:ptCount val="8"/>
                 <c:lvl>
                   <c:pt idx="0">
+                    <c:v>Sin especialidad</c:v>
+                  </c:pt>
+                  <c:pt idx="1">
                     <c:v>EXPEDITORÍA</c:v>
                   </c:pt>
-                  <c:pt idx="1">
+                  <c:pt idx="2">
                     <c:v>OO.CC</c:v>
                   </c:pt>
-                  <c:pt idx="2">
+                  <c:pt idx="3">
                     <c:v>BODEGA</c:v>
                   </c:pt>
-                  <c:pt idx="3">
+                  <c:pt idx="4">
                     <c:v>SUBCONTRATO</c:v>
                   </c:pt>
-                  <c:pt idx="4">
+                  <c:pt idx="5">
                     <c:v>ESTRUCTURA</c:v>
                   </c:pt>
-                  <c:pt idx="5">
+                  <c:pt idx="6">
                     <c:v>TOPOGRAFÍA</c:v>
                   </c:pt>
-                  <c:pt idx="6">
+                  <c:pt idx="7">
                     <c:v>MECÁNICA</c:v>
-                  </c:pt>
-                  <c:pt idx="7">
-                    <c:v>LOGÍSTICA</c:v>
                   </c:pt>
                 </c:lvl>
               </c:multiLvlStrCache>
@@ -3148,13 +3148,13 @@
                 <c:formatCode>General</c:formatCode>
                 <c:ptCount val="8"/>
                 <c:pt idx="0">
+                  <c:v>35</c:v>
+                </c:pt>
+                <c:pt idx="1">
                   <c:v/>
                 </c:pt>
-                <c:pt idx="1">
+                <c:pt idx="2">
                   <c:v>1</c:v>
-                </c:pt>
-                <c:pt idx="2">
-                  <c:v/>
                 </c:pt>
                 <c:pt idx="3">
                   <c:v/>
@@ -5657,7 +5657,7 @@
                 <a:ea typeface="Calibri" pitchFamily="34" charset="-122"/>
                 <a:cs typeface="Calibri" pitchFamily="34" charset="-120"/>
               </a:rPr>
-              <a:t>438 hallazgos levantados entre 10-02-2023 y 28-07-2026 (Desaladora 95 · Talabre 241 · Arqueros 94 · Oficina Central 8).</a:t>
+              <a:t>508 hallazgos levantados entre 10-02-2023 y 28-07-2026 (Desaladora 95 · Talabre 241 · Arqueros 164 · Oficina Central 8).</a:t>
             </a:r>
             <a:endParaRPr lang="en-US" sz="1350" dirty="0"/>
           </a:p>
@@ -5716,7 +5716,7 @@
                 <a:ea typeface="Cambria" pitchFamily="34" charset="-122"/>
                 <a:cs typeface="Cambria" pitchFamily="34" charset="-120"/>
               </a:rPr>
-              <a:t>95,7%</a:t>
+              <a:t>89,4%</a:t>
             </a:r>
             <a:endParaRPr lang="en-US" sz="3400" dirty="0"/>
           </a:p>
@@ -5794,7 +5794,7 @@
                 <a:ea typeface="Cambria" pitchFamily="34" charset="-122"/>
                 <a:cs typeface="Cambria" pitchFamily="34" charset="-120"/>
               </a:rPr>
-              <a:t>19</a:t>
+              <a:t>54</a:t>
             </a:r>
             <a:endParaRPr lang="en-US" sz="3400" dirty="0"/>
           </a:p>
@@ -5872,7 +5872,7 @@
                 <a:ea typeface="Cambria" pitchFamily="34" charset="-122"/>
                 <a:cs typeface="Cambria" pitchFamily="34" charset="-120"/>
               </a:rPr>
-              <a:t>28 d</a:t>
+              <a:t>30 d</a:t>
             </a:r>
             <a:endParaRPr lang="en-US" sz="3400" dirty="0"/>
           </a:p>
@@ -6067,7 +6067,7 @@
                 <a:ea typeface="Calibri" pitchFamily="34" charset="-122"/>
                 <a:cs typeface="Calibri" pitchFamily="34" charset="-120"/>
               </a:rPr>
-              <a:t>Fuente: 1e73482e-Data_NCR03082026.xlsx — hoja «Observaciones» · Corte 03-08-2026 · 438 registros desde 10-02-2023</a:t>
+              <a:t>Fuente: 1e73482e-Data_NCR03082026.xlsx — hoja «Observaciones» · Corte 03-08-2026 · 508 registros desde 10-02-2023</a:t>
             </a:r>
             <a:endParaRPr lang="en-US" sz="850" dirty="0"/>
           </a:p>
@@ -7778,7 +7778,7 @@
                 <a:ea typeface="Calibri" pitchFamily="34" charset="-122"/>
                 <a:cs typeface="Calibri" pitchFamily="34" charset="-120"/>
               </a:rPr>
-              <a:t>Fuente: 1e73482e-Data_NCR03082026.xlsx — hoja «Observaciones» · Corte 03-08-2026 · 438 registros desde 10-02-2023</a:t>
+              <a:t>Fuente: 1e73482e-Data_NCR03082026.xlsx — hoja «Observaciones» · Corte 03-08-2026 · 508 registros desde 10-02-2023</a:t>
             </a:r>
             <a:endParaRPr lang="en-US" sz="850" dirty="0"/>
           </a:p>
@@ -8541,7 +8541,7 @@
                 <a:ea typeface="Calibri" pitchFamily="34" charset="-122"/>
                 <a:cs typeface="Calibri" pitchFamily="34" charset="-120"/>
               </a:rPr>
-              <a:t>Fuente: 1e73482e-Data_NCR03082026.xlsx — hoja «Observaciones» · Corte 03-08-2026 · 438 registros desde 10-02-2023</a:t>
+              <a:t>Fuente: 1e73482e-Data_NCR03082026.xlsx — hoja «Observaciones» · Corte 03-08-2026 · 508 registros desde 10-02-2023</a:t>
             </a:r>
             <a:endParaRPr lang="en-US" sz="850" dirty="0"/>
           </a:p>
@@ -9134,7 +9134,7 @@
                 <a:ea typeface="Calibri" pitchFamily="34" charset="-122"/>
                 <a:cs typeface="Calibri" pitchFamily="34" charset="-120"/>
               </a:rPr>
-              <a:t>Global del módulo: 95,7%</a:t>
+              <a:t>Global del módulo: 89,4%</a:t>
             </a:r>
             <a:endParaRPr lang="en-US" sz="950" dirty="0"/>
           </a:p>
@@ -9732,7 +9732,7 @@
                 <a:ea typeface="Calibri" pitchFamily="34" charset="-122"/>
                 <a:cs typeface="Calibri" pitchFamily="34" charset="-120"/>
               </a:rPr>
-              <a:t>global del módulo 37,8%</a:t>
+              <a:t>global del módulo 32,5%</a:t>
             </a:r>
             <a:endParaRPr lang="en-US" sz="1000" dirty="0"/>
           </a:p>
@@ -10068,7 +10068,7 @@
                 <a:ea typeface="Calibri" pitchFamily="34" charset="-122"/>
                 <a:cs typeface="Calibri" pitchFamily="34" charset="-120"/>
               </a:rPr>
-              <a:t>Fuente: 1e73482e-Data_NCR03082026.xlsx — hoja «Observaciones» · Corte 03-08-2026 · 438 registros desde 10-02-2023</a:t>
+              <a:t>Fuente: 1e73482e-Data_NCR03082026.xlsx — hoja «Observaciones» · Corte 03-08-2026 · 508 registros desde 10-02-2023</a:t>
             </a:r>
             <a:endParaRPr lang="en-US" sz="850" dirty="0"/>
           </a:p>
@@ -13927,7 +13927,7 @@
                 <a:ea typeface="Calibri" pitchFamily="34" charset="-122"/>
                 <a:cs typeface="Calibri" pitchFamily="34" charset="-120"/>
               </a:rPr>
-              <a:t>Fuente: 1e73482e-Data_NCR03082026.xlsx — hoja «Observaciones» · Corte 03-08-2026 · 438 registros desde 10-02-2023</a:t>
+              <a:t>Fuente: 1e73482e-Data_NCR03082026.xlsx — hoja «Observaciones» · Corte 03-08-2026 · 508 registros desde 10-02-2023</a:t>
             </a:r>
             <a:endParaRPr lang="en-US" sz="850" dirty="0"/>
           </a:p>
@@ -14280,7 +14280,7 @@
                 <a:ea typeface="Calibri" pitchFamily="34" charset="-122"/>
                 <a:cs typeface="Calibri" pitchFamily="34" charset="-120"/>
               </a:rPr>
-              <a:t>94 hallazgos levantados · 53 internos y 41 externos · 17 especialidades involucradas.</a:t>
+              <a:t>164 hallazgos levantados · 53 internos y 111 externos · 18 especialidades involucradas.</a:t>
             </a:r>
             <a:endParaRPr lang="en-US" sz="1350" dirty="0"/>
           </a:p>
@@ -14339,7 +14339,7 @@
                 <a:ea typeface="Cambria" pitchFamily="34" charset="-122"/>
                 <a:cs typeface="Cambria" pitchFamily="34" charset="-120"/>
               </a:rPr>
-              <a:t>98,9%</a:t>
+              <a:t>78%</a:t>
             </a:r>
             <a:endParaRPr lang="en-US" sz="3400" dirty="0"/>
           </a:p>
@@ -14417,7 +14417,7 @@
                 <a:ea typeface="Cambria" pitchFamily="34" charset="-122"/>
                 <a:cs typeface="Cambria" pitchFamily="34" charset="-120"/>
               </a:rPr>
-              <a:t>1</a:t>
+              <a:t>36</a:t>
             </a:r>
             <a:endParaRPr lang="en-US" sz="3400" dirty="0"/>
           </a:p>
@@ -14495,7 +14495,7 @@
                 <a:ea typeface="Cambria" pitchFamily="34" charset="-122"/>
                 <a:cs typeface="Cambria" pitchFamily="34" charset="-120"/>
               </a:rPr>
-              <a:t>139 d</a:t>
+              <a:t>131 d</a:t>
             </a:r>
             <a:endParaRPr lang="en-US" sz="3400" dirty="0"/>
           </a:p>
@@ -14573,7 +14573,7 @@
                 <a:ea typeface="Cambria" pitchFamily="34" charset="-122"/>
                 <a:cs typeface="Cambria" pitchFamily="34" charset="-120"/>
               </a:rPr>
-              <a:t>56,4%</a:t>
+              <a:t>32,3%</a:t>
             </a:r>
             <a:endParaRPr lang="en-US" sz="3400" dirty="0"/>
           </a:p>
@@ -14690,7 +14690,7 @@
                 <a:ea typeface="Calibri" pitchFamily="34" charset="-122"/>
                 <a:cs typeface="Calibri" pitchFamily="34" charset="-120"/>
               </a:rPr>
-              <a:t>Fuente: 1e73482e-Data_NCR03082026.xlsx — hoja «Observaciones» · Corte 03-08-2026 · 438 registros desde 10-02-2023</a:t>
+              <a:t>Fuente: 1e73482e-Data_NCR03082026.xlsx — hoja «Observaciones» · Corte 03-08-2026 · 508 registros desde 10-02-2023</a:t>
             </a:r>
             <a:endParaRPr lang="en-US" sz="850" dirty="0"/>
           </a:p>
@@ -14956,7 +14956,7 @@
                 <a:ea typeface="Cambria" pitchFamily="34" charset="-122"/>
                 <a:cs typeface="Cambria" pitchFamily="34" charset="-120"/>
               </a:rPr>
-              <a:t>94</a:t>
+              <a:t>164</a:t>
             </a:r>
             <a:endParaRPr lang="en-US" sz="4000" dirty="0"/>
           </a:p>
@@ -14995,7 +14995,7 @@
                 <a:ea typeface="Calibri" pitchFamily="34" charset="-122"/>
                 <a:cs typeface="Calibri" pitchFamily="34" charset="-120"/>
               </a:rPr>
-              <a:t>93 cerrados</a:t>
+              <a:t>128 cerrados</a:t>
             </a:r>
             <a:endParaRPr lang="en-US" sz="1400" dirty="0"/>
           </a:p>
@@ -15073,7 +15073,7 @@
                 <a:ea typeface="Calibri" pitchFamily="34" charset="-122"/>
                 <a:cs typeface="Calibri" pitchFamily="34" charset="-120"/>
               </a:rPr>
-              <a:t>53 internos · 41 externos</a:t>
+              <a:t>53 internos · 111 externos</a:t>
             </a:r>
             <a:endParaRPr lang="en-US" sz="950" dirty="0"/>
           </a:p>
@@ -15166,7 +15166,7 @@
                 <a:ea typeface="Cambria" pitchFamily="34" charset="-122"/>
                 <a:cs typeface="Cambria" pitchFamily="34" charset="-120"/>
               </a:rPr>
-              <a:t>98,9%</a:t>
+              <a:t>78%</a:t>
             </a:r>
             <a:endParaRPr lang="en-US" sz="4000" dirty="0"/>
           </a:p>
@@ -15205,7 +15205,7 @@
                 <a:ea typeface="Calibri" pitchFamily="34" charset="-122"/>
                 <a:cs typeface="Calibri" pitchFamily="34" charset="-120"/>
               </a:rPr>
-              <a:t>93/94</a:t>
+              <a:t>128/164</a:t>
             </a:r>
             <a:endParaRPr lang="en-US" sz="1400" dirty="0"/>
           </a:p>
@@ -15283,7 +15283,7 @@
                 <a:ea typeface="Calibri" pitchFamily="34" charset="-122"/>
                 <a:cs typeface="Calibri" pitchFamily="34" charset="-120"/>
               </a:rPr>
-              <a:t>Global del módulo: 95,7%</a:t>
+              <a:t>Global del módulo: 89,4%</a:t>
             </a:r>
             <a:endParaRPr lang="en-US" sz="950" dirty="0"/>
           </a:p>
@@ -15376,7 +15376,7 @@
                 <a:ea typeface="Cambria" pitchFamily="34" charset="-122"/>
                 <a:cs typeface="Cambria" pitchFamily="34" charset="-120"/>
               </a:rPr>
-              <a:t>1</a:t>
+              <a:t>36</a:t>
             </a:r>
             <a:endParaRPr lang="en-US" sz="4000" dirty="0"/>
           </a:p>
@@ -15415,7 +15415,7 @@
                 <a:ea typeface="Calibri" pitchFamily="34" charset="-122"/>
                 <a:cs typeface="Calibri" pitchFamily="34" charset="-120"/>
               </a:rPr>
-              <a:t>hallazgo abierto</a:t>
+              <a:t>hallazgos abiertos</a:t>
             </a:r>
             <a:endParaRPr lang="en-US" sz="1400" dirty="0"/>
           </a:p>
@@ -15493,7 +15493,7 @@
                 <a:ea typeface="Calibri" pitchFamily="34" charset="-122"/>
                 <a:cs typeface="Calibri" pitchFamily="34" charset="-120"/>
               </a:rPr>
-              <a:t>1 iniciado</a:t>
+              <a:t>1 iniciado · 20 listo para revisión · 12 observada · 3 pendiente</a:t>
             </a:r>
             <a:endParaRPr lang="en-US" sz="950" dirty="0"/>
           </a:p>
@@ -15586,7 +15586,7 @@
                 <a:ea typeface="Cambria" pitchFamily="34" charset="-122"/>
                 <a:cs typeface="Cambria" pitchFamily="34" charset="-120"/>
               </a:rPr>
-              <a:t>139</a:t>
+              <a:t>131</a:t>
             </a:r>
             <a:endParaRPr lang="en-US" sz="4000" dirty="0"/>
           </a:p>
@@ -15819,7 +15819,7 @@
                 <a:ea typeface="Cambria" pitchFamily="34" charset="-122"/>
                 <a:cs typeface="Cambria" pitchFamily="34" charset="-120"/>
               </a:rPr>
-              <a:t>56,4%</a:t>
+              <a:t>32,3%</a:t>
             </a:r>
             <a:endParaRPr lang="en-US" sz="2600" dirty="0"/>
           </a:p>
@@ -15881,7 +15881,7 @@
                 <a:ea typeface="Calibri" pitchFamily="34" charset="-122"/>
                 <a:cs typeface="Calibri" pitchFamily="34" charset="-120"/>
               </a:rPr>
-              <a:t>global del módulo 37,8%</a:t>
+              <a:t>global del módulo 32,5%</a:t>
             </a:r>
             <a:endParaRPr lang="en-US" sz="1000" dirty="0"/>
           </a:p>
@@ -16133,13 +16133,13 @@
             <a:r>
               <a:rPr lang="en-US" sz="950" dirty="0">
                 <a:solidFill>
-                  <a:srgbClr val="6E8CA8"/>
-                </a:solidFill>
-                <a:latin typeface="Calibri" pitchFamily="34" charset="0"/>
-                <a:ea typeface="Calibri" pitchFamily="34" charset="-122"/>
-                <a:cs typeface="Calibri" pitchFamily="34" charset="-120"/>
-              </a:rPr>
-              <a:t>0 ab.</a:t>
+                  <a:srgbClr val="E3A55B"/>
+                </a:solidFill>
+                <a:latin typeface="Calibri" pitchFamily="34" charset="0"/>
+                <a:ea typeface="Calibri" pitchFamily="34" charset="-122"/>
+                <a:cs typeface="Calibri" pitchFamily="34" charset="-120"/>
+              </a:rPr>
+              <a:t>35 ab.</a:t>
             </a:r>
             <a:endParaRPr lang="en-US" sz="950" dirty="0"/>
           </a:p>
@@ -16178,7 +16178,7 @@
                 <a:ea typeface="Cambria" pitchFamily="34" charset="-122"/>
                 <a:cs typeface="Cambria" pitchFamily="34" charset="-120"/>
               </a:rPr>
-              <a:t>1</a:t>
+              <a:t>71</a:t>
             </a:r>
             <a:endParaRPr lang="en-US" sz="1600" dirty="0"/>
           </a:p>
@@ -16354,7 +16354,7 @@
                 <a:ea typeface="Calibri" pitchFamily="34" charset="-122"/>
                 <a:cs typeface="Calibri" pitchFamily="34" charset="-120"/>
               </a:rPr>
-              <a:t>Fuente: 1e73482e-Data_NCR03082026.xlsx — hoja «Observaciones» · Corte 03-08-2026 · 438 registros desde 10-02-2023</a:t>
+              <a:t>Fuente: 1e73482e-Data_NCR03082026.xlsx — hoja «Observaciones» · Corte 03-08-2026 · 508 registros desde 10-02-2023</a:t>
             </a:r>
             <a:endParaRPr lang="en-US" sz="850" dirty="0"/>
           </a:p>
@@ -16605,7 +16605,7 @@
                 <a:ea typeface="Calibri" pitchFamily="34" charset="-122"/>
                 <a:cs typeface="Calibri" pitchFamily="34" charset="-120"/>
               </a:rPr>
-              <a:t>1 hallazgo sigue abierto; 0 con más de 180 días. Se listan del más antiguo al más reciente.</a:t>
+              <a:t>36 hallazgos siguen abiertos; 14 con más de 180 días. Se listan del más antiguo al más reciente.</a:t>
             </a:r>
             <a:endParaRPr lang="en-US" sz="1350" dirty="0"/>
           </a:p>
@@ -16979,7 +16979,7 @@
                 <a:ea typeface="Calibri" pitchFamily="34" charset="-122"/>
                 <a:cs typeface="Calibri" pitchFamily="34" charset="-120"/>
               </a:rPr>
-              <a:t>Calidad - 00…</a:t>
+              <a:t>MASA-4</a:t>
             </a:r>
             <a:endParaRPr lang="en-US" sz="1050" dirty="0"/>
           </a:p>
@@ -17018,7 +17018,7 @@
                 <a:ea typeface="Calibri" pitchFamily="34" charset="-122"/>
                 <a:cs typeface="Calibri" pitchFamily="34" charset="-120"/>
               </a:rPr>
-              <a:t>No Conformidad</a:t>
+              <a:t>Observación</a:t>
             </a:r>
             <a:endParaRPr lang="en-US" sz="1050" dirty="0"/>
           </a:p>
@@ -17051,13 +17051,13 @@
             <a:r>
               <a:rPr lang="en-US" sz="1050" b="1" dirty="0">
                 <a:solidFill>
-                  <a:srgbClr val="2E6FB5"/>
-                </a:solidFill>
-                <a:latin typeface="Calibri" pitchFamily="34" charset="0"/>
-                <a:ea typeface="Calibri" pitchFamily="34" charset="-122"/>
-                <a:cs typeface="Calibri" pitchFamily="34" charset="-120"/>
-              </a:rPr>
-              <a:t>Interna (Besalco)</a:t>
+                  <a:srgbClr val="C87A32"/>
+                </a:solidFill>
+                <a:latin typeface="Calibri" pitchFamily="34" charset="0"/>
+                <a:ea typeface="Calibri" pitchFamily="34" charset="-122"/>
+                <a:cs typeface="Calibri" pitchFamily="34" charset="-120"/>
+              </a:rPr>
+              <a:t>Externa · Cliente</a:t>
             </a:r>
             <a:endParaRPr lang="en-US" sz="1050" dirty="0"/>
           </a:p>
@@ -17096,7 +17096,7 @@
                 <a:ea typeface="Calibri" pitchFamily="34" charset="-122"/>
                 <a:cs typeface="Calibri" pitchFamily="34" charset="-120"/>
               </a:rPr>
-              <a:t>OO.CC</a:t>
+              <a:t>Sin especialidad</a:t>
             </a:r>
             <a:endParaRPr lang="en-US" sz="1050" dirty="0"/>
           </a:p>
@@ -17135,7 +17135,7 @@
                 <a:ea typeface="Calibri" pitchFamily="34" charset="-122"/>
                 <a:cs typeface="Calibri" pitchFamily="34" charset="-120"/>
               </a:rPr>
-              <a:t>Renato Muñoz F.</a:t>
+              <a:t>Sin asignar</a:t>
             </a:r>
             <a:endParaRPr lang="en-US" sz="1050" dirty="0"/>
           </a:p>
@@ -17174,7 +17174,7 @@
                 <a:ea typeface="Calibri" pitchFamily="34" charset="-122"/>
                 <a:cs typeface="Calibri" pitchFamily="34" charset="-120"/>
               </a:rPr>
-              <a:t>Iniciado</a:t>
+              <a:t>Listo para revisi…</a:t>
             </a:r>
             <a:endParaRPr lang="en-US" sz="1050" dirty="0"/>
           </a:p>
@@ -17205,15 +17205,15 @@
               <a:buNone/>
             </a:pPr>
             <a:r>
-              <a:rPr lang="en-US" sz="1050" dirty="0">
-                <a:solidFill>
-                  <a:srgbClr val="1A2433"/>
-                </a:solidFill>
-                <a:latin typeface="Calibri" pitchFamily="34" charset="0"/>
-                <a:ea typeface="Calibri" pitchFamily="34" charset="-122"/>
-                <a:cs typeface="Calibri" pitchFamily="34" charset="-120"/>
-              </a:rPr>
-              <a:t>70</a:t>
+              <a:rPr lang="en-US" sz="1050" b="1" dirty="0">
+                <a:solidFill>
+                  <a:srgbClr val="C0392B"/>
+                </a:solidFill>
+                <a:latin typeface="Calibri" pitchFamily="34" charset="0"/>
+                <a:ea typeface="Calibri" pitchFamily="34" charset="-122"/>
+                <a:cs typeface="Calibri" pitchFamily="34" charset="-120"/>
+              </a:rPr>
+              <a:t>395</a:t>
             </a:r>
             <a:endParaRPr lang="en-US" sz="1050" dirty="0"/>
           </a:p>
@@ -17252,7 +17252,7 @@
                 <a:ea typeface="Calibri" pitchFamily="34" charset="-122"/>
                 <a:cs typeface="Calibri" pitchFamily="34" charset="-120"/>
               </a:rPr>
-              <a:t>Incumplimiento en requisito para ej…</a:t>
+              <a:t>Sistema de conexión desde chute 220…</a:t>
             </a:r>
             <a:endParaRPr lang="en-US" sz="1000" dirty="0"/>
           </a:p>
@@ -17289,6 +17289,2805 @@
         </p:nvSpPr>
         <p:spPr>
           <a:xfrm>
+            <a:off x="457200" y="2615184"/>
+            <a:ext cx="11292840" cy="347472"/>
+          </a:xfrm>
+          <a:prstGeom prst="rect">
+            <a:avLst/>
+          </a:prstGeom>
+          <a:solidFill>
+            <a:srgbClr val="FFFFFF"/>
+          </a:solidFill>
+          <a:ln/>
+        </p:spPr>
+      </p:sp>
+      <p:sp>
+        <p:nvSpPr>
+          <p:cNvPr id="25" name="Text 22"/>
+          <p:cNvSpPr/>
+          <p:nvPr/>
+        </p:nvSpPr>
+        <p:spPr>
+          <a:xfrm>
+            <a:off x="502920" y="2660904"/>
+            <a:ext cx="822960" cy="256032"/>
+          </a:xfrm>
+          <a:prstGeom prst="rect">
+            <a:avLst/>
+          </a:prstGeom>
+          <a:noFill/>
+          <a:ln/>
+        </p:spPr>
+        <p:txBody>
+          <a:bodyPr wrap="square" lIns="0" tIns="0" rIns="0" bIns="0" rtlCol="0" anchor="ctr"/>
+          <a:lstStyle/>
+          <a:p>
+            <a:pPr algn="l" indent="0" marL="0">
+              <a:buNone/>
+            </a:pPr>
+            <a:r>
+              <a:rPr lang="en-US" sz="1050" dirty="0">
+                <a:solidFill>
+                  <a:srgbClr val="1A2433"/>
+                </a:solidFill>
+                <a:latin typeface="Calibri" pitchFamily="34" charset="0"/>
+                <a:ea typeface="Calibri" pitchFamily="34" charset="-122"/>
+                <a:cs typeface="Calibri" pitchFamily="34" charset="-120"/>
+              </a:rPr>
+              <a:t>MASA-2</a:t>
+            </a:r>
+            <a:endParaRPr lang="en-US" sz="1050" dirty="0"/>
+          </a:p>
+        </p:txBody>
+      </p:sp>
+      <p:sp>
+        <p:nvSpPr>
+          <p:cNvPr id="26" name="Text 23"/>
+          <p:cNvSpPr/>
+          <p:nvPr/>
+        </p:nvSpPr>
+        <p:spPr>
+          <a:xfrm>
+            <a:off x="1371600" y="2660904"/>
+            <a:ext cx="1508760" cy="256032"/>
+          </a:xfrm>
+          <a:prstGeom prst="rect">
+            <a:avLst/>
+          </a:prstGeom>
+          <a:noFill/>
+          <a:ln/>
+        </p:spPr>
+        <p:txBody>
+          <a:bodyPr wrap="square" lIns="0" tIns="0" rIns="0" bIns="0" rtlCol="0" anchor="ctr"/>
+          <a:lstStyle/>
+          <a:p>
+            <a:pPr algn="l" indent="0" marL="0">
+              <a:buNone/>
+            </a:pPr>
+            <a:r>
+              <a:rPr lang="en-US" sz="1050" dirty="0">
+                <a:solidFill>
+                  <a:srgbClr val="1A2433"/>
+                </a:solidFill>
+                <a:latin typeface="Calibri" pitchFamily="34" charset="0"/>
+                <a:ea typeface="Calibri" pitchFamily="34" charset="-122"/>
+                <a:cs typeface="Calibri" pitchFamily="34" charset="-120"/>
+              </a:rPr>
+              <a:t>No Conformidad</a:t>
+            </a:r>
+            <a:endParaRPr lang="en-US" sz="1050" dirty="0"/>
+          </a:p>
+        </p:txBody>
+      </p:sp>
+      <p:sp>
+        <p:nvSpPr>
+          <p:cNvPr id="27" name="Text 24"/>
+          <p:cNvSpPr/>
+          <p:nvPr/>
+        </p:nvSpPr>
+        <p:spPr>
+          <a:xfrm>
+            <a:off x="2926080" y="2660904"/>
+            <a:ext cx="1463040" cy="256032"/>
+          </a:xfrm>
+          <a:prstGeom prst="rect">
+            <a:avLst/>
+          </a:prstGeom>
+          <a:noFill/>
+          <a:ln/>
+        </p:spPr>
+        <p:txBody>
+          <a:bodyPr wrap="square" lIns="0" tIns="0" rIns="0" bIns="0" rtlCol="0" anchor="ctr"/>
+          <a:lstStyle/>
+          <a:p>
+            <a:pPr algn="l" indent="0" marL="0">
+              <a:buNone/>
+            </a:pPr>
+            <a:r>
+              <a:rPr lang="en-US" sz="1050" b="1" dirty="0">
+                <a:solidFill>
+                  <a:srgbClr val="C87A32"/>
+                </a:solidFill>
+                <a:latin typeface="Calibri" pitchFamily="34" charset="0"/>
+                <a:ea typeface="Calibri" pitchFamily="34" charset="-122"/>
+                <a:cs typeface="Calibri" pitchFamily="34" charset="-120"/>
+              </a:rPr>
+              <a:t>Externa · Cliente</a:t>
+            </a:r>
+            <a:endParaRPr lang="en-US" sz="1050" dirty="0"/>
+          </a:p>
+        </p:txBody>
+      </p:sp>
+      <p:sp>
+        <p:nvSpPr>
+          <p:cNvPr id="28" name="Text 25"/>
+          <p:cNvSpPr/>
+          <p:nvPr/>
+        </p:nvSpPr>
+        <p:spPr>
+          <a:xfrm>
+            <a:off x="4434840" y="2660904"/>
+            <a:ext cx="1280160" cy="256032"/>
+          </a:xfrm>
+          <a:prstGeom prst="rect">
+            <a:avLst/>
+          </a:prstGeom>
+          <a:noFill/>
+          <a:ln/>
+        </p:spPr>
+        <p:txBody>
+          <a:bodyPr wrap="square" lIns="0" tIns="0" rIns="0" bIns="0" rtlCol="0" anchor="ctr"/>
+          <a:lstStyle/>
+          <a:p>
+            <a:pPr algn="l" indent="0" marL="0">
+              <a:buNone/>
+            </a:pPr>
+            <a:r>
+              <a:rPr lang="en-US" sz="1050" dirty="0">
+                <a:solidFill>
+                  <a:srgbClr val="1A2433"/>
+                </a:solidFill>
+                <a:latin typeface="Calibri" pitchFamily="34" charset="0"/>
+                <a:ea typeface="Calibri" pitchFamily="34" charset="-122"/>
+                <a:cs typeface="Calibri" pitchFamily="34" charset="-120"/>
+              </a:rPr>
+              <a:t>Sin especialidad</a:t>
+            </a:r>
+            <a:endParaRPr lang="en-US" sz="1050" dirty="0"/>
+          </a:p>
+        </p:txBody>
+      </p:sp>
+      <p:sp>
+        <p:nvSpPr>
+          <p:cNvPr id="29" name="Text 26"/>
+          <p:cNvSpPr/>
+          <p:nvPr/>
+        </p:nvSpPr>
+        <p:spPr>
+          <a:xfrm>
+            <a:off x="5760720" y="2660904"/>
+            <a:ext cx="1508760" cy="256032"/>
+          </a:xfrm>
+          <a:prstGeom prst="rect">
+            <a:avLst/>
+          </a:prstGeom>
+          <a:noFill/>
+          <a:ln/>
+        </p:spPr>
+        <p:txBody>
+          <a:bodyPr wrap="square" lIns="0" tIns="0" rIns="0" bIns="0" rtlCol="0" anchor="ctr"/>
+          <a:lstStyle/>
+          <a:p>
+            <a:pPr algn="l" indent="0" marL="0">
+              <a:buNone/>
+            </a:pPr>
+            <a:r>
+              <a:rPr lang="en-US" sz="1050" dirty="0">
+                <a:solidFill>
+                  <a:srgbClr val="1A2433"/>
+                </a:solidFill>
+                <a:latin typeface="Calibri" pitchFamily="34" charset="0"/>
+                <a:ea typeface="Calibri" pitchFamily="34" charset="-122"/>
+                <a:cs typeface="Calibri" pitchFamily="34" charset="-120"/>
+              </a:rPr>
+              <a:t>Sin asignar</a:t>
+            </a:r>
+            <a:endParaRPr lang="en-US" sz="1050" dirty="0"/>
+          </a:p>
+        </p:txBody>
+      </p:sp>
+      <p:sp>
+        <p:nvSpPr>
+          <p:cNvPr id="30" name="Text 27"/>
+          <p:cNvSpPr/>
+          <p:nvPr/>
+        </p:nvSpPr>
+        <p:spPr>
+          <a:xfrm>
+            <a:off x="7315200" y="2660904"/>
+            <a:ext cx="1325880" cy="256032"/>
+          </a:xfrm>
+          <a:prstGeom prst="rect">
+            <a:avLst/>
+          </a:prstGeom>
+          <a:noFill/>
+          <a:ln/>
+        </p:spPr>
+        <p:txBody>
+          <a:bodyPr wrap="square" lIns="0" tIns="0" rIns="0" bIns="0" rtlCol="0" anchor="ctr"/>
+          <a:lstStyle/>
+          <a:p>
+            <a:pPr algn="l" indent="0" marL="0">
+              <a:buNone/>
+            </a:pPr>
+            <a:r>
+              <a:rPr lang="en-US" sz="1050" dirty="0">
+                <a:solidFill>
+                  <a:srgbClr val="1A2433"/>
+                </a:solidFill>
+                <a:latin typeface="Calibri" pitchFamily="34" charset="0"/>
+                <a:ea typeface="Calibri" pitchFamily="34" charset="-122"/>
+                <a:cs typeface="Calibri" pitchFamily="34" charset="-120"/>
+              </a:rPr>
+              <a:t>Listo para revisi…</a:t>
+            </a:r>
+            <a:endParaRPr lang="en-US" sz="1050" dirty="0"/>
+          </a:p>
+        </p:txBody>
+      </p:sp>
+      <p:sp>
+        <p:nvSpPr>
+          <p:cNvPr id="31" name="Text 28"/>
+          <p:cNvSpPr/>
+          <p:nvPr/>
+        </p:nvSpPr>
+        <p:spPr>
+          <a:xfrm>
+            <a:off x="8686800" y="2660904"/>
+            <a:ext cx="640080" cy="256032"/>
+          </a:xfrm>
+          <a:prstGeom prst="rect">
+            <a:avLst/>
+          </a:prstGeom>
+          <a:noFill/>
+          <a:ln/>
+        </p:spPr>
+        <p:txBody>
+          <a:bodyPr wrap="square" lIns="0" tIns="0" rIns="0" bIns="0" rtlCol="0" anchor="ctr"/>
+          <a:lstStyle/>
+          <a:p>
+            <a:pPr algn="r" indent="0" marL="0">
+              <a:buNone/>
+            </a:pPr>
+            <a:r>
+              <a:rPr lang="en-US" sz="1050" b="1" dirty="0">
+                <a:solidFill>
+                  <a:srgbClr val="C0392B"/>
+                </a:solidFill>
+                <a:latin typeface="Calibri" pitchFamily="34" charset="0"/>
+                <a:ea typeface="Calibri" pitchFamily="34" charset="-122"/>
+                <a:cs typeface="Calibri" pitchFamily="34" charset="-120"/>
+              </a:rPr>
+              <a:t>392</a:t>
+            </a:r>
+            <a:endParaRPr lang="en-US" sz="1050" dirty="0"/>
+          </a:p>
+        </p:txBody>
+      </p:sp>
+      <p:sp>
+        <p:nvSpPr>
+          <p:cNvPr id="32" name="Text 29"/>
+          <p:cNvSpPr/>
+          <p:nvPr/>
+        </p:nvSpPr>
+        <p:spPr>
+          <a:xfrm>
+            <a:off x="9464040" y="2660904"/>
+            <a:ext cx="2286000" cy="256032"/>
+          </a:xfrm>
+          <a:prstGeom prst="rect">
+            <a:avLst/>
+          </a:prstGeom>
+          <a:noFill/>
+          <a:ln/>
+        </p:spPr>
+        <p:txBody>
+          <a:bodyPr wrap="square" lIns="0" tIns="0" rIns="0" bIns="0" rtlCol="0" anchor="ctr"/>
+          <a:lstStyle/>
+          <a:p>
+            <a:pPr algn="l" indent="0" marL="0">
+              <a:buNone/>
+            </a:pPr>
+            <a:r>
+              <a:rPr lang="en-US" sz="1000" dirty="0">
+                <a:solidFill>
+                  <a:srgbClr val="1A2433"/>
+                </a:solidFill>
+                <a:latin typeface="Calibri" pitchFamily="34" charset="0"/>
+                <a:ea typeface="Calibri" pitchFamily="34" charset="-122"/>
+                <a:cs typeface="Calibri" pitchFamily="34" charset="-120"/>
+              </a:rPr>
+              <a:t>Uniones soldadas y touch-up en tolv…</a:t>
+            </a:r>
+            <a:endParaRPr lang="en-US" sz="1000" dirty="0"/>
+          </a:p>
+        </p:txBody>
+      </p:sp>
+      <p:sp>
+        <p:nvSpPr>
+          <p:cNvPr id="33" name="Shape 30"/>
+          <p:cNvSpPr/>
+          <p:nvPr/>
+        </p:nvSpPr>
+        <p:spPr>
+          <a:xfrm>
+            <a:off x="502920" y="2953512"/>
+            <a:ext cx="11247120" cy="0"/>
+          </a:xfrm>
+          <a:prstGeom prst="line">
+            <a:avLst/>
+          </a:prstGeom>
+          <a:noFill/>
+          <a:ln w="9525">
+            <a:solidFill>
+              <a:srgbClr val="D9DFE6"/>
+            </a:solidFill>
+            <a:prstDash val="solid"/>
+          </a:ln>
+        </p:spPr>
+      </p:sp>
+      <p:sp>
+        <p:nvSpPr>
+          <p:cNvPr id="34" name="Text 31"/>
+          <p:cNvSpPr/>
+          <p:nvPr/>
+        </p:nvSpPr>
+        <p:spPr>
+          <a:xfrm>
+            <a:off x="502920" y="3008376"/>
+            <a:ext cx="822960" cy="256032"/>
+          </a:xfrm>
+          <a:prstGeom prst="rect">
+            <a:avLst/>
+          </a:prstGeom>
+          <a:noFill/>
+          <a:ln/>
+        </p:spPr>
+        <p:txBody>
+          <a:bodyPr wrap="square" lIns="0" tIns="0" rIns="0" bIns="0" rtlCol="0" anchor="ctr"/>
+          <a:lstStyle/>
+          <a:p>
+            <a:pPr algn="l" indent="0" marL="0">
+              <a:buNone/>
+            </a:pPr>
+            <a:r>
+              <a:rPr lang="en-US" sz="1050" dirty="0">
+                <a:solidFill>
+                  <a:srgbClr val="1A2433"/>
+                </a:solidFill>
+                <a:latin typeface="Calibri" pitchFamily="34" charset="0"/>
+                <a:ea typeface="Calibri" pitchFamily="34" charset="-122"/>
+                <a:cs typeface="Calibri" pitchFamily="34" charset="-120"/>
+              </a:rPr>
+              <a:t>MASA-6</a:t>
+            </a:r>
+            <a:endParaRPr lang="en-US" sz="1050" dirty="0"/>
+          </a:p>
+        </p:txBody>
+      </p:sp>
+      <p:sp>
+        <p:nvSpPr>
+          <p:cNvPr id="35" name="Text 32"/>
+          <p:cNvSpPr/>
+          <p:nvPr/>
+        </p:nvSpPr>
+        <p:spPr>
+          <a:xfrm>
+            <a:off x="1371600" y="3008376"/>
+            <a:ext cx="1508760" cy="256032"/>
+          </a:xfrm>
+          <a:prstGeom prst="rect">
+            <a:avLst/>
+          </a:prstGeom>
+          <a:noFill/>
+          <a:ln/>
+        </p:spPr>
+        <p:txBody>
+          <a:bodyPr wrap="square" lIns="0" tIns="0" rIns="0" bIns="0" rtlCol="0" anchor="ctr"/>
+          <a:lstStyle/>
+          <a:p>
+            <a:pPr algn="l" indent="0" marL="0">
+              <a:buNone/>
+            </a:pPr>
+            <a:r>
+              <a:rPr lang="en-US" sz="1050" dirty="0">
+                <a:solidFill>
+                  <a:srgbClr val="1A2433"/>
+                </a:solidFill>
+                <a:latin typeface="Calibri" pitchFamily="34" charset="0"/>
+                <a:ea typeface="Calibri" pitchFamily="34" charset="-122"/>
+                <a:cs typeface="Calibri" pitchFamily="34" charset="-120"/>
+              </a:rPr>
+              <a:t>Observación</a:t>
+            </a:r>
+            <a:endParaRPr lang="en-US" sz="1050" dirty="0"/>
+          </a:p>
+        </p:txBody>
+      </p:sp>
+      <p:sp>
+        <p:nvSpPr>
+          <p:cNvPr id="36" name="Text 33"/>
+          <p:cNvSpPr/>
+          <p:nvPr/>
+        </p:nvSpPr>
+        <p:spPr>
+          <a:xfrm>
+            <a:off x="2926080" y="3008376"/>
+            <a:ext cx="1463040" cy="256032"/>
+          </a:xfrm>
+          <a:prstGeom prst="rect">
+            <a:avLst/>
+          </a:prstGeom>
+          <a:noFill/>
+          <a:ln/>
+        </p:spPr>
+        <p:txBody>
+          <a:bodyPr wrap="square" lIns="0" tIns="0" rIns="0" bIns="0" rtlCol="0" anchor="ctr"/>
+          <a:lstStyle/>
+          <a:p>
+            <a:pPr algn="l" indent="0" marL="0">
+              <a:buNone/>
+            </a:pPr>
+            <a:r>
+              <a:rPr lang="en-US" sz="1050" b="1" dirty="0">
+                <a:solidFill>
+                  <a:srgbClr val="C87A32"/>
+                </a:solidFill>
+                <a:latin typeface="Calibri" pitchFamily="34" charset="0"/>
+                <a:ea typeface="Calibri" pitchFamily="34" charset="-122"/>
+                <a:cs typeface="Calibri" pitchFamily="34" charset="-120"/>
+              </a:rPr>
+              <a:t>Externa · Cliente</a:t>
+            </a:r>
+            <a:endParaRPr lang="en-US" sz="1050" dirty="0"/>
+          </a:p>
+        </p:txBody>
+      </p:sp>
+      <p:sp>
+        <p:nvSpPr>
+          <p:cNvPr id="37" name="Text 34"/>
+          <p:cNvSpPr/>
+          <p:nvPr/>
+        </p:nvSpPr>
+        <p:spPr>
+          <a:xfrm>
+            <a:off x="4434840" y="3008376"/>
+            <a:ext cx="1280160" cy="256032"/>
+          </a:xfrm>
+          <a:prstGeom prst="rect">
+            <a:avLst/>
+          </a:prstGeom>
+          <a:noFill/>
+          <a:ln/>
+        </p:spPr>
+        <p:txBody>
+          <a:bodyPr wrap="square" lIns="0" tIns="0" rIns="0" bIns="0" rtlCol="0" anchor="ctr"/>
+          <a:lstStyle/>
+          <a:p>
+            <a:pPr algn="l" indent="0" marL="0">
+              <a:buNone/>
+            </a:pPr>
+            <a:r>
+              <a:rPr lang="en-US" sz="1050" dirty="0">
+                <a:solidFill>
+                  <a:srgbClr val="1A2433"/>
+                </a:solidFill>
+                <a:latin typeface="Calibri" pitchFamily="34" charset="0"/>
+                <a:ea typeface="Calibri" pitchFamily="34" charset="-122"/>
+                <a:cs typeface="Calibri" pitchFamily="34" charset="-120"/>
+              </a:rPr>
+              <a:t>Sin especialidad</a:t>
+            </a:r>
+            <a:endParaRPr lang="en-US" sz="1050" dirty="0"/>
+          </a:p>
+        </p:txBody>
+      </p:sp>
+      <p:sp>
+        <p:nvSpPr>
+          <p:cNvPr id="38" name="Text 35"/>
+          <p:cNvSpPr/>
+          <p:nvPr/>
+        </p:nvSpPr>
+        <p:spPr>
+          <a:xfrm>
+            <a:off x="5760720" y="3008376"/>
+            <a:ext cx="1508760" cy="256032"/>
+          </a:xfrm>
+          <a:prstGeom prst="rect">
+            <a:avLst/>
+          </a:prstGeom>
+          <a:noFill/>
+          <a:ln/>
+        </p:spPr>
+        <p:txBody>
+          <a:bodyPr wrap="square" lIns="0" tIns="0" rIns="0" bIns="0" rtlCol="0" anchor="ctr"/>
+          <a:lstStyle/>
+          <a:p>
+            <a:pPr algn="l" indent="0" marL="0">
+              <a:buNone/>
+            </a:pPr>
+            <a:r>
+              <a:rPr lang="en-US" sz="1050" dirty="0">
+                <a:solidFill>
+                  <a:srgbClr val="1A2433"/>
+                </a:solidFill>
+                <a:latin typeface="Calibri" pitchFamily="34" charset="0"/>
+                <a:ea typeface="Calibri" pitchFamily="34" charset="-122"/>
+                <a:cs typeface="Calibri" pitchFamily="34" charset="-120"/>
+              </a:rPr>
+              <a:t>Sin asignar</a:t>
+            </a:r>
+            <a:endParaRPr lang="en-US" sz="1050" dirty="0"/>
+          </a:p>
+        </p:txBody>
+      </p:sp>
+      <p:sp>
+        <p:nvSpPr>
+          <p:cNvPr id="39" name="Text 36"/>
+          <p:cNvSpPr/>
+          <p:nvPr/>
+        </p:nvSpPr>
+        <p:spPr>
+          <a:xfrm>
+            <a:off x="7315200" y="3008376"/>
+            <a:ext cx="1325880" cy="256032"/>
+          </a:xfrm>
+          <a:prstGeom prst="rect">
+            <a:avLst/>
+          </a:prstGeom>
+          <a:noFill/>
+          <a:ln/>
+        </p:spPr>
+        <p:txBody>
+          <a:bodyPr wrap="square" lIns="0" tIns="0" rIns="0" bIns="0" rtlCol="0" anchor="ctr"/>
+          <a:lstStyle/>
+          <a:p>
+            <a:pPr algn="l" indent="0" marL="0">
+              <a:buNone/>
+            </a:pPr>
+            <a:r>
+              <a:rPr lang="en-US" sz="1050" dirty="0">
+                <a:solidFill>
+                  <a:srgbClr val="1A2433"/>
+                </a:solidFill>
+                <a:latin typeface="Calibri" pitchFamily="34" charset="0"/>
+                <a:ea typeface="Calibri" pitchFamily="34" charset="-122"/>
+                <a:cs typeface="Calibri" pitchFamily="34" charset="-120"/>
+              </a:rPr>
+              <a:t>Listo para revisi…</a:t>
+            </a:r>
+            <a:endParaRPr lang="en-US" sz="1050" dirty="0"/>
+          </a:p>
+        </p:txBody>
+      </p:sp>
+      <p:sp>
+        <p:nvSpPr>
+          <p:cNvPr id="40" name="Text 37"/>
+          <p:cNvSpPr/>
+          <p:nvPr/>
+        </p:nvSpPr>
+        <p:spPr>
+          <a:xfrm>
+            <a:off x="8686800" y="3008376"/>
+            <a:ext cx="640080" cy="256032"/>
+          </a:xfrm>
+          <a:prstGeom prst="rect">
+            <a:avLst/>
+          </a:prstGeom>
+          <a:noFill/>
+          <a:ln/>
+        </p:spPr>
+        <p:txBody>
+          <a:bodyPr wrap="square" lIns="0" tIns="0" rIns="0" bIns="0" rtlCol="0" anchor="ctr"/>
+          <a:lstStyle/>
+          <a:p>
+            <a:pPr algn="r" indent="0" marL="0">
+              <a:buNone/>
+            </a:pPr>
+            <a:r>
+              <a:rPr lang="en-US" sz="1050" b="1" dirty="0">
+                <a:solidFill>
+                  <a:srgbClr val="C0392B"/>
+                </a:solidFill>
+                <a:latin typeface="Calibri" pitchFamily="34" charset="0"/>
+                <a:ea typeface="Calibri" pitchFamily="34" charset="-122"/>
+                <a:cs typeface="Calibri" pitchFamily="34" charset="-120"/>
+              </a:rPr>
+              <a:t>361</a:t>
+            </a:r>
+            <a:endParaRPr lang="en-US" sz="1050" dirty="0"/>
+          </a:p>
+        </p:txBody>
+      </p:sp>
+      <p:sp>
+        <p:nvSpPr>
+          <p:cNvPr id="41" name="Text 38"/>
+          <p:cNvSpPr/>
+          <p:nvPr/>
+        </p:nvSpPr>
+        <p:spPr>
+          <a:xfrm>
+            <a:off x="9464040" y="3008376"/>
+            <a:ext cx="2286000" cy="256032"/>
+          </a:xfrm>
+          <a:prstGeom prst="rect">
+            <a:avLst/>
+          </a:prstGeom>
+          <a:noFill/>
+          <a:ln/>
+        </p:spPr>
+        <p:txBody>
+          <a:bodyPr wrap="square" lIns="0" tIns="0" rIns="0" bIns="0" rtlCol="0" anchor="ctr"/>
+          <a:lstStyle/>
+          <a:p>
+            <a:pPr algn="l" indent="0" marL="0">
+              <a:buNone/>
+            </a:pPr>
+            <a:r>
+              <a:rPr lang="en-US" sz="1000" dirty="0">
+                <a:solidFill>
+                  <a:srgbClr val="1A2433"/>
+                </a:solidFill>
+                <a:latin typeface="Calibri" pitchFamily="34" charset="0"/>
+                <a:ea typeface="Calibri" pitchFamily="34" charset="-122"/>
+                <a:cs typeface="Calibri" pitchFamily="34" charset="-120"/>
+              </a:rPr>
+              <a:t>Condición del grout de nivelación e…</a:t>
+            </a:r>
+            <a:endParaRPr lang="en-US" sz="1000" dirty="0"/>
+          </a:p>
+        </p:txBody>
+      </p:sp>
+      <p:sp>
+        <p:nvSpPr>
+          <p:cNvPr id="42" name="Shape 39"/>
+          <p:cNvSpPr/>
+          <p:nvPr/>
+        </p:nvSpPr>
+        <p:spPr>
+          <a:xfrm>
+            <a:off x="502920" y="3300984"/>
+            <a:ext cx="11247120" cy="0"/>
+          </a:xfrm>
+          <a:prstGeom prst="line">
+            <a:avLst/>
+          </a:prstGeom>
+          <a:noFill/>
+          <a:ln w="9525">
+            <a:solidFill>
+              <a:srgbClr val="D9DFE6"/>
+            </a:solidFill>
+            <a:prstDash val="solid"/>
+          </a:ln>
+        </p:spPr>
+      </p:sp>
+      <p:sp>
+        <p:nvSpPr>
+          <p:cNvPr id="43" name="Shape 40"/>
+          <p:cNvSpPr/>
+          <p:nvPr/>
+        </p:nvSpPr>
+        <p:spPr>
+          <a:xfrm>
+            <a:off x="457200" y="3310128"/>
+            <a:ext cx="11292840" cy="347472"/>
+          </a:xfrm>
+          <a:prstGeom prst="rect">
+            <a:avLst/>
+          </a:prstGeom>
+          <a:solidFill>
+            <a:srgbClr val="FFFFFF"/>
+          </a:solidFill>
+          <a:ln/>
+        </p:spPr>
+      </p:sp>
+      <p:sp>
+        <p:nvSpPr>
+          <p:cNvPr id="44" name="Text 41"/>
+          <p:cNvSpPr/>
+          <p:nvPr/>
+        </p:nvSpPr>
+        <p:spPr>
+          <a:xfrm>
+            <a:off x="502920" y="3355848"/>
+            <a:ext cx="822960" cy="256032"/>
+          </a:xfrm>
+          <a:prstGeom prst="rect">
+            <a:avLst/>
+          </a:prstGeom>
+          <a:noFill/>
+          <a:ln/>
+        </p:spPr>
+        <p:txBody>
+          <a:bodyPr wrap="square" lIns="0" tIns="0" rIns="0" bIns="0" rtlCol="0" anchor="ctr"/>
+          <a:lstStyle/>
+          <a:p>
+            <a:pPr algn="l" indent="0" marL="0">
+              <a:buNone/>
+            </a:pPr>
+            <a:r>
+              <a:rPr lang="en-US" sz="1050" dirty="0">
+                <a:solidFill>
+                  <a:srgbClr val="1A2433"/>
+                </a:solidFill>
+                <a:latin typeface="Calibri" pitchFamily="34" charset="0"/>
+                <a:ea typeface="Calibri" pitchFamily="34" charset="-122"/>
+                <a:cs typeface="Calibri" pitchFamily="34" charset="-120"/>
+              </a:rPr>
+              <a:t>MASA-8</a:t>
+            </a:r>
+            <a:endParaRPr lang="en-US" sz="1050" dirty="0"/>
+          </a:p>
+        </p:txBody>
+      </p:sp>
+      <p:sp>
+        <p:nvSpPr>
+          <p:cNvPr id="45" name="Text 42"/>
+          <p:cNvSpPr/>
+          <p:nvPr/>
+        </p:nvSpPr>
+        <p:spPr>
+          <a:xfrm>
+            <a:off x="1371600" y="3355848"/>
+            <a:ext cx="1508760" cy="256032"/>
+          </a:xfrm>
+          <a:prstGeom prst="rect">
+            <a:avLst/>
+          </a:prstGeom>
+          <a:noFill/>
+          <a:ln/>
+        </p:spPr>
+        <p:txBody>
+          <a:bodyPr wrap="square" lIns="0" tIns="0" rIns="0" bIns="0" rtlCol="0" anchor="ctr"/>
+          <a:lstStyle/>
+          <a:p>
+            <a:pPr algn="l" indent="0" marL="0">
+              <a:buNone/>
+            </a:pPr>
+            <a:r>
+              <a:rPr lang="en-US" sz="1050" dirty="0">
+                <a:solidFill>
+                  <a:srgbClr val="1A2433"/>
+                </a:solidFill>
+                <a:latin typeface="Calibri" pitchFamily="34" charset="0"/>
+                <a:ea typeface="Calibri" pitchFamily="34" charset="-122"/>
+                <a:cs typeface="Calibri" pitchFamily="34" charset="-120"/>
+              </a:rPr>
+              <a:t>Observación</a:t>
+            </a:r>
+            <a:endParaRPr lang="en-US" sz="1050" dirty="0"/>
+          </a:p>
+        </p:txBody>
+      </p:sp>
+      <p:sp>
+        <p:nvSpPr>
+          <p:cNvPr id="46" name="Text 43"/>
+          <p:cNvSpPr/>
+          <p:nvPr/>
+        </p:nvSpPr>
+        <p:spPr>
+          <a:xfrm>
+            <a:off x="2926080" y="3355848"/>
+            <a:ext cx="1463040" cy="256032"/>
+          </a:xfrm>
+          <a:prstGeom prst="rect">
+            <a:avLst/>
+          </a:prstGeom>
+          <a:noFill/>
+          <a:ln/>
+        </p:spPr>
+        <p:txBody>
+          <a:bodyPr wrap="square" lIns="0" tIns="0" rIns="0" bIns="0" rtlCol="0" anchor="ctr"/>
+          <a:lstStyle/>
+          <a:p>
+            <a:pPr algn="l" indent="0" marL="0">
+              <a:buNone/>
+            </a:pPr>
+            <a:r>
+              <a:rPr lang="en-US" sz="1050" b="1" dirty="0">
+                <a:solidFill>
+                  <a:srgbClr val="C87A32"/>
+                </a:solidFill>
+                <a:latin typeface="Calibri" pitchFamily="34" charset="0"/>
+                <a:ea typeface="Calibri" pitchFamily="34" charset="-122"/>
+                <a:cs typeface="Calibri" pitchFamily="34" charset="-120"/>
+              </a:rPr>
+              <a:t>Externa · Cliente</a:t>
+            </a:r>
+            <a:endParaRPr lang="en-US" sz="1050" dirty="0"/>
+          </a:p>
+        </p:txBody>
+      </p:sp>
+      <p:sp>
+        <p:nvSpPr>
+          <p:cNvPr id="47" name="Text 44"/>
+          <p:cNvSpPr/>
+          <p:nvPr/>
+        </p:nvSpPr>
+        <p:spPr>
+          <a:xfrm>
+            <a:off x="4434840" y="3355848"/>
+            <a:ext cx="1280160" cy="256032"/>
+          </a:xfrm>
+          <a:prstGeom prst="rect">
+            <a:avLst/>
+          </a:prstGeom>
+          <a:noFill/>
+          <a:ln/>
+        </p:spPr>
+        <p:txBody>
+          <a:bodyPr wrap="square" lIns="0" tIns="0" rIns="0" bIns="0" rtlCol="0" anchor="ctr"/>
+          <a:lstStyle/>
+          <a:p>
+            <a:pPr algn="l" indent="0" marL="0">
+              <a:buNone/>
+            </a:pPr>
+            <a:r>
+              <a:rPr lang="en-US" sz="1050" dirty="0">
+                <a:solidFill>
+                  <a:srgbClr val="1A2433"/>
+                </a:solidFill>
+                <a:latin typeface="Calibri" pitchFamily="34" charset="0"/>
+                <a:ea typeface="Calibri" pitchFamily="34" charset="-122"/>
+                <a:cs typeface="Calibri" pitchFamily="34" charset="-120"/>
+              </a:rPr>
+              <a:t>Sin especialidad</a:t>
+            </a:r>
+            <a:endParaRPr lang="en-US" sz="1050" dirty="0"/>
+          </a:p>
+        </p:txBody>
+      </p:sp>
+      <p:sp>
+        <p:nvSpPr>
+          <p:cNvPr id="48" name="Text 45"/>
+          <p:cNvSpPr/>
+          <p:nvPr/>
+        </p:nvSpPr>
+        <p:spPr>
+          <a:xfrm>
+            <a:off x="5760720" y="3355848"/>
+            <a:ext cx="1508760" cy="256032"/>
+          </a:xfrm>
+          <a:prstGeom prst="rect">
+            <a:avLst/>
+          </a:prstGeom>
+          <a:noFill/>
+          <a:ln/>
+        </p:spPr>
+        <p:txBody>
+          <a:bodyPr wrap="square" lIns="0" tIns="0" rIns="0" bIns="0" rtlCol="0" anchor="ctr"/>
+          <a:lstStyle/>
+          <a:p>
+            <a:pPr algn="l" indent="0" marL="0">
+              <a:buNone/>
+            </a:pPr>
+            <a:r>
+              <a:rPr lang="en-US" sz="1050" dirty="0">
+                <a:solidFill>
+                  <a:srgbClr val="1A2433"/>
+                </a:solidFill>
+                <a:latin typeface="Calibri" pitchFamily="34" charset="0"/>
+                <a:ea typeface="Calibri" pitchFamily="34" charset="-122"/>
+                <a:cs typeface="Calibri" pitchFamily="34" charset="-120"/>
+              </a:rPr>
+              <a:t>Sin asignar</a:t>
+            </a:r>
+            <a:endParaRPr lang="en-US" sz="1050" dirty="0"/>
+          </a:p>
+        </p:txBody>
+      </p:sp>
+      <p:sp>
+        <p:nvSpPr>
+          <p:cNvPr id="49" name="Text 46"/>
+          <p:cNvSpPr/>
+          <p:nvPr/>
+        </p:nvSpPr>
+        <p:spPr>
+          <a:xfrm>
+            <a:off x="7315200" y="3355848"/>
+            <a:ext cx="1325880" cy="256032"/>
+          </a:xfrm>
+          <a:prstGeom prst="rect">
+            <a:avLst/>
+          </a:prstGeom>
+          <a:noFill/>
+          <a:ln/>
+        </p:spPr>
+        <p:txBody>
+          <a:bodyPr wrap="square" lIns="0" tIns="0" rIns="0" bIns="0" rtlCol="0" anchor="ctr"/>
+          <a:lstStyle/>
+          <a:p>
+            <a:pPr algn="l" indent="0" marL="0">
+              <a:buNone/>
+            </a:pPr>
+            <a:r>
+              <a:rPr lang="en-US" sz="1050" dirty="0">
+                <a:solidFill>
+                  <a:srgbClr val="1A2433"/>
+                </a:solidFill>
+                <a:latin typeface="Calibri" pitchFamily="34" charset="0"/>
+                <a:ea typeface="Calibri" pitchFamily="34" charset="-122"/>
+                <a:cs typeface="Calibri" pitchFamily="34" charset="-120"/>
+              </a:rPr>
+              <a:t>Listo para revisi…</a:t>
+            </a:r>
+            <a:endParaRPr lang="en-US" sz="1050" dirty="0"/>
+          </a:p>
+        </p:txBody>
+      </p:sp>
+      <p:sp>
+        <p:nvSpPr>
+          <p:cNvPr id="50" name="Text 47"/>
+          <p:cNvSpPr/>
+          <p:nvPr/>
+        </p:nvSpPr>
+        <p:spPr>
+          <a:xfrm>
+            <a:off x="8686800" y="3355848"/>
+            <a:ext cx="640080" cy="256032"/>
+          </a:xfrm>
+          <a:prstGeom prst="rect">
+            <a:avLst/>
+          </a:prstGeom>
+          <a:noFill/>
+          <a:ln/>
+        </p:spPr>
+        <p:txBody>
+          <a:bodyPr wrap="square" lIns="0" tIns="0" rIns="0" bIns="0" rtlCol="0" anchor="ctr"/>
+          <a:lstStyle/>
+          <a:p>
+            <a:pPr algn="r" indent="0" marL="0">
+              <a:buNone/>
+            </a:pPr>
+            <a:r>
+              <a:rPr lang="en-US" sz="1050" b="1" dirty="0">
+                <a:solidFill>
+                  <a:srgbClr val="C0392B"/>
+                </a:solidFill>
+                <a:latin typeface="Calibri" pitchFamily="34" charset="0"/>
+                <a:ea typeface="Calibri" pitchFamily="34" charset="-122"/>
+                <a:cs typeface="Calibri" pitchFamily="34" charset="-120"/>
+              </a:rPr>
+              <a:t>349</a:t>
+            </a:r>
+            <a:endParaRPr lang="en-US" sz="1050" dirty="0"/>
+          </a:p>
+        </p:txBody>
+      </p:sp>
+      <p:sp>
+        <p:nvSpPr>
+          <p:cNvPr id="51" name="Text 48"/>
+          <p:cNvSpPr/>
+          <p:nvPr/>
+        </p:nvSpPr>
+        <p:spPr>
+          <a:xfrm>
+            <a:off x="9464040" y="3355848"/>
+            <a:ext cx="2286000" cy="256032"/>
+          </a:xfrm>
+          <a:prstGeom prst="rect">
+            <a:avLst/>
+          </a:prstGeom>
+          <a:noFill/>
+          <a:ln/>
+        </p:spPr>
+        <p:txBody>
+          <a:bodyPr wrap="square" lIns="0" tIns="0" rIns="0" bIns="0" rtlCol="0" anchor="ctr"/>
+          <a:lstStyle/>
+          <a:p>
+            <a:pPr algn="l" indent="0" marL="0">
+              <a:buNone/>
+            </a:pPr>
+            <a:r>
+              <a:rPr lang="en-US" sz="1000" dirty="0">
+                <a:solidFill>
+                  <a:srgbClr val="1A2433"/>
+                </a:solidFill>
+                <a:latin typeface="Calibri" pitchFamily="34" charset="0"/>
+                <a:ea typeface="Calibri" pitchFamily="34" charset="-122"/>
+                <a:cs typeface="Calibri" pitchFamily="34" charset="-120"/>
+              </a:rPr>
+              <a:t>Montaje de estructura metálica sin …</a:t>
+            </a:r>
+            <a:endParaRPr lang="en-US" sz="1000" dirty="0"/>
+          </a:p>
+        </p:txBody>
+      </p:sp>
+      <p:sp>
+        <p:nvSpPr>
+          <p:cNvPr id="52" name="Shape 49"/>
+          <p:cNvSpPr/>
+          <p:nvPr/>
+        </p:nvSpPr>
+        <p:spPr>
+          <a:xfrm>
+            <a:off x="502920" y="3648456"/>
+            <a:ext cx="11247120" cy="0"/>
+          </a:xfrm>
+          <a:prstGeom prst="line">
+            <a:avLst/>
+          </a:prstGeom>
+          <a:noFill/>
+          <a:ln w="9525">
+            <a:solidFill>
+              <a:srgbClr val="D9DFE6"/>
+            </a:solidFill>
+            <a:prstDash val="solid"/>
+          </a:ln>
+        </p:spPr>
+      </p:sp>
+      <p:sp>
+        <p:nvSpPr>
+          <p:cNvPr id="53" name="Text 50"/>
+          <p:cNvSpPr/>
+          <p:nvPr/>
+        </p:nvSpPr>
+        <p:spPr>
+          <a:xfrm>
+            <a:off x="502920" y="3703320"/>
+            <a:ext cx="822960" cy="256032"/>
+          </a:xfrm>
+          <a:prstGeom prst="rect">
+            <a:avLst/>
+          </a:prstGeom>
+          <a:noFill/>
+          <a:ln/>
+        </p:spPr>
+        <p:txBody>
+          <a:bodyPr wrap="square" lIns="0" tIns="0" rIns="0" bIns="0" rtlCol="0" anchor="ctr"/>
+          <a:lstStyle/>
+          <a:p>
+            <a:pPr algn="l" indent="0" marL="0">
+              <a:buNone/>
+            </a:pPr>
+            <a:r>
+              <a:rPr lang="en-US" sz="1050" dirty="0">
+                <a:solidFill>
+                  <a:srgbClr val="1A2433"/>
+                </a:solidFill>
+                <a:latin typeface="Calibri" pitchFamily="34" charset="0"/>
+                <a:ea typeface="Calibri" pitchFamily="34" charset="-122"/>
+                <a:cs typeface="Calibri" pitchFamily="34" charset="-120"/>
+              </a:rPr>
+              <a:t>MASA-10</a:t>
+            </a:r>
+            <a:endParaRPr lang="en-US" sz="1050" dirty="0"/>
+          </a:p>
+        </p:txBody>
+      </p:sp>
+      <p:sp>
+        <p:nvSpPr>
+          <p:cNvPr id="54" name="Text 51"/>
+          <p:cNvSpPr/>
+          <p:nvPr/>
+        </p:nvSpPr>
+        <p:spPr>
+          <a:xfrm>
+            <a:off x="1371600" y="3703320"/>
+            <a:ext cx="1508760" cy="256032"/>
+          </a:xfrm>
+          <a:prstGeom prst="rect">
+            <a:avLst/>
+          </a:prstGeom>
+          <a:noFill/>
+          <a:ln/>
+        </p:spPr>
+        <p:txBody>
+          <a:bodyPr wrap="square" lIns="0" tIns="0" rIns="0" bIns="0" rtlCol="0" anchor="ctr"/>
+          <a:lstStyle/>
+          <a:p>
+            <a:pPr algn="l" indent="0" marL="0">
+              <a:buNone/>
+            </a:pPr>
+            <a:r>
+              <a:rPr lang="en-US" sz="1050" dirty="0">
+                <a:solidFill>
+                  <a:srgbClr val="1A2433"/>
+                </a:solidFill>
+                <a:latin typeface="Calibri" pitchFamily="34" charset="0"/>
+                <a:ea typeface="Calibri" pitchFamily="34" charset="-122"/>
+                <a:cs typeface="Calibri" pitchFamily="34" charset="-120"/>
+              </a:rPr>
+              <a:t>Observación</a:t>
+            </a:r>
+            <a:endParaRPr lang="en-US" sz="1050" dirty="0"/>
+          </a:p>
+        </p:txBody>
+      </p:sp>
+      <p:sp>
+        <p:nvSpPr>
+          <p:cNvPr id="55" name="Text 52"/>
+          <p:cNvSpPr/>
+          <p:nvPr/>
+        </p:nvSpPr>
+        <p:spPr>
+          <a:xfrm>
+            <a:off x="2926080" y="3703320"/>
+            <a:ext cx="1463040" cy="256032"/>
+          </a:xfrm>
+          <a:prstGeom prst="rect">
+            <a:avLst/>
+          </a:prstGeom>
+          <a:noFill/>
+          <a:ln/>
+        </p:spPr>
+        <p:txBody>
+          <a:bodyPr wrap="square" lIns="0" tIns="0" rIns="0" bIns="0" rtlCol="0" anchor="ctr"/>
+          <a:lstStyle/>
+          <a:p>
+            <a:pPr algn="l" indent="0" marL="0">
+              <a:buNone/>
+            </a:pPr>
+            <a:r>
+              <a:rPr lang="en-US" sz="1050" b="1" dirty="0">
+                <a:solidFill>
+                  <a:srgbClr val="C87A32"/>
+                </a:solidFill>
+                <a:latin typeface="Calibri" pitchFamily="34" charset="0"/>
+                <a:ea typeface="Calibri" pitchFamily="34" charset="-122"/>
+                <a:cs typeface="Calibri" pitchFamily="34" charset="-120"/>
+              </a:rPr>
+              <a:t>Externa · Cliente</a:t>
+            </a:r>
+            <a:endParaRPr lang="en-US" sz="1050" dirty="0"/>
+          </a:p>
+        </p:txBody>
+      </p:sp>
+      <p:sp>
+        <p:nvSpPr>
+          <p:cNvPr id="56" name="Text 53"/>
+          <p:cNvSpPr/>
+          <p:nvPr/>
+        </p:nvSpPr>
+        <p:spPr>
+          <a:xfrm>
+            <a:off x="4434840" y="3703320"/>
+            <a:ext cx="1280160" cy="256032"/>
+          </a:xfrm>
+          <a:prstGeom prst="rect">
+            <a:avLst/>
+          </a:prstGeom>
+          <a:noFill/>
+          <a:ln/>
+        </p:spPr>
+        <p:txBody>
+          <a:bodyPr wrap="square" lIns="0" tIns="0" rIns="0" bIns="0" rtlCol="0" anchor="ctr"/>
+          <a:lstStyle/>
+          <a:p>
+            <a:pPr algn="l" indent="0" marL="0">
+              <a:buNone/>
+            </a:pPr>
+            <a:r>
+              <a:rPr lang="en-US" sz="1050" dirty="0">
+                <a:solidFill>
+                  <a:srgbClr val="1A2433"/>
+                </a:solidFill>
+                <a:latin typeface="Calibri" pitchFamily="34" charset="0"/>
+                <a:ea typeface="Calibri" pitchFamily="34" charset="-122"/>
+                <a:cs typeface="Calibri" pitchFamily="34" charset="-120"/>
+              </a:rPr>
+              <a:t>Sin especialidad</a:t>
+            </a:r>
+            <a:endParaRPr lang="en-US" sz="1050" dirty="0"/>
+          </a:p>
+        </p:txBody>
+      </p:sp>
+      <p:sp>
+        <p:nvSpPr>
+          <p:cNvPr id="57" name="Text 54"/>
+          <p:cNvSpPr/>
+          <p:nvPr/>
+        </p:nvSpPr>
+        <p:spPr>
+          <a:xfrm>
+            <a:off x="5760720" y="3703320"/>
+            <a:ext cx="1508760" cy="256032"/>
+          </a:xfrm>
+          <a:prstGeom prst="rect">
+            <a:avLst/>
+          </a:prstGeom>
+          <a:noFill/>
+          <a:ln/>
+        </p:spPr>
+        <p:txBody>
+          <a:bodyPr wrap="square" lIns="0" tIns="0" rIns="0" bIns="0" rtlCol="0" anchor="ctr"/>
+          <a:lstStyle/>
+          <a:p>
+            <a:pPr algn="l" indent="0" marL="0">
+              <a:buNone/>
+            </a:pPr>
+            <a:r>
+              <a:rPr lang="en-US" sz="1050" dirty="0">
+                <a:solidFill>
+                  <a:srgbClr val="1A2433"/>
+                </a:solidFill>
+                <a:latin typeface="Calibri" pitchFamily="34" charset="0"/>
+                <a:ea typeface="Calibri" pitchFamily="34" charset="-122"/>
+                <a:cs typeface="Calibri" pitchFamily="34" charset="-120"/>
+              </a:rPr>
+              <a:t>Sin asignar</a:t>
+            </a:r>
+            <a:endParaRPr lang="en-US" sz="1050" dirty="0"/>
+          </a:p>
+        </p:txBody>
+      </p:sp>
+      <p:sp>
+        <p:nvSpPr>
+          <p:cNvPr id="58" name="Text 55"/>
+          <p:cNvSpPr/>
+          <p:nvPr/>
+        </p:nvSpPr>
+        <p:spPr>
+          <a:xfrm>
+            <a:off x="7315200" y="3703320"/>
+            <a:ext cx="1325880" cy="256032"/>
+          </a:xfrm>
+          <a:prstGeom prst="rect">
+            <a:avLst/>
+          </a:prstGeom>
+          <a:noFill/>
+          <a:ln/>
+        </p:spPr>
+        <p:txBody>
+          <a:bodyPr wrap="square" lIns="0" tIns="0" rIns="0" bIns="0" rtlCol="0" anchor="ctr"/>
+          <a:lstStyle/>
+          <a:p>
+            <a:pPr algn="l" indent="0" marL="0">
+              <a:buNone/>
+            </a:pPr>
+            <a:r>
+              <a:rPr lang="en-US" sz="1050" dirty="0">
+                <a:solidFill>
+                  <a:srgbClr val="1A2433"/>
+                </a:solidFill>
+                <a:latin typeface="Calibri" pitchFamily="34" charset="0"/>
+                <a:ea typeface="Calibri" pitchFamily="34" charset="-122"/>
+                <a:cs typeface="Calibri" pitchFamily="34" charset="-120"/>
+              </a:rPr>
+              <a:t>Listo para revisi…</a:t>
+            </a:r>
+            <a:endParaRPr lang="en-US" sz="1050" dirty="0"/>
+          </a:p>
+        </p:txBody>
+      </p:sp>
+      <p:sp>
+        <p:nvSpPr>
+          <p:cNvPr id="59" name="Text 56"/>
+          <p:cNvSpPr/>
+          <p:nvPr/>
+        </p:nvSpPr>
+        <p:spPr>
+          <a:xfrm>
+            <a:off x="8686800" y="3703320"/>
+            <a:ext cx="640080" cy="256032"/>
+          </a:xfrm>
+          <a:prstGeom prst="rect">
+            <a:avLst/>
+          </a:prstGeom>
+          <a:noFill/>
+          <a:ln/>
+        </p:spPr>
+        <p:txBody>
+          <a:bodyPr wrap="square" lIns="0" tIns="0" rIns="0" bIns="0" rtlCol="0" anchor="ctr"/>
+          <a:lstStyle/>
+          <a:p>
+            <a:pPr algn="r" indent="0" marL="0">
+              <a:buNone/>
+            </a:pPr>
+            <a:r>
+              <a:rPr lang="en-US" sz="1050" b="1" dirty="0">
+                <a:solidFill>
+                  <a:srgbClr val="C0392B"/>
+                </a:solidFill>
+                <a:latin typeface="Calibri" pitchFamily="34" charset="0"/>
+                <a:ea typeface="Calibri" pitchFamily="34" charset="-122"/>
+                <a:cs typeface="Calibri" pitchFamily="34" charset="-120"/>
+              </a:rPr>
+              <a:t>321</a:t>
+            </a:r>
+            <a:endParaRPr lang="en-US" sz="1050" dirty="0"/>
+          </a:p>
+        </p:txBody>
+      </p:sp>
+      <p:sp>
+        <p:nvSpPr>
+          <p:cNvPr id="60" name="Text 57"/>
+          <p:cNvSpPr/>
+          <p:nvPr/>
+        </p:nvSpPr>
+        <p:spPr>
+          <a:xfrm>
+            <a:off x="9464040" y="3703320"/>
+            <a:ext cx="2286000" cy="256032"/>
+          </a:xfrm>
+          <a:prstGeom prst="rect">
+            <a:avLst/>
+          </a:prstGeom>
+          <a:noFill/>
+          <a:ln/>
+        </p:spPr>
+        <p:txBody>
+          <a:bodyPr wrap="square" lIns="0" tIns="0" rIns="0" bIns="0" rtlCol="0" anchor="ctr"/>
+          <a:lstStyle/>
+          <a:p>
+            <a:pPr algn="l" indent="0" marL="0">
+              <a:buNone/>
+            </a:pPr>
+            <a:r>
+              <a:rPr lang="en-US" sz="1000" dirty="0">
+                <a:solidFill>
+                  <a:srgbClr val="1A2433"/>
+                </a:solidFill>
+                <a:latin typeface="Calibri" pitchFamily="34" charset="0"/>
+                <a:ea typeface="Calibri" pitchFamily="34" charset="-122"/>
+                <a:cs typeface="Calibri" pitchFamily="34" charset="-120"/>
+              </a:rPr>
+              <a:t>Vigas (puntales) Montadas Fuera de …</a:t>
+            </a:r>
+            <a:endParaRPr lang="en-US" sz="1000" dirty="0"/>
+          </a:p>
+        </p:txBody>
+      </p:sp>
+      <p:sp>
+        <p:nvSpPr>
+          <p:cNvPr id="61" name="Shape 58"/>
+          <p:cNvSpPr/>
+          <p:nvPr/>
+        </p:nvSpPr>
+        <p:spPr>
+          <a:xfrm>
+            <a:off x="502920" y="3995928"/>
+            <a:ext cx="11247120" cy="0"/>
+          </a:xfrm>
+          <a:prstGeom prst="line">
+            <a:avLst/>
+          </a:prstGeom>
+          <a:noFill/>
+          <a:ln w="9525">
+            <a:solidFill>
+              <a:srgbClr val="D9DFE6"/>
+            </a:solidFill>
+            <a:prstDash val="solid"/>
+          </a:ln>
+        </p:spPr>
+      </p:sp>
+      <p:sp>
+        <p:nvSpPr>
+          <p:cNvPr id="62" name="Shape 59"/>
+          <p:cNvSpPr/>
+          <p:nvPr/>
+        </p:nvSpPr>
+        <p:spPr>
+          <a:xfrm>
+            <a:off x="457200" y="4005072"/>
+            <a:ext cx="11292840" cy="347472"/>
+          </a:xfrm>
+          <a:prstGeom prst="rect">
+            <a:avLst/>
+          </a:prstGeom>
+          <a:solidFill>
+            <a:srgbClr val="FFFFFF"/>
+          </a:solidFill>
+          <a:ln/>
+        </p:spPr>
+      </p:sp>
+      <p:sp>
+        <p:nvSpPr>
+          <p:cNvPr id="63" name="Text 60"/>
+          <p:cNvSpPr/>
+          <p:nvPr/>
+        </p:nvSpPr>
+        <p:spPr>
+          <a:xfrm>
+            <a:off x="502920" y="4050792"/>
+            <a:ext cx="822960" cy="256032"/>
+          </a:xfrm>
+          <a:prstGeom prst="rect">
+            <a:avLst/>
+          </a:prstGeom>
+          <a:noFill/>
+          <a:ln/>
+        </p:spPr>
+        <p:txBody>
+          <a:bodyPr wrap="square" lIns="0" tIns="0" rIns="0" bIns="0" rtlCol="0" anchor="ctr"/>
+          <a:lstStyle/>
+          <a:p>
+            <a:pPr algn="l" indent="0" marL="0">
+              <a:buNone/>
+            </a:pPr>
+            <a:r>
+              <a:rPr lang="en-US" sz="1050" dirty="0">
+                <a:solidFill>
+                  <a:srgbClr val="1A2433"/>
+                </a:solidFill>
+                <a:latin typeface="Calibri" pitchFamily="34" charset="0"/>
+                <a:ea typeface="Calibri" pitchFamily="34" charset="-122"/>
+                <a:cs typeface="Calibri" pitchFamily="34" charset="-120"/>
+              </a:rPr>
+              <a:t>MASA-21</a:t>
+            </a:r>
+            <a:endParaRPr lang="en-US" sz="1050" dirty="0"/>
+          </a:p>
+        </p:txBody>
+      </p:sp>
+      <p:sp>
+        <p:nvSpPr>
+          <p:cNvPr id="64" name="Text 61"/>
+          <p:cNvSpPr/>
+          <p:nvPr/>
+        </p:nvSpPr>
+        <p:spPr>
+          <a:xfrm>
+            <a:off x="1371600" y="4050792"/>
+            <a:ext cx="1508760" cy="256032"/>
+          </a:xfrm>
+          <a:prstGeom prst="rect">
+            <a:avLst/>
+          </a:prstGeom>
+          <a:noFill/>
+          <a:ln/>
+        </p:spPr>
+        <p:txBody>
+          <a:bodyPr wrap="square" lIns="0" tIns="0" rIns="0" bIns="0" rtlCol="0" anchor="ctr"/>
+          <a:lstStyle/>
+          <a:p>
+            <a:pPr algn="l" indent="0" marL="0">
+              <a:buNone/>
+            </a:pPr>
+            <a:r>
+              <a:rPr lang="en-US" sz="1050" dirty="0">
+                <a:solidFill>
+                  <a:srgbClr val="1A2433"/>
+                </a:solidFill>
+                <a:latin typeface="Calibri" pitchFamily="34" charset="0"/>
+                <a:ea typeface="Calibri" pitchFamily="34" charset="-122"/>
+                <a:cs typeface="Calibri" pitchFamily="34" charset="-120"/>
+              </a:rPr>
+              <a:t>No Conformidad</a:t>
+            </a:r>
+            <a:endParaRPr lang="en-US" sz="1050" dirty="0"/>
+          </a:p>
+        </p:txBody>
+      </p:sp>
+      <p:sp>
+        <p:nvSpPr>
+          <p:cNvPr id="65" name="Text 62"/>
+          <p:cNvSpPr/>
+          <p:nvPr/>
+        </p:nvSpPr>
+        <p:spPr>
+          <a:xfrm>
+            <a:off x="2926080" y="4050792"/>
+            <a:ext cx="1463040" cy="256032"/>
+          </a:xfrm>
+          <a:prstGeom prst="rect">
+            <a:avLst/>
+          </a:prstGeom>
+          <a:noFill/>
+          <a:ln/>
+        </p:spPr>
+        <p:txBody>
+          <a:bodyPr wrap="square" lIns="0" tIns="0" rIns="0" bIns="0" rtlCol="0" anchor="ctr"/>
+          <a:lstStyle/>
+          <a:p>
+            <a:pPr algn="l" indent="0" marL="0">
+              <a:buNone/>
+            </a:pPr>
+            <a:r>
+              <a:rPr lang="en-US" sz="1050" b="1" dirty="0">
+                <a:solidFill>
+                  <a:srgbClr val="C87A32"/>
+                </a:solidFill>
+                <a:latin typeface="Calibri" pitchFamily="34" charset="0"/>
+                <a:ea typeface="Calibri" pitchFamily="34" charset="-122"/>
+                <a:cs typeface="Calibri" pitchFamily="34" charset="-120"/>
+              </a:rPr>
+              <a:t>Externa · Cliente</a:t>
+            </a:r>
+            <a:endParaRPr lang="en-US" sz="1050" dirty="0"/>
+          </a:p>
+        </p:txBody>
+      </p:sp>
+      <p:sp>
+        <p:nvSpPr>
+          <p:cNvPr id="66" name="Text 63"/>
+          <p:cNvSpPr/>
+          <p:nvPr/>
+        </p:nvSpPr>
+        <p:spPr>
+          <a:xfrm>
+            <a:off x="4434840" y="4050792"/>
+            <a:ext cx="1280160" cy="256032"/>
+          </a:xfrm>
+          <a:prstGeom prst="rect">
+            <a:avLst/>
+          </a:prstGeom>
+          <a:noFill/>
+          <a:ln/>
+        </p:spPr>
+        <p:txBody>
+          <a:bodyPr wrap="square" lIns="0" tIns="0" rIns="0" bIns="0" rtlCol="0" anchor="ctr"/>
+          <a:lstStyle/>
+          <a:p>
+            <a:pPr algn="l" indent="0" marL="0">
+              <a:buNone/>
+            </a:pPr>
+            <a:r>
+              <a:rPr lang="en-US" sz="1050" dirty="0">
+                <a:solidFill>
+                  <a:srgbClr val="1A2433"/>
+                </a:solidFill>
+                <a:latin typeface="Calibri" pitchFamily="34" charset="0"/>
+                <a:ea typeface="Calibri" pitchFamily="34" charset="-122"/>
+                <a:cs typeface="Calibri" pitchFamily="34" charset="-120"/>
+              </a:rPr>
+              <a:t>Sin especialidad</a:t>
+            </a:r>
+            <a:endParaRPr lang="en-US" sz="1050" dirty="0"/>
+          </a:p>
+        </p:txBody>
+      </p:sp>
+      <p:sp>
+        <p:nvSpPr>
+          <p:cNvPr id="67" name="Text 64"/>
+          <p:cNvSpPr/>
+          <p:nvPr/>
+        </p:nvSpPr>
+        <p:spPr>
+          <a:xfrm>
+            <a:off x="5760720" y="4050792"/>
+            <a:ext cx="1508760" cy="256032"/>
+          </a:xfrm>
+          <a:prstGeom prst="rect">
+            <a:avLst/>
+          </a:prstGeom>
+          <a:noFill/>
+          <a:ln/>
+        </p:spPr>
+        <p:txBody>
+          <a:bodyPr wrap="square" lIns="0" tIns="0" rIns="0" bIns="0" rtlCol="0" anchor="ctr"/>
+          <a:lstStyle/>
+          <a:p>
+            <a:pPr algn="l" indent="0" marL="0">
+              <a:buNone/>
+            </a:pPr>
+            <a:r>
+              <a:rPr lang="en-US" sz="1050" dirty="0">
+                <a:solidFill>
+                  <a:srgbClr val="1A2433"/>
+                </a:solidFill>
+                <a:latin typeface="Calibri" pitchFamily="34" charset="0"/>
+                <a:ea typeface="Calibri" pitchFamily="34" charset="-122"/>
+                <a:cs typeface="Calibri" pitchFamily="34" charset="-120"/>
+              </a:rPr>
+              <a:t>Sin asignar</a:t>
+            </a:r>
+            <a:endParaRPr lang="en-US" sz="1050" dirty="0"/>
+          </a:p>
+        </p:txBody>
+      </p:sp>
+      <p:sp>
+        <p:nvSpPr>
+          <p:cNvPr id="68" name="Text 65"/>
+          <p:cNvSpPr/>
+          <p:nvPr/>
+        </p:nvSpPr>
+        <p:spPr>
+          <a:xfrm>
+            <a:off x="7315200" y="4050792"/>
+            <a:ext cx="1325880" cy="256032"/>
+          </a:xfrm>
+          <a:prstGeom prst="rect">
+            <a:avLst/>
+          </a:prstGeom>
+          <a:noFill/>
+          <a:ln/>
+        </p:spPr>
+        <p:txBody>
+          <a:bodyPr wrap="square" lIns="0" tIns="0" rIns="0" bIns="0" rtlCol="0" anchor="ctr"/>
+          <a:lstStyle/>
+          <a:p>
+            <a:pPr algn="l" indent="0" marL="0">
+              <a:buNone/>
+            </a:pPr>
+            <a:r>
+              <a:rPr lang="en-US" sz="1050" dirty="0">
+                <a:solidFill>
+                  <a:srgbClr val="1A2433"/>
+                </a:solidFill>
+                <a:latin typeface="Calibri" pitchFamily="34" charset="0"/>
+                <a:ea typeface="Calibri" pitchFamily="34" charset="-122"/>
+                <a:cs typeface="Calibri" pitchFamily="34" charset="-120"/>
+              </a:rPr>
+              <a:t>Observada</a:t>
+            </a:r>
+            <a:endParaRPr lang="en-US" sz="1050" dirty="0"/>
+          </a:p>
+        </p:txBody>
+      </p:sp>
+      <p:sp>
+        <p:nvSpPr>
+          <p:cNvPr id="69" name="Text 66"/>
+          <p:cNvSpPr/>
+          <p:nvPr/>
+        </p:nvSpPr>
+        <p:spPr>
+          <a:xfrm>
+            <a:off x="8686800" y="4050792"/>
+            <a:ext cx="640080" cy="256032"/>
+          </a:xfrm>
+          <a:prstGeom prst="rect">
+            <a:avLst/>
+          </a:prstGeom>
+          <a:noFill/>
+          <a:ln/>
+        </p:spPr>
+        <p:txBody>
+          <a:bodyPr wrap="square" lIns="0" tIns="0" rIns="0" bIns="0" rtlCol="0" anchor="ctr"/>
+          <a:lstStyle/>
+          <a:p>
+            <a:pPr algn="r" indent="0" marL="0">
+              <a:buNone/>
+            </a:pPr>
+            <a:r>
+              <a:rPr lang="en-US" sz="1050" b="1" dirty="0">
+                <a:solidFill>
+                  <a:srgbClr val="C0392B"/>
+                </a:solidFill>
+                <a:latin typeface="Calibri" pitchFamily="34" charset="0"/>
+                <a:ea typeface="Calibri" pitchFamily="34" charset="-122"/>
+                <a:cs typeface="Calibri" pitchFamily="34" charset="-120"/>
+              </a:rPr>
+              <a:t>291</a:t>
+            </a:r>
+            <a:endParaRPr lang="en-US" sz="1050" dirty="0"/>
+          </a:p>
+        </p:txBody>
+      </p:sp>
+      <p:sp>
+        <p:nvSpPr>
+          <p:cNvPr id="70" name="Text 67"/>
+          <p:cNvSpPr/>
+          <p:nvPr/>
+        </p:nvSpPr>
+        <p:spPr>
+          <a:xfrm>
+            <a:off x="9464040" y="4050792"/>
+            <a:ext cx="2286000" cy="256032"/>
+          </a:xfrm>
+          <a:prstGeom prst="rect">
+            <a:avLst/>
+          </a:prstGeom>
+          <a:noFill/>
+          <a:ln/>
+        </p:spPr>
+        <p:txBody>
+          <a:bodyPr wrap="square" lIns="0" tIns="0" rIns="0" bIns="0" rtlCol="0" anchor="ctr"/>
+          <a:lstStyle/>
+          <a:p>
+            <a:pPr algn="l" indent="0" marL="0">
+              <a:buNone/>
+            </a:pPr>
+            <a:r>
+              <a:rPr lang="en-US" sz="1000" dirty="0">
+                <a:solidFill>
+                  <a:srgbClr val="1A2433"/>
+                </a:solidFill>
+                <a:latin typeface="Calibri" pitchFamily="34" charset="0"/>
+                <a:ea typeface="Calibri" pitchFamily="34" charset="-122"/>
+                <a:cs typeface="Calibri" pitchFamily="34" charset="-120"/>
+              </a:rPr>
+              <a:t>Informe Técnico de Inspección – Fis…</a:t>
+            </a:r>
+            <a:endParaRPr lang="en-US" sz="1000" dirty="0"/>
+          </a:p>
+        </p:txBody>
+      </p:sp>
+      <p:sp>
+        <p:nvSpPr>
+          <p:cNvPr id="71" name="Shape 68"/>
+          <p:cNvSpPr/>
+          <p:nvPr/>
+        </p:nvSpPr>
+        <p:spPr>
+          <a:xfrm>
+            <a:off x="502920" y="4343400"/>
+            <a:ext cx="11247120" cy="0"/>
+          </a:xfrm>
+          <a:prstGeom prst="line">
+            <a:avLst/>
+          </a:prstGeom>
+          <a:noFill/>
+          <a:ln w="9525">
+            <a:solidFill>
+              <a:srgbClr val="D9DFE6"/>
+            </a:solidFill>
+            <a:prstDash val="solid"/>
+          </a:ln>
+        </p:spPr>
+      </p:sp>
+      <p:sp>
+        <p:nvSpPr>
+          <p:cNvPr id="72" name="Text 69"/>
+          <p:cNvSpPr/>
+          <p:nvPr/>
+        </p:nvSpPr>
+        <p:spPr>
+          <a:xfrm>
+            <a:off x="502920" y="4398264"/>
+            <a:ext cx="822960" cy="256032"/>
+          </a:xfrm>
+          <a:prstGeom prst="rect">
+            <a:avLst/>
+          </a:prstGeom>
+          <a:noFill/>
+          <a:ln/>
+        </p:spPr>
+        <p:txBody>
+          <a:bodyPr wrap="square" lIns="0" tIns="0" rIns="0" bIns="0" rtlCol="0" anchor="ctr"/>
+          <a:lstStyle/>
+          <a:p>
+            <a:pPr algn="l" indent="0" marL="0">
+              <a:buNone/>
+            </a:pPr>
+            <a:r>
+              <a:rPr lang="en-US" sz="1050" dirty="0">
+                <a:solidFill>
+                  <a:srgbClr val="1A2433"/>
+                </a:solidFill>
+                <a:latin typeface="Calibri" pitchFamily="34" charset="0"/>
+                <a:ea typeface="Calibri" pitchFamily="34" charset="-122"/>
+                <a:cs typeface="Calibri" pitchFamily="34" charset="-120"/>
+              </a:rPr>
+              <a:t>MASA-24</a:t>
+            </a:r>
+            <a:endParaRPr lang="en-US" sz="1050" dirty="0"/>
+          </a:p>
+        </p:txBody>
+      </p:sp>
+      <p:sp>
+        <p:nvSpPr>
+          <p:cNvPr id="73" name="Text 70"/>
+          <p:cNvSpPr/>
+          <p:nvPr/>
+        </p:nvSpPr>
+        <p:spPr>
+          <a:xfrm>
+            <a:off x="1371600" y="4398264"/>
+            <a:ext cx="1508760" cy="256032"/>
+          </a:xfrm>
+          <a:prstGeom prst="rect">
+            <a:avLst/>
+          </a:prstGeom>
+          <a:noFill/>
+          <a:ln/>
+        </p:spPr>
+        <p:txBody>
+          <a:bodyPr wrap="square" lIns="0" tIns="0" rIns="0" bIns="0" rtlCol="0" anchor="ctr"/>
+          <a:lstStyle/>
+          <a:p>
+            <a:pPr algn="l" indent="0" marL="0">
+              <a:buNone/>
+            </a:pPr>
+            <a:r>
+              <a:rPr lang="en-US" sz="1050" dirty="0">
+                <a:solidFill>
+                  <a:srgbClr val="1A2433"/>
+                </a:solidFill>
+                <a:latin typeface="Calibri" pitchFamily="34" charset="0"/>
+                <a:ea typeface="Calibri" pitchFamily="34" charset="-122"/>
+                <a:cs typeface="Calibri" pitchFamily="34" charset="-120"/>
+              </a:rPr>
+              <a:t>No Conformidad</a:t>
+            </a:r>
+            <a:endParaRPr lang="en-US" sz="1050" dirty="0"/>
+          </a:p>
+        </p:txBody>
+      </p:sp>
+      <p:sp>
+        <p:nvSpPr>
+          <p:cNvPr id="74" name="Text 71"/>
+          <p:cNvSpPr/>
+          <p:nvPr/>
+        </p:nvSpPr>
+        <p:spPr>
+          <a:xfrm>
+            <a:off x="2926080" y="4398264"/>
+            <a:ext cx="1463040" cy="256032"/>
+          </a:xfrm>
+          <a:prstGeom prst="rect">
+            <a:avLst/>
+          </a:prstGeom>
+          <a:noFill/>
+          <a:ln/>
+        </p:spPr>
+        <p:txBody>
+          <a:bodyPr wrap="square" lIns="0" tIns="0" rIns="0" bIns="0" rtlCol="0" anchor="ctr"/>
+          <a:lstStyle/>
+          <a:p>
+            <a:pPr algn="l" indent="0" marL="0">
+              <a:buNone/>
+            </a:pPr>
+            <a:r>
+              <a:rPr lang="en-US" sz="1050" b="1" dirty="0">
+                <a:solidFill>
+                  <a:srgbClr val="C87A32"/>
+                </a:solidFill>
+                <a:latin typeface="Calibri" pitchFamily="34" charset="0"/>
+                <a:ea typeface="Calibri" pitchFamily="34" charset="-122"/>
+                <a:cs typeface="Calibri" pitchFamily="34" charset="-120"/>
+              </a:rPr>
+              <a:t>Externa · Cliente</a:t>
+            </a:r>
+            <a:endParaRPr lang="en-US" sz="1050" dirty="0"/>
+          </a:p>
+        </p:txBody>
+      </p:sp>
+      <p:sp>
+        <p:nvSpPr>
+          <p:cNvPr id="75" name="Text 72"/>
+          <p:cNvSpPr/>
+          <p:nvPr/>
+        </p:nvSpPr>
+        <p:spPr>
+          <a:xfrm>
+            <a:off x="4434840" y="4398264"/>
+            <a:ext cx="1280160" cy="256032"/>
+          </a:xfrm>
+          <a:prstGeom prst="rect">
+            <a:avLst/>
+          </a:prstGeom>
+          <a:noFill/>
+          <a:ln/>
+        </p:spPr>
+        <p:txBody>
+          <a:bodyPr wrap="square" lIns="0" tIns="0" rIns="0" bIns="0" rtlCol="0" anchor="ctr"/>
+          <a:lstStyle/>
+          <a:p>
+            <a:pPr algn="l" indent="0" marL="0">
+              <a:buNone/>
+            </a:pPr>
+            <a:r>
+              <a:rPr lang="en-US" sz="1050" dirty="0">
+                <a:solidFill>
+                  <a:srgbClr val="1A2433"/>
+                </a:solidFill>
+                <a:latin typeface="Calibri" pitchFamily="34" charset="0"/>
+                <a:ea typeface="Calibri" pitchFamily="34" charset="-122"/>
+                <a:cs typeface="Calibri" pitchFamily="34" charset="-120"/>
+              </a:rPr>
+              <a:t>Sin especialidad</a:t>
+            </a:r>
+            <a:endParaRPr lang="en-US" sz="1050" dirty="0"/>
+          </a:p>
+        </p:txBody>
+      </p:sp>
+      <p:sp>
+        <p:nvSpPr>
+          <p:cNvPr id="76" name="Text 73"/>
+          <p:cNvSpPr/>
+          <p:nvPr/>
+        </p:nvSpPr>
+        <p:spPr>
+          <a:xfrm>
+            <a:off x="5760720" y="4398264"/>
+            <a:ext cx="1508760" cy="256032"/>
+          </a:xfrm>
+          <a:prstGeom prst="rect">
+            <a:avLst/>
+          </a:prstGeom>
+          <a:noFill/>
+          <a:ln/>
+        </p:spPr>
+        <p:txBody>
+          <a:bodyPr wrap="square" lIns="0" tIns="0" rIns="0" bIns="0" rtlCol="0" anchor="ctr"/>
+          <a:lstStyle/>
+          <a:p>
+            <a:pPr algn="l" indent="0" marL="0">
+              <a:buNone/>
+            </a:pPr>
+            <a:r>
+              <a:rPr lang="en-US" sz="1050" dirty="0">
+                <a:solidFill>
+                  <a:srgbClr val="1A2433"/>
+                </a:solidFill>
+                <a:latin typeface="Calibri" pitchFamily="34" charset="0"/>
+                <a:ea typeface="Calibri" pitchFamily="34" charset="-122"/>
+                <a:cs typeface="Calibri" pitchFamily="34" charset="-120"/>
+              </a:rPr>
+              <a:t>Sin asignar</a:t>
+            </a:r>
+            <a:endParaRPr lang="en-US" sz="1050" dirty="0"/>
+          </a:p>
+        </p:txBody>
+      </p:sp>
+      <p:sp>
+        <p:nvSpPr>
+          <p:cNvPr id="77" name="Text 74"/>
+          <p:cNvSpPr/>
+          <p:nvPr/>
+        </p:nvSpPr>
+        <p:spPr>
+          <a:xfrm>
+            <a:off x="7315200" y="4398264"/>
+            <a:ext cx="1325880" cy="256032"/>
+          </a:xfrm>
+          <a:prstGeom prst="rect">
+            <a:avLst/>
+          </a:prstGeom>
+          <a:noFill/>
+          <a:ln/>
+        </p:spPr>
+        <p:txBody>
+          <a:bodyPr wrap="square" lIns="0" tIns="0" rIns="0" bIns="0" rtlCol="0" anchor="ctr"/>
+          <a:lstStyle/>
+          <a:p>
+            <a:pPr algn="l" indent="0" marL="0">
+              <a:buNone/>
+            </a:pPr>
+            <a:r>
+              <a:rPr lang="en-US" sz="1050" dirty="0">
+                <a:solidFill>
+                  <a:srgbClr val="1A2433"/>
+                </a:solidFill>
+                <a:latin typeface="Calibri" pitchFamily="34" charset="0"/>
+                <a:ea typeface="Calibri" pitchFamily="34" charset="-122"/>
+                <a:cs typeface="Calibri" pitchFamily="34" charset="-120"/>
+              </a:rPr>
+              <a:t>Observada</a:t>
+            </a:r>
+            <a:endParaRPr lang="en-US" sz="1050" dirty="0"/>
+          </a:p>
+        </p:txBody>
+      </p:sp>
+      <p:sp>
+        <p:nvSpPr>
+          <p:cNvPr id="78" name="Text 75"/>
+          <p:cNvSpPr/>
+          <p:nvPr/>
+        </p:nvSpPr>
+        <p:spPr>
+          <a:xfrm>
+            <a:off x="8686800" y="4398264"/>
+            <a:ext cx="640080" cy="256032"/>
+          </a:xfrm>
+          <a:prstGeom prst="rect">
+            <a:avLst/>
+          </a:prstGeom>
+          <a:noFill/>
+          <a:ln/>
+        </p:spPr>
+        <p:txBody>
+          <a:bodyPr wrap="square" lIns="0" tIns="0" rIns="0" bIns="0" rtlCol="0" anchor="ctr"/>
+          <a:lstStyle/>
+          <a:p>
+            <a:pPr algn="r" indent="0" marL="0">
+              <a:buNone/>
+            </a:pPr>
+            <a:r>
+              <a:rPr lang="en-US" sz="1050" b="1" dirty="0">
+                <a:solidFill>
+                  <a:srgbClr val="C0392B"/>
+                </a:solidFill>
+                <a:latin typeface="Calibri" pitchFamily="34" charset="0"/>
+                <a:ea typeface="Calibri" pitchFamily="34" charset="-122"/>
+                <a:cs typeface="Calibri" pitchFamily="34" charset="-120"/>
+              </a:rPr>
+              <a:t>291</a:t>
+            </a:r>
+            <a:endParaRPr lang="en-US" sz="1050" dirty="0"/>
+          </a:p>
+        </p:txBody>
+      </p:sp>
+      <p:sp>
+        <p:nvSpPr>
+          <p:cNvPr id="79" name="Text 76"/>
+          <p:cNvSpPr/>
+          <p:nvPr/>
+        </p:nvSpPr>
+        <p:spPr>
+          <a:xfrm>
+            <a:off x="9464040" y="4398264"/>
+            <a:ext cx="2286000" cy="256032"/>
+          </a:xfrm>
+          <a:prstGeom prst="rect">
+            <a:avLst/>
+          </a:prstGeom>
+          <a:noFill/>
+          <a:ln/>
+        </p:spPr>
+        <p:txBody>
+          <a:bodyPr wrap="square" lIns="0" tIns="0" rIns="0" bIns="0" rtlCol="0" anchor="ctr"/>
+          <a:lstStyle/>
+          <a:p>
+            <a:pPr algn="l" indent="0" marL="0">
+              <a:buNone/>
+            </a:pPr>
+            <a:r>
+              <a:rPr lang="en-US" sz="1000" dirty="0">
+                <a:solidFill>
+                  <a:srgbClr val="1A2433"/>
+                </a:solidFill>
+                <a:latin typeface="Calibri" pitchFamily="34" charset="0"/>
+                <a:ea typeface="Calibri" pitchFamily="34" charset="-122"/>
+                <a:cs typeface="Calibri" pitchFamily="34" charset="-120"/>
+              </a:rPr>
+              <a:t>Inspección grout de los recesos de …</a:t>
+            </a:r>
+            <a:endParaRPr lang="en-US" sz="1000" dirty="0"/>
+          </a:p>
+        </p:txBody>
+      </p:sp>
+      <p:sp>
+        <p:nvSpPr>
+          <p:cNvPr id="80" name="Shape 77"/>
+          <p:cNvSpPr/>
+          <p:nvPr/>
+        </p:nvSpPr>
+        <p:spPr>
+          <a:xfrm>
+            <a:off x="502920" y="4690872"/>
+            <a:ext cx="11247120" cy="0"/>
+          </a:xfrm>
+          <a:prstGeom prst="line">
+            <a:avLst/>
+          </a:prstGeom>
+          <a:noFill/>
+          <a:ln w="9525">
+            <a:solidFill>
+              <a:srgbClr val="D9DFE6"/>
+            </a:solidFill>
+            <a:prstDash val="solid"/>
+          </a:ln>
+        </p:spPr>
+      </p:sp>
+      <p:sp>
+        <p:nvSpPr>
+          <p:cNvPr id="81" name="Shape 78"/>
+          <p:cNvSpPr/>
+          <p:nvPr/>
+        </p:nvSpPr>
+        <p:spPr>
+          <a:xfrm>
+            <a:off x="457200" y="4700016"/>
+            <a:ext cx="11292840" cy="347472"/>
+          </a:xfrm>
+          <a:prstGeom prst="rect">
+            <a:avLst/>
+          </a:prstGeom>
+          <a:solidFill>
+            <a:srgbClr val="FFFFFF"/>
+          </a:solidFill>
+          <a:ln/>
+        </p:spPr>
+      </p:sp>
+      <p:sp>
+        <p:nvSpPr>
+          <p:cNvPr id="82" name="Text 79"/>
+          <p:cNvSpPr/>
+          <p:nvPr/>
+        </p:nvSpPr>
+        <p:spPr>
+          <a:xfrm>
+            <a:off x="502920" y="4745736"/>
+            <a:ext cx="822960" cy="256032"/>
+          </a:xfrm>
+          <a:prstGeom prst="rect">
+            <a:avLst/>
+          </a:prstGeom>
+          <a:noFill/>
+          <a:ln/>
+        </p:spPr>
+        <p:txBody>
+          <a:bodyPr wrap="square" lIns="0" tIns="0" rIns="0" bIns="0" rtlCol="0" anchor="ctr"/>
+          <a:lstStyle/>
+          <a:p>
+            <a:pPr algn="l" indent="0" marL="0">
+              <a:buNone/>
+            </a:pPr>
+            <a:r>
+              <a:rPr lang="en-US" sz="1050" dirty="0">
+                <a:solidFill>
+                  <a:srgbClr val="1A2433"/>
+                </a:solidFill>
+                <a:latin typeface="Calibri" pitchFamily="34" charset="0"/>
+                <a:ea typeface="Calibri" pitchFamily="34" charset="-122"/>
+                <a:cs typeface="Calibri" pitchFamily="34" charset="-120"/>
+              </a:rPr>
+              <a:t>MASA-28</a:t>
+            </a:r>
+            <a:endParaRPr lang="en-US" sz="1050" dirty="0"/>
+          </a:p>
+        </p:txBody>
+      </p:sp>
+      <p:sp>
+        <p:nvSpPr>
+          <p:cNvPr id="83" name="Text 80"/>
+          <p:cNvSpPr/>
+          <p:nvPr/>
+        </p:nvSpPr>
+        <p:spPr>
+          <a:xfrm>
+            <a:off x="1371600" y="4745736"/>
+            <a:ext cx="1508760" cy="256032"/>
+          </a:xfrm>
+          <a:prstGeom prst="rect">
+            <a:avLst/>
+          </a:prstGeom>
+          <a:noFill/>
+          <a:ln/>
+        </p:spPr>
+        <p:txBody>
+          <a:bodyPr wrap="square" lIns="0" tIns="0" rIns="0" bIns="0" rtlCol="0" anchor="ctr"/>
+          <a:lstStyle/>
+          <a:p>
+            <a:pPr algn="l" indent="0" marL="0">
+              <a:buNone/>
+            </a:pPr>
+            <a:r>
+              <a:rPr lang="en-US" sz="1050" dirty="0">
+                <a:solidFill>
+                  <a:srgbClr val="1A2433"/>
+                </a:solidFill>
+                <a:latin typeface="Calibri" pitchFamily="34" charset="0"/>
+                <a:ea typeface="Calibri" pitchFamily="34" charset="-122"/>
+                <a:cs typeface="Calibri" pitchFamily="34" charset="-120"/>
+              </a:rPr>
+              <a:t>Observación</a:t>
+            </a:r>
+            <a:endParaRPr lang="en-US" sz="1050" dirty="0"/>
+          </a:p>
+        </p:txBody>
+      </p:sp>
+      <p:sp>
+        <p:nvSpPr>
+          <p:cNvPr id="84" name="Text 81"/>
+          <p:cNvSpPr/>
+          <p:nvPr/>
+        </p:nvSpPr>
+        <p:spPr>
+          <a:xfrm>
+            <a:off x="2926080" y="4745736"/>
+            <a:ext cx="1463040" cy="256032"/>
+          </a:xfrm>
+          <a:prstGeom prst="rect">
+            <a:avLst/>
+          </a:prstGeom>
+          <a:noFill/>
+          <a:ln/>
+        </p:spPr>
+        <p:txBody>
+          <a:bodyPr wrap="square" lIns="0" tIns="0" rIns="0" bIns="0" rtlCol="0" anchor="ctr"/>
+          <a:lstStyle/>
+          <a:p>
+            <a:pPr algn="l" indent="0" marL="0">
+              <a:buNone/>
+            </a:pPr>
+            <a:r>
+              <a:rPr lang="en-US" sz="1050" b="1" dirty="0">
+                <a:solidFill>
+                  <a:srgbClr val="C87A32"/>
+                </a:solidFill>
+                <a:latin typeface="Calibri" pitchFamily="34" charset="0"/>
+                <a:ea typeface="Calibri" pitchFamily="34" charset="-122"/>
+                <a:cs typeface="Calibri" pitchFamily="34" charset="-120"/>
+              </a:rPr>
+              <a:t>Externa · Cliente</a:t>
+            </a:r>
+            <a:endParaRPr lang="en-US" sz="1050" dirty="0"/>
+          </a:p>
+        </p:txBody>
+      </p:sp>
+      <p:sp>
+        <p:nvSpPr>
+          <p:cNvPr id="85" name="Text 82"/>
+          <p:cNvSpPr/>
+          <p:nvPr/>
+        </p:nvSpPr>
+        <p:spPr>
+          <a:xfrm>
+            <a:off x="4434840" y="4745736"/>
+            <a:ext cx="1280160" cy="256032"/>
+          </a:xfrm>
+          <a:prstGeom prst="rect">
+            <a:avLst/>
+          </a:prstGeom>
+          <a:noFill/>
+          <a:ln/>
+        </p:spPr>
+        <p:txBody>
+          <a:bodyPr wrap="square" lIns="0" tIns="0" rIns="0" bIns="0" rtlCol="0" anchor="ctr"/>
+          <a:lstStyle/>
+          <a:p>
+            <a:pPr algn="l" indent="0" marL="0">
+              <a:buNone/>
+            </a:pPr>
+            <a:r>
+              <a:rPr lang="en-US" sz="1050" dirty="0">
+                <a:solidFill>
+                  <a:srgbClr val="1A2433"/>
+                </a:solidFill>
+                <a:latin typeface="Calibri" pitchFamily="34" charset="0"/>
+                <a:ea typeface="Calibri" pitchFamily="34" charset="-122"/>
+                <a:cs typeface="Calibri" pitchFamily="34" charset="-120"/>
+              </a:rPr>
+              <a:t>Sin especialidad</a:t>
+            </a:r>
+            <a:endParaRPr lang="en-US" sz="1050" dirty="0"/>
+          </a:p>
+        </p:txBody>
+      </p:sp>
+      <p:sp>
+        <p:nvSpPr>
+          <p:cNvPr id="86" name="Text 83"/>
+          <p:cNvSpPr/>
+          <p:nvPr/>
+        </p:nvSpPr>
+        <p:spPr>
+          <a:xfrm>
+            <a:off x="5760720" y="4745736"/>
+            <a:ext cx="1508760" cy="256032"/>
+          </a:xfrm>
+          <a:prstGeom prst="rect">
+            <a:avLst/>
+          </a:prstGeom>
+          <a:noFill/>
+          <a:ln/>
+        </p:spPr>
+        <p:txBody>
+          <a:bodyPr wrap="square" lIns="0" tIns="0" rIns="0" bIns="0" rtlCol="0" anchor="ctr"/>
+          <a:lstStyle/>
+          <a:p>
+            <a:pPr algn="l" indent="0" marL="0">
+              <a:buNone/>
+            </a:pPr>
+            <a:r>
+              <a:rPr lang="en-US" sz="1050" dirty="0">
+                <a:solidFill>
+                  <a:srgbClr val="1A2433"/>
+                </a:solidFill>
+                <a:latin typeface="Calibri" pitchFamily="34" charset="0"/>
+                <a:ea typeface="Calibri" pitchFamily="34" charset="-122"/>
+                <a:cs typeface="Calibri" pitchFamily="34" charset="-120"/>
+              </a:rPr>
+              <a:t>Sin asignar</a:t>
+            </a:r>
+            <a:endParaRPr lang="en-US" sz="1050" dirty="0"/>
+          </a:p>
+        </p:txBody>
+      </p:sp>
+      <p:sp>
+        <p:nvSpPr>
+          <p:cNvPr id="87" name="Text 84"/>
+          <p:cNvSpPr/>
+          <p:nvPr/>
+        </p:nvSpPr>
+        <p:spPr>
+          <a:xfrm>
+            <a:off x="7315200" y="4745736"/>
+            <a:ext cx="1325880" cy="256032"/>
+          </a:xfrm>
+          <a:prstGeom prst="rect">
+            <a:avLst/>
+          </a:prstGeom>
+          <a:noFill/>
+          <a:ln/>
+        </p:spPr>
+        <p:txBody>
+          <a:bodyPr wrap="square" lIns="0" tIns="0" rIns="0" bIns="0" rtlCol="0" anchor="ctr"/>
+          <a:lstStyle/>
+          <a:p>
+            <a:pPr algn="l" indent="0" marL="0">
+              <a:buNone/>
+            </a:pPr>
+            <a:r>
+              <a:rPr lang="en-US" sz="1050" dirty="0">
+                <a:solidFill>
+                  <a:srgbClr val="1A2433"/>
+                </a:solidFill>
+                <a:latin typeface="Calibri" pitchFamily="34" charset="0"/>
+                <a:ea typeface="Calibri" pitchFamily="34" charset="-122"/>
+                <a:cs typeface="Calibri" pitchFamily="34" charset="-120"/>
+              </a:rPr>
+              <a:t>Listo para revisi…</a:t>
+            </a:r>
+            <a:endParaRPr lang="en-US" sz="1050" dirty="0"/>
+          </a:p>
+        </p:txBody>
+      </p:sp>
+      <p:sp>
+        <p:nvSpPr>
+          <p:cNvPr id="88" name="Text 85"/>
+          <p:cNvSpPr/>
+          <p:nvPr/>
+        </p:nvSpPr>
+        <p:spPr>
+          <a:xfrm>
+            <a:off x="8686800" y="4745736"/>
+            <a:ext cx="640080" cy="256032"/>
+          </a:xfrm>
+          <a:prstGeom prst="rect">
+            <a:avLst/>
+          </a:prstGeom>
+          <a:noFill/>
+          <a:ln/>
+        </p:spPr>
+        <p:txBody>
+          <a:bodyPr wrap="square" lIns="0" tIns="0" rIns="0" bIns="0" rtlCol="0" anchor="ctr"/>
+          <a:lstStyle/>
+          <a:p>
+            <a:pPr algn="r" indent="0" marL="0">
+              <a:buNone/>
+            </a:pPr>
+            <a:r>
+              <a:rPr lang="en-US" sz="1050" b="1" dirty="0">
+                <a:solidFill>
+                  <a:srgbClr val="C0392B"/>
+                </a:solidFill>
+                <a:latin typeface="Calibri" pitchFamily="34" charset="0"/>
+                <a:ea typeface="Calibri" pitchFamily="34" charset="-122"/>
+                <a:cs typeface="Calibri" pitchFamily="34" charset="-120"/>
+              </a:rPr>
+              <a:t>270</a:t>
+            </a:r>
+            <a:endParaRPr lang="en-US" sz="1050" dirty="0"/>
+          </a:p>
+        </p:txBody>
+      </p:sp>
+      <p:sp>
+        <p:nvSpPr>
+          <p:cNvPr id="89" name="Text 86"/>
+          <p:cNvSpPr/>
+          <p:nvPr/>
+        </p:nvSpPr>
+        <p:spPr>
+          <a:xfrm>
+            <a:off x="9464040" y="4745736"/>
+            <a:ext cx="2286000" cy="256032"/>
+          </a:xfrm>
+          <a:prstGeom prst="rect">
+            <a:avLst/>
+          </a:prstGeom>
+          <a:noFill/>
+          <a:ln/>
+        </p:spPr>
+        <p:txBody>
+          <a:bodyPr wrap="square" lIns="0" tIns="0" rIns="0" bIns="0" rtlCol="0" anchor="ctr"/>
+          <a:lstStyle/>
+          <a:p>
+            <a:pPr algn="l" indent="0" marL="0">
+              <a:buNone/>
+            </a:pPr>
+            <a:r>
+              <a:rPr lang="en-US" sz="1000" dirty="0">
+                <a:solidFill>
+                  <a:srgbClr val="1A2433"/>
+                </a:solidFill>
+                <a:latin typeface="Calibri" pitchFamily="34" charset="0"/>
+                <a:ea typeface="Calibri" pitchFamily="34" charset="-122"/>
+                <a:cs typeface="Calibri" pitchFamily="34" charset="-120"/>
+              </a:rPr>
+              <a:t>Cámara 3700-MH-002, salida sala elé…</a:t>
+            </a:r>
+            <a:endParaRPr lang="en-US" sz="1000" dirty="0"/>
+          </a:p>
+        </p:txBody>
+      </p:sp>
+      <p:sp>
+        <p:nvSpPr>
+          <p:cNvPr id="90" name="Shape 87"/>
+          <p:cNvSpPr/>
+          <p:nvPr/>
+        </p:nvSpPr>
+        <p:spPr>
+          <a:xfrm>
+            <a:off x="502920" y="5038344"/>
+            <a:ext cx="11247120" cy="0"/>
+          </a:xfrm>
+          <a:prstGeom prst="line">
+            <a:avLst/>
+          </a:prstGeom>
+          <a:noFill/>
+          <a:ln w="9525">
+            <a:solidFill>
+              <a:srgbClr val="D9DFE6"/>
+            </a:solidFill>
+            <a:prstDash val="solid"/>
+          </a:ln>
+        </p:spPr>
+      </p:sp>
+      <p:sp>
+        <p:nvSpPr>
+          <p:cNvPr id="91" name="Text 88"/>
+          <p:cNvSpPr/>
+          <p:nvPr/>
+        </p:nvSpPr>
+        <p:spPr>
+          <a:xfrm>
+            <a:off x="502920" y="5093208"/>
+            <a:ext cx="822960" cy="256032"/>
+          </a:xfrm>
+          <a:prstGeom prst="rect">
+            <a:avLst/>
+          </a:prstGeom>
+          <a:noFill/>
+          <a:ln/>
+        </p:spPr>
+        <p:txBody>
+          <a:bodyPr wrap="square" lIns="0" tIns="0" rIns="0" bIns="0" rtlCol="0" anchor="ctr"/>
+          <a:lstStyle/>
+          <a:p>
+            <a:pPr algn="l" indent="0" marL="0">
+              <a:buNone/>
+            </a:pPr>
+            <a:r>
+              <a:rPr lang="en-US" sz="1050" dirty="0">
+                <a:solidFill>
+                  <a:srgbClr val="1A2433"/>
+                </a:solidFill>
+                <a:latin typeface="Calibri" pitchFamily="34" charset="0"/>
+                <a:ea typeface="Calibri" pitchFamily="34" charset="-122"/>
+                <a:cs typeface="Calibri" pitchFamily="34" charset="-120"/>
+              </a:rPr>
+              <a:t>MASA-30</a:t>
+            </a:r>
+            <a:endParaRPr lang="en-US" sz="1050" dirty="0"/>
+          </a:p>
+        </p:txBody>
+      </p:sp>
+      <p:sp>
+        <p:nvSpPr>
+          <p:cNvPr id="92" name="Text 89"/>
+          <p:cNvSpPr/>
+          <p:nvPr/>
+        </p:nvSpPr>
+        <p:spPr>
+          <a:xfrm>
+            <a:off x="1371600" y="5093208"/>
+            <a:ext cx="1508760" cy="256032"/>
+          </a:xfrm>
+          <a:prstGeom prst="rect">
+            <a:avLst/>
+          </a:prstGeom>
+          <a:noFill/>
+          <a:ln/>
+        </p:spPr>
+        <p:txBody>
+          <a:bodyPr wrap="square" lIns="0" tIns="0" rIns="0" bIns="0" rtlCol="0" anchor="ctr"/>
+          <a:lstStyle/>
+          <a:p>
+            <a:pPr algn="l" indent="0" marL="0">
+              <a:buNone/>
+            </a:pPr>
+            <a:r>
+              <a:rPr lang="en-US" sz="1050" dirty="0">
+                <a:solidFill>
+                  <a:srgbClr val="1A2433"/>
+                </a:solidFill>
+                <a:latin typeface="Calibri" pitchFamily="34" charset="0"/>
+                <a:ea typeface="Calibri" pitchFamily="34" charset="-122"/>
+                <a:cs typeface="Calibri" pitchFamily="34" charset="-120"/>
+              </a:rPr>
+              <a:t>Observación</a:t>
+            </a:r>
+            <a:endParaRPr lang="en-US" sz="1050" dirty="0"/>
+          </a:p>
+        </p:txBody>
+      </p:sp>
+      <p:sp>
+        <p:nvSpPr>
+          <p:cNvPr id="93" name="Text 90"/>
+          <p:cNvSpPr/>
+          <p:nvPr/>
+        </p:nvSpPr>
+        <p:spPr>
+          <a:xfrm>
+            <a:off x="2926080" y="5093208"/>
+            <a:ext cx="1463040" cy="256032"/>
+          </a:xfrm>
+          <a:prstGeom prst="rect">
+            <a:avLst/>
+          </a:prstGeom>
+          <a:noFill/>
+          <a:ln/>
+        </p:spPr>
+        <p:txBody>
+          <a:bodyPr wrap="square" lIns="0" tIns="0" rIns="0" bIns="0" rtlCol="0" anchor="ctr"/>
+          <a:lstStyle/>
+          <a:p>
+            <a:pPr algn="l" indent="0" marL="0">
+              <a:buNone/>
+            </a:pPr>
+            <a:r>
+              <a:rPr lang="en-US" sz="1050" b="1" dirty="0">
+                <a:solidFill>
+                  <a:srgbClr val="C87A32"/>
+                </a:solidFill>
+                <a:latin typeface="Calibri" pitchFamily="34" charset="0"/>
+                <a:ea typeface="Calibri" pitchFamily="34" charset="-122"/>
+                <a:cs typeface="Calibri" pitchFamily="34" charset="-120"/>
+              </a:rPr>
+              <a:t>Externa · Cliente</a:t>
+            </a:r>
+            <a:endParaRPr lang="en-US" sz="1050" dirty="0"/>
+          </a:p>
+        </p:txBody>
+      </p:sp>
+      <p:sp>
+        <p:nvSpPr>
+          <p:cNvPr id="94" name="Text 91"/>
+          <p:cNvSpPr/>
+          <p:nvPr/>
+        </p:nvSpPr>
+        <p:spPr>
+          <a:xfrm>
+            <a:off x="4434840" y="5093208"/>
+            <a:ext cx="1280160" cy="256032"/>
+          </a:xfrm>
+          <a:prstGeom prst="rect">
+            <a:avLst/>
+          </a:prstGeom>
+          <a:noFill/>
+          <a:ln/>
+        </p:spPr>
+        <p:txBody>
+          <a:bodyPr wrap="square" lIns="0" tIns="0" rIns="0" bIns="0" rtlCol="0" anchor="ctr"/>
+          <a:lstStyle/>
+          <a:p>
+            <a:pPr algn="l" indent="0" marL="0">
+              <a:buNone/>
+            </a:pPr>
+            <a:r>
+              <a:rPr lang="en-US" sz="1050" dirty="0">
+                <a:solidFill>
+                  <a:srgbClr val="1A2433"/>
+                </a:solidFill>
+                <a:latin typeface="Calibri" pitchFamily="34" charset="0"/>
+                <a:ea typeface="Calibri" pitchFamily="34" charset="-122"/>
+                <a:cs typeface="Calibri" pitchFamily="34" charset="-120"/>
+              </a:rPr>
+              <a:t>Sin especialidad</a:t>
+            </a:r>
+            <a:endParaRPr lang="en-US" sz="1050" dirty="0"/>
+          </a:p>
+        </p:txBody>
+      </p:sp>
+      <p:sp>
+        <p:nvSpPr>
+          <p:cNvPr id="95" name="Text 92"/>
+          <p:cNvSpPr/>
+          <p:nvPr/>
+        </p:nvSpPr>
+        <p:spPr>
+          <a:xfrm>
+            <a:off x="5760720" y="5093208"/>
+            <a:ext cx="1508760" cy="256032"/>
+          </a:xfrm>
+          <a:prstGeom prst="rect">
+            <a:avLst/>
+          </a:prstGeom>
+          <a:noFill/>
+          <a:ln/>
+        </p:spPr>
+        <p:txBody>
+          <a:bodyPr wrap="square" lIns="0" tIns="0" rIns="0" bIns="0" rtlCol="0" anchor="ctr"/>
+          <a:lstStyle/>
+          <a:p>
+            <a:pPr algn="l" indent="0" marL="0">
+              <a:buNone/>
+            </a:pPr>
+            <a:r>
+              <a:rPr lang="en-US" sz="1050" dirty="0">
+                <a:solidFill>
+                  <a:srgbClr val="1A2433"/>
+                </a:solidFill>
+                <a:latin typeface="Calibri" pitchFamily="34" charset="0"/>
+                <a:ea typeface="Calibri" pitchFamily="34" charset="-122"/>
+                <a:cs typeface="Calibri" pitchFamily="34" charset="-120"/>
+              </a:rPr>
+              <a:t>Sin asignar</a:t>
+            </a:r>
+            <a:endParaRPr lang="en-US" sz="1050" dirty="0"/>
+          </a:p>
+        </p:txBody>
+      </p:sp>
+      <p:sp>
+        <p:nvSpPr>
+          <p:cNvPr id="96" name="Text 93"/>
+          <p:cNvSpPr/>
+          <p:nvPr/>
+        </p:nvSpPr>
+        <p:spPr>
+          <a:xfrm>
+            <a:off x="7315200" y="5093208"/>
+            <a:ext cx="1325880" cy="256032"/>
+          </a:xfrm>
+          <a:prstGeom prst="rect">
+            <a:avLst/>
+          </a:prstGeom>
+          <a:noFill/>
+          <a:ln/>
+        </p:spPr>
+        <p:txBody>
+          <a:bodyPr wrap="square" lIns="0" tIns="0" rIns="0" bIns="0" rtlCol="0" anchor="ctr"/>
+          <a:lstStyle/>
+          <a:p>
+            <a:pPr algn="l" indent="0" marL="0">
+              <a:buNone/>
+            </a:pPr>
+            <a:r>
+              <a:rPr lang="en-US" sz="1050" dirty="0">
+                <a:solidFill>
+                  <a:srgbClr val="1A2433"/>
+                </a:solidFill>
+                <a:latin typeface="Calibri" pitchFamily="34" charset="0"/>
+                <a:ea typeface="Calibri" pitchFamily="34" charset="-122"/>
+                <a:cs typeface="Calibri" pitchFamily="34" charset="-120"/>
+              </a:rPr>
+              <a:t>Observada</a:t>
+            </a:r>
+            <a:endParaRPr lang="en-US" sz="1050" dirty="0"/>
+          </a:p>
+        </p:txBody>
+      </p:sp>
+      <p:sp>
+        <p:nvSpPr>
+          <p:cNvPr id="97" name="Text 94"/>
+          <p:cNvSpPr/>
+          <p:nvPr/>
+        </p:nvSpPr>
+        <p:spPr>
+          <a:xfrm>
+            <a:off x="8686800" y="5093208"/>
+            <a:ext cx="640080" cy="256032"/>
+          </a:xfrm>
+          <a:prstGeom prst="rect">
+            <a:avLst/>
+          </a:prstGeom>
+          <a:noFill/>
+          <a:ln/>
+        </p:spPr>
+        <p:txBody>
+          <a:bodyPr wrap="square" lIns="0" tIns="0" rIns="0" bIns="0" rtlCol="0" anchor="ctr"/>
+          <a:lstStyle/>
+          <a:p>
+            <a:pPr algn="r" indent="0" marL="0">
+              <a:buNone/>
+            </a:pPr>
+            <a:r>
+              <a:rPr lang="en-US" sz="1050" b="1" dirty="0">
+                <a:solidFill>
+                  <a:srgbClr val="C0392B"/>
+                </a:solidFill>
+                <a:latin typeface="Calibri" pitchFamily="34" charset="0"/>
+                <a:ea typeface="Calibri" pitchFamily="34" charset="-122"/>
+                <a:cs typeface="Calibri" pitchFamily="34" charset="-120"/>
+              </a:rPr>
+              <a:t>266</a:t>
+            </a:r>
+            <a:endParaRPr lang="en-US" sz="1050" dirty="0"/>
+          </a:p>
+        </p:txBody>
+      </p:sp>
+      <p:sp>
+        <p:nvSpPr>
+          <p:cNvPr id="98" name="Text 95"/>
+          <p:cNvSpPr/>
+          <p:nvPr/>
+        </p:nvSpPr>
+        <p:spPr>
+          <a:xfrm>
+            <a:off x="9464040" y="5093208"/>
+            <a:ext cx="2286000" cy="256032"/>
+          </a:xfrm>
+          <a:prstGeom prst="rect">
+            <a:avLst/>
+          </a:prstGeom>
+          <a:noFill/>
+          <a:ln/>
+        </p:spPr>
+        <p:txBody>
+          <a:bodyPr wrap="square" lIns="0" tIns="0" rIns="0" bIns="0" rtlCol="0" anchor="ctr"/>
+          <a:lstStyle/>
+          <a:p>
+            <a:pPr algn="l" indent="0" marL="0">
+              <a:buNone/>
+            </a:pPr>
+            <a:r>
+              <a:rPr lang="en-US" sz="1000" dirty="0">
+                <a:solidFill>
+                  <a:srgbClr val="1A2433"/>
+                </a:solidFill>
+                <a:latin typeface="Calibri" pitchFamily="34" charset="0"/>
+                <a:ea typeface="Calibri" pitchFamily="34" charset="-122"/>
+                <a:cs typeface="Calibri" pitchFamily="34" charset="-120"/>
+              </a:rPr>
+              <a:t>Fundaciones faltantes para apoyo de…</a:t>
+            </a:r>
+            <a:endParaRPr lang="en-US" sz="1000" dirty="0"/>
+          </a:p>
+        </p:txBody>
+      </p:sp>
+      <p:sp>
+        <p:nvSpPr>
+          <p:cNvPr id="99" name="Shape 96"/>
+          <p:cNvSpPr/>
+          <p:nvPr/>
+        </p:nvSpPr>
+        <p:spPr>
+          <a:xfrm>
+            <a:off x="502920" y="5385816"/>
+            <a:ext cx="11247120" cy="0"/>
+          </a:xfrm>
+          <a:prstGeom prst="line">
+            <a:avLst/>
+          </a:prstGeom>
+          <a:noFill/>
+          <a:ln w="9525">
+            <a:solidFill>
+              <a:srgbClr val="D9DFE6"/>
+            </a:solidFill>
+            <a:prstDash val="solid"/>
+          </a:ln>
+        </p:spPr>
+      </p:sp>
+      <p:sp>
+        <p:nvSpPr>
+          <p:cNvPr id="100" name="Text 97"/>
+          <p:cNvSpPr/>
+          <p:nvPr/>
+        </p:nvSpPr>
+        <p:spPr>
+          <a:xfrm>
+            <a:off x="502920" y="5440680"/>
+            <a:ext cx="8229600" cy="256032"/>
+          </a:xfrm>
+          <a:prstGeom prst="rect">
+            <a:avLst/>
+          </a:prstGeom>
+          <a:noFill/>
+          <a:ln/>
+        </p:spPr>
+        <p:txBody>
+          <a:bodyPr wrap="square" lIns="0" tIns="0" rIns="0" bIns="0" rtlCol="0" anchor="ctr"/>
+          <a:lstStyle/>
+          <a:p>
+            <a:pPr indent="0" marL="0">
+              <a:buNone/>
+            </a:pPr>
+            <a:r>
+              <a:rPr lang="en-US" sz="950" i="1" dirty="0">
+                <a:solidFill>
+                  <a:srgbClr val="56606E"/>
+                </a:solidFill>
+                <a:latin typeface="Calibri" pitchFamily="34" charset="0"/>
+                <a:ea typeface="Calibri" pitchFamily="34" charset="-122"/>
+                <a:cs typeface="Calibri" pitchFamily="34" charset="-120"/>
+              </a:rPr>
+              <a:t>Se listan los 9 más antiguos de 36 abiertos; el detalle completo está en el panel.</a:t>
+            </a:r>
+            <a:endParaRPr lang="en-US" sz="950" dirty="0"/>
+          </a:p>
+        </p:txBody>
+      </p:sp>
+      <p:sp>
+        <p:nvSpPr>
+          <p:cNvPr id="101" name="Shape 98"/>
+          <p:cNvSpPr/>
+          <p:nvPr/>
+        </p:nvSpPr>
+        <p:spPr>
+          <a:xfrm>
             <a:off x="457200" y="5806440"/>
             <a:ext cx="11274552" cy="566928"/>
           </a:xfrm>
@@ -17305,7 +20104,7 @@
       </p:sp>
       <p:sp>
         <p:nvSpPr>
-          <p:cNvPr id="25" name="Text 22"/>
+          <p:cNvPr id="102" name="Text 99"/>
           <p:cNvSpPr/>
           <p:nvPr/>
         </p:nvSpPr>
@@ -17344,7 +20143,7 @@
       </p:sp>
       <p:sp>
         <p:nvSpPr>
-          <p:cNvPr id="26" name="Text 23"/>
+          <p:cNvPr id="103" name="Text 100"/>
           <p:cNvSpPr/>
           <p:nvPr/>
         </p:nvSpPr>
@@ -17383,7 +20182,7 @@
       </p:sp>
       <p:sp>
         <p:nvSpPr>
-          <p:cNvPr id="27" name="Text 24"/>
+          <p:cNvPr id="104" name="Text 101"/>
           <p:cNvSpPr/>
           <p:nvPr/>
         </p:nvSpPr>
@@ -17414,7 +20213,7 @@
                 <a:ea typeface="Calibri" pitchFamily="34" charset="-122"/>
                 <a:cs typeface="Calibri" pitchFamily="34" charset="-120"/>
               </a:rPr>
-              <a:t>Fuente: 1e73482e-Data_NCR03082026.xlsx — hoja «Observaciones» · Corte 03-08-2026 · 438 registros desde 10-02-2023</a:t>
+              <a:t>Fuente: 1e73482e-Data_NCR03082026.xlsx — hoja «Observaciones» · Corte 03-08-2026 · 508 registros desde 10-02-2023</a:t>
             </a:r>
             <a:endParaRPr lang="en-US" sz="850" dirty="0"/>
           </a:p>
@@ -17422,7 +20221,7 @@
       </p:sp>
       <p:sp>
         <p:nvSpPr>
-          <p:cNvPr id="28" name="Text 25"/>
+          <p:cNvPr id="105" name="Text 102"/>
           <p:cNvSpPr/>
           <p:nvPr/>
         </p:nvSpPr>
@@ -17461,7 +20260,7 @@
       </p:sp>
       <p:sp>
         <p:nvSpPr>
-          <p:cNvPr id="29" name="Text 26"/>
+          <p:cNvPr id="106" name="Text 103"/>
           <p:cNvSpPr/>
           <p:nvPr/>
         </p:nvSpPr>
@@ -17719,7 +20518,7 @@
                 <a:ea typeface="Cambria" pitchFamily="34" charset="-122"/>
                 <a:cs typeface="Cambria" pitchFamily="34" charset="-120"/>
               </a:rPr>
-              <a:t>95,7%</a:t>
+              <a:t>89,4%</a:t>
             </a:r>
             <a:endParaRPr lang="en-US" sz="4000" dirty="0"/>
           </a:p>
@@ -17758,7 +20557,7 @@
                 <a:ea typeface="Calibri" pitchFamily="34" charset="-122"/>
                 <a:cs typeface="Calibri" pitchFamily="34" charset="-120"/>
               </a:rPr>
-              <a:t>419/438</a:t>
+              <a:t>454/508</a:t>
             </a:r>
             <a:endParaRPr lang="en-US" sz="1400" dirty="0"/>
           </a:p>
@@ -17836,7 +20635,7 @@
                 <a:ea typeface="Calibri" pitchFamily="34" charset="-122"/>
                 <a:cs typeface="Calibri" pitchFamily="34" charset="-120"/>
               </a:rPr>
-              <a:t>19 abiertos · 3 con más de 180 días</a:t>
+              <a:t>54 abiertos · 17 con más de 180 días</a:t>
             </a:r>
             <a:endParaRPr lang="en-US" sz="950" dirty="0"/>
           </a:p>
@@ -17929,7 +20728,7 @@
                 <a:ea typeface="Cambria" pitchFamily="34" charset="-122"/>
                 <a:cs typeface="Cambria" pitchFamily="34" charset="-120"/>
               </a:rPr>
-              <a:t>19</a:t>
+              <a:t>54</a:t>
             </a:r>
             <a:endParaRPr lang="en-US" sz="4000" dirty="0"/>
           </a:p>
@@ -17968,7 +20767,7 @@
                 <a:ea typeface="Calibri" pitchFamily="34" charset="-122"/>
                 <a:cs typeface="Calibri" pitchFamily="34" charset="-120"/>
               </a:rPr>
-              <a:t>de 438 levantados</a:t>
+              <a:t>de 508 levantados</a:t>
             </a:r>
             <a:endParaRPr lang="en-US" sz="1400" dirty="0"/>
           </a:p>
@@ -18046,7 +20845,7 @@
                 <a:ea typeface="Calibri" pitchFamily="34" charset="-122"/>
                 <a:cs typeface="Calibri" pitchFamily="34" charset="-120"/>
               </a:rPr>
-              <a:t>15 iniciado · 1 no aceptado · 3 listo para revisión</a:t>
+              <a:t>15 iniciado · 1 no aceptado · 23 listo para revisión · 12 observada · 3 pendiente</a:t>
             </a:r>
             <a:endParaRPr lang="en-US" sz="950" dirty="0"/>
           </a:p>
@@ -18139,7 +20938,7 @@
                 <a:ea typeface="Cambria" pitchFamily="34" charset="-122"/>
                 <a:cs typeface="Cambria" pitchFamily="34" charset="-120"/>
               </a:rPr>
-              <a:t>37,8%</a:t>
+              <a:t>32,5%</a:t>
             </a:r>
             <a:endParaRPr lang="en-US" sz="4000" dirty="0"/>
           </a:p>
@@ -18178,7 +20977,7 @@
                 <a:ea typeface="Calibri" pitchFamily="34" charset="-122"/>
                 <a:cs typeface="Calibri" pitchFamily="34" charset="-120"/>
               </a:rPr>
-              <a:t>162/429 clasificados</a:t>
+              <a:t>162/499 clasificados</a:t>
             </a:r>
             <a:endParaRPr lang="en-US" sz="1400" dirty="0"/>
           </a:p>
@@ -18388,7 +21187,7 @@
                 <a:ea typeface="Calibri" pitchFamily="34" charset="-122"/>
                 <a:cs typeface="Calibri" pitchFamily="34" charset="-120"/>
               </a:rPr>
-              <a:t>256 de 438 con costo</a:t>
+              <a:t>256 de 508 con costo</a:t>
             </a:r>
             <a:endParaRPr lang="en-US" sz="1400" dirty="0"/>
           </a:p>
@@ -18466,7 +21265,7 @@
                 <a:ea typeface="Calibri" pitchFamily="34" charset="-122"/>
                 <a:cs typeface="Calibri" pitchFamily="34" charset="-120"/>
               </a:rPr>
-              <a:t>182 hallazgos no declaran costo: la cifra es un piso</a:t>
+              <a:t>252 hallazgos no declaran costo: la cifra es un piso</a:t>
             </a:r>
             <a:endParaRPr lang="en-US" sz="950" dirty="0"/>
           </a:p>
@@ -18589,7 +21388,7 @@
                 <a:ea typeface="Calibri" pitchFamily="34" charset="-122"/>
                 <a:cs typeface="Calibri" pitchFamily="34" charset="-120"/>
               </a:rPr>
-              <a:t>Talabre concentra el pendiente.  </a:t>
+              <a:t>Arqueros concentra el pendiente.  </a:t>
             </a:r>
             <a:pPr indent="0" marL="0">
               <a:lnSpc>
@@ -18606,7 +21405,7 @@
                 <a:ea typeface="Calibri" pitchFamily="34" charset="-122"/>
                 <a:cs typeface="Calibri" pitchFamily="34" charset="-120"/>
               </a:rPr>
-              <a:t>15 de los 19 hallazgos abiertos (78,9%), y es el único frente donde el cliente levanta más de lo que detecta Besalco (188 externas contra 53 internas).</a:t>
+              <a:t>36 de los 54 hallazgos abiertos (66,7%), y es uno de los frentes donde el cliente levanta más de lo que detecta Besalco (111 externas contra 53 internas).</a:t>
             </a:r>
             <a:endParaRPr lang="en-US" sz="1250" dirty="0"/>
           </a:p>
@@ -18764,7 +21563,7 @@
                 <a:ea typeface="Calibri" pitchFamily="34" charset="-122"/>
                 <a:cs typeface="Calibri" pitchFamily="34" charset="-120"/>
               </a:rPr>
-              <a:t>Ninguno de los 19 abiertos trae fecha comprometida —la columna «Fecha De Cierre» solo se llena al cerrar—, así que se reporta la antigüedad: 3 llevan más de 180 días y 1 más de un año.</a:t>
+              <a:t>Ninguno de los 54 abiertos trae fecha comprometida —la columna «Fecha De Cierre» solo se llena al cerrar—, así que se reporta la antigüedad: 17 llevan más de 180 días y 3 más de un año.</a:t>
             </a:r>
             <a:endParaRPr lang="en-US" sz="1250" dirty="0"/>
           </a:p>
@@ -18803,7 +21602,7 @@
                 <a:ea typeface="Calibri" pitchFamily="34" charset="-122"/>
                 <a:cs typeface="Calibri" pitchFamily="34" charset="-120"/>
               </a:rPr>
-              <a:t>Fuente: 1e73482e-Data_NCR03082026.xlsx — hoja «Observaciones» · Corte 03-08-2026 · 438 registros desde 10-02-2023</a:t>
+              <a:t>Fuente: 1e73482e-Data_NCR03082026.xlsx — hoja «Observaciones» · Corte 03-08-2026 · 508 registros desde 10-02-2023</a:t>
             </a:r>
             <a:endParaRPr lang="en-US" sz="850" dirty="0"/>
           </a:p>
@@ -20435,7 +23234,7 @@
                 <a:ea typeface="Calibri" pitchFamily="34" charset="-122"/>
                 <a:cs typeface="Calibri" pitchFamily="34" charset="-120"/>
               </a:rPr>
-              <a:t>94</a:t>
+              <a:t>164</a:t>
             </a:r>
             <a:endParaRPr lang="en-US" sz="1300" dirty="0"/>
           </a:p>
@@ -20474,7 +23273,7 @@
                 <a:ea typeface="Calibri" pitchFamily="34" charset="-122"/>
                 <a:cs typeface="Calibri" pitchFamily="34" charset="-120"/>
               </a:rPr>
-              <a:t>93</a:t>
+              <a:t>128</a:t>
             </a:r>
             <a:endParaRPr lang="en-US" sz="1300" dirty="0"/>
           </a:p>
@@ -20507,13 +23306,13 @@
             <a:r>
               <a:rPr lang="en-US" sz="1300" dirty="0">
                 <a:solidFill>
-                  <a:srgbClr val="1A2433"/>
-                </a:solidFill>
-                <a:latin typeface="Calibri" pitchFamily="34" charset="0"/>
-                <a:ea typeface="Calibri" pitchFamily="34" charset="-122"/>
-                <a:cs typeface="Calibri" pitchFamily="34" charset="-120"/>
-              </a:rPr>
-              <a:t>1</a:t>
+                  <a:srgbClr val="C0392B"/>
+                </a:solidFill>
+                <a:latin typeface="Calibri" pitchFamily="34" charset="0"/>
+                <a:ea typeface="Calibri" pitchFamily="34" charset="-122"/>
+                <a:cs typeface="Calibri" pitchFamily="34" charset="-120"/>
+              </a:rPr>
+              <a:t>36</a:t>
             </a:r>
             <a:endParaRPr lang="en-US" sz="1300" dirty="0"/>
           </a:p>
@@ -20552,7 +23351,7 @@
                 <a:ea typeface="Calibri" pitchFamily="34" charset="-122"/>
                 <a:cs typeface="Calibri" pitchFamily="34" charset="-120"/>
               </a:rPr>
-              <a:t>98,9%</a:t>
+              <a:t>78%</a:t>
             </a:r>
             <a:endParaRPr lang="en-US" sz="1300" dirty="0"/>
           </a:p>
@@ -20624,13 +23423,13 @@
             <a:r>
               <a:rPr lang="en-US" sz="1300" dirty="0">
                 <a:solidFill>
-                  <a:srgbClr val="1A2433"/>
-                </a:solidFill>
-                <a:latin typeface="Calibri" pitchFamily="34" charset="0"/>
-                <a:ea typeface="Calibri" pitchFamily="34" charset="-122"/>
-                <a:cs typeface="Calibri" pitchFamily="34" charset="-120"/>
-              </a:rPr>
-              <a:t>41</a:t>
+                  <a:srgbClr val="C87A32"/>
+                </a:solidFill>
+                <a:latin typeface="Calibri" pitchFamily="34" charset="0"/>
+                <a:ea typeface="Calibri" pitchFamily="34" charset="-122"/>
+                <a:cs typeface="Calibri" pitchFamily="34" charset="-120"/>
+              </a:rPr>
+              <a:t>111</a:t>
             </a:r>
             <a:endParaRPr lang="en-US" sz="1300" dirty="0"/>
           </a:p>
@@ -20692,7 +23491,7 @@
             </a:avLst>
           </a:prstGeom>
           <a:solidFill>
-            <a:srgbClr val="2E9E5B"/>
+            <a:srgbClr val="C0392B"/>
           </a:solidFill>
           <a:ln/>
         </p:spPr>
@@ -20730,7 +23529,7 @@
                 <a:ea typeface="Calibri" pitchFamily="34" charset="-122"/>
                 <a:cs typeface="Calibri" pitchFamily="34" charset="-120"/>
               </a:rPr>
-              <a:t>Al día</a:t>
+              <a:t>Crítico</a:t>
             </a:r>
             <a:endParaRPr lang="en-US" sz="1050" dirty="0"/>
           </a:p>
@@ -21325,7 +24124,7 @@
                 <a:ea typeface="Calibri" pitchFamily="34" charset="-122"/>
                 <a:cs typeface="Calibri" pitchFamily="34" charset="-120"/>
               </a:rPr>
-              <a:t>430</a:t>
+              <a:t>500</a:t>
             </a:r>
             <a:endParaRPr lang="en-US" sz="1300" dirty="0"/>
           </a:p>
@@ -21364,7 +24163,7 @@
                 <a:ea typeface="Calibri" pitchFamily="34" charset="-122"/>
                 <a:cs typeface="Calibri" pitchFamily="34" charset="-120"/>
               </a:rPr>
-              <a:t>411</a:t>
+              <a:t>446</a:t>
             </a:r>
             <a:endParaRPr lang="en-US" sz="1300" dirty="0"/>
           </a:p>
@@ -21403,7 +24202,7 @@
                 <a:ea typeface="Calibri" pitchFamily="34" charset="-122"/>
                 <a:cs typeface="Calibri" pitchFamily="34" charset="-120"/>
               </a:rPr>
-              <a:t>19</a:t>
+              <a:t>54</a:t>
             </a:r>
             <a:endParaRPr lang="en-US" sz="1300" dirty="0"/>
           </a:p>
@@ -21442,7 +24241,7 @@
                 <a:ea typeface="Calibri" pitchFamily="34" charset="-122"/>
                 <a:cs typeface="Calibri" pitchFamily="34" charset="-120"/>
               </a:rPr>
-              <a:t>95,6%</a:t>
+              <a:t>89,2%</a:t>
             </a:r>
             <a:endParaRPr lang="en-US" sz="1300" dirty="0"/>
           </a:p>
@@ -21520,7 +24319,7 @@
                 <a:ea typeface="Calibri" pitchFamily="34" charset="-122"/>
                 <a:cs typeface="Calibri" pitchFamily="34" charset="-120"/>
               </a:rPr>
-              <a:t>267</a:t>
+              <a:t>337</a:t>
             </a:r>
             <a:endParaRPr lang="en-US" sz="1300" dirty="0"/>
           </a:p>
@@ -21598,7 +24397,7 @@
                 <a:ea typeface="Calibri" pitchFamily="34" charset="-122"/>
                 <a:cs typeface="Calibri" pitchFamily="34" charset="-120"/>
               </a:rPr>
-              <a:t>Mediana de cierre global 28 días · el hallazgo más lento tomó 389 días · 8 hallazgos sin especialidad declarada.</a:t>
+              <a:t>Mediana de cierre global 30 días · el hallazgo más lento tomó 389 días · 78 hallazgos sin especialidad declarada.</a:t>
             </a:r>
             <a:endParaRPr lang="en-US" sz="950" dirty="0"/>
           </a:p>
@@ -21637,7 +24436,7 @@
                 <a:ea typeface="Calibri" pitchFamily="34" charset="-122"/>
                 <a:cs typeface="Calibri" pitchFamily="34" charset="-120"/>
               </a:rPr>
-              <a:t>Fuente: 1e73482e-Data_NCR03082026.xlsx — hoja «Observaciones» · Corte 03-08-2026 · 438 registros desde 10-02-2023</a:t>
+              <a:t>Fuente: 1e73482e-Data_NCR03082026.xlsx — hoja «Observaciones» · Corte 03-08-2026 · 508 registros desde 10-02-2023</a:t>
             </a:r>
             <a:endParaRPr lang="en-US" sz="850" dirty="0"/>
           </a:p>
@@ -23103,7 +25902,7 @@
                 <a:ea typeface="Calibri" pitchFamily="34" charset="-122"/>
                 <a:cs typeface="Calibri" pitchFamily="34" charset="-120"/>
               </a:rPr>
-              <a:t>Fuente: 1e73482e-Data_NCR03082026.xlsx — hoja «Observaciones» · Corte 03-08-2026 · 438 registros desde 10-02-2023</a:t>
+              <a:t>Fuente: 1e73482e-Data_NCR03082026.xlsx — hoja «Observaciones» · Corte 03-08-2026 · 508 registros desde 10-02-2023</a:t>
             </a:r>
             <a:endParaRPr lang="en-US" sz="850" dirty="0"/>
           </a:p>
@@ -23354,7 +26153,7 @@
                 <a:ea typeface="Calibri" pitchFamily="34" charset="-122"/>
                 <a:cs typeface="Calibri" pitchFamily="34" charset="-120"/>
               </a:rPr>
-              <a:t>Interna es autodetección: la levanta Besalco antes que nadie. Externa la levanta el cliente —compromete el contrato— o un subcontrato. Autodetección global: 37,8%.</a:t>
+              <a:t>Interna es autodetección: la levanta Besalco antes que nadie. Externa la levanta el cliente —compromete el contrato— o un subcontrato. Autodetección global: 32,5%.</a:t>
             </a:r>
             <a:endParaRPr lang="en-US" sz="1350" dirty="0"/>
           </a:p>
@@ -23642,7 +26441,7 @@
                 <a:ea typeface="Cambria" pitchFamily="34" charset="-122"/>
                 <a:cs typeface="Cambria" pitchFamily="34" charset="-120"/>
               </a:rPr>
-              <a:t>56,4%</a:t>
+              <a:t>32,3%</a:t>
             </a:r>
             <a:endParaRPr lang="en-US" sz="2400" dirty="0"/>
           </a:p>
@@ -23720,7 +26519,7 @@
                 <a:ea typeface="Calibri" pitchFamily="34" charset="-122"/>
                 <a:cs typeface="Calibri" pitchFamily="34" charset="-120"/>
               </a:rPr>
-              <a:t>Fuente: 1e73482e-Data_NCR03082026.xlsx — hoja «Observaciones» · Corte 03-08-2026 · 438 registros desde 10-02-2023</a:t>
+              <a:t>Fuente: 1e73482e-Data_NCR03082026.xlsx — hoja «Observaciones» · Corte 03-08-2026 · 508 registros desde 10-02-2023</a:t>
             </a:r>
             <a:endParaRPr lang="en-US" sz="850" dirty="0"/>
           </a:p>
@@ -23971,7 +26770,7 @@
                 <a:ea typeface="Calibri" pitchFamily="34" charset="-122"/>
                 <a:cs typeface="Calibri" pitchFamily="34" charset="-120"/>
               </a:rPr>
-              <a:t>De los 19 hallazgos abiertos, 3 llevan más de 180 días desde que se levantaron y 1 más de un año. La mediana de cierre global es de 28 días.</a:t>
+              <a:t>De los 54 hallazgos abiertos, 17 llevan más de 180 días desde que se levantaron y 3 más de un año. La mediana de cierre global es de 30 días.</a:t>
             </a:r>
             <a:endParaRPr lang="en-US" sz="1350" dirty="0"/>
           </a:p>
@@ -24108,7 +26907,7 @@
                 <a:ea typeface="Calibri" pitchFamily="34" charset="-122"/>
                 <a:cs typeface="Calibri" pitchFamily="34" charset="-120"/>
               </a:rPr>
-              <a:t>Ninguno de los 19 abiertos trae esa fecha: la columna «Fecha De Cierre» del Excel solo se llena al cerrar. El indicador no se puede calcular y el panel lo declara en vez de informar 0 atrasados. En su lugar se usa la antigüedad.</a:t>
+              <a:t>Ninguno de los 54 abiertos trae esa fecha: la columna «Fecha De Cierre» del Excel solo se llena al cerrar. El indicador no se puede calcular y el panel lo declara en vez de informar 0 atrasados. En su lugar se usa la antigüedad.</a:t>
             </a:r>
             <a:endParaRPr lang="en-US" sz="1150" dirty="0"/>
           </a:p>
@@ -25033,7 +27832,7 @@
                 <a:ea typeface="Calibri" pitchFamily="34" charset="-122"/>
                 <a:cs typeface="Calibri" pitchFamily="34" charset="-120"/>
               </a:rPr>
-              <a:t>93</a:t>
+              <a:t>128</a:t>
             </a:r>
             <a:endParaRPr lang="en-US" sz="1150" dirty="0"/>
           </a:p>
@@ -25072,7 +27871,7 @@
                 <a:ea typeface="Calibri" pitchFamily="34" charset="-122"/>
                 <a:cs typeface="Calibri" pitchFamily="34" charset="-120"/>
               </a:rPr>
-              <a:t>139 d</a:t>
+              <a:t>131 d</a:t>
             </a:r>
             <a:endParaRPr lang="en-US" sz="1150" dirty="0"/>
           </a:p>
@@ -25144,13 +27943,13 @@
             <a:r>
               <a:rPr lang="en-US" sz="1150" dirty="0">
                 <a:solidFill>
-                  <a:srgbClr val="1A2433"/>
-                </a:solidFill>
-                <a:latin typeface="Calibri" pitchFamily="34" charset="0"/>
-                <a:ea typeface="Calibri" pitchFamily="34" charset="-122"/>
-                <a:cs typeface="Calibri" pitchFamily="34" charset="-120"/>
-              </a:rPr>
-              <a:t>1</a:t>
+                  <a:srgbClr val="C0392B"/>
+                </a:solidFill>
+                <a:latin typeface="Calibri" pitchFamily="34" charset="0"/>
+                <a:ea typeface="Calibri" pitchFamily="34" charset="-122"/>
+                <a:cs typeface="Calibri" pitchFamily="34" charset="-120"/>
+              </a:rPr>
+              <a:t>36</a:t>
             </a:r>
             <a:endParaRPr lang="en-US" sz="1150" dirty="0"/>
           </a:p>
@@ -25528,7 +28327,7 @@
                 <a:ea typeface="Calibri" pitchFamily="34" charset="-122"/>
                 <a:cs typeface="Calibri" pitchFamily="34" charset="-120"/>
               </a:rPr>
-              <a:t>Fuente: 1e73482e-Data_NCR03082026.xlsx — hoja «Observaciones» · Corte 03-08-2026 · 438 registros desde 10-02-2023</a:t>
+              <a:t>Fuente: 1e73482e-Data_NCR03082026.xlsx — hoja «Observaciones» · Corte 03-08-2026 · 508 registros desde 10-02-2023</a:t>
             </a:r>
             <a:endParaRPr lang="en-US" sz="850" dirty="0"/>
           </a:p>
@@ -25860,7 +28659,7 @@
                 <a:ea typeface="Calibri" pitchFamily="34" charset="-122"/>
                 <a:cs typeface="Calibri" pitchFamily="34" charset="-120"/>
               </a:rPr>
-              <a:t>Cerrar el pendiente de Talabre</a:t>
+              <a:t>Cerrar el pendiente de Arqueros</a:t>
             </a:r>
             <a:endParaRPr lang="en-US" sz="1400" dirty="0"/>
           </a:p>
@@ -25902,7 +28701,7 @@
                 <a:ea typeface="Calibri" pitchFamily="34" charset="-122"/>
                 <a:cs typeface="Calibri" pitchFamily="34" charset="-120"/>
               </a:rPr>
-              <a:t>15 de los 19 hallazgos abiertos (78,9%) y 93,8% de cierre, contra 95,7% global. Es la ruta crítica del módulo.</a:t>
+              <a:t>36 de los 54 hallazgos abiertos (66,7%) y 78% de cierre, contra 89,4% global. Es la ruta crítica del módulo.</a:t>
             </a:r>
             <a:endParaRPr lang="en-US" sz="1100" dirty="0"/>
           </a:p>
@@ -26144,7 +28943,7 @@
                 <a:ea typeface="Calibri" pitchFamily="34" charset="-122"/>
                 <a:cs typeface="Calibri" pitchFamily="34" charset="-120"/>
               </a:rPr>
-              <a:t>Sacar los 3 hallazgos sobre 180 días</a:t>
+              <a:t>Sacar los 17 hallazgos sobre 180 días</a:t>
             </a:r>
             <a:endParaRPr lang="en-US" sz="1400" dirty="0"/>
           </a:p>
@@ -26186,7 +28985,7 @@
                 <a:ea typeface="Calibri" pitchFamily="34" charset="-122"/>
                 <a:cs typeface="Calibri" pitchFamily="34" charset="-120"/>
               </a:rPr>
-              <a:t>1 de ellos superan el año abiertos. Los tienen a cargo Alvaro Cortés V. (3). Es deuda antigua que no se cierra sola.</a:t>
+              <a:t>3 de ellos superan el año abiertos. Los tienen a cargo Sin asignar (14), Alvaro Cortés V. (3). Es deuda antigua que no se cierra sola.</a:t>
             </a:r>
             <a:endParaRPr lang="en-US" sz="1100" dirty="0"/>
           </a:p>
@@ -26367,7 +29166,7 @@
                 <a:ea typeface="Calibri" pitchFamily="34" charset="-122"/>
                 <a:cs typeface="Calibri" pitchFamily="34" charset="-120"/>
               </a:rPr>
-              <a:t>Fuente: 1e73482e-Data_NCR03082026.xlsx — hoja «Observaciones» · Corte 03-08-2026 · 438 registros desde 10-02-2023</a:t>
+              <a:t>Fuente: 1e73482e-Data_NCR03082026.xlsx — hoja «Observaciones» · Corte 03-08-2026 · 508 registros desde 10-02-2023</a:t>
             </a:r>
             <a:endParaRPr lang="en-US" sz="850" dirty="0"/>
           </a:p>
@@ -27130,7 +29929,7 @@
                 <a:ea typeface="Calibri" pitchFamily="34" charset="-122"/>
                 <a:cs typeface="Calibri" pitchFamily="34" charset="-120"/>
               </a:rPr>
-              <a:t>Fuente: 1e73482e-Data_NCR03082026.xlsx — hoja «Observaciones» · Corte 03-08-2026 · 438 registros desde 10-02-2023</a:t>
+              <a:t>Fuente: 1e73482e-Data_NCR03082026.xlsx — hoja «Observaciones» · Corte 03-08-2026 · 508 registros desde 10-02-2023</a:t>
             </a:r>
             <a:endParaRPr lang="en-US" sz="850" dirty="0"/>
           </a:p>
@@ -27723,7 +30522,7 @@
                 <a:ea typeface="Calibri" pitchFamily="34" charset="-122"/>
                 <a:cs typeface="Calibri" pitchFamily="34" charset="-120"/>
               </a:rPr>
-              <a:t>Global del módulo: 95,7%</a:t>
+              <a:t>Global del módulo: 89,4%</a:t>
             </a:r>
             <a:endParaRPr lang="en-US" sz="950" dirty="0"/>
           </a:p>
@@ -28321,7 +31120,7 @@
                 <a:ea typeface="Calibri" pitchFamily="34" charset="-122"/>
                 <a:cs typeface="Calibri" pitchFamily="34" charset="-120"/>
               </a:rPr>
-              <a:t>global del módulo 37,8%</a:t>
+              <a:t>global del módulo 32,5%</a:t>
             </a:r>
             <a:endParaRPr lang="en-US" sz="1000" dirty="0"/>
           </a:p>
@@ -28931,7 +31730,7 @@
                 <a:ea typeface="Calibri" pitchFamily="34" charset="-122"/>
                 <a:cs typeface="Calibri" pitchFamily="34" charset="-120"/>
               </a:rPr>
-              <a:t>Fuente: 1e73482e-Data_NCR03082026.xlsx — hoja «Observaciones» · Corte 03-08-2026 · 438 registros desde 10-02-2023</a:t>
+              <a:t>Fuente: 1e73482e-Data_NCR03082026.xlsx — hoja «Observaciones» · Corte 03-08-2026 · 508 registros desde 10-02-2023</a:t>
             </a:r>
             <a:endParaRPr lang="en-US" sz="850" dirty="0"/>
           </a:p>

--- a/modulo_nc/Panel_No_Conformidades.pptx
+++ b/modulo_nc/Panel_No_Conformidades.pptx
@@ -8131,7 +8131,7 @@
                 <a:ea typeface="Calibri" pitchFamily="34" charset="-122"/>
                 <a:cs typeface="Calibri" pitchFamily="34" charset="-120"/>
               </a:rPr>
-              <a:t>241 hallazgos levantados · 53 internos y 188 externos · 12 especialidades involucradas.</a:t>
+              <a:t>241 hallazgos levantados · 53 internas · 188 del cliente · 12 especialidades involucradas.</a:t>
             </a:r>
             <a:endParaRPr lang="en-US" sz="1350" dirty="0"/>
           </a:p>
@@ -8924,7 +8924,7 @@
                 <a:ea typeface="Calibri" pitchFamily="34" charset="-122"/>
                 <a:cs typeface="Calibri" pitchFamily="34" charset="-120"/>
               </a:rPr>
-              <a:t>53 internos · 188 externos</a:t>
+              <a:t>53 internas · 188 del cliente</a:t>
             </a:r>
             <a:endParaRPr lang="en-US" sz="950" dirty="0"/>
           </a:p>
@@ -13888,7 +13888,7 @@
                 <a:ea typeface="Calibri" pitchFamily="34" charset="-122"/>
                 <a:cs typeface="Calibri" pitchFamily="34" charset="-120"/>
               </a:rPr>
-              <a:t>1 hallazgo nuevo · 0 internos y 1 externo · CALIDAD 1 · 1 sigue abierto</a:t>
+              <a:t>1 hallazgo nuevo · 0 internas · 1 del cliente · CALIDAD 1 · 1 sigue abierto</a:t>
             </a:r>
             <a:endParaRPr lang="en-US" sz="1150" dirty="0"/>
           </a:p>
@@ -14280,7 +14280,7 @@
                 <a:ea typeface="Calibri" pitchFamily="34" charset="-122"/>
                 <a:cs typeface="Calibri" pitchFamily="34" charset="-120"/>
               </a:rPr>
-              <a:t>164 hallazgos levantados · 53 internos y 111 externos · 18 especialidades involucradas.</a:t>
+              <a:t>164 hallazgos levantados · 53 internas · 71 del cliente · 40 de subcontrato · 18 especialidades involucradas.</a:t>
             </a:r>
             <a:endParaRPr lang="en-US" sz="1350" dirty="0"/>
           </a:p>
@@ -15073,7 +15073,7 @@
                 <a:ea typeface="Calibri" pitchFamily="34" charset="-122"/>
                 <a:cs typeface="Calibri" pitchFamily="34" charset="-120"/>
               </a:rPr>
-              <a:t>53 internos · 111 externos</a:t>
+              <a:t>53 internas · 71 del cliente · 40 de subcontrato</a:t>
             </a:r>
             <a:endParaRPr lang="en-US" sz="950" dirty="0"/>
           </a:p>
@@ -21405,7 +21405,7 @@
                 <a:ea typeface="Calibri" pitchFamily="34" charset="-122"/>
                 <a:cs typeface="Calibri" pitchFamily="34" charset="-120"/>
               </a:rPr>
-              <a:t>36 de los 54 hallazgos abiertos (66,7%), y es uno de los frentes donde el cliente levanta más de lo que detecta Besalco (111 externas contra 53 internas).</a:t>
+              <a:t>36 de los 54 hallazgos abiertos (66,7%), y es uno de los frentes donde el cliente levanta más de lo que detecta Besalco (71 del cliente contra 53 internas).</a:t>
             </a:r>
             <a:endParaRPr lang="en-US" sz="1250" dirty="0"/>
           </a:p>
@@ -21868,7 +21868,7 @@
         <p:spPr>
           <a:xfrm>
             <a:off x="502920" y="1920240"/>
-            <a:ext cx="2834640" cy="274320"/>
+            <a:ext cx="2377440" cy="274320"/>
           </a:xfrm>
           <a:prstGeom prst="rect">
             <a:avLst/>
@@ -21906,8 +21906,8 @@
         </p:nvSpPr>
         <p:spPr>
           <a:xfrm>
-            <a:off x="3429000" y="1920240"/>
-            <a:ext cx="1051560" cy="274320"/>
+            <a:off x="2971800" y="1920240"/>
+            <a:ext cx="914400" cy="274320"/>
           </a:xfrm>
           <a:prstGeom prst="rect">
             <a:avLst/>
@@ -21945,8 +21945,8 @@
         </p:nvSpPr>
         <p:spPr>
           <a:xfrm>
-            <a:off x="4572000" y="1920240"/>
-            <a:ext cx="960120" cy="274320"/>
+            <a:off x="3977640" y="1920240"/>
+            <a:ext cx="868680" cy="274320"/>
           </a:xfrm>
           <a:prstGeom prst="rect">
             <a:avLst/>
@@ -21984,7 +21984,202 @@
         </p:nvSpPr>
         <p:spPr>
           <a:xfrm>
-            <a:off x="5623560" y="1920240"/>
+            <a:off x="4937760" y="1920240"/>
+            <a:ext cx="822960" cy="274320"/>
+          </a:xfrm>
+          <a:prstGeom prst="rect">
+            <a:avLst/>
+          </a:prstGeom>
+          <a:noFill/>
+          <a:ln/>
+        </p:spPr>
+        <p:txBody>
+          <a:bodyPr wrap="square" lIns="0" tIns="0" rIns="0" bIns="0" rtlCol="0" anchor="ctr"/>
+          <a:lstStyle/>
+          <a:p>
+            <a:pPr algn="r" indent="0" marL="0">
+              <a:buNone/>
+            </a:pPr>
+            <a:r>
+              <a:rPr lang="en-US" sz="950" b="1" spc="50" kern="0" dirty="0">
+                <a:solidFill>
+                  <a:srgbClr val="56606E"/>
+                </a:solidFill>
+                <a:latin typeface="Calibri" pitchFamily="34" charset="0"/>
+                <a:ea typeface="Calibri" pitchFamily="34" charset="-122"/>
+                <a:cs typeface="Calibri" pitchFamily="34" charset="-120"/>
+              </a:rPr>
+              <a:t>ABIERTOS</a:t>
+            </a:r>
+            <a:endParaRPr lang="en-US" sz="950" dirty="0"/>
+          </a:p>
+        </p:txBody>
+      </p:sp>
+      <p:sp>
+        <p:nvSpPr>
+          <p:cNvPr id="10" name="Text 7"/>
+          <p:cNvSpPr/>
+          <p:nvPr/>
+        </p:nvSpPr>
+        <p:spPr>
+          <a:xfrm>
+            <a:off x="5852160" y="1920240"/>
+            <a:ext cx="822960" cy="274320"/>
+          </a:xfrm>
+          <a:prstGeom prst="rect">
+            <a:avLst/>
+          </a:prstGeom>
+          <a:noFill/>
+          <a:ln/>
+        </p:spPr>
+        <p:txBody>
+          <a:bodyPr wrap="square" lIns="0" tIns="0" rIns="0" bIns="0" rtlCol="0" anchor="ctr"/>
+          <a:lstStyle/>
+          <a:p>
+            <a:pPr algn="r" indent="0" marL="0">
+              <a:buNone/>
+            </a:pPr>
+            <a:r>
+              <a:rPr lang="en-US" sz="950" b="1" spc="50" kern="0" dirty="0">
+                <a:solidFill>
+                  <a:srgbClr val="56606E"/>
+                </a:solidFill>
+                <a:latin typeface="Calibri" pitchFamily="34" charset="0"/>
+                <a:ea typeface="Calibri" pitchFamily="34" charset="-122"/>
+                <a:cs typeface="Calibri" pitchFamily="34" charset="-120"/>
+              </a:rPr>
+              <a:t>% CIERRE</a:t>
+            </a:r>
+            <a:endParaRPr lang="en-US" sz="950" dirty="0"/>
+          </a:p>
+        </p:txBody>
+      </p:sp>
+      <p:sp>
+        <p:nvSpPr>
+          <p:cNvPr id="11" name="Text 8"/>
+          <p:cNvSpPr/>
+          <p:nvPr/>
+        </p:nvSpPr>
+        <p:spPr>
+          <a:xfrm>
+            <a:off x="6766560" y="1920240"/>
+            <a:ext cx="822960" cy="274320"/>
+          </a:xfrm>
+          <a:prstGeom prst="rect">
+            <a:avLst/>
+          </a:prstGeom>
+          <a:noFill/>
+          <a:ln/>
+        </p:spPr>
+        <p:txBody>
+          <a:bodyPr wrap="square" lIns="0" tIns="0" rIns="0" bIns="0" rtlCol="0" anchor="ctr"/>
+          <a:lstStyle/>
+          <a:p>
+            <a:pPr algn="r" indent="0" marL="0">
+              <a:buNone/>
+            </a:pPr>
+            <a:r>
+              <a:rPr lang="en-US" sz="950" b="1" spc="50" kern="0" dirty="0">
+                <a:solidFill>
+                  <a:srgbClr val="56606E"/>
+                </a:solidFill>
+                <a:latin typeface="Calibri" pitchFamily="34" charset="0"/>
+                <a:ea typeface="Calibri" pitchFamily="34" charset="-122"/>
+                <a:cs typeface="Calibri" pitchFamily="34" charset="-120"/>
+              </a:rPr>
+              <a:t>INTERNAS</a:t>
+            </a:r>
+            <a:endParaRPr lang="en-US" sz="950" dirty="0"/>
+          </a:p>
+        </p:txBody>
+      </p:sp>
+      <p:sp>
+        <p:nvSpPr>
+          <p:cNvPr id="12" name="Text 9"/>
+          <p:cNvSpPr/>
+          <p:nvPr/>
+        </p:nvSpPr>
+        <p:spPr>
+          <a:xfrm>
+            <a:off x="7680960" y="1920240"/>
+            <a:ext cx="1005840" cy="274320"/>
+          </a:xfrm>
+          <a:prstGeom prst="rect">
+            <a:avLst/>
+          </a:prstGeom>
+          <a:noFill/>
+          <a:ln/>
+        </p:spPr>
+        <p:txBody>
+          <a:bodyPr wrap="square" lIns="0" tIns="0" rIns="0" bIns="0" rtlCol="0" anchor="ctr"/>
+          <a:lstStyle/>
+          <a:p>
+            <a:pPr algn="r" indent="0" marL="0">
+              <a:buNone/>
+            </a:pPr>
+            <a:r>
+              <a:rPr lang="en-US" sz="950" b="1" spc="50" kern="0" dirty="0">
+                <a:solidFill>
+                  <a:srgbClr val="56606E"/>
+                </a:solidFill>
+                <a:latin typeface="Calibri" pitchFamily="34" charset="0"/>
+                <a:ea typeface="Calibri" pitchFamily="34" charset="-122"/>
+                <a:cs typeface="Calibri" pitchFamily="34" charset="-120"/>
+              </a:rPr>
+              <a:t>DEL CLIENTE</a:t>
+            </a:r>
+            <a:endParaRPr lang="en-US" sz="950" dirty="0"/>
+          </a:p>
+        </p:txBody>
+      </p:sp>
+      <p:sp>
+        <p:nvSpPr>
+          <p:cNvPr id="13" name="Text 10"/>
+          <p:cNvSpPr/>
+          <p:nvPr/>
+        </p:nvSpPr>
+        <p:spPr>
+          <a:xfrm>
+            <a:off x="8778240" y="1920240"/>
+            <a:ext cx="1005840" cy="274320"/>
+          </a:xfrm>
+          <a:prstGeom prst="rect">
+            <a:avLst/>
+          </a:prstGeom>
+          <a:noFill/>
+          <a:ln/>
+        </p:spPr>
+        <p:txBody>
+          <a:bodyPr wrap="square" lIns="0" tIns="0" rIns="0" bIns="0" rtlCol="0" anchor="ctr"/>
+          <a:lstStyle/>
+          <a:p>
+            <a:pPr algn="r" indent="0" marL="0">
+              <a:buNone/>
+            </a:pPr>
+            <a:r>
+              <a:rPr lang="en-US" sz="950" b="1" spc="50" kern="0" dirty="0">
+                <a:solidFill>
+                  <a:srgbClr val="56606E"/>
+                </a:solidFill>
+                <a:latin typeface="Calibri" pitchFamily="34" charset="0"/>
+                <a:ea typeface="Calibri" pitchFamily="34" charset="-122"/>
+                <a:cs typeface="Calibri" pitchFamily="34" charset="-120"/>
+              </a:rPr>
+              <a:t>DE SUBCONTR.</a:t>
+            </a:r>
+            <a:endParaRPr lang="en-US" sz="950" dirty="0"/>
+          </a:p>
+        </p:txBody>
+      </p:sp>
+      <p:sp>
+        <p:nvSpPr>
+          <p:cNvPr id="14" name="Text 11"/>
+          <p:cNvSpPr/>
+          <p:nvPr/>
+        </p:nvSpPr>
+        <p:spPr>
+          <a:xfrm>
+            <a:off x="9875520" y="1920240"/>
             <a:ext cx="914400" cy="274320"/>
           </a:xfrm>
           <a:prstGeom prst="rect">
@@ -22009,7 +22204,7 @@
                 <a:ea typeface="Calibri" pitchFamily="34" charset="-122"/>
                 <a:cs typeface="Calibri" pitchFamily="34" charset="-120"/>
               </a:rPr>
-              <a:t>ABIERTOS</a:t>
+              <a:t>COSTO UF</a:t>
             </a:r>
             <a:endParaRPr lang="en-US" sz="950" dirty="0"/>
           </a:p>
@@ -22017,13 +22212,13 @@
       </p:sp>
       <p:sp>
         <p:nvSpPr>
-          <p:cNvPr id="10" name="Text 7"/>
-          <p:cNvSpPr/>
-          <p:nvPr/>
-        </p:nvSpPr>
-        <p:spPr>
-          <a:xfrm>
-            <a:off x="6629400" y="1920240"/>
+          <p:cNvPr id="15" name="Text 12"/>
+          <p:cNvSpPr/>
+          <p:nvPr/>
+        </p:nvSpPr>
+        <p:spPr>
+          <a:xfrm>
+            <a:off x="10927080" y="1920240"/>
             <a:ext cx="914400" cy="274320"/>
           </a:xfrm>
           <a:prstGeom prst="rect">
@@ -22036,7 +22231,7 @@
           <a:bodyPr wrap="square" lIns="0" tIns="0" rIns="0" bIns="0" rtlCol="0" anchor="ctr"/>
           <a:lstStyle/>
           <a:p>
-            <a:pPr algn="r" indent="0" marL="0">
+            <a:pPr algn="ctr" indent="0" marL="0">
               <a:buNone/>
             </a:pPr>
             <a:r>
@@ -22048,7 +22243,7 @@
                 <a:ea typeface="Calibri" pitchFamily="34" charset="-122"/>
                 <a:cs typeface="Calibri" pitchFamily="34" charset="-120"/>
               </a:rPr>
-              <a:t>% CIERRE</a:t>
+              <a:t>ESTADO</a:t>
             </a:r>
             <a:endParaRPr lang="en-US" sz="950" dirty="0"/>
           </a:p>
@@ -22056,163 +22251,7 @@
       </p:sp>
       <p:sp>
         <p:nvSpPr>
-          <p:cNvPr id="11" name="Text 8"/>
-          <p:cNvSpPr/>
-          <p:nvPr/>
-        </p:nvSpPr>
-        <p:spPr>
-          <a:xfrm>
-            <a:off x="7635240" y="1920240"/>
-            <a:ext cx="914400" cy="274320"/>
-          </a:xfrm>
-          <a:prstGeom prst="rect">
-            <a:avLst/>
-          </a:prstGeom>
-          <a:noFill/>
-          <a:ln/>
-        </p:spPr>
-        <p:txBody>
-          <a:bodyPr wrap="square" lIns="0" tIns="0" rIns="0" bIns="0" rtlCol="0" anchor="ctr"/>
-          <a:lstStyle/>
-          <a:p>
-            <a:pPr algn="r" indent="0" marL="0">
-              <a:buNone/>
-            </a:pPr>
-            <a:r>
-              <a:rPr lang="en-US" sz="950" b="1" spc="50" kern="0" dirty="0">
-                <a:solidFill>
-                  <a:srgbClr val="56606E"/>
-                </a:solidFill>
-                <a:latin typeface="Calibri" pitchFamily="34" charset="0"/>
-                <a:ea typeface="Calibri" pitchFamily="34" charset="-122"/>
-                <a:cs typeface="Calibri" pitchFamily="34" charset="-120"/>
-              </a:rPr>
-              <a:t>INTERNAS</a:t>
-            </a:r>
-            <a:endParaRPr lang="en-US" sz="950" dirty="0"/>
-          </a:p>
-        </p:txBody>
-      </p:sp>
-      <p:sp>
-        <p:nvSpPr>
-          <p:cNvPr id="12" name="Text 9"/>
-          <p:cNvSpPr/>
-          <p:nvPr/>
-        </p:nvSpPr>
-        <p:spPr>
-          <a:xfrm>
-            <a:off x="8641080" y="1920240"/>
-            <a:ext cx="914400" cy="274320"/>
-          </a:xfrm>
-          <a:prstGeom prst="rect">
-            <a:avLst/>
-          </a:prstGeom>
-          <a:noFill/>
-          <a:ln/>
-        </p:spPr>
-        <p:txBody>
-          <a:bodyPr wrap="square" lIns="0" tIns="0" rIns="0" bIns="0" rtlCol="0" anchor="ctr"/>
-          <a:lstStyle/>
-          <a:p>
-            <a:pPr algn="r" indent="0" marL="0">
-              <a:buNone/>
-            </a:pPr>
-            <a:r>
-              <a:rPr lang="en-US" sz="950" b="1" spc="50" kern="0" dirty="0">
-                <a:solidFill>
-                  <a:srgbClr val="56606E"/>
-                </a:solidFill>
-                <a:latin typeface="Calibri" pitchFamily="34" charset="0"/>
-                <a:ea typeface="Calibri" pitchFamily="34" charset="-122"/>
-                <a:cs typeface="Calibri" pitchFamily="34" charset="-120"/>
-              </a:rPr>
-              <a:t>EXTERNAS</a:t>
-            </a:r>
-            <a:endParaRPr lang="en-US" sz="950" dirty="0"/>
-          </a:p>
-        </p:txBody>
-      </p:sp>
-      <p:sp>
-        <p:nvSpPr>
-          <p:cNvPr id="13" name="Text 10"/>
-          <p:cNvSpPr/>
-          <p:nvPr/>
-        </p:nvSpPr>
-        <p:spPr>
-          <a:xfrm>
-            <a:off x="9646920" y="1920240"/>
-            <a:ext cx="1097280" cy="274320"/>
-          </a:xfrm>
-          <a:prstGeom prst="rect">
-            <a:avLst/>
-          </a:prstGeom>
-          <a:noFill/>
-          <a:ln/>
-        </p:spPr>
-        <p:txBody>
-          <a:bodyPr wrap="square" lIns="0" tIns="0" rIns="0" bIns="0" rtlCol="0" anchor="ctr"/>
-          <a:lstStyle/>
-          <a:p>
-            <a:pPr algn="r" indent="0" marL="0">
-              <a:buNone/>
-            </a:pPr>
-            <a:r>
-              <a:rPr lang="en-US" sz="950" b="1" spc="50" kern="0" dirty="0">
-                <a:solidFill>
-                  <a:srgbClr val="56606E"/>
-                </a:solidFill>
-                <a:latin typeface="Calibri" pitchFamily="34" charset="0"/>
-                <a:ea typeface="Calibri" pitchFamily="34" charset="-122"/>
-                <a:cs typeface="Calibri" pitchFamily="34" charset="-120"/>
-              </a:rPr>
-              <a:t>COSTO UF</a:t>
-            </a:r>
-            <a:endParaRPr lang="en-US" sz="950" dirty="0"/>
-          </a:p>
-        </p:txBody>
-      </p:sp>
-      <p:sp>
-        <p:nvSpPr>
-          <p:cNvPr id="14" name="Text 11"/>
-          <p:cNvSpPr/>
-          <p:nvPr/>
-        </p:nvSpPr>
-        <p:spPr>
-          <a:xfrm>
-            <a:off x="10835640" y="1920240"/>
-            <a:ext cx="914400" cy="274320"/>
-          </a:xfrm>
-          <a:prstGeom prst="rect">
-            <a:avLst/>
-          </a:prstGeom>
-          <a:noFill/>
-          <a:ln/>
-        </p:spPr>
-        <p:txBody>
-          <a:bodyPr wrap="square" lIns="0" tIns="0" rIns="0" bIns="0" rtlCol="0" anchor="ctr"/>
-          <a:lstStyle/>
-          <a:p>
-            <a:pPr algn="ctr" indent="0" marL="0">
-              <a:buNone/>
-            </a:pPr>
-            <a:r>
-              <a:rPr lang="en-US" sz="950" b="1" spc="50" kern="0" dirty="0">
-                <a:solidFill>
-                  <a:srgbClr val="56606E"/>
-                </a:solidFill>
-                <a:latin typeface="Calibri" pitchFamily="34" charset="0"/>
-                <a:ea typeface="Calibri" pitchFamily="34" charset="-122"/>
-                <a:cs typeface="Calibri" pitchFamily="34" charset="-120"/>
-              </a:rPr>
-              <a:t>ESTADO</a:t>
-            </a:r>
-            <a:endParaRPr lang="en-US" sz="950" dirty="0"/>
-          </a:p>
-        </p:txBody>
-      </p:sp>
-      <p:sp>
-        <p:nvSpPr>
-          <p:cNvPr id="15" name="Shape 12"/>
+          <p:cNvPr id="16" name="Shape 13"/>
           <p:cNvSpPr/>
           <p:nvPr/>
         </p:nvSpPr>
@@ -22235,14 +22274,14 @@
       </p:sp>
       <p:sp>
         <p:nvSpPr>
-          <p:cNvPr id="16" name="Text 13"/>
+          <p:cNvPr id="17" name="Text 14"/>
           <p:cNvSpPr/>
           <p:nvPr/>
         </p:nvSpPr>
         <p:spPr>
           <a:xfrm>
             <a:off x="502920" y="2359152"/>
-            <a:ext cx="2743200" cy="292608"/>
+            <a:ext cx="2331720" cy="292608"/>
           </a:xfrm>
           <a:prstGeom prst="rect">
             <a:avLst/>
@@ -22274,14 +22313,14 @@
       </p:sp>
       <p:sp>
         <p:nvSpPr>
-          <p:cNvPr id="17" name="Text 14"/>
+          <p:cNvPr id="18" name="Text 15"/>
           <p:cNvSpPr/>
           <p:nvPr/>
         </p:nvSpPr>
         <p:spPr>
           <a:xfrm>
             <a:off x="502920" y="2660904"/>
-            <a:ext cx="2834640" cy="256032"/>
+            <a:ext cx="2377440" cy="256032"/>
           </a:xfrm>
           <a:prstGeom prst="rect">
             <a:avLst/>
@@ -22313,14 +22352,14 @@
       </p:sp>
       <p:sp>
         <p:nvSpPr>
-          <p:cNvPr id="18" name="Text 15"/>
-          <p:cNvSpPr/>
-          <p:nvPr/>
-        </p:nvSpPr>
-        <p:spPr>
-          <a:xfrm>
-            <a:off x="3429000" y="2432304"/>
-            <a:ext cx="1051560" cy="365760"/>
+          <p:cNvPr id="19" name="Text 16"/>
+          <p:cNvSpPr/>
+          <p:nvPr/>
+        </p:nvSpPr>
+        <p:spPr>
+          <a:xfrm>
+            <a:off x="2971800" y="2432304"/>
+            <a:ext cx="914400" cy="365760"/>
           </a:xfrm>
           <a:prstGeom prst="rect">
             <a:avLst/>
@@ -22352,14 +22391,14 @@
       </p:sp>
       <p:sp>
         <p:nvSpPr>
-          <p:cNvPr id="19" name="Text 16"/>
-          <p:cNvSpPr/>
-          <p:nvPr/>
-        </p:nvSpPr>
-        <p:spPr>
-          <a:xfrm>
-            <a:off x="4572000" y="2432304"/>
-            <a:ext cx="960120" cy="365760"/>
+          <p:cNvPr id="20" name="Text 17"/>
+          <p:cNvSpPr/>
+          <p:nvPr/>
+        </p:nvSpPr>
+        <p:spPr>
+          <a:xfrm>
+            <a:off x="3977640" y="2432304"/>
+            <a:ext cx="868680" cy="365760"/>
           </a:xfrm>
           <a:prstGeom prst="rect">
             <a:avLst/>
@@ -22391,13 +22430,208 @@
       </p:sp>
       <p:sp>
         <p:nvSpPr>
-          <p:cNvPr id="20" name="Text 17"/>
-          <p:cNvSpPr/>
-          <p:nvPr/>
-        </p:nvSpPr>
-        <p:spPr>
-          <a:xfrm>
-            <a:off x="5623560" y="2432304"/>
+          <p:cNvPr id="21" name="Text 18"/>
+          <p:cNvSpPr/>
+          <p:nvPr/>
+        </p:nvSpPr>
+        <p:spPr>
+          <a:xfrm>
+            <a:off x="4937760" y="2432304"/>
+            <a:ext cx="822960" cy="365760"/>
+          </a:xfrm>
+          <a:prstGeom prst="rect">
+            <a:avLst/>
+          </a:prstGeom>
+          <a:noFill/>
+          <a:ln/>
+        </p:spPr>
+        <p:txBody>
+          <a:bodyPr wrap="square" lIns="0" tIns="0" rIns="0" bIns="0" rtlCol="0" anchor="ctr"/>
+          <a:lstStyle/>
+          <a:p>
+            <a:pPr algn="r" indent="0" marL="0">
+              <a:buNone/>
+            </a:pPr>
+            <a:r>
+              <a:rPr lang="en-US" sz="1300" dirty="0">
+                <a:solidFill>
+                  <a:srgbClr val="1A2433"/>
+                </a:solidFill>
+                <a:latin typeface="Calibri" pitchFamily="34" charset="0"/>
+                <a:ea typeface="Calibri" pitchFamily="34" charset="-122"/>
+                <a:cs typeface="Calibri" pitchFamily="34" charset="-120"/>
+              </a:rPr>
+              <a:t>3</a:t>
+            </a:r>
+            <a:endParaRPr lang="en-US" sz="1300" dirty="0"/>
+          </a:p>
+        </p:txBody>
+      </p:sp>
+      <p:sp>
+        <p:nvSpPr>
+          <p:cNvPr id="22" name="Text 19"/>
+          <p:cNvSpPr/>
+          <p:nvPr/>
+        </p:nvSpPr>
+        <p:spPr>
+          <a:xfrm>
+            <a:off x="5852160" y="2432304"/>
+            <a:ext cx="822960" cy="365760"/>
+          </a:xfrm>
+          <a:prstGeom prst="rect">
+            <a:avLst/>
+          </a:prstGeom>
+          <a:noFill/>
+          <a:ln/>
+        </p:spPr>
+        <p:txBody>
+          <a:bodyPr wrap="square" lIns="0" tIns="0" rIns="0" bIns="0" rtlCol="0" anchor="ctr"/>
+          <a:lstStyle/>
+          <a:p>
+            <a:pPr algn="r" indent="0" marL="0">
+              <a:buNone/>
+            </a:pPr>
+            <a:r>
+              <a:rPr lang="en-US" sz="1300" dirty="0">
+                <a:solidFill>
+                  <a:srgbClr val="1A2433"/>
+                </a:solidFill>
+                <a:latin typeface="Calibri" pitchFamily="34" charset="0"/>
+                <a:ea typeface="Calibri" pitchFamily="34" charset="-122"/>
+                <a:cs typeface="Calibri" pitchFamily="34" charset="-120"/>
+              </a:rPr>
+              <a:t>96,8%</a:t>
+            </a:r>
+            <a:endParaRPr lang="en-US" sz="1300" dirty="0"/>
+          </a:p>
+        </p:txBody>
+      </p:sp>
+      <p:sp>
+        <p:nvSpPr>
+          <p:cNvPr id="23" name="Text 20"/>
+          <p:cNvSpPr/>
+          <p:nvPr/>
+        </p:nvSpPr>
+        <p:spPr>
+          <a:xfrm>
+            <a:off x="6766560" y="2432304"/>
+            <a:ext cx="822960" cy="365760"/>
+          </a:xfrm>
+          <a:prstGeom prst="rect">
+            <a:avLst/>
+          </a:prstGeom>
+          <a:noFill/>
+          <a:ln/>
+        </p:spPr>
+        <p:txBody>
+          <a:bodyPr wrap="square" lIns="0" tIns="0" rIns="0" bIns="0" rtlCol="0" anchor="ctr"/>
+          <a:lstStyle/>
+          <a:p>
+            <a:pPr algn="r" indent="0" marL="0">
+              <a:buNone/>
+            </a:pPr>
+            <a:r>
+              <a:rPr lang="en-US" sz="1300" dirty="0">
+                <a:solidFill>
+                  <a:srgbClr val="1A2433"/>
+                </a:solidFill>
+                <a:latin typeface="Calibri" pitchFamily="34" charset="0"/>
+                <a:ea typeface="Calibri" pitchFamily="34" charset="-122"/>
+                <a:cs typeface="Calibri" pitchFamily="34" charset="-120"/>
+              </a:rPr>
+              <a:t>56</a:t>
+            </a:r>
+            <a:endParaRPr lang="en-US" sz="1300" dirty="0"/>
+          </a:p>
+        </p:txBody>
+      </p:sp>
+      <p:sp>
+        <p:nvSpPr>
+          <p:cNvPr id="24" name="Text 21"/>
+          <p:cNvSpPr/>
+          <p:nvPr/>
+        </p:nvSpPr>
+        <p:spPr>
+          <a:xfrm>
+            <a:off x="7680960" y="2432304"/>
+            <a:ext cx="1005840" cy="365760"/>
+          </a:xfrm>
+          <a:prstGeom prst="rect">
+            <a:avLst/>
+          </a:prstGeom>
+          <a:noFill/>
+          <a:ln/>
+        </p:spPr>
+        <p:txBody>
+          <a:bodyPr wrap="square" lIns="0" tIns="0" rIns="0" bIns="0" rtlCol="0" anchor="ctr"/>
+          <a:lstStyle/>
+          <a:p>
+            <a:pPr algn="r" indent="0" marL="0">
+              <a:buNone/>
+            </a:pPr>
+            <a:r>
+              <a:rPr lang="en-US" sz="1300" dirty="0">
+                <a:solidFill>
+                  <a:srgbClr val="1A2433"/>
+                </a:solidFill>
+                <a:latin typeface="Calibri" pitchFamily="34" charset="0"/>
+                <a:ea typeface="Calibri" pitchFamily="34" charset="-122"/>
+                <a:cs typeface="Calibri" pitchFamily="34" charset="-120"/>
+              </a:rPr>
+              <a:t>30</a:t>
+            </a:r>
+            <a:endParaRPr lang="en-US" sz="1300" dirty="0"/>
+          </a:p>
+        </p:txBody>
+      </p:sp>
+      <p:sp>
+        <p:nvSpPr>
+          <p:cNvPr id="25" name="Text 22"/>
+          <p:cNvSpPr/>
+          <p:nvPr/>
+        </p:nvSpPr>
+        <p:spPr>
+          <a:xfrm>
+            <a:off x="8778240" y="2432304"/>
+            <a:ext cx="1005840" cy="365760"/>
+          </a:xfrm>
+          <a:prstGeom prst="rect">
+            <a:avLst/>
+          </a:prstGeom>
+          <a:noFill/>
+          <a:ln/>
+        </p:spPr>
+        <p:txBody>
+          <a:bodyPr wrap="square" lIns="0" tIns="0" rIns="0" bIns="0" rtlCol="0" anchor="ctr"/>
+          <a:lstStyle/>
+          <a:p>
+            <a:pPr algn="r" indent="0" marL="0">
+              <a:buNone/>
+            </a:pPr>
+            <a:r>
+              <a:rPr lang="en-US" sz="1300" dirty="0">
+                <a:solidFill>
+                  <a:srgbClr val="1A2433"/>
+                </a:solidFill>
+                <a:latin typeface="Calibri" pitchFamily="34" charset="0"/>
+                <a:ea typeface="Calibri" pitchFamily="34" charset="-122"/>
+                <a:cs typeface="Calibri" pitchFamily="34" charset="-120"/>
+              </a:rPr>
+              <a:t>8</a:t>
+            </a:r>
+            <a:endParaRPr lang="en-US" sz="1300" dirty="0"/>
+          </a:p>
+        </p:txBody>
+      </p:sp>
+      <p:sp>
+        <p:nvSpPr>
+          <p:cNvPr id="26" name="Text 23"/>
+          <p:cNvSpPr/>
+          <p:nvPr/>
+        </p:nvSpPr>
+        <p:spPr>
+          <a:xfrm>
+            <a:off x="9875520" y="2432304"/>
             <a:ext cx="914400" cy="365760"/>
           </a:xfrm>
           <a:prstGeom prst="rect">
@@ -22422,7 +22656,7 @@
                 <a:ea typeface="Calibri" pitchFamily="34" charset="-122"/>
                 <a:cs typeface="Calibri" pitchFamily="34" charset="-120"/>
               </a:rPr>
-              <a:t>3</a:t>
+              <a:t>1.573</a:t>
             </a:r>
             <a:endParaRPr lang="en-US" sz="1300" dirty="0"/>
           </a:p>
@@ -22430,169 +22664,13 @@
       </p:sp>
       <p:sp>
         <p:nvSpPr>
-          <p:cNvPr id="21" name="Text 18"/>
-          <p:cNvSpPr/>
-          <p:nvPr/>
-        </p:nvSpPr>
-        <p:spPr>
-          <a:xfrm>
-            <a:off x="6629400" y="2432304"/>
-            <a:ext cx="914400" cy="365760"/>
-          </a:xfrm>
-          <a:prstGeom prst="rect">
-            <a:avLst/>
-          </a:prstGeom>
-          <a:noFill/>
-          <a:ln/>
-        </p:spPr>
-        <p:txBody>
-          <a:bodyPr wrap="square" lIns="0" tIns="0" rIns="0" bIns="0" rtlCol="0" anchor="ctr"/>
-          <a:lstStyle/>
-          <a:p>
-            <a:pPr algn="r" indent="0" marL="0">
-              <a:buNone/>
-            </a:pPr>
-            <a:r>
-              <a:rPr lang="en-US" sz="1300" dirty="0">
-                <a:solidFill>
-                  <a:srgbClr val="1A2433"/>
-                </a:solidFill>
-                <a:latin typeface="Calibri" pitchFamily="34" charset="0"/>
-                <a:ea typeface="Calibri" pitchFamily="34" charset="-122"/>
-                <a:cs typeface="Calibri" pitchFamily="34" charset="-120"/>
-              </a:rPr>
-              <a:t>96,8%</a:t>
-            </a:r>
-            <a:endParaRPr lang="en-US" sz="1300" dirty="0"/>
-          </a:p>
-        </p:txBody>
-      </p:sp>
-      <p:sp>
-        <p:nvSpPr>
-          <p:cNvPr id="22" name="Text 19"/>
-          <p:cNvSpPr/>
-          <p:nvPr/>
-        </p:nvSpPr>
-        <p:spPr>
-          <a:xfrm>
-            <a:off x="7635240" y="2432304"/>
-            <a:ext cx="914400" cy="365760"/>
-          </a:xfrm>
-          <a:prstGeom prst="rect">
-            <a:avLst/>
-          </a:prstGeom>
-          <a:noFill/>
-          <a:ln/>
-        </p:spPr>
-        <p:txBody>
-          <a:bodyPr wrap="square" lIns="0" tIns="0" rIns="0" bIns="0" rtlCol="0" anchor="ctr"/>
-          <a:lstStyle/>
-          <a:p>
-            <a:pPr algn="r" indent="0" marL="0">
-              <a:buNone/>
-            </a:pPr>
-            <a:r>
-              <a:rPr lang="en-US" sz="1300" dirty="0">
-                <a:solidFill>
-                  <a:srgbClr val="1A2433"/>
-                </a:solidFill>
-                <a:latin typeface="Calibri" pitchFamily="34" charset="0"/>
-                <a:ea typeface="Calibri" pitchFamily="34" charset="-122"/>
-                <a:cs typeface="Calibri" pitchFamily="34" charset="-120"/>
-              </a:rPr>
-              <a:t>56</a:t>
-            </a:r>
-            <a:endParaRPr lang="en-US" sz="1300" dirty="0"/>
-          </a:p>
-        </p:txBody>
-      </p:sp>
-      <p:sp>
-        <p:nvSpPr>
-          <p:cNvPr id="23" name="Text 20"/>
-          <p:cNvSpPr/>
-          <p:nvPr/>
-        </p:nvSpPr>
-        <p:spPr>
-          <a:xfrm>
-            <a:off x="8641080" y="2432304"/>
-            <a:ext cx="914400" cy="365760"/>
-          </a:xfrm>
-          <a:prstGeom prst="rect">
-            <a:avLst/>
-          </a:prstGeom>
-          <a:noFill/>
-          <a:ln/>
-        </p:spPr>
-        <p:txBody>
-          <a:bodyPr wrap="square" lIns="0" tIns="0" rIns="0" bIns="0" rtlCol="0" anchor="ctr"/>
-          <a:lstStyle/>
-          <a:p>
-            <a:pPr algn="r" indent="0" marL="0">
-              <a:buNone/>
-            </a:pPr>
-            <a:r>
-              <a:rPr lang="en-US" sz="1300" dirty="0">
-                <a:solidFill>
-                  <a:srgbClr val="1A2433"/>
-                </a:solidFill>
-                <a:latin typeface="Calibri" pitchFamily="34" charset="0"/>
-                <a:ea typeface="Calibri" pitchFamily="34" charset="-122"/>
-                <a:cs typeface="Calibri" pitchFamily="34" charset="-120"/>
-              </a:rPr>
-              <a:t>38</a:t>
-            </a:r>
-            <a:endParaRPr lang="en-US" sz="1300" dirty="0"/>
-          </a:p>
-        </p:txBody>
-      </p:sp>
-      <p:sp>
-        <p:nvSpPr>
-          <p:cNvPr id="24" name="Text 21"/>
-          <p:cNvSpPr/>
-          <p:nvPr/>
-        </p:nvSpPr>
-        <p:spPr>
-          <a:xfrm>
-            <a:off x="9646920" y="2432304"/>
-            <a:ext cx="1097280" cy="365760"/>
-          </a:xfrm>
-          <a:prstGeom prst="rect">
-            <a:avLst/>
-          </a:prstGeom>
-          <a:noFill/>
-          <a:ln/>
-        </p:spPr>
-        <p:txBody>
-          <a:bodyPr wrap="square" lIns="0" tIns="0" rIns="0" bIns="0" rtlCol="0" anchor="ctr"/>
-          <a:lstStyle/>
-          <a:p>
-            <a:pPr algn="r" indent="0" marL="0">
-              <a:buNone/>
-            </a:pPr>
-            <a:r>
-              <a:rPr lang="en-US" sz="1300" dirty="0">
-                <a:solidFill>
-                  <a:srgbClr val="1A2433"/>
-                </a:solidFill>
-                <a:latin typeface="Calibri" pitchFamily="34" charset="0"/>
-                <a:ea typeface="Calibri" pitchFamily="34" charset="-122"/>
-                <a:cs typeface="Calibri" pitchFamily="34" charset="-120"/>
-              </a:rPr>
-              <a:t>1.573</a:t>
-            </a:r>
-            <a:endParaRPr lang="en-US" sz="1300" dirty="0"/>
-          </a:p>
-        </p:txBody>
-      </p:sp>
-      <p:sp>
-        <p:nvSpPr>
-          <p:cNvPr id="25" name="Shape 22"/>
-          <p:cNvSpPr/>
-          <p:nvPr/>
-        </p:nvSpPr>
-        <p:spPr>
-          <a:xfrm>
-            <a:off x="10835640" y="2450592"/>
+          <p:cNvPr id="27" name="Shape 24"/>
+          <p:cNvSpPr/>
+          <p:nvPr/>
+        </p:nvSpPr>
+        <p:spPr>
+          <a:xfrm>
+            <a:off x="10927080" y="2450592"/>
             <a:ext cx="914400" cy="365760"/>
           </a:xfrm>
           <a:prstGeom prst="roundRect">
@@ -22608,13 +22686,13 @@
       </p:sp>
       <p:sp>
         <p:nvSpPr>
-          <p:cNvPr id="26" name="Text 23"/>
-          <p:cNvSpPr/>
-          <p:nvPr/>
-        </p:nvSpPr>
-        <p:spPr>
-          <a:xfrm>
-            <a:off x="10835640" y="2459736"/>
+          <p:cNvPr id="28" name="Text 25"/>
+          <p:cNvSpPr/>
+          <p:nvPr/>
+        </p:nvSpPr>
+        <p:spPr>
+          <a:xfrm>
+            <a:off x="10927080" y="2459736"/>
             <a:ext cx="914400" cy="347472"/>
           </a:xfrm>
           <a:prstGeom prst="rect">
@@ -22647,7 +22725,7 @@
       </p:sp>
       <p:sp>
         <p:nvSpPr>
-          <p:cNvPr id="27" name="Shape 24"/>
+          <p:cNvPr id="29" name="Shape 26"/>
           <p:cNvSpPr/>
           <p:nvPr/>
         </p:nvSpPr>
@@ -22670,7 +22748,7 @@
       </p:sp>
       <p:sp>
         <p:nvSpPr>
-          <p:cNvPr id="28" name="Shape 25"/>
+          <p:cNvPr id="30" name="Shape 27"/>
           <p:cNvSpPr/>
           <p:nvPr/>
         </p:nvSpPr>
@@ -22690,14 +22768,14 @@
       </p:sp>
       <p:sp>
         <p:nvSpPr>
-          <p:cNvPr id="29" name="Text 26"/>
+          <p:cNvPr id="31" name="Text 28"/>
           <p:cNvSpPr/>
           <p:nvPr/>
         </p:nvSpPr>
         <p:spPr>
           <a:xfrm>
             <a:off x="502920" y="3108960"/>
-            <a:ext cx="2743200" cy="292608"/>
+            <a:ext cx="2331720" cy="292608"/>
           </a:xfrm>
           <a:prstGeom prst="rect">
             <a:avLst/>
@@ -22729,14 +22807,14 @@
       </p:sp>
       <p:sp>
         <p:nvSpPr>
-          <p:cNvPr id="30" name="Text 27"/>
+          <p:cNvPr id="32" name="Text 29"/>
           <p:cNvSpPr/>
           <p:nvPr/>
         </p:nvSpPr>
         <p:spPr>
           <a:xfrm>
             <a:off x="502920" y="3410712"/>
-            <a:ext cx="2834640" cy="256032"/>
+            <a:ext cx="2377440" cy="256032"/>
           </a:xfrm>
           <a:prstGeom prst="rect">
             <a:avLst/>
@@ -22768,14 +22846,14 @@
       </p:sp>
       <p:sp>
         <p:nvSpPr>
-          <p:cNvPr id="31" name="Text 28"/>
-          <p:cNvSpPr/>
-          <p:nvPr/>
-        </p:nvSpPr>
-        <p:spPr>
-          <a:xfrm>
-            <a:off x="3429000" y="3182112"/>
-            <a:ext cx="1051560" cy="365760"/>
+          <p:cNvPr id="33" name="Text 30"/>
+          <p:cNvSpPr/>
+          <p:nvPr/>
+        </p:nvSpPr>
+        <p:spPr>
+          <a:xfrm>
+            <a:off x="2971800" y="3182112"/>
+            <a:ext cx="914400" cy="365760"/>
           </a:xfrm>
           <a:prstGeom prst="rect">
             <a:avLst/>
@@ -22807,14 +22885,14 @@
       </p:sp>
       <p:sp>
         <p:nvSpPr>
-          <p:cNvPr id="32" name="Text 29"/>
-          <p:cNvSpPr/>
-          <p:nvPr/>
-        </p:nvSpPr>
-        <p:spPr>
-          <a:xfrm>
-            <a:off x="4572000" y="3182112"/>
-            <a:ext cx="960120" cy="365760"/>
+          <p:cNvPr id="34" name="Text 31"/>
+          <p:cNvSpPr/>
+          <p:nvPr/>
+        </p:nvSpPr>
+        <p:spPr>
+          <a:xfrm>
+            <a:off x="3977640" y="3182112"/>
+            <a:ext cx="868680" cy="365760"/>
           </a:xfrm>
           <a:prstGeom prst="rect">
             <a:avLst/>
@@ -22846,13 +22924,208 @@
       </p:sp>
       <p:sp>
         <p:nvSpPr>
-          <p:cNvPr id="33" name="Text 30"/>
-          <p:cNvSpPr/>
-          <p:nvPr/>
-        </p:nvSpPr>
-        <p:spPr>
-          <a:xfrm>
-            <a:off x="5623560" y="3182112"/>
+          <p:cNvPr id="35" name="Text 32"/>
+          <p:cNvSpPr/>
+          <p:nvPr/>
+        </p:nvSpPr>
+        <p:spPr>
+          <a:xfrm>
+            <a:off x="4937760" y="3182112"/>
+            <a:ext cx="822960" cy="365760"/>
+          </a:xfrm>
+          <a:prstGeom prst="rect">
+            <a:avLst/>
+          </a:prstGeom>
+          <a:noFill/>
+          <a:ln/>
+        </p:spPr>
+        <p:txBody>
+          <a:bodyPr wrap="square" lIns="0" tIns="0" rIns="0" bIns="0" rtlCol="0" anchor="ctr"/>
+          <a:lstStyle/>
+          <a:p>
+            <a:pPr algn="r" indent="0" marL="0">
+              <a:buNone/>
+            </a:pPr>
+            <a:r>
+              <a:rPr lang="en-US" sz="1300" dirty="0">
+                <a:solidFill>
+                  <a:srgbClr val="1A2433"/>
+                </a:solidFill>
+                <a:latin typeface="Calibri" pitchFamily="34" charset="0"/>
+                <a:ea typeface="Calibri" pitchFamily="34" charset="-122"/>
+                <a:cs typeface="Calibri" pitchFamily="34" charset="-120"/>
+              </a:rPr>
+              <a:t>15</a:t>
+            </a:r>
+            <a:endParaRPr lang="en-US" sz="1300" dirty="0"/>
+          </a:p>
+        </p:txBody>
+      </p:sp>
+      <p:sp>
+        <p:nvSpPr>
+          <p:cNvPr id="36" name="Text 33"/>
+          <p:cNvSpPr/>
+          <p:nvPr/>
+        </p:nvSpPr>
+        <p:spPr>
+          <a:xfrm>
+            <a:off x="5852160" y="3182112"/>
+            <a:ext cx="822960" cy="365760"/>
+          </a:xfrm>
+          <a:prstGeom prst="rect">
+            <a:avLst/>
+          </a:prstGeom>
+          <a:noFill/>
+          <a:ln/>
+        </p:spPr>
+        <p:txBody>
+          <a:bodyPr wrap="square" lIns="0" tIns="0" rIns="0" bIns="0" rtlCol="0" anchor="ctr"/>
+          <a:lstStyle/>
+          <a:p>
+            <a:pPr algn="r" indent="0" marL="0">
+              <a:buNone/>
+            </a:pPr>
+            <a:r>
+              <a:rPr lang="en-US" sz="1300" dirty="0">
+                <a:solidFill>
+                  <a:srgbClr val="1A2433"/>
+                </a:solidFill>
+                <a:latin typeface="Calibri" pitchFamily="34" charset="0"/>
+                <a:ea typeface="Calibri" pitchFamily="34" charset="-122"/>
+                <a:cs typeface="Calibri" pitchFamily="34" charset="-120"/>
+              </a:rPr>
+              <a:t>93,8%</a:t>
+            </a:r>
+            <a:endParaRPr lang="en-US" sz="1300" dirty="0"/>
+          </a:p>
+        </p:txBody>
+      </p:sp>
+      <p:sp>
+        <p:nvSpPr>
+          <p:cNvPr id="37" name="Text 34"/>
+          <p:cNvSpPr/>
+          <p:nvPr/>
+        </p:nvSpPr>
+        <p:spPr>
+          <a:xfrm>
+            <a:off x="6766560" y="3182112"/>
+            <a:ext cx="822960" cy="365760"/>
+          </a:xfrm>
+          <a:prstGeom prst="rect">
+            <a:avLst/>
+          </a:prstGeom>
+          <a:noFill/>
+          <a:ln/>
+        </p:spPr>
+        <p:txBody>
+          <a:bodyPr wrap="square" lIns="0" tIns="0" rIns="0" bIns="0" rtlCol="0" anchor="ctr"/>
+          <a:lstStyle/>
+          <a:p>
+            <a:pPr algn="r" indent="0" marL="0">
+              <a:buNone/>
+            </a:pPr>
+            <a:r>
+              <a:rPr lang="en-US" sz="1300" dirty="0">
+                <a:solidFill>
+                  <a:srgbClr val="1A2433"/>
+                </a:solidFill>
+                <a:latin typeface="Calibri" pitchFamily="34" charset="0"/>
+                <a:ea typeface="Calibri" pitchFamily="34" charset="-122"/>
+                <a:cs typeface="Calibri" pitchFamily="34" charset="-120"/>
+              </a:rPr>
+              <a:t>53</a:t>
+            </a:r>
+            <a:endParaRPr lang="en-US" sz="1300" dirty="0"/>
+          </a:p>
+        </p:txBody>
+      </p:sp>
+      <p:sp>
+        <p:nvSpPr>
+          <p:cNvPr id="38" name="Text 35"/>
+          <p:cNvSpPr/>
+          <p:nvPr/>
+        </p:nvSpPr>
+        <p:spPr>
+          <a:xfrm>
+            <a:off x="7680960" y="3182112"/>
+            <a:ext cx="1005840" cy="365760"/>
+          </a:xfrm>
+          <a:prstGeom prst="rect">
+            <a:avLst/>
+          </a:prstGeom>
+          <a:noFill/>
+          <a:ln/>
+        </p:spPr>
+        <p:txBody>
+          <a:bodyPr wrap="square" lIns="0" tIns="0" rIns="0" bIns="0" rtlCol="0" anchor="ctr"/>
+          <a:lstStyle/>
+          <a:p>
+            <a:pPr algn="r" indent="0" marL="0">
+              <a:buNone/>
+            </a:pPr>
+            <a:r>
+              <a:rPr lang="en-US" sz="1300" dirty="0">
+                <a:solidFill>
+                  <a:srgbClr val="C87A32"/>
+                </a:solidFill>
+                <a:latin typeface="Calibri" pitchFamily="34" charset="0"/>
+                <a:ea typeface="Calibri" pitchFamily="34" charset="-122"/>
+                <a:cs typeface="Calibri" pitchFamily="34" charset="-120"/>
+              </a:rPr>
+              <a:t>188</a:t>
+            </a:r>
+            <a:endParaRPr lang="en-US" sz="1300" dirty="0"/>
+          </a:p>
+        </p:txBody>
+      </p:sp>
+      <p:sp>
+        <p:nvSpPr>
+          <p:cNvPr id="39" name="Text 36"/>
+          <p:cNvSpPr/>
+          <p:nvPr/>
+        </p:nvSpPr>
+        <p:spPr>
+          <a:xfrm>
+            <a:off x="8778240" y="3182112"/>
+            <a:ext cx="1005840" cy="365760"/>
+          </a:xfrm>
+          <a:prstGeom prst="rect">
+            <a:avLst/>
+          </a:prstGeom>
+          <a:noFill/>
+          <a:ln/>
+        </p:spPr>
+        <p:txBody>
+          <a:bodyPr wrap="square" lIns="0" tIns="0" rIns="0" bIns="0" rtlCol="0" anchor="ctr"/>
+          <a:lstStyle/>
+          <a:p>
+            <a:pPr algn="r" indent="0" marL="0">
+              <a:buNone/>
+            </a:pPr>
+            <a:r>
+              <a:rPr lang="en-US" sz="1300" dirty="0">
+                <a:solidFill>
+                  <a:srgbClr val="1A2433"/>
+                </a:solidFill>
+                <a:latin typeface="Calibri" pitchFamily="34" charset="0"/>
+                <a:ea typeface="Calibri" pitchFamily="34" charset="-122"/>
+                <a:cs typeface="Calibri" pitchFamily="34" charset="-120"/>
+              </a:rPr>
+              <a:t>0</a:t>
+            </a:r>
+            <a:endParaRPr lang="en-US" sz="1300" dirty="0"/>
+          </a:p>
+        </p:txBody>
+      </p:sp>
+      <p:sp>
+        <p:nvSpPr>
+          <p:cNvPr id="40" name="Text 37"/>
+          <p:cNvSpPr/>
+          <p:nvPr/>
+        </p:nvSpPr>
+        <p:spPr>
+          <a:xfrm>
+            <a:off x="9875520" y="3182112"/>
             <a:ext cx="914400" cy="365760"/>
           </a:xfrm>
           <a:prstGeom prst="rect">
@@ -22877,7 +23150,7 @@
                 <a:ea typeface="Calibri" pitchFamily="34" charset="-122"/>
                 <a:cs typeface="Calibri" pitchFamily="34" charset="-120"/>
               </a:rPr>
-              <a:t>15</a:t>
+              <a:t>5.818</a:t>
             </a:r>
             <a:endParaRPr lang="en-US" sz="1300" dirty="0"/>
           </a:p>
@@ -22885,169 +23158,13 @@
       </p:sp>
       <p:sp>
         <p:nvSpPr>
-          <p:cNvPr id="34" name="Text 31"/>
-          <p:cNvSpPr/>
-          <p:nvPr/>
-        </p:nvSpPr>
-        <p:spPr>
-          <a:xfrm>
-            <a:off x="6629400" y="3182112"/>
-            <a:ext cx="914400" cy="365760"/>
-          </a:xfrm>
-          <a:prstGeom prst="rect">
-            <a:avLst/>
-          </a:prstGeom>
-          <a:noFill/>
-          <a:ln/>
-        </p:spPr>
-        <p:txBody>
-          <a:bodyPr wrap="square" lIns="0" tIns="0" rIns="0" bIns="0" rtlCol="0" anchor="ctr"/>
-          <a:lstStyle/>
-          <a:p>
-            <a:pPr algn="r" indent="0" marL="0">
-              <a:buNone/>
-            </a:pPr>
-            <a:r>
-              <a:rPr lang="en-US" sz="1300" dirty="0">
-                <a:solidFill>
-                  <a:srgbClr val="1A2433"/>
-                </a:solidFill>
-                <a:latin typeface="Calibri" pitchFamily="34" charset="0"/>
-                <a:ea typeface="Calibri" pitchFamily="34" charset="-122"/>
-                <a:cs typeface="Calibri" pitchFamily="34" charset="-120"/>
-              </a:rPr>
-              <a:t>93,8%</a:t>
-            </a:r>
-            <a:endParaRPr lang="en-US" sz="1300" dirty="0"/>
-          </a:p>
-        </p:txBody>
-      </p:sp>
-      <p:sp>
-        <p:nvSpPr>
-          <p:cNvPr id="35" name="Text 32"/>
-          <p:cNvSpPr/>
-          <p:nvPr/>
-        </p:nvSpPr>
-        <p:spPr>
-          <a:xfrm>
-            <a:off x="7635240" y="3182112"/>
-            <a:ext cx="914400" cy="365760"/>
-          </a:xfrm>
-          <a:prstGeom prst="rect">
-            <a:avLst/>
-          </a:prstGeom>
-          <a:noFill/>
-          <a:ln/>
-        </p:spPr>
-        <p:txBody>
-          <a:bodyPr wrap="square" lIns="0" tIns="0" rIns="0" bIns="0" rtlCol="0" anchor="ctr"/>
-          <a:lstStyle/>
-          <a:p>
-            <a:pPr algn="r" indent="0" marL="0">
-              <a:buNone/>
-            </a:pPr>
-            <a:r>
-              <a:rPr lang="en-US" sz="1300" dirty="0">
-                <a:solidFill>
-                  <a:srgbClr val="1A2433"/>
-                </a:solidFill>
-                <a:latin typeface="Calibri" pitchFamily="34" charset="0"/>
-                <a:ea typeface="Calibri" pitchFamily="34" charset="-122"/>
-                <a:cs typeface="Calibri" pitchFamily="34" charset="-120"/>
-              </a:rPr>
-              <a:t>53</a:t>
-            </a:r>
-            <a:endParaRPr lang="en-US" sz="1300" dirty="0"/>
-          </a:p>
-        </p:txBody>
-      </p:sp>
-      <p:sp>
-        <p:nvSpPr>
-          <p:cNvPr id="36" name="Text 33"/>
-          <p:cNvSpPr/>
-          <p:nvPr/>
-        </p:nvSpPr>
-        <p:spPr>
-          <a:xfrm>
-            <a:off x="8641080" y="3182112"/>
-            <a:ext cx="914400" cy="365760"/>
-          </a:xfrm>
-          <a:prstGeom prst="rect">
-            <a:avLst/>
-          </a:prstGeom>
-          <a:noFill/>
-          <a:ln/>
-        </p:spPr>
-        <p:txBody>
-          <a:bodyPr wrap="square" lIns="0" tIns="0" rIns="0" bIns="0" rtlCol="0" anchor="ctr"/>
-          <a:lstStyle/>
-          <a:p>
-            <a:pPr algn="r" indent="0" marL="0">
-              <a:buNone/>
-            </a:pPr>
-            <a:r>
-              <a:rPr lang="en-US" sz="1300" dirty="0">
-                <a:solidFill>
-                  <a:srgbClr val="C87A32"/>
-                </a:solidFill>
-                <a:latin typeface="Calibri" pitchFamily="34" charset="0"/>
-                <a:ea typeface="Calibri" pitchFamily="34" charset="-122"/>
-                <a:cs typeface="Calibri" pitchFamily="34" charset="-120"/>
-              </a:rPr>
-              <a:t>188</a:t>
-            </a:r>
-            <a:endParaRPr lang="en-US" sz="1300" dirty="0"/>
-          </a:p>
-        </p:txBody>
-      </p:sp>
-      <p:sp>
-        <p:nvSpPr>
-          <p:cNvPr id="37" name="Text 34"/>
-          <p:cNvSpPr/>
-          <p:nvPr/>
-        </p:nvSpPr>
-        <p:spPr>
-          <a:xfrm>
-            <a:off x="9646920" y="3182112"/>
-            <a:ext cx="1097280" cy="365760"/>
-          </a:xfrm>
-          <a:prstGeom prst="rect">
-            <a:avLst/>
-          </a:prstGeom>
-          <a:noFill/>
-          <a:ln/>
-        </p:spPr>
-        <p:txBody>
-          <a:bodyPr wrap="square" lIns="0" tIns="0" rIns="0" bIns="0" rtlCol="0" anchor="ctr"/>
-          <a:lstStyle/>
-          <a:p>
-            <a:pPr algn="r" indent="0" marL="0">
-              <a:buNone/>
-            </a:pPr>
-            <a:r>
-              <a:rPr lang="en-US" sz="1300" dirty="0">
-                <a:solidFill>
-                  <a:srgbClr val="1A2433"/>
-                </a:solidFill>
-                <a:latin typeface="Calibri" pitchFamily="34" charset="0"/>
-                <a:ea typeface="Calibri" pitchFamily="34" charset="-122"/>
-                <a:cs typeface="Calibri" pitchFamily="34" charset="-120"/>
-              </a:rPr>
-              <a:t>5.818</a:t>
-            </a:r>
-            <a:endParaRPr lang="en-US" sz="1300" dirty="0"/>
-          </a:p>
-        </p:txBody>
-      </p:sp>
-      <p:sp>
-        <p:nvSpPr>
-          <p:cNvPr id="38" name="Shape 35"/>
-          <p:cNvSpPr/>
-          <p:nvPr/>
-        </p:nvSpPr>
-        <p:spPr>
-          <a:xfrm>
-            <a:off x="10835640" y="3200400"/>
+          <p:cNvPr id="41" name="Shape 38"/>
+          <p:cNvSpPr/>
+          <p:nvPr/>
+        </p:nvSpPr>
+        <p:spPr>
+          <a:xfrm>
+            <a:off x="10927080" y="3200400"/>
             <a:ext cx="914400" cy="365760"/>
           </a:xfrm>
           <a:prstGeom prst="roundRect">
@@ -23063,13 +23180,13 @@
       </p:sp>
       <p:sp>
         <p:nvSpPr>
-          <p:cNvPr id="39" name="Text 36"/>
-          <p:cNvSpPr/>
-          <p:nvPr/>
-        </p:nvSpPr>
-        <p:spPr>
-          <a:xfrm>
-            <a:off x="10835640" y="3209544"/>
+          <p:cNvPr id="42" name="Text 39"/>
+          <p:cNvSpPr/>
+          <p:nvPr/>
+        </p:nvSpPr>
+        <p:spPr>
+          <a:xfrm>
+            <a:off x="10927080" y="3209544"/>
             <a:ext cx="914400" cy="347472"/>
           </a:xfrm>
           <a:prstGeom prst="rect">
@@ -23102,7 +23219,7 @@
       </p:sp>
       <p:sp>
         <p:nvSpPr>
-          <p:cNvPr id="40" name="Shape 37"/>
+          <p:cNvPr id="43" name="Shape 40"/>
           <p:cNvSpPr/>
           <p:nvPr/>
         </p:nvSpPr>
@@ -23125,14 +23242,14 @@
       </p:sp>
       <p:sp>
         <p:nvSpPr>
-          <p:cNvPr id="41" name="Text 38"/>
+          <p:cNvPr id="44" name="Text 41"/>
           <p:cNvSpPr/>
           <p:nvPr/>
         </p:nvSpPr>
         <p:spPr>
           <a:xfrm>
             <a:off x="502920" y="3858768"/>
-            <a:ext cx="2743200" cy="292608"/>
+            <a:ext cx="2331720" cy="292608"/>
           </a:xfrm>
           <a:prstGeom prst="rect">
             <a:avLst/>
@@ -23164,14 +23281,14 @@
       </p:sp>
       <p:sp>
         <p:nvSpPr>
-          <p:cNvPr id="42" name="Text 39"/>
+          <p:cNvPr id="45" name="Text 42"/>
           <p:cNvSpPr/>
           <p:nvPr/>
         </p:nvSpPr>
         <p:spPr>
           <a:xfrm>
             <a:off x="502920" y="4160520"/>
-            <a:ext cx="2834640" cy="256032"/>
+            <a:ext cx="2377440" cy="256032"/>
           </a:xfrm>
           <a:prstGeom prst="rect">
             <a:avLst/>
@@ -23203,14 +23320,14 @@
       </p:sp>
       <p:sp>
         <p:nvSpPr>
-          <p:cNvPr id="43" name="Text 40"/>
-          <p:cNvSpPr/>
-          <p:nvPr/>
-        </p:nvSpPr>
-        <p:spPr>
-          <a:xfrm>
-            <a:off x="3429000" y="3931920"/>
-            <a:ext cx="1051560" cy="365760"/>
+          <p:cNvPr id="46" name="Text 43"/>
+          <p:cNvSpPr/>
+          <p:nvPr/>
+        </p:nvSpPr>
+        <p:spPr>
+          <a:xfrm>
+            <a:off x="2971800" y="3931920"/>
+            <a:ext cx="914400" cy="365760"/>
           </a:xfrm>
           <a:prstGeom prst="rect">
             <a:avLst/>
@@ -23242,14 +23359,14 @@
       </p:sp>
       <p:sp>
         <p:nvSpPr>
-          <p:cNvPr id="44" name="Text 41"/>
-          <p:cNvSpPr/>
-          <p:nvPr/>
-        </p:nvSpPr>
-        <p:spPr>
-          <a:xfrm>
-            <a:off x="4572000" y="3931920"/>
-            <a:ext cx="960120" cy="365760"/>
+          <p:cNvPr id="47" name="Text 44"/>
+          <p:cNvSpPr/>
+          <p:nvPr/>
+        </p:nvSpPr>
+        <p:spPr>
+          <a:xfrm>
+            <a:off x="3977640" y="3931920"/>
+            <a:ext cx="868680" cy="365760"/>
           </a:xfrm>
           <a:prstGeom prst="rect">
             <a:avLst/>
@@ -23281,13 +23398,208 @@
       </p:sp>
       <p:sp>
         <p:nvSpPr>
-          <p:cNvPr id="45" name="Text 42"/>
-          <p:cNvSpPr/>
-          <p:nvPr/>
-        </p:nvSpPr>
-        <p:spPr>
-          <a:xfrm>
-            <a:off x="5623560" y="3931920"/>
+          <p:cNvPr id="48" name="Text 45"/>
+          <p:cNvSpPr/>
+          <p:nvPr/>
+        </p:nvSpPr>
+        <p:spPr>
+          <a:xfrm>
+            <a:off x="4937760" y="3931920"/>
+            <a:ext cx="822960" cy="365760"/>
+          </a:xfrm>
+          <a:prstGeom prst="rect">
+            <a:avLst/>
+          </a:prstGeom>
+          <a:noFill/>
+          <a:ln/>
+        </p:spPr>
+        <p:txBody>
+          <a:bodyPr wrap="square" lIns="0" tIns="0" rIns="0" bIns="0" rtlCol="0" anchor="ctr"/>
+          <a:lstStyle/>
+          <a:p>
+            <a:pPr algn="r" indent="0" marL="0">
+              <a:buNone/>
+            </a:pPr>
+            <a:r>
+              <a:rPr lang="en-US" sz="1300" dirty="0">
+                <a:solidFill>
+                  <a:srgbClr val="C0392B"/>
+                </a:solidFill>
+                <a:latin typeface="Calibri" pitchFamily="34" charset="0"/>
+                <a:ea typeface="Calibri" pitchFamily="34" charset="-122"/>
+                <a:cs typeface="Calibri" pitchFamily="34" charset="-120"/>
+              </a:rPr>
+              <a:t>36</a:t>
+            </a:r>
+            <a:endParaRPr lang="en-US" sz="1300" dirty="0"/>
+          </a:p>
+        </p:txBody>
+      </p:sp>
+      <p:sp>
+        <p:nvSpPr>
+          <p:cNvPr id="49" name="Text 46"/>
+          <p:cNvSpPr/>
+          <p:nvPr/>
+        </p:nvSpPr>
+        <p:spPr>
+          <a:xfrm>
+            <a:off x="5852160" y="3931920"/>
+            <a:ext cx="822960" cy="365760"/>
+          </a:xfrm>
+          <a:prstGeom prst="rect">
+            <a:avLst/>
+          </a:prstGeom>
+          <a:noFill/>
+          <a:ln/>
+        </p:spPr>
+        <p:txBody>
+          <a:bodyPr wrap="square" lIns="0" tIns="0" rIns="0" bIns="0" rtlCol="0" anchor="ctr"/>
+          <a:lstStyle/>
+          <a:p>
+            <a:pPr algn="r" indent="0" marL="0">
+              <a:buNone/>
+            </a:pPr>
+            <a:r>
+              <a:rPr lang="en-US" sz="1300" dirty="0">
+                <a:solidFill>
+                  <a:srgbClr val="1A2433"/>
+                </a:solidFill>
+                <a:latin typeface="Calibri" pitchFamily="34" charset="0"/>
+                <a:ea typeface="Calibri" pitchFamily="34" charset="-122"/>
+                <a:cs typeface="Calibri" pitchFamily="34" charset="-120"/>
+              </a:rPr>
+              <a:t>78%</a:t>
+            </a:r>
+            <a:endParaRPr lang="en-US" sz="1300" dirty="0"/>
+          </a:p>
+        </p:txBody>
+      </p:sp>
+      <p:sp>
+        <p:nvSpPr>
+          <p:cNvPr id="50" name="Text 47"/>
+          <p:cNvSpPr/>
+          <p:nvPr/>
+        </p:nvSpPr>
+        <p:spPr>
+          <a:xfrm>
+            <a:off x="6766560" y="3931920"/>
+            <a:ext cx="822960" cy="365760"/>
+          </a:xfrm>
+          <a:prstGeom prst="rect">
+            <a:avLst/>
+          </a:prstGeom>
+          <a:noFill/>
+          <a:ln/>
+        </p:spPr>
+        <p:txBody>
+          <a:bodyPr wrap="square" lIns="0" tIns="0" rIns="0" bIns="0" rtlCol="0" anchor="ctr"/>
+          <a:lstStyle/>
+          <a:p>
+            <a:pPr algn="r" indent="0" marL="0">
+              <a:buNone/>
+            </a:pPr>
+            <a:r>
+              <a:rPr lang="en-US" sz="1300" dirty="0">
+                <a:solidFill>
+                  <a:srgbClr val="1A2433"/>
+                </a:solidFill>
+                <a:latin typeface="Calibri" pitchFamily="34" charset="0"/>
+                <a:ea typeface="Calibri" pitchFamily="34" charset="-122"/>
+                <a:cs typeface="Calibri" pitchFamily="34" charset="-120"/>
+              </a:rPr>
+              <a:t>53</a:t>
+            </a:r>
+            <a:endParaRPr lang="en-US" sz="1300" dirty="0"/>
+          </a:p>
+        </p:txBody>
+      </p:sp>
+      <p:sp>
+        <p:nvSpPr>
+          <p:cNvPr id="51" name="Text 48"/>
+          <p:cNvSpPr/>
+          <p:nvPr/>
+        </p:nvSpPr>
+        <p:spPr>
+          <a:xfrm>
+            <a:off x="7680960" y="3931920"/>
+            <a:ext cx="1005840" cy="365760"/>
+          </a:xfrm>
+          <a:prstGeom prst="rect">
+            <a:avLst/>
+          </a:prstGeom>
+          <a:noFill/>
+          <a:ln/>
+        </p:spPr>
+        <p:txBody>
+          <a:bodyPr wrap="square" lIns="0" tIns="0" rIns="0" bIns="0" rtlCol="0" anchor="ctr"/>
+          <a:lstStyle/>
+          <a:p>
+            <a:pPr algn="r" indent="0" marL="0">
+              <a:buNone/>
+            </a:pPr>
+            <a:r>
+              <a:rPr lang="en-US" sz="1300" dirty="0">
+                <a:solidFill>
+                  <a:srgbClr val="C87A32"/>
+                </a:solidFill>
+                <a:latin typeface="Calibri" pitchFamily="34" charset="0"/>
+                <a:ea typeface="Calibri" pitchFamily="34" charset="-122"/>
+                <a:cs typeface="Calibri" pitchFamily="34" charset="-120"/>
+              </a:rPr>
+              <a:t>71</a:t>
+            </a:r>
+            <a:endParaRPr lang="en-US" sz="1300" dirty="0"/>
+          </a:p>
+        </p:txBody>
+      </p:sp>
+      <p:sp>
+        <p:nvSpPr>
+          <p:cNvPr id="52" name="Text 49"/>
+          <p:cNvSpPr/>
+          <p:nvPr/>
+        </p:nvSpPr>
+        <p:spPr>
+          <a:xfrm>
+            <a:off x="8778240" y="3931920"/>
+            <a:ext cx="1005840" cy="365760"/>
+          </a:xfrm>
+          <a:prstGeom prst="rect">
+            <a:avLst/>
+          </a:prstGeom>
+          <a:noFill/>
+          <a:ln/>
+        </p:spPr>
+        <p:txBody>
+          <a:bodyPr wrap="square" lIns="0" tIns="0" rIns="0" bIns="0" rtlCol="0" anchor="ctr"/>
+          <a:lstStyle/>
+          <a:p>
+            <a:pPr algn="r" indent="0" marL="0">
+              <a:buNone/>
+            </a:pPr>
+            <a:r>
+              <a:rPr lang="en-US" sz="1300" dirty="0">
+                <a:solidFill>
+                  <a:srgbClr val="1A2433"/>
+                </a:solidFill>
+                <a:latin typeface="Calibri" pitchFamily="34" charset="0"/>
+                <a:ea typeface="Calibri" pitchFamily="34" charset="-122"/>
+                <a:cs typeface="Calibri" pitchFamily="34" charset="-120"/>
+              </a:rPr>
+              <a:t>40</a:t>
+            </a:r>
+            <a:endParaRPr lang="en-US" sz="1300" dirty="0"/>
+          </a:p>
+        </p:txBody>
+      </p:sp>
+      <p:sp>
+        <p:nvSpPr>
+          <p:cNvPr id="53" name="Text 50"/>
+          <p:cNvSpPr/>
+          <p:nvPr/>
+        </p:nvSpPr>
+        <p:spPr>
+          <a:xfrm>
+            <a:off x="9875520" y="3931920"/>
             <a:ext cx="914400" cy="365760"/>
           </a:xfrm>
           <a:prstGeom prst="rect">
@@ -23306,13 +23618,13 @@
             <a:r>
               <a:rPr lang="en-US" sz="1300" dirty="0">
                 <a:solidFill>
-                  <a:srgbClr val="C0392B"/>
-                </a:solidFill>
-                <a:latin typeface="Calibri" pitchFamily="34" charset="0"/>
-                <a:ea typeface="Calibri" pitchFamily="34" charset="-122"/>
-                <a:cs typeface="Calibri" pitchFamily="34" charset="-120"/>
-              </a:rPr>
-              <a:t>36</a:t>
+                  <a:srgbClr val="1A2433"/>
+                </a:solidFill>
+                <a:latin typeface="Calibri" pitchFamily="34" charset="0"/>
+                <a:ea typeface="Calibri" pitchFamily="34" charset="-122"/>
+                <a:cs typeface="Calibri" pitchFamily="34" charset="-120"/>
+              </a:rPr>
+              <a:t>3.392</a:t>
             </a:r>
             <a:endParaRPr lang="en-US" sz="1300" dirty="0"/>
           </a:p>
@@ -23320,169 +23632,13 @@
       </p:sp>
       <p:sp>
         <p:nvSpPr>
-          <p:cNvPr id="46" name="Text 43"/>
-          <p:cNvSpPr/>
-          <p:nvPr/>
-        </p:nvSpPr>
-        <p:spPr>
-          <a:xfrm>
-            <a:off x="6629400" y="3931920"/>
-            <a:ext cx="914400" cy="365760"/>
-          </a:xfrm>
-          <a:prstGeom prst="rect">
-            <a:avLst/>
-          </a:prstGeom>
-          <a:noFill/>
-          <a:ln/>
-        </p:spPr>
-        <p:txBody>
-          <a:bodyPr wrap="square" lIns="0" tIns="0" rIns="0" bIns="0" rtlCol="0" anchor="ctr"/>
-          <a:lstStyle/>
-          <a:p>
-            <a:pPr algn="r" indent="0" marL="0">
-              <a:buNone/>
-            </a:pPr>
-            <a:r>
-              <a:rPr lang="en-US" sz="1300" dirty="0">
-                <a:solidFill>
-                  <a:srgbClr val="1A2433"/>
-                </a:solidFill>
-                <a:latin typeface="Calibri" pitchFamily="34" charset="0"/>
-                <a:ea typeface="Calibri" pitchFamily="34" charset="-122"/>
-                <a:cs typeface="Calibri" pitchFamily="34" charset="-120"/>
-              </a:rPr>
-              <a:t>78%</a:t>
-            </a:r>
-            <a:endParaRPr lang="en-US" sz="1300" dirty="0"/>
-          </a:p>
-        </p:txBody>
-      </p:sp>
-      <p:sp>
-        <p:nvSpPr>
-          <p:cNvPr id="47" name="Text 44"/>
-          <p:cNvSpPr/>
-          <p:nvPr/>
-        </p:nvSpPr>
-        <p:spPr>
-          <a:xfrm>
-            <a:off x="7635240" y="3931920"/>
-            <a:ext cx="914400" cy="365760"/>
-          </a:xfrm>
-          <a:prstGeom prst="rect">
-            <a:avLst/>
-          </a:prstGeom>
-          <a:noFill/>
-          <a:ln/>
-        </p:spPr>
-        <p:txBody>
-          <a:bodyPr wrap="square" lIns="0" tIns="0" rIns="0" bIns="0" rtlCol="0" anchor="ctr"/>
-          <a:lstStyle/>
-          <a:p>
-            <a:pPr algn="r" indent="0" marL="0">
-              <a:buNone/>
-            </a:pPr>
-            <a:r>
-              <a:rPr lang="en-US" sz="1300" dirty="0">
-                <a:solidFill>
-                  <a:srgbClr val="1A2433"/>
-                </a:solidFill>
-                <a:latin typeface="Calibri" pitchFamily="34" charset="0"/>
-                <a:ea typeface="Calibri" pitchFamily="34" charset="-122"/>
-                <a:cs typeface="Calibri" pitchFamily="34" charset="-120"/>
-              </a:rPr>
-              <a:t>53</a:t>
-            </a:r>
-            <a:endParaRPr lang="en-US" sz="1300" dirty="0"/>
-          </a:p>
-        </p:txBody>
-      </p:sp>
-      <p:sp>
-        <p:nvSpPr>
-          <p:cNvPr id="48" name="Text 45"/>
-          <p:cNvSpPr/>
-          <p:nvPr/>
-        </p:nvSpPr>
-        <p:spPr>
-          <a:xfrm>
-            <a:off x="8641080" y="3931920"/>
-            <a:ext cx="914400" cy="365760"/>
-          </a:xfrm>
-          <a:prstGeom prst="rect">
-            <a:avLst/>
-          </a:prstGeom>
-          <a:noFill/>
-          <a:ln/>
-        </p:spPr>
-        <p:txBody>
-          <a:bodyPr wrap="square" lIns="0" tIns="0" rIns="0" bIns="0" rtlCol="0" anchor="ctr"/>
-          <a:lstStyle/>
-          <a:p>
-            <a:pPr algn="r" indent="0" marL="0">
-              <a:buNone/>
-            </a:pPr>
-            <a:r>
-              <a:rPr lang="en-US" sz="1300" dirty="0">
-                <a:solidFill>
-                  <a:srgbClr val="C87A32"/>
-                </a:solidFill>
-                <a:latin typeface="Calibri" pitchFamily="34" charset="0"/>
-                <a:ea typeface="Calibri" pitchFamily="34" charset="-122"/>
-                <a:cs typeface="Calibri" pitchFamily="34" charset="-120"/>
-              </a:rPr>
-              <a:t>111</a:t>
-            </a:r>
-            <a:endParaRPr lang="en-US" sz="1300" dirty="0"/>
-          </a:p>
-        </p:txBody>
-      </p:sp>
-      <p:sp>
-        <p:nvSpPr>
-          <p:cNvPr id="49" name="Text 46"/>
-          <p:cNvSpPr/>
-          <p:nvPr/>
-        </p:nvSpPr>
-        <p:spPr>
-          <a:xfrm>
-            <a:off x="9646920" y="3931920"/>
-            <a:ext cx="1097280" cy="365760"/>
-          </a:xfrm>
-          <a:prstGeom prst="rect">
-            <a:avLst/>
-          </a:prstGeom>
-          <a:noFill/>
-          <a:ln/>
-        </p:spPr>
-        <p:txBody>
-          <a:bodyPr wrap="square" lIns="0" tIns="0" rIns="0" bIns="0" rtlCol="0" anchor="ctr"/>
-          <a:lstStyle/>
-          <a:p>
-            <a:pPr algn="r" indent="0" marL="0">
-              <a:buNone/>
-            </a:pPr>
-            <a:r>
-              <a:rPr lang="en-US" sz="1300" dirty="0">
-                <a:solidFill>
-                  <a:srgbClr val="1A2433"/>
-                </a:solidFill>
-                <a:latin typeface="Calibri" pitchFamily="34" charset="0"/>
-                <a:ea typeface="Calibri" pitchFamily="34" charset="-122"/>
-                <a:cs typeface="Calibri" pitchFamily="34" charset="-120"/>
-              </a:rPr>
-              <a:t>3.392</a:t>
-            </a:r>
-            <a:endParaRPr lang="en-US" sz="1300" dirty="0"/>
-          </a:p>
-        </p:txBody>
-      </p:sp>
-      <p:sp>
-        <p:nvSpPr>
-          <p:cNvPr id="50" name="Shape 47"/>
-          <p:cNvSpPr/>
-          <p:nvPr/>
-        </p:nvSpPr>
-        <p:spPr>
-          <a:xfrm>
-            <a:off x="10835640" y="3950208"/>
+          <p:cNvPr id="54" name="Shape 51"/>
+          <p:cNvSpPr/>
+          <p:nvPr/>
+        </p:nvSpPr>
+        <p:spPr>
+          <a:xfrm>
+            <a:off x="10927080" y="3950208"/>
             <a:ext cx="914400" cy="365760"/>
           </a:xfrm>
           <a:prstGeom prst="roundRect">
@@ -23498,13 +23654,13 @@
       </p:sp>
       <p:sp>
         <p:nvSpPr>
-          <p:cNvPr id="51" name="Text 48"/>
-          <p:cNvSpPr/>
-          <p:nvPr/>
-        </p:nvSpPr>
-        <p:spPr>
-          <a:xfrm>
-            <a:off x="10835640" y="3959352"/>
+          <p:cNvPr id="55" name="Text 52"/>
+          <p:cNvSpPr/>
+          <p:nvPr/>
+        </p:nvSpPr>
+        <p:spPr>
+          <a:xfrm>
+            <a:off x="10927080" y="3959352"/>
             <a:ext cx="914400" cy="347472"/>
           </a:xfrm>
           <a:prstGeom prst="rect">
@@ -23537,7 +23693,7 @@
       </p:sp>
       <p:sp>
         <p:nvSpPr>
-          <p:cNvPr id="52" name="Shape 49"/>
+          <p:cNvPr id="56" name="Shape 53"/>
           <p:cNvSpPr/>
           <p:nvPr/>
         </p:nvSpPr>
@@ -23560,7 +23716,7 @@
       </p:sp>
       <p:sp>
         <p:nvSpPr>
-          <p:cNvPr id="53" name="Shape 50"/>
+          <p:cNvPr id="57" name="Shape 54"/>
           <p:cNvSpPr/>
           <p:nvPr/>
         </p:nvSpPr>
@@ -23580,14 +23736,14 @@
       </p:sp>
       <p:sp>
         <p:nvSpPr>
-          <p:cNvPr id="54" name="Text 51"/>
+          <p:cNvPr id="58" name="Text 55"/>
           <p:cNvSpPr/>
           <p:nvPr/>
         </p:nvSpPr>
         <p:spPr>
           <a:xfrm>
             <a:off x="502920" y="4608576"/>
-            <a:ext cx="2743200" cy="292608"/>
+            <a:ext cx="2331720" cy="292608"/>
           </a:xfrm>
           <a:prstGeom prst="rect">
             <a:avLst/>
@@ -23619,14 +23775,14 @@
       </p:sp>
       <p:sp>
         <p:nvSpPr>
-          <p:cNvPr id="55" name="Text 52"/>
+          <p:cNvPr id="59" name="Text 56"/>
           <p:cNvSpPr/>
           <p:nvPr/>
         </p:nvSpPr>
         <p:spPr>
           <a:xfrm>
             <a:off x="502920" y="4910328"/>
-            <a:ext cx="2834640" cy="256032"/>
+            <a:ext cx="2377440" cy="256032"/>
           </a:xfrm>
           <a:prstGeom prst="rect">
             <a:avLst/>
@@ -23658,14 +23814,14 @@
       </p:sp>
       <p:sp>
         <p:nvSpPr>
-          <p:cNvPr id="56" name="Text 53"/>
-          <p:cNvSpPr/>
-          <p:nvPr/>
-        </p:nvSpPr>
-        <p:spPr>
-          <a:xfrm>
-            <a:off x="3429000" y="4681728"/>
-            <a:ext cx="1051560" cy="365760"/>
+          <p:cNvPr id="60" name="Text 57"/>
+          <p:cNvSpPr/>
+          <p:nvPr/>
+        </p:nvSpPr>
+        <p:spPr>
+          <a:xfrm>
+            <a:off x="2971800" y="4681728"/>
+            <a:ext cx="914400" cy="365760"/>
           </a:xfrm>
           <a:prstGeom prst="rect">
             <a:avLst/>
@@ -23697,14 +23853,14 @@
       </p:sp>
       <p:sp>
         <p:nvSpPr>
-          <p:cNvPr id="57" name="Text 54"/>
-          <p:cNvSpPr/>
-          <p:nvPr/>
-        </p:nvSpPr>
-        <p:spPr>
-          <a:xfrm>
-            <a:off x="4572000" y="4681728"/>
-            <a:ext cx="960120" cy="365760"/>
+          <p:cNvPr id="61" name="Text 58"/>
+          <p:cNvSpPr/>
+          <p:nvPr/>
+        </p:nvSpPr>
+        <p:spPr>
+          <a:xfrm>
+            <a:off x="3977640" y="4681728"/>
+            <a:ext cx="868680" cy="365760"/>
           </a:xfrm>
           <a:prstGeom prst="rect">
             <a:avLst/>
@@ -23736,13 +23892,208 @@
       </p:sp>
       <p:sp>
         <p:nvSpPr>
-          <p:cNvPr id="58" name="Text 55"/>
-          <p:cNvSpPr/>
-          <p:nvPr/>
-        </p:nvSpPr>
-        <p:spPr>
-          <a:xfrm>
-            <a:off x="5623560" y="4681728"/>
+          <p:cNvPr id="62" name="Text 59"/>
+          <p:cNvSpPr/>
+          <p:nvPr/>
+        </p:nvSpPr>
+        <p:spPr>
+          <a:xfrm>
+            <a:off x="4937760" y="4681728"/>
+            <a:ext cx="822960" cy="365760"/>
+          </a:xfrm>
+          <a:prstGeom prst="rect">
+            <a:avLst/>
+          </a:prstGeom>
+          <a:noFill/>
+          <a:ln/>
+        </p:spPr>
+        <p:txBody>
+          <a:bodyPr wrap="square" lIns="0" tIns="0" rIns="0" bIns="0" rtlCol="0" anchor="ctr"/>
+          <a:lstStyle/>
+          <a:p>
+            <a:pPr algn="r" indent="0" marL="0">
+              <a:buNone/>
+            </a:pPr>
+            <a:r>
+              <a:rPr lang="en-US" sz="1300" dirty="0">
+                <a:solidFill>
+                  <a:srgbClr val="1A2433"/>
+                </a:solidFill>
+                <a:latin typeface="Calibri" pitchFamily="34" charset="0"/>
+                <a:ea typeface="Calibri" pitchFamily="34" charset="-122"/>
+                <a:cs typeface="Calibri" pitchFamily="34" charset="-120"/>
+              </a:rPr>
+              <a:t>0</a:t>
+            </a:r>
+            <a:endParaRPr lang="en-US" sz="1300" dirty="0"/>
+          </a:p>
+        </p:txBody>
+      </p:sp>
+      <p:sp>
+        <p:nvSpPr>
+          <p:cNvPr id="63" name="Text 60"/>
+          <p:cNvSpPr/>
+          <p:nvPr/>
+        </p:nvSpPr>
+        <p:spPr>
+          <a:xfrm>
+            <a:off x="5852160" y="4681728"/>
+            <a:ext cx="822960" cy="365760"/>
+          </a:xfrm>
+          <a:prstGeom prst="rect">
+            <a:avLst/>
+          </a:prstGeom>
+          <a:noFill/>
+          <a:ln/>
+        </p:spPr>
+        <p:txBody>
+          <a:bodyPr wrap="square" lIns="0" tIns="0" rIns="0" bIns="0" rtlCol="0" anchor="ctr"/>
+          <a:lstStyle/>
+          <a:p>
+            <a:pPr algn="r" indent="0" marL="0">
+              <a:buNone/>
+            </a:pPr>
+            <a:r>
+              <a:rPr lang="en-US" sz="1300" dirty="0">
+                <a:solidFill>
+                  <a:srgbClr val="1A2433"/>
+                </a:solidFill>
+                <a:latin typeface="Calibri" pitchFamily="34" charset="0"/>
+                <a:ea typeface="Calibri" pitchFamily="34" charset="-122"/>
+                <a:cs typeface="Calibri" pitchFamily="34" charset="-120"/>
+              </a:rPr>
+              <a:t>100%</a:t>
+            </a:r>
+            <a:endParaRPr lang="en-US" sz="1300" dirty="0"/>
+          </a:p>
+        </p:txBody>
+      </p:sp>
+      <p:sp>
+        <p:nvSpPr>
+          <p:cNvPr id="64" name="Text 61"/>
+          <p:cNvSpPr/>
+          <p:nvPr/>
+        </p:nvSpPr>
+        <p:spPr>
+          <a:xfrm>
+            <a:off x="6766560" y="4681728"/>
+            <a:ext cx="822960" cy="365760"/>
+          </a:xfrm>
+          <a:prstGeom prst="rect">
+            <a:avLst/>
+          </a:prstGeom>
+          <a:noFill/>
+          <a:ln/>
+        </p:spPr>
+        <p:txBody>
+          <a:bodyPr wrap="square" lIns="0" tIns="0" rIns="0" bIns="0" rtlCol="0" anchor="ctr"/>
+          <a:lstStyle/>
+          <a:p>
+            <a:pPr algn="r" indent="0" marL="0">
+              <a:buNone/>
+            </a:pPr>
+            <a:r>
+              <a:rPr lang="en-US" sz="1300" dirty="0">
+                <a:solidFill>
+                  <a:srgbClr val="1A2433"/>
+                </a:solidFill>
+                <a:latin typeface="Calibri" pitchFamily="34" charset="0"/>
+                <a:ea typeface="Calibri" pitchFamily="34" charset="-122"/>
+                <a:cs typeface="Calibri" pitchFamily="34" charset="-120"/>
+              </a:rPr>
+              <a:t>0</a:t>
+            </a:r>
+            <a:endParaRPr lang="en-US" sz="1300" dirty="0"/>
+          </a:p>
+        </p:txBody>
+      </p:sp>
+      <p:sp>
+        <p:nvSpPr>
+          <p:cNvPr id="65" name="Text 62"/>
+          <p:cNvSpPr/>
+          <p:nvPr/>
+        </p:nvSpPr>
+        <p:spPr>
+          <a:xfrm>
+            <a:off x="7680960" y="4681728"/>
+            <a:ext cx="1005840" cy="365760"/>
+          </a:xfrm>
+          <a:prstGeom prst="rect">
+            <a:avLst/>
+          </a:prstGeom>
+          <a:noFill/>
+          <a:ln/>
+        </p:spPr>
+        <p:txBody>
+          <a:bodyPr wrap="square" lIns="0" tIns="0" rIns="0" bIns="0" rtlCol="0" anchor="ctr"/>
+          <a:lstStyle/>
+          <a:p>
+            <a:pPr algn="r" indent="0" marL="0">
+              <a:buNone/>
+            </a:pPr>
+            <a:r>
+              <a:rPr lang="en-US" sz="1300" dirty="0">
+                <a:solidFill>
+                  <a:srgbClr val="1A2433"/>
+                </a:solidFill>
+                <a:latin typeface="Calibri" pitchFamily="34" charset="0"/>
+                <a:ea typeface="Calibri" pitchFamily="34" charset="-122"/>
+                <a:cs typeface="Calibri" pitchFamily="34" charset="-120"/>
+              </a:rPr>
+              <a:t>0</a:t>
+            </a:r>
+            <a:endParaRPr lang="en-US" sz="1300" dirty="0"/>
+          </a:p>
+        </p:txBody>
+      </p:sp>
+      <p:sp>
+        <p:nvSpPr>
+          <p:cNvPr id="66" name="Text 63"/>
+          <p:cNvSpPr/>
+          <p:nvPr/>
+        </p:nvSpPr>
+        <p:spPr>
+          <a:xfrm>
+            <a:off x="8778240" y="4681728"/>
+            <a:ext cx="1005840" cy="365760"/>
+          </a:xfrm>
+          <a:prstGeom prst="rect">
+            <a:avLst/>
+          </a:prstGeom>
+          <a:noFill/>
+          <a:ln/>
+        </p:spPr>
+        <p:txBody>
+          <a:bodyPr wrap="square" lIns="0" tIns="0" rIns="0" bIns="0" rtlCol="0" anchor="ctr"/>
+          <a:lstStyle/>
+          <a:p>
+            <a:pPr algn="r" indent="0" marL="0">
+              <a:buNone/>
+            </a:pPr>
+            <a:r>
+              <a:rPr lang="en-US" sz="1300" dirty="0">
+                <a:solidFill>
+                  <a:srgbClr val="1A2433"/>
+                </a:solidFill>
+                <a:latin typeface="Calibri" pitchFamily="34" charset="0"/>
+                <a:ea typeface="Calibri" pitchFamily="34" charset="-122"/>
+                <a:cs typeface="Calibri" pitchFamily="34" charset="-120"/>
+              </a:rPr>
+              <a:t>0</a:t>
+            </a:r>
+            <a:endParaRPr lang="en-US" sz="1300" dirty="0"/>
+          </a:p>
+        </p:txBody>
+      </p:sp>
+      <p:sp>
+        <p:nvSpPr>
+          <p:cNvPr id="67" name="Text 64"/>
+          <p:cNvSpPr/>
+          <p:nvPr/>
+        </p:nvSpPr>
+        <p:spPr>
+          <a:xfrm>
+            <a:off x="9875520" y="4681728"/>
             <a:ext cx="914400" cy="365760"/>
           </a:xfrm>
           <a:prstGeom prst="rect">
@@ -23775,169 +24126,13 @@
       </p:sp>
       <p:sp>
         <p:nvSpPr>
-          <p:cNvPr id="59" name="Text 56"/>
-          <p:cNvSpPr/>
-          <p:nvPr/>
-        </p:nvSpPr>
-        <p:spPr>
-          <a:xfrm>
-            <a:off x="6629400" y="4681728"/>
-            <a:ext cx="914400" cy="365760"/>
-          </a:xfrm>
-          <a:prstGeom prst="rect">
-            <a:avLst/>
-          </a:prstGeom>
-          <a:noFill/>
-          <a:ln/>
-        </p:spPr>
-        <p:txBody>
-          <a:bodyPr wrap="square" lIns="0" tIns="0" rIns="0" bIns="0" rtlCol="0" anchor="ctr"/>
-          <a:lstStyle/>
-          <a:p>
-            <a:pPr algn="r" indent="0" marL="0">
-              <a:buNone/>
-            </a:pPr>
-            <a:r>
-              <a:rPr lang="en-US" sz="1300" dirty="0">
-                <a:solidFill>
-                  <a:srgbClr val="1A2433"/>
-                </a:solidFill>
-                <a:latin typeface="Calibri" pitchFamily="34" charset="0"/>
-                <a:ea typeface="Calibri" pitchFamily="34" charset="-122"/>
-                <a:cs typeface="Calibri" pitchFamily="34" charset="-120"/>
-              </a:rPr>
-              <a:t>100%</a:t>
-            </a:r>
-            <a:endParaRPr lang="en-US" sz="1300" dirty="0"/>
-          </a:p>
-        </p:txBody>
-      </p:sp>
-      <p:sp>
-        <p:nvSpPr>
-          <p:cNvPr id="60" name="Text 57"/>
-          <p:cNvSpPr/>
-          <p:nvPr/>
-        </p:nvSpPr>
-        <p:spPr>
-          <a:xfrm>
-            <a:off x="7635240" y="4681728"/>
-            <a:ext cx="914400" cy="365760"/>
-          </a:xfrm>
-          <a:prstGeom prst="rect">
-            <a:avLst/>
-          </a:prstGeom>
-          <a:noFill/>
-          <a:ln/>
-        </p:spPr>
-        <p:txBody>
-          <a:bodyPr wrap="square" lIns="0" tIns="0" rIns="0" bIns="0" rtlCol="0" anchor="ctr"/>
-          <a:lstStyle/>
-          <a:p>
-            <a:pPr algn="r" indent="0" marL="0">
-              <a:buNone/>
-            </a:pPr>
-            <a:r>
-              <a:rPr lang="en-US" sz="1300" dirty="0">
-                <a:solidFill>
-                  <a:srgbClr val="1A2433"/>
-                </a:solidFill>
-                <a:latin typeface="Calibri" pitchFamily="34" charset="0"/>
-                <a:ea typeface="Calibri" pitchFamily="34" charset="-122"/>
-                <a:cs typeface="Calibri" pitchFamily="34" charset="-120"/>
-              </a:rPr>
-              <a:t>0</a:t>
-            </a:r>
-            <a:endParaRPr lang="en-US" sz="1300" dirty="0"/>
-          </a:p>
-        </p:txBody>
-      </p:sp>
-      <p:sp>
-        <p:nvSpPr>
-          <p:cNvPr id="61" name="Text 58"/>
-          <p:cNvSpPr/>
-          <p:nvPr/>
-        </p:nvSpPr>
-        <p:spPr>
-          <a:xfrm>
-            <a:off x="8641080" y="4681728"/>
-            <a:ext cx="914400" cy="365760"/>
-          </a:xfrm>
-          <a:prstGeom prst="rect">
-            <a:avLst/>
-          </a:prstGeom>
-          <a:noFill/>
-          <a:ln/>
-        </p:spPr>
-        <p:txBody>
-          <a:bodyPr wrap="square" lIns="0" tIns="0" rIns="0" bIns="0" rtlCol="0" anchor="ctr"/>
-          <a:lstStyle/>
-          <a:p>
-            <a:pPr algn="r" indent="0" marL="0">
-              <a:buNone/>
-            </a:pPr>
-            <a:r>
-              <a:rPr lang="en-US" sz="1300" dirty="0">
-                <a:solidFill>
-                  <a:srgbClr val="1A2433"/>
-                </a:solidFill>
-                <a:latin typeface="Calibri" pitchFamily="34" charset="0"/>
-                <a:ea typeface="Calibri" pitchFamily="34" charset="-122"/>
-                <a:cs typeface="Calibri" pitchFamily="34" charset="-120"/>
-              </a:rPr>
-              <a:t>0</a:t>
-            </a:r>
-            <a:endParaRPr lang="en-US" sz="1300" dirty="0"/>
-          </a:p>
-        </p:txBody>
-      </p:sp>
-      <p:sp>
-        <p:nvSpPr>
-          <p:cNvPr id="62" name="Text 59"/>
-          <p:cNvSpPr/>
-          <p:nvPr/>
-        </p:nvSpPr>
-        <p:spPr>
-          <a:xfrm>
-            <a:off x="9646920" y="4681728"/>
-            <a:ext cx="1097280" cy="365760"/>
-          </a:xfrm>
-          <a:prstGeom prst="rect">
-            <a:avLst/>
-          </a:prstGeom>
-          <a:noFill/>
-          <a:ln/>
-        </p:spPr>
-        <p:txBody>
-          <a:bodyPr wrap="square" lIns="0" tIns="0" rIns="0" bIns="0" rtlCol="0" anchor="ctr"/>
-          <a:lstStyle/>
-          <a:p>
-            <a:pPr algn="r" indent="0" marL="0">
-              <a:buNone/>
-            </a:pPr>
-            <a:r>
-              <a:rPr lang="en-US" sz="1300" dirty="0">
-                <a:solidFill>
-                  <a:srgbClr val="1A2433"/>
-                </a:solidFill>
-                <a:latin typeface="Calibri" pitchFamily="34" charset="0"/>
-                <a:ea typeface="Calibri" pitchFamily="34" charset="-122"/>
-                <a:cs typeface="Calibri" pitchFamily="34" charset="-120"/>
-              </a:rPr>
-              <a:t>0</a:t>
-            </a:r>
-            <a:endParaRPr lang="en-US" sz="1300" dirty="0"/>
-          </a:p>
-        </p:txBody>
-      </p:sp>
-      <p:sp>
-        <p:nvSpPr>
-          <p:cNvPr id="63" name="Shape 60"/>
-          <p:cNvSpPr/>
-          <p:nvPr/>
-        </p:nvSpPr>
-        <p:spPr>
-          <a:xfrm>
-            <a:off x="10835640" y="4700016"/>
+          <p:cNvPr id="68" name="Shape 65"/>
+          <p:cNvSpPr/>
+          <p:nvPr/>
+        </p:nvSpPr>
+        <p:spPr>
+          <a:xfrm>
+            <a:off x="10927080" y="4700016"/>
             <a:ext cx="914400" cy="365760"/>
           </a:xfrm>
           <a:prstGeom prst="roundRect">
@@ -23953,13 +24148,13 @@
       </p:sp>
       <p:sp>
         <p:nvSpPr>
-          <p:cNvPr id="64" name="Text 61"/>
-          <p:cNvSpPr/>
-          <p:nvPr/>
-        </p:nvSpPr>
-        <p:spPr>
-          <a:xfrm>
-            <a:off x="10835640" y="4709160"/>
+          <p:cNvPr id="69" name="Text 66"/>
+          <p:cNvSpPr/>
+          <p:nvPr/>
+        </p:nvSpPr>
+        <p:spPr>
+          <a:xfrm>
+            <a:off x="10927080" y="4709160"/>
             <a:ext cx="914400" cy="347472"/>
           </a:xfrm>
           <a:prstGeom prst="rect">
@@ -23992,7 +24187,7 @@
       </p:sp>
       <p:sp>
         <p:nvSpPr>
-          <p:cNvPr id="65" name="Shape 62"/>
+          <p:cNvPr id="70" name="Shape 67"/>
           <p:cNvSpPr/>
           <p:nvPr/>
         </p:nvSpPr>
@@ -24015,14 +24210,14 @@
       </p:sp>
       <p:sp>
         <p:nvSpPr>
-          <p:cNvPr id="66" name="Text 63"/>
+          <p:cNvPr id="71" name="Text 68"/>
           <p:cNvSpPr/>
           <p:nvPr/>
         </p:nvSpPr>
         <p:spPr>
           <a:xfrm>
             <a:off x="502920" y="5376672"/>
-            <a:ext cx="2743200" cy="292608"/>
+            <a:ext cx="2331720" cy="292608"/>
           </a:xfrm>
           <a:prstGeom prst="rect">
             <a:avLst/>
@@ -24054,14 +24249,14 @@
       </p:sp>
       <p:sp>
         <p:nvSpPr>
-          <p:cNvPr id="67" name="Text 64"/>
+          <p:cNvPr id="72" name="Text 69"/>
           <p:cNvSpPr/>
           <p:nvPr/>
         </p:nvSpPr>
         <p:spPr>
           <a:xfrm>
             <a:off x="502920" y="5678424"/>
-            <a:ext cx="2834640" cy="256032"/>
+            <a:ext cx="2377440" cy="256032"/>
           </a:xfrm>
           <a:prstGeom prst="rect">
             <a:avLst/>
@@ -24093,14 +24288,14 @@
       </p:sp>
       <p:sp>
         <p:nvSpPr>
-          <p:cNvPr id="68" name="Text 65"/>
-          <p:cNvSpPr/>
-          <p:nvPr/>
-        </p:nvSpPr>
-        <p:spPr>
-          <a:xfrm>
-            <a:off x="3429000" y="5449824"/>
-            <a:ext cx="1051560" cy="365760"/>
+          <p:cNvPr id="73" name="Text 70"/>
+          <p:cNvSpPr/>
+          <p:nvPr/>
+        </p:nvSpPr>
+        <p:spPr>
+          <a:xfrm>
+            <a:off x="2971800" y="5449824"/>
+            <a:ext cx="914400" cy="365760"/>
           </a:xfrm>
           <a:prstGeom prst="rect">
             <a:avLst/>
@@ -24132,14 +24327,14 @@
       </p:sp>
       <p:sp>
         <p:nvSpPr>
-          <p:cNvPr id="69" name="Text 66"/>
-          <p:cNvSpPr/>
-          <p:nvPr/>
-        </p:nvSpPr>
-        <p:spPr>
-          <a:xfrm>
-            <a:off x="4572000" y="5449824"/>
-            <a:ext cx="960120" cy="365760"/>
+          <p:cNvPr id="74" name="Text 71"/>
+          <p:cNvSpPr/>
+          <p:nvPr/>
+        </p:nvSpPr>
+        <p:spPr>
+          <a:xfrm>
+            <a:off x="3977640" y="5449824"/>
+            <a:ext cx="868680" cy="365760"/>
           </a:xfrm>
           <a:prstGeom prst="rect">
             <a:avLst/>
@@ -24171,13 +24366,208 @@
       </p:sp>
       <p:sp>
         <p:nvSpPr>
-          <p:cNvPr id="70" name="Text 67"/>
-          <p:cNvSpPr/>
-          <p:nvPr/>
-        </p:nvSpPr>
-        <p:spPr>
-          <a:xfrm>
-            <a:off x="5623560" y="5449824"/>
+          <p:cNvPr id="75" name="Text 72"/>
+          <p:cNvSpPr/>
+          <p:nvPr/>
+        </p:nvSpPr>
+        <p:spPr>
+          <a:xfrm>
+            <a:off x="4937760" y="5449824"/>
+            <a:ext cx="822960" cy="365760"/>
+          </a:xfrm>
+          <a:prstGeom prst="rect">
+            <a:avLst/>
+          </a:prstGeom>
+          <a:noFill/>
+          <a:ln/>
+        </p:spPr>
+        <p:txBody>
+          <a:bodyPr wrap="square" lIns="0" tIns="0" rIns="0" bIns="0" rtlCol="0" anchor="ctr"/>
+          <a:lstStyle/>
+          <a:p>
+            <a:pPr algn="r" indent="0" marL="0">
+              <a:buNone/>
+            </a:pPr>
+            <a:r>
+              <a:rPr lang="en-US" sz="1300" b="1" dirty="0">
+                <a:solidFill>
+                  <a:srgbClr val="1A2433"/>
+                </a:solidFill>
+                <a:latin typeface="Calibri" pitchFamily="34" charset="0"/>
+                <a:ea typeface="Calibri" pitchFamily="34" charset="-122"/>
+                <a:cs typeface="Calibri" pitchFamily="34" charset="-120"/>
+              </a:rPr>
+              <a:t>54</a:t>
+            </a:r>
+            <a:endParaRPr lang="en-US" sz="1300" dirty="0"/>
+          </a:p>
+        </p:txBody>
+      </p:sp>
+      <p:sp>
+        <p:nvSpPr>
+          <p:cNvPr id="76" name="Text 73"/>
+          <p:cNvSpPr/>
+          <p:nvPr/>
+        </p:nvSpPr>
+        <p:spPr>
+          <a:xfrm>
+            <a:off x="5852160" y="5449824"/>
+            <a:ext cx="822960" cy="365760"/>
+          </a:xfrm>
+          <a:prstGeom prst="rect">
+            <a:avLst/>
+          </a:prstGeom>
+          <a:noFill/>
+          <a:ln/>
+        </p:spPr>
+        <p:txBody>
+          <a:bodyPr wrap="square" lIns="0" tIns="0" rIns="0" bIns="0" rtlCol="0" anchor="ctr"/>
+          <a:lstStyle/>
+          <a:p>
+            <a:pPr algn="r" indent="0" marL="0">
+              <a:buNone/>
+            </a:pPr>
+            <a:r>
+              <a:rPr lang="en-US" sz="1300" b="1" dirty="0">
+                <a:solidFill>
+                  <a:srgbClr val="1A2433"/>
+                </a:solidFill>
+                <a:latin typeface="Calibri" pitchFamily="34" charset="0"/>
+                <a:ea typeface="Calibri" pitchFamily="34" charset="-122"/>
+                <a:cs typeface="Calibri" pitchFamily="34" charset="-120"/>
+              </a:rPr>
+              <a:t>89,2%</a:t>
+            </a:r>
+            <a:endParaRPr lang="en-US" sz="1300" dirty="0"/>
+          </a:p>
+        </p:txBody>
+      </p:sp>
+      <p:sp>
+        <p:nvSpPr>
+          <p:cNvPr id="77" name="Text 74"/>
+          <p:cNvSpPr/>
+          <p:nvPr/>
+        </p:nvSpPr>
+        <p:spPr>
+          <a:xfrm>
+            <a:off x="6766560" y="5449824"/>
+            <a:ext cx="822960" cy="365760"/>
+          </a:xfrm>
+          <a:prstGeom prst="rect">
+            <a:avLst/>
+          </a:prstGeom>
+          <a:noFill/>
+          <a:ln/>
+        </p:spPr>
+        <p:txBody>
+          <a:bodyPr wrap="square" lIns="0" tIns="0" rIns="0" bIns="0" rtlCol="0" anchor="ctr"/>
+          <a:lstStyle/>
+          <a:p>
+            <a:pPr algn="r" indent="0" marL="0">
+              <a:buNone/>
+            </a:pPr>
+            <a:r>
+              <a:rPr lang="en-US" sz="1300" b="1" dirty="0">
+                <a:solidFill>
+                  <a:srgbClr val="1A2433"/>
+                </a:solidFill>
+                <a:latin typeface="Calibri" pitchFamily="34" charset="0"/>
+                <a:ea typeface="Calibri" pitchFamily="34" charset="-122"/>
+                <a:cs typeface="Calibri" pitchFamily="34" charset="-120"/>
+              </a:rPr>
+              <a:t>162</a:t>
+            </a:r>
+            <a:endParaRPr lang="en-US" sz="1300" dirty="0"/>
+          </a:p>
+        </p:txBody>
+      </p:sp>
+      <p:sp>
+        <p:nvSpPr>
+          <p:cNvPr id="78" name="Text 75"/>
+          <p:cNvSpPr/>
+          <p:nvPr/>
+        </p:nvSpPr>
+        <p:spPr>
+          <a:xfrm>
+            <a:off x="7680960" y="5449824"/>
+            <a:ext cx="1005840" cy="365760"/>
+          </a:xfrm>
+          <a:prstGeom prst="rect">
+            <a:avLst/>
+          </a:prstGeom>
+          <a:noFill/>
+          <a:ln/>
+        </p:spPr>
+        <p:txBody>
+          <a:bodyPr wrap="square" lIns="0" tIns="0" rIns="0" bIns="0" rtlCol="0" anchor="ctr"/>
+          <a:lstStyle/>
+          <a:p>
+            <a:pPr algn="r" indent="0" marL="0">
+              <a:buNone/>
+            </a:pPr>
+            <a:r>
+              <a:rPr lang="en-US" sz="1300" b="1" dirty="0">
+                <a:solidFill>
+                  <a:srgbClr val="1A2433"/>
+                </a:solidFill>
+                <a:latin typeface="Calibri" pitchFamily="34" charset="0"/>
+                <a:ea typeface="Calibri" pitchFamily="34" charset="-122"/>
+                <a:cs typeface="Calibri" pitchFamily="34" charset="-120"/>
+              </a:rPr>
+              <a:t>289</a:t>
+            </a:r>
+            <a:endParaRPr lang="en-US" sz="1300" dirty="0"/>
+          </a:p>
+        </p:txBody>
+      </p:sp>
+      <p:sp>
+        <p:nvSpPr>
+          <p:cNvPr id="79" name="Text 76"/>
+          <p:cNvSpPr/>
+          <p:nvPr/>
+        </p:nvSpPr>
+        <p:spPr>
+          <a:xfrm>
+            <a:off x="8778240" y="5449824"/>
+            <a:ext cx="1005840" cy="365760"/>
+          </a:xfrm>
+          <a:prstGeom prst="rect">
+            <a:avLst/>
+          </a:prstGeom>
+          <a:noFill/>
+          <a:ln/>
+        </p:spPr>
+        <p:txBody>
+          <a:bodyPr wrap="square" lIns="0" tIns="0" rIns="0" bIns="0" rtlCol="0" anchor="ctr"/>
+          <a:lstStyle/>
+          <a:p>
+            <a:pPr algn="r" indent="0" marL="0">
+              <a:buNone/>
+            </a:pPr>
+            <a:r>
+              <a:rPr lang="en-US" sz="1300" b="1" dirty="0">
+                <a:solidFill>
+                  <a:srgbClr val="1A2433"/>
+                </a:solidFill>
+                <a:latin typeface="Calibri" pitchFamily="34" charset="0"/>
+                <a:ea typeface="Calibri" pitchFamily="34" charset="-122"/>
+                <a:cs typeface="Calibri" pitchFamily="34" charset="-120"/>
+              </a:rPr>
+              <a:t>48</a:t>
+            </a:r>
+            <a:endParaRPr lang="en-US" sz="1300" dirty="0"/>
+          </a:p>
+        </p:txBody>
+      </p:sp>
+      <p:sp>
+        <p:nvSpPr>
+          <p:cNvPr id="80" name="Text 77"/>
+          <p:cNvSpPr/>
+          <p:nvPr/>
+        </p:nvSpPr>
+        <p:spPr>
+          <a:xfrm>
+            <a:off x="9875520" y="5449824"/>
             <a:ext cx="914400" cy="365760"/>
           </a:xfrm>
           <a:prstGeom prst="rect">
@@ -24202,7 +24592,7 @@
                 <a:ea typeface="Calibri" pitchFamily="34" charset="-122"/>
                 <a:cs typeface="Calibri" pitchFamily="34" charset="-120"/>
               </a:rPr>
-              <a:t>54</a:t>
+              <a:t>10.783</a:t>
             </a:r>
             <a:endParaRPr lang="en-US" sz="1300" dirty="0"/>
           </a:p>
@@ -24210,163 +24600,7 @@
       </p:sp>
       <p:sp>
         <p:nvSpPr>
-          <p:cNvPr id="71" name="Text 68"/>
-          <p:cNvSpPr/>
-          <p:nvPr/>
-        </p:nvSpPr>
-        <p:spPr>
-          <a:xfrm>
-            <a:off x="6629400" y="5449824"/>
-            <a:ext cx="914400" cy="365760"/>
-          </a:xfrm>
-          <a:prstGeom prst="rect">
-            <a:avLst/>
-          </a:prstGeom>
-          <a:noFill/>
-          <a:ln/>
-        </p:spPr>
-        <p:txBody>
-          <a:bodyPr wrap="square" lIns="0" tIns="0" rIns="0" bIns="0" rtlCol="0" anchor="ctr"/>
-          <a:lstStyle/>
-          <a:p>
-            <a:pPr algn="r" indent="0" marL="0">
-              <a:buNone/>
-            </a:pPr>
-            <a:r>
-              <a:rPr lang="en-US" sz="1300" b="1" dirty="0">
-                <a:solidFill>
-                  <a:srgbClr val="1A2433"/>
-                </a:solidFill>
-                <a:latin typeface="Calibri" pitchFamily="34" charset="0"/>
-                <a:ea typeface="Calibri" pitchFamily="34" charset="-122"/>
-                <a:cs typeface="Calibri" pitchFamily="34" charset="-120"/>
-              </a:rPr>
-              <a:t>89,2%</a:t>
-            </a:r>
-            <a:endParaRPr lang="en-US" sz="1300" dirty="0"/>
-          </a:p>
-        </p:txBody>
-      </p:sp>
-      <p:sp>
-        <p:nvSpPr>
-          <p:cNvPr id="72" name="Text 69"/>
-          <p:cNvSpPr/>
-          <p:nvPr/>
-        </p:nvSpPr>
-        <p:spPr>
-          <a:xfrm>
-            <a:off x="7635240" y="5449824"/>
-            <a:ext cx="914400" cy="365760"/>
-          </a:xfrm>
-          <a:prstGeom prst="rect">
-            <a:avLst/>
-          </a:prstGeom>
-          <a:noFill/>
-          <a:ln/>
-        </p:spPr>
-        <p:txBody>
-          <a:bodyPr wrap="square" lIns="0" tIns="0" rIns="0" bIns="0" rtlCol="0" anchor="ctr"/>
-          <a:lstStyle/>
-          <a:p>
-            <a:pPr algn="r" indent="0" marL="0">
-              <a:buNone/>
-            </a:pPr>
-            <a:r>
-              <a:rPr lang="en-US" sz="1300" b="1" dirty="0">
-                <a:solidFill>
-                  <a:srgbClr val="1A2433"/>
-                </a:solidFill>
-                <a:latin typeface="Calibri" pitchFamily="34" charset="0"/>
-                <a:ea typeface="Calibri" pitchFamily="34" charset="-122"/>
-                <a:cs typeface="Calibri" pitchFamily="34" charset="-120"/>
-              </a:rPr>
-              <a:t>162</a:t>
-            </a:r>
-            <a:endParaRPr lang="en-US" sz="1300" dirty="0"/>
-          </a:p>
-        </p:txBody>
-      </p:sp>
-      <p:sp>
-        <p:nvSpPr>
-          <p:cNvPr id="73" name="Text 70"/>
-          <p:cNvSpPr/>
-          <p:nvPr/>
-        </p:nvSpPr>
-        <p:spPr>
-          <a:xfrm>
-            <a:off x="8641080" y="5449824"/>
-            <a:ext cx="914400" cy="365760"/>
-          </a:xfrm>
-          <a:prstGeom prst="rect">
-            <a:avLst/>
-          </a:prstGeom>
-          <a:noFill/>
-          <a:ln/>
-        </p:spPr>
-        <p:txBody>
-          <a:bodyPr wrap="square" lIns="0" tIns="0" rIns="0" bIns="0" rtlCol="0" anchor="ctr"/>
-          <a:lstStyle/>
-          <a:p>
-            <a:pPr algn="r" indent="0" marL="0">
-              <a:buNone/>
-            </a:pPr>
-            <a:r>
-              <a:rPr lang="en-US" sz="1300" b="1" dirty="0">
-                <a:solidFill>
-                  <a:srgbClr val="1A2433"/>
-                </a:solidFill>
-                <a:latin typeface="Calibri" pitchFamily="34" charset="0"/>
-                <a:ea typeface="Calibri" pitchFamily="34" charset="-122"/>
-                <a:cs typeface="Calibri" pitchFamily="34" charset="-120"/>
-              </a:rPr>
-              <a:t>337</a:t>
-            </a:r>
-            <a:endParaRPr lang="en-US" sz="1300" dirty="0"/>
-          </a:p>
-        </p:txBody>
-      </p:sp>
-      <p:sp>
-        <p:nvSpPr>
-          <p:cNvPr id="74" name="Text 71"/>
-          <p:cNvSpPr/>
-          <p:nvPr/>
-        </p:nvSpPr>
-        <p:spPr>
-          <a:xfrm>
-            <a:off x="9646920" y="5449824"/>
-            <a:ext cx="1097280" cy="365760"/>
-          </a:xfrm>
-          <a:prstGeom prst="rect">
-            <a:avLst/>
-          </a:prstGeom>
-          <a:noFill/>
-          <a:ln/>
-        </p:spPr>
-        <p:txBody>
-          <a:bodyPr wrap="square" lIns="0" tIns="0" rIns="0" bIns="0" rtlCol="0" anchor="ctr"/>
-          <a:lstStyle/>
-          <a:p>
-            <a:pPr algn="r" indent="0" marL="0">
-              <a:buNone/>
-            </a:pPr>
-            <a:r>
-              <a:rPr lang="en-US" sz="1300" b="1" dirty="0">
-                <a:solidFill>
-                  <a:srgbClr val="1A2433"/>
-                </a:solidFill>
-                <a:latin typeface="Calibri" pitchFamily="34" charset="0"/>
-                <a:ea typeface="Calibri" pitchFamily="34" charset="-122"/>
-                <a:cs typeface="Calibri" pitchFamily="34" charset="-120"/>
-              </a:rPr>
-              <a:t>10.783</a:t>
-            </a:r>
-            <a:endParaRPr lang="en-US" sz="1300" dirty="0"/>
-          </a:p>
-        </p:txBody>
-      </p:sp>
-      <p:sp>
-        <p:nvSpPr>
-          <p:cNvPr id="75" name="Text 72"/>
+          <p:cNvPr id="81" name="Text 78"/>
           <p:cNvSpPr/>
           <p:nvPr/>
         </p:nvSpPr>
@@ -24405,7 +24639,7 @@
       </p:sp>
       <p:sp>
         <p:nvSpPr>
-          <p:cNvPr id="76" name="Text 73"/>
+          <p:cNvPr id="82" name="Text 79"/>
           <p:cNvSpPr/>
           <p:nvPr/>
         </p:nvSpPr>
@@ -24444,7 +24678,7 @@
       </p:sp>
       <p:sp>
         <p:nvSpPr>
-          <p:cNvPr id="77" name="Text 74"/>
+          <p:cNvPr id="83" name="Text 80"/>
           <p:cNvSpPr/>
           <p:nvPr/>
         </p:nvSpPr>
@@ -24483,7 +24717,7 @@
       </p:sp>
       <p:sp>
         <p:nvSpPr>
-          <p:cNvPr id="78" name="Text 75"/>
+          <p:cNvPr id="84" name="Text 81"/>
           <p:cNvSpPr/>
           <p:nvPr/>
         </p:nvSpPr>
@@ -24687,7 +24921,7 @@
                 <a:ea typeface="Calibri" pitchFamily="34" charset="-122"/>
                 <a:cs typeface="Calibri" pitchFamily="34" charset="-120"/>
               </a:rPr>
-              <a:t>Entre el 28-07-2026 y el 03-08-2026 se levantó 1 hallazgo: 0 internos y 1 externo. Sigue abierto.</a:t>
+              <a:t>Entre el 28-07-2026 y el 03-08-2026 se levantó 1 hallazgo: 0 internas · 1 del cliente. Sigue abierto.</a:t>
             </a:r>
             <a:endParaRPr lang="en-US" sz="1350" dirty="0"/>
           </a:p>
@@ -29519,7 +29753,7 @@
                 <a:ea typeface="Calibri" pitchFamily="34" charset="-122"/>
                 <a:cs typeface="Calibri" pitchFamily="34" charset="-120"/>
               </a:rPr>
-              <a:t>95 hallazgos levantados · 56 internos y 38 externos · 18 especialidades involucradas.</a:t>
+              <a:t>95 hallazgos levantados · 56 internas · 30 del cliente · 8 de subcontrato · 18 especialidades involucradas.</a:t>
             </a:r>
             <a:endParaRPr lang="en-US" sz="1350" dirty="0"/>
           </a:p>
@@ -30312,7 +30546,7 @@
                 <a:ea typeface="Calibri" pitchFamily="34" charset="-122"/>
                 <a:cs typeface="Calibri" pitchFamily="34" charset="-120"/>
               </a:rPr>
-              <a:t>56 internos · 38 externos</a:t>
+              <a:t>56 internas · 30 del cliente · 8 de subcontrato</a:t>
             </a:r>
             <a:endParaRPr lang="en-US" sz="950" dirty="0"/>
           </a:p>

--- a/modulo_nc/Panel_No_Conformidades.pptx
+++ b/modulo_nc/Panel_No_Conformidades.pptx
@@ -148,7 +148,7 @@
                 </a:solidFill>
                 <a:latin typeface="Calibri"/>
               </a:rPr>
-              <a:t>Hallazgos levantados en cada una de las últimas 8 semanas</a:t>
+              <a:t>Ritmo semanal — la barra «3 sem.» acumula las semanas más viejas</a:t>
             </a:r>
           </a:p>
         </c:rich>
@@ -211,32 +211,26 @@
           </c:dLbls>
           <c:cat>
             <c:multiLvlStrRef>
-              <c:f>Sheet1!$A$2:$A$9</c:f>
+              <c:f>Sheet1!$A$2:$A$7</c:f>
               <c:multiLvlStrCache>
-                <c:ptCount val="8"/>
+                <c:ptCount val="6"/>
                 <c:lvl>
                   <c:pt idx="0">
-                    <c:v>09-06</c:v>
+                    <c:v>3 sem.</c:v>
                   </c:pt>
                   <c:pt idx="1">
-                    <c:v>16-06</c:v>
+                    <c:v>30-06</c:v>
                   </c:pt>
                   <c:pt idx="2">
-                    <c:v>23-06</c:v>
+                    <c:v>07-07</c:v>
                   </c:pt>
                   <c:pt idx="3">
-                    <c:v>30-06</c:v>
+                    <c:v>14-07</c:v>
                   </c:pt>
                   <c:pt idx="4">
-                    <c:v>07-07</c:v>
+                    <c:v>21-07</c:v>
                   </c:pt>
                   <c:pt idx="5">
-                    <c:v>14-07</c:v>
-                  </c:pt>
-                  <c:pt idx="6">
-                    <c:v>21-07</c:v>
-                  </c:pt>
-                  <c:pt idx="7">
                     <c:v>28-07</c:v>
                   </c:pt>
                 </c:lvl>
@@ -245,32 +239,26 @@
           </c:cat>
           <c:val>
             <c:numRef>
-              <c:f>Sheet1!$B$2:$B$9</c:f>
+              <c:f>Sheet1!$B$2:$B$7</c:f>
               <c:numCache>
                 <c:formatCode>General</c:formatCode>
-                <c:ptCount val="8"/>
+                <c:ptCount val="6"/>
                 <c:pt idx="0">
                   <c:v>3</c:v>
                 </c:pt>
                 <c:pt idx="1">
+                  <c:v>2</c:v>
+                </c:pt>
+                <c:pt idx="2">
+                  <c:v>1</c:v>
+                </c:pt>
+                <c:pt idx="3">
                   <c:v/>
                 </c:pt>
-                <c:pt idx="2">
-                  <c:v/>
-                </c:pt>
-                <c:pt idx="3">
-                  <c:v>2</c:v>
-                </c:pt>
                 <c:pt idx="4">
-                  <c:v>1</c:v>
+                  <c:v>4</c:v>
                 </c:pt>
                 <c:pt idx="5">
-                  <c:v/>
-                </c:pt>
-                <c:pt idx="6">
-                  <c:v>4</c:v>
-                </c:pt>
-                <c:pt idx="7">
                   <c:v>1</c:v>
                 </c:pt>
               </c:numCache>
@@ -325,32 +313,26 @@
           </c:dLbls>
           <c:cat>
             <c:multiLvlStrRef>
-              <c:f>Sheet1!$A$2:$A$9</c:f>
+              <c:f>Sheet1!$A$2:$A$7</c:f>
               <c:multiLvlStrCache>
-                <c:ptCount val="8"/>
+                <c:ptCount val="6"/>
                 <c:lvl>
                   <c:pt idx="0">
-                    <c:v>09-06</c:v>
+                    <c:v>3 sem.</c:v>
                   </c:pt>
                   <c:pt idx="1">
-                    <c:v>16-06</c:v>
+                    <c:v>30-06</c:v>
                   </c:pt>
                   <c:pt idx="2">
-                    <c:v>23-06</c:v>
+                    <c:v>07-07</c:v>
                   </c:pt>
                   <c:pt idx="3">
-                    <c:v>30-06</c:v>
+                    <c:v>14-07</c:v>
                   </c:pt>
                   <c:pt idx="4">
-                    <c:v>07-07</c:v>
+                    <c:v>21-07</c:v>
                   </c:pt>
                   <c:pt idx="5">
-                    <c:v>14-07</c:v>
-                  </c:pt>
-                  <c:pt idx="6">
-                    <c:v>21-07</c:v>
-                  </c:pt>
-                  <c:pt idx="7">
                     <c:v>28-07</c:v>
                   </c:pt>
                 </c:lvl>
@@ -359,32 +341,26 @@
           </c:cat>
           <c:val>
             <c:numRef>
-              <c:f>Sheet1!$C$2:$C$9</c:f>
+              <c:f>Sheet1!$C$2:$C$7</c:f>
               <c:numCache>
                 <c:formatCode>General</c:formatCode>
-                <c:ptCount val="8"/>
+                <c:ptCount val="6"/>
                 <c:pt idx="0">
+                  <c:v>4</c:v>
+                </c:pt>
+                <c:pt idx="1">
                   <c:v>2</c:v>
                 </c:pt>
-                <c:pt idx="1">
+                <c:pt idx="2">
                   <c:v/>
                 </c:pt>
-                <c:pt idx="2">
-                  <c:v>2</c:v>
-                </c:pt>
                 <c:pt idx="3">
-                  <c:v>2</c:v>
+                  <c:v/>
                 </c:pt>
                 <c:pt idx="4">
-                  <c:v/>
+                  <c:v>1</c:v>
                 </c:pt>
                 <c:pt idx="5">
-                  <c:v/>
-                </c:pt>
-                <c:pt idx="6">
-                  <c:v>1</c:v>
-                </c:pt>
-                <c:pt idx="7">
                   <c:v/>
                 </c:pt>
               </c:numCache>

--- a/modulo_nc/Panel_No_Conformidades.pptx
+++ b/modulo_nc/Panel_No_Conformidades.pptx
@@ -26377,7 +26377,7 @@
         </p:nvGraphicFramePr>
         <p:xfrm>
           <a:off x="457200" y="1828800"/>
-          <a:ext cx="6035040" cy="4023360"/>
+          <a:ext cx="6035040" cy="2240280"/>
         </p:xfrm>
         <a:graphic xmlns:a="http://schemas.openxmlformats.org/drawingml/2006/main">
           <a:graphicData uri="http://schemas.openxmlformats.org/drawingml/2006/chart">
@@ -26385,9 +26385,1396 @@
           </a:graphicData>
         </a:graphic>
       </p:graphicFrame>
+      <p:sp>
+        <p:nvSpPr>
+          <p:cNvPr id="7" name="Text 3"/>
+          <p:cNvSpPr/>
+          <p:nvPr/>
+        </p:nvSpPr>
+        <p:spPr>
+          <a:xfrm>
+            <a:off x="502920" y="4160520"/>
+            <a:ext cx="5486400" cy="274320"/>
+          </a:xfrm>
+          <a:prstGeom prst="rect">
+            <a:avLst/>
+          </a:prstGeom>
+          <a:noFill/>
+          <a:ln/>
+        </p:spPr>
+        <p:txBody>
+          <a:bodyPr wrap="square" lIns="0" tIns="0" rIns="0" bIns="0" rtlCol="0" anchor="ctr"/>
+          <a:lstStyle/>
+          <a:p>
+            <a:pPr indent="0" marL="0">
+              <a:buNone/>
+            </a:pPr>
+            <a:r>
+              <a:rPr lang="en-US" sz="1100" b="1" spc="150" kern="0" dirty="0">
+                <a:solidFill>
+                  <a:srgbClr val="C87A32"/>
+                </a:solidFill>
+                <a:latin typeface="Calibri" pitchFamily="34" charset="0"/>
+                <a:ea typeface="Calibri" pitchFamily="34" charset="-122"/>
+                <a:cs typeface="Calibri" pitchFamily="34" charset="-120"/>
+              </a:rPr>
+              <a:t>ESTADO DE CADA VÍA</a:t>
+            </a:r>
+            <a:endParaRPr lang="en-US" sz="1100" dirty="0"/>
+          </a:p>
+        </p:txBody>
+      </p:sp>
+      <p:sp>
+        <p:nvSpPr>
+          <p:cNvPr id="8" name="Text 4"/>
+          <p:cNvSpPr/>
+          <p:nvPr/>
+        </p:nvSpPr>
+        <p:spPr>
+          <a:xfrm>
+            <a:off x="502920" y="4462272"/>
+            <a:ext cx="1783080" cy="274320"/>
+          </a:xfrm>
+          <a:prstGeom prst="rect">
+            <a:avLst/>
+          </a:prstGeom>
+          <a:noFill/>
+          <a:ln/>
+        </p:spPr>
+        <p:txBody>
+          <a:bodyPr wrap="square" lIns="0" tIns="0" rIns="0" bIns="0" rtlCol="0" anchor="ctr"/>
+          <a:lstStyle/>
+          <a:p>
+            <a:pPr algn="l" indent="0" marL="0">
+              <a:buNone/>
+            </a:pPr>
+            <a:r>
+              <a:rPr lang="en-US" sz="950" b="1" spc="50" kern="0" dirty="0">
+                <a:solidFill>
+                  <a:srgbClr val="56606E"/>
+                </a:solidFill>
+                <a:latin typeface="Calibri" pitchFamily="34" charset="0"/>
+                <a:ea typeface="Calibri" pitchFamily="34" charset="-122"/>
+                <a:cs typeface="Calibri" pitchFamily="34" charset="-120"/>
+              </a:rPr>
+              <a:t>VÍA DE EMISIÓN</a:t>
+            </a:r>
+            <a:endParaRPr lang="en-US" sz="950" dirty="0"/>
+          </a:p>
+        </p:txBody>
+      </p:sp>
+      <p:sp>
+        <p:nvSpPr>
+          <p:cNvPr id="9" name="Text 5"/>
+          <p:cNvSpPr/>
+          <p:nvPr/>
+        </p:nvSpPr>
+        <p:spPr>
+          <a:xfrm>
+            <a:off x="2377440" y="4462272"/>
+            <a:ext cx="960120" cy="274320"/>
+          </a:xfrm>
+          <a:prstGeom prst="rect">
+            <a:avLst/>
+          </a:prstGeom>
+          <a:noFill/>
+          <a:ln/>
+        </p:spPr>
+        <p:txBody>
+          <a:bodyPr wrap="square" lIns="0" tIns="0" rIns="0" bIns="0" rtlCol="0" anchor="ctr"/>
+          <a:lstStyle/>
+          <a:p>
+            <a:pPr algn="r" indent="0" marL="0">
+              <a:buNone/>
+            </a:pPr>
+            <a:r>
+              <a:rPr lang="en-US" sz="950" b="1" spc="50" kern="0" dirty="0">
+                <a:solidFill>
+                  <a:srgbClr val="56606E"/>
+                </a:solidFill>
+                <a:latin typeface="Calibri" pitchFamily="34" charset="0"/>
+                <a:ea typeface="Calibri" pitchFamily="34" charset="-122"/>
+                <a:cs typeface="Calibri" pitchFamily="34" charset="-120"/>
+              </a:rPr>
+              <a:t>LEVANTADAS</a:t>
+            </a:r>
+            <a:endParaRPr lang="en-US" sz="950" dirty="0"/>
+          </a:p>
+        </p:txBody>
+      </p:sp>
+      <p:sp>
+        <p:nvSpPr>
+          <p:cNvPr id="10" name="Text 6"/>
+          <p:cNvSpPr/>
+          <p:nvPr/>
+        </p:nvSpPr>
+        <p:spPr>
+          <a:xfrm>
+            <a:off x="3429000" y="4462272"/>
+            <a:ext cx="914400" cy="274320"/>
+          </a:xfrm>
+          <a:prstGeom prst="rect">
+            <a:avLst/>
+          </a:prstGeom>
+          <a:noFill/>
+          <a:ln/>
+        </p:spPr>
+        <p:txBody>
+          <a:bodyPr wrap="square" lIns="0" tIns="0" rIns="0" bIns="0" rtlCol="0" anchor="ctr"/>
+          <a:lstStyle/>
+          <a:p>
+            <a:pPr algn="r" indent="0" marL="0">
+              <a:buNone/>
+            </a:pPr>
+            <a:r>
+              <a:rPr lang="en-US" sz="950" b="1" spc="50" kern="0" dirty="0">
+                <a:solidFill>
+                  <a:srgbClr val="56606E"/>
+                </a:solidFill>
+                <a:latin typeface="Calibri" pitchFamily="34" charset="0"/>
+                <a:ea typeface="Calibri" pitchFamily="34" charset="-122"/>
+                <a:cs typeface="Calibri" pitchFamily="34" charset="-120"/>
+              </a:rPr>
+              <a:t>CERRADAS</a:t>
+            </a:r>
+            <a:endParaRPr lang="en-US" sz="950" dirty="0"/>
+          </a:p>
+        </p:txBody>
+      </p:sp>
+      <p:sp>
+        <p:nvSpPr>
+          <p:cNvPr id="11" name="Text 7"/>
+          <p:cNvSpPr/>
+          <p:nvPr/>
+        </p:nvSpPr>
+        <p:spPr>
+          <a:xfrm>
+            <a:off x="4434840" y="4462272"/>
+            <a:ext cx="868680" cy="274320"/>
+          </a:xfrm>
+          <a:prstGeom prst="rect">
+            <a:avLst/>
+          </a:prstGeom>
+          <a:noFill/>
+          <a:ln/>
+        </p:spPr>
+        <p:txBody>
+          <a:bodyPr wrap="square" lIns="0" tIns="0" rIns="0" bIns="0" rtlCol="0" anchor="ctr"/>
+          <a:lstStyle/>
+          <a:p>
+            <a:pPr algn="r" indent="0" marL="0">
+              <a:buNone/>
+            </a:pPr>
+            <a:r>
+              <a:rPr lang="en-US" sz="950" b="1" spc="50" kern="0" dirty="0">
+                <a:solidFill>
+                  <a:srgbClr val="56606E"/>
+                </a:solidFill>
+                <a:latin typeface="Calibri" pitchFamily="34" charset="0"/>
+                <a:ea typeface="Calibri" pitchFamily="34" charset="-122"/>
+                <a:cs typeface="Calibri" pitchFamily="34" charset="-120"/>
+              </a:rPr>
+              <a:t>ABIERTAS</a:t>
+            </a:r>
+            <a:endParaRPr lang="en-US" sz="950" dirty="0"/>
+          </a:p>
+        </p:txBody>
+      </p:sp>
+      <p:sp>
+        <p:nvSpPr>
+          <p:cNvPr id="12" name="Text 8"/>
+          <p:cNvSpPr/>
+          <p:nvPr/>
+        </p:nvSpPr>
+        <p:spPr>
+          <a:xfrm>
+            <a:off x="5394960" y="4462272"/>
+            <a:ext cx="1051560" cy="274320"/>
+          </a:xfrm>
+          <a:prstGeom prst="rect">
+            <a:avLst/>
+          </a:prstGeom>
+          <a:noFill/>
+          <a:ln/>
+        </p:spPr>
+        <p:txBody>
+          <a:bodyPr wrap="square" lIns="0" tIns="0" rIns="0" bIns="0" rtlCol="0" anchor="ctr"/>
+          <a:lstStyle/>
+          <a:p>
+            <a:pPr algn="r" indent="0" marL="0">
+              <a:buNone/>
+            </a:pPr>
+            <a:r>
+              <a:rPr lang="en-US" sz="950" b="1" spc="50" kern="0" dirty="0">
+                <a:solidFill>
+                  <a:srgbClr val="56606E"/>
+                </a:solidFill>
+                <a:latin typeface="Calibri" pitchFamily="34" charset="0"/>
+                <a:ea typeface="Calibri" pitchFamily="34" charset="-122"/>
+                <a:cs typeface="Calibri" pitchFamily="34" charset="-120"/>
+              </a:rPr>
+              <a:t>ANTIG. MEDIANA</a:t>
+            </a:r>
+            <a:endParaRPr lang="en-US" sz="950" dirty="0"/>
+          </a:p>
+        </p:txBody>
+      </p:sp>
+      <p:sp>
+        <p:nvSpPr>
+          <p:cNvPr id="13" name="Shape 9"/>
+          <p:cNvSpPr/>
+          <p:nvPr/>
+        </p:nvSpPr>
+        <p:spPr>
+          <a:xfrm>
+            <a:off x="502920" y="4773168"/>
+            <a:ext cx="5943600" cy="0"/>
+          </a:xfrm>
+          <a:prstGeom prst="line">
+            <a:avLst/>
+          </a:prstGeom>
+          <a:noFill/>
+          <a:ln w="12700">
+            <a:solidFill>
+              <a:srgbClr val="6E8CA8"/>
+            </a:solidFill>
+            <a:prstDash val="solid"/>
+          </a:ln>
+        </p:spPr>
+      </p:sp>
+      <p:sp>
+        <p:nvSpPr>
+          <p:cNvPr id="14" name="Text 10"/>
+          <p:cNvSpPr/>
+          <p:nvPr/>
+        </p:nvSpPr>
+        <p:spPr>
+          <a:xfrm>
+            <a:off x="502920" y="4901184"/>
+            <a:ext cx="1783080" cy="192024"/>
+          </a:xfrm>
+          <a:prstGeom prst="rect">
+            <a:avLst/>
+          </a:prstGeom>
+          <a:noFill/>
+          <a:ln/>
+        </p:spPr>
+        <p:txBody>
+          <a:bodyPr wrap="square" lIns="0" tIns="0" rIns="0" bIns="0" rtlCol="0" anchor="ctr"/>
+          <a:lstStyle/>
+          <a:p>
+            <a:pPr algn="l" indent="0" marL="0">
+              <a:buNone/>
+            </a:pPr>
+            <a:r>
+              <a:rPr lang="en-US" sz="1100" dirty="0">
+                <a:solidFill>
+                  <a:srgbClr val="2E6FB5"/>
+                </a:solidFill>
+                <a:latin typeface="Calibri" pitchFamily="34" charset="0"/>
+                <a:ea typeface="Calibri" pitchFamily="34" charset="-122"/>
+                <a:cs typeface="Calibri" pitchFamily="34" charset="-120"/>
+              </a:rPr>
+              <a:t>Interna (Besalco)</a:t>
+            </a:r>
+            <a:endParaRPr lang="en-US" sz="1100" dirty="0"/>
+          </a:p>
+        </p:txBody>
+      </p:sp>
+      <p:sp>
+        <p:nvSpPr>
+          <p:cNvPr id="15" name="Text 11"/>
+          <p:cNvSpPr/>
+          <p:nvPr/>
+        </p:nvSpPr>
+        <p:spPr>
+          <a:xfrm>
+            <a:off x="2377440" y="4901184"/>
+            <a:ext cx="960120" cy="192024"/>
+          </a:xfrm>
+          <a:prstGeom prst="rect">
+            <a:avLst/>
+          </a:prstGeom>
+          <a:noFill/>
+          <a:ln/>
+        </p:spPr>
+        <p:txBody>
+          <a:bodyPr wrap="square" lIns="0" tIns="0" rIns="0" bIns="0" rtlCol="0" anchor="ctr"/>
+          <a:lstStyle/>
+          <a:p>
+            <a:pPr algn="r" indent="0" marL="0">
+              <a:buNone/>
+            </a:pPr>
+            <a:r>
+              <a:rPr lang="en-US" sz="1100" dirty="0">
+                <a:solidFill>
+                  <a:srgbClr val="1A2433"/>
+                </a:solidFill>
+                <a:latin typeface="Calibri" pitchFamily="34" charset="0"/>
+                <a:ea typeface="Calibri" pitchFamily="34" charset="-122"/>
+                <a:cs typeface="Calibri" pitchFamily="34" charset="-120"/>
+              </a:rPr>
+              <a:t>162</a:t>
+            </a:r>
+            <a:endParaRPr lang="en-US" sz="1100" dirty="0"/>
+          </a:p>
+        </p:txBody>
+      </p:sp>
+      <p:sp>
+        <p:nvSpPr>
+          <p:cNvPr id="16" name="Text 12"/>
+          <p:cNvSpPr/>
+          <p:nvPr/>
+        </p:nvSpPr>
+        <p:spPr>
+          <a:xfrm>
+            <a:off x="3429000" y="4901184"/>
+            <a:ext cx="914400" cy="192024"/>
+          </a:xfrm>
+          <a:prstGeom prst="rect">
+            <a:avLst/>
+          </a:prstGeom>
+          <a:noFill/>
+          <a:ln/>
+        </p:spPr>
+        <p:txBody>
+          <a:bodyPr wrap="square" lIns="0" tIns="0" rIns="0" bIns="0" rtlCol="0" anchor="ctr"/>
+          <a:lstStyle/>
+          <a:p>
+            <a:pPr algn="r" indent="0" marL="0">
+              <a:buNone/>
+            </a:pPr>
+            <a:r>
+              <a:rPr lang="en-US" sz="1100" dirty="0">
+                <a:solidFill>
+                  <a:srgbClr val="1A2433"/>
+                </a:solidFill>
+                <a:latin typeface="Calibri" pitchFamily="34" charset="0"/>
+                <a:ea typeface="Calibri" pitchFamily="34" charset="-122"/>
+                <a:cs typeface="Calibri" pitchFamily="34" charset="-120"/>
+              </a:rPr>
+              <a:t>157</a:t>
+            </a:r>
+            <a:endParaRPr lang="en-US" sz="1100" dirty="0"/>
+          </a:p>
+        </p:txBody>
+      </p:sp>
+      <p:sp>
+        <p:nvSpPr>
+          <p:cNvPr id="17" name="Text 13"/>
+          <p:cNvSpPr/>
+          <p:nvPr/>
+        </p:nvSpPr>
+        <p:spPr>
+          <a:xfrm>
+            <a:off x="4434840" y="4901184"/>
+            <a:ext cx="868680" cy="192024"/>
+          </a:xfrm>
+          <a:prstGeom prst="rect">
+            <a:avLst/>
+          </a:prstGeom>
+          <a:noFill/>
+          <a:ln/>
+        </p:spPr>
+        <p:txBody>
+          <a:bodyPr wrap="square" lIns="0" tIns="0" rIns="0" bIns="0" rtlCol="0" anchor="ctr"/>
+          <a:lstStyle/>
+          <a:p>
+            <a:pPr algn="r" indent="0" marL="0">
+              <a:buNone/>
+            </a:pPr>
+            <a:r>
+              <a:rPr lang="en-US" sz="1100" dirty="0">
+                <a:solidFill>
+                  <a:srgbClr val="C0392B"/>
+                </a:solidFill>
+                <a:latin typeface="Calibri" pitchFamily="34" charset="0"/>
+                <a:ea typeface="Calibri" pitchFamily="34" charset="-122"/>
+                <a:cs typeface="Calibri" pitchFamily="34" charset="-120"/>
+              </a:rPr>
+              <a:t>5</a:t>
+            </a:r>
+            <a:endParaRPr lang="en-US" sz="1100" dirty="0"/>
+          </a:p>
+        </p:txBody>
+      </p:sp>
+      <p:sp>
+        <p:nvSpPr>
+          <p:cNvPr id="18" name="Text 14"/>
+          <p:cNvSpPr/>
+          <p:nvPr/>
+        </p:nvSpPr>
+        <p:spPr>
+          <a:xfrm>
+            <a:off x="5394960" y="4901184"/>
+            <a:ext cx="1051560" cy="192024"/>
+          </a:xfrm>
+          <a:prstGeom prst="rect">
+            <a:avLst/>
+          </a:prstGeom>
+          <a:noFill/>
+          <a:ln/>
+        </p:spPr>
+        <p:txBody>
+          <a:bodyPr wrap="square" lIns="0" tIns="0" rIns="0" bIns="0" rtlCol="0" anchor="ctr"/>
+          <a:lstStyle/>
+          <a:p>
+            <a:pPr algn="r" indent="0" marL="0">
+              <a:buNone/>
+            </a:pPr>
+            <a:r>
+              <a:rPr lang="en-US" sz="1100" dirty="0">
+                <a:solidFill>
+                  <a:srgbClr val="1A2433"/>
+                </a:solidFill>
+                <a:latin typeface="Calibri" pitchFamily="34" charset="0"/>
+                <a:ea typeface="Calibri" pitchFamily="34" charset="-122"/>
+                <a:cs typeface="Calibri" pitchFamily="34" charset="-120"/>
+              </a:rPr>
+              <a:t>224 d</a:t>
+            </a:r>
+            <a:endParaRPr lang="en-US" sz="1100" dirty="0"/>
+          </a:p>
+        </p:txBody>
+      </p:sp>
+      <p:sp>
+        <p:nvSpPr>
+          <p:cNvPr id="19" name="Shape 15"/>
+          <p:cNvSpPr/>
+          <p:nvPr/>
+        </p:nvSpPr>
+        <p:spPr>
+          <a:xfrm>
+            <a:off x="502920" y="5129784"/>
+            <a:ext cx="5943600" cy="0"/>
+          </a:xfrm>
+          <a:prstGeom prst="line">
+            <a:avLst/>
+          </a:prstGeom>
+          <a:noFill/>
+          <a:ln w="9525">
+            <a:solidFill>
+              <a:srgbClr val="D9DFE6"/>
+            </a:solidFill>
+            <a:prstDash val="solid"/>
+          </a:ln>
+        </p:spPr>
+      </p:sp>
+      <p:sp>
+        <p:nvSpPr>
+          <p:cNvPr id="20" name="Shape 16"/>
+          <p:cNvSpPr/>
+          <p:nvPr/>
+        </p:nvSpPr>
+        <p:spPr>
+          <a:xfrm>
+            <a:off x="457200" y="5138928"/>
+            <a:ext cx="5989320" cy="283464"/>
+          </a:xfrm>
+          <a:prstGeom prst="rect">
+            <a:avLst/>
+          </a:prstGeom>
+          <a:solidFill>
+            <a:srgbClr val="FFFFFF"/>
+          </a:solidFill>
+          <a:ln/>
+        </p:spPr>
+      </p:sp>
+      <p:sp>
+        <p:nvSpPr>
+          <p:cNvPr id="21" name="Text 17"/>
+          <p:cNvSpPr/>
+          <p:nvPr/>
+        </p:nvSpPr>
+        <p:spPr>
+          <a:xfrm>
+            <a:off x="502920" y="5184648"/>
+            <a:ext cx="1783080" cy="192024"/>
+          </a:xfrm>
+          <a:prstGeom prst="rect">
+            <a:avLst/>
+          </a:prstGeom>
+          <a:noFill/>
+          <a:ln/>
+        </p:spPr>
+        <p:txBody>
+          <a:bodyPr wrap="square" lIns="0" tIns="0" rIns="0" bIns="0" rtlCol="0" anchor="ctr"/>
+          <a:lstStyle/>
+          <a:p>
+            <a:pPr algn="l" indent="0" marL="0">
+              <a:buNone/>
+            </a:pPr>
+            <a:r>
+              <a:rPr lang="en-US" sz="1100" dirty="0">
+                <a:solidFill>
+                  <a:srgbClr val="9A6B0F"/>
+                </a:solidFill>
+                <a:latin typeface="Calibri" pitchFamily="34" charset="0"/>
+                <a:ea typeface="Calibri" pitchFamily="34" charset="-122"/>
+                <a:cs typeface="Calibri" pitchFamily="34" charset="-120"/>
+              </a:rPr>
+              <a:t>Externa · Cliente</a:t>
+            </a:r>
+            <a:endParaRPr lang="en-US" sz="1100" dirty="0"/>
+          </a:p>
+        </p:txBody>
+      </p:sp>
+      <p:sp>
+        <p:nvSpPr>
+          <p:cNvPr id="22" name="Text 18"/>
+          <p:cNvSpPr/>
+          <p:nvPr/>
+        </p:nvSpPr>
+        <p:spPr>
+          <a:xfrm>
+            <a:off x="2377440" y="5184648"/>
+            <a:ext cx="960120" cy="192024"/>
+          </a:xfrm>
+          <a:prstGeom prst="rect">
+            <a:avLst/>
+          </a:prstGeom>
+          <a:noFill/>
+          <a:ln/>
+        </p:spPr>
+        <p:txBody>
+          <a:bodyPr wrap="square" lIns="0" tIns="0" rIns="0" bIns="0" rtlCol="0" anchor="ctr"/>
+          <a:lstStyle/>
+          <a:p>
+            <a:pPr algn="r" indent="0" marL="0">
+              <a:buNone/>
+            </a:pPr>
+            <a:r>
+              <a:rPr lang="en-US" sz="1100" dirty="0">
+                <a:solidFill>
+                  <a:srgbClr val="1A2433"/>
+                </a:solidFill>
+                <a:latin typeface="Calibri" pitchFamily="34" charset="0"/>
+                <a:ea typeface="Calibri" pitchFamily="34" charset="-122"/>
+                <a:cs typeface="Calibri" pitchFamily="34" charset="-120"/>
+              </a:rPr>
+              <a:t>289</a:t>
+            </a:r>
+            <a:endParaRPr lang="en-US" sz="1100" dirty="0"/>
+          </a:p>
+        </p:txBody>
+      </p:sp>
+      <p:sp>
+        <p:nvSpPr>
+          <p:cNvPr id="23" name="Text 19"/>
+          <p:cNvSpPr/>
+          <p:nvPr/>
+        </p:nvSpPr>
+        <p:spPr>
+          <a:xfrm>
+            <a:off x="3429000" y="5184648"/>
+            <a:ext cx="914400" cy="192024"/>
+          </a:xfrm>
+          <a:prstGeom prst="rect">
+            <a:avLst/>
+          </a:prstGeom>
+          <a:noFill/>
+          <a:ln/>
+        </p:spPr>
+        <p:txBody>
+          <a:bodyPr wrap="square" lIns="0" tIns="0" rIns="0" bIns="0" rtlCol="0" anchor="ctr"/>
+          <a:lstStyle/>
+          <a:p>
+            <a:pPr algn="r" indent="0" marL="0">
+              <a:buNone/>
+            </a:pPr>
+            <a:r>
+              <a:rPr lang="en-US" sz="1100" dirty="0">
+                <a:solidFill>
+                  <a:srgbClr val="1A2433"/>
+                </a:solidFill>
+                <a:latin typeface="Calibri" pitchFamily="34" charset="0"/>
+                <a:ea typeface="Calibri" pitchFamily="34" charset="-122"/>
+                <a:cs typeface="Calibri" pitchFamily="34" charset="-120"/>
+              </a:rPr>
+              <a:t>240</a:t>
+            </a:r>
+            <a:endParaRPr lang="en-US" sz="1100" dirty="0"/>
+          </a:p>
+        </p:txBody>
+      </p:sp>
+      <p:sp>
+        <p:nvSpPr>
+          <p:cNvPr id="24" name="Text 20"/>
+          <p:cNvSpPr/>
+          <p:nvPr/>
+        </p:nvSpPr>
+        <p:spPr>
+          <a:xfrm>
+            <a:off x="4434840" y="5184648"/>
+            <a:ext cx="868680" cy="192024"/>
+          </a:xfrm>
+          <a:prstGeom prst="rect">
+            <a:avLst/>
+          </a:prstGeom>
+          <a:noFill/>
+          <a:ln/>
+        </p:spPr>
+        <p:txBody>
+          <a:bodyPr wrap="square" lIns="0" tIns="0" rIns="0" bIns="0" rtlCol="0" anchor="ctr"/>
+          <a:lstStyle/>
+          <a:p>
+            <a:pPr algn="r" indent="0" marL="0">
+              <a:buNone/>
+            </a:pPr>
+            <a:r>
+              <a:rPr lang="en-US" sz="1100" dirty="0">
+                <a:solidFill>
+                  <a:srgbClr val="C0392B"/>
+                </a:solidFill>
+                <a:latin typeface="Calibri" pitchFamily="34" charset="0"/>
+                <a:ea typeface="Calibri" pitchFamily="34" charset="-122"/>
+                <a:cs typeface="Calibri" pitchFamily="34" charset="-120"/>
+              </a:rPr>
+              <a:t>49</a:t>
+            </a:r>
+            <a:endParaRPr lang="en-US" sz="1100" dirty="0"/>
+          </a:p>
+        </p:txBody>
+      </p:sp>
+      <p:sp>
+        <p:nvSpPr>
+          <p:cNvPr id="25" name="Text 21"/>
+          <p:cNvSpPr/>
+          <p:nvPr/>
+        </p:nvSpPr>
+        <p:spPr>
+          <a:xfrm>
+            <a:off x="5394960" y="5184648"/>
+            <a:ext cx="1051560" cy="192024"/>
+          </a:xfrm>
+          <a:prstGeom prst="rect">
+            <a:avLst/>
+          </a:prstGeom>
+          <a:noFill/>
+          <a:ln/>
+        </p:spPr>
+        <p:txBody>
+          <a:bodyPr wrap="square" lIns="0" tIns="0" rIns="0" bIns="0" rtlCol="0" anchor="ctr"/>
+          <a:lstStyle/>
+          <a:p>
+            <a:pPr algn="r" indent="0" marL="0">
+              <a:buNone/>
+            </a:pPr>
+            <a:r>
+              <a:rPr lang="en-US" sz="1100" dirty="0">
+                <a:solidFill>
+                  <a:srgbClr val="1A2433"/>
+                </a:solidFill>
+                <a:latin typeface="Calibri" pitchFamily="34" charset="0"/>
+                <a:ea typeface="Calibri" pitchFamily="34" charset="-122"/>
+                <a:cs typeface="Calibri" pitchFamily="34" charset="-120"/>
+              </a:rPr>
+              <a:t>133 d</a:t>
+            </a:r>
+            <a:endParaRPr lang="en-US" sz="1100" dirty="0"/>
+          </a:p>
+        </p:txBody>
+      </p:sp>
+      <p:sp>
+        <p:nvSpPr>
+          <p:cNvPr id="26" name="Shape 22"/>
+          <p:cNvSpPr/>
+          <p:nvPr/>
+        </p:nvSpPr>
+        <p:spPr>
+          <a:xfrm>
+            <a:off x="502920" y="5413248"/>
+            <a:ext cx="5943600" cy="0"/>
+          </a:xfrm>
+          <a:prstGeom prst="line">
+            <a:avLst/>
+          </a:prstGeom>
+          <a:noFill/>
+          <a:ln w="9525">
+            <a:solidFill>
+              <a:srgbClr val="D9DFE6"/>
+            </a:solidFill>
+            <a:prstDash val="solid"/>
+          </a:ln>
+        </p:spPr>
+      </p:sp>
+      <p:sp>
+        <p:nvSpPr>
+          <p:cNvPr id="27" name="Text 23"/>
+          <p:cNvSpPr/>
+          <p:nvPr/>
+        </p:nvSpPr>
+        <p:spPr>
+          <a:xfrm>
+            <a:off x="502920" y="5468112"/>
+            <a:ext cx="1783080" cy="192024"/>
+          </a:xfrm>
+          <a:prstGeom prst="rect">
+            <a:avLst/>
+          </a:prstGeom>
+          <a:noFill/>
+          <a:ln/>
+        </p:spPr>
+        <p:txBody>
+          <a:bodyPr wrap="square" lIns="0" tIns="0" rIns="0" bIns="0" rtlCol="0" anchor="ctr"/>
+          <a:lstStyle/>
+          <a:p>
+            <a:pPr algn="l" indent="0" marL="0">
+              <a:buNone/>
+            </a:pPr>
+            <a:r>
+              <a:rPr lang="en-US" sz="1100" dirty="0">
+                <a:solidFill>
+                  <a:srgbClr val="8A5520"/>
+                </a:solidFill>
+                <a:latin typeface="Calibri" pitchFamily="34" charset="0"/>
+                <a:ea typeface="Calibri" pitchFamily="34" charset="-122"/>
+                <a:cs typeface="Calibri" pitchFamily="34" charset="-120"/>
+              </a:rPr>
+              <a:t>Externa · Subcontrato</a:t>
+            </a:r>
+            <a:endParaRPr lang="en-US" sz="1100" dirty="0"/>
+          </a:p>
+        </p:txBody>
+      </p:sp>
+      <p:sp>
+        <p:nvSpPr>
+          <p:cNvPr id="28" name="Text 24"/>
+          <p:cNvSpPr/>
+          <p:nvPr/>
+        </p:nvSpPr>
+        <p:spPr>
+          <a:xfrm>
+            <a:off x="2377440" y="5468112"/>
+            <a:ext cx="960120" cy="192024"/>
+          </a:xfrm>
+          <a:prstGeom prst="rect">
+            <a:avLst/>
+          </a:prstGeom>
+          <a:noFill/>
+          <a:ln/>
+        </p:spPr>
+        <p:txBody>
+          <a:bodyPr wrap="square" lIns="0" tIns="0" rIns="0" bIns="0" rtlCol="0" anchor="ctr"/>
+          <a:lstStyle/>
+          <a:p>
+            <a:pPr algn="r" indent="0" marL="0">
+              <a:buNone/>
+            </a:pPr>
+            <a:r>
+              <a:rPr lang="en-US" sz="1100" dirty="0">
+                <a:solidFill>
+                  <a:srgbClr val="1A2433"/>
+                </a:solidFill>
+                <a:latin typeface="Calibri" pitchFamily="34" charset="0"/>
+                <a:ea typeface="Calibri" pitchFamily="34" charset="-122"/>
+                <a:cs typeface="Calibri" pitchFamily="34" charset="-120"/>
+              </a:rPr>
+              <a:t>48</a:t>
+            </a:r>
+            <a:endParaRPr lang="en-US" sz="1100" dirty="0"/>
+          </a:p>
+        </p:txBody>
+      </p:sp>
+      <p:sp>
+        <p:nvSpPr>
+          <p:cNvPr id="29" name="Text 25"/>
+          <p:cNvSpPr/>
+          <p:nvPr/>
+        </p:nvSpPr>
+        <p:spPr>
+          <a:xfrm>
+            <a:off x="3429000" y="5468112"/>
+            <a:ext cx="914400" cy="192024"/>
+          </a:xfrm>
+          <a:prstGeom prst="rect">
+            <a:avLst/>
+          </a:prstGeom>
+          <a:noFill/>
+          <a:ln/>
+        </p:spPr>
+        <p:txBody>
+          <a:bodyPr wrap="square" lIns="0" tIns="0" rIns="0" bIns="0" rtlCol="0" anchor="ctr"/>
+          <a:lstStyle/>
+          <a:p>
+            <a:pPr algn="r" indent="0" marL="0">
+              <a:buNone/>
+            </a:pPr>
+            <a:r>
+              <a:rPr lang="en-US" sz="1100" dirty="0">
+                <a:solidFill>
+                  <a:srgbClr val="1A2433"/>
+                </a:solidFill>
+                <a:latin typeface="Calibri" pitchFamily="34" charset="0"/>
+                <a:ea typeface="Calibri" pitchFamily="34" charset="-122"/>
+                <a:cs typeface="Calibri" pitchFamily="34" charset="-120"/>
+              </a:rPr>
+              <a:t>48</a:t>
+            </a:r>
+            <a:endParaRPr lang="en-US" sz="1100" dirty="0"/>
+          </a:p>
+        </p:txBody>
+      </p:sp>
+      <p:sp>
+        <p:nvSpPr>
+          <p:cNvPr id="30" name="Text 26"/>
+          <p:cNvSpPr/>
+          <p:nvPr/>
+        </p:nvSpPr>
+        <p:spPr>
+          <a:xfrm>
+            <a:off x="4434840" y="5468112"/>
+            <a:ext cx="868680" cy="192024"/>
+          </a:xfrm>
+          <a:prstGeom prst="rect">
+            <a:avLst/>
+          </a:prstGeom>
+          <a:noFill/>
+          <a:ln/>
+        </p:spPr>
+        <p:txBody>
+          <a:bodyPr wrap="square" lIns="0" tIns="0" rIns="0" bIns="0" rtlCol="0" anchor="ctr"/>
+          <a:lstStyle/>
+          <a:p>
+            <a:pPr algn="r" indent="0" marL="0">
+              <a:buNone/>
+            </a:pPr>
+            <a:r>
+              <a:rPr lang="en-US" sz="1100" dirty="0">
+                <a:solidFill>
+                  <a:srgbClr val="56606E"/>
+                </a:solidFill>
+                <a:latin typeface="Calibri" pitchFamily="34" charset="0"/>
+                <a:ea typeface="Calibri" pitchFamily="34" charset="-122"/>
+                <a:cs typeface="Calibri" pitchFamily="34" charset="-120"/>
+              </a:rPr>
+              <a:t>—</a:t>
+            </a:r>
+            <a:endParaRPr lang="en-US" sz="1100" dirty="0"/>
+          </a:p>
+        </p:txBody>
+      </p:sp>
+      <p:sp>
+        <p:nvSpPr>
+          <p:cNvPr id="31" name="Text 27"/>
+          <p:cNvSpPr/>
+          <p:nvPr/>
+        </p:nvSpPr>
+        <p:spPr>
+          <a:xfrm>
+            <a:off x="5394960" y="5468112"/>
+            <a:ext cx="1051560" cy="192024"/>
+          </a:xfrm>
+          <a:prstGeom prst="rect">
+            <a:avLst/>
+          </a:prstGeom>
+          <a:noFill/>
+          <a:ln/>
+        </p:spPr>
+        <p:txBody>
+          <a:bodyPr wrap="square" lIns="0" tIns="0" rIns="0" bIns="0" rtlCol="0" anchor="ctr"/>
+          <a:lstStyle/>
+          <a:p>
+            <a:pPr algn="r" indent="0" marL="0">
+              <a:buNone/>
+            </a:pPr>
+            <a:r>
+              <a:rPr lang="en-US" sz="1100" dirty="0">
+                <a:solidFill>
+                  <a:srgbClr val="56606E"/>
+                </a:solidFill>
+                <a:latin typeface="Calibri" pitchFamily="34" charset="0"/>
+                <a:ea typeface="Calibri" pitchFamily="34" charset="-122"/>
+                <a:cs typeface="Calibri" pitchFamily="34" charset="-120"/>
+              </a:rPr>
+              <a:t>—</a:t>
+            </a:r>
+            <a:endParaRPr lang="en-US" sz="1100" dirty="0"/>
+          </a:p>
+        </p:txBody>
+      </p:sp>
+      <p:sp>
+        <p:nvSpPr>
+          <p:cNvPr id="32" name="Shape 28"/>
+          <p:cNvSpPr/>
+          <p:nvPr/>
+        </p:nvSpPr>
+        <p:spPr>
+          <a:xfrm>
+            <a:off x="502920" y="5696712"/>
+            <a:ext cx="5943600" cy="0"/>
+          </a:xfrm>
+          <a:prstGeom prst="line">
+            <a:avLst/>
+          </a:prstGeom>
+          <a:noFill/>
+          <a:ln w="9525">
+            <a:solidFill>
+              <a:srgbClr val="D9DFE6"/>
+            </a:solidFill>
+            <a:prstDash val="solid"/>
+          </a:ln>
+        </p:spPr>
+      </p:sp>
+      <p:sp>
+        <p:nvSpPr>
+          <p:cNvPr id="33" name="Shape 29"/>
+          <p:cNvSpPr/>
+          <p:nvPr/>
+        </p:nvSpPr>
+        <p:spPr>
+          <a:xfrm>
+            <a:off x="457200" y="5705856"/>
+            <a:ext cx="5989320" cy="283464"/>
+          </a:xfrm>
+          <a:prstGeom prst="rect">
+            <a:avLst/>
+          </a:prstGeom>
+          <a:solidFill>
+            <a:srgbClr val="FFFFFF"/>
+          </a:solidFill>
+          <a:ln/>
+        </p:spPr>
+      </p:sp>
+      <p:sp>
+        <p:nvSpPr>
+          <p:cNvPr id="34" name="Text 30"/>
+          <p:cNvSpPr/>
+          <p:nvPr/>
+        </p:nvSpPr>
+        <p:spPr>
+          <a:xfrm>
+            <a:off x="502920" y="5751576"/>
+            <a:ext cx="1783080" cy="192024"/>
+          </a:xfrm>
+          <a:prstGeom prst="rect">
+            <a:avLst/>
+          </a:prstGeom>
+          <a:noFill/>
+          <a:ln/>
+        </p:spPr>
+        <p:txBody>
+          <a:bodyPr wrap="square" lIns="0" tIns="0" rIns="0" bIns="0" rtlCol="0" anchor="ctr"/>
+          <a:lstStyle/>
+          <a:p>
+            <a:pPr algn="l" indent="0" marL="0">
+              <a:buNone/>
+            </a:pPr>
+            <a:r>
+              <a:rPr lang="en-US" sz="1100" dirty="0">
+                <a:solidFill>
+                  <a:srgbClr val="5B6B7C"/>
+                </a:solidFill>
+                <a:latin typeface="Calibri" pitchFamily="34" charset="0"/>
+                <a:ea typeface="Calibri" pitchFamily="34" charset="-122"/>
+                <a:cs typeface="Calibri" pitchFamily="34" charset="-120"/>
+              </a:rPr>
+              <a:t>Sin clasificar</a:t>
+            </a:r>
+            <a:endParaRPr lang="en-US" sz="1100" dirty="0"/>
+          </a:p>
+        </p:txBody>
+      </p:sp>
+      <p:sp>
+        <p:nvSpPr>
+          <p:cNvPr id="35" name="Text 31"/>
+          <p:cNvSpPr/>
+          <p:nvPr/>
+        </p:nvSpPr>
+        <p:spPr>
+          <a:xfrm>
+            <a:off x="2377440" y="5751576"/>
+            <a:ext cx="960120" cy="192024"/>
+          </a:xfrm>
+          <a:prstGeom prst="rect">
+            <a:avLst/>
+          </a:prstGeom>
+          <a:noFill/>
+          <a:ln/>
+        </p:spPr>
+        <p:txBody>
+          <a:bodyPr wrap="square" lIns="0" tIns="0" rIns="0" bIns="0" rtlCol="0" anchor="ctr"/>
+          <a:lstStyle/>
+          <a:p>
+            <a:pPr algn="r" indent="0" marL="0">
+              <a:buNone/>
+            </a:pPr>
+            <a:r>
+              <a:rPr lang="en-US" sz="1100" dirty="0">
+                <a:solidFill>
+                  <a:srgbClr val="1A2433"/>
+                </a:solidFill>
+                <a:latin typeface="Calibri" pitchFamily="34" charset="0"/>
+                <a:ea typeface="Calibri" pitchFamily="34" charset="-122"/>
+                <a:cs typeface="Calibri" pitchFamily="34" charset="-120"/>
+              </a:rPr>
+              <a:t>9</a:t>
+            </a:r>
+            <a:endParaRPr lang="en-US" sz="1100" dirty="0"/>
+          </a:p>
+        </p:txBody>
+      </p:sp>
+      <p:sp>
+        <p:nvSpPr>
+          <p:cNvPr id="36" name="Text 32"/>
+          <p:cNvSpPr/>
+          <p:nvPr/>
+        </p:nvSpPr>
+        <p:spPr>
+          <a:xfrm>
+            <a:off x="3429000" y="5751576"/>
+            <a:ext cx="914400" cy="192024"/>
+          </a:xfrm>
+          <a:prstGeom prst="rect">
+            <a:avLst/>
+          </a:prstGeom>
+          <a:noFill/>
+          <a:ln/>
+        </p:spPr>
+        <p:txBody>
+          <a:bodyPr wrap="square" lIns="0" tIns="0" rIns="0" bIns="0" rtlCol="0" anchor="ctr"/>
+          <a:lstStyle/>
+          <a:p>
+            <a:pPr algn="r" indent="0" marL="0">
+              <a:buNone/>
+            </a:pPr>
+            <a:r>
+              <a:rPr lang="en-US" sz="1100" dirty="0">
+                <a:solidFill>
+                  <a:srgbClr val="1A2433"/>
+                </a:solidFill>
+                <a:latin typeface="Calibri" pitchFamily="34" charset="0"/>
+                <a:ea typeface="Calibri" pitchFamily="34" charset="-122"/>
+                <a:cs typeface="Calibri" pitchFamily="34" charset="-120"/>
+              </a:rPr>
+              <a:t>9</a:t>
+            </a:r>
+            <a:endParaRPr lang="en-US" sz="1100" dirty="0"/>
+          </a:p>
+        </p:txBody>
+      </p:sp>
+      <p:sp>
+        <p:nvSpPr>
+          <p:cNvPr id="37" name="Text 33"/>
+          <p:cNvSpPr/>
+          <p:nvPr/>
+        </p:nvSpPr>
+        <p:spPr>
+          <a:xfrm>
+            <a:off x="4434840" y="5751576"/>
+            <a:ext cx="868680" cy="192024"/>
+          </a:xfrm>
+          <a:prstGeom prst="rect">
+            <a:avLst/>
+          </a:prstGeom>
+          <a:noFill/>
+          <a:ln/>
+        </p:spPr>
+        <p:txBody>
+          <a:bodyPr wrap="square" lIns="0" tIns="0" rIns="0" bIns="0" rtlCol="0" anchor="ctr"/>
+          <a:lstStyle/>
+          <a:p>
+            <a:pPr algn="r" indent="0" marL="0">
+              <a:buNone/>
+            </a:pPr>
+            <a:r>
+              <a:rPr lang="en-US" sz="1100" dirty="0">
+                <a:solidFill>
+                  <a:srgbClr val="56606E"/>
+                </a:solidFill>
+                <a:latin typeface="Calibri" pitchFamily="34" charset="0"/>
+                <a:ea typeface="Calibri" pitchFamily="34" charset="-122"/>
+                <a:cs typeface="Calibri" pitchFamily="34" charset="-120"/>
+              </a:rPr>
+              <a:t>—</a:t>
+            </a:r>
+            <a:endParaRPr lang="en-US" sz="1100" dirty="0"/>
+          </a:p>
+        </p:txBody>
+      </p:sp>
+      <p:sp>
+        <p:nvSpPr>
+          <p:cNvPr id="38" name="Text 34"/>
+          <p:cNvSpPr/>
+          <p:nvPr/>
+        </p:nvSpPr>
+        <p:spPr>
+          <a:xfrm>
+            <a:off x="5394960" y="5751576"/>
+            <a:ext cx="1051560" cy="192024"/>
+          </a:xfrm>
+          <a:prstGeom prst="rect">
+            <a:avLst/>
+          </a:prstGeom>
+          <a:noFill/>
+          <a:ln/>
+        </p:spPr>
+        <p:txBody>
+          <a:bodyPr wrap="square" lIns="0" tIns="0" rIns="0" bIns="0" rtlCol="0" anchor="ctr"/>
+          <a:lstStyle/>
+          <a:p>
+            <a:pPr algn="r" indent="0" marL="0">
+              <a:buNone/>
+            </a:pPr>
+            <a:r>
+              <a:rPr lang="en-US" sz="1100" dirty="0">
+                <a:solidFill>
+                  <a:srgbClr val="56606E"/>
+                </a:solidFill>
+                <a:latin typeface="Calibri" pitchFamily="34" charset="0"/>
+                <a:ea typeface="Calibri" pitchFamily="34" charset="-122"/>
+                <a:cs typeface="Calibri" pitchFamily="34" charset="-120"/>
+              </a:rPr>
+              <a:t>—</a:t>
+            </a:r>
+            <a:endParaRPr lang="en-US" sz="1100" dirty="0"/>
+          </a:p>
+        </p:txBody>
+      </p:sp>
+      <p:sp>
+        <p:nvSpPr>
+          <p:cNvPr id="39" name="Shape 35"/>
+          <p:cNvSpPr/>
+          <p:nvPr/>
+        </p:nvSpPr>
+        <p:spPr>
+          <a:xfrm>
+            <a:off x="502920" y="5980176"/>
+            <a:ext cx="5943600" cy="0"/>
+          </a:xfrm>
+          <a:prstGeom prst="line">
+            <a:avLst/>
+          </a:prstGeom>
+          <a:noFill/>
+          <a:ln w="9525">
+            <a:solidFill>
+              <a:srgbClr val="D9DFE6"/>
+            </a:solidFill>
+            <a:prstDash val="solid"/>
+          </a:ln>
+        </p:spPr>
+      </p:sp>
+      <p:sp>
+        <p:nvSpPr>
+          <p:cNvPr id="40" name="Text 36"/>
+          <p:cNvSpPr/>
+          <p:nvPr/>
+        </p:nvSpPr>
+        <p:spPr>
+          <a:xfrm>
+            <a:off x="502920" y="6035040"/>
+            <a:ext cx="1783080" cy="192024"/>
+          </a:xfrm>
+          <a:prstGeom prst="rect">
+            <a:avLst/>
+          </a:prstGeom>
+          <a:noFill/>
+          <a:ln/>
+        </p:spPr>
+        <p:txBody>
+          <a:bodyPr wrap="square" lIns="0" tIns="0" rIns="0" bIns="0" rtlCol="0" anchor="ctr"/>
+          <a:lstStyle/>
+          <a:p>
+            <a:pPr algn="l" indent="0" marL="0">
+              <a:buNone/>
+            </a:pPr>
+            <a:r>
+              <a:rPr lang="en-US" sz="1100" b="1" dirty="0">
+                <a:solidFill>
+                  <a:srgbClr val="1A2433"/>
+                </a:solidFill>
+                <a:latin typeface="Calibri" pitchFamily="34" charset="0"/>
+                <a:ea typeface="Calibri" pitchFamily="34" charset="-122"/>
+                <a:cs typeface="Calibri" pitchFamily="34" charset="-120"/>
+              </a:rPr>
+              <a:t>Todas las vías</a:t>
+            </a:r>
+            <a:endParaRPr lang="en-US" sz="1100" dirty="0"/>
+          </a:p>
+        </p:txBody>
+      </p:sp>
+      <p:sp>
+        <p:nvSpPr>
+          <p:cNvPr id="41" name="Text 37"/>
+          <p:cNvSpPr/>
+          <p:nvPr/>
+        </p:nvSpPr>
+        <p:spPr>
+          <a:xfrm>
+            <a:off x="2377440" y="6035040"/>
+            <a:ext cx="960120" cy="192024"/>
+          </a:xfrm>
+          <a:prstGeom prst="rect">
+            <a:avLst/>
+          </a:prstGeom>
+          <a:noFill/>
+          <a:ln/>
+        </p:spPr>
+        <p:txBody>
+          <a:bodyPr wrap="square" lIns="0" tIns="0" rIns="0" bIns="0" rtlCol="0" anchor="ctr"/>
+          <a:lstStyle/>
+          <a:p>
+            <a:pPr algn="r" indent="0" marL="0">
+              <a:buNone/>
+            </a:pPr>
+            <a:r>
+              <a:rPr lang="en-US" sz="1100" b="1" dirty="0">
+                <a:solidFill>
+                  <a:srgbClr val="1A2433"/>
+                </a:solidFill>
+                <a:latin typeface="Calibri" pitchFamily="34" charset="0"/>
+                <a:ea typeface="Calibri" pitchFamily="34" charset="-122"/>
+                <a:cs typeface="Calibri" pitchFamily="34" charset="-120"/>
+              </a:rPr>
+              <a:t>508</a:t>
+            </a:r>
+            <a:endParaRPr lang="en-US" sz="1100" dirty="0"/>
+          </a:p>
+        </p:txBody>
+      </p:sp>
+      <p:sp>
+        <p:nvSpPr>
+          <p:cNvPr id="42" name="Text 38"/>
+          <p:cNvSpPr/>
+          <p:nvPr/>
+        </p:nvSpPr>
+        <p:spPr>
+          <a:xfrm>
+            <a:off x="3429000" y="6035040"/>
+            <a:ext cx="914400" cy="192024"/>
+          </a:xfrm>
+          <a:prstGeom prst="rect">
+            <a:avLst/>
+          </a:prstGeom>
+          <a:noFill/>
+          <a:ln/>
+        </p:spPr>
+        <p:txBody>
+          <a:bodyPr wrap="square" lIns="0" tIns="0" rIns="0" bIns="0" rtlCol="0" anchor="ctr"/>
+          <a:lstStyle/>
+          <a:p>
+            <a:pPr algn="r" indent="0" marL="0">
+              <a:buNone/>
+            </a:pPr>
+            <a:r>
+              <a:rPr lang="en-US" sz="1100" b="1" dirty="0">
+                <a:solidFill>
+                  <a:srgbClr val="1A2433"/>
+                </a:solidFill>
+                <a:latin typeface="Calibri" pitchFamily="34" charset="0"/>
+                <a:ea typeface="Calibri" pitchFamily="34" charset="-122"/>
+                <a:cs typeface="Calibri" pitchFamily="34" charset="-120"/>
+              </a:rPr>
+              <a:t>454</a:t>
+            </a:r>
+            <a:endParaRPr lang="en-US" sz="1100" dirty="0"/>
+          </a:p>
+        </p:txBody>
+      </p:sp>
+      <p:sp>
+        <p:nvSpPr>
+          <p:cNvPr id="43" name="Text 39"/>
+          <p:cNvSpPr/>
+          <p:nvPr/>
+        </p:nvSpPr>
+        <p:spPr>
+          <a:xfrm>
+            <a:off x="4434840" y="6035040"/>
+            <a:ext cx="868680" cy="192024"/>
+          </a:xfrm>
+          <a:prstGeom prst="rect">
+            <a:avLst/>
+          </a:prstGeom>
+          <a:noFill/>
+          <a:ln/>
+        </p:spPr>
+        <p:txBody>
+          <a:bodyPr wrap="square" lIns="0" tIns="0" rIns="0" bIns="0" rtlCol="0" anchor="ctr"/>
+          <a:lstStyle/>
+          <a:p>
+            <a:pPr algn="r" indent="0" marL="0">
+              <a:buNone/>
+            </a:pPr>
+            <a:r>
+              <a:rPr lang="en-US" sz="1100" b="1" dirty="0">
+                <a:solidFill>
+                  <a:srgbClr val="C0392B"/>
+                </a:solidFill>
+                <a:latin typeface="Calibri" pitchFamily="34" charset="0"/>
+                <a:ea typeface="Calibri" pitchFamily="34" charset="-122"/>
+                <a:cs typeface="Calibri" pitchFamily="34" charset="-120"/>
+              </a:rPr>
+              <a:t>54</a:t>
+            </a:r>
+            <a:endParaRPr lang="en-US" sz="1100" dirty="0"/>
+          </a:p>
+        </p:txBody>
+      </p:sp>
+      <p:sp>
+        <p:nvSpPr>
+          <p:cNvPr id="44" name="Text 40"/>
+          <p:cNvSpPr/>
+          <p:nvPr/>
+        </p:nvSpPr>
+        <p:spPr>
+          <a:xfrm>
+            <a:off x="5394960" y="6035040"/>
+            <a:ext cx="1051560" cy="192024"/>
+          </a:xfrm>
+          <a:prstGeom prst="rect">
+            <a:avLst/>
+          </a:prstGeom>
+          <a:noFill/>
+          <a:ln/>
+        </p:spPr>
+        <p:txBody>
+          <a:bodyPr wrap="square" lIns="0" tIns="0" rIns="0" bIns="0" rtlCol="0" anchor="ctr"/>
+          <a:lstStyle/>
+          <a:p>
+            <a:pPr algn="r" indent="0" marL="0">
+              <a:buNone/>
+            </a:pPr>
+            <a:r>
+              <a:rPr lang="en-US" sz="1100" b="1" dirty="0">
+                <a:solidFill>
+                  <a:srgbClr val="1A2433"/>
+                </a:solidFill>
+                <a:latin typeface="Calibri" pitchFamily="34" charset="0"/>
+                <a:ea typeface="Calibri" pitchFamily="34" charset="-122"/>
+                <a:cs typeface="Calibri" pitchFamily="34" charset="-120"/>
+              </a:rPr>
+              <a:t>139 d</a:t>
+            </a:r>
+            <a:endParaRPr lang="en-US" sz="1100" dirty="0"/>
+          </a:p>
+        </p:txBody>
+      </p:sp>
+      <p:sp>
+        <p:nvSpPr>
+          <p:cNvPr id="45" name="Shape 41"/>
+          <p:cNvSpPr/>
+          <p:nvPr/>
+        </p:nvSpPr>
+        <p:spPr>
+          <a:xfrm>
+            <a:off x="502920" y="6263640"/>
+            <a:ext cx="5943600" cy="0"/>
+          </a:xfrm>
+          <a:prstGeom prst="line">
+            <a:avLst/>
+          </a:prstGeom>
+          <a:noFill/>
+          <a:ln w="9525">
+            <a:solidFill>
+              <a:srgbClr val="D9DFE6"/>
+            </a:solidFill>
+            <a:prstDash val="solid"/>
+          </a:ln>
+        </p:spPr>
+      </p:sp>
       <p:graphicFrame>
         <p:nvGraphicFramePr>
-          <p:cNvPr id="7" name="Chart 1" descr=""/>
+          <p:cNvPr id="46" name="Chart 1" descr=""/>
           <p:cNvGraphicFramePr/>
           <p:nvPr/>
         </p:nvGraphicFramePr>
@@ -26403,7 +27790,7 @@
       </p:graphicFrame>
       <p:sp>
         <p:nvSpPr>
-          <p:cNvPr id="8" name="Shape 3"/>
+          <p:cNvPr id="47" name="Shape 42"/>
           <p:cNvSpPr/>
           <p:nvPr/>
         </p:nvSpPr>
@@ -26425,7 +27812,7 @@
       </p:sp>
       <p:sp>
         <p:nvSpPr>
-          <p:cNvPr id="9" name="Text 4"/>
+          <p:cNvPr id="48" name="Text 43"/>
           <p:cNvSpPr/>
           <p:nvPr/>
         </p:nvSpPr>
@@ -26464,7 +27851,7 @@
       </p:sp>
       <p:sp>
         <p:nvSpPr>
-          <p:cNvPr id="10" name="Text 5"/>
+          <p:cNvPr id="49" name="Text 44"/>
           <p:cNvSpPr/>
           <p:nvPr/>
         </p:nvSpPr>
@@ -26503,7 +27890,7 @@
       </p:sp>
       <p:sp>
         <p:nvSpPr>
-          <p:cNvPr id="11" name="Text 6"/>
+          <p:cNvPr id="50" name="Text 45"/>
           <p:cNvSpPr/>
           <p:nvPr/>
         </p:nvSpPr>
@@ -26542,7 +27929,7 @@
       </p:sp>
       <p:sp>
         <p:nvSpPr>
-          <p:cNvPr id="12" name="Text 7"/>
+          <p:cNvPr id="51" name="Text 46"/>
           <p:cNvSpPr/>
           <p:nvPr/>
         </p:nvSpPr>
@@ -26581,7 +27968,7 @@
       </p:sp>
       <p:sp>
         <p:nvSpPr>
-          <p:cNvPr id="13" name="Text 8"/>
+          <p:cNvPr id="52" name="Text 47"/>
           <p:cNvSpPr/>
           <p:nvPr/>
         </p:nvSpPr>
@@ -26620,7 +28007,7 @@
       </p:sp>
       <p:sp>
         <p:nvSpPr>
-          <p:cNvPr id="14" name="Text 9"/>
+          <p:cNvPr id="53" name="Text 48"/>
           <p:cNvSpPr/>
           <p:nvPr/>
         </p:nvSpPr>
@@ -26659,7 +28046,7 @@
       </p:sp>
       <p:sp>
         <p:nvSpPr>
-          <p:cNvPr id="15" name="Text 10"/>
+          <p:cNvPr id="54" name="Text 49"/>
           <p:cNvSpPr/>
           <p:nvPr/>
         </p:nvSpPr>
@@ -26698,7 +28085,7 @@
       </p:sp>
       <p:sp>
         <p:nvSpPr>
-          <p:cNvPr id="16" name="Text 11"/>
+          <p:cNvPr id="55" name="Text 50"/>
           <p:cNvSpPr/>
           <p:nvPr/>
         </p:nvSpPr>
@@ -26737,7 +28124,7 @@
       </p:sp>
       <p:sp>
         <p:nvSpPr>
-          <p:cNvPr id="17" name="Text 12"/>
+          <p:cNvPr id="56" name="Text 51"/>
           <p:cNvSpPr/>
           <p:nvPr/>
         </p:nvSpPr>
@@ -26776,7 +28163,7 @@
       </p:sp>
       <p:sp>
         <p:nvSpPr>
-          <p:cNvPr id="18" name="Text 13"/>
+          <p:cNvPr id="57" name="Text 52"/>
           <p:cNvSpPr/>
           <p:nvPr/>
         </p:nvSpPr>

--- a/modulo_nc/Panel_No_Conformidades.pptx
+++ b/modulo_nc/Panel_No_Conformidades.pptx
@@ -21522,7 +21522,7 @@
                 <a:ea typeface="Calibri" pitchFamily="34" charset="-122"/>
                 <a:cs typeface="Calibri" pitchFamily="34" charset="-120"/>
               </a:rPr>
-              <a:t>El atraso no es medible con este archivo; se mide la antigüedad.  </a:t>
+              <a:t>51 de los 54 abiertos están fuera del plazo de respuesta.  </a:t>
             </a:r>
             <a:pPr indent="0" marL="0">
               <a:lnSpc>
@@ -21539,7 +21539,7 @@
                 <a:ea typeface="Calibri" pitchFamily="34" charset="-122"/>
                 <a:cs typeface="Calibri" pitchFamily="34" charset="-120"/>
               </a:rPr>
-              <a:t>Ninguno de los 54 abiertos trae fecha comprometida —la columna «Fecha De Cierre» solo se llena al cerrar—, así que se reporta la antigüedad: 17 llevan más de 180 días y 3 más de un año.</a:t>
+              <a:t>El plazo es de 10 días desde que se emite la NC. De los atrasados, 17 llevan más de 180 días abiertos y 3 más de un año: no es atraso de días, es deuda vieja.</a:t>
             </a:r>
             <a:endParaRPr lang="en-US" sz="1250" dirty="0"/>
           </a:p>
@@ -28438,13 +28438,13 @@
             <a:r>
               <a:rPr lang="en-US" sz="1100" b="1" spc="150" kern="0" dirty="0">
                 <a:solidFill>
-                  <a:srgbClr val="E3A55B"/>
-                </a:solidFill>
-                <a:latin typeface="Calibri" pitchFamily="34" charset="0"/>
-                <a:ea typeface="Calibri" pitchFamily="34" charset="-122"/>
-                <a:cs typeface="Calibri" pitchFamily="34" charset="-120"/>
-              </a:rPr>
-              <a:t>ATRASO — NO CALCULABLE</a:t>
+                  <a:srgbClr val="C0392B"/>
+                </a:solidFill>
+                <a:latin typeface="Calibri" pitchFamily="34" charset="0"/>
+                <a:ea typeface="Calibri" pitchFamily="34" charset="-122"/>
+                <a:cs typeface="Calibri" pitchFamily="34" charset="-120"/>
+              </a:rPr>
+              <a:t>FUERA DE PLAZO DE RESPUESTA</a:t>
             </a:r>
             <a:endParaRPr lang="en-US" sz="1100" dirty="0"/>
           </a:p>
@@ -28486,7 +28486,7 @@
                 <a:ea typeface="Calibri" pitchFamily="34" charset="-122"/>
                 <a:cs typeface="Calibri" pitchFamily="34" charset="-120"/>
               </a:rPr>
-              <a:t>La regla del proyecto es: hallazgo abierto cuya fecha de cierre comprometida ya venció.
+              <a:t>La regla del proyecto es: 10 días para responder una NC desde que se emite; del día 11 en adelante corre atraso.
 </a:t>
             </a:r>
             <a:pPr indent="0" marL="0">
@@ -28496,7 +28496,7 @@
               <a:buNone/>
             </a:pPr>
             <a:r>
-              <a:rPr lang="en-US" sz="1150" dirty="0">
+              <a:rPr lang="en-US" sz="1150" b="1" dirty="0">
                 <a:solidFill>
                   <a:srgbClr val="FFFFFF"/>
                 </a:solidFill>
@@ -28504,7 +28504,7 @@
                 <a:ea typeface="Calibri" pitchFamily="34" charset="-122"/>
                 <a:cs typeface="Calibri" pitchFamily="34" charset="-120"/>
               </a:rPr>
-              <a:t>Ninguno de los 54 abiertos trae esa fecha: la columna «Fecha De Cierre» del Excel solo se llena al cerrar. El indicador no se puede calcular y el panel lo declara en vez de informar 0 atrasados. En su lugar se usa la antigüedad.</a:t>
+              <a:t>Al corte hay 51 hallazgos fuera de plazo de los 54 abiertos.</a:t>
             </a:r>
             <a:endParaRPr lang="en-US" sz="1150" dirty="0"/>
           </a:p>
@@ -28518,8 +28518,8 @@
         </p:nvSpPr>
         <p:spPr>
           <a:xfrm>
-            <a:off x="6949440" y="3749040"/>
-            <a:ext cx="4526280" cy="411480"/>
+            <a:off x="6949440" y="3703320"/>
+            <a:ext cx="4526280" cy="457200"/>
           </a:xfrm>
           <a:prstGeom prst="rect">
             <a:avLst/>
@@ -28543,7 +28543,7 @@
                 <a:ea typeface="Calibri" pitchFamily="34" charset="-122"/>
                 <a:cs typeface="Calibri" pitchFamily="34" charset="-120"/>
               </a:rPr>
-              <a:t>Para activarlo basta agregar al Excel una columna de fecha comprometida de cierre: el script ya la calcula.</a:t>
+              <a:t>Se mide sobre la fecha de emisión: el Excel no declara una fecha comprometida de cierre —esa columna solo se llena al cerrar—.</a:t>
             </a:r>
             <a:endParaRPr lang="en-US" sz="1000" dirty="0"/>
           </a:p>
@@ -30682,7 +30682,7 @@
                 <a:ea typeface="Calibri" pitchFamily="34" charset="-122"/>
                 <a:cs typeface="Calibri" pitchFamily="34" charset="-120"/>
               </a:rPr>
-              <a:t>Habilitar la medición del atraso</a:t>
+              <a:t>Responder las 51 que pasaron el plazo</a:t>
             </a:r>
             <a:endParaRPr lang="en-US" sz="1400" dirty="0"/>
           </a:p>
@@ -30724,7 +30724,7 @@
                 <a:ea typeface="Calibri" pitchFamily="34" charset="-122"/>
                 <a:cs typeface="Calibri" pitchFamily="34" charset="-120"/>
               </a:rPr>
-              <a:t>Agregar al Excel una columna de fecha comprometida de cierre. Sin ella el indicador que pide el procedimiento no se puede calcular y hoy se reemplaza por la antigüedad.</a:t>
+              <a:t>El plazo es de 10 días desde la emisión y hoy lo incumplen 94,4% de los abiertos. Solo 3 siguen dentro de plazo.</a:t>
             </a:r>
             <a:endParaRPr lang="en-US" sz="1100" dirty="0"/>
           </a:p>

--- a/modulo_nc/Panel_No_Conformidades.pptx
+++ b/modulo_nc/Panel_No_Conformidades.pptx
@@ -26394,7 +26394,7 @@
         <p:spPr>
           <a:xfrm>
             <a:off x="502920" y="4160520"/>
-            <a:ext cx="5486400" cy="274320"/>
+            <a:ext cx="6400800" cy="274320"/>
           </a:xfrm>
           <a:prstGeom prst="rect">
             <a:avLst/>
@@ -26410,7 +26410,7 @@
               <a:buNone/>
             </a:pPr>
             <a:r>
-              <a:rPr lang="en-US" sz="1100" b="1" spc="150" kern="0" dirty="0">
+              <a:rPr lang="en-US" sz="900" b="1" spc="60" kern="0" dirty="0">
                 <a:solidFill>
                   <a:srgbClr val="C87A32"/>
                 </a:solidFill>
@@ -26418,9 +26418,9 @@
                 <a:ea typeface="Calibri" pitchFamily="34" charset="-122"/>
                 <a:cs typeface="Calibri" pitchFamily="34" charset="-120"/>
               </a:rPr>
-              <a:t>ESTADO DE CADA VÍA</a:t>
-            </a:r>
-            <a:endParaRPr lang="en-US" sz="1100" dirty="0"/>
+              <a:t>ESTADO DE CADA VÍA  ·  atrasada = abierta que pasó los 10 días de plazo  ·  T. respuesta = días de emisión a cierre, solo sobre las cerradas</a:t>
+            </a:r>
+            <a:endParaRPr lang="en-US" sz="900" dirty="0"/>
           </a:p>
         </p:txBody>
       </p:sp>
@@ -26433,7 +26433,7 @@
         <p:spPr>
           <a:xfrm>
             <a:off x="502920" y="4462272"/>
-            <a:ext cx="1783080" cy="274320"/>
+            <a:ext cx="1463040" cy="274320"/>
           </a:xfrm>
           <a:prstGeom prst="rect">
             <a:avLst/>
@@ -26471,8 +26471,8 @@
         </p:nvSpPr>
         <p:spPr>
           <a:xfrm>
-            <a:off x="2377440" y="4462272"/>
-            <a:ext cx="960120" cy="274320"/>
+            <a:off x="2011680" y="4462272"/>
+            <a:ext cx="731520" cy="274320"/>
           </a:xfrm>
           <a:prstGeom prst="rect">
             <a:avLst/>
@@ -26496,7 +26496,7 @@
                 <a:ea typeface="Calibri" pitchFamily="34" charset="-122"/>
                 <a:cs typeface="Calibri" pitchFamily="34" charset="-120"/>
               </a:rPr>
-              <a:t>LEVANTADAS</a:t>
+              <a:t>LEVANT.</a:t>
             </a:r>
             <a:endParaRPr lang="en-US" sz="950" dirty="0"/>
           </a:p>
@@ -26510,7 +26510,163 @@
         </p:nvSpPr>
         <p:spPr>
           <a:xfrm>
-            <a:off x="3429000" y="4462272"/>
+            <a:off x="2788920" y="4462272"/>
+            <a:ext cx="731520" cy="274320"/>
+          </a:xfrm>
+          <a:prstGeom prst="rect">
+            <a:avLst/>
+          </a:prstGeom>
+          <a:noFill/>
+          <a:ln/>
+        </p:spPr>
+        <p:txBody>
+          <a:bodyPr wrap="square" lIns="0" tIns="0" rIns="0" bIns="0" rtlCol="0" anchor="ctr"/>
+          <a:lstStyle/>
+          <a:p>
+            <a:pPr algn="r" indent="0" marL="0">
+              <a:buNone/>
+            </a:pPr>
+            <a:r>
+              <a:rPr lang="en-US" sz="950" b="1" spc="50" kern="0" dirty="0">
+                <a:solidFill>
+                  <a:srgbClr val="56606E"/>
+                </a:solidFill>
+                <a:latin typeface="Calibri" pitchFamily="34" charset="0"/>
+                <a:ea typeface="Calibri" pitchFamily="34" charset="-122"/>
+                <a:cs typeface="Calibri" pitchFamily="34" charset="-120"/>
+              </a:rPr>
+              <a:t>CERRADAS</a:t>
+            </a:r>
+            <a:endParaRPr lang="en-US" sz="950" dirty="0"/>
+          </a:p>
+        </p:txBody>
+      </p:sp>
+      <p:sp>
+        <p:nvSpPr>
+          <p:cNvPr id="11" name="Text 7"/>
+          <p:cNvSpPr/>
+          <p:nvPr/>
+        </p:nvSpPr>
+        <p:spPr>
+          <a:xfrm>
+            <a:off x="3566160" y="4462272"/>
+            <a:ext cx="731520" cy="274320"/>
+          </a:xfrm>
+          <a:prstGeom prst="rect">
+            <a:avLst/>
+          </a:prstGeom>
+          <a:noFill/>
+          <a:ln/>
+        </p:spPr>
+        <p:txBody>
+          <a:bodyPr wrap="square" lIns="0" tIns="0" rIns="0" bIns="0" rtlCol="0" anchor="ctr"/>
+          <a:lstStyle/>
+          <a:p>
+            <a:pPr algn="r" indent="0" marL="0">
+              <a:buNone/>
+            </a:pPr>
+            <a:r>
+              <a:rPr lang="en-US" sz="950" b="1" spc="50" kern="0" dirty="0">
+                <a:solidFill>
+                  <a:srgbClr val="56606E"/>
+                </a:solidFill>
+                <a:latin typeface="Calibri" pitchFamily="34" charset="0"/>
+                <a:ea typeface="Calibri" pitchFamily="34" charset="-122"/>
+                <a:cs typeface="Calibri" pitchFamily="34" charset="-120"/>
+              </a:rPr>
+              <a:t>% CIERRE</a:t>
+            </a:r>
+            <a:endParaRPr lang="en-US" sz="950" dirty="0"/>
+          </a:p>
+        </p:txBody>
+      </p:sp>
+      <p:sp>
+        <p:nvSpPr>
+          <p:cNvPr id="12" name="Text 8"/>
+          <p:cNvSpPr/>
+          <p:nvPr/>
+        </p:nvSpPr>
+        <p:spPr>
+          <a:xfrm>
+            <a:off x="4343400" y="4462272"/>
+            <a:ext cx="731520" cy="274320"/>
+          </a:xfrm>
+          <a:prstGeom prst="rect">
+            <a:avLst/>
+          </a:prstGeom>
+          <a:noFill/>
+          <a:ln/>
+        </p:spPr>
+        <p:txBody>
+          <a:bodyPr wrap="square" lIns="0" tIns="0" rIns="0" bIns="0" rtlCol="0" anchor="ctr"/>
+          <a:lstStyle/>
+          <a:p>
+            <a:pPr algn="r" indent="0" marL="0">
+              <a:buNone/>
+            </a:pPr>
+            <a:r>
+              <a:rPr lang="en-US" sz="950" b="1" spc="50" kern="0" dirty="0">
+                <a:solidFill>
+                  <a:srgbClr val="56606E"/>
+                </a:solidFill>
+                <a:latin typeface="Calibri" pitchFamily="34" charset="0"/>
+                <a:ea typeface="Calibri" pitchFamily="34" charset="-122"/>
+                <a:cs typeface="Calibri" pitchFamily="34" charset="-120"/>
+              </a:rPr>
+              <a:t>ABIERTAS</a:t>
+            </a:r>
+            <a:endParaRPr lang="en-US" sz="950" dirty="0"/>
+          </a:p>
+        </p:txBody>
+      </p:sp>
+      <p:sp>
+        <p:nvSpPr>
+          <p:cNvPr id="13" name="Text 9"/>
+          <p:cNvSpPr/>
+          <p:nvPr/>
+        </p:nvSpPr>
+        <p:spPr>
+          <a:xfrm>
+            <a:off x="5120640" y="4462272"/>
+            <a:ext cx="777240" cy="274320"/>
+          </a:xfrm>
+          <a:prstGeom prst="rect">
+            <a:avLst/>
+          </a:prstGeom>
+          <a:noFill/>
+          <a:ln/>
+        </p:spPr>
+        <p:txBody>
+          <a:bodyPr wrap="square" lIns="0" tIns="0" rIns="0" bIns="0" rtlCol="0" anchor="ctr"/>
+          <a:lstStyle/>
+          <a:p>
+            <a:pPr algn="r" indent="0" marL="0">
+              <a:buNone/>
+            </a:pPr>
+            <a:r>
+              <a:rPr lang="en-US" sz="950" b="1" spc="50" kern="0" dirty="0">
+                <a:solidFill>
+                  <a:srgbClr val="56606E"/>
+                </a:solidFill>
+                <a:latin typeface="Calibri" pitchFamily="34" charset="0"/>
+                <a:ea typeface="Calibri" pitchFamily="34" charset="-122"/>
+                <a:cs typeface="Calibri" pitchFamily="34" charset="-120"/>
+              </a:rPr>
+              <a:t>ATRASADAS</a:t>
+            </a:r>
+            <a:endParaRPr lang="en-US" sz="950" dirty="0"/>
+          </a:p>
+        </p:txBody>
+      </p:sp>
+      <p:sp>
+        <p:nvSpPr>
+          <p:cNvPr id="14" name="Text 10"/>
+          <p:cNvSpPr/>
+          <p:nvPr/>
+        </p:nvSpPr>
+        <p:spPr>
+          <a:xfrm>
+            <a:off x="5943600" y="4462272"/>
             <a:ext cx="914400" cy="274320"/>
           </a:xfrm>
           <a:prstGeom prst="rect">
@@ -26535,7 +26691,7 @@
                 <a:ea typeface="Calibri" pitchFamily="34" charset="-122"/>
                 <a:cs typeface="Calibri" pitchFamily="34" charset="-120"/>
               </a:rPr>
-              <a:t>CERRADAS</a:t>
+              <a:t>T. RESPUESTA</a:t>
             </a:r>
             <a:endParaRPr lang="en-US" sz="950" dirty="0"/>
           </a:p>
@@ -26543,92 +26699,14 @@
       </p:sp>
       <p:sp>
         <p:nvSpPr>
-          <p:cNvPr id="11" name="Text 7"/>
-          <p:cNvSpPr/>
-          <p:nvPr/>
-        </p:nvSpPr>
-        <p:spPr>
-          <a:xfrm>
-            <a:off x="4434840" y="4462272"/>
-            <a:ext cx="868680" cy="274320"/>
-          </a:xfrm>
-          <a:prstGeom prst="rect">
-            <a:avLst/>
-          </a:prstGeom>
-          <a:noFill/>
-          <a:ln/>
-        </p:spPr>
-        <p:txBody>
-          <a:bodyPr wrap="square" lIns="0" tIns="0" rIns="0" bIns="0" rtlCol="0" anchor="ctr"/>
-          <a:lstStyle/>
-          <a:p>
-            <a:pPr algn="r" indent="0" marL="0">
-              <a:buNone/>
-            </a:pPr>
-            <a:r>
-              <a:rPr lang="en-US" sz="950" b="1" spc="50" kern="0" dirty="0">
-                <a:solidFill>
-                  <a:srgbClr val="56606E"/>
-                </a:solidFill>
-                <a:latin typeface="Calibri" pitchFamily="34" charset="0"/>
-                <a:ea typeface="Calibri" pitchFamily="34" charset="-122"/>
-                <a:cs typeface="Calibri" pitchFamily="34" charset="-120"/>
-              </a:rPr>
-              <a:t>ABIERTAS</a:t>
-            </a:r>
-            <a:endParaRPr lang="en-US" sz="950" dirty="0"/>
-          </a:p>
-        </p:txBody>
-      </p:sp>
-      <p:sp>
-        <p:nvSpPr>
-          <p:cNvPr id="12" name="Text 8"/>
-          <p:cNvSpPr/>
-          <p:nvPr/>
-        </p:nvSpPr>
-        <p:spPr>
-          <a:xfrm>
-            <a:off x="5394960" y="4462272"/>
-            <a:ext cx="1051560" cy="274320"/>
-          </a:xfrm>
-          <a:prstGeom prst="rect">
-            <a:avLst/>
-          </a:prstGeom>
-          <a:noFill/>
-          <a:ln/>
-        </p:spPr>
-        <p:txBody>
-          <a:bodyPr wrap="square" lIns="0" tIns="0" rIns="0" bIns="0" rtlCol="0" anchor="ctr"/>
-          <a:lstStyle/>
-          <a:p>
-            <a:pPr algn="r" indent="0" marL="0">
-              <a:buNone/>
-            </a:pPr>
-            <a:r>
-              <a:rPr lang="en-US" sz="950" b="1" spc="50" kern="0" dirty="0">
-                <a:solidFill>
-                  <a:srgbClr val="56606E"/>
-                </a:solidFill>
-                <a:latin typeface="Calibri" pitchFamily="34" charset="0"/>
-                <a:ea typeface="Calibri" pitchFamily="34" charset="-122"/>
-                <a:cs typeface="Calibri" pitchFamily="34" charset="-120"/>
-              </a:rPr>
-              <a:t>ANTIG. MEDIANA</a:t>
-            </a:r>
-            <a:endParaRPr lang="en-US" sz="950" dirty="0"/>
-          </a:p>
-        </p:txBody>
-      </p:sp>
-      <p:sp>
-        <p:nvSpPr>
-          <p:cNvPr id="13" name="Shape 9"/>
+          <p:cNvPr id="15" name="Shape 11"/>
           <p:cNvSpPr/>
           <p:nvPr/>
         </p:nvSpPr>
         <p:spPr>
           <a:xfrm>
             <a:off x="502920" y="4773168"/>
-            <a:ext cx="5943600" cy="0"/>
+            <a:ext cx="6355080" cy="0"/>
           </a:xfrm>
           <a:prstGeom prst="line">
             <a:avLst/>
@@ -26644,14 +26722,14 @@
       </p:sp>
       <p:sp>
         <p:nvSpPr>
-          <p:cNvPr id="14" name="Text 10"/>
+          <p:cNvPr id="16" name="Text 12"/>
           <p:cNvSpPr/>
           <p:nvPr/>
         </p:nvSpPr>
         <p:spPr>
           <a:xfrm>
             <a:off x="502920" y="4901184"/>
-            <a:ext cx="1783080" cy="192024"/>
+            <a:ext cx="1463040" cy="192024"/>
           </a:xfrm>
           <a:prstGeom prst="rect">
             <a:avLst/>
@@ -26667,7 +26745,7 @@
               <a:buNone/>
             </a:pPr>
             <a:r>
-              <a:rPr lang="en-US" sz="1100" dirty="0">
+              <a:rPr lang="en-US" sz="1050" dirty="0">
                 <a:solidFill>
                   <a:srgbClr val="2E6FB5"/>
                 </a:solidFill>
@@ -26677,20 +26755,20 @@
               </a:rPr>
               <a:t>Interna (Besalco)</a:t>
             </a:r>
-            <a:endParaRPr lang="en-US" sz="1100" dirty="0"/>
-          </a:p>
-        </p:txBody>
-      </p:sp>
-      <p:sp>
-        <p:nvSpPr>
-          <p:cNvPr id="15" name="Text 11"/>
-          <p:cNvSpPr/>
-          <p:nvPr/>
-        </p:nvSpPr>
-        <p:spPr>
-          <a:xfrm>
-            <a:off x="2377440" y="4901184"/>
-            <a:ext cx="960120" cy="192024"/>
+            <a:endParaRPr lang="en-US" sz="1050" dirty="0"/>
+          </a:p>
+        </p:txBody>
+      </p:sp>
+      <p:sp>
+        <p:nvSpPr>
+          <p:cNvPr id="17" name="Text 13"/>
+          <p:cNvSpPr/>
+          <p:nvPr/>
+        </p:nvSpPr>
+        <p:spPr>
+          <a:xfrm>
+            <a:off x="2011680" y="4901184"/>
+            <a:ext cx="731520" cy="192024"/>
           </a:xfrm>
           <a:prstGeom prst="rect">
             <a:avLst/>
@@ -26706,7 +26784,7 @@
               <a:buNone/>
             </a:pPr>
             <a:r>
-              <a:rPr lang="en-US" sz="1100" dirty="0">
+              <a:rPr lang="en-US" sz="1050" dirty="0">
                 <a:solidFill>
                   <a:srgbClr val="1A2433"/>
                 </a:solidFill>
@@ -26716,19 +26794,175 @@
               </a:rPr>
               <a:t>162</a:t>
             </a:r>
-            <a:endParaRPr lang="en-US" sz="1100" dirty="0"/>
-          </a:p>
-        </p:txBody>
-      </p:sp>
-      <p:sp>
-        <p:nvSpPr>
-          <p:cNvPr id="16" name="Text 12"/>
-          <p:cNvSpPr/>
-          <p:nvPr/>
-        </p:nvSpPr>
-        <p:spPr>
-          <a:xfrm>
-            <a:off x="3429000" y="4901184"/>
+            <a:endParaRPr lang="en-US" sz="1050" dirty="0"/>
+          </a:p>
+        </p:txBody>
+      </p:sp>
+      <p:sp>
+        <p:nvSpPr>
+          <p:cNvPr id="18" name="Text 14"/>
+          <p:cNvSpPr/>
+          <p:nvPr/>
+        </p:nvSpPr>
+        <p:spPr>
+          <a:xfrm>
+            <a:off x="2788920" y="4901184"/>
+            <a:ext cx="731520" cy="192024"/>
+          </a:xfrm>
+          <a:prstGeom prst="rect">
+            <a:avLst/>
+          </a:prstGeom>
+          <a:noFill/>
+          <a:ln/>
+        </p:spPr>
+        <p:txBody>
+          <a:bodyPr wrap="square" lIns="0" tIns="0" rIns="0" bIns="0" rtlCol="0" anchor="ctr"/>
+          <a:lstStyle/>
+          <a:p>
+            <a:pPr algn="r" indent="0" marL="0">
+              <a:buNone/>
+            </a:pPr>
+            <a:r>
+              <a:rPr lang="en-US" sz="1050" dirty="0">
+                <a:solidFill>
+                  <a:srgbClr val="1A2433"/>
+                </a:solidFill>
+                <a:latin typeface="Calibri" pitchFamily="34" charset="0"/>
+                <a:ea typeface="Calibri" pitchFamily="34" charset="-122"/>
+                <a:cs typeface="Calibri" pitchFamily="34" charset="-120"/>
+              </a:rPr>
+              <a:t>157</a:t>
+            </a:r>
+            <a:endParaRPr lang="en-US" sz="1050" dirty="0"/>
+          </a:p>
+        </p:txBody>
+      </p:sp>
+      <p:sp>
+        <p:nvSpPr>
+          <p:cNvPr id="19" name="Text 15"/>
+          <p:cNvSpPr/>
+          <p:nvPr/>
+        </p:nvSpPr>
+        <p:spPr>
+          <a:xfrm>
+            <a:off x="3566160" y="4901184"/>
+            <a:ext cx="731520" cy="192024"/>
+          </a:xfrm>
+          <a:prstGeom prst="rect">
+            <a:avLst/>
+          </a:prstGeom>
+          <a:noFill/>
+          <a:ln/>
+        </p:spPr>
+        <p:txBody>
+          <a:bodyPr wrap="square" lIns="0" tIns="0" rIns="0" bIns="0" rtlCol="0" anchor="ctr"/>
+          <a:lstStyle/>
+          <a:p>
+            <a:pPr algn="r" indent="0" marL="0">
+              <a:buNone/>
+            </a:pPr>
+            <a:r>
+              <a:rPr lang="en-US" sz="1050" dirty="0">
+                <a:solidFill>
+                  <a:srgbClr val="1A2433"/>
+                </a:solidFill>
+                <a:latin typeface="Calibri" pitchFamily="34" charset="0"/>
+                <a:ea typeface="Calibri" pitchFamily="34" charset="-122"/>
+                <a:cs typeface="Calibri" pitchFamily="34" charset="-120"/>
+              </a:rPr>
+              <a:t>96,9%</a:t>
+            </a:r>
+            <a:endParaRPr lang="en-US" sz="1050" dirty="0"/>
+          </a:p>
+        </p:txBody>
+      </p:sp>
+      <p:sp>
+        <p:nvSpPr>
+          <p:cNvPr id="20" name="Text 16"/>
+          <p:cNvSpPr/>
+          <p:nvPr/>
+        </p:nvSpPr>
+        <p:spPr>
+          <a:xfrm>
+            <a:off x="4343400" y="4901184"/>
+            <a:ext cx="731520" cy="192024"/>
+          </a:xfrm>
+          <a:prstGeom prst="rect">
+            <a:avLst/>
+          </a:prstGeom>
+          <a:noFill/>
+          <a:ln/>
+        </p:spPr>
+        <p:txBody>
+          <a:bodyPr wrap="square" lIns="0" tIns="0" rIns="0" bIns="0" rtlCol="0" anchor="ctr"/>
+          <a:lstStyle/>
+          <a:p>
+            <a:pPr algn="r" indent="0" marL="0">
+              <a:buNone/>
+            </a:pPr>
+            <a:r>
+              <a:rPr lang="en-US" sz="1050" dirty="0">
+                <a:solidFill>
+                  <a:srgbClr val="C0392B"/>
+                </a:solidFill>
+                <a:latin typeface="Calibri" pitchFamily="34" charset="0"/>
+                <a:ea typeface="Calibri" pitchFamily="34" charset="-122"/>
+                <a:cs typeface="Calibri" pitchFamily="34" charset="-120"/>
+              </a:rPr>
+              <a:t>5</a:t>
+            </a:r>
+            <a:endParaRPr lang="en-US" sz="1050" dirty="0"/>
+          </a:p>
+        </p:txBody>
+      </p:sp>
+      <p:sp>
+        <p:nvSpPr>
+          <p:cNvPr id="21" name="Text 17"/>
+          <p:cNvSpPr/>
+          <p:nvPr/>
+        </p:nvSpPr>
+        <p:spPr>
+          <a:xfrm>
+            <a:off x="5120640" y="4901184"/>
+            <a:ext cx="777240" cy="192024"/>
+          </a:xfrm>
+          <a:prstGeom prst="rect">
+            <a:avLst/>
+          </a:prstGeom>
+          <a:noFill/>
+          <a:ln/>
+        </p:spPr>
+        <p:txBody>
+          <a:bodyPr wrap="square" lIns="0" tIns="0" rIns="0" bIns="0" rtlCol="0" anchor="ctr"/>
+          <a:lstStyle/>
+          <a:p>
+            <a:pPr algn="r" indent="0" marL="0">
+              <a:buNone/>
+            </a:pPr>
+            <a:r>
+              <a:rPr lang="en-US" sz="1050" dirty="0">
+                <a:solidFill>
+                  <a:srgbClr val="C0392B"/>
+                </a:solidFill>
+                <a:latin typeface="Calibri" pitchFamily="34" charset="0"/>
+                <a:ea typeface="Calibri" pitchFamily="34" charset="-122"/>
+                <a:cs typeface="Calibri" pitchFamily="34" charset="-120"/>
+              </a:rPr>
+              <a:t>5</a:t>
+            </a:r>
+            <a:endParaRPr lang="en-US" sz="1050" dirty="0"/>
+          </a:p>
+        </p:txBody>
+      </p:sp>
+      <p:sp>
+        <p:nvSpPr>
+          <p:cNvPr id="22" name="Text 18"/>
+          <p:cNvSpPr/>
+          <p:nvPr/>
+        </p:nvSpPr>
+        <p:spPr>
+          <a:xfrm>
+            <a:off x="5943600" y="4901184"/>
             <a:ext cx="914400" cy="192024"/>
           </a:xfrm>
           <a:prstGeom prst="rect">
@@ -26745,7 +26979,7 @@
               <a:buNone/>
             </a:pPr>
             <a:r>
-              <a:rPr lang="en-US" sz="1100" dirty="0">
+              <a:rPr lang="en-US" sz="1050" dirty="0">
                 <a:solidFill>
                   <a:srgbClr val="1A2433"/>
                 </a:solidFill>
@@ -26753,100 +26987,22 @@
                 <a:ea typeface="Calibri" pitchFamily="34" charset="-122"/>
                 <a:cs typeface="Calibri" pitchFamily="34" charset="-120"/>
               </a:rPr>
-              <a:t>157</a:t>
-            </a:r>
-            <a:endParaRPr lang="en-US" sz="1100" dirty="0"/>
-          </a:p>
-        </p:txBody>
-      </p:sp>
-      <p:sp>
-        <p:nvSpPr>
-          <p:cNvPr id="17" name="Text 13"/>
-          <p:cNvSpPr/>
-          <p:nvPr/>
-        </p:nvSpPr>
-        <p:spPr>
-          <a:xfrm>
-            <a:off x="4434840" y="4901184"/>
-            <a:ext cx="868680" cy="192024"/>
-          </a:xfrm>
-          <a:prstGeom prst="rect">
-            <a:avLst/>
-          </a:prstGeom>
-          <a:noFill/>
-          <a:ln/>
-        </p:spPr>
-        <p:txBody>
-          <a:bodyPr wrap="square" lIns="0" tIns="0" rIns="0" bIns="0" rtlCol="0" anchor="ctr"/>
-          <a:lstStyle/>
-          <a:p>
-            <a:pPr algn="r" indent="0" marL="0">
-              <a:buNone/>
-            </a:pPr>
-            <a:r>
-              <a:rPr lang="en-US" sz="1100" dirty="0">
-                <a:solidFill>
-                  <a:srgbClr val="C0392B"/>
-                </a:solidFill>
-                <a:latin typeface="Calibri" pitchFamily="34" charset="0"/>
-                <a:ea typeface="Calibri" pitchFamily="34" charset="-122"/>
-                <a:cs typeface="Calibri" pitchFamily="34" charset="-120"/>
-              </a:rPr>
-              <a:t>5</a:t>
-            </a:r>
-            <a:endParaRPr lang="en-US" sz="1100" dirty="0"/>
-          </a:p>
-        </p:txBody>
-      </p:sp>
-      <p:sp>
-        <p:nvSpPr>
-          <p:cNvPr id="18" name="Text 14"/>
-          <p:cNvSpPr/>
-          <p:nvPr/>
-        </p:nvSpPr>
-        <p:spPr>
-          <a:xfrm>
-            <a:off x="5394960" y="4901184"/>
-            <a:ext cx="1051560" cy="192024"/>
-          </a:xfrm>
-          <a:prstGeom prst="rect">
-            <a:avLst/>
-          </a:prstGeom>
-          <a:noFill/>
-          <a:ln/>
-        </p:spPr>
-        <p:txBody>
-          <a:bodyPr wrap="square" lIns="0" tIns="0" rIns="0" bIns="0" rtlCol="0" anchor="ctr"/>
-          <a:lstStyle/>
-          <a:p>
-            <a:pPr algn="r" indent="0" marL="0">
-              <a:buNone/>
-            </a:pPr>
-            <a:r>
-              <a:rPr lang="en-US" sz="1100" dirty="0">
-                <a:solidFill>
-                  <a:srgbClr val="1A2433"/>
-                </a:solidFill>
-                <a:latin typeface="Calibri" pitchFamily="34" charset="0"/>
-                <a:ea typeface="Calibri" pitchFamily="34" charset="-122"/>
-                <a:cs typeface="Calibri" pitchFamily="34" charset="-120"/>
-              </a:rPr>
-              <a:t>224 d</a:t>
-            </a:r>
-            <a:endParaRPr lang="en-US" sz="1100" dirty="0"/>
-          </a:p>
-        </p:txBody>
-      </p:sp>
-      <p:sp>
-        <p:nvSpPr>
-          <p:cNvPr id="19" name="Shape 15"/>
+              <a:t>65 d</a:t>
+            </a:r>
+            <a:endParaRPr lang="en-US" sz="1050" dirty="0"/>
+          </a:p>
+        </p:txBody>
+      </p:sp>
+      <p:sp>
+        <p:nvSpPr>
+          <p:cNvPr id="23" name="Shape 19"/>
           <p:cNvSpPr/>
           <p:nvPr/>
         </p:nvSpPr>
         <p:spPr>
           <a:xfrm>
             <a:off x="502920" y="5129784"/>
-            <a:ext cx="5943600" cy="0"/>
+            <a:ext cx="6355080" cy="0"/>
           </a:xfrm>
           <a:prstGeom prst="line">
             <a:avLst/>
@@ -26862,14 +27018,14 @@
       </p:sp>
       <p:sp>
         <p:nvSpPr>
-          <p:cNvPr id="20" name="Shape 16"/>
+          <p:cNvPr id="24" name="Shape 20"/>
           <p:cNvSpPr/>
           <p:nvPr/>
         </p:nvSpPr>
         <p:spPr>
           <a:xfrm>
             <a:off x="457200" y="5138928"/>
-            <a:ext cx="5989320" cy="283464"/>
+            <a:ext cx="6400800" cy="283464"/>
           </a:xfrm>
           <a:prstGeom prst="rect">
             <a:avLst/>
@@ -26882,14 +27038,14 @@
       </p:sp>
       <p:sp>
         <p:nvSpPr>
-          <p:cNvPr id="21" name="Text 17"/>
+          <p:cNvPr id="25" name="Text 21"/>
           <p:cNvSpPr/>
           <p:nvPr/>
         </p:nvSpPr>
         <p:spPr>
           <a:xfrm>
             <a:off x="502920" y="5184648"/>
-            <a:ext cx="1783080" cy="192024"/>
+            <a:ext cx="1463040" cy="192024"/>
           </a:xfrm>
           <a:prstGeom prst="rect">
             <a:avLst/>
@@ -26905,7 +27061,7 @@
               <a:buNone/>
             </a:pPr>
             <a:r>
-              <a:rPr lang="en-US" sz="1100" dirty="0">
+              <a:rPr lang="en-US" sz="1050" dirty="0">
                 <a:solidFill>
                   <a:srgbClr val="9A6B0F"/>
                 </a:solidFill>
@@ -26915,20 +27071,20 @@
               </a:rPr>
               <a:t>Externa · Cliente</a:t>
             </a:r>
-            <a:endParaRPr lang="en-US" sz="1100" dirty="0"/>
-          </a:p>
-        </p:txBody>
-      </p:sp>
-      <p:sp>
-        <p:nvSpPr>
-          <p:cNvPr id="22" name="Text 18"/>
-          <p:cNvSpPr/>
-          <p:nvPr/>
-        </p:nvSpPr>
-        <p:spPr>
-          <a:xfrm>
-            <a:off x="2377440" y="5184648"/>
-            <a:ext cx="960120" cy="192024"/>
+            <a:endParaRPr lang="en-US" sz="1050" dirty="0"/>
+          </a:p>
+        </p:txBody>
+      </p:sp>
+      <p:sp>
+        <p:nvSpPr>
+          <p:cNvPr id="26" name="Text 22"/>
+          <p:cNvSpPr/>
+          <p:nvPr/>
+        </p:nvSpPr>
+        <p:spPr>
+          <a:xfrm>
+            <a:off x="2011680" y="5184648"/>
+            <a:ext cx="731520" cy="192024"/>
           </a:xfrm>
           <a:prstGeom prst="rect">
             <a:avLst/>
@@ -26944,7 +27100,7 @@
               <a:buNone/>
             </a:pPr>
             <a:r>
-              <a:rPr lang="en-US" sz="1100" dirty="0">
+              <a:rPr lang="en-US" sz="1050" dirty="0">
                 <a:solidFill>
                   <a:srgbClr val="1A2433"/>
                 </a:solidFill>
@@ -26954,19 +27110,175 @@
               </a:rPr>
               <a:t>289</a:t>
             </a:r>
-            <a:endParaRPr lang="en-US" sz="1100" dirty="0"/>
-          </a:p>
-        </p:txBody>
-      </p:sp>
-      <p:sp>
-        <p:nvSpPr>
-          <p:cNvPr id="23" name="Text 19"/>
-          <p:cNvSpPr/>
-          <p:nvPr/>
-        </p:nvSpPr>
-        <p:spPr>
-          <a:xfrm>
-            <a:off x="3429000" y="5184648"/>
+            <a:endParaRPr lang="en-US" sz="1050" dirty="0"/>
+          </a:p>
+        </p:txBody>
+      </p:sp>
+      <p:sp>
+        <p:nvSpPr>
+          <p:cNvPr id="27" name="Text 23"/>
+          <p:cNvSpPr/>
+          <p:nvPr/>
+        </p:nvSpPr>
+        <p:spPr>
+          <a:xfrm>
+            <a:off x="2788920" y="5184648"/>
+            <a:ext cx="731520" cy="192024"/>
+          </a:xfrm>
+          <a:prstGeom prst="rect">
+            <a:avLst/>
+          </a:prstGeom>
+          <a:noFill/>
+          <a:ln/>
+        </p:spPr>
+        <p:txBody>
+          <a:bodyPr wrap="square" lIns="0" tIns="0" rIns="0" bIns="0" rtlCol="0" anchor="ctr"/>
+          <a:lstStyle/>
+          <a:p>
+            <a:pPr algn="r" indent="0" marL="0">
+              <a:buNone/>
+            </a:pPr>
+            <a:r>
+              <a:rPr lang="en-US" sz="1050" dirty="0">
+                <a:solidFill>
+                  <a:srgbClr val="1A2433"/>
+                </a:solidFill>
+                <a:latin typeface="Calibri" pitchFamily="34" charset="0"/>
+                <a:ea typeface="Calibri" pitchFamily="34" charset="-122"/>
+                <a:cs typeface="Calibri" pitchFamily="34" charset="-120"/>
+              </a:rPr>
+              <a:t>240</a:t>
+            </a:r>
+            <a:endParaRPr lang="en-US" sz="1050" dirty="0"/>
+          </a:p>
+        </p:txBody>
+      </p:sp>
+      <p:sp>
+        <p:nvSpPr>
+          <p:cNvPr id="28" name="Text 24"/>
+          <p:cNvSpPr/>
+          <p:nvPr/>
+        </p:nvSpPr>
+        <p:spPr>
+          <a:xfrm>
+            <a:off x="3566160" y="5184648"/>
+            <a:ext cx="731520" cy="192024"/>
+          </a:xfrm>
+          <a:prstGeom prst="rect">
+            <a:avLst/>
+          </a:prstGeom>
+          <a:noFill/>
+          <a:ln/>
+        </p:spPr>
+        <p:txBody>
+          <a:bodyPr wrap="square" lIns="0" tIns="0" rIns="0" bIns="0" rtlCol="0" anchor="ctr"/>
+          <a:lstStyle/>
+          <a:p>
+            <a:pPr algn="r" indent="0" marL="0">
+              <a:buNone/>
+            </a:pPr>
+            <a:r>
+              <a:rPr lang="en-US" sz="1050" dirty="0">
+                <a:solidFill>
+                  <a:srgbClr val="1A2433"/>
+                </a:solidFill>
+                <a:latin typeface="Calibri" pitchFamily="34" charset="0"/>
+                <a:ea typeface="Calibri" pitchFamily="34" charset="-122"/>
+                <a:cs typeface="Calibri" pitchFamily="34" charset="-120"/>
+              </a:rPr>
+              <a:t>83%</a:t>
+            </a:r>
+            <a:endParaRPr lang="en-US" sz="1050" dirty="0"/>
+          </a:p>
+        </p:txBody>
+      </p:sp>
+      <p:sp>
+        <p:nvSpPr>
+          <p:cNvPr id="29" name="Text 25"/>
+          <p:cNvSpPr/>
+          <p:nvPr/>
+        </p:nvSpPr>
+        <p:spPr>
+          <a:xfrm>
+            <a:off x="4343400" y="5184648"/>
+            <a:ext cx="731520" cy="192024"/>
+          </a:xfrm>
+          <a:prstGeom prst="rect">
+            <a:avLst/>
+          </a:prstGeom>
+          <a:noFill/>
+          <a:ln/>
+        </p:spPr>
+        <p:txBody>
+          <a:bodyPr wrap="square" lIns="0" tIns="0" rIns="0" bIns="0" rtlCol="0" anchor="ctr"/>
+          <a:lstStyle/>
+          <a:p>
+            <a:pPr algn="r" indent="0" marL="0">
+              <a:buNone/>
+            </a:pPr>
+            <a:r>
+              <a:rPr lang="en-US" sz="1050" dirty="0">
+                <a:solidFill>
+                  <a:srgbClr val="C0392B"/>
+                </a:solidFill>
+                <a:latin typeface="Calibri" pitchFamily="34" charset="0"/>
+                <a:ea typeface="Calibri" pitchFamily="34" charset="-122"/>
+                <a:cs typeface="Calibri" pitchFamily="34" charset="-120"/>
+              </a:rPr>
+              <a:t>49</a:t>
+            </a:r>
+            <a:endParaRPr lang="en-US" sz="1050" dirty="0"/>
+          </a:p>
+        </p:txBody>
+      </p:sp>
+      <p:sp>
+        <p:nvSpPr>
+          <p:cNvPr id="30" name="Text 26"/>
+          <p:cNvSpPr/>
+          <p:nvPr/>
+        </p:nvSpPr>
+        <p:spPr>
+          <a:xfrm>
+            <a:off x="5120640" y="5184648"/>
+            <a:ext cx="777240" cy="192024"/>
+          </a:xfrm>
+          <a:prstGeom prst="rect">
+            <a:avLst/>
+          </a:prstGeom>
+          <a:noFill/>
+          <a:ln/>
+        </p:spPr>
+        <p:txBody>
+          <a:bodyPr wrap="square" lIns="0" tIns="0" rIns="0" bIns="0" rtlCol="0" anchor="ctr"/>
+          <a:lstStyle/>
+          <a:p>
+            <a:pPr algn="r" indent="0" marL="0">
+              <a:buNone/>
+            </a:pPr>
+            <a:r>
+              <a:rPr lang="en-US" sz="1050" dirty="0">
+                <a:solidFill>
+                  <a:srgbClr val="C0392B"/>
+                </a:solidFill>
+                <a:latin typeface="Calibri" pitchFamily="34" charset="0"/>
+                <a:ea typeface="Calibri" pitchFamily="34" charset="-122"/>
+                <a:cs typeface="Calibri" pitchFamily="34" charset="-120"/>
+              </a:rPr>
+              <a:t>46</a:t>
+            </a:r>
+            <a:endParaRPr lang="en-US" sz="1050" dirty="0"/>
+          </a:p>
+        </p:txBody>
+      </p:sp>
+      <p:sp>
+        <p:nvSpPr>
+          <p:cNvPr id="31" name="Text 27"/>
+          <p:cNvSpPr/>
+          <p:nvPr/>
+        </p:nvSpPr>
+        <p:spPr>
+          <a:xfrm>
+            <a:off x="5943600" y="5184648"/>
             <a:ext cx="914400" cy="192024"/>
           </a:xfrm>
           <a:prstGeom prst="rect">
@@ -26983,7 +27295,7 @@
               <a:buNone/>
             </a:pPr>
             <a:r>
-              <a:rPr lang="en-US" sz="1100" dirty="0">
+              <a:rPr lang="en-US" sz="1050" dirty="0">
                 <a:solidFill>
                   <a:srgbClr val="1A2433"/>
                 </a:solidFill>
@@ -26991,100 +27303,22 @@
                 <a:ea typeface="Calibri" pitchFamily="34" charset="-122"/>
                 <a:cs typeface="Calibri" pitchFamily="34" charset="-120"/>
               </a:rPr>
-              <a:t>240</a:t>
-            </a:r>
-            <a:endParaRPr lang="en-US" sz="1100" dirty="0"/>
-          </a:p>
-        </p:txBody>
-      </p:sp>
-      <p:sp>
-        <p:nvSpPr>
-          <p:cNvPr id="24" name="Text 20"/>
-          <p:cNvSpPr/>
-          <p:nvPr/>
-        </p:nvSpPr>
-        <p:spPr>
-          <a:xfrm>
-            <a:off x="4434840" y="5184648"/>
-            <a:ext cx="868680" cy="192024"/>
-          </a:xfrm>
-          <a:prstGeom prst="rect">
-            <a:avLst/>
-          </a:prstGeom>
-          <a:noFill/>
-          <a:ln/>
-        </p:spPr>
-        <p:txBody>
-          <a:bodyPr wrap="square" lIns="0" tIns="0" rIns="0" bIns="0" rtlCol="0" anchor="ctr"/>
-          <a:lstStyle/>
-          <a:p>
-            <a:pPr algn="r" indent="0" marL="0">
-              <a:buNone/>
-            </a:pPr>
-            <a:r>
-              <a:rPr lang="en-US" sz="1100" dirty="0">
-                <a:solidFill>
-                  <a:srgbClr val="C0392B"/>
-                </a:solidFill>
-                <a:latin typeface="Calibri" pitchFamily="34" charset="0"/>
-                <a:ea typeface="Calibri" pitchFamily="34" charset="-122"/>
-                <a:cs typeface="Calibri" pitchFamily="34" charset="-120"/>
-              </a:rPr>
-              <a:t>49</a:t>
-            </a:r>
-            <a:endParaRPr lang="en-US" sz="1100" dirty="0"/>
-          </a:p>
-        </p:txBody>
-      </p:sp>
-      <p:sp>
-        <p:nvSpPr>
-          <p:cNvPr id="25" name="Text 21"/>
-          <p:cNvSpPr/>
-          <p:nvPr/>
-        </p:nvSpPr>
-        <p:spPr>
-          <a:xfrm>
-            <a:off x="5394960" y="5184648"/>
-            <a:ext cx="1051560" cy="192024"/>
-          </a:xfrm>
-          <a:prstGeom prst="rect">
-            <a:avLst/>
-          </a:prstGeom>
-          <a:noFill/>
-          <a:ln/>
-        </p:spPr>
-        <p:txBody>
-          <a:bodyPr wrap="square" lIns="0" tIns="0" rIns="0" bIns="0" rtlCol="0" anchor="ctr"/>
-          <a:lstStyle/>
-          <a:p>
-            <a:pPr algn="r" indent="0" marL="0">
-              <a:buNone/>
-            </a:pPr>
-            <a:r>
-              <a:rPr lang="en-US" sz="1100" dirty="0">
-                <a:solidFill>
-                  <a:srgbClr val="1A2433"/>
-                </a:solidFill>
-                <a:latin typeface="Calibri" pitchFamily="34" charset="0"/>
-                <a:ea typeface="Calibri" pitchFamily="34" charset="-122"/>
-                <a:cs typeface="Calibri" pitchFamily="34" charset="-120"/>
-              </a:rPr>
-              <a:t>133 d</a:t>
-            </a:r>
-            <a:endParaRPr lang="en-US" sz="1100" dirty="0"/>
-          </a:p>
-        </p:txBody>
-      </p:sp>
-      <p:sp>
-        <p:nvSpPr>
-          <p:cNvPr id="26" name="Shape 22"/>
+              <a:t>49 d</a:t>
+            </a:r>
+            <a:endParaRPr lang="en-US" sz="1050" dirty="0"/>
+          </a:p>
+        </p:txBody>
+      </p:sp>
+      <p:sp>
+        <p:nvSpPr>
+          <p:cNvPr id="32" name="Shape 28"/>
           <p:cNvSpPr/>
           <p:nvPr/>
         </p:nvSpPr>
         <p:spPr>
           <a:xfrm>
             <a:off x="502920" y="5413248"/>
-            <a:ext cx="5943600" cy="0"/>
+            <a:ext cx="6355080" cy="0"/>
           </a:xfrm>
           <a:prstGeom prst="line">
             <a:avLst/>
@@ -27100,14 +27334,14 @@
       </p:sp>
       <p:sp>
         <p:nvSpPr>
-          <p:cNvPr id="27" name="Text 23"/>
+          <p:cNvPr id="33" name="Text 29"/>
           <p:cNvSpPr/>
           <p:nvPr/>
         </p:nvSpPr>
         <p:spPr>
           <a:xfrm>
             <a:off x="502920" y="5468112"/>
-            <a:ext cx="1783080" cy="192024"/>
+            <a:ext cx="1463040" cy="192024"/>
           </a:xfrm>
           <a:prstGeom prst="rect">
             <a:avLst/>
@@ -27123,7 +27357,7 @@
               <a:buNone/>
             </a:pPr>
             <a:r>
-              <a:rPr lang="en-US" sz="1100" dirty="0">
+              <a:rPr lang="en-US" sz="1050" dirty="0">
                 <a:solidFill>
                   <a:srgbClr val="8A5520"/>
                 </a:solidFill>
@@ -27133,20 +27367,20 @@
               </a:rPr>
               <a:t>Externa · Subcontrato</a:t>
             </a:r>
-            <a:endParaRPr lang="en-US" sz="1100" dirty="0"/>
-          </a:p>
-        </p:txBody>
-      </p:sp>
-      <p:sp>
-        <p:nvSpPr>
-          <p:cNvPr id="28" name="Text 24"/>
-          <p:cNvSpPr/>
-          <p:nvPr/>
-        </p:nvSpPr>
-        <p:spPr>
-          <a:xfrm>
-            <a:off x="2377440" y="5468112"/>
-            <a:ext cx="960120" cy="192024"/>
+            <a:endParaRPr lang="en-US" sz="1050" dirty="0"/>
+          </a:p>
+        </p:txBody>
+      </p:sp>
+      <p:sp>
+        <p:nvSpPr>
+          <p:cNvPr id="34" name="Text 30"/>
+          <p:cNvSpPr/>
+          <p:nvPr/>
+        </p:nvSpPr>
+        <p:spPr>
+          <a:xfrm>
+            <a:off x="2011680" y="5468112"/>
+            <a:ext cx="731520" cy="192024"/>
           </a:xfrm>
           <a:prstGeom prst="rect">
             <a:avLst/>
@@ -27162,7 +27396,7 @@
               <a:buNone/>
             </a:pPr>
             <a:r>
-              <a:rPr lang="en-US" sz="1100" dirty="0">
+              <a:rPr lang="en-US" sz="1050" dirty="0">
                 <a:solidFill>
                   <a:srgbClr val="1A2433"/>
                 </a:solidFill>
@@ -27172,19 +27406,175 @@
               </a:rPr>
               <a:t>48</a:t>
             </a:r>
-            <a:endParaRPr lang="en-US" sz="1100" dirty="0"/>
-          </a:p>
-        </p:txBody>
-      </p:sp>
-      <p:sp>
-        <p:nvSpPr>
-          <p:cNvPr id="29" name="Text 25"/>
-          <p:cNvSpPr/>
-          <p:nvPr/>
-        </p:nvSpPr>
-        <p:spPr>
-          <a:xfrm>
-            <a:off x="3429000" y="5468112"/>
+            <a:endParaRPr lang="en-US" sz="1050" dirty="0"/>
+          </a:p>
+        </p:txBody>
+      </p:sp>
+      <p:sp>
+        <p:nvSpPr>
+          <p:cNvPr id="35" name="Text 31"/>
+          <p:cNvSpPr/>
+          <p:nvPr/>
+        </p:nvSpPr>
+        <p:spPr>
+          <a:xfrm>
+            <a:off x="2788920" y="5468112"/>
+            <a:ext cx="731520" cy="192024"/>
+          </a:xfrm>
+          <a:prstGeom prst="rect">
+            <a:avLst/>
+          </a:prstGeom>
+          <a:noFill/>
+          <a:ln/>
+        </p:spPr>
+        <p:txBody>
+          <a:bodyPr wrap="square" lIns="0" tIns="0" rIns="0" bIns="0" rtlCol="0" anchor="ctr"/>
+          <a:lstStyle/>
+          <a:p>
+            <a:pPr algn="r" indent="0" marL="0">
+              <a:buNone/>
+            </a:pPr>
+            <a:r>
+              <a:rPr lang="en-US" sz="1050" dirty="0">
+                <a:solidFill>
+                  <a:srgbClr val="1A2433"/>
+                </a:solidFill>
+                <a:latin typeface="Calibri" pitchFamily="34" charset="0"/>
+                <a:ea typeface="Calibri" pitchFamily="34" charset="-122"/>
+                <a:cs typeface="Calibri" pitchFamily="34" charset="-120"/>
+              </a:rPr>
+              <a:t>48</a:t>
+            </a:r>
+            <a:endParaRPr lang="en-US" sz="1050" dirty="0"/>
+          </a:p>
+        </p:txBody>
+      </p:sp>
+      <p:sp>
+        <p:nvSpPr>
+          <p:cNvPr id="36" name="Text 32"/>
+          <p:cNvSpPr/>
+          <p:nvPr/>
+        </p:nvSpPr>
+        <p:spPr>
+          <a:xfrm>
+            <a:off x="3566160" y="5468112"/>
+            <a:ext cx="731520" cy="192024"/>
+          </a:xfrm>
+          <a:prstGeom prst="rect">
+            <a:avLst/>
+          </a:prstGeom>
+          <a:noFill/>
+          <a:ln/>
+        </p:spPr>
+        <p:txBody>
+          <a:bodyPr wrap="square" lIns="0" tIns="0" rIns="0" bIns="0" rtlCol="0" anchor="ctr"/>
+          <a:lstStyle/>
+          <a:p>
+            <a:pPr algn="r" indent="0" marL="0">
+              <a:buNone/>
+            </a:pPr>
+            <a:r>
+              <a:rPr lang="en-US" sz="1050" dirty="0">
+                <a:solidFill>
+                  <a:srgbClr val="1A2433"/>
+                </a:solidFill>
+                <a:latin typeface="Calibri" pitchFamily="34" charset="0"/>
+                <a:ea typeface="Calibri" pitchFamily="34" charset="-122"/>
+                <a:cs typeface="Calibri" pitchFamily="34" charset="-120"/>
+              </a:rPr>
+              <a:t>100%</a:t>
+            </a:r>
+            <a:endParaRPr lang="en-US" sz="1050" dirty="0"/>
+          </a:p>
+        </p:txBody>
+      </p:sp>
+      <p:sp>
+        <p:nvSpPr>
+          <p:cNvPr id="37" name="Text 33"/>
+          <p:cNvSpPr/>
+          <p:nvPr/>
+        </p:nvSpPr>
+        <p:spPr>
+          <a:xfrm>
+            <a:off x="4343400" y="5468112"/>
+            <a:ext cx="731520" cy="192024"/>
+          </a:xfrm>
+          <a:prstGeom prst="rect">
+            <a:avLst/>
+          </a:prstGeom>
+          <a:noFill/>
+          <a:ln/>
+        </p:spPr>
+        <p:txBody>
+          <a:bodyPr wrap="square" lIns="0" tIns="0" rIns="0" bIns="0" rtlCol="0" anchor="ctr"/>
+          <a:lstStyle/>
+          <a:p>
+            <a:pPr algn="r" indent="0" marL="0">
+              <a:buNone/>
+            </a:pPr>
+            <a:r>
+              <a:rPr lang="en-US" sz="1050" dirty="0">
+                <a:solidFill>
+                  <a:srgbClr val="56606E"/>
+                </a:solidFill>
+                <a:latin typeface="Calibri" pitchFamily="34" charset="0"/>
+                <a:ea typeface="Calibri" pitchFamily="34" charset="-122"/>
+                <a:cs typeface="Calibri" pitchFamily="34" charset="-120"/>
+              </a:rPr>
+              <a:t>—</a:t>
+            </a:r>
+            <a:endParaRPr lang="en-US" sz="1050" dirty="0"/>
+          </a:p>
+        </p:txBody>
+      </p:sp>
+      <p:sp>
+        <p:nvSpPr>
+          <p:cNvPr id="38" name="Text 34"/>
+          <p:cNvSpPr/>
+          <p:nvPr/>
+        </p:nvSpPr>
+        <p:spPr>
+          <a:xfrm>
+            <a:off x="5120640" y="5468112"/>
+            <a:ext cx="777240" cy="192024"/>
+          </a:xfrm>
+          <a:prstGeom prst="rect">
+            <a:avLst/>
+          </a:prstGeom>
+          <a:noFill/>
+          <a:ln/>
+        </p:spPr>
+        <p:txBody>
+          <a:bodyPr wrap="square" lIns="0" tIns="0" rIns="0" bIns="0" rtlCol="0" anchor="ctr"/>
+          <a:lstStyle/>
+          <a:p>
+            <a:pPr algn="r" indent="0" marL="0">
+              <a:buNone/>
+            </a:pPr>
+            <a:r>
+              <a:rPr lang="en-US" sz="1050" dirty="0">
+                <a:solidFill>
+                  <a:srgbClr val="56606E"/>
+                </a:solidFill>
+                <a:latin typeface="Calibri" pitchFamily="34" charset="0"/>
+                <a:ea typeface="Calibri" pitchFamily="34" charset="-122"/>
+                <a:cs typeface="Calibri" pitchFamily="34" charset="-120"/>
+              </a:rPr>
+              <a:t>—</a:t>
+            </a:r>
+            <a:endParaRPr lang="en-US" sz="1050" dirty="0"/>
+          </a:p>
+        </p:txBody>
+      </p:sp>
+      <p:sp>
+        <p:nvSpPr>
+          <p:cNvPr id="39" name="Text 35"/>
+          <p:cNvSpPr/>
+          <p:nvPr/>
+        </p:nvSpPr>
+        <p:spPr>
+          <a:xfrm>
+            <a:off x="5943600" y="5468112"/>
             <a:ext cx="914400" cy="192024"/>
           </a:xfrm>
           <a:prstGeom prst="rect">
@@ -27201,7 +27591,7 @@
               <a:buNone/>
             </a:pPr>
             <a:r>
-              <a:rPr lang="en-US" sz="1100" dirty="0">
+              <a:rPr lang="en-US" sz="1050" dirty="0">
                 <a:solidFill>
                   <a:srgbClr val="1A2433"/>
                 </a:solidFill>
@@ -27209,100 +27599,22 @@
                 <a:ea typeface="Calibri" pitchFamily="34" charset="-122"/>
                 <a:cs typeface="Calibri" pitchFamily="34" charset="-120"/>
               </a:rPr>
-              <a:t>48</a:t>
-            </a:r>
-            <a:endParaRPr lang="en-US" sz="1100" dirty="0"/>
-          </a:p>
-        </p:txBody>
-      </p:sp>
-      <p:sp>
-        <p:nvSpPr>
-          <p:cNvPr id="30" name="Text 26"/>
-          <p:cNvSpPr/>
-          <p:nvPr/>
-        </p:nvSpPr>
-        <p:spPr>
-          <a:xfrm>
-            <a:off x="4434840" y="5468112"/>
-            <a:ext cx="868680" cy="192024"/>
-          </a:xfrm>
-          <a:prstGeom prst="rect">
-            <a:avLst/>
-          </a:prstGeom>
-          <a:noFill/>
-          <a:ln/>
-        </p:spPr>
-        <p:txBody>
-          <a:bodyPr wrap="square" lIns="0" tIns="0" rIns="0" bIns="0" rtlCol="0" anchor="ctr"/>
-          <a:lstStyle/>
-          <a:p>
-            <a:pPr algn="r" indent="0" marL="0">
-              <a:buNone/>
-            </a:pPr>
-            <a:r>
-              <a:rPr lang="en-US" sz="1100" dirty="0">
-                <a:solidFill>
-                  <a:srgbClr val="56606E"/>
-                </a:solidFill>
-                <a:latin typeface="Calibri" pitchFamily="34" charset="0"/>
-                <a:ea typeface="Calibri" pitchFamily="34" charset="-122"/>
-                <a:cs typeface="Calibri" pitchFamily="34" charset="-120"/>
-              </a:rPr>
-              <a:t>—</a:t>
-            </a:r>
-            <a:endParaRPr lang="en-US" sz="1100" dirty="0"/>
-          </a:p>
-        </p:txBody>
-      </p:sp>
-      <p:sp>
-        <p:nvSpPr>
-          <p:cNvPr id="31" name="Text 27"/>
-          <p:cNvSpPr/>
-          <p:nvPr/>
-        </p:nvSpPr>
-        <p:spPr>
-          <a:xfrm>
-            <a:off x="5394960" y="5468112"/>
-            <a:ext cx="1051560" cy="192024"/>
-          </a:xfrm>
-          <a:prstGeom prst="rect">
-            <a:avLst/>
-          </a:prstGeom>
-          <a:noFill/>
-          <a:ln/>
-        </p:spPr>
-        <p:txBody>
-          <a:bodyPr wrap="square" lIns="0" tIns="0" rIns="0" bIns="0" rtlCol="0" anchor="ctr"/>
-          <a:lstStyle/>
-          <a:p>
-            <a:pPr algn="r" indent="0" marL="0">
-              <a:buNone/>
-            </a:pPr>
-            <a:r>
-              <a:rPr lang="en-US" sz="1100" dirty="0">
-                <a:solidFill>
-                  <a:srgbClr val="56606E"/>
-                </a:solidFill>
-                <a:latin typeface="Calibri" pitchFamily="34" charset="0"/>
-                <a:ea typeface="Calibri" pitchFamily="34" charset="-122"/>
-                <a:cs typeface="Calibri" pitchFamily="34" charset="-120"/>
-              </a:rPr>
-              <a:t>—</a:t>
-            </a:r>
-            <a:endParaRPr lang="en-US" sz="1100" dirty="0"/>
-          </a:p>
-        </p:txBody>
-      </p:sp>
-      <p:sp>
-        <p:nvSpPr>
-          <p:cNvPr id="32" name="Shape 28"/>
+              <a:t>179 d</a:t>
+            </a:r>
+            <a:endParaRPr lang="en-US" sz="1050" dirty="0"/>
+          </a:p>
+        </p:txBody>
+      </p:sp>
+      <p:sp>
+        <p:nvSpPr>
+          <p:cNvPr id="40" name="Shape 36"/>
           <p:cNvSpPr/>
           <p:nvPr/>
         </p:nvSpPr>
         <p:spPr>
           <a:xfrm>
             <a:off x="502920" y="5696712"/>
-            <a:ext cx="5943600" cy="0"/>
+            <a:ext cx="6355080" cy="0"/>
           </a:xfrm>
           <a:prstGeom prst="line">
             <a:avLst/>
@@ -27318,14 +27630,14 @@
       </p:sp>
       <p:sp>
         <p:nvSpPr>
-          <p:cNvPr id="33" name="Shape 29"/>
+          <p:cNvPr id="41" name="Shape 37"/>
           <p:cNvSpPr/>
           <p:nvPr/>
         </p:nvSpPr>
         <p:spPr>
           <a:xfrm>
             <a:off x="457200" y="5705856"/>
-            <a:ext cx="5989320" cy="283464"/>
+            <a:ext cx="6400800" cy="283464"/>
           </a:xfrm>
           <a:prstGeom prst="rect">
             <a:avLst/>
@@ -27338,14 +27650,14 @@
       </p:sp>
       <p:sp>
         <p:nvSpPr>
-          <p:cNvPr id="34" name="Text 30"/>
+          <p:cNvPr id="42" name="Text 38"/>
           <p:cNvSpPr/>
           <p:nvPr/>
         </p:nvSpPr>
         <p:spPr>
           <a:xfrm>
             <a:off x="502920" y="5751576"/>
-            <a:ext cx="1783080" cy="192024"/>
+            <a:ext cx="1463040" cy="192024"/>
           </a:xfrm>
           <a:prstGeom prst="rect">
             <a:avLst/>
@@ -27361,7 +27673,7 @@
               <a:buNone/>
             </a:pPr>
             <a:r>
-              <a:rPr lang="en-US" sz="1100" dirty="0">
+              <a:rPr lang="en-US" sz="1050" dirty="0">
                 <a:solidFill>
                   <a:srgbClr val="5B6B7C"/>
                 </a:solidFill>
@@ -27371,20 +27683,20 @@
               </a:rPr>
               <a:t>Sin clasificar</a:t>
             </a:r>
-            <a:endParaRPr lang="en-US" sz="1100" dirty="0"/>
-          </a:p>
-        </p:txBody>
-      </p:sp>
-      <p:sp>
-        <p:nvSpPr>
-          <p:cNvPr id="35" name="Text 31"/>
-          <p:cNvSpPr/>
-          <p:nvPr/>
-        </p:nvSpPr>
-        <p:spPr>
-          <a:xfrm>
-            <a:off x="2377440" y="5751576"/>
-            <a:ext cx="960120" cy="192024"/>
+            <a:endParaRPr lang="en-US" sz="1050" dirty="0"/>
+          </a:p>
+        </p:txBody>
+      </p:sp>
+      <p:sp>
+        <p:nvSpPr>
+          <p:cNvPr id="43" name="Text 39"/>
+          <p:cNvSpPr/>
+          <p:nvPr/>
+        </p:nvSpPr>
+        <p:spPr>
+          <a:xfrm>
+            <a:off x="2011680" y="5751576"/>
+            <a:ext cx="731520" cy="192024"/>
           </a:xfrm>
           <a:prstGeom prst="rect">
             <a:avLst/>
@@ -27400,7 +27712,7 @@
               <a:buNone/>
             </a:pPr>
             <a:r>
-              <a:rPr lang="en-US" sz="1100" dirty="0">
+              <a:rPr lang="en-US" sz="1050" dirty="0">
                 <a:solidFill>
                   <a:srgbClr val="1A2433"/>
                 </a:solidFill>
@@ -27410,19 +27722,175 @@
               </a:rPr>
               <a:t>9</a:t>
             </a:r>
-            <a:endParaRPr lang="en-US" sz="1100" dirty="0"/>
-          </a:p>
-        </p:txBody>
-      </p:sp>
-      <p:sp>
-        <p:nvSpPr>
-          <p:cNvPr id="36" name="Text 32"/>
-          <p:cNvSpPr/>
-          <p:nvPr/>
-        </p:nvSpPr>
-        <p:spPr>
-          <a:xfrm>
-            <a:off x="3429000" y="5751576"/>
+            <a:endParaRPr lang="en-US" sz="1050" dirty="0"/>
+          </a:p>
+        </p:txBody>
+      </p:sp>
+      <p:sp>
+        <p:nvSpPr>
+          <p:cNvPr id="44" name="Text 40"/>
+          <p:cNvSpPr/>
+          <p:nvPr/>
+        </p:nvSpPr>
+        <p:spPr>
+          <a:xfrm>
+            <a:off x="2788920" y="5751576"/>
+            <a:ext cx="731520" cy="192024"/>
+          </a:xfrm>
+          <a:prstGeom prst="rect">
+            <a:avLst/>
+          </a:prstGeom>
+          <a:noFill/>
+          <a:ln/>
+        </p:spPr>
+        <p:txBody>
+          <a:bodyPr wrap="square" lIns="0" tIns="0" rIns="0" bIns="0" rtlCol="0" anchor="ctr"/>
+          <a:lstStyle/>
+          <a:p>
+            <a:pPr algn="r" indent="0" marL="0">
+              <a:buNone/>
+            </a:pPr>
+            <a:r>
+              <a:rPr lang="en-US" sz="1050" dirty="0">
+                <a:solidFill>
+                  <a:srgbClr val="1A2433"/>
+                </a:solidFill>
+                <a:latin typeface="Calibri" pitchFamily="34" charset="0"/>
+                <a:ea typeface="Calibri" pitchFamily="34" charset="-122"/>
+                <a:cs typeface="Calibri" pitchFamily="34" charset="-120"/>
+              </a:rPr>
+              <a:t>9</a:t>
+            </a:r>
+            <a:endParaRPr lang="en-US" sz="1050" dirty="0"/>
+          </a:p>
+        </p:txBody>
+      </p:sp>
+      <p:sp>
+        <p:nvSpPr>
+          <p:cNvPr id="45" name="Text 41"/>
+          <p:cNvSpPr/>
+          <p:nvPr/>
+        </p:nvSpPr>
+        <p:spPr>
+          <a:xfrm>
+            <a:off x="3566160" y="5751576"/>
+            <a:ext cx="731520" cy="192024"/>
+          </a:xfrm>
+          <a:prstGeom prst="rect">
+            <a:avLst/>
+          </a:prstGeom>
+          <a:noFill/>
+          <a:ln/>
+        </p:spPr>
+        <p:txBody>
+          <a:bodyPr wrap="square" lIns="0" tIns="0" rIns="0" bIns="0" rtlCol="0" anchor="ctr"/>
+          <a:lstStyle/>
+          <a:p>
+            <a:pPr algn="r" indent="0" marL="0">
+              <a:buNone/>
+            </a:pPr>
+            <a:r>
+              <a:rPr lang="en-US" sz="1050" dirty="0">
+                <a:solidFill>
+                  <a:srgbClr val="1A2433"/>
+                </a:solidFill>
+                <a:latin typeface="Calibri" pitchFamily="34" charset="0"/>
+                <a:ea typeface="Calibri" pitchFamily="34" charset="-122"/>
+                <a:cs typeface="Calibri" pitchFamily="34" charset="-120"/>
+              </a:rPr>
+              <a:t>100%</a:t>
+            </a:r>
+            <a:endParaRPr lang="en-US" sz="1050" dirty="0"/>
+          </a:p>
+        </p:txBody>
+      </p:sp>
+      <p:sp>
+        <p:nvSpPr>
+          <p:cNvPr id="46" name="Text 42"/>
+          <p:cNvSpPr/>
+          <p:nvPr/>
+        </p:nvSpPr>
+        <p:spPr>
+          <a:xfrm>
+            <a:off x="4343400" y="5751576"/>
+            <a:ext cx="731520" cy="192024"/>
+          </a:xfrm>
+          <a:prstGeom prst="rect">
+            <a:avLst/>
+          </a:prstGeom>
+          <a:noFill/>
+          <a:ln/>
+        </p:spPr>
+        <p:txBody>
+          <a:bodyPr wrap="square" lIns="0" tIns="0" rIns="0" bIns="0" rtlCol="0" anchor="ctr"/>
+          <a:lstStyle/>
+          <a:p>
+            <a:pPr algn="r" indent="0" marL="0">
+              <a:buNone/>
+            </a:pPr>
+            <a:r>
+              <a:rPr lang="en-US" sz="1050" dirty="0">
+                <a:solidFill>
+                  <a:srgbClr val="56606E"/>
+                </a:solidFill>
+                <a:latin typeface="Calibri" pitchFamily="34" charset="0"/>
+                <a:ea typeface="Calibri" pitchFamily="34" charset="-122"/>
+                <a:cs typeface="Calibri" pitchFamily="34" charset="-120"/>
+              </a:rPr>
+              <a:t>—</a:t>
+            </a:r>
+            <a:endParaRPr lang="en-US" sz="1050" dirty="0"/>
+          </a:p>
+        </p:txBody>
+      </p:sp>
+      <p:sp>
+        <p:nvSpPr>
+          <p:cNvPr id="47" name="Text 43"/>
+          <p:cNvSpPr/>
+          <p:nvPr/>
+        </p:nvSpPr>
+        <p:spPr>
+          <a:xfrm>
+            <a:off x="5120640" y="5751576"/>
+            <a:ext cx="777240" cy="192024"/>
+          </a:xfrm>
+          <a:prstGeom prst="rect">
+            <a:avLst/>
+          </a:prstGeom>
+          <a:noFill/>
+          <a:ln/>
+        </p:spPr>
+        <p:txBody>
+          <a:bodyPr wrap="square" lIns="0" tIns="0" rIns="0" bIns="0" rtlCol="0" anchor="ctr"/>
+          <a:lstStyle/>
+          <a:p>
+            <a:pPr algn="r" indent="0" marL="0">
+              <a:buNone/>
+            </a:pPr>
+            <a:r>
+              <a:rPr lang="en-US" sz="1050" dirty="0">
+                <a:solidFill>
+                  <a:srgbClr val="56606E"/>
+                </a:solidFill>
+                <a:latin typeface="Calibri" pitchFamily="34" charset="0"/>
+                <a:ea typeface="Calibri" pitchFamily="34" charset="-122"/>
+                <a:cs typeface="Calibri" pitchFamily="34" charset="-120"/>
+              </a:rPr>
+              <a:t>—</a:t>
+            </a:r>
+            <a:endParaRPr lang="en-US" sz="1050" dirty="0"/>
+          </a:p>
+        </p:txBody>
+      </p:sp>
+      <p:sp>
+        <p:nvSpPr>
+          <p:cNvPr id="48" name="Text 44"/>
+          <p:cNvSpPr/>
+          <p:nvPr/>
+        </p:nvSpPr>
+        <p:spPr>
+          <a:xfrm>
+            <a:off x="5943600" y="5751576"/>
             <a:ext cx="914400" cy="192024"/>
           </a:xfrm>
           <a:prstGeom prst="rect">
@@ -27439,7 +27907,7 @@
               <a:buNone/>
             </a:pPr>
             <a:r>
-              <a:rPr lang="en-US" sz="1100" dirty="0">
+              <a:rPr lang="en-US" sz="1050" dirty="0">
                 <a:solidFill>
                   <a:srgbClr val="1A2433"/>
                 </a:solidFill>
@@ -27447,100 +27915,22 @@
                 <a:ea typeface="Calibri" pitchFamily="34" charset="-122"/>
                 <a:cs typeface="Calibri" pitchFamily="34" charset="-120"/>
               </a:rPr>
-              <a:t>9</a:t>
-            </a:r>
-            <a:endParaRPr lang="en-US" sz="1100" dirty="0"/>
-          </a:p>
-        </p:txBody>
-      </p:sp>
-      <p:sp>
-        <p:nvSpPr>
-          <p:cNvPr id="37" name="Text 33"/>
-          <p:cNvSpPr/>
-          <p:nvPr/>
-        </p:nvSpPr>
-        <p:spPr>
-          <a:xfrm>
-            <a:off x="4434840" y="5751576"/>
-            <a:ext cx="868680" cy="192024"/>
-          </a:xfrm>
-          <a:prstGeom prst="rect">
-            <a:avLst/>
-          </a:prstGeom>
-          <a:noFill/>
-          <a:ln/>
-        </p:spPr>
-        <p:txBody>
-          <a:bodyPr wrap="square" lIns="0" tIns="0" rIns="0" bIns="0" rtlCol="0" anchor="ctr"/>
-          <a:lstStyle/>
-          <a:p>
-            <a:pPr algn="r" indent="0" marL="0">
-              <a:buNone/>
-            </a:pPr>
-            <a:r>
-              <a:rPr lang="en-US" sz="1100" dirty="0">
-                <a:solidFill>
-                  <a:srgbClr val="56606E"/>
-                </a:solidFill>
-                <a:latin typeface="Calibri" pitchFamily="34" charset="0"/>
-                <a:ea typeface="Calibri" pitchFamily="34" charset="-122"/>
-                <a:cs typeface="Calibri" pitchFamily="34" charset="-120"/>
-              </a:rPr>
-              <a:t>—</a:t>
-            </a:r>
-            <a:endParaRPr lang="en-US" sz="1100" dirty="0"/>
-          </a:p>
-        </p:txBody>
-      </p:sp>
-      <p:sp>
-        <p:nvSpPr>
-          <p:cNvPr id="38" name="Text 34"/>
-          <p:cNvSpPr/>
-          <p:nvPr/>
-        </p:nvSpPr>
-        <p:spPr>
-          <a:xfrm>
-            <a:off x="5394960" y="5751576"/>
-            <a:ext cx="1051560" cy="192024"/>
-          </a:xfrm>
-          <a:prstGeom prst="rect">
-            <a:avLst/>
-          </a:prstGeom>
-          <a:noFill/>
-          <a:ln/>
-        </p:spPr>
-        <p:txBody>
-          <a:bodyPr wrap="square" lIns="0" tIns="0" rIns="0" bIns="0" rtlCol="0" anchor="ctr"/>
-          <a:lstStyle/>
-          <a:p>
-            <a:pPr algn="r" indent="0" marL="0">
-              <a:buNone/>
-            </a:pPr>
-            <a:r>
-              <a:rPr lang="en-US" sz="1100" dirty="0">
-                <a:solidFill>
-                  <a:srgbClr val="56606E"/>
-                </a:solidFill>
-                <a:latin typeface="Calibri" pitchFamily="34" charset="0"/>
-                <a:ea typeface="Calibri" pitchFamily="34" charset="-122"/>
-                <a:cs typeface="Calibri" pitchFamily="34" charset="-120"/>
-              </a:rPr>
-              <a:t>—</a:t>
-            </a:r>
-            <a:endParaRPr lang="en-US" sz="1100" dirty="0"/>
-          </a:p>
-        </p:txBody>
-      </p:sp>
-      <p:sp>
-        <p:nvSpPr>
-          <p:cNvPr id="39" name="Shape 35"/>
+              <a:t>64 d</a:t>
+            </a:r>
+            <a:endParaRPr lang="en-US" sz="1050" dirty="0"/>
+          </a:p>
+        </p:txBody>
+      </p:sp>
+      <p:sp>
+        <p:nvSpPr>
+          <p:cNvPr id="49" name="Shape 45"/>
           <p:cNvSpPr/>
           <p:nvPr/>
         </p:nvSpPr>
         <p:spPr>
           <a:xfrm>
             <a:off x="502920" y="5980176"/>
-            <a:ext cx="5943600" cy="0"/>
+            <a:ext cx="6355080" cy="0"/>
           </a:xfrm>
           <a:prstGeom prst="line">
             <a:avLst/>
@@ -27556,14 +27946,14 @@
       </p:sp>
       <p:sp>
         <p:nvSpPr>
-          <p:cNvPr id="40" name="Text 36"/>
+          <p:cNvPr id="50" name="Text 46"/>
           <p:cNvSpPr/>
           <p:nvPr/>
         </p:nvSpPr>
         <p:spPr>
           <a:xfrm>
             <a:off x="502920" y="6035040"/>
-            <a:ext cx="1783080" cy="192024"/>
+            <a:ext cx="1463040" cy="192024"/>
           </a:xfrm>
           <a:prstGeom prst="rect">
             <a:avLst/>
@@ -27579,7 +27969,7 @@
               <a:buNone/>
             </a:pPr>
             <a:r>
-              <a:rPr lang="en-US" sz="1100" b="1" dirty="0">
+              <a:rPr lang="en-US" sz="1050" b="1" dirty="0">
                 <a:solidFill>
                   <a:srgbClr val="1A2433"/>
                 </a:solidFill>
@@ -27589,20 +27979,20 @@
               </a:rPr>
               <a:t>Todas las vías</a:t>
             </a:r>
-            <a:endParaRPr lang="en-US" sz="1100" dirty="0"/>
-          </a:p>
-        </p:txBody>
-      </p:sp>
-      <p:sp>
-        <p:nvSpPr>
-          <p:cNvPr id="41" name="Text 37"/>
-          <p:cNvSpPr/>
-          <p:nvPr/>
-        </p:nvSpPr>
-        <p:spPr>
-          <a:xfrm>
-            <a:off x="2377440" y="6035040"/>
-            <a:ext cx="960120" cy="192024"/>
+            <a:endParaRPr lang="en-US" sz="1050" dirty="0"/>
+          </a:p>
+        </p:txBody>
+      </p:sp>
+      <p:sp>
+        <p:nvSpPr>
+          <p:cNvPr id="51" name="Text 47"/>
+          <p:cNvSpPr/>
+          <p:nvPr/>
+        </p:nvSpPr>
+        <p:spPr>
+          <a:xfrm>
+            <a:off x="2011680" y="6035040"/>
+            <a:ext cx="731520" cy="192024"/>
           </a:xfrm>
           <a:prstGeom prst="rect">
             <a:avLst/>
@@ -27618,7 +28008,7 @@
               <a:buNone/>
             </a:pPr>
             <a:r>
-              <a:rPr lang="en-US" sz="1100" b="1" dirty="0">
+              <a:rPr lang="en-US" sz="1050" b="1" dirty="0">
                 <a:solidFill>
                   <a:srgbClr val="1A2433"/>
                 </a:solidFill>
@@ -27628,19 +28018,175 @@
               </a:rPr>
               <a:t>508</a:t>
             </a:r>
-            <a:endParaRPr lang="en-US" sz="1100" dirty="0"/>
-          </a:p>
-        </p:txBody>
-      </p:sp>
-      <p:sp>
-        <p:nvSpPr>
-          <p:cNvPr id="42" name="Text 38"/>
-          <p:cNvSpPr/>
-          <p:nvPr/>
-        </p:nvSpPr>
-        <p:spPr>
-          <a:xfrm>
-            <a:off x="3429000" y="6035040"/>
+            <a:endParaRPr lang="en-US" sz="1050" dirty="0"/>
+          </a:p>
+        </p:txBody>
+      </p:sp>
+      <p:sp>
+        <p:nvSpPr>
+          <p:cNvPr id="52" name="Text 48"/>
+          <p:cNvSpPr/>
+          <p:nvPr/>
+        </p:nvSpPr>
+        <p:spPr>
+          <a:xfrm>
+            <a:off x="2788920" y="6035040"/>
+            <a:ext cx="731520" cy="192024"/>
+          </a:xfrm>
+          <a:prstGeom prst="rect">
+            <a:avLst/>
+          </a:prstGeom>
+          <a:noFill/>
+          <a:ln/>
+        </p:spPr>
+        <p:txBody>
+          <a:bodyPr wrap="square" lIns="0" tIns="0" rIns="0" bIns="0" rtlCol="0" anchor="ctr"/>
+          <a:lstStyle/>
+          <a:p>
+            <a:pPr algn="r" indent="0" marL="0">
+              <a:buNone/>
+            </a:pPr>
+            <a:r>
+              <a:rPr lang="en-US" sz="1050" b="1" dirty="0">
+                <a:solidFill>
+                  <a:srgbClr val="1A2433"/>
+                </a:solidFill>
+                <a:latin typeface="Calibri" pitchFamily="34" charset="0"/>
+                <a:ea typeface="Calibri" pitchFamily="34" charset="-122"/>
+                <a:cs typeface="Calibri" pitchFamily="34" charset="-120"/>
+              </a:rPr>
+              <a:t>454</a:t>
+            </a:r>
+            <a:endParaRPr lang="en-US" sz="1050" dirty="0"/>
+          </a:p>
+        </p:txBody>
+      </p:sp>
+      <p:sp>
+        <p:nvSpPr>
+          <p:cNvPr id="53" name="Text 49"/>
+          <p:cNvSpPr/>
+          <p:nvPr/>
+        </p:nvSpPr>
+        <p:spPr>
+          <a:xfrm>
+            <a:off x="3566160" y="6035040"/>
+            <a:ext cx="731520" cy="192024"/>
+          </a:xfrm>
+          <a:prstGeom prst="rect">
+            <a:avLst/>
+          </a:prstGeom>
+          <a:noFill/>
+          <a:ln/>
+        </p:spPr>
+        <p:txBody>
+          <a:bodyPr wrap="square" lIns="0" tIns="0" rIns="0" bIns="0" rtlCol="0" anchor="ctr"/>
+          <a:lstStyle/>
+          <a:p>
+            <a:pPr algn="r" indent="0" marL="0">
+              <a:buNone/>
+            </a:pPr>
+            <a:r>
+              <a:rPr lang="en-US" sz="1050" b="1" dirty="0">
+                <a:solidFill>
+                  <a:srgbClr val="1A2433"/>
+                </a:solidFill>
+                <a:latin typeface="Calibri" pitchFamily="34" charset="0"/>
+                <a:ea typeface="Calibri" pitchFamily="34" charset="-122"/>
+                <a:cs typeface="Calibri" pitchFamily="34" charset="-120"/>
+              </a:rPr>
+              <a:t>89,4%</a:t>
+            </a:r>
+            <a:endParaRPr lang="en-US" sz="1050" dirty="0"/>
+          </a:p>
+        </p:txBody>
+      </p:sp>
+      <p:sp>
+        <p:nvSpPr>
+          <p:cNvPr id="54" name="Text 50"/>
+          <p:cNvSpPr/>
+          <p:nvPr/>
+        </p:nvSpPr>
+        <p:spPr>
+          <a:xfrm>
+            <a:off x="4343400" y="6035040"/>
+            <a:ext cx="731520" cy="192024"/>
+          </a:xfrm>
+          <a:prstGeom prst="rect">
+            <a:avLst/>
+          </a:prstGeom>
+          <a:noFill/>
+          <a:ln/>
+        </p:spPr>
+        <p:txBody>
+          <a:bodyPr wrap="square" lIns="0" tIns="0" rIns="0" bIns="0" rtlCol="0" anchor="ctr"/>
+          <a:lstStyle/>
+          <a:p>
+            <a:pPr algn="r" indent="0" marL="0">
+              <a:buNone/>
+            </a:pPr>
+            <a:r>
+              <a:rPr lang="en-US" sz="1050" b="1" dirty="0">
+                <a:solidFill>
+                  <a:srgbClr val="C0392B"/>
+                </a:solidFill>
+                <a:latin typeface="Calibri" pitchFamily="34" charset="0"/>
+                <a:ea typeface="Calibri" pitchFamily="34" charset="-122"/>
+                <a:cs typeface="Calibri" pitchFamily="34" charset="-120"/>
+              </a:rPr>
+              <a:t>54</a:t>
+            </a:r>
+            <a:endParaRPr lang="en-US" sz="1050" dirty="0"/>
+          </a:p>
+        </p:txBody>
+      </p:sp>
+      <p:sp>
+        <p:nvSpPr>
+          <p:cNvPr id="55" name="Text 51"/>
+          <p:cNvSpPr/>
+          <p:nvPr/>
+        </p:nvSpPr>
+        <p:spPr>
+          <a:xfrm>
+            <a:off x="5120640" y="6035040"/>
+            <a:ext cx="777240" cy="192024"/>
+          </a:xfrm>
+          <a:prstGeom prst="rect">
+            <a:avLst/>
+          </a:prstGeom>
+          <a:noFill/>
+          <a:ln/>
+        </p:spPr>
+        <p:txBody>
+          <a:bodyPr wrap="square" lIns="0" tIns="0" rIns="0" bIns="0" rtlCol="0" anchor="ctr"/>
+          <a:lstStyle/>
+          <a:p>
+            <a:pPr algn="r" indent="0" marL="0">
+              <a:buNone/>
+            </a:pPr>
+            <a:r>
+              <a:rPr lang="en-US" sz="1050" b="1" dirty="0">
+                <a:solidFill>
+                  <a:srgbClr val="C0392B"/>
+                </a:solidFill>
+                <a:latin typeface="Calibri" pitchFamily="34" charset="0"/>
+                <a:ea typeface="Calibri" pitchFamily="34" charset="-122"/>
+                <a:cs typeface="Calibri" pitchFamily="34" charset="-120"/>
+              </a:rPr>
+              <a:t>51</a:t>
+            </a:r>
+            <a:endParaRPr lang="en-US" sz="1050" dirty="0"/>
+          </a:p>
+        </p:txBody>
+      </p:sp>
+      <p:sp>
+        <p:nvSpPr>
+          <p:cNvPr id="56" name="Text 52"/>
+          <p:cNvSpPr/>
+          <p:nvPr/>
+        </p:nvSpPr>
+        <p:spPr>
+          <a:xfrm>
+            <a:off x="5943600" y="6035040"/>
             <a:ext cx="914400" cy="192024"/>
           </a:xfrm>
           <a:prstGeom prst="rect">
@@ -27657,7 +28203,7 @@
               <a:buNone/>
             </a:pPr>
             <a:r>
-              <a:rPr lang="en-US" sz="1100" b="1" dirty="0">
+              <a:rPr lang="en-US" sz="1050" b="1" dirty="0">
                 <a:solidFill>
                   <a:srgbClr val="1A2433"/>
                 </a:solidFill>
@@ -27665,100 +28211,22 @@
                 <a:ea typeface="Calibri" pitchFamily="34" charset="-122"/>
                 <a:cs typeface="Calibri" pitchFamily="34" charset="-120"/>
               </a:rPr>
-              <a:t>454</a:t>
-            </a:r>
-            <a:endParaRPr lang="en-US" sz="1100" dirty="0"/>
-          </a:p>
-        </p:txBody>
-      </p:sp>
-      <p:sp>
-        <p:nvSpPr>
-          <p:cNvPr id="43" name="Text 39"/>
-          <p:cNvSpPr/>
-          <p:nvPr/>
-        </p:nvSpPr>
-        <p:spPr>
-          <a:xfrm>
-            <a:off x="4434840" y="6035040"/>
-            <a:ext cx="868680" cy="192024"/>
-          </a:xfrm>
-          <a:prstGeom prst="rect">
-            <a:avLst/>
-          </a:prstGeom>
-          <a:noFill/>
-          <a:ln/>
-        </p:spPr>
-        <p:txBody>
-          <a:bodyPr wrap="square" lIns="0" tIns="0" rIns="0" bIns="0" rtlCol="0" anchor="ctr"/>
-          <a:lstStyle/>
-          <a:p>
-            <a:pPr algn="r" indent="0" marL="0">
-              <a:buNone/>
-            </a:pPr>
-            <a:r>
-              <a:rPr lang="en-US" sz="1100" b="1" dirty="0">
-                <a:solidFill>
-                  <a:srgbClr val="C0392B"/>
-                </a:solidFill>
-                <a:latin typeface="Calibri" pitchFamily="34" charset="0"/>
-                <a:ea typeface="Calibri" pitchFamily="34" charset="-122"/>
-                <a:cs typeface="Calibri" pitchFamily="34" charset="-120"/>
-              </a:rPr>
-              <a:t>54</a:t>
-            </a:r>
-            <a:endParaRPr lang="en-US" sz="1100" dirty="0"/>
-          </a:p>
-        </p:txBody>
-      </p:sp>
-      <p:sp>
-        <p:nvSpPr>
-          <p:cNvPr id="44" name="Text 40"/>
-          <p:cNvSpPr/>
-          <p:nvPr/>
-        </p:nvSpPr>
-        <p:spPr>
-          <a:xfrm>
-            <a:off x="5394960" y="6035040"/>
-            <a:ext cx="1051560" cy="192024"/>
-          </a:xfrm>
-          <a:prstGeom prst="rect">
-            <a:avLst/>
-          </a:prstGeom>
-          <a:noFill/>
-          <a:ln/>
-        </p:spPr>
-        <p:txBody>
-          <a:bodyPr wrap="square" lIns="0" tIns="0" rIns="0" bIns="0" rtlCol="0" anchor="ctr"/>
-          <a:lstStyle/>
-          <a:p>
-            <a:pPr algn="r" indent="0" marL="0">
-              <a:buNone/>
-            </a:pPr>
-            <a:r>
-              <a:rPr lang="en-US" sz="1100" b="1" dirty="0">
-                <a:solidFill>
-                  <a:srgbClr val="1A2433"/>
-                </a:solidFill>
-                <a:latin typeface="Calibri" pitchFamily="34" charset="0"/>
-                <a:ea typeface="Calibri" pitchFamily="34" charset="-122"/>
-                <a:cs typeface="Calibri" pitchFamily="34" charset="-120"/>
-              </a:rPr>
-              <a:t>139 d</a:t>
-            </a:r>
-            <a:endParaRPr lang="en-US" sz="1100" dirty="0"/>
-          </a:p>
-        </p:txBody>
-      </p:sp>
-      <p:sp>
-        <p:nvSpPr>
-          <p:cNvPr id="45" name="Shape 41"/>
+              <a:t>69 d</a:t>
+            </a:r>
+            <a:endParaRPr lang="en-US" sz="1050" dirty="0"/>
+          </a:p>
+        </p:txBody>
+      </p:sp>
+      <p:sp>
+        <p:nvSpPr>
+          <p:cNvPr id="57" name="Shape 53"/>
           <p:cNvSpPr/>
           <p:nvPr/>
         </p:nvSpPr>
         <p:spPr>
           <a:xfrm>
             <a:off x="502920" y="6263640"/>
-            <a:ext cx="5943600" cy="0"/>
+            <a:ext cx="6355080" cy="0"/>
           </a:xfrm>
           <a:prstGeom prst="line">
             <a:avLst/>
@@ -27774,7 +28242,7 @@
       </p:sp>
       <p:graphicFrame>
         <p:nvGraphicFramePr>
-          <p:cNvPr id="46" name="Chart 1" descr=""/>
+          <p:cNvPr id="58" name="Chart 1" descr=""/>
           <p:cNvGraphicFramePr/>
           <p:nvPr/>
         </p:nvGraphicFramePr>
@@ -27790,7 +28258,7 @@
       </p:graphicFrame>
       <p:sp>
         <p:nvSpPr>
-          <p:cNvPr id="47" name="Shape 42"/>
+          <p:cNvPr id="59" name="Shape 54"/>
           <p:cNvSpPr/>
           <p:nvPr/>
         </p:nvSpPr>
@@ -27812,7 +28280,7 @@
       </p:sp>
       <p:sp>
         <p:nvSpPr>
-          <p:cNvPr id="48" name="Text 43"/>
+          <p:cNvPr id="60" name="Text 55"/>
           <p:cNvSpPr/>
           <p:nvPr/>
         </p:nvSpPr>
@@ -27851,7 +28319,7 @@
       </p:sp>
       <p:sp>
         <p:nvSpPr>
-          <p:cNvPr id="49" name="Text 44"/>
+          <p:cNvPr id="61" name="Text 56"/>
           <p:cNvSpPr/>
           <p:nvPr/>
         </p:nvSpPr>
@@ -27890,7 +28358,7 @@
       </p:sp>
       <p:sp>
         <p:nvSpPr>
-          <p:cNvPr id="50" name="Text 45"/>
+          <p:cNvPr id="62" name="Text 57"/>
           <p:cNvSpPr/>
           <p:nvPr/>
         </p:nvSpPr>
@@ -27929,7 +28397,7 @@
       </p:sp>
       <p:sp>
         <p:nvSpPr>
-          <p:cNvPr id="51" name="Text 46"/>
+          <p:cNvPr id="63" name="Text 58"/>
           <p:cNvSpPr/>
           <p:nvPr/>
         </p:nvSpPr>
@@ -27968,7 +28436,7 @@
       </p:sp>
       <p:sp>
         <p:nvSpPr>
-          <p:cNvPr id="52" name="Text 47"/>
+          <p:cNvPr id="64" name="Text 59"/>
           <p:cNvSpPr/>
           <p:nvPr/>
         </p:nvSpPr>
@@ -28007,7 +28475,7 @@
       </p:sp>
       <p:sp>
         <p:nvSpPr>
-          <p:cNvPr id="53" name="Text 48"/>
+          <p:cNvPr id="65" name="Text 60"/>
           <p:cNvSpPr/>
           <p:nvPr/>
         </p:nvSpPr>
@@ -28046,7 +28514,7 @@
       </p:sp>
       <p:sp>
         <p:nvSpPr>
-          <p:cNvPr id="54" name="Text 49"/>
+          <p:cNvPr id="66" name="Text 61"/>
           <p:cNvSpPr/>
           <p:nvPr/>
         </p:nvSpPr>
@@ -28085,7 +28553,7 @@
       </p:sp>
       <p:sp>
         <p:nvSpPr>
-          <p:cNvPr id="55" name="Text 50"/>
+          <p:cNvPr id="67" name="Text 62"/>
           <p:cNvSpPr/>
           <p:nvPr/>
         </p:nvSpPr>
@@ -28124,7 +28592,7 @@
       </p:sp>
       <p:sp>
         <p:nvSpPr>
-          <p:cNvPr id="56" name="Text 51"/>
+          <p:cNvPr id="68" name="Text 63"/>
           <p:cNvSpPr/>
           <p:nvPr/>
         </p:nvSpPr>
@@ -28163,7 +28631,7 @@
       </p:sp>
       <p:sp>
         <p:nvSpPr>
-          <p:cNvPr id="57" name="Text 52"/>
+          <p:cNvPr id="69" name="Text 64"/>
           <p:cNvSpPr/>
           <p:nvPr/>
         </p:nvSpPr>

--- a/modulo_nc/Panel_No_Conformidades.pptx
+++ b/modulo_nc/Panel_No_Conformidades.pptx
@@ -26418,7 +26418,7 @@
                 <a:ea typeface="Calibri" pitchFamily="34" charset="-122"/>
                 <a:cs typeface="Calibri" pitchFamily="34" charset="-120"/>
               </a:rPr>
-              <a:t>ESTADO DE CADA VÍA  ·  atrasada = abierta que pasó los 10 días de plazo  ·  T. respuesta = días de emisión a cierre, solo sobre las cerradas</a:t>
+              <a:t>ESTADO DE CADA VÍA  ·  atrasada = abierta que pasó los 10 días de plazo  ·  promedio en respuesta = días de emisión a cierre, solo sobre las cerradas</a:t>
             </a:r>
             <a:endParaRPr lang="en-US" sz="900" dirty="0"/>
           </a:p>
@@ -26666,8 +26666,8 @@
         </p:nvSpPr>
         <p:spPr>
           <a:xfrm>
-            <a:off x="5943600" y="4462272"/>
-            <a:ext cx="914400" cy="274320"/>
+            <a:off x="5806440" y="4462272"/>
+            <a:ext cx="1051560" cy="274320"/>
           </a:xfrm>
           <a:prstGeom prst="rect">
             <a:avLst/>
@@ -26691,7 +26691,7 @@
                 <a:ea typeface="Calibri" pitchFamily="34" charset="-122"/>
                 <a:cs typeface="Calibri" pitchFamily="34" charset="-120"/>
               </a:rPr>
-              <a:t>T. RESPUESTA</a:t>
+              <a:t>PROM. RESPUESTA</a:t>
             </a:r>
             <a:endParaRPr lang="en-US" sz="950" dirty="0"/>
           </a:p>
@@ -26962,8 +26962,8 @@
         </p:nvSpPr>
         <p:spPr>
           <a:xfrm>
-            <a:off x="5943600" y="4901184"/>
-            <a:ext cx="914400" cy="192024"/>
+            <a:off x="5806440" y="4901184"/>
+            <a:ext cx="1051560" cy="192024"/>
           </a:xfrm>
           <a:prstGeom prst="rect">
             <a:avLst/>
@@ -26987,7 +26987,7 @@
                 <a:ea typeface="Calibri" pitchFamily="34" charset="-122"/>
                 <a:cs typeface="Calibri" pitchFamily="34" charset="-120"/>
               </a:rPr>
-              <a:t>65 d</a:t>
+              <a:t>65 días</a:t>
             </a:r>
             <a:endParaRPr lang="en-US" sz="1050" dirty="0"/>
           </a:p>
@@ -27278,8 +27278,8 @@
         </p:nvSpPr>
         <p:spPr>
           <a:xfrm>
-            <a:off x="5943600" y="5184648"/>
-            <a:ext cx="914400" cy="192024"/>
+            <a:off x="5806440" y="5184648"/>
+            <a:ext cx="1051560" cy="192024"/>
           </a:xfrm>
           <a:prstGeom prst="rect">
             <a:avLst/>
@@ -27303,7 +27303,7 @@
                 <a:ea typeface="Calibri" pitchFamily="34" charset="-122"/>
                 <a:cs typeface="Calibri" pitchFamily="34" charset="-120"/>
               </a:rPr>
-              <a:t>49 d</a:t>
+              <a:t>49 días</a:t>
             </a:r>
             <a:endParaRPr lang="en-US" sz="1050" dirty="0"/>
           </a:p>
@@ -27574,8 +27574,8 @@
         </p:nvSpPr>
         <p:spPr>
           <a:xfrm>
-            <a:off x="5943600" y="5468112"/>
-            <a:ext cx="914400" cy="192024"/>
+            <a:off x="5806440" y="5468112"/>
+            <a:ext cx="1051560" cy="192024"/>
           </a:xfrm>
           <a:prstGeom prst="rect">
             <a:avLst/>
@@ -27599,7 +27599,7 @@
                 <a:ea typeface="Calibri" pitchFamily="34" charset="-122"/>
                 <a:cs typeface="Calibri" pitchFamily="34" charset="-120"/>
               </a:rPr>
-              <a:t>179 d</a:t>
+              <a:t>179 días</a:t>
             </a:r>
             <a:endParaRPr lang="en-US" sz="1050" dirty="0"/>
           </a:p>
@@ -27890,8 +27890,8 @@
         </p:nvSpPr>
         <p:spPr>
           <a:xfrm>
-            <a:off x="5943600" y="5751576"/>
-            <a:ext cx="914400" cy="192024"/>
+            <a:off x="5806440" y="5751576"/>
+            <a:ext cx="1051560" cy="192024"/>
           </a:xfrm>
           <a:prstGeom prst="rect">
             <a:avLst/>
@@ -27915,7 +27915,7 @@
                 <a:ea typeface="Calibri" pitchFamily="34" charset="-122"/>
                 <a:cs typeface="Calibri" pitchFamily="34" charset="-120"/>
               </a:rPr>
-              <a:t>64 d</a:t>
+              <a:t>64 días</a:t>
             </a:r>
             <a:endParaRPr lang="en-US" sz="1050" dirty="0"/>
           </a:p>
@@ -28186,8 +28186,8 @@
         </p:nvSpPr>
         <p:spPr>
           <a:xfrm>
-            <a:off x="5943600" y="6035040"/>
-            <a:ext cx="914400" cy="192024"/>
+            <a:off x="5806440" y="6035040"/>
+            <a:ext cx="1051560" cy="192024"/>
           </a:xfrm>
           <a:prstGeom prst="rect">
             <a:avLst/>
@@ -28211,7 +28211,7 @@
                 <a:ea typeface="Calibri" pitchFamily="34" charset="-122"/>
                 <a:cs typeface="Calibri" pitchFamily="34" charset="-120"/>
               </a:rPr>
-              <a:t>69 d</a:t>
+              <a:t>69 días</a:t>
             </a:r>
             <a:endParaRPr lang="en-US" sz="1050" dirty="0"/>
           </a:p>

--- a/modulo_nc/Panel_No_Conformidades.pptx
+++ b/modulo_nc/Panel_No_Conformidades.pptx
@@ -6043,7 +6043,7 @@
                 <a:ea typeface="Calibri" pitchFamily="34" charset="-122"/>
                 <a:cs typeface="Calibri" pitchFamily="34" charset="-120"/>
               </a:rPr>
-              <a:t>Fuente: 1e73482e-Data_NCR03082026.xlsx — hoja «Observaciones» · Corte 03-08-2026 · 508 registros desde 10-02-2023</a:t>
+              <a:t>Fuente: Data_NCR_10082026.xlsx — hoja «Observaciones» · Corte 03-08-2026 · 508 registros desde 10-02-2023</a:t>
             </a:r>
             <a:endParaRPr lang="en-US" sz="850" dirty="0"/>
           </a:p>
@@ -7754,7 +7754,7 @@
                 <a:ea typeface="Calibri" pitchFamily="34" charset="-122"/>
                 <a:cs typeface="Calibri" pitchFamily="34" charset="-120"/>
               </a:rPr>
-              <a:t>Fuente: 1e73482e-Data_NCR03082026.xlsx — hoja «Observaciones» · Corte 03-08-2026 · 508 registros desde 10-02-2023</a:t>
+              <a:t>Fuente: Data_NCR_10082026.xlsx — hoja «Observaciones» · Corte 03-08-2026 · 508 registros desde 10-02-2023</a:t>
             </a:r>
             <a:endParaRPr lang="en-US" sz="850" dirty="0"/>
           </a:p>
@@ -8517,7 +8517,7 @@
                 <a:ea typeface="Calibri" pitchFamily="34" charset="-122"/>
                 <a:cs typeface="Calibri" pitchFamily="34" charset="-120"/>
               </a:rPr>
-              <a:t>Fuente: 1e73482e-Data_NCR03082026.xlsx — hoja «Observaciones» · Corte 03-08-2026 · 508 registros desde 10-02-2023</a:t>
+              <a:t>Fuente: Data_NCR_10082026.xlsx — hoja «Observaciones» · Corte 03-08-2026 · 508 registros desde 10-02-2023</a:t>
             </a:r>
             <a:endParaRPr lang="en-US" sz="850" dirty="0"/>
           </a:p>
@@ -10044,7 +10044,7 @@
                 <a:ea typeface="Calibri" pitchFamily="34" charset="-122"/>
                 <a:cs typeface="Calibri" pitchFamily="34" charset="-120"/>
               </a:rPr>
-              <a:t>Fuente: 1e73482e-Data_NCR03082026.xlsx — hoja «Observaciones» · Corte 03-08-2026 · 508 registros desde 10-02-2023</a:t>
+              <a:t>Fuente: Data_NCR_10082026.xlsx — hoja «Observaciones» · Corte 03-08-2026 · 508 registros desde 10-02-2023</a:t>
             </a:r>
             <a:endParaRPr lang="en-US" sz="850" dirty="0"/>
           </a:p>
@@ -13903,7 +13903,7 @@
                 <a:ea typeface="Calibri" pitchFamily="34" charset="-122"/>
                 <a:cs typeface="Calibri" pitchFamily="34" charset="-120"/>
               </a:rPr>
-              <a:t>Fuente: 1e73482e-Data_NCR03082026.xlsx — hoja «Observaciones» · Corte 03-08-2026 · 508 registros desde 10-02-2023</a:t>
+              <a:t>Fuente: Data_NCR_10082026.xlsx — hoja «Observaciones» · Corte 03-08-2026 · 508 registros desde 10-02-2023</a:t>
             </a:r>
             <a:endParaRPr lang="en-US" sz="850" dirty="0"/>
           </a:p>
@@ -14666,7 +14666,7 @@
                 <a:ea typeface="Calibri" pitchFamily="34" charset="-122"/>
                 <a:cs typeface="Calibri" pitchFamily="34" charset="-120"/>
               </a:rPr>
-              <a:t>Fuente: 1e73482e-Data_NCR03082026.xlsx — hoja «Observaciones» · Corte 03-08-2026 · 508 registros desde 10-02-2023</a:t>
+              <a:t>Fuente: Data_NCR_10082026.xlsx — hoja «Observaciones» · Corte 03-08-2026 · 508 registros desde 10-02-2023</a:t>
             </a:r>
             <a:endParaRPr lang="en-US" sz="850" dirty="0"/>
           </a:p>
@@ -16330,7 +16330,7 @@
                 <a:ea typeface="Calibri" pitchFamily="34" charset="-122"/>
                 <a:cs typeface="Calibri" pitchFamily="34" charset="-120"/>
               </a:rPr>
-              <a:t>Fuente: 1e73482e-Data_NCR03082026.xlsx — hoja «Observaciones» · Corte 03-08-2026 · 508 registros desde 10-02-2023</a:t>
+              <a:t>Fuente: Data_NCR_10082026.xlsx — hoja «Observaciones» · Corte 03-08-2026 · 508 registros desde 10-02-2023</a:t>
             </a:r>
             <a:endParaRPr lang="en-US" sz="850" dirty="0"/>
           </a:p>
@@ -20189,7 +20189,7 @@
                 <a:ea typeface="Calibri" pitchFamily="34" charset="-122"/>
                 <a:cs typeface="Calibri" pitchFamily="34" charset="-120"/>
               </a:rPr>
-              <a:t>Fuente: 1e73482e-Data_NCR03082026.xlsx — hoja «Observaciones» · Corte 03-08-2026 · 508 registros desde 10-02-2023</a:t>
+              <a:t>Fuente: Data_NCR_10082026.xlsx — hoja «Observaciones» · Corte 03-08-2026 · 508 registros desde 10-02-2023</a:t>
             </a:r>
             <a:endParaRPr lang="en-US" sz="850" dirty="0"/>
           </a:p>
@@ -21578,7 +21578,7 @@
                 <a:ea typeface="Calibri" pitchFamily="34" charset="-122"/>
                 <a:cs typeface="Calibri" pitchFamily="34" charset="-120"/>
               </a:rPr>
-              <a:t>Fuente: 1e73482e-Data_NCR03082026.xlsx — hoja «Observaciones» · Corte 03-08-2026 · 508 registros desde 10-02-2023</a:t>
+              <a:t>Fuente: Data_NCR_10082026.xlsx — hoja «Observaciones» · Corte 03-08-2026 · 508 registros desde 10-02-2023</a:t>
             </a:r>
             <a:endParaRPr lang="en-US" sz="850" dirty="0"/>
           </a:p>
@@ -24646,7 +24646,7 @@
                 <a:ea typeface="Calibri" pitchFamily="34" charset="-122"/>
                 <a:cs typeface="Calibri" pitchFamily="34" charset="-120"/>
               </a:rPr>
-              <a:t>Fuente: 1e73482e-Data_NCR03082026.xlsx — hoja «Observaciones» · Corte 03-08-2026 · 508 registros desde 10-02-2023</a:t>
+              <a:t>Fuente: Data_NCR_10082026.xlsx — hoja «Observaciones» · Corte 03-08-2026 · 508 registros desde 10-02-2023</a:t>
             </a:r>
             <a:endParaRPr lang="en-US" sz="850" dirty="0"/>
           </a:p>
@@ -26112,7 +26112,7 @@
                 <a:ea typeface="Calibri" pitchFamily="34" charset="-122"/>
                 <a:cs typeface="Calibri" pitchFamily="34" charset="-120"/>
               </a:rPr>
-              <a:t>Fuente: 1e73482e-Data_NCR03082026.xlsx — hoja «Observaciones» · Corte 03-08-2026 · 508 registros desde 10-02-2023</a:t>
+              <a:t>Fuente: Data_NCR_10082026.xlsx — hoja «Observaciones» · Corte 03-08-2026 · 508 registros desde 10-02-2023</a:t>
             </a:r>
             <a:endParaRPr lang="en-US" sz="850" dirty="0"/>
           </a:p>
@@ -28584,7 +28584,7 @@
                 <a:ea typeface="Calibri" pitchFamily="34" charset="-122"/>
                 <a:cs typeface="Calibri" pitchFamily="34" charset="-120"/>
               </a:rPr>
-              <a:t>Fuente: 1e73482e-Data_NCR03082026.xlsx — hoja «Observaciones» · Corte 03-08-2026 · 508 registros desde 10-02-2023</a:t>
+              <a:t>Fuente: Data_NCR_10082026.xlsx — hoja «Observaciones» · Corte 03-08-2026 · 508 registros desde 10-02-2023</a:t>
             </a:r>
             <a:endParaRPr lang="en-US" sz="850" dirty="0"/>
           </a:p>
@@ -30392,7 +30392,7 @@
                 <a:ea typeface="Calibri" pitchFamily="34" charset="-122"/>
                 <a:cs typeface="Calibri" pitchFamily="34" charset="-120"/>
               </a:rPr>
-              <a:t>Fuente: 1e73482e-Data_NCR03082026.xlsx — hoja «Observaciones» · Corte 03-08-2026 · 508 registros desde 10-02-2023</a:t>
+              <a:t>Fuente: Data_NCR_10082026.xlsx — hoja «Observaciones» · Corte 03-08-2026 · 508 registros desde 10-02-2023</a:t>
             </a:r>
             <a:endParaRPr lang="en-US" sz="850" dirty="0"/>
           </a:p>
@@ -31231,7 +31231,7 @@
                 <a:ea typeface="Calibri" pitchFamily="34" charset="-122"/>
                 <a:cs typeface="Calibri" pitchFamily="34" charset="-120"/>
               </a:rPr>
-              <a:t>Fuente: 1e73482e-Data_NCR03082026.xlsx — hoja «Observaciones» · Corte 03-08-2026 · 508 registros desde 10-02-2023</a:t>
+              <a:t>Fuente: Data_NCR_10082026.xlsx — hoja «Observaciones» · Corte 03-08-2026 · 508 registros desde 10-02-2023</a:t>
             </a:r>
             <a:endParaRPr lang="en-US" sz="850" dirty="0"/>
           </a:p>
@@ -31994,7 +31994,7 @@
                 <a:ea typeface="Calibri" pitchFamily="34" charset="-122"/>
                 <a:cs typeface="Calibri" pitchFamily="34" charset="-120"/>
               </a:rPr>
-              <a:t>Fuente: 1e73482e-Data_NCR03082026.xlsx — hoja «Observaciones» · Corte 03-08-2026 · 508 registros desde 10-02-2023</a:t>
+              <a:t>Fuente: Data_NCR_10082026.xlsx — hoja «Observaciones» · Corte 03-08-2026 · 508 registros desde 10-02-2023</a:t>
             </a:r>
             <a:endParaRPr lang="en-US" sz="850" dirty="0"/>
           </a:p>
@@ -33795,7 +33795,7 @@
                 <a:ea typeface="Calibri" pitchFamily="34" charset="-122"/>
                 <a:cs typeface="Calibri" pitchFamily="34" charset="-120"/>
               </a:rPr>
-              <a:t>Fuente: 1e73482e-Data_NCR03082026.xlsx — hoja «Observaciones» · Corte 03-08-2026 · 508 registros desde 10-02-2023</a:t>
+              <a:t>Fuente: Data_NCR_10082026.xlsx — hoja «Observaciones» · Corte 03-08-2026 · 508 registros desde 10-02-2023</a:t>
             </a:r>
             <a:endParaRPr lang="en-US" sz="850" dirty="0"/>
           </a:p>

--- a/modulo_nc/Panel_No_Conformidades.pptx
+++ b/modulo_nc/Panel_No_Conformidades.pptx
@@ -247,7 +247,7 @@
                   <c:v>3</c:v>
                 </c:pt>
                 <c:pt idx="1">
-                  <c:v>2</c:v>
+                  <c:v>1</c:v>
                 </c:pt>
                 <c:pt idx="2">
                   <c:v>1</c:v>
@@ -640,10 +640,10 @@
                 <c:formatCode>General</c:formatCode>
                 <c:ptCount val="4"/>
                 <c:pt idx="0">
-                  <c:v>56</c:v>
+                  <c:v>54</c:v>
                 </c:pt>
                 <c:pt idx="1">
-                  <c:v>53</c:v>
+                  <c:v>52</c:v>
                 </c:pt>
                 <c:pt idx="2">
                   <c:v>53</c:v>
@@ -730,7 +730,7 @@
                 <c:formatCode>General</c:formatCode>
                 <c:ptCount val="4"/>
                 <c:pt idx="0">
-                  <c:v>30</c:v>
+                  <c:v>19</c:v>
                 </c:pt>
                 <c:pt idx="1">
                   <c:v>188</c:v>
@@ -1171,9 +1171,9 @@
           </c:dLbls>
           <c:cat>
             <c:multiLvlStrRef>
-              <c:f>Sheet1!$A$2:$A$6</c:f>
+              <c:f>Sheet1!$A$2:$A$5</c:f>
               <c:multiLvlStrCache>
-                <c:ptCount val="5"/>
+                <c:ptCount val="4"/>
                 <c:lvl>
                   <c:pt idx="0">
                     <c:v>No Conformidad</c:v>
@@ -1185,9 +1185,6 @@
                     <c:v>Observación</c:v>
                   </c:pt>
                   <c:pt idx="3">
-                    <c:v>Opción de Mejora</c:v>
-                  </c:pt>
-                  <c:pt idx="4">
                     <c:v>Reporte HSE Nivel Alto</c:v>
                   </c:pt>
                 </c:lvl>
@@ -1196,10 +1193,10 @@
           </c:cat>
           <c:val>
             <c:numRef>
-              <c:f>Sheet1!$B$2:$B$6</c:f>
+              <c:f>Sheet1!$B$2:$B$5</c:f>
               <c:numCache>
                 <c:formatCode>General</c:formatCode>
-                <c:ptCount val="5"/>
+                <c:ptCount val="4"/>
                 <c:pt idx="0">
                   <c:v>279</c:v>
                 </c:pt>
@@ -1210,9 +1207,6 @@
                   <c:v>45</c:v>
                 </c:pt>
                 <c:pt idx="3">
-                  <c:v>13</c:v>
-                </c:pt>
-                <c:pt idx="4">
                   <c:v>1</c:v>
                 </c:pt>
               </c:numCache>
@@ -1267,9 +1261,9 @@
           </c:dLbls>
           <c:cat>
             <c:multiLvlStrRef>
-              <c:f>Sheet1!$A$2:$A$6</c:f>
+              <c:f>Sheet1!$A$2:$A$5</c:f>
               <c:multiLvlStrCache>
-                <c:ptCount val="5"/>
+                <c:ptCount val="4"/>
                 <c:lvl>
                   <c:pt idx="0">
                     <c:v>No Conformidad</c:v>
@@ -1281,9 +1275,6 @@
                     <c:v>Observación</c:v>
                   </c:pt>
                   <c:pt idx="3">
-                    <c:v>Opción de Mejora</c:v>
-                  </c:pt>
-                  <c:pt idx="4">
                     <c:v>Reporte HSE Nivel Alto</c:v>
                   </c:pt>
                 </c:lvl>
@@ -1292,10 +1283,10 @@
           </c:cat>
           <c:val>
             <c:numRef>
-              <c:f>Sheet1!$C$2:$C$6</c:f>
+              <c:f>Sheet1!$C$2:$C$5</c:f>
               <c:numCache>
                 <c:formatCode>General</c:formatCode>
-                <c:ptCount val="5"/>
+                <c:ptCount val="4"/>
                 <c:pt idx="0">
                   <c:v>34</c:v>
                 </c:pt>
@@ -1306,9 +1297,6 @@
                   <c:v>15</c:v>
                 </c:pt>
                 <c:pt idx="3">
-                  <c:v>1</c:v>
-                </c:pt>
-                <c:pt idx="4">
                   <c:v/>
                 </c:pt>
               </c:numCache>
@@ -1498,7 +1486,7 @@
                 </a:solidFill>
                 <a:latin typeface="Calibri"/>
               </a:rPr>
-              <a:t>Antigüedad de los 54 hallazgos abiertos</a:t>
+              <a:t>Antigüedad de los 53 hallazgos abiertos</a:t>
             </a:r>
           </a:p>
         </c:rich>
@@ -1579,7 +1567,7 @@
                 <c:formatCode>General</c:formatCode>
                 <c:ptCount val="1"/>
                 <c:pt idx="0">
-                  <c:v>7</c:v>
+                  <c:v>6</c:v>
                 </c:pt>
               </c:numCache>
             </c:numRef>
@@ -2127,10 +2115,10 @@
                     <c:v>ELÉCTRICA</c:v>
                   </c:pt>
                   <c:pt idx="1">
-                    <c:v>OO.CC</c:v>
+                    <c:v>ADMINISTRACIÓN</c:v>
                   </c:pt>
                   <c:pt idx="2">
-                    <c:v>ADMINISTRACIÓN</c:v>
+                    <c:v>OO.CC</c:v>
                   </c:pt>
                   <c:pt idx="3">
                     <c:v>RRLL</c:v>
@@ -2145,7 +2133,7 @@
                     <c:v>LOGÍSTICA</c:v>
                   </c:pt>
                   <c:pt idx="7">
-                    <c:v>ESTRUCTURA</c:v>
+                    <c:v>ADQUISICIONES</c:v>
                   </c:pt>
                 </c:lvl>
               </c:multiLvlStrCache>
@@ -2158,28 +2146,28 @@
                 <c:formatCode>General</c:formatCode>
                 <c:ptCount val="8"/>
                 <c:pt idx="0">
-                  <c:v>20</c:v>
+                  <c:v>15</c:v>
                 </c:pt>
                 <c:pt idx="1">
                   <c:v>12</c:v>
                 </c:pt>
                 <c:pt idx="2">
-                  <c:v>12</c:v>
+                  <c:v>10</c:v>
                 </c:pt>
                 <c:pt idx="3">
                   <c:v>10</c:v>
                 </c:pt>
                 <c:pt idx="4">
-                  <c:v>9</c:v>
+                  <c:v>7</c:v>
                 </c:pt>
                 <c:pt idx="5">
-                  <c:v>5</c:v>
+                  <c:v>4</c:v>
                 </c:pt>
                 <c:pt idx="6">
                   <c:v>4</c:v>
                 </c:pt>
                 <c:pt idx="7">
-                  <c:v>2</c:v>
+                  <c:v>3</c:v>
                 </c:pt>
               </c:numCache>
             </c:numRef>
@@ -2241,10 +2229,10 @@
                     <c:v>ELÉCTRICA</c:v>
                   </c:pt>
                   <c:pt idx="1">
-                    <c:v>OO.CC</c:v>
+                    <c:v>ADMINISTRACIÓN</c:v>
                   </c:pt>
                   <c:pt idx="2">
-                    <c:v>ADMINISTRACIÓN</c:v>
+                    <c:v>OO.CC</c:v>
                   </c:pt>
                   <c:pt idx="3">
                     <c:v>RRLL</c:v>
@@ -2259,7 +2247,7 @@
                     <c:v>LOGÍSTICA</c:v>
                   </c:pt>
                   <c:pt idx="7">
-                    <c:v>ESTRUCTURA</c:v>
+                    <c:v>ADQUISICIONES</c:v>
                   </c:pt>
                 </c:lvl>
               </c:multiLvlStrCache>
@@ -2293,7 +2281,7 @@
                   <c:v/>
                 </c:pt>
                 <c:pt idx="7">
-                  <c:v>1</c:v>
+                  <c:v/>
                 </c:pt>
               </c:numCache>
             </c:numRef>
@@ -2590,7 +2578,7 @@
                   <c:v>23</c:v>
                 </c:pt>
                 <c:pt idx="2">
-                  <c:v>16</c:v>
+                  <c:v>15</c:v>
                 </c:pt>
                 <c:pt idx="3">
                   <c:v>11</c:v>
@@ -2991,10 +2979,10 @@
                     <c:v>SUBCONTRATO</c:v>
                   </c:pt>
                   <c:pt idx="5">
-                    <c:v>ESTRUCTURA</c:v>
+                    <c:v>TOPOGRAFÍA</c:v>
                   </c:pt>
                   <c:pt idx="6">
-                    <c:v>TOPOGRAFÍA</c:v>
+                    <c:v>ESTRUCTURA</c:v>
                   </c:pt>
                   <c:pt idx="7">
                     <c:v>MECÁNICA</c:v>
@@ -3105,10 +3093,10 @@
                     <c:v>SUBCONTRATO</c:v>
                   </c:pt>
                   <c:pt idx="5">
-                    <c:v>ESTRUCTURA</c:v>
+                    <c:v>TOPOGRAFÍA</c:v>
                   </c:pt>
                   <c:pt idx="6">
-                    <c:v>TOPOGRAFÍA</c:v>
+                    <c:v>ESTRUCTURA</c:v>
                   </c:pt>
                   <c:pt idx="7">
                     <c:v>MECÁNICA</c:v>
@@ -5633,7 +5621,7 @@
                 <a:ea typeface="Calibri" pitchFamily="34" charset="-122"/>
                 <a:cs typeface="Calibri" pitchFamily="34" charset="-120"/>
               </a:rPr>
-              <a:t>508 hallazgos levantados entre 10-02-2023 y 28-07-2026 (Desaladora 95 · Talabre 241 · Arqueros 164 · Oficina Central 8).</a:t>
+              <a:t>494 hallazgos levantados entre 10-02-2023 y 28-07-2026 (Desaladora 82 · Talabre 240 · Arqueros 164 · Oficina Central 8).</a:t>
             </a:r>
             <a:endParaRPr lang="en-US" sz="1350" dirty="0"/>
           </a:p>
@@ -5692,7 +5680,7 @@
                 <a:ea typeface="Cambria" pitchFamily="34" charset="-122"/>
                 <a:cs typeface="Cambria" pitchFamily="34" charset="-120"/>
               </a:rPr>
-              <a:t>89,4%</a:t>
+              <a:t>89,3%</a:t>
             </a:r>
             <a:endParaRPr lang="en-US" sz="3400" dirty="0"/>
           </a:p>
@@ -5770,7 +5758,7 @@
                 <a:ea typeface="Cambria" pitchFamily="34" charset="-122"/>
                 <a:cs typeface="Cambria" pitchFamily="34" charset="-120"/>
               </a:rPr>
-              <a:t>54</a:t>
+              <a:t>53</a:t>
             </a:r>
             <a:endParaRPr lang="en-US" sz="3400" dirty="0"/>
           </a:p>
@@ -5926,7 +5914,7 @@
                 <a:ea typeface="Cambria" pitchFamily="34" charset="-122"/>
                 <a:cs typeface="Cambria" pitchFamily="34" charset="-120"/>
               </a:rPr>
-              <a:t>10.783</a:t>
+              <a:t>10.613</a:t>
             </a:r>
             <a:endParaRPr lang="en-US" sz="3400" dirty="0"/>
           </a:p>
@@ -6043,7 +6031,7 @@
                 <a:ea typeface="Calibri" pitchFamily="34" charset="-122"/>
                 <a:cs typeface="Calibri" pitchFamily="34" charset="-120"/>
               </a:rPr>
-              <a:t>Fuente: Data_NCR_10082026.xlsx — hoja «Observaciones» · Corte 03-08-2026 · 508 registros desde 10-02-2023</a:t>
+              <a:t>Fuente: 1e73482e-Data_NCR03082026.xlsx — hoja «Observaciones» · Corte 03-08-2026 · 494 registros desde 10-02-2023</a:t>
             </a:r>
             <a:endParaRPr lang="en-US" sz="850" dirty="0"/>
           </a:p>
@@ -6255,7 +6243,7 @@
                 <a:ea typeface="Calibri" pitchFamily="34" charset="-122"/>
                 <a:cs typeface="Calibri" pitchFamily="34" charset="-120"/>
               </a:rPr>
-              <a:t>3 hallazgos siguen abiertos; 0 con más de 180 días. Se listan del más antiguo al más reciente.</a:t>
+              <a:t>2 hallazgos siguen abiertos; 0 con más de 180 días. Se listan del más antiguo al más reciente.</a:t>
             </a:r>
             <a:endParaRPr lang="en-US" sz="1350" dirty="0"/>
           </a:p>
@@ -6984,7 +6972,7 @@
                 <a:ea typeface="Calibri" pitchFamily="34" charset="-122"/>
                 <a:cs typeface="Calibri" pitchFamily="34" charset="-120"/>
               </a:rPr>
-              <a:t>94</a:t>
+              <a:t>95</a:t>
             </a:r>
             <a:endParaRPr lang="en-US" sz="1050" dirty="0"/>
           </a:p>
@@ -7023,7 +7011,7 @@
                 <a:ea typeface="Calibri" pitchFamily="34" charset="-122"/>
                 <a:cs typeface="Calibri" pitchFamily="34" charset="-120"/>
               </a:rPr>
-              <a:t>Opción de Mejora</a:t>
+              <a:t>No Conformidad</a:t>
             </a:r>
             <a:endParaRPr lang="en-US" sz="1050" dirty="0"/>
           </a:p>
@@ -7101,7 +7089,7 @@
                 <a:ea typeface="Calibri" pitchFamily="34" charset="-122"/>
                 <a:cs typeface="Calibri" pitchFamily="34" charset="-120"/>
               </a:rPr>
-              <a:t>ESTRUCTURA</a:t>
+              <a:t>MECÁNICA</a:t>
             </a:r>
             <a:endParaRPr lang="en-US" sz="1050" dirty="0"/>
           </a:p>
@@ -7140,7 +7128,7 @@
                 <a:ea typeface="Calibri" pitchFamily="34" charset="-122"/>
                 <a:cs typeface="Calibri" pitchFamily="34" charset="-120"/>
               </a:rPr>
-              <a:t>Cristián Ellmen M.</a:t>
+              <a:t>Wilson Jara</a:t>
             </a:r>
             <a:endParaRPr lang="en-US" sz="1050" dirty="0"/>
           </a:p>
@@ -7218,7 +7206,7 @@
                 <a:ea typeface="Calibri" pitchFamily="34" charset="-122"/>
                 <a:cs typeface="Calibri" pitchFamily="34" charset="-120"/>
               </a:rPr>
-              <a:t>28</a:t>
+              <a:t>7</a:t>
             </a:r>
             <a:endParaRPr lang="en-US" sz="1050" dirty="0"/>
           </a:p>
@@ -7257,7 +7245,7 @@
                 <a:ea typeface="Calibri" pitchFamily="34" charset="-122"/>
                 <a:cs typeface="Calibri" pitchFamily="34" charset="-120"/>
               </a:rPr>
-              <a:t>Construcción Bodega de  Almacenamie…</a:t>
+              <a:t>Verificación de Preservación</a:t>
             </a:r>
             <a:endParaRPr lang="en-US" sz="1000" dirty="0"/>
           </a:p>
@@ -7288,342 +7276,7 @@
       </p:sp>
       <p:sp>
         <p:nvSpPr>
-          <p:cNvPr id="34" name="Text 31"/>
-          <p:cNvSpPr/>
-          <p:nvPr/>
-        </p:nvSpPr>
-        <p:spPr>
-          <a:xfrm>
-            <a:off x="502920" y="3008376"/>
-            <a:ext cx="822960" cy="256032"/>
-          </a:xfrm>
-          <a:prstGeom prst="rect">
-            <a:avLst/>
-          </a:prstGeom>
-          <a:noFill/>
-          <a:ln/>
-        </p:spPr>
-        <p:txBody>
-          <a:bodyPr wrap="square" lIns="0" tIns="0" rIns="0" bIns="0" rtlCol="0" anchor="ctr"/>
-          <a:lstStyle/>
-          <a:p>
-            <a:pPr algn="l" indent="0" marL="0">
-              <a:buNone/>
-            </a:pPr>
-            <a:r>
-              <a:rPr lang="en-US" sz="1050" dirty="0">
-                <a:solidFill>
-                  <a:srgbClr val="1A2433"/>
-                </a:solidFill>
-                <a:latin typeface="Calibri" pitchFamily="34" charset="0"/>
-                <a:ea typeface="Calibri" pitchFamily="34" charset="-122"/>
-                <a:cs typeface="Calibri" pitchFamily="34" charset="-120"/>
-              </a:rPr>
-              <a:t>95</a:t>
-            </a:r>
-            <a:endParaRPr lang="en-US" sz="1050" dirty="0"/>
-          </a:p>
-        </p:txBody>
-      </p:sp>
-      <p:sp>
-        <p:nvSpPr>
-          <p:cNvPr id="35" name="Text 32"/>
-          <p:cNvSpPr/>
-          <p:nvPr/>
-        </p:nvSpPr>
-        <p:spPr>
-          <a:xfrm>
-            <a:off x="1371600" y="3008376"/>
-            <a:ext cx="1508760" cy="256032"/>
-          </a:xfrm>
-          <a:prstGeom prst="rect">
-            <a:avLst/>
-          </a:prstGeom>
-          <a:noFill/>
-          <a:ln/>
-        </p:spPr>
-        <p:txBody>
-          <a:bodyPr wrap="square" lIns="0" tIns="0" rIns="0" bIns="0" rtlCol="0" anchor="ctr"/>
-          <a:lstStyle/>
-          <a:p>
-            <a:pPr algn="l" indent="0" marL="0">
-              <a:buNone/>
-            </a:pPr>
-            <a:r>
-              <a:rPr lang="en-US" sz="1050" dirty="0">
-                <a:solidFill>
-                  <a:srgbClr val="1A2433"/>
-                </a:solidFill>
-                <a:latin typeface="Calibri" pitchFamily="34" charset="0"/>
-                <a:ea typeface="Calibri" pitchFamily="34" charset="-122"/>
-                <a:cs typeface="Calibri" pitchFamily="34" charset="-120"/>
-              </a:rPr>
-              <a:t>No Conformidad</a:t>
-            </a:r>
-            <a:endParaRPr lang="en-US" sz="1050" dirty="0"/>
-          </a:p>
-        </p:txBody>
-      </p:sp>
-      <p:sp>
-        <p:nvSpPr>
-          <p:cNvPr id="36" name="Text 33"/>
-          <p:cNvSpPr/>
-          <p:nvPr/>
-        </p:nvSpPr>
-        <p:spPr>
-          <a:xfrm>
-            <a:off x="2926080" y="3008376"/>
-            <a:ext cx="1463040" cy="256032"/>
-          </a:xfrm>
-          <a:prstGeom prst="rect">
-            <a:avLst/>
-          </a:prstGeom>
-          <a:noFill/>
-          <a:ln/>
-        </p:spPr>
-        <p:txBody>
-          <a:bodyPr wrap="square" lIns="0" tIns="0" rIns="0" bIns="0" rtlCol="0" anchor="ctr"/>
-          <a:lstStyle/>
-          <a:p>
-            <a:pPr algn="l" indent="0" marL="0">
-              <a:buNone/>
-            </a:pPr>
-            <a:r>
-              <a:rPr lang="en-US" sz="1050" b="1" dirty="0">
-                <a:solidFill>
-                  <a:srgbClr val="C87A32"/>
-                </a:solidFill>
-                <a:latin typeface="Calibri" pitchFamily="34" charset="0"/>
-                <a:ea typeface="Calibri" pitchFamily="34" charset="-122"/>
-                <a:cs typeface="Calibri" pitchFamily="34" charset="-120"/>
-              </a:rPr>
-              <a:t>Externa · Cliente</a:t>
-            </a:r>
-            <a:endParaRPr lang="en-US" sz="1050" dirty="0"/>
-          </a:p>
-        </p:txBody>
-      </p:sp>
-      <p:sp>
-        <p:nvSpPr>
-          <p:cNvPr id="37" name="Text 34"/>
-          <p:cNvSpPr/>
-          <p:nvPr/>
-        </p:nvSpPr>
-        <p:spPr>
-          <a:xfrm>
-            <a:off x="4434840" y="3008376"/>
-            <a:ext cx="1280160" cy="256032"/>
-          </a:xfrm>
-          <a:prstGeom prst="rect">
-            <a:avLst/>
-          </a:prstGeom>
-          <a:noFill/>
-          <a:ln/>
-        </p:spPr>
-        <p:txBody>
-          <a:bodyPr wrap="square" lIns="0" tIns="0" rIns="0" bIns="0" rtlCol="0" anchor="ctr"/>
-          <a:lstStyle/>
-          <a:p>
-            <a:pPr algn="l" indent="0" marL="0">
-              <a:buNone/>
-            </a:pPr>
-            <a:r>
-              <a:rPr lang="en-US" sz="1050" dirty="0">
-                <a:solidFill>
-                  <a:srgbClr val="1A2433"/>
-                </a:solidFill>
-                <a:latin typeface="Calibri" pitchFamily="34" charset="0"/>
-                <a:ea typeface="Calibri" pitchFamily="34" charset="-122"/>
-                <a:cs typeface="Calibri" pitchFamily="34" charset="-120"/>
-              </a:rPr>
-              <a:t>MECÁNICA</a:t>
-            </a:r>
-            <a:endParaRPr lang="en-US" sz="1050" dirty="0"/>
-          </a:p>
-        </p:txBody>
-      </p:sp>
-      <p:sp>
-        <p:nvSpPr>
-          <p:cNvPr id="38" name="Text 35"/>
-          <p:cNvSpPr/>
-          <p:nvPr/>
-        </p:nvSpPr>
-        <p:spPr>
-          <a:xfrm>
-            <a:off x="5760720" y="3008376"/>
-            <a:ext cx="1508760" cy="256032"/>
-          </a:xfrm>
-          <a:prstGeom prst="rect">
-            <a:avLst/>
-          </a:prstGeom>
-          <a:noFill/>
-          <a:ln/>
-        </p:spPr>
-        <p:txBody>
-          <a:bodyPr wrap="square" lIns="0" tIns="0" rIns="0" bIns="0" rtlCol="0" anchor="ctr"/>
-          <a:lstStyle/>
-          <a:p>
-            <a:pPr algn="l" indent="0" marL="0">
-              <a:buNone/>
-            </a:pPr>
-            <a:r>
-              <a:rPr lang="en-US" sz="1050" dirty="0">
-                <a:solidFill>
-                  <a:srgbClr val="1A2433"/>
-                </a:solidFill>
-                <a:latin typeface="Calibri" pitchFamily="34" charset="0"/>
-                <a:ea typeface="Calibri" pitchFamily="34" charset="-122"/>
-                <a:cs typeface="Calibri" pitchFamily="34" charset="-120"/>
-              </a:rPr>
-              <a:t>Wilson Jara</a:t>
-            </a:r>
-            <a:endParaRPr lang="en-US" sz="1050" dirty="0"/>
-          </a:p>
-        </p:txBody>
-      </p:sp>
-      <p:sp>
-        <p:nvSpPr>
-          <p:cNvPr id="39" name="Text 36"/>
-          <p:cNvSpPr/>
-          <p:nvPr/>
-        </p:nvSpPr>
-        <p:spPr>
-          <a:xfrm>
-            <a:off x="7315200" y="3008376"/>
-            <a:ext cx="1325880" cy="256032"/>
-          </a:xfrm>
-          <a:prstGeom prst="rect">
-            <a:avLst/>
-          </a:prstGeom>
-          <a:noFill/>
-          <a:ln/>
-        </p:spPr>
-        <p:txBody>
-          <a:bodyPr wrap="square" lIns="0" tIns="0" rIns="0" bIns="0" rtlCol="0" anchor="ctr"/>
-          <a:lstStyle/>
-          <a:p>
-            <a:pPr algn="l" indent="0" marL="0">
-              <a:buNone/>
-            </a:pPr>
-            <a:r>
-              <a:rPr lang="en-US" sz="1050" dirty="0">
-                <a:solidFill>
-                  <a:srgbClr val="1A2433"/>
-                </a:solidFill>
-                <a:latin typeface="Calibri" pitchFamily="34" charset="0"/>
-                <a:ea typeface="Calibri" pitchFamily="34" charset="-122"/>
-                <a:cs typeface="Calibri" pitchFamily="34" charset="-120"/>
-              </a:rPr>
-              <a:t>Iniciado</a:t>
-            </a:r>
-            <a:endParaRPr lang="en-US" sz="1050" dirty="0"/>
-          </a:p>
-        </p:txBody>
-      </p:sp>
-      <p:sp>
-        <p:nvSpPr>
-          <p:cNvPr id="40" name="Text 37"/>
-          <p:cNvSpPr/>
-          <p:nvPr/>
-        </p:nvSpPr>
-        <p:spPr>
-          <a:xfrm>
-            <a:off x="8686800" y="3008376"/>
-            <a:ext cx="640080" cy="256032"/>
-          </a:xfrm>
-          <a:prstGeom prst="rect">
-            <a:avLst/>
-          </a:prstGeom>
-          <a:noFill/>
-          <a:ln/>
-        </p:spPr>
-        <p:txBody>
-          <a:bodyPr wrap="square" lIns="0" tIns="0" rIns="0" bIns="0" rtlCol="0" anchor="ctr"/>
-          <a:lstStyle/>
-          <a:p>
-            <a:pPr algn="r" indent="0" marL="0">
-              <a:buNone/>
-            </a:pPr>
-            <a:r>
-              <a:rPr lang="en-US" sz="1050" dirty="0">
-                <a:solidFill>
-                  <a:srgbClr val="1A2433"/>
-                </a:solidFill>
-                <a:latin typeface="Calibri" pitchFamily="34" charset="0"/>
-                <a:ea typeface="Calibri" pitchFamily="34" charset="-122"/>
-                <a:cs typeface="Calibri" pitchFamily="34" charset="-120"/>
-              </a:rPr>
-              <a:t>7</a:t>
-            </a:r>
-            <a:endParaRPr lang="en-US" sz="1050" dirty="0"/>
-          </a:p>
-        </p:txBody>
-      </p:sp>
-      <p:sp>
-        <p:nvSpPr>
-          <p:cNvPr id="41" name="Text 38"/>
-          <p:cNvSpPr/>
-          <p:nvPr/>
-        </p:nvSpPr>
-        <p:spPr>
-          <a:xfrm>
-            <a:off x="9464040" y="3008376"/>
-            <a:ext cx="2286000" cy="256032"/>
-          </a:xfrm>
-          <a:prstGeom prst="rect">
-            <a:avLst/>
-          </a:prstGeom>
-          <a:noFill/>
-          <a:ln/>
-        </p:spPr>
-        <p:txBody>
-          <a:bodyPr wrap="square" lIns="0" tIns="0" rIns="0" bIns="0" rtlCol="0" anchor="ctr"/>
-          <a:lstStyle/>
-          <a:p>
-            <a:pPr algn="l" indent="0" marL="0">
-              <a:buNone/>
-            </a:pPr>
-            <a:r>
-              <a:rPr lang="en-US" sz="1000" dirty="0">
-                <a:solidFill>
-                  <a:srgbClr val="1A2433"/>
-                </a:solidFill>
-                <a:latin typeface="Calibri" pitchFamily="34" charset="0"/>
-                <a:ea typeface="Calibri" pitchFamily="34" charset="-122"/>
-                <a:cs typeface="Calibri" pitchFamily="34" charset="-120"/>
-              </a:rPr>
-              <a:t>Verificación de Preservación</a:t>
-            </a:r>
-            <a:endParaRPr lang="en-US" sz="1000" dirty="0"/>
-          </a:p>
-        </p:txBody>
-      </p:sp>
-      <p:sp>
-        <p:nvSpPr>
-          <p:cNvPr id="42" name="Shape 39"/>
-          <p:cNvSpPr/>
-          <p:nvPr/>
-        </p:nvSpPr>
-        <p:spPr>
-          <a:xfrm>
-            <a:off x="502920" y="3300984"/>
-            <a:ext cx="11247120" cy="0"/>
-          </a:xfrm>
-          <a:prstGeom prst="line">
-            <a:avLst/>
-          </a:prstGeom>
-          <a:noFill/>
-          <a:ln w="9525">
-            <a:solidFill>
-              <a:srgbClr val="D9DFE6"/>
-            </a:solidFill>
-            <a:prstDash val="solid"/>
-          </a:ln>
-        </p:spPr>
-      </p:sp>
-      <p:sp>
-        <p:nvSpPr>
-          <p:cNvPr id="43" name="Shape 40"/>
+          <p:cNvPr id="34" name="Shape 31"/>
           <p:cNvSpPr/>
           <p:nvPr/>
         </p:nvSpPr>
@@ -7645,7 +7298,7 @@
       </p:sp>
       <p:sp>
         <p:nvSpPr>
-          <p:cNvPr id="44" name="Text 41"/>
+          <p:cNvPr id="35" name="Text 32"/>
           <p:cNvSpPr/>
           <p:nvPr/>
         </p:nvSpPr>
@@ -7684,7 +7337,7 @@
       </p:sp>
       <p:sp>
         <p:nvSpPr>
-          <p:cNvPr id="45" name="Text 42"/>
+          <p:cNvPr id="36" name="Text 33"/>
           <p:cNvSpPr/>
           <p:nvPr/>
         </p:nvSpPr>
@@ -7723,7 +7376,7 @@
       </p:sp>
       <p:sp>
         <p:nvSpPr>
-          <p:cNvPr id="46" name="Text 43"/>
+          <p:cNvPr id="37" name="Text 34"/>
           <p:cNvSpPr/>
           <p:nvPr/>
         </p:nvSpPr>
@@ -7754,7 +7407,7 @@
                 <a:ea typeface="Calibri" pitchFamily="34" charset="-122"/>
                 <a:cs typeface="Calibri" pitchFamily="34" charset="-120"/>
               </a:rPr>
-              <a:t>Fuente: Data_NCR_10082026.xlsx — hoja «Observaciones» · Corte 03-08-2026 · 508 registros desde 10-02-2023</a:t>
+              <a:t>Fuente: 1e73482e-Data_NCR03082026.xlsx — hoja «Observaciones» · Corte 03-08-2026 · 494 registros desde 10-02-2023</a:t>
             </a:r>
             <a:endParaRPr lang="en-US" sz="850" dirty="0"/>
           </a:p>
@@ -7762,7 +7415,7 @@
       </p:sp>
       <p:sp>
         <p:nvSpPr>
-          <p:cNvPr id="47" name="Text 44"/>
+          <p:cNvPr id="38" name="Text 35"/>
           <p:cNvSpPr/>
           <p:nvPr/>
         </p:nvSpPr>
@@ -7801,7 +7454,7 @@
       </p:sp>
       <p:sp>
         <p:nvSpPr>
-          <p:cNvPr id="48" name="Text 45"/>
+          <p:cNvPr id="39" name="Text 36"/>
           <p:cNvSpPr/>
           <p:nvPr/>
         </p:nvSpPr>
@@ -8107,7 +7760,7 @@
                 <a:ea typeface="Calibri" pitchFamily="34" charset="-122"/>
                 <a:cs typeface="Calibri" pitchFamily="34" charset="-120"/>
               </a:rPr>
-              <a:t>241 hallazgos levantados · 53 internas · 188 del cliente · 12 especialidades involucradas.</a:t>
+              <a:t>240 hallazgos levantados · 52 internas · 188 del cliente · 12 especialidades involucradas.</a:t>
             </a:r>
             <a:endParaRPr lang="en-US" sz="1350" dirty="0"/>
           </a:p>
@@ -8400,7 +8053,7 @@
                 <a:ea typeface="Cambria" pitchFamily="34" charset="-122"/>
                 <a:cs typeface="Cambria" pitchFamily="34" charset="-120"/>
               </a:rPr>
-              <a:t>22%</a:t>
+              <a:t>21,7%</a:t>
             </a:r>
             <a:endParaRPr lang="en-US" sz="3400" dirty="0"/>
           </a:p>
@@ -8517,7 +8170,7 @@
                 <a:ea typeface="Calibri" pitchFamily="34" charset="-122"/>
                 <a:cs typeface="Calibri" pitchFamily="34" charset="-120"/>
               </a:rPr>
-              <a:t>Fuente: Data_NCR_10082026.xlsx — hoja «Observaciones» · Corte 03-08-2026 · 508 registros desde 10-02-2023</a:t>
+              <a:t>Fuente: 1e73482e-Data_NCR03082026.xlsx — hoja «Observaciones» · Corte 03-08-2026 · 494 registros desde 10-02-2023</a:t>
             </a:r>
             <a:endParaRPr lang="en-US" sz="850" dirty="0"/>
           </a:p>
@@ -8783,7 +8436,7 @@
                 <a:ea typeface="Cambria" pitchFamily="34" charset="-122"/>
                 <a:cs typeface="Cambria" pitchFamily="34" charset="-120"/>
               </a:rPr>
-              <a:t>241</a:t>
+              <a:t>240</a:t>
             </a:r>
             <a:endParaRPr lang="en-US" sz="4000" dirty="0"/>
           </a:p>
@@ -8822,7 +8475,7 @@
                 <a:ea typeface="Calibri" pitchFamily="34" charset="-122"/>
                 <a:cs typeface="Calibri" pitchFamily="34" charset="-120"/>
               </a:rPr>
-              <a:t>226 cerrados</a:t>
+              <a:t>225 cerrados</a:t>
             </a:r>
             <a:endParaRPr lang="en-US" sz="1400" dirty="0"/>
           </a:p>
@@ -8900,7 +8553,7 @@
                 <a:ea typeface="Calibri" pitchFamily="34" charset="-122"/>
                 <a:cs typeface="Calibri" pitchFamily="34" charset="-120"/>
               </a:rPr>
-              <a:t>53 internas · 188 del cliente</a:t>
+              <a:t>52 internas · 188 del cliente</a:t>
             </a:r>
             <a:endParaRPr lang="en-US" sz="950" dirty="0"/>
           </a:p>
@@ -9032,7 +8685,7 @@
                 <a:ea typeface="Calibri" pitchFamily="34" charset="-122"/>
                 <a:cs typeface="Calibri" pitchFamily="34" charset="-120"/>
               </a:rPr>
-              <a:t>226/241</a:t>
+              <a:t>225/240</a:t>
             </a:r>
             <a:endParaRPr lang="en-US" sz="1400" dirty="0"/>
           </a:p>
@@ -9110,7 +8763,7 @@
                 <a:ea typeface="Calibri" pitchFamily="34" charset="-122"/>
                 <a:cs typeface="Calibri" pitchFamily="34" charset="-120"/>
               </a:rPr>
-              <a:t>Global del módulo: 89,4%</a:t>
+              <a:t>Global del módulo: 89,3%</a:t>
             </a:r>
             <a:endParaRPr lang="en-US" sz="950" dirty="0"/>
           </a:p>
@@ -9646,7 +9299,7 @@
                 <a:ea typeface="Cambria" pitchFamily="34" charset="-122"/>
                 <a:cs typeface="Cambria" pitchFamily="34" charset="-120"/>
               </a:rPr>
-              <a:t>22%</a:t>
+              <a:t>21,7%</a:t>
             </a:r>
             <a:endParaRPr lang="en-US" sz="2600" dirty="0"/>
           </a:p>
@@ -9708,7 +9361,7 @@
                 <a:ea typeface="Calibri" pitchFamily="34" charset="-122"/>
                 <a:cs typeface="Calibri" pitchFamily="34" charset="-120"/>
               </a:rPr>
-              <a:t>global del módulo 32,5%</a:t>
+              <a:t>global del módulo 32,8%</a:t>
             </a:r>
             <a:endParaRPr lang="en-US" sz="1000" dirty="0"/>
           </a:p>
@@ -9868,7 +9521,7 @@
                 <a:ea typeface="Cambria" pitchFamily="34" charset="-122"/>
                 <a:cs typeface="Cambria" pitchFamily="34" charset="-120"/>
               </a:rPr>
-              <a:t>53</a:t>
+              <a:t>52</a:t>
             </a:r>
             <a:endParaRPr lang="en-US" sz="1600" dirty="0"/>
           </a:p>
@@ -10044,7 +9697,7 @@
                 <a:ea typeface="Calibri" pitchFamily="34" charset="-122"/>
                 <a:cs typeface="Calibri" pitchFamily="34" charset="-120"/>
               </a:rPr>
-              <a:t>Fuente: Data_NCR_10082026.xlsx — hoja «Observaciones» · Corte 03-08-2026 · 508 registros desde 10-02-2023</a:t>
+              <a:t>Fuente: 1e73482e-Data_NCR03082026.xlsx — hoja «Observaciones» · Corte 03-08-2026 · 494 registros desde 10-02-2023</a:t>
             </a:r>
             <a:endParaRPr lang="en-US" sz="850" dirty="0"/>
           </a:p>
@@ -13903,7 +13556,7 @@
                 <a:ea typeface="Calibri" pitchFamily="34" charset="-122"/>
                 <a:cs typeface="Calibri" pitchFamily="34" charset="-120"/>
               </a:rPr>
-              <a:t>Fuente: Data_NCR_10082026.xlsx — hoja «Observaciones» · Corte 03-08-2026 · 508 registros desde 10-02-2023</a:t>
+              <a:t>Fuente: 1e73482e-Data_NCR03082026.xlsx — hoja «Observaciones» · Corte 03-08-2026 · 494 registros desde 10-02-2023</a:t>
             </a:r>
             <a:endParaRPr lang="en-US" sz="850" dirty="0"/>
           </a:p>
@@ -14666,7 +14319,7 @@
                 <a:ea typeface="Calibri" pitchFamily="34" charset="-122"/>
                 <a:cs typeface="Calibri" pitchFamily="34" charset="-120"/>
               </a:rPr>
-              <a:t>Fuente: Data_NCR_10082026.xlsx — hoja «Observaciones» · Corte 03-08-2026 · 508 registros desde 10-02-2023</a:t>
+              <a:t>Fuente: 1e73482e-Data_NCR03082026.xlsx — hoja «Observaciones» · Corte 03-08-2026 · 494 registros desde 10-02-2023</a:t>
             </a:r>
             <a:endParaRPr lang="en-US" sz="850" dirty="0"/>
           </a:p>
@@ -15259,7 +14912,7 @@
                 <a:ea typeface="Calibri" pitchFamily="34" charset="-122"/>
                 <a:cs typeface="Calibri" pitchFamily="34" charset="-120"/>
               </a:rPr>
-              <a:t>Global del módulo: 89,4%</a:t>
+              <a:t>Global del módulo: 89,3%</a:t>
             </a:r>
             <a:endParaRPr lang="en-US" sz="950" dirty="0"/>
           </a:p>
@@ -15857,7 +15510,7 @@
                 <a:ea typeface="Calibri" pitchFamily="34" charset="-122"/>
                 <a:cs typeface="Calibri" pitchFamily="34" charset="-120"/>
               </a:rPr>
-              <a:t>global del módulo 32,5%</a:t>
+              <a:t>global del módulo 32,8%</a:t>
             </a:r>
             <a:endParaRPr lang="en-US" sz="1000" dirty="0"/>
           </a:p>
@@ -16330,7 +15983,7 @@
                 <a:ea typeface="Calibri" pitchFamily="34" charset="-122"/>
                 <a:cs typeface="Calibri" pitchFamily="34" charset="-120"/>
               </a:rPr>
-              <a:t>Fuente: Data_NCR_10082026.xlsx — hoja «Observaciones» · Corte 03-08-2026 · 508 registros desde 10-02-2023</a:t>
+              <a:t>Fuente: 1e73482e-Data_NCR03082026.xlsx — hoja «Observaciones» · Corte 03-08-2026 · 494 registros desde 10-02-2023</a:t>
             </a:r>
             <a:endParaRPr lang="en-US" sz="850" dirty="0"/>
           </a:p>
@@ -20189,7 +19842,7 @@
                 <a:ea typeface="Calibri" pitchFamily="34" charset="-122"/>
                 <a:cs typeface="Calibri" pitchFamily="34" charset="-120"/>
               </a:rPr>
-              <a:t>Fuente: Data_NCR_10082026.xlsx — hoja «Observaciones» · Corte 03-08-2026 · 508 registros desde 10-02-2023</a:t>
+              <a:t>Fuente: 1e73482e-Data_NCR03082026.xlsx — hoja «Observaciones» · Corte 03-08-2026 · 494 registros desde 10-02-2023</a:t>
             </a:r>
             <a:endParaRPr lang="en-US" sz="850" dirty="0"/>
           </a:p>
@@ -20494,7 +20147,7 @@
                 <a:ea typeface="Cambria" pitchFamily="34" charset="-122"/>
                 <a:cs typeface="Cambria" pitchFamily="34" charset="-120"/>
               </a:rPr>
-              <a:t>89,4%</a:t>
+              <a:t>89,3%</a:t>
             </a:r>
             <a:endParaRPr lang="en-US" sz="4000" dirty="0"/>
           </a:p>
@@ -20533,7 +20186,7 @@
                 <a:ea typeface="Calibri" pitchFamily="34" charset="-122"/>
                 <a:cs typeface="Calibri" pitchFamily="34" charset="-120"/>
               </a:rPr>
-              <a:t>454/508</a:t>
+              <a:t>441/494</a:t>
             </a:r>
             <a:endParaRPr lang="en-US" sz="1400" dirty="0"/>
           </a:p>
@@ -20611,7 +20264,7 @@
                 <a:ea typeface="Calibri" pitchFamily="34" charset="-122"/>
                 <a:cs typeface="Calibri" pitchFamily="34" charset="-120"/>
               </a:rPr>
-              <a:t>54 abiertos · 17 con más de 180 días</a:t>
+              <a:t>53 abiertos · 17 con más de 180 días</a:t>
             </a:r>
             <a:endParaRPr lang="en-US" sz="950" dirty="0"/>
           </a:p>
@@ -20704,7 +20357,7 @@
                 <a:ea typeface="Cambria" pitchFamily="34" charset="-122"/>
                 <a:cs typeface="Cambria" pitchFamily="34" charset="-120"/>
               </a:rPr>
-              <a:t>54</a:t>
+              <a:t>53</a:t>
             </a:r>
             <a:endParaRPr lang="en-US" sz="4000" dirty="0"/>
           </a:p>
@@ -20743,7 +20396,7 @@
                 <a:ea typeface="Calibri" pitchFamily="34" charset="-122"/>
                 <a:cs typeface="Calibri" pitchFamily="34" charset="-120"/>
               </a:rPr>
-              <a:t>de 508 levantados</a:t>
+              <a:t>de 494 levantados</a:t>
             </a:r>
             <a:endParaRPr lang="en-US" sz="1400" dirty="0"/>
           </a:p>
@@ -20821,7 +20474,7 @@
                 <a:ea typeface="Calibri" pitchFamily="34" charset="-122"/>
                 <a:cs typeface="Calibri" pitchFamily="34" charset="-120"/>
               </a:rPr>
-              <a:t>15 iniciado · 1 no aceptado · 23 listo para revisión · 12 observada · 3 pendiente</a:t>
+              <a:t>14 iniciado · 1 no aceptado · 23 listo para revisión · 12 observada · 3 pendiente</a:t>
             </a:r>
             <a:endParaRPr lang="en-US" sz="950" dirty="0"/>
           </a:p>
@@ -20914,7 +20567,7 @@
                 <a:ea typeface="Cambria" pitchFamily="34" charset="-122"/>
                 <a:cs typeface="Cambria" pitchFamily="34" charset="-120"/>
               </a:rPr>
-              <a:t>32,5%</a:t>
+              <a:t>32,8%</a:t>
             </a:r>
             <a:endParaRPr lang="en-US" sz="4000" dirty="0"/>
           </a:p>
@@ -20953,7 +20606,7 @@
                 <a:ea typeface="Calibri" pitchFamily="34" charset="-122"/>
                 <a:cs typeface="Calibri" pitchFamily="34" charset="-120"/>
               </a:rPr>
-              <a:t>162/499 clasificados</a:t>
+              <a:t>159/485 clasificados</a:t>
             </a:r>
             <a:endParaRPr lang="en-US" sz="1400" dirty="0"/>
           </a:p>
@@ -21124,7 +20777,7 @@
                 <a:ea typeface="Cambria" pitchFamily="34" charset="-122"/>
                 <a:cs typeface="Cambria" pitchFamily="34" charset="-120"/>
               </a:rPr>
-              <a:t>10.783</a:t>
+              <a:t>10.613</a:t>
             </a:r>
             <a:endParaRPr lang="en-US" sz="4000" dirty="0"/>
           </a:p>
@@ -21163,7 +20816,7 @@
                 <a:ea typeface="Calibri" pitchFamily="34" charset="-122"/>
                 <a:cs typeface="Calibri" pitchFamily="34" charset="-120"/>
               </a:rPr>
-              <a:t>256 de 508 con costo</a:t>
+              <a:t>249 de 494 con costo</a:t>
             </a:r>
             <a:endParaRPr lang="en-US" sz="1400" dirty="0"/>
           </a:p>
@@ -21241,7 +20894,7 @@
                 <a:ea typeface="Calibri" pitchFamily="34" charset="-122"/>
                 <a:cs typeface="Calibri" pitchFamily="34" charset="-120"/>
               </a:rPr>
-              <a:t>252 hallazgos no declaran costo: la cifra es un piso</a:t>
+              <a:t>245 hallazgos no declaran costo: la cifra es un piso</a:t>
             </a:r>
             <a:endParaRPr lang="en-US" sz="950" dirty="0"/>
           </a:p>
@@ -21381,7 +21034,7 @@
                 <a:ea typeface="Calibri" pitchFamily="34" charset="-122"/>
                 <a:cs typeface="Calibri" pitchFamily="34" charset="-120"/>
               </a:rPr>
-              <a:t>36 de los 54 hallazgos abiertos (66,7%), y es uno de los frentes donde el cliente levanta más de lo que detecta Besalco (71 del cliente contra 53 internas).</a:t>
+              <a:t>36 de los 53 hallazgos abiertos (67,9%), y es uno de los frentes donde el cliente levanta más de lo que detecta Besalco (71 del cliente contra 53 internas).</a:t>
             </a:r>
             <a:endParaRPr lang="en-US" sz="1250" dirty="0"/>
           </a:p>
@@ -21522,7 +21175,7 @@
                 <a:ea typeface="Calibri" pitchFamily="34" charset="-122"/>
                 <a:cs typeface="Calibri" pitchFamily="34" charset="-120"/>
               </a:rPr>
-              <a:t>51 de los 54 abiertos están fuera del plazo de respuesta.  </a:t>
+              <a:t>50 de los 53 abiertos están fuera del plazo de respuesta.  </a:t>
             </a:r>
             <a:pPr indent="0" marL="0">
               <a:lnSpc>
@@ -21578,7 +21231,7 @@
                 <a:ea typeface="Calibri" pitchFamily="34" charset="-122"/>
                 <a:cs typeface="Calibri" pitchFamily="34" charset="-120"/>
               </a:rPr>
-              <a:t>Fuente: Data_NCR_10082026.xlsx — hoja «Observaciones» · Corte 03-08-2026 · 508 registros desde 10-02-2023</a:t>
+              <a:t>Fuente: 1e73482e-Data_NCR03082026.xlsx — hoja «Observaciones» · Corte 03-08-2026 · 494 registros desde 10-02-2023</a:t>
             </a:r>
             <a:endParaRPr lang="en-US" sz="850" dirty="0"/>
           </a:p>
@@ -22359,7 +22012,7 @@
                 <a:ea typeface="Calibri" pitchFamily="34" charset="-122"/>
                 <a:cs typeface="Calibri" pitchFamily="34" charset="-120"/>
               </a:rPr>
-              <a:t>95</a:t>
+              <a:t>82</a:t>
             </a:r>
             <a:endParaRPr lang="en-US" sz="1300" dirty="0"/>
           </a:p>
@@ -22398,7 +22051,7 @@
                 <a:ea typeface="Calibri" pitchFamily="34" charset="-122"/>
                 <a:cs typeface="Calibri" pitchFamily="34" charset="-120"/>
               </a:rPr>
-              <a:t>92</a:t>
+              <a:t>80</a:t>
             </a:r>
             <a:endParaRPr lang="en-US" sz="1300" dirty="0"/>
           </a:p>
@@ -22437,7 +22090,7 @@
                 <a:ea typeface="Calibri" pitchFamily="34" charset="-122"/>
                 <a:cs typeface="Calibri" pitchFamily="34" charset="-120"/>
               </a:rPr>
-              <a:t>3</a:t>
+              <a:t>2</a:t>
             </a:r>
             <a:endParaRPr lang="en-US" sz="1300" dirty="0"/>
           </a:p>
@@ -22476,7 +22129,7 @@
                 <a:ea typeface="Calibri" pitchFamily="34" charset="-122"/>
                 <a:cs typeface="Calibri" pitchFamily="34" charset="-120"/>
               </a:rPr>
-              <a:t>96,8%</a:t>
+              <a:t>97,6%</a:t>
             </a:r>
             <a:endParaRPr lang="en-US" sz="1300" dirty="0"/>
           </a:p>
@@ -22515,7 +22168,7 @@
                 <a:ea typeface="Calibri" pitchFamily="34" charset="-122"/>
                 <a:cs typeface="Calibri" pitchFamily="34" charset="-120"/>
               </a:rPr>
-              <a:t>56</a:t>
+              <a:t>54</a:t>
             </a:r>
             <a:endParaRPr lang="en-US" sz="1300" dirty="0"/>
           </a:p>
@@ -22554,7 +22207,7 @@
                 <a:ea typeface="Calibri" pitchFamily="34" charset="-122"/>
                 <a:cs typeface="Calibri" pitchFamily="34" charset="-120"/>
               </a:rPr>
-              <a:t>30</a:t>
+              <a:t>19</a:t>
             </a:r>
             <a:endParaRPr lang="en-US" sz="1300" dirty="0"/>
           </a:p>
@@ -22632,7 +22285,7 @@
                 <a:ea typeface="Calibri" pitchFamily="34" charset="-122"/>
                 <a:cs typeface="Calibri" pitchFamily="34" charset="-120"/>
               </a:rPr>
-              <a:t>1.573</a:t>
+              <a:t>1.403</a:t>
             </a:r>
             <a:endParaRPr lang="en-US" sz="1300" dirty="0"/>
           </a:p>
@@ -22853,7 +22506,7 @@
                 <a:ea typeface="Calibri" pitchFamily="34" charset="-122"/>
                 <a:cs typeface="Calibri" pitchFamily="34" charset="-120"/>
               </a:rPr>
-              <a:t>241</a:t>
+              <a:t>240</a:t>
             </a:r>
             <a:endParaRPr lang="en-US" sz="1300" dirty="0"/>
           </a:p>
@@ -22892,7 +22545,7 @@
                 <a:ea typeface="Calibri" pitchFamily="34" charset="-122"/>
                 <a:cs typeface="Calibri" pitchFamily="34" charset="-120"/>
               </a:rPr>
-              <a:t>226</a:t>
+              <a:t>225</a:t>
             </a:r>
             <a:endParaRPr lang="en-US" sz="1300" dirty="0"/>
           </a:p>
@@ -23009,7 +22662,7 @@
                 <a:ea typeface="Calibri" pitchFamily="34" charset="-122"/>
                 <a:cs typeface="Calibri" pitchFamily="34" charset="-120"/>
               </a:rPr>
-              <a:t>53</a:t>
+              <a:t>52</a:t>
             </a:r>
             <a:endParaRPr lang="en-US" sz="1300" dirty="0"/>
           </a:p>
@@ -24295,7 +23948,7 @@
                 <a:ea typeface="Calibri" pitchFamily="34" charset="-122"/>
                 <a:cs typeface="Calibri" pitchFamily="34" charset="-120"/>
               </a:rPr>
-              <a:t>500</a:t>
+              <a:t>486</a:t>
             </a:r>
             <a:endParaRPr lang="en-US" sz="1300" dirty="0"/>
           </a:p>
@@ -24334,7 +23987,7 @@
                 <a:ea typeface="Calibri" pitchFamily="34" charset="-122"/>
                 <a:cs typeface="Calibri" pitchFamily="34" charset="-120"/>
               </a:rPr>
-              <a:t>446</a:t>
+              <a:t>433</a:t>
             </a:r>
             <a:endParaRPr lang="en-US" sz="1300" dirty="0"/>
           </a:p>
@@ -24373,7 +24026,7 @@
                 <a:ea typeface="Calibri" pitchFamily="34" charset="-122"/>
                 <a:cs typeface="Calibri" pitchFamily="34" charset="-120"/>
               </a:rPr>
-              <a:t>54</a:t>
+              <a:t>53</a:t>
             </a:r>
             <a:endParaRPr lang="en-US" sz="1300" dirty="0"/>
           </a:p>
@@ -24412,7 +24065,7 @@
                 <a:ea typeface="Calibri" pitchFamily="34" charset="-122"/>
                 <a:cs typeface="Calibri" pitchFamily="34" charset="-120"/>
               </a:rPr>
-              <a:t>89,2%</a:t>
+              <a:t>89,1%</a:t>
             </a:r>
             <a:endParaRPr lang="en-US" sz="1300" dirty="0"/>
           </a:p>
@@ -24451,7 +24104,7 @@
                 <a:ea typeface="Calibri" pitchFamily="34" charset="-122"/>
                 <a:cs typeface="Calibri" pitchFamily="34" charset="-120"/>
               </a:rPr>
-              <a:t>162</a:t>
+              <a:t>159</a:t>
             </a:r>
             <a:endParaRPr lang="en-US" sz="1300" dirty="0"/>
           </a:p>
@@ -24490,7 +24143,7 @@
                 <a:ea typeface="Calibri" pitchFamily="34" charset="-122"/>
                 <a:cs typeface="Calibri" pitchFamily="34" charset="-120"/>
               </a:rPr>
-              <a:t>289</a:t>
+              <a:t>278</a:t>
             </a:r>
             <a:endParaRPr lang="en-US" sz="1300" dirty="0"/>
           </a:p>
@@ -24568,7 +24221,7 @@
                 <a:ea typeface="Calibri" pitchFamily="34" charset="-122"/>
                 <a:cs typeface="Calibri" pitchFamily="34" charset="-120"/>
               </a:rPr>
-              <a:t>10.783</a:t>
+              <a:t>10.613</a:t>
             </a:r>
             <a:endParaRPr lang="en-US" sz="1300" dirty="0"/>
           </a:p>
@@ -24646,7 +24299,7 @@
                 <a:ea typeface="Calibri" pitchFamily="34" charset="-122"/>
                 <a:cs typeface="Calibri" pitchFamily="34" charset="-120"/>
               </a:rPr>
-              <a:t>Fuente: Data_NCR_10082026.xlsx — hoja «Observaciones» · Corte 03-08-2026 · 508 registros desde 10-02-2023</a:t>
+              <a:t>Fuente: 1e73482e-Data_NCR03082026.xlsx — hoja «Observaciones» · Corte 03-08-2026 · 494 registros desde 10-02-2023</a:t>
             </a:r>
             <a:endParaRPr lang="en-US" sz="850" dirty="0"/>
           </a:p>
@@ -26112,7 +25765,7 @@
                 <a:ea typeface="Calibri" pitchFamily="34" charset="-122"/>
                 <a:cs typeface="Calibri" pitchFamily="34" charset="-120"/>
               </a:rPr>
-              <a:t>Fuente: Data_NCR_10082026.xlsx — hoja «Observaciones» · Corte 03-08-2026 · 508 registros desde 10-02-2023</a:t>
+              <a:t>Fuente: 1e73482e-Data_NCR03082026.xlsx — hoja «Observaciones» · Corte 03-08-2026 · 494 registros desde 10-02-2023</a:t>
             </a:r>
             <a:endParaRPr lang="en-US" sz="850" dirty="0"/>
           </a:p>
@@ -26363,7 +26016,7 @@
                 <a:ea typeface="Calibri" pitchFamily="34" charset="-122"/>
                 <a:cs typeface="Calibri" pitchFamily="34" charset="-120"/>
               </a:rPr>
-              <a:t>Interna es autodetección: la levanta Besalco antes que nadie. Externa la levanta el cliente —compromete el contrato— o un subcontrato. Autodetección global: 32,5%.</a:t>
+              <a:t>Interna es autodetección: la levanta Besalco antes que nadie. Externa la levanta el cliente —compromete el contrato— o un subcontrato. Autodetección global: 32,8%.</a:t>
             </a:r>
             <a:endParaRPr lang="en-US" sz="1350" dirty="0"/>
           </a:p>
@@ -26792,7 +26445,7 @@
                 <a:ea typeface="Calibri" pitchFamily="34" charset="-122"/>
                 <a:cs typeface="Calibri" pitchFamily="34" charset="-120"/>
               </a:rPr>
-              <a:t>162</a:t>
+              <a:t>159</a:t>
             </a:r>
             <a:endParaRPr lang="en-US" sz="1050" dirty="0"/>
           </a:p>
@@ -26831,7 +26484,7 @@
                 <a:ea typeface="Calibri" pitchFamily="34" charset="-122"/>
                 <a:cs typeface="Calibri" pitchFamily="34" charset="-120"/>
               </a:rPr>
-              <a:t>157</a:t>
+              <a:t>154</a:t>
             </a:r>
             <a:endParaRPr lang="en-US" sz="1050" dirty="0"/>
           </a:p>
@@ -26987,7 +26640,7 @@
                 <a:ea typeface="Calibri" pitchFamily="34" charset="-122"/>
                 <a:cs typeface="Calibri" pitchFamily="34" charset="-120"/>
               </a:rPr>
-              <a:t>65 días</a:t>
+              <a:t>64 días</a:t>
             </a:r>
             <a:endParaRPr lang="en-US" sz="1050" dirty="0"/>
           </a:p>
@@ -27108,7 +26761,7 @@
                 <a:ea typeface="Calibri" pitchFamily="34" charset="-122"/>
                 <a:cs typeface="Calibri" pitchFamily="34" charset="-120"/>
               </a:rPr>
-              <a:t>289</a:t>
+              <a:t>278</a:t>
             </a:r>
             <a:endParaRPr lang="en-US" sz="1050" dirty="0"/>
           </a:p>
@@ -27147,7 +26800,7 @@
                 <a:ea typeface="Calibri" pitchFamily="34" charset="-122"/>
                 <a:cs typeface="Calibri" pitchFamily="34" charset="-120"/>
               </a:rPr>
-              <a:t>240</a:t>
+              <a:t>230</a:t>
             </a:r>
             <a:endParaRPr lang="en-US" sz="1050" dirty="0"/>
           </a:p>
@@ -27186,7 +26839,7 @@
                 <a:ea typeface="Calibri" pitchFamily="34" charset="-122"/>
                 <a:cs typeface="Calibri" pitchFamily="34" charset="-120"/>
               </a:rPr>
-              <a:t>83%</a:t>
+              <a:t>82,7%</a:t>
             </a:r>
             <a:endParaRPr lang="en-US" sz="1050" dirty="0"/>
           </a:p>
@@ -27225,7 +26878,7 @@
                 <a:ea typeface="Calibri" pitchFamily="34" charset="-122"/>
                 <a:cs typeface="Calibri" pitchFamily="34" charset="-120"/>
               </a:rPr>
-              <a:t>49</a:t>
+              <a:t>48</a:t>
             </a:r>
             <a:endParaRPr lang="en-US" sz="1050" dirty="0"/>
           </a:p>
@@ -27264,7 +26917,7 @@
                 <a:ea typeface="Calibri" pitchFamily="34" charset="-122"/>
                 <a:cs typeface="Calibri" pitchFamily="34" charset="-120"/>
               </a:rPr>
-              <a:t>46</a:t>
+              <a:t>45</a:t>
             </a:r>
             <a:endParaRPr lang="en-US" sz="1050" dirty="0"/>
           </a:p>
@@ -27303,7 +26956,7 @@
                 <a:ea typeface="Calibri" pitchFamily="34" charset="-122"/>
                 <a:cs typeface="Calibri" pitchFamily="34" charset="-120"/>
               </a:rPr>
-              <a:t>49 días</a:t>
+              <a:t>50 días</a:t>
             </a:r>
             <a:endParaRPr lang="en-US" sz="1050" dirty="0"/>
           </a:p>
@@ -28016,7 +27669,7 @@
                 <a:ea typeface="Calibri" pitchFamily="34" charset="-122"/>
                 <a:cs typeface="Calibri" pitchFamily="34" charset="-120"/>
               </a:rPr>
-              <a:t>508</a:t>
+              <a:t>494</a:t>
             </a:r>
             <a:endParaRPr lang="en-US" sz="1050" dirty="0"/>
           </a:p>
@@ -28055,7 +27708,7 @@
                 <a:ea typeface="Calibri" pitchFamily="34" charset="-122"/>
                 <a:cs typeface="Calibri" pitchFamily="34" charset="-120"/>
               </a:rPr>
-              <a:t>454</a:t>
+              <a:t>441</a:t>
             </a:r>
             <a:endParaRPr lang="en-US" sz="1050" dirty="0"/>
           </a:p>
@@ -28094,7 +27747,7 @@
                 <a:ea typeface="Calibri" pitchFamily="34" charset="-122"/>
                 <a:cs typeface="Calibri" pitchFamily="34" charset="-120"/>
               </a:rPr>
-              <a:t>89,4%</a:t>
+              <a:t>89,3%</a:t>
             </a:r>
             <a:endParaRPr lang="en-US" sz="1050" dirty="0"/>
           </a:p>
@@ -28133,7 +27786,7 @@
                 <a:ea typeface="Calibri" pitchFamily="34" charset="-122"/>
                 <a:cs typeface="Calibri" pitchFamily="34" charset="-120"/>
               </a:rPr>
-              <a:t>54</a:t>
+              <a:t>53</a:t>
             </a:r>
             <a:endParaRPr lang="en-US" sz="1050" dirty="0"/>
           </a:p>
@@ -28172,7 +27825,7 @@
                 <a:ea typeface="Calibri" pitchFamily="34" charset="-122"/>
                 <a:cs typeface="Calibri" pitchFamily="34" charset="-120"/>
               </a:rPr>
-              <a:t>51</a:t>
+              <a:t>50</a:t>
             </a:r>
             <a:endParaRPr lang="en-US" sz="1050" dirty="0"/>
           </a:p>
@@ -28350,7 +28003,7 @@
                 <a:ea typeface="Cambria" pitchFamily="34" charset="-122"/>
                 <a:cs typeface="Cambria" pitchFamily="34" charset="-120"/>
               </a:rPr>
-              <a:t>59,6%</a:t>
+              <a:t>66,7%</a:t>
             </a:r>
             <a:endParaRPr lang="en-US" sz="2400" dirty="0"/>
           </a:p>
@@ -28428,7 +28081,7 @@
                 <a:ea typeface="Cambria" pitchFamily="34" charset="-122"/>
                 <a:cs typeface="Cambria" pitchFamily="34" charset="-120"/>
               </a:rPr>
-              <a:t>22%</a:t>
+              <a:t>21,7%</a:t>
             </a:r>
             <a:endParaRPr lang="en-US" sz="2400" dirty="0"/>
           </a:p>
@@ -28584,7 +28237,7 @@
                 <a:ea typeface="Calibri" pitchFamily="34" charset="-122"/>
                 <a:cs typeface="Calibri" pitchFamily="34" charset="-120"/>
               </a:rPr>
-              <a:t>Fuente: Data_NCR_10082026.xlsx — hoja «Observaciones» · Corte 03-08-2026 · 508 registros desde 10-02-2023</a:t>
+              <a:t>Fuente: 1e73482e-Data_NCR03082026.xlsx — hoja «Observaciones» · Corte 03-08-2026 · 494 registros desde 10-02-2023</a:t>
             </a:r>
             <a:endParaRPr lang="en-US" sz="850" dirty="0"/>
           </a:p>
@@ -28835,7 +28488,7 @@
                 <a:ea typeface="Calibri" pitchFamily="34" charset="-122"/>
                 <a:cs typeface="Calibri" pitchFamily="34" charset="-120"/>
               </a:rPr>
-              <a:t>De los 54 hallazgos abiertos, 17 llevan más de 180 días desde que se levantaron y 3 más de un año. La mediana de cierre global es de 30 días.</a:t>
+              <a:t>De los 53 hallazgos abiertos, 17 llevan más de 180 días desde que se levantaron y 3 más de un año. La mediana de cierre global es de 30 días.</a:t>
             </a:r>
             <a:endParaRPr lang="en-US" sz="1350" dirty="0"/>
           </a:p>
@@ -28972,7 +28625,7 @@
                 <a:ea typeface="Calibri" pitchFamily="34" charset="-122"/>
                 <a:cs typeface="Calibri" pitchFamily="34" charset="-120"/>
               </a:rPr>
-              <a:t>Al corte hay 51 hallazgos fuera de plazo de los 54 abiertos.</a:t>
+              <a:t>Al corte hay 50 hallazgos fuera de plazo de los 53 abiertos.</a:t>
             </a:r>
             <a:endParaRPr lang="en-US" sz="1150" dirty="0"/>
           </a:p>
@@ -29385,7 +29038,7 @@
                 <a:ea typeface="Calibri" pitchFamily="34" charset="-122"/>
                 <a:cs typeface="Calibri" pitchFamily="34" charset="-120"/>
               </a:rPr>
-              <a:t>92</a:t>
+              <a:t>80</a:t>
             </a:r>
             <a:endParaRPr lang="en-US" sz="1150" dirty="0"/>
           </a:p>
@@ -29502,7 +29155,7 @@
                 <a:ea typeface="Calibri" pitchFamily="34" charset="-122"/>
                 <a:cs typeface="Calibri" pitchFamily="34" charset="-120"/>
               </a:rPr>
-              <a:t>3</a:t>
+              <a:t>2</a:t>
             </a:r>
             <a:endParaRPr lang="en-US" sz="1150" dirty="0"/>
           </a:p>
@@ -29651,7 +29304,7 @@
                 <a:ea typeface="Calibri" pitchFamily="34" charset="-122"/>
                 <a:cs typeface="Calibri" pitchFamily="34" charset="-120"/>
               </a:rPr>
-              <a:t>226</a:t>
+              <a:t>225</a:t>
             </a:r>
             <a:endParaRPr lang="en-US" sz="1150" dirty="0"/>
           </a:p>
@@ -30392,7 +30045,7 @@
                 <a:ea typeface="Calibri" pitchFamily="34" charset="-122"/>
                 <a:cs typeface="Calibri" pitchFamily="34" charset="-120"/>
               </a:rPr>
-              <a:t>Fuente: Data_NCR_10082026.xlsx — hoja «Observaciones» · Corte 03-08-2026 · 508 registros desde 10-02-2023</a:t>
+              <a:t>Fuente: 1e73482e-Data_NCR03082026.xlsx — hoja «Observaciones» · Corte 03-08-2026 · 494 registros desde 10-02-2023</a:t>
             </a:r>
             <a:endParaRPr lang="en-US" sz="850" dirty="0"/>
           </a:p>
@@ -30766,7 +30419,7 @@
                 <a:ea typeface="Calibri" pitchFamily="34" charset="-122"/>
                 <a:cs typeface="Calibri" pitchFamily="34" charset="-120"/>
               </a:rPr>
-              <a:t>36 de los 54 hallazgos abiertos (66,7%) y 78% de cierre, contra 89,4% global. Es la ruta crítica del módulo.</a:t>
+              <a:t>36 de los 53 hallazgos abiertos (67,9%) y 78% de cierre, contra 89,3% global. Es la ruta crítica del módulo.</a:t>
             </a:r>
             <a:endParaRPr lang="en-US" sz="1100" dirty="0"/>
           </a:p>
@@ -30908,7 +30561,7 @@
                 <a:ea typeface="Calibri" pitchFamily="34" charset="-122"/>
                 <a:cs typeface="Calibri" pitchFamily="34" charset="-120"/>
               </a:rPr>
-              <a:t>Solo 22% de sus hallazgos los detecta Besalco; el mejor frente va en 59,6%. Lo que no se detecta adentro llega como observación del cliente.</a:t>
+              <a:t>Solo 21,7% de sus hallazgos los detecta Besalco; el mejor frente va en 66,7%. Lo que no se detecta adentro llega como observación del cliente.</a:t>
             </a:r>
             <a:endParaRPr lang="en-US" sz="1100" dirty="0"/>
           </a:p>
@@ -31150,7 +30803,7 @@
                 <a:ea typeface="Calibri" pitchFamily="34" charset="-122"/>
                 <a:cs typeface="Calibri" pitchFamily="34" charset="-120"/>
               </a:rPr>
-              <a:t>Responder las 51 que pasaron el plazo</a:t>
+              <a:t>Responder las 50 que pasaron el plazo</a:t>
             </a:r>
             <a:endParaRPr lang="en-US" sz="1400" dirty="0"/>
           </a:p>
@@ -31192,7 +30845,7 @@
                 <a:ea typeface="Calibri" pitchFamily="34" charset="-122"/>
                 <a:cs typeface="Calibri" pitchFamily="34" charset="-120"/>
               </a:rPr>
-              <a:t>El plazo es de 10 días desde la emisión y hoy lo incumplen 94,4% de los abiertos. Solo 3 siguen dentro de plazo.</a:t>
+              <a:t>El plazo es de 10 días desde la emisión y hoy lo incumplen 94,3% de los abiertos. Solo 3 siguen dentro de plazo.</a:t>
             </a:r>
             <a:endParaRPr lang="en-US" sz="1100" dirty="0"/>
           </a:p>
@@ -31231,7 +30884,7 @@
                 <a:ea typeface="Calibri" pitchFamily="34" charset="-122"/>
                 <a:cs typeface="Calibri" pitchFamily="34" charset="-120"/>
               </a:rPr>
-              <a:t>Fuente: Data_NCR_10082026.xlsx — hoja «Observaciones» · Corte 03-08-2026 · 508 registros desde 10-02-2023</a:t>
+              <a:t>Fuente: 1e73482e-Data_NCR03082026.xlsx — hoja «Observaciones» · Corte 03-08-2026 · 494 registros desde 10-02-2023</a:t>
             </a:r>
             <a:endParaRPr lang="en-US" sz="850" dirty="0"/>
           </a:p>
@@ -31584,7 +31237,7 @@
                 <a:ea typeface="Calibri" pitchFamily="34" charset="-122"/>
                 <a:cs typeface="Calibri" pitchFamily="34" charset="-120"/>
               </a:rPr>
-              <a:t>95 hallazgos levantados · 56 internas · 30 del cliente · 8 de subcontrato · 18 especialidades involucradas.</a:t>
+              <a:t>82 hallazgos levantados · 54 internas · 19 del cliente · 8 de subcontrato · 18 especialidades involucradas.</a:t>
             </a:r>
             <a:endParaRPr lang="en-US" sz="1350" dirty="0"/>
           </a:p>
@@ -31643,7 +31296,7 @@
                 <a:ea typeface="Cambria" pitchFamily="34" charset="-122"/>
                 <a:cs typeface="Cambria" pitchFamily="34" charset="-120"/>
               </a:rPr>
-              <a:t>96,8%</a:t>
+              <a:t>97,6%</a:t>
             </a:r>
             <a:endParaRPr lang="en-US" sz="3400" dirty="0"/>
           </a:p>
@@ -31721,7 +31374,7 @@
                 <a:ea typeface="Cambria" pitchFamily="34" charset="-122"/>
                 <a:cs typeface="Cambria" pitchFamily="34" charset="-120"/>
               </a:rPr>
-              <a:t>3</a:t>
+              <a:t>2</a:t>
             </a:r>
             <a:endParaRPr lang="en-US" sz="3400" dirty="0"/>
           </a:p>
@@ -31877,7 +31530,7 @@
                 <a:ea typeface="Cambria" pitchFamily="34" charset="-122"/>
                 <a:cs typeface="Cambria" pitchFamily="34" charset="-120"/>
               </a:rPr>
-              <a:t>59,6%</a:t>
+              <a:t>66,7%</a:t>
             </a:r>
             <a:endParaRPr lang="en-US" sz="3400" dirty="0"/>
           </a:p>
@@ -31994,7 +31647,7 @@
                 <a:ea typeface="Calibri" pitchFamily="34" charset="-122"/>
                 <a:cs typeface="Calibri" pitchFamily="34" charset="-120"/>
               </a:rPr>
-              <a:t>Fuente: Data_NCR_10082026.xlsx — hoja «Observaciones» · Corte 03-08-2026 · 508 registros desde 10-02-2023</a:t>
+              <a:t>Fuente: 1e73482e-Data_NCR03082026.xlsx — hoja «Observaciones» · Corte 03-08-2026 · 494 registros desde 10-02-2023</a:t>
             </a:r>
             <a:endParaRPr lang="en-US" sz="850" dirty="0"/>
           </a:p>
@@ -32260,7 +31913,7 @@
                 <a:ea typeface="Cambria" pitchFamily="34" charset="-122"/>
                 <a:cs typeface="Cambria" pitchFamily="34" charset="-120"/>
               </a:rPr>
-              <a:t>95</a:t>
+              <a:t>82</a:t>
             </a:r>
             <a:endParaRPr lang="en-US" sz="4000" dirty="0"/>
           </a:p>
@@ -32299,7 +31952,7 @@
                 <a:ea typeface="Calibri" pitchFamily="34" charset="-122"/>
                 <a:cs typeface="Calibri" pitchFamily="34" charset="-120"/>
               </a:rPr>
-              <a:t>92 cerrados</a:t>
+              <a:t>80 cerrados</a:t>
             </a:r>
             <a:endParaRPr lang="en-US" sz="1400" dirty="0"/>
           </a:p>
@@ -32377,7 +32030,7 @@
                 <a:ea typeface="Calibri" pitchFamily="34" charset="-122"/>
                 <a:cs typeface="Calibri" pitchFamily="34" charset="-120"/>
               </a:rPr>
-              <a:t>56 internas · 30 del cliente · 8 de subcontrato</a:t>
+              <a:t>54 internas · 19 del cliente · 8 de subcontrato</a:t>
             </a:r>
             <a:endParaRPr lang="en-US" sz="950" dirty="0"/>
           </a:p>
@@ -32470,7 +32123,7 @@
                 <a:ea typeface="Cambria" pitchFamily="34" charset="-122"/>
                 <a:cs typeface="Cambria" pitchFamily="34" charset="-120"/>
               </a:rPr>
-              <a:t>96,8%</a:t>
+              <a:t>97,6%</a:t>
             </a:r>
             <a:endParaRPr lang="en-US" sz="4000" dirty="0"/>
           </a:p>
@@ -32509,7 +32162,7 @@
                 <a:ea typeface="Calibri" pitchFamily="34" charset="-122"/>
                 <a:cs typeface="Calibri" pitchFamily="34" charset="-120"/>
               </a:rPr>
-              <a:t>92/95</a:t>
+              <a:t>80/82</a:t>
             </a:r>
             <a:endParaRPr lang="en-US" sz="1400" dirty="0"/>
           </a:p>
@@ -32587,7 +32240,7 @@
                 <a:ea typeface="Calibri" pitchFamily="34" charset="-122"/>
                 <a:cs typeface="Calibri" pitchFamily="34" charset="-120"/>
               </a:rPr>
-              <a:t>Global del módulo: 89,4%</a:t>
+              <a:t>Global del módulo: 89,3%</a:t>
             </a:r>
             <a:endParaRPr lang="en-US" sz="950" dirty="0"/>
           </a:p>
@@ -32680,7 +32333,7 @@
                 <a:ea typeface="Cambria" pitchFamily="34" charset="-122"/>
                 <a:cs typeface="Cambria" pitchFamily="34" charset="-120"/>
               </a:rPr>
-              <a:t>3</a:t>
+              <a:t>2</a:t>
             </a:r>
             <a:endParaRPr lang="en-US" sz="4000" dirty="0"/>
           </a:p>
@@ -32797,7 +32450,7 @@
                 <a:ea typeface="Calibri" pitchFamily="34" charset="-122"/>
                 <a:cs typeface="Calibri" pitchFamily="34" charset="-120"/>
               </a:rPr>
-              <a:t>1 listo para revisión · 2 iniciado</a:t>
+              <a:t>1 listo para revisión · 1 iniciado</a:t>
             </a:r>
             <a:endParaRPr lang="en-US" sz="950" dirty="0"/>
           </a:p>
@@ -33123,7 +32776,7 @@
                 <a:ea typeface="Cambria" pitchFamily="34" charset="-122"/>
                 <a:cs typeface="Cambria" pitchFamily="34" charset="-120"/>
               </a:rPr>
-              <a:t>59,6%</a:t>
+              <a:t>66,7%</a:t>
             </a:r>
             <a:endParaRPr lang="en-US" sz="2600" dirty="0"/>
           </a:p>
@@ -33185,7 +32838,7 @@
                 <a:ea typeface="Calibri" pitchFamily="34" charset="-122"/>
                 <a:cs typeface="Calibri" pitchFamily="34" charset="-120"/>
               </a:rPr>
-              <a:t>global del módulo 32,5%</a:t>
+              <a:t>global del módulo 32,8%</a:t>
             </a:r>
             <a:endParaRPr lang="en-US" sz="1000" dirty="0"/>
           </a:p>
@@ -33345,7 +32998,7 @@
                 <a:ea typeface="Cambria" pitchFamily="34" charset="-122"/>
                 <a:cs typeface="Cambria" pitchFamily="34" charset="-120"/>
               </a:rPr>
-              <a:t>56</a:t>
+              <a:t>54</a:t>
             </a:r>
             <a:endParaRPr lang="en-US" sz="1600" dirty="0"/>
           </a:p>
@@ -33443,7 +33096,7 @@
                 <a:ea typeface="Calibri" pitchFamily="34" charset="-122"/>
                 <a:cs typeface="Calibri" pitchFamily="34" charset="-120"/>
               </a:rPr>
-              <a:t>2 ab.</a:t>
+              <a:t>1 ab.</a:t>
             </a:r>
             <a:endParaRPr lang="en-US" sz="950" dirty="0"/>
           </a:p>
@@ -33482,7 +33135,7 @@
                 <a:ea typeface="Cambria" pitchFamily="34" charset="-122"/>
                 <a:cs typeface="Cambria" pitchFamily="34" charset="-120"/>
               </a:rPr>
-              <a:t>30</a:t>
+              <a:t>19</a:t>
             </a:r>
             <a:endParaRPr lang="en-US" sz="1600" dirty="0"/>
           </a:p>
@@ -33795,7 +33448,7 @@
                 <a:ea typeface="Calibri" pitchFamily="34" charset="-122"/>
                 <a:cs typeface="Calibri" pitchFamily="34" charset="-120"/>
               </a:rPr>
-              <a:t>Fuente: Data_NCR_10082026.xlsx — hoja «Observaciones» · Corte 03-08-2026 · 508 registros desde 10-02-2023</a:t>
+              <a:t>Fuente: 1e73482e-Data_NCR03082026.xlsx — hoja «Observaciones» · Corte 03-08-2026 · 494 registros desde 10-02-2023</a:t>
             </a:r>
             <a:endParaRPr lang="en-US" sz="850" dirty="0"/>
           </a:p>

--- a/modulo_nc/Panel_No_Conformidades.pptx
+++ b/modulo_nc/Panel_No_Conformidades.pptx
@@ -219,19 +219,19 @@
                     <c:v>3 sem.</c:v>
                   </c:pt>
                   <c:pt idx="1">
-                    <c:v>30-06</c:v>
+                    <c:v>29-06</c:v>
                   </c:pt>
                   <c:pt idx="2">
-                    <c:v>07-07</c:v>
+                    <c:v>06-07</c:v>
                   </c:pt>
                   <c:pt idx="3">
-                    <c:v>14-07</c:v>
+                    <c:v>13-07</c:v>
                   </c:pt>
                   <c:pt idx="4">
-                    <c:v>21-07</c:v>
+                    <c:v>20-07</c:v>
                   </c:pt>
                   <c:pt idx="5">
-                    <c:v>28-07</c:v>
+                    <c:v>27-07</c:v>
                   </c:pt>
                 </c:lvl>
               </c:multiLvlStrCache>
@@ -256,10 +256,10 @@
                   <c:v/>
                 </c:pt>
                 <c:pt idx="4">
-                  <c:v>4</c:v>
+                  <c:v>2</c:v>
                 </c:pt>
                 <c:pt idx="5">
-                  <c:v>1</c:v>
+                  <c:v>3</c:v>
                 </c:pt>
               </c:numCache>
             </c:numRef>
@@ -321,19 +321,19 @@
                     <c:v>3 sem.</c:v>
                   </c:pt>
                   <c:pt idx="1">
-                    <c:v>30-06</c:v>
+                    <c:v>29-06</c:v>
                   </c:pt>
                   <c:pt idx="2">
-                    <c:v>07-07</c:v>
+                    <c:v>06-07</c:v>
                   </c:pt>
                   <c:pt idx="3">
-                    <c:v>14-07</c:v>
+                    <c:v>13-07</c:v>
                   </c:pt>
                   <c:pt idx="4">
-                    <c:v>21-07</c:v>
+                    <c:v>20-07</c:v>
                   </c:pt>
                   <c:pt idx="5">
-                    <c:v>28-07</c:v>
+                    <c:v>27-07</c:v>
                   </c:pt>
                 </c:lvl>
               </c:multiLvlStrCache>
@@ -7291,7 +7291,7 @@
             </a:avLst>
           </a:prstGeom>
           <a:solidFill>
-            <a:srgbClr val="E9EDF2"/>
+            <a:srgbClr val="12233B"/>
           </a:solidFill>
           <a:ln/>
         </p:spPr>
@@ -7323,13 +7323,13 @@
             <a:r>
               <a:rPr lang="en-US" sz="1000" b="1" spc="100" kern="0" dirty="0">
                 <a:solidFill>
-                  <a:srgbClr val="56606E"/>
-                </a:solidFill>
-                <a:latin typeface="Calibri" pitchFamily="34" charset="0"/>
-                <a:ea typeface="Calibri" pitchFamily="34" charset="-122"/>
-                <a:cs typeface="Calibri" pitchFamily="34" charset="-120"/>
-              </a:rPr>
-              <a:t>SEMANA 28-07-2026 — 03-08-2026</a:t>
+                  <a:srgbClr val="E3A55B"/>
+                </a:solidFill>
+                <a:latin typeface="Calibri" pitchFamily="34" charset="0"/>
+                <a:ea typeface="Calibri" pitchFamily="34" charset="-122"/>
+                <a:cs typeface="Calibri" pitchFamily="34" charset="-120"/>
+              </a:rPr>
+              <a:t>SEMANA 27-07-2026 — 02-08-2026</a:t>
             </a:r>
             <a:endParaRPr lang="en-US" sz="1000" dirty="0"/>
           </a:p>
@@ -7362,13 +7362,13 @@
             <a:r>
               <a:rPr lang="en-US" sz="1150" dirty="0">
                 <a:solidFill>
-                  <a:srgbClr val="56606E"/>
-                </a:solidFill>
-                <a:latin typeface="Calibri" pitchFamily="34" charset="0"/>
-                <a:ea typeface="Calibri" pitchFamily="34" charset="-122"/>
-                <a:cs typeface="Calibri" pitchFamily="34" charset="-120"/>
-              </a:rPr>
-              <a:t>Sin hallazgos nuevos en el período.</a:t>
+                  <a:srgbClr val="FFFFFF"/>
+                </a:solidFill>
+                <a:latin typeface="Calibri" pitchFamily="34" charset="0"/>
+                <a:ea typeface="Calibri" pitchFamily="34" charset="-122"/>
+                <a:cs typeface="Calibri" pitchFamily="34" charset="-120"/>
+              </a:rPr>
+              <a:t>1 hallazgo nuevo · 0 internas · 1 del cliente · MECÁNICA 1 · 1 sigue abierto</a:t>
             </a:r>
             <a:endParaRPr lang="en-US" sz="1150" dirty="0"/>
           </a:p>
@@ -13478,7 +13478,7 @@
                 <a:ea typeface="Calibri" pitchFamily="34" charset="-122"/>
                 <a:cs typeface="Calibri" pitchFamily="34" charset="-120"/>
               </a:rPr>
-              <a:t>SEMANA 28-07-2026 — 03-08-2026</a:t>
+              <a:t>SEMANA 27-07-2026 — 02-08-2026</a:t>
             </a:r>
             <a:endParaRPr lang="en-US" sz="1000" dirty="0"/>
           </a:p>
@@ -13517,7 +13517,7 @@
                 <a:ea typeface="Calibri" pitchFamily="34" charset="-122"/>
                 <a:cs typeface="Calibri" pitchFamily="34" charset="-120"/>
               </a:rPr>
-              <a:t>1 hallazgo nuevo · 0 internas · 1 del cliente · CALIDAD 1 · 1 sigue abierto</a:t>
+              <a:t>2 hallazgos nuevos · 0 internas · 2 del cliente · OO.CC 1 · CALIDAD 1 · 2 siguen abiertos</a:t>
             </a:r>
             <a:endParaRPr lang="en-US" sz="1150" dirty="0"/>
           </a:p>
@@ -19764,7 +19764,7 @@
                 <a:ea typeface="Calibri" pitchFamily="34" charset="-122"/>
                 <a:cs typeface="Calibri" pitchFamily="34" charset="-120"/>
               </a:rPr>
-              <a:t>SEMANA 28-07-2026 — 03-08-2026</a:t>
+              <a:t>SEMANA 27-07-2026 — 02-08-2026</a:t>
             </a:r>
             <a:endParaRPr lang="en-US" sz="1000" dirty="0"/>
           </a:p>
@@ -21096,7 +21096,7 @@
                 <a:ea typeface="Calibri" pitchFamily="34" charset="-122"/>
                 <a:cs typeface="Calibri" pitchFamily="34" charset="-120"/>
               </a:rPr>
-              <a:t>La semana trajo 1 hallazgo nuevo, ninguno de autodetección.  </a:t>
+              <a:t>La semana trajo 3 hallazgos nuevos, ninguno de autodetección.  </a:t>
             </a:r>
             <a:pPr indent="0" marL="0">
               <a:lnSpc>
@@ -21113,7 +21113,7 @@
                 <a:ea typeface="Calibri" pitchFamily="34" charset="-122"/>
                 <a:cs typeface="Calibri" pitchFamily="34" charset="-120"/>
               </a:rPr>
-              <a:t>28-07-2026 al 03-08-2026: 1 del cliente en CALIDAD (1). Todos siguen abiertos; la semana anterior entraron 5.</a:t>
+              <a:t>27-07-2026 al 02-08-2026: 3 del cliente en MECÁNICA (1) y OO.CC (1) y CALIDAD (1). Todos siguen abiertos; la semana anterior entraron 3.</a:t>
             </a:r>
             <a:endParaRPr lang="en-US" sz="1250" dirty="0"/>
           </a:p>
@@ -24550,7 +24550,7 @@
                 <a:ea typeface="Calibri" pitchFamily="34" charset="-122"/>
                 <a:cs typeface="Calibri" pitchFamily="34" charset="-120"/>
               </a:rPr>
-              <a:t>Entre el 28-07-2026 y el 03-08-2026 se levantó 1 hallazgo: 0 internas · 1 del cliente. Sigue abierto.</a:t>
+              <a:t>Entre el 27-07-2026 y el 02-08-2026 se levantaron 3 hallazgos: 0 internas · 3 del cliente. Todos siguen abiertos.</a:t>
             </a:r>
             <a:endParaRPr lang="en-US" sz="1350" dirty="0"/>
           </a:p>
@@ -24705,7 +24705,7 @@
                 <a:ea typeface="Calibri" pitchFamily="34" charset="-122"/>
                 <a:cs typeface="Calibri" pitchFamily="34" charset="-120"/>
               </a:rPr>
-              <a:t>CALIDAD 1</a:t>
+              <a:t>MECÁNICA 1  ·  OO.CC 1  ·  CALIDAD 1</a:t>
             </a:r>
             <a:endParaRPr lang="en-US" sz="1100" dirty="0"/>
           </a:p>
@@ -24783,7 +24783,7 @@
                 <a:ea typeface="Calibri" pitchFamily="34" charset="-122"/>
                 <a:cs typeface="Calibri" pitchFamily="34" charset="-120"/>
               </a:rPr>
-              <a:t>Talabre 1</a:t>
+              <a:t>Talabre 2  ·  Desaladora 1</a:t>
             </a:r>
             <a:endParaRPr lang="en-US" sz="1100" dirty="0"/>
           </a:p>
@@ -24861,7 +24861,7 @@
                 <a:ea typeface="Calibri" pitchFamily="34" charset="-122"/>
                 <a:cs typeface="Calibri" pitchFamily="34" charset="-120"/>
               </a:rPr>
-              <a:t>Externa · Cliente 1</a:t>
+              <a:t>Externa · Cliente 3</a:t>
             </a:r>
             <a:endParaRPr lang="en-US" sz="1100" dirty="0"/>
           </a:p>
@@ -24939,7 +24939,7 @@
                 <a:ea typeface="Calibri" pitchFamily="34" charset="-122"/>
                 <a:cs typeface="Calibri" pitchFamily="34" charset="-120"/>
               </a:rPr>
-              <a:t>No Conformidad 1</a:t>
+              <a:t>No Conformidad 2  ·  Producto No Conforme 1</a:t>
             </a:r>
             <a:endParaRPr lang="en-US" sz="1100" dirty="0"/>
           </a:p>
@@ -25391,7 +25391,7 @@
                 <a:ea typeface="Calibri" pitchFamily="34" charset="-122"/>
                 <a:cs typeface="Calibri" pitchFamily="34" charset="-120"/>
               </a:rPr>
-              <a:t>28-07-2026</a:t>
+              <a:t>27-07-2026</a:t>
             </a:r>
             <a:endParaRPr lang="en-US" sz="1050" dirty="0"/>
           </a:p>
@@ -25430,7 +25430,7 @@
                 <a:ea typeface="Calibri" pitchFamily="34" charset="-122"/>
                 <a:cs typeface="Calibri" pitchFamily="34" charset="-120"/>
               </a:rPr>
-              <a:t>Talabre</a:t>
+              <a:t>Desaladora</a:t>
             </a:r>
             <a:endParaRPr lang="en-US" sz="1050" dirty="0"/>
           </a:p>
@@ -25469,7 +25469,7 @@
                 <a:ea typeface="Calibri" pitchFamily="34" charset="-122"/>
                 <a:cs typeface="Calibri" pitchFamily="34" charset="-120"/>
               </a:rPr>
-              <a:t>241 · RNC N°449</a:t>
+              <a:t>95 · NCR-0535</a:t>
             </a:r>
             <a:endParaRPr lang="en-US" sz="1050" dirty="0"/>
           </a:p>
@@ -25586,7 +25586,7 @@
                 <a:ea typeface="Calibri" pitchFamily="34" charset="-122"/>
                 <a:cs typeface="Calibri" pitchFamily="34" charset="-120"/>
               </a:rPr>
-              <a:t>CALIDAD</a:t>
+              <a:t>MECÁNICA</a:t>
             </a:r>
             <a:endParaRPr lang="en-US" sz="1050" dirty="0"/>
           </a:p>
@@ -25625,7 +25625,7 @@
                 <a:ea typeface="Calibri" pitchFamily="34" charset="-122"/>
                 <a:cs typeface="Calibri" pitchFamily="34" charset="-120"/>
               </a:rPr>
-              <a:t>Daniel Ramirez B.</a:t>
+              <a:t>Wilson Jara</a:t>
             </a:r>
             <a:endParaRPr lang="en-US" sz="1050" dirty="0"/>
           </a:p>
@@ -25703,7 +25703,7 @@
                 <a:ea typeface="Calibri" pitchFamily="34" charset="-122"/>
                 <a:cs typeface="Calibri" pitchFamily="34" charset="-120"/>
               </a:rPr>
-              <a:t>Registros de construcción n…</a:t>
+              <a:t>Verificación de Preservación</a:t>
             </a:r>
             <a:endParaRPr lang="en-US" sz="1000" dirty="0"/>
           </a:p>
@@ -25734,7 +25734,775 @@
       </p:sp>
       <p:sp>
         <p:nvSpPr>
-          <p:cNvPr id="38" name="Text 34"/>
+          <p:cNvPr id="38" name="Shape 34"/>
+          <p:cNvSpPr/>
+          <p:nvPr/>
+        </p:nvSpPr>
+        <p:spPr>
+          <a:xfrm>
+            <a:off x="457200" y="4709160"/>
+            <a:ext cx="11292840" cy="329184"/>
+          </a:xfrm>
+          <a:prstGeom prst="rect">
+            <a:avLst/>
+          </a:prstGeom>
+          <a:solidFill>
+            <a:srgbClr val="FFFFFF"/>
+          </a:solidFill>
+          <a:ln/>
+        </p:spPr>
+      </p:sp>
+      <p:sp>
+        <p:nvSpPr>
+          <p:cNvPr id="39" name="Text 35"/>
+          <p:cNvSpPr/>
+          <p:nvPr/>
+        </p:nvSpPr>
+        <p:spPr>
+          <a:xfrm>
+            <a:off x="502920" y="4754880"/>
+            <a:ext cx="822960" cy="237744"/>
+          </a:xfrm>
+          <a:prstGeom prst="rect">
+            <a:avLst/>
+          </a:prstGeom>
+          <a:noFill/>
+          <a:ln/>
+        </p:spPr>
+        <p:txBody>
+          <a:bodyPr wrap="square" lIns="0" tIns="0" rIns="0" bIns="0" rtlCol="0" anchor="ctr"/>
+          <a:lstStyle/>
+          <a:p>
+            <a:pPr algn="l" indent="0" marL="0">
+              <a:buNone/>
+            </a:pPr>
+            <a:r>
+              <a:rPr lang="en-US" sz="1050" dirty="0">
+                <a:solidFill>
+                  <a:srgbClr val="1A2433"/>
+                </a:solidFill>
+                <a:latin typeface="Calibri" pitchFamily="34" charset="0"/>
+                <a:ea typeface="Calibri" pitchFamily="34" charset="-122"/>
+                <a:cs typeface="Calibri" pitchFamily="34" charset="-120"/>
+              </a:rPr>
+              <a:t>27-07-2026</a:t>
+            </a:r>
+            <a:endParaRPr lang="en-US" sz="1050" dirty="0"/>
+          </a:p>
+        </p:txBody>
+      </p:sp>
+      <p:sp>
+        <p:nvSpPr>
+          <p:cNvPr id="40" name="Text 36"/>
+          <p:cNvSpPr/>
+          <p:nvPr/>
+        </p:nvSpPr>
+        <p:spPr>
+          <a:xfrm>
+            <a:off x="1371600" y="4754880"/>
+            <a:ext cx="1051560" cy="237744"/>
+          </a:xfrm>
+          <a:prstGeom prst="rect">
+            <a:avLst/>
+          </a:prstGeom>
+          <a:noFill/>
+          <a:ln/>
+        </p:spPr>
+        <p:txBody>
+          <a:bodyPr wrap="square" lIns="0" tIns="0" rIns="0" bIns="0" rtlCol="0" anchor="ctr"/>
+          <a:lstStyle/>
+          <a:p>
+            <a:pPr algn="l" indent="0" marL="0">
+              <a:buNone/>
+            </a:pPr>
+            <a:r>
+              <a:rPr lang="en-US" sz="1050" dirty="0">
+                <a:solidFill>
+                  <a:srgbClr val="1A2433"/>
+                </a:solidFill>
+                <a:latin typeface="Calibri" pitchFamily="34" charset="0"/>
+                <a:ea typeface="Calibri" pitchFamily="34" charset="-122"/>
+                <a:cs typeface="Calibri" pitchFamily="34" charset="-120"/>
+              </a:rPr>
+              <a:t>Talabre</a:t>
+            </a:r>
+            <a:endParaRPr lang="en-US" sz="1050" dirty="0"/>
+          </a:p>
+        </p:txBody>
+      </p:sp>
+      <p:sp>
+        <p:nvSpPr>
+          <p:cNvPr id="41" name="Text 37"/>
+          <p:cNvSpPr/>
+          <p:nvPr/>
+        </p:nvSpPr>
+        <p:spPr>
+          <a:xfrm>
+            <a:off x="2468880" y="4754880"/>
+            <a:ext cx="1051560" cy="237744"/>
+          </a:xfrm>
+          <a:prstGeom prst="rect">
+            <a:avLst/>
+          </a:prstGeom>
+          <a:noFill/>
+          <a:ln/>
+        </p:spPr>
+        <p:txBody>
+          <a:bodyPr wrap="square" lIns="0" tIns="0" rIns="0" bIns="0" rtlCol="0" anchor="ctr"/>
+          <a:lstStyle/>
+          <a:p>
+            <a:pPr algn="l" indent="0" marL="0">
+              <a:buNone/>
+            </a:pPr>
+            <a:r>
+              <a:rPr lang="en-US" sz="1050" dirty="0">
+                <a:solidFill>
+                  <a:srgbClr val="1A2433"/>
+                </a:solidFill>
+                <a:latin typeface="Calibri" pitchFamily="34" charset="0"/>
+                <a:ea typeface="Calibri" pitchFamily="34" charset="-122"/>
+                <a:cs typeface="Calibri" pitchFamily="34" charset="-120"/>
+              </a:rPr>
+              <a:t>240 · PNC N°182</a:t>
+            </a:r>
+            <a:endParaRPr lang="en-US" sz="1050" dirty="0"/>
+          </a:p>
+        </p:txBody>
+      </p:sp>
+      <p:sp>
+        <p:nvSpPr>
+          <p:cNvPr id="42" name="Text 38"/>
+          <p:cNvSpPr/>
+          <p:nvPr/>
+        </p:nvSpPr>
+        <p:spPr>
+          <a:xfrm>
+            <a:off x="3566160" y="4754880"/>
+            <a:ext cx="1371600" cy="237744"/>
+          </a:xfrm>
+          <a:prstGeom prst="rect">
+            <a:avLst/>
+          </a:prstGeom>
+          <a:noFill/>
+          <a:ln/>
+        </p:spPr>
+        <p:txBody>
+          <a:bodyPr wrap="square" lIns="0" tIns="0" rIns="0" bIns="0" rtlCol="0" anchor="ctr"/>
+          <a:lstStyle/>
+          <a:p>
+            <a:pPr algn="l" indent="0" marL="0">
+              <a:buNone/>
+            </a:pPr>
+            <a:r>
+              <a:rPr lang="en-US" sz="1050" dirty="0">
+                <a:solidFill>
+                  <a:srgbClr val="1A2433"/>
+                </a:solidFill>
+                <a:latin typeface="Calibri" pitchFamily="34" charset="0"/>
+                <a:ea typeface="Calibri" pitchFamily="34" charset="-122"/>
+                <a:cs typeface="Calibri" pitchFamily="34" charset="-120"/>
+              </a:rPr>
+              <a:t>Producto No Confor…</a:t>
+            </a:r>
+            <a:endParaRPr lang="en-US" sz="1050" dirty="0"/>
+          </a:p>
+        </p:txBody>
+      </p:sp>
+      <p:sp>
+        <p:nvSpPr>
+          <p:cNvPr id="43" name="Text 39"/>
+          <p:cNvSpPr/>
+          <p:nvPr/>
+        </p:nvSpPr>
+        <p:spPr>
+          <a:xfrm>
+            <a:off x="4983480" y="4754880"/>
+            <a:ext cx="1417320" cy="237744"/>
+          </a:xfrm>
+          <a:prstGeom prst="rect">
+            <a:avLst/>
+          </a:prstGeom>
+          <a:noFill/>
+          <a:ln/>
+        </p:spPr>
+        <p:txBody>
+          <a:bodyPr wrap="square" lIns="0" tIns="0" rIns="0" bIns="0" rtlCol="0" anchor="ctr"/>
+          <a:lstStyle/>
+          <a:p>
+            <a:pPr algn="l" indent="0" marL="0">
+              <a:buNone/>
+            </a:pPr>
+            <a:r>
+              <a:rPr lang="en-US" sz="1050" b="1" dirty="0">
+                <a:solidFill>
+                  <a:srgbClr val="C87A32"/>
+                </a:solidFill>
+                <a:latin typeface="Calibri" pitchFamily="34" charset="0"/>
+                <a:ea typeface="Calibri" pitchFamily="34" charset="-122"/>
+                <a:cs typeface="Calibri" pitchFamily="34" charset="-120"/>
+              </a:rPr>
+              <a:t>Externa · Cliente</a:t>
+            </a:r>
+            <a:endParaRPr lang="en-US" sz="1050" dirty="0"/>
+          </a:p>
+        </p:txBody>
+      </p:sp>
+      <p:sp>
+        <p:nvSpPr>
+          <p:cNvPr id="44" name="Text 40"/>
+          <p:cNvSpPr/>
+          <p:nvPr/>
+        </p:nvSpPr>
+        <p:spPr>
+          <a:xfrm>
+            <a:off x="6446520" y="4754880"/>
+            <a:ext cx="1097280" cy="237744"/>
+          </a:xfrm>
+          <a:prstGeom prst="rect">
+            <a:avLst/>
+          </a:prstGeom>
+          <a:noFill/>
+          <a:ln/>
+        </p:spPr>
+        <p:txBody>
+          <a:bodyPr wrap="square" lIns="0" tIns="0" rIns="0" bIns="0" rtlCol="0" anchor="ctr"/>
+          <a:lstStyle/>
+          <a:p>
+            <a:pPr algn="l" indent="0" marL="0">
+              <a:buNone/>
+            </a:pPr>
+            <a:r>
+              <a:rPr lang="en-US" sz="1050" dirty="0">
+                <a:solidFill>
+                  <a:srgbClr val="1A2433"/>
+                </a:solidFill>
+                <a:latin typeface="Calibri" pitchFamily="34" charset="0"/>
+                <a:ea typeface="Calibri" pitchFamily="34" charset="-122"/>
+                <a:cs typeface="Calibri" pitchFamily="34" charset="-120"/>
+              </a:rPr>
+              <a:t>OO.CC</a:t>
+            </a:r>
+            <a:endParaRPr lang="en-US" sz="1050" dirty="0"/>
+          </a:p>
+        </p:txBody>
+      </p:sp>
+      <p:sp>
+        <p:nvSpPr>
+          <p:cNvPr id="45" name="Text 41"/>
+          <p:cNvSpPr/>
+          <p:nvPr/>
+        </p:nvSpPr>
+        <p:spPr>
+          <a:xfrm>
+            <a:off x="7589520" y="4754880"/>
+            <a:ext cx="1371600" cy="237744"/>
+          </a:xfrm>
+          <a:prstGeom prst="rect">
+            <a:avLst/>
+          </a:prstGeom>
+          <a:noFill/>
+          <a:ln/>
+        </p:spPr>
+        <p:txBody>
+          <a:bodyPr wrap="square" lIns="0" tIns="0" rIns="0" bIns="0" rtlCol="0" anchor="ctr"/>
+          <a:lstStyle/>
+          <a:p>
+            <a:pPr algn="l" indent="0" marL="0">
+              <a:buNone/>
+            </a:pPr>
+            <a:r>
+              <a:rPr lang="en-US" sz="1050" dirty="0">
+                <a:solidFill>
+                  <a:srgbClr val="1A2433"/>
+                </a:solidFill>
+                <a:latin typeface="Calibri" pitchFamily="34" charset="0"/>
+                <a:ea typeface="Calibri" pitchFamily="34" charset="-122"/>
+                <a:cs typeface="Calibri" pitchFamily="34" charset="-120"/>
+              </a:rPr>
+              <a:t>Sebastián Ramos</a:t>
+            </a:r>
+            <a:endParaRPr lang="en-US" sz="1050" dirty="0"/>
+          </a:p>
+        </p:txBody>
+      </p:sp>
+      <p:sp>
+        <p:nvSpPr>
+          <p:cNvPr id="46" name="Text 42"/>
+          <p:cNvSpPr/>
+          <p:nvPr/>
+        </p:nvSpPr>
+        <p:spPr>
+          <a:xfrm>
+            <a:off x="9006840" y="4754880"/>
+            <a:ext cx="868680" cy="237744"/>
+          </a:xfrm>
+          <a:prstGeom prst="rect">
+            <a:avLst/>
+          </a:prstGeom>
+          <a:noFill/>
+          <a:ln/>
+        </p:spPr>
+        <p:txBody>
+          <a:bodyPr wrap="square" lIns="0" tIns="0" rIns="0" bIns="0" rtlCol="0" anchor="ctr"/>
+          <a:lstStyle/>
+          <a:p>
+            <a:pPr algn="l" indent="0" marL="0">
+              <a:buNone/>
+            </a:pPr>
+            <a:r>
+              <a:rPr lang="en-US" sz="1050" dirty="0">
+                <a:solidFill>
+                  <a:srgbClr val="C0392B"/>
+                </a:solidFill>
+                <a:latin typeface="Calibri" pitchFamily="34" charset="0"/>
+                <a:ea typeface="Calibri" pitchFamily="34" charset="-122"/>
+                <a:cs typeface="Calibri" pitchFamily="34" charset="-120"/>
+              </a:rPr>
+              <a:t>Iniciado</a:t>
+            </a:r>
+            <a:endParaRPr lang="en-US" sz="1050" dirty="0"/>
+          </a:p>
+        </p:txBody>
+      </p:sp>
+      <p:sp>
+        <p:nvSpPr>
+          <p:cNvPr id="47" name="Text 43"/>
+          <p:cNvSpPr/>
+          <p:nvPr/>
+        </p:nvSpPr>
+        <p:spPr>
+          <a:xfrm>
+            <a:off x="9921240" y="4754880"/>
+            <a:ext cx="1828800" cy="237744"/>
+          </a:xfrm>
+          <a:prstGeom prst="rect">
+            <a:avLst/>
+          </a:prstGeom>
+          <a:noFill/>
+          <a:ln/>
+        </p:spPr>
+        <p:txBody>
+          <a:bodyPr wrap="square" lIns="0" tIns="0" rIns="0" bIns="0" rtlCol="0" anchor="ctr"/>
+          <a:lstStyle/>
+          <a:p>
+            <a:pPr algn="l" indent="0" marL="0">
+              <a:buNone/>
+            </a:pPr>
+            <a:r>
+              <a:rPr lang="en-US" sz="1000" dirty="0">
+                <a:solidFill>
+                  <a:srgbClr val="1A2433"/>
+                </a:solidFill>
+                <a:latin typeface="Calibri" pitchFamily="34" charset="0"/>
+                <a:ea typeface="Calibri" pitchFamily="34" charset="-122"/>
+                <a:cs typeface="Calibri" pitchFamily="34" charset="-120"/>
+              </a:rPr>
+              <a:t>Soporte de Línea 405N, pern…</a:t>
+            </a:r>
+            <a:endParaRPr lang="en-US" sz="1000" dirty="0"/>
+          </a:p>
+        </p:txBody>
+      </p:sp>
+      <p:sp>
+        <p:nvSpPr>
+          <p:cNvPr id="48" name="Shape 44"/>
+          <p:cNvSpPr/>
+          <p:nvPr/>
+        </p:nvSpPr>
+        <p:spPr>
+          <a:xfrm>
+            <a:off x="502920" y="5029200"/>
+            <a:ext cx="11247120" cy="0"/>
+          </a:xfrm>
+          <a:prstGeom prst="line">
+            <a:avLst/>
+          </a:prstGeom>
+          <a:noFill/>
+          <a:ln w="9525">
+            <a:solidFill>
+              <a:srgbClr val="D9DFE6"/>
+            </a:solidFill>
+            <a:prstDash val="solid"/>
+          </a:ln>
+        </p:spPr>
+      </p:sp>
+      <p:sp>
+        <p:nvSpPr>
+          <p:cNvPr id="49" name="Text 45"/>
+          <p:cNvSpPr/>
+          <p:nvPr/>
+        </p:nvSpPr>
+        <p:spPr>
+          <a:xfrm>
+            <a:off x="502920" y="5084064"/>
+            <a:ext cx="822960" cy="237744"/>
+          </a:xfrm>
+          <a:prstGeom prst="rect">
+            <a:avLst/>
+          </a:prstGeom>
+          <a:noFill/>
+          <a:ln/>
+        </p:spPr>
+        <p:txBody>
+          <a:bodyPr wrap="square" lIns="0" tIns="0" rIns="0" bIns="0" rtlCol="0" anchor="ctr"/>
+          <a:lstStyle/>
+          <a:p>
+            <a:pPr algn="l" indent="0" marL="0">
+              <a:buNone/>
+            </a:pPr>
+            <a:r>
+              <a:rPr lang="en-US" sz="1050" dirty="0">
+                <a:solidFill>
+                  <a:srgbClr val="1A2433"/>
+                </a:solidFill>
+                <a:latin typeface="Calibri" pitchFamily="34" charset="0"/>
+                <a:ea typeface="Calibri" pitchFamily="34" charset="-122"/>
+                <a:cs typeface="Calibri" pitchFamily="34" charset="-120"/>
+              </a:rPr>
+              <a:t>28-07-2026</a:t>
+            </a:r>
+            <a:endParaRPr lang="en-US" sz="1050" dirty="0"/>
+          </a:p>
+        </p:txBody>
+      </p:sp>
+      <p:sp>
+        <p:nvSpPr>
+          <p:cNvPr id="50" name="Text 46"/>
+          <p:cNvSpPr/>
+          <p:nvPr/>
+        </p:nvSpPr>
+        <p:spPr>
+          <a:xfrm>
+            <a:off x="1371600" y="5084064"/>
+            <a:ext cx="1051560" cy="237744"/>
+          </a:xfrm>
+          <a:prstGeom prst="rect">
+            <a:avLst/>
+          </a:prstGeom>
+          <a:noFill/>
+          <a:ln/>
+        </p:spPr>
+        <p:txBody>
+          <a:bodyPr wrap="square" lIns="0" tIns="0" rIns="0" bIns="0" rtlCol="0" anchor="ctr"/>
+          <a:lstStyle/>
+          <a:p>
+            <a:pPr algn="l" indent="0" marL="0">
+              <a:buNone/>
+            </a:pPr>
+            <a:r>
+              <a:rPr lang="en-US" sz="1050" dirty="0">
+                <a:solidFill>
+                  <a:srgbClr val="1A2433"/>
+                </a:solidFill>
+                <a:latin typeface="Calibri" pitchFamily="34" charset="0"/>
+                <a:ea typeface="Calibri" pitchFamily="34" charset="-122"/>
+                <a:cs typeface="Calibri" pitchFamily="34" charset="-120"/>
+              </a:rPr>
+              <a:t>Talabre</a:t>
+            </a:r>
+            <a:endParaRPr lang="en-US" sz="1050" dirty="0"/>
+          </a:p>
+        </p:txBody>
+      </p:sp>
+      <p:sp>
+        <p:nvSpPr>
+          <p:cNvPr id="51" name="Text 47"/>
+          <p:cNvSpPr/>
+          <p:nvPr/>
+        </p:nvSpPr>
+        <p:spPr>
+          <a:xfrm>
+            <a:off x="2468880" y="5084064"/>
+            <a:ext cx="1051560" cy="237744"/>
+          </a:xfrm>
+          <a:prstGeom prst="rect">
+            <a:avLst/>
+          </a:prstGeom>
+          <a:noFill/>
+          <a:ln/>
+        </p:spPr>
+        <p:txBody>
+          <a:bodyPr wrap="square" lIns="0" tIns="0" rIns="0" bIns="0" rtlCol="0" anchor="ctr"/>
+          <a:lstStyle/>
+          <a:p>
+            <a:pPr algn="l" indent="0" marL="0">
+              <a:buNone/>
+            </a:pPr>
+            <a:r>
+              <a:rPr lang="en-US" sz="1050" dirty="0">
+                <a:solidFill>
+                  <a:srgbClr val="1A2433"/>
+                </a:solidFill>
+                <a:latin typeface="Calibri" pitchFamily="34" charset="0"/>
+                <a:ea typeface="Calibri" pitchFamily="34" charset="-122"/>
+                <a:cs typeface="Calibri" pitchFamily="34" charset="-120"/>
+              </a:rPr>
+              <a:t>241 · RNC N°449</a:t>
+            </a:r>
+            <a:endParaRPr lang="en-US" sz="1050" dirty="0"/>
+          </a:p>
+        </p:txBody>
+      </p:sp>
+      <p:sp>
+        <p:nvSpPr>
+          <p:cNvPr id="52" name="Text 48"/>
+          <p:cNvSpPr/>
+          <p:nvPr/>
+        </p:nvSpPr>
+        <p:spPr>
+          <a:xfrm>
+            <a:off x="3566160" y="5084064"/>
+            <a:ext cx="1371600" cy="237744"/>
+          </a:xfrm>
+          <a:prstGeom prst="rect">
+            <a:avLst/>
+          </a:prstGeom>
+          <a:noFill/>
+          <a:ln/>
+        </p:spPr>
+        <p:txBody>
+          <a:bodyPr wrap="square" lIns="0" tIns="0" rIns="0" bIns="0" rtlCol="0" anchor="ctr"/>
+          <a:lstStyle/>
+          <a:p>
+            <a:pPr algn="l" indent="0" marL="0">
+              <a:buNone/>
+            </a:pPr>
+            <a:r>
+              <a:rPr lang="en-US" sz="1050" dirty="0">
+                <a:solidFill>
+                  <a:srgbClr val="1A2433"/>
+                </a:solidFill>
+                <a:latin typeface="Calibri" pitchFamily="34" charset="0"/>
+                <a:ea typeface="Calibri" pitchFamily="34" charset="-122"/>
+                <a:cs typeface="Calibri" pitchFamily="34" charset="-120"/>
+              </a:rPr>
+              <a:t>No Conformidad</a:t>
+            </a:r>
+            <a:endParaRPr lang="en-US" sz="1050" dirty="0"/>
+          </a:p>
+        </p:txBody>
+      </p:sp>
+      <p:sp>
+        <p:nvSpPr>
+          <p:cNvPr id="53" name="Text 49"/>
+          <p:cNvSpPr/>
+          <p:nvPr/>
+        </p:nvSpPr>
+        <p:spPr>
+          <a:xfrm>
+            <a:off x="4983480" y="5084064"/>
+            <a:ext cx="1417320" cy="237744"/>
+          </a:xfrm>
+          <a:prstGeom prst="rect">
+            <a:avLst/>
+          </a:prstGeom>
+          <a:noFill/>
+          <a:ln/>
+        </p:spPr>
+        <p:txBody>
+          <a:bodyPr wrap="square" lIns="0" tIns="0" rIns="0" bIns="0" rtlCol="0" anchor="ctr"/>
+          <a:lstStyle/>
+          <a:p>
+            <a:pPr algn="l" indent="0" marL="0">
+              <a:buNone/>
+            </a:pPr>
+            <a:r>
+              <a:rPr lang="en-US" sz="1050" b="1" dirty="0">
+                <a:solidFill>
+                  <a:srgbClr val="C87A32"/>
+                </a:solidFill>
+                <a:latin typeface="Calibri" pitchFamily="34" charset="0"/>
+                <a:ea typeface="Calibri" pitchFamily="34" charset="-122"/>
+                <a:cs typeface="Calibri" pitchFamily="34" charset="-120"/>
+              </a:rPr>
+              <a:t>Externa · Cliente</a:t>
+            </a:r>
+            <a:endParaRPr lang="en-US" sz="1050" dirty="0"/>
+          </a:p>
+        </p:txBody>
+      </p:sp>
+      <p:sp>
+        <p:nvSpPr>
+          <p:cNvPr id="54" name="Text 50"/>
+          <p:cNvSpPr/>
+          <p:nvPr/>
+        </p:nvSpPr>
+        <p:spPr>
+          <a:xfrm>
+            <a:off x="6446520" y="5084064"/>
+            <a:ext cx="1097280" cy="237744"/>
+          </a:xfrm>
+          <a:prstGeom prst="rect">
+            <a:avLst/>
+          </a:prstGeom>
+          <a:noFill/>
+          <a:ln/>
+        </p:spPr>
+        <p:txBody>
+          <a:bodyPr wrap="square" lIns="0" tIns="0" rIns="0" bIns="0" rtlCol="0" anchor="ctr"/>
+          <a:lstStyle/>
+          <a:p>
+            <a:pPr algn="l" indent="0" marL="0">
+              <a:buNone/>
+            </a:pPr>
+            <a:r>
+              <a:rPr lang="en-US" sz="1050" dirty="0">
+                <a:solidFill>
+                  <a:srgbClr val="1A2433"/>
+                </a:solidFill>
+                <a:latin typeface="Calibri" pitchFamily="34" charset="0"/>
+                <a:ea typeface="Calibri" pitchFamily="34" charset="-122"/>
+                <a:cs typeface="Calibri" pitchFamily="34" charset="-120"/>
+              </a:rPr>
+              <a:t>CALIDAD</a:t>
+            </a:r>
+            <a:endParaRPr lang="en-US" sz="1050" dirty="0"/>
+          </a:p>
+        </p:txBody>
+      </p:sp>
+      <p:sp>
+        <p:nvSpPr>
+          <p:cNvPr id="55" name="Text 51"/>
+          <p:cNvSpPr/>
+          <p:nvPr/>
+        </p:nvSpPr>
+        <p:spPr>
+          <a:xfrm>
+            <a:off x="7589520" y="5084064"/>
+            <a:ext cx="1371600" cy="237744"/>
+          </a:xfrm>
+          <a:prstGeom prst="rect">
+            <a:avLst/>
+          </a:prstGeom>
+          <a:noFill/>
+          <a:ln/>
+        </p:spPr>
+        <p:txBody>
+          <a:bodyPr wrap="square" lIns="0" tIns="0" rIns="0" bIns="0" rtlCol="0" anchor="ctr"/>
+          <a:lstStyle/>
+          <a:p>
+            <a:pPr algn="l" indent="0" marL="0">
+              <a:buNone/>
+            </a:pPr>
+            <a:r>
+              <a:rPr lang="en-US" sz="1050" dirty="0">
+                <a:solidFill>
+                  <a:srgbClr val="1A2433"/>
+                </a:solidFill>
+                <a:latin typeface="Calibri" pitchFamily="34" charset="0"/>
+                <a:ea typeface="Calibri" pitchFamily="34" charset="-122"/>
+                <a:cs typeface="Calibri" pitchFamily="34" charset="-120"/>
+              </a:rPr>
+              <a:t>Daniel Ramirez B.</a:t>
+            </a:r>
+            <a:endParaRPr lang="en-US" sz="1050" dirty="0"/>
+          </a:p>
+        </p:txBody>
+      </p:sp>
+      <p:sp>
+        <p:nvSpPr>
+          <p:cNvPr id="56" name="Text 52"/>
+          <p:cNvSpPr/>
+          <p:nvPr/>
+        </p:nvSpPr>
+        <p:spPr>
+          <a:xfrm>
+            <a:off x="9006840" y="5084064"/>
+            <a:ext cx="868680" cy="237744"/>
+          </a:xfrm>
+          <a:prstGeom prst="rect">
+            <a:avLst/>
+          </a:prstGeom>
+          <a:noFill/>
+          <a:ln/>
+        </p:spPr>
+        <p:txBody>
+          <a:bodyPr wrap="square" lIns="0" tIns="0" rIns="0" bIns="0" rtlCol="0" anchor="ctr"/>
+          <a:lstStyle/>
+          <a:p>
+            <a:pPr algn="l" indent="0" marL="0">
+              <a:buNone/>
+            </a:pPr>
+            <a:r>
+              <a:rPr lang="en-US" sz="1050" dirty="0">
+                <a:solidFill>
+                  <a:srgbClr val="C0392B"/>
+                </a:solidFill>
+                <a:latin typeface="Calibri" pitchFamily="34" charset="0"/>
+                <a:ea typeface="Calibri" pitchFamily="34" charset="-122"/>
+                <a:cs typeface="Calibri" pitchFamily="34" charset="-120"/>
+              </a:rPr>
+              <a:t>Iniciado</a:t>
+            </a:r>
+            <a:endParaRPr lang="en-US" sz="1050" dirty="0"/>
+          </a:p>
+        </p:txBody>
+      </p:sp>
+      <p:sp>
+        <p:nvSpPr>
+          <p:cNvPr id="57" name="Text 53"/>
+          <p:cNvSpPr/>
+          <p:nvPr/>
+        </p:nvSpPr>
+        <p:spPr>
+          <a:xfrm>
+            <a:off x="9921240" y="5084064"/>
+            <a:ext cx="1828800" cy="237744"/>
+          </a:xfrm>
+          <a:prstGeom prst="rect">
+            <a:avLst/>
+          </a:prstGeom>
+          <a:noFill/>
+          <a:ln/>
+        </p:spPr>
+        <p:txBody>
+          <a:bodyPr wrap="square" lIns="0" tIns="0" rIns="0" bIns="0" rtlCol="0" anchor="ctr"/>
+          <a:lstStyle/>
+          <a:p>
+            <a:pPr algn="l" indent="0" marL="0">
+              <a:buNone/>
+            </a:pPr>
+            <a:r>
+              <a:rPr lang="en-US" sz="1000" dirty="0">
+                <a:solidFill>
+                  <a:srgbClr val="1A2433"/>
+                </a:solidFill>
+                <a:latin typeface="Calibri" pitchFamily="34" charset="0"/>
+                <a:ea typeface="Calibri" pitchFamily="34" charset="-122"/>
+                <a:cs typeface="Calibri" pitchFamily="34" charset="-120"/>
+              </a:rPr>
+              <a:t>Registros de construcción n…</a:t>
+            </a:r>
+            <a:endParaRPr lang="en-US" sz="1000" dirty="0"/>
+          </a:p>
+        </p:txBody>
+      </p:sp>
+      <p:sp>
+        <p:nvSpPr>
+          <p:cNvPr id="58" name="Shape 54"/>
+          <p:cNvSpPr/>
+          <p:nvPr/>
+        </p:nvSpPr>
+        <p:spPr>
+          <a:xfrm>
+            <a:off x="502920" y="5358384"/>
+            <a:ext cx="11247120" cy="0"/>
+          </a:xfrm>
+          <a:prstGeom prst="line">
+            <a:avLst/>
+          </a:prstGeom>
+          <a:noFill/>
+          <a:ln w="9525">
+            <a:solidFill>
+              <a:srgbClr val="D9DFE6"/>
+            </a:solidFill>
+            <a:prstDash val="solid"/>
+          </a:ln>
+        </p:spPr>
+      </p:sp>
+      <p:sp>
+        <p:nvSpPr>
+          <p:cNvPr id="59" name="Text 55"/>
           <p:cNvSpPr/>
           <p:nvPr/>
         </p:nvSpPr>
@@ -25773,7 +26541,7 @@
       </p:sp>
       <p:sp>
         <p:nvSpPr>
-          <p:cNvPr id="39" name="Text 35"/>
+          <p:cNvPr id="60" name="Text 56"/>
           <p:cNvSpPr/>
           <p:nvPr/>
         </p:nvSpPr>
@@ -25812,7 +26580,7 @@
       </p:sp>
       <p:sp>
         <p:nvSpPr>
-          <p:cNvPr id="40" name="Text 36"/>
+          <p:cNvPr id="61" name="Text 57"/>
           <p:cNvSpPr/>
           <p:nvPr/>
         </p:nvSpPr>

--- a/modulo_nc/Panel_No_Conformidades.pptx
+++ b/modulo_nc/Panel_No_Conformidades.pptx
@@ -736,7 +736,7 @@
                   <c:v>188</c:v>
                 </c:pt>
                 <c:pt idx="2">
-                  <c:v>71</c:v>
+                  <c:v>70</c:v>
                 </c:pt>
                 <c:pt idx="3">
                   <c:v/>
@@ -1198,7 +1198,7 @@
                 <c:formatCode>General</c:formatCode>
                 <c:ptCount val="4"/>
                 <c:pt idx="0">
-                  <c:v>279</c:v>
+                  <c:v>278</c:v>
                 </c:pt>
                 <c:pt idx="1">
                   <c:v>116</c:v>
@@ -2985,7 +2985,7 @@
                     <c:v>ESTRUCTURA</c:v>
                   </c:pt>
                   <c:pt idx="7">
-                    <c:v>MECÁNICA</c:v>
+                    <c:v>LOGÍSTICA</c:v>
                   </c:pt>
                 </c:lvl>
               </c:multiLvlStrCache>
@@ -3099,7 +3099,7 @@
                     <c:v>ESTRUCTURA</c:v>
                   </c:pt>
                   <c:pt idx="7">
-                    <c:v>MECÁNICA</c:v>
+                    <c:v>LOGÍSTICA</c:v>
                   </c:pt>
                 </c:lvl>
               </c:multiLvlStrCache>
@@ -5621,7 +5621,7 @@
                 <a:ea typeface="Calibri" pitchFamily="34" charset="-122"/>
                 <a:cs typeface="Calibri" pitchFamily="34" charset="-120"/>
               </a:rPr>
-              <a:t>494 hallazgos levantados entre 10-02-2023 y 28-07-2026 (Desaladora 82 · Talabre 240 · Arqueros 164 · Oficina Central 8).</a:t>
+              <a:t>493 hallazgos levantados entre 10-02-2023 y 28-07-2026 (Desaladora 82 · Talabre 240 · Arqueros 163 · Oficina Central 8).</a:t>
             </a:r>
             <a:endParaRPr lang="en-US" sz="1350" dirty="0"/>
           </a:p>
@@ -5680,7 +5680,7 @@
                 <a:ea typeface="Cambria" pitchFamily="34" charset="-122"/>
                 <a:cs typeface="Cambria" pitchFamily="34" charset="-120"/>
               </a:rPr>
-              <a:t>89,3%</a:t>
+              <a:t>89,2%</a:t>
             </a:r>
             <a:endParaRPr lang="en-US" sz="3400" dirty="0"/>
           </a:p>
@@ -6031,7 +6031,7 @@
                 <a:ea typeface="Calibri" pitchFamily="34" charset="-122"/>
                 <a:cs typeface="Calibri" pitchFamily="34" charset="-120"/>
               </a:rPr>
-              <a:t>Fuente: 1e73482e-Data_NCR03082026.xlsx — hoja «Observaciones» · Corte 03-08-2026 · 494 registros desde 10-02-2023</a:t>
+              <a:t>Fuente: b73c9c4f-Data_NCR_2.xlsx — hoja «Observaciones» · Corte 03-08-2026 · 493 registros desde 10-02-2023</a:t>
             </a:r>
             <a:endParaRPr lang="en-US" sz="850" dirty="0"/>
           </a:p>
@@ -7407,7 +7407,7 @@
                 <a:ea typeface="Calibri" pitchFamily="34" charset="-122"/>
                 <a:cs typeface="Calibri" pitchFamily="34" charset="-120"/>
               </a:rPr>
-              <a:t>Fuente: 1e73482e-Data_NCR03082026.xlsx — hoja «Observaciones» · Corte 03-08-2026 · 494 registros desde 10-02-2023</a:t>
+              <a:t>Fuente: b73c9c4f-Data_NCR_2.xlsx — hoja «Observaciones» · Corte 03-08-2026 · 493 registros desde 10-02-2023</a:t>
             </a:r>
             <a:endParaRPr lang="en-US" sz="850" dirty="0"/>
           </a:p>
@@ -8170,7 +8170,7 @@
                 <a:ea typeface="Calibri" pitchFamily="34" charset="-122"/>
                 <a:cs typeface="Calibri" pitchFamily="34" charset="-120"/>
               </a:rPr>
-              <a:t>Fuente: 1e73482e-Data_NCR03082026.xlsx — hoja «Observaciones» · Corte 03-08-2026 · 494 registros desde 10-02-2023</a:t>
+              <a:t>Fuente: b73c9c4f-Data_NCR_2.xlsx — hoja «Observaciones» · Corte 03-08-2026 · 493 registros desde 10-02-2023</a:t>
             </a:r>
             <a:endParaRPr lang="en-US" sz="850" dirty="0"/>
           </a:p>
@@ -8763,7 +8763,7 @@
                 <a:ea typeface="Calibri" pitchFamily="34" charset="-122"/>
                 <a:cs typeface="Calibri" pitchFamily="34" charset="-120"/>
               </a:rPr>
-              <a:t>Global del módulo: 89,3%</a:t>
+              <a:t>Global del módulo: 89,2%</a:t>
             </a:r>
             <a:endParaRPr lang="en-US" sz="950" dirty="0"/>
           </a:p>
@@ -9361,7 +9361,7 @@
                 <a:ea typeface="Calibri" pitchFamily="34" charset="-122"/>
                 <a:cs typeface="Calibri" pitchFamily="34" charset="-120"/>
               </a:rPr>
-              <a:t>global del módulo 32,8%</a:t>
+              <a:t>global del módulo 32,9%</a:t>
             </a:r>
             <a:endParaRPr lang="en-US" sz="1000" dirty="0"/>
           </a:p>
@@ -9697,7 +9697,7 @@
                 <a:ea typeface="Calibri" pitchFamily="34" charset="-122"/>
                 <a:cs typeface="Calibri" pitchFamily="34" charset="-120"/>
               </a:rPr>
-              <a:t>Fuente: 1e73482e-Data_NCR03082026.xlsx — hoja «Observaciones» · Corte 03-08-2026 · 494 registros desde 10-02-2023</a:t>
+              <a:t>Fuente: b73c9c4f-Data_NCR_2.xlsx — hoja «Observaciones» · Corte 03-08-2026 · 493 registros desde 10-02-2023</a:t>
             </a:r>
             <a:endParaRPr lang="en-US" sz="850" dirty="0"/>
           </a:p>
@@ -13556,7 +13556,7 @@
                 <a:ea typeface="Calibri" pitchFamily="34" charset="-122"/>
                 <a:cs typeface="Calibri" pitchFamily="34" charset="-120"/>
               </a:rPr>
-              <a:t>Fuente: 1e73482e-Data_NCR03082026.xlsx — hoja «Observaciones» · Corte 03-08-2026 · 494 registros desde 10-02-2023</a:t>
+              <a:t>Fuente: b73c9c4f-Data_NCR_2.xlsx — hoja «Observaciones» · Corte 03-08-2026 · 493 registros desde 10-02-2023</a:t>
             </a:r>
             <a:endParaRPr lang="en-US" sz="850" dirty="0"/>
           </a:p>
@@ -13909,7 +13909,7 @@
                 <a:ea typeface="Calibri" pitchFamily="34" charset="-122"/>
                 <a:cs typeface="Calibri" pitchFamily="34" charset="-120"/>
               </a:rPr>
-              <a:t>164 hallazgos levantados · 53 internas · 71 del cliente · 40 de subcontrato · 18 especialidades involucradas.</a:t>
+              <a:t>163 hallazgos levantados · 53 internas · 70 del cliente · 40 de subcontrato · 18 especialidades involucradas.</a:t>
             </a:r>
             <a:endParaRPr lang="en-US" sz="1350" dirty="0"/>
           </a:p>
@@ -13968,7 +13968,7 @@
                 <a:ea typeface="Cambria" pitchFamily="34" charset="-122"/>
                 <a:cs typeface="Cambria" pitchFamily="34" charset="-120"/>
               </a:rPr>
-              <a:t>78%</a:t>
+              <a:t>77,9%</a:t>
             </a:r>
             <a:endParaRPr lang="en-US" sz="3400" dirty="0"/>
           </a:p>
@@ -14124,7 +14124,7 @@
                 <a:ea typeface="Cambria" pitchFamily="34" charset="-122"/>
                 <a:cs typeface="Cambria" pitchFamily="34" charset="-120"/>
               </a:rPr>
-              <a:t>131 d</a:t>
+              <a:t>129 d</a:t>
             </a:r>
             <a:endParaRPr lang="en-US" sz="3400" dirty="0"/>
           </a:p>
@@ -14202,7 +14202,7 @@
                 <a:ea typeface="Cambria" pitchFamily="34" charset="-122"/>
                 <a:cs typeface="Cambria" pitchFamily="34" charset="-120"/>
               </a:rPr>
-              <a:t>32,3%</a:t>
+              <a:t>32,5%</a:t>
             </a:r>
             <a:endParaRPr lang="en-US" sz="3400" dirty="0"/>
           </a:p>
@@ -14319,7 +14319,7 @@
                 <a:ea typeface="Calibri" pitchFamily="34" charset="-122"/>
                 <a:cs typeface="Calibri" pitchFamily="34" charset="-120"/>
               </a:rPr>
-              <a:t>Fuente: 1e73482e-Data_NCR03082026.xlsx — hoja «Observaciones» · Corte 03-08-2026 · 494 registros desde 10-02-2023</a:t>
+              <a:t>Fuente: b73c9c4f-Data_NCR_2.xlsx — hoja «Observaciones» · Corte 03-08-2026 · 493 registros desde 10-02-2023</a:t>
             </a:r>
             <a:endParaRPr lang="en-US" sz="850" dirty="0"/>
           </a:p>
@@ -14585,7 +14585,7 @@
                 <a:ea typeface="Cambria" pitchFamily="34" charset="-122"/>
                 <a:cs typeface="Cambria" pitchFamily="34" charset="-120"/>
               </a:rPr>
-              <a:t>164</a:t>
+              <a:t>163</a:t>
             </a:r>
             <a:endParaRPr lang="en-US" sz="4000" dirty="0"/>
           </a:p>
@@ -14624,7 +14624,7 @@
                 <a:ea typeface="Calibri" pitchFamily="34" charset="-122"/>
                 <a:cs typeface="Calibri" pitchFamily="34" charset="-120"/>
               </a:rPr>
-              <a:t>128 cerrados</a:t>
+              <a:t>127 cerrados</a:t>
             </a:r>
             <a:endParaRPr lang="en-US" sz="1400" dirty="0"/>
           </a:p>
@@ -14702,7 +14702,7 @@
                 <a:ea typeface="Calibri" pitchFamily="34" charset="-122"/>
                 <a:cs typeface="Calibri" pitchFamily="34" charset="-120"/>
               </a:rPr>
-              <a:t>53 internas · 71 del cliente · 40 de subcontrato</a:t>
+              <a:t>53 internas · 70 del cliente · 40 de subcontrato</a:t>
             </a:r>
             <a:endParaRPr lang="en-US" sz="950" dirty="0"/>
           </a:p>
@@ -14795,7 +14795,7 @@
                 <a:ea typeface="Cambria" pitchFamily="34" charset="-122"/>
                 <a:cs typeface="Cambria" pitchFamily="34" charset="-120"/>
               </a:rPr>
-              <a:t>78%</a:t>
+              <a:t>77,9%</a:t>
             </a:r>
             <a:endParaRPr lang="en-US" sz="4000" dirty="0"/>
           </a:p>
@@ -14834,7 +14834,7 @@
                 <a:ea typeface="Calibri" pitchFamily="34" charset="-122"/>
                 <a:cs typeface="Calibri" pitchFamily="34" charset="-120"/>
               </a:rPr>
-              <a:t>128/164</a:t>
+              <a:t>127/163</a:t>
             </a:r>
             <a:endParaRPr lang="en-US" sz="1400" dirty="0"/>
           </a:p>
@@ -14912,7 +14912,7 @@
                 <a:ea typeface="Calibri" pitchFamily="34" charset="-122"/>
                 <a:cs typeface="Calibri" pitchFamily="34" charset="-120"/>
               </a:rPr>
-              <a:t>Global del módulo: 89,3%</a:t>
+              <a:t>Global del módulo: 89,2%</a:t>
             </a:r>
             <a:endParaRPr lang="en-US" sz="950" dirty="0"/>
           </a:p>
@@ -15215,7 +15215,7 @@
                 <a:ea typeface="Cambria" pitchFamily="34" charset="-122"/>
                 <a:cs typeface="Cambria" pitchFamily="34" charset="-120"/>
               </a:rPr>
-              <a:t>131</a:t>
+              <a:t>129</a:t>
             </a:r>
             <a:endParaRPr lang="en-US" sz="4000" dirty="0"/>
           </a:p>
@@ -15448,7 +15448,7 @@
                 <a:ea typeface="Cambria" pitchFamily="34" charset="-122"/>
                 <a:cs typeface="Cambria" pitchFamily="34" charset="-120"/>
               </a:rPr>
-              <a:t>32,3%</a:t>
+              <a:t>32,5%</a:t>
             </a:r>
             <a:endParaRPr lang="en-US" sz="2600" dirty="0"/>
           </a:p>
@@ -15510,7 +15510,7 @@
                 <a:ea typeface="Calibri" pitchFamily="34" charset="-122"/>
                 <a:cs typeface="Calibri" pitchFamily="34" charset="-120"/>
               </a:rPr>
-              <a:t>global del módulo 32,8%</a:t>
+              <a:t>global del módulo 32,9%</a:t>
             </a:r>
             <a:endParaRPr lang="en-US" sz="1000" dirty="0"/>
           </a:p>
@@ -15807,7 +15807,7 @@
                 <a:ea typeface="Cambria" pitchFamily="34" charset="-122"/>
                 <a:cs typeface="Cambria" pitchFamily="34" charset="-120"/>
               </a:rPr>
-              <a:t>71</a:t>
+              <a:t>70</a:t>
             </a:r>
             <a:endParaRPr lang="en-US" sz="1600" dirty="0"/>
           </a:p>
@@ -15983,7 +15983,7 @@
                 <a:ea typeface="Calibri" pitchFamily="34" charset="-122"/>
                 <a:cs typeface="Calibri" pitchFamily="34" charset="-120"/>
               </a:rPr>
-              <a:t>Fuente: 1e73482e-Data_NCR03082026.xlsx — hoja «Observaciones» · Corte 03-08-2026 · 494 registros desde 10-02-2023</a:t>
+              <a:t>Fuente: b73c9c4f-Data_NCR_2.xlsx — hoja «Observaciones» · Corte 03-08-2026 · 493 registros desde 10-02-2023</a:t>
             </a:r>
             <a:endParaRPr lang="en-US" sz="850" dirty="0"/>
           </a:p>
@@ -19842,7 +19842,7 @@
                 <a:ea typeface="Calibri" pitchFamily="34" charset="-122"/>
                 <a:cs typeface="Calibri" pitchFamily="34" charset="-120"/>
               </a:rPr>
-              <a:t>Fuente: 1e73482e-Data_NCR03082026.xlsx — hoja «Observaciones» · Corte 03-08-2026 · 494 registros desde 10-02-2023</a:t>
+              <a:t>Fuente: b73c9c4f-Data_NCR_2.xlsx — hoja «Observaciones» · Corte 03-08-2026 · 493 registros desde 10-02-2023</a:t>
             </a:r>
             <a:endParaRPr lang="en-US" sz="850" dirty="0"/>
           </a:p>
@@ -20147,7 +20147,7 @@
                 <a:ea typeface="Cambria" pitchFamily="34" charset="-122"/>
                 <a:cs typeface="Cambria" pitchFamily="34" charset="-120"/>
               </a:rPr>
-              <a:t>89,3%</a:t>
+              <a:t>89,2%</a:t>
             </a:r>
             <a:endParaRPr lang="en-US" sz="4000" dirty="0"/>
           </a:p>
@@ -20186,7 +20186,7 @@
                 <a:ea typeface="Calibri" pitchFamily="34" charset="-122"/>
                 <a:cs typeface="Calibri" pitchFamily="34" charset="-120"/>
               </a:rPr>
-              <a:t>441/494</a:t>
+              <a:t>440/493</a:t>
             </a:r>
             <a:endParaRPr lang="en-US" sz="1400" dirty="0"/>
           </a:p>
@@ -20396,7 +20396,7 @@
                 <a:ea typeface="Calibri" pitchFamily="34" charset="-122"/>
                 <a:cs typeface="Calibri" pitchFamily="34" charset="-120"/>
               </a:rPr>
-              <a:t>de 494 levantados</a:t>
+              <a:t>de 493 levantados</a:t>
             </a:r>
             <a:endParaRPr lang="en-US" sz="1400" dirty="0"/>
           </a:p>
@@ -20567,7 +20567,7 @@
                 <a:ea typeface="Cambria" pitchFamily="34" charset="-122"/>
                 <a:cs typeface="Cambria" pitchFamily="34" charset="-120"/>
               </a:rPr>
-              <a:t>32,8%</a:t>
+              <a:t>32,9%</a:t>
             </a:r>
             <a:endParaRPr lang="en-US" sz="4000" dirty="0"/>
           </a:p>
@@ -20606,7 +20606,7 @@
                 <a:ea typeface="Calibri" pitchFamily="34" charset="-122"/>
                 <a:cs typeface="Calibri" pitchFamily="34" charset="-120"/>
               </a:rPr>
-              <a:t>159/485 clasificados</a:t>
+              <a:t>159/484 clasificados</a:t>
             </a:r>
             <a:endParaRPr lang="en-US" sz="1400" dirty="0"/>
           </a:p>
@@ -20816,7 +20816,7 @@
                 <a:ea typeface="Calibri" pitchFamily="34" charset="-122"/>
                 <a:cs typeface="Calibri" pitchFamily="34" charset="-120"/>
               </a:rPr>
-              <a:t>249 de 494 con costo</a:t>
+              <a:t>249 de 493 con costo</a:t>
             </a:r>
             <a:endParaRPr lang="en-US" sz="1400" dirty="0"/>
           </a:p>
@@ -20894,7 +20894,7 @@
                 <a:ea typeface="Calibri" pitchFamily="34" charset="-122"/>
                 <a:cs typeface="Calibri" pitchFamily="34" charset="-120"/>
               </a:rPr>
-              <a:t>245 hallazgos no declaran costo: la cifra es un piso</a:t>
+              <a:t>244 hallazgos no declaran costo: la cifra es un piso</a:t>
             </a:r>
             <a:endParaRPr lang="en-US" sz="950" dirty="0"/>
           </a:p>
@@ -21034,7 +21034,7 @@
                 <a:ea typeface="Calibri" pitchFamily="34" charset="-122"/>
                 <a:cs typeface="Calibri" pitchFamily="34" charset="-120"/>
               </a:rPr>
-              <a:t>36 de los 53 hallazgos abiertos (67,9%), y es uno de los frentes donde el cliente levanta más de lo que detecta Besalco (71 del cliente contra 53 internas).</a:t>
+              <a:t>36 de los 53 hallazgos abiertos (67,9%), y es uno de los frentes donde el cliente levanta más de lo que detecta Besalco (70 del cliente contra 53 internas).</a:t>
             </a:r>
             <a:endParaRPr lang="en-US" sz="1250" dirty="0"/>
           </a:p>
@@ -21231,7 +21231,7 @@
                 <a:ea typeface="Calibri" pitchFamily="34" charset="-122"/>
                 <a:cs typeface="Calibri" pitchFamily="34" charset="-120"/>
               </a:rPr>
-              <a:t>Fuente: 1e73482e-Data_NCR03082026.xlsx — hoja «Observaciones» · Corte 03-08-2026 · 494 registros desde 10-02-2023</a:t>
+              <a:t>Fuente: b73c9c4f-Data_NCR_2.xlsx — hoja «Observaciones» · Corte 03-08-2026 · 493 registros desde 10-02-2023</a:t>
             </a:r>
             <a:endParaRPr lang="en-US" sz="850" dirty="0"/>
           </a:p>
@@ -22980,7 +22980,7 @@
                 <a:ea typeface="Calibri" pitchFamily="34" charset="-122"/>
                 <a:cs typeface="Calibri" pitchFamily="34" charset="-120"/>
               </a:rPr>
-              <a:t>164</a:t>
+              <a:t>163</a:t>
             </a:r>
             <a:endParaRPr lang="en-US" sz="1300" dirty="0"/>
           </a:p>
@@ -23019,7 +23019,7 @@
                 <a:ea typeface="Calibri" pitchFamily="34" charset="-122"/>
                 <a:cs typeface="Calibri" pitchFamily="34" charset="-120"/>
               </a:rPr>
-              <a:t>128</a:t>
+              <a:t>127</a:t>
             </a:r>
             <a:endParaRPr lang="en-US" sz="1300" dirty="0"/>
           </a:p>
@@ -23097,7 +23097,7 @@
                 <a:ea typeface="Calibri" pitchFamily="34" charset="-122"/>
                 <a:cs typeface="Calibri" pitchFamily="34" charset="-120"/>
               </a:rPr>
-              <a:t>78%</a:t>
+              <a:t>77,9%</a:t>
             </a:r>
             <a:endParaRPr lang="en-US" sz="1300" dirty="0"/>
           </a:p>
@@ -23175,7 +23175,7 @@
                 <a:ea typeface="Calibri" pitchFamily="34" charset="-122"/>
                 <a:cs typeface="Calibri" pitchFamily="34" charset="-120"/>
               </a:rPr>
-              <a:t>71</a:t>
+              <a:t>70</a:t>
             </a:r>
             <a:endParaRPr lang="en-US" sz="1300" dirty="0"/>
           </a:p>
@@ -23948,7 +23948,7 @@
                 <a:ea typeface="Calibri" pitchFamily="34" charset="-122"/>
                 <a:cs typeface="Calibri" pitchFamily="34" charset="-120"/>
               </a:rPr>
-              <a:t>486</a:t>
+              <a:t>485</a:t>
             </a:r>
             <a:endParaRPr lang="en-US" sz="1300" dirty="0"/>
           </a:p>
@@ -23987,7 +23987,7 @@
                 <a:ea typeface="Calibri" pitchFamily="34" charset="-122"/>
                 <a:cs typeface="Calibri" pitchFamily="34" charset="-120"/>
               </a:rPr>
-              <a:t>433</a:t>
+              <a:t>432</a:t>
             </a:r>
             <a:endParaRPr lang="en-US" sz="1300" dirty="0"/>
           </a:p>
@@ -24143,7 +24143,7 @@
                 <a:ea typeface="Calibri" pitchFamily="34" charset="-122"/>
                 <a:cs typeface="Calibri" pitchFamily="34" charset="-120"/>
               </a:rPr>
-              <a:t>278</a:t>
+              <a:t>277</a:t>
             </a:r>
             <a:endParaRPr lang="en-US" sz="1300" dirty="0"/>
           </a:p>
@@ -24299,7 +24299,7 @@
                 <a:ea typeface="Calibri" pitchFamily="34" charset="-122"/>
                 <a:cs typeface="Calibri" pitchFamily="34" charset="-120"/>
               </a:rPr>
-              <a:t>Fuente: 1e73482e-Data_NCR03082026.xlsx — hoja «Observaciones» · Corte 03-08-2026 · 494 registros desde 10-02-2023</a:t>
+              <a:t>Fuente: b73c9c4f-Data_NCR_2.xlsx — hoja «Observaciones» · Corte 03-08-2026 · 493 registros desde 10-02-2023</a:t>
             </a:r>
             <a:endParaRPr lang="en-US" sz="850" dirty="0"/>
           </a:p>
@@ -26533,7 +26533,7 @@
                 <a:ea typeface="Calibri" pitchFamily="34" charset="-122"/>
                 <a:cs typeface="Calibri" pitchFamily="34" charset="-120"/>
               </a:rPr>
-              <a:t>Fuente: 1e73482e-Data_NCR03082026.xlsx — hoja «Observaciones» · Corte 03-08-2026 · 494 registros desde 10-02-2023</a:t>
+              <a:t>Fuente: b73c9c4f-Data_NCR_2.xlsx — hoja «Observaciones» · Corte 03-08-2026 · 493 registros desde 10-02-2023</a:t>
             </a:r>
             <a:endParaRPr lang="en-US" sz="850" dirty="0"/>
           </a:p>
@@ -26784,7 +26784,7 @@
                 <a:ea typeface="Calibri" pitchFamily="34" charset="-122"/>
                 <a:cs typeface="Calibri" pitchFamily="34" charset="-120"/>
               </a:rPr>
-              <a:t>Interna es autodetección: la levanta Besalco antes que nadie. Externa la levanta el cliente —compromete el contrato— o un subcontrato. Autodetección global: 32,8%.</a:t>
+              <a:t>Interna es autodetección: la levanta Besalco antes que nadie. Externa la levanta el cliente —compromete el contrato— o un subcontrato. Autodetección global: 32,9%.</a:t>
             </a:r>
             <a:endParaRPr lang="en-US" sz="1350" dirty="0"/>
           </a:p>
@@ -27529,7 +27529,7 @@
                 <a:ea typeface="Calibri" pitchFamily="34" charset="-122"/>
                 <a:cs typeface="Calibri" pitchFamily="34" charset="-120"/>
               </a:rPr>
-              <a:t>278</a:t>
+              <a:t>277</a:t>
             </a:r>
             <a:endParaRPr lang="en-US" sz="1050" dirty="0"/>
           </a:p>
@@ -27568,7 +27568,7 @@
                 <a:ea typeface="Calibri" pitchFamily="34" charset="-122"/>
                 <a:cs typeface="Calibri" pitchFamily="34" charset="-120"/>
               </a:rPr>
-              <a:t>230</a:t>
+              <a:t>229</a:t>
             </a:r>
             <a:endParaRPr lang="en-US" sz="1050" dirty="0"/>
           </a:p>
@@ -28437,7 +28437,7 @@
                 <a:ea typeface="Calibri" pitchFamily="34" charset="-122"/>
                 <a:cs typeface="Calibri" pitchFamily="34" charset="-120"/>
               </a:rPr>
-              <a:t>494</a:t>
+              <a:t>493</a:t>
             </a:r>
             <a:endParaRPr lang="en-US" sz="1050" dirty="0"/>
           </a:p>
@@ -28476,7 +28476,7 @@
                 <a:ea typeface="Calibri" pitchFamily="34" charset="-122"/>
                 <a:cs typeface="Calibri" pitchFamily="34" charset="-120"/>
               </a:rPr>
-              <a:t>441</a:t>
+              <a:t>440</a:t>
             </a:r>
             <a:endParaRPr lang="en-US" sz="1050" dirty="0"/>
           </a:p>
@@ -28515,7 +28515,7 @@
                 <a:ea typeface="Calibri" pitchFamily="34" charset="-122"/>
                 <a:cs typeface="Calibri" pitchFamily="34" charset="-120"/>
               </a:rPr>
-              <a:t>89,3%</a:t>
+              <a:t>89,2%</a:t>
             </a:r>
             <a:endParaRPr lang="en-US" sz="1050" dirty="0"/>
           </a:p>
@@ -28927,7 +28927,7 @@
                 <a:ea typeface="Cambria" pitchFamily="34" charset="-122"/>
                 <a:cs typeface="Cambria" pitchFamily="34" charset="-120"/>
               </a:rPr>
-              <a:t>32,3%</a:t>
+              <a:t>32,5%</a:t>
             </a:r>
             <a:endParaRPr lang="en-US" sz="2400" dirty="0"/>
           </a:p>
@@ -29005,7 +29005,7 @@
                 <a:ea typeface="Calibri" pitchFamily="34" charset="-122"/>
                 <a:cs typeface="Calibri" pitchFamily="34" charset="-120"/>
               </a:rPr>
-              <a:t>Fuente: 1e73482e-Data_NCR03082026.xlsx — hoja «Observaciones» · Corte 03-08-2026 · 494 registros desde 10-02-2023</a:t>
+              <a:t>Fuente: b73c9c4f-Data_NCR_2.xlsx — hoja «Observaciones» · Corte 03-08-2026 · 493 registros desde 10-02-2023</a:t>
             </a:r>
             <a:endParaRPr lang="en-US" sz="850" dirty="0"/>
           </a:p>
@@ -30318,7 +30318,7 @@
                 <a:ea typeface="Calibri" pitchFamily="34" charset="-122"/>
                 <a:cs typeface="Calibri" pitchFamily="34" charset="-120"/>
               </a:rPr>
-              <a:t>128</a:t>
+              <a:t>127</a:t>
             </a:r>
             <a:endParaRPr lang="en-US" sz="1150" dirty="0"/>
           </a:p>
@@ -30357,7 +30357,7 @@
                 <a:ea typeface="Calibri" pitchFamily="34" charset="-122"/>
                 <a:cs typeface="Calibri" pitchFamily="34" charset="-120"/>
               </a:rPr>
-              <a:t>131 d</a:t>
+              <a:t>129 d</a:t>
             </a:r>
             <a:endParaRPr lang="en-US" sz="1150" dirty="0"/>
           </a:p>
@@ -30813,7 +30813,7 @@
                 <a:ea typeface="Calibri" pitchFamily="34" charset="-122"/>
                 <a:cs typeface="Calibri" pitchFamily="34" charset="-120"/>
               </a:rPr>
-              <a:t>Fuente: 1e73482e-Data_NCR03082026.xlsx — hoja «Observaciones» · Corte 03-08-2026 · 494 registros desde 10-02-2023</a:t>
+              <a:t>Fuente: b73c9c4f-Data_NCR_2.xlsx — hoja «Observaciones» · Corte 03-08-2026 · 493 registros desde 10-02-2023</a:t>
             </a:r>
             <a:endParaRPr lang="en-US" sz="850" dirty="0"/>
           </a:p>
@@ -31187,7 +31187,7 @@
                 <a:ea typeface="Calibri" pitchFamily="34" charset="-122"/>
                 <a:cs typeface="Calibri" pitchFamily="34" charset="-120"/>
               </a:rPr>
-              <a:t>36 de los 53 hallazgos abiertos (67,9%) y 78% de cierre, contra 89,3% global. Es la ruta crítica del módulo.</a:t>
+              <a:t>36 de los 53 hallazgos abiertos (67,9%) y 77,9% de cierre, contra 89,2% global. Es la ruta crítica del módulo.</a:t>
             </a:r>
             <a:endParaRPr lang="en-US" sz="1100" dirty="0"/>
           </a:p>
@@ -31652,7 +31652,7 @@
                 <a:ea typeface="Calibri" pitchFamily="34" charset="-122"/>
                 <a:cs typeface="Calibri" pitchFamily="34" charset="-120"/>
               </a:rPr>
-              <a:t>Fuente: 1e73482e-Data_NCR03082026.xlsx — hoja «Observaciones» · Corte 03-08-2026 · 494 registros desde 10-02-2023</a:t>
+              <a:t>Fuente: b73c9c4f-Data_NCR_2.xlsx — hoja «Observaciones» · Corte 03-08-2026 · 493 registros desde 10-02-2023</a:t>
             </a:r>
             <a:endParaRPr lang="en-US" sz="850" dirty="0"/>
           </a:p>
@@ -32415,7 +32415,7 @@
                 <a:ea typeface="Calibri" pitchFamily="34" charset="-122"/>
                 <a:cs typeface="Calibri" pitchFamily="34" charset="-120"/>
               </a:rPr>
-              <a:t>Fuente: 1e73482e-Data_NCR03082026.xlsx — hoja «Observaciones» · Corte 03-08-2026 · 494 registros desde 10-02-2023</a:t>
+              <a:t>Fuente: b73c9c4f-Data_NCR_2.xlsx — hoja «Observaciones» · Corte 03-08-2026 · 493 registros desde 10-02-2023</a:t>
             </a:r>
             <a:endParaRPr lang="en-US" sz="850" dirty="0"/>
           </a:p>
@@ -33008,7 +33008,7 @@
                 <a:ea typeface="Calibri" pitchFamily="34" charset="-122"/>
                 <a:cs typeface="Calibri" pitchFamily="34" charset="-120"/>
               </a:rPr>
-              <a:t>Global del módulo: 89,3%</a:t>
+              <a:t>Global del módulo: 89,2%</a:t>
             </a:r>
             <a:endParaRPr lang="en-US" sz="950" dirty="0"/>
           </a:p>
@@ -33606,7 +33606,7 @@
                 <a:ea typeface="Calibri" pitchFamily="34" charset="-122"/>
                 <a:cs typeface="Calibri" pitchFamily="34" charset="-120"/>
               </a:rPr>
-              <a:t>global del módulo 32,8%</a:t>
+              <a:t>global del módulo 32,9%</a:t>
             </a:r>
             <a:endParaRPr lang="en-US" sz="1000" dirty="0"/>
           </a:p>
@@ -34216,7 +34216,7 @@
                 <a:ea typeface="Calibri" pitchFamily="34" charset="-122"/>
                 <a:cs typeface="Calibri" pitchFamily="34" charset="-120"/>
               </a:rPr>
-              <a:t>Fuente: 1e73482e-Data_NCR03082026.xlsx — hoja «Observaciones» · Corte 03-08-2026 · 494 registros desde 10-02-2023</a:t>
+              <a:t>Fuente: b73c9c4f-Data_NCR_2.xlsx — hoja «Observaciones» · Corte 03-08-2026 · 493 registros desde 10-02-2023</a:t>
             </a:r>
             <a:endParaRPr lang="en-US" sz="850" dirty="0"/>
           </a:p>

--- a/modulo_nc/Panel_No_Conformidades.pptx
+++ b/modulo_nc/Panel_No_Conformidades.pptx
@@ -219,19 +219,19 @@
                     <c:v>3 sem.</c:v>
                   </c:pt>
                   <c:pt idx="1">
-                    <c:v>29-06</c:v>
+                    <c:v>06-07</c:v>
                   </c:pt>
                   <c:pt idx="2">
-                    <c:v>06-07</c:v>
+                    <c:v>13-07</c:v>
                   </c:pt>
                   <c:pt idx="3">
-                    <c:v>13-07</c:v>
+                    <c:v>20-07</c:v>
                   </c:pt>
                   <c:pt idx="4">
-                    <c:v>20-07</c:v>
+                    <c:v>27-07</c:v>
                   </c:pt>
                   <c:pt idx="5">
-                    <c:v>27-07</c:v>
+                    <c:v>03-08</c:v>
                   </c:pt>
                 </c:lvl>
               </c:multiLvlStrCache>
@@ -244,22 +244,22 @@
                 <c:formatCode>General</c:formatCode>
                 <c:ptCount val="6"/>
                 <c:pt idx="0">
-                  <c:v>3</c:v>
+                  <c:v>1</c:v>
                 </c:pt>
                 <c:pt idx="1">
                   <c:v>1</c:v>
                 </c:pt>
                 <c:pt idx="2">
-                  <c:v>1</c:v>
+                  <c:v/>
                 </c:pt>
                 <c:pt idx="3">
-                  <c:v/>
+                  <c:v>2</c:v>
                 </c:pt>
                 <c:pt idx="4">
-                  <c:v>2</c:v>
+                  <c:v>3</c:v>
                 </c:pt>
                 <c:pt idx="5">
-                  <c:v>3</c:v>
+                  <c:v/>
                 </c:pt>
               </c:numCache>
             </c:numRef>
@@ -321,19 +321,19 @@
                     <c:v>3 sem.</c:v>
                   </c:pt>
                   <c:pt idx="1">
-                    <c:v>29-06</c:v>
+                    <c:v>06-07</c:v>
                   </c:pt>
                   <c:pt idx="2">
-                    <c:v>06-07</c:v>
+                    <c:v>13-07</c:v>
                   </c:pt>
                   <c:pt idx="3">
-                    <c:v>13-07</c:v>
+                    <c:v>20-07</c:v>
                   </c:pt>
                   <c:pt idx="4">
-                    <c:v>20-07</c:v>
+                    <c:v>27-07</c:v>
                   </c:pt>
                   <c:pt idx="5">
-                    <c:v>27-07</c:v>
+                    <c:v>03-08</c:v>
                   </c:pt>
                 </c:lvl>
               </c:multiLvlStrCache>
@@ -349,19 +349,19 @@
                   <c:v>4</c:v>
                 </c:pt>
                 <c:pt idx="1">
-                  <c:v>2</c:v>
+                  <c:v/>
                 </c:pt>
                 <c:pt idx="2">
                   <c:v/>
                 </c:pt>
                 <c:pt idx="3">
-                  <c:v/>
+                  <c:v>1</c:v>
                 </c:pt>
                 <c:pt idx="4">
                   <c:v>1</c:v>
                 </c:pt>
                 <c:pt idx="5">
-                  <c:v/>
+                  <c:v>1</c:v>
                 </c:pt>
               </c:numCache>
             </c:numRef>
@@ -733,10 +733,10 @@
                   <c:v>19</c:v>
                 </c:pt>
                 <c:pt idx="1">
-                  <c:v>188</c:v>
+                  <c:v>189</c:v>
                 </c:pt>
                 <c:pt idx="2">
-                  <c:v>70</c:v>
+                  <c:v>72</c:v>
                 </c:pt>
                 <c:pt idx="3">
                   <c:v/>
@@ -1198,10 +1198,10 @@
                 <c:formatCode>General</c:formatCode>
                 <c:ptCount val="4"/>
                 <c:pt idx="0">
-                  <c:v>278</c:v>
+                  <c:v>280</c:v>
                 </c:pt>
                 <c:pt idx="1">
-                  <c:v>116</c:v>
+                  <c:v>117</c:v>
                 </c:pt>
                 <c:pt idx="2">
                   <c:v>45</c:v>
@@ -1567,7 +1567,7 @@
                 <c:formatCode>General</c:formatCode>
                 <c:ptCount val="1"/>
                 <c:pt idx="0">
-                  <c:v>6</c:v>
+                  <c:v>5</c:v>
                 </c:pt>
               </c:numCache>
             </c:numRef>
@@ -1639,7 +1639,7 @@
                 <c:formatCode>General</c:formatCode>
                 <c:ptCount val="1"/>
                 <c:pt idx="0">
-                  <c:v>12</c:v>
+                  <c:v>13</c:v>
                 </c:pt>
               </c:numCache>
             </c:numRef>
@@ -1711,7 +1711,7 @@
                 <c:formatCode>General</c:formatCode>
                 <c:ptCount val="1"/>
                 <c:pt idx="0">
-                  <c:v>18</c:v>
+                  <c:v>16</c:v>
                 </c:pt>
               </c:numCache>
             </c:numRef>
@@ -1783,7 +1783,7 @@
                 <c:formatCode>General</c:formatCode>
                 <c:ptCount val="1"/>
                 <c:pt idx="0">
-                  <c:v>14</c:v>
+                  <c:v>15</c:v>
                 </c:pt>
               </c:numCache>
             </c:numRef>
@@ -1855,7 +1855,7 @@
                 <c:formatCode>General</c:formatCode>
                 <c:ptCount val="1"/>
                 <c:pt idx="0">
-                  <c:v>3</c:v>
+                  <c:v>4</c:v>
                 </c:pt>
               </c:numCache>
             </c:numRef>
@@ -2578,7 +2578,7 @@
                   <c:v>23</c:v>
                 </c:pt>
                 <c:pt idx="2">
-                  <c:v>15</c:v>
+                  <c:v>16</c:v>
                 </c:pt>
                 <c:pt idx="3">
                   <c:v>11</c:v>
@@ -2985,7 +2985,7 @@
                     <c:v>ESTRUCTURA</c:v>
                   </c:pt>
                   <c:pt idx="7">
-                    <c:v>LOGÍSTICA</c:v>
+                    <c:v>MECÁNICA</c:v>
                   </c:pt>
                 </c:lvl>
               </c:multiLvlStrCache>
@@ -3099,7 +3099,7 @@
                     <c:v>ESTRUCTURA</c:v>
                   </c:pt>
                   <c:pt idx="7">
-                    <c:v>LOGÍSTICA</c:v>
+                    <c:v>MECÁNICA</c:v>
                   </c:pt>
                 </c:lvl>
               </c:multiLvlStrCache>
@@ -3112,7 +3112,7 @@
                 <c:formatCode>General</c:formatCode>
                 <c:ptCount val="8"/>
                 <c:pt idx="0">
-                  <c:v>35</c:v>
+                  <c:v>36</c:v>
                 </c:pt>
                 <c:pt idx="1">
                   <c:v/>
@@ -5621,7 +5621,7 @@
                 <a:ea typeface="Calibri" pitchFamily="34" charset="-122"/>
                 <a:cs typeface="Calibri" pitchFamily="34" charset="-120"/>
               </a:rPr>
-              <a:t>493 hallazgos levantados entre 10-02-2023 y 28-07-2026 (Desaladora 82 · Talabre 240 · Arqueros 163 · Oficina Central 8).</a:t>
+              <a:t>496 hallazgos levantados entre 10-02-2023 y 05-08-2026 (Desaladora 82 · Talabre 241 · Arqueros 165 · Oficina Central 8).</a:t>
             </a:r>
             <a:endParaRPr lang="en-US" sz="1350" dirty="0"/>
           </a:p>
@@ -5680,7 +5680,7 @@
                 <a:ea typeface="Cambria" pitchFamily="34" charset="-122"/>
                 <a:cs typeface="Cambria" pitchFamily="34" charset="-120"/>
               </a:rPr>
-              <a:t>89,2%</a:t>
+              <a:t>89,3%</a:t>
             </a:r>
             <a:endParaRPr lang="en-US" sz="3400" dirty="0"/>
           </a:p>
@@ -5992,7 +5992,7 @@
                 <a:ea typeface="Calibri" pitchFamily="34" charset="-122"/>
                 <a:cs typeface="Calibri" pitchFamily="34" charset="-120"/>
               </a:rPr>
-              <a:t>Corte: 03-08-2026</a:t>
+              <a:t>Corte: 10-08-2026</a:t>
             </a:r>
             <a:endParaRPr lang="en-US" sz="1100" dirty="0"/>
           </a:p>
@@ -6031,7 +6031,7 @@
                 <a:ea typeface="Calibri" pitchFamily="34" charset="-122"/>
                 <a:cs typeface="Calibri" pitchFamily="34" charset="-120"/>
               </a:rPr>
-              <a:t>Fuente: b73c9c4f-Data_NCR_2.xlsx — hoja «Observaciones» · Corte 03-08-2026 · 493 registros desde 10-02-2023</a:t>
+              <a:t>Fuente: 5f2decc2-Data_NCR10082026.xlsx — hoja «Observaciones» · Corte 10-08-2026 · 496 registros desde 10-02-2023</a:t>
             </a:r>
             <a:endParaRPr lang="en-US" sz="850" dirty="0"/>
           </a:p>
@@ -6243,7 +6243,7 @@
                 <a:ea typeface="Calibri" pitchFamily="34" charset="-122"/>
                 <a:cs typeface="Calibri" pitchFamily="34" charset="-120"/>
               </a:rPr>
-              <a:t>2 hallazgos siguen abiertos; 0 con más de 180 días. Se listan del más antiguo al más reciente.</a:t>
+              <a:t>1 hallazgo sigue abierto; 0 con más de 180 días. Se listan del más antiguo al más reciente.</a:t>
             </a:r>
             <a:endParaRPr lang="en-US" sz="1350" dirty="0"/>
           </a:p>
@@ -6851,7 +6851,7 @@
                 <a:ea typeface="Calibri" pitchFamily="34" charset="-122"/>
                 <a:cs typeface="Calibri" pitchFamily="34" charset="-120"/>
               </a:rPr>
-              <a:t>83</a:t>
+              <a:t>90</a:t>
             </a:r>
             <a:endParaRPr lang="en-US" sz="1050" dirty="0"/>
           </a:p>
@@ -6927,361 +6927,6 @@
         </p:nvSpPr>
         <p:spPr>
           <a:xfrm>
-            <a:off x="457200" y="2615184"/>
-            <a:ext cx="11292840" cy="347472"/>
-          </a:xfrm>
-          <a:prstGeom prst="rect">
-            <a:avLst/>
-          </a:prstGeom>
-          <a:solidFill>
-            <a:srgbClr val="FFFFFF"/>
-          </a:solidFill>
-          <a:ln/>
-        </p:spPr>
-      </p:sp>
-      <p:sp>
-        <p:nvSpPr>
-          <p:cNvPr id="25" name="Text 22"/>
-          <p:cNvSpPr/>
-          <p:nvPr/>
-        </p:nvSpPr>
-        <p:spPr>
-          <a:xfrm>
-            <a:off x="502920" y="2660904"/>
-            <a:ext cx="822960" cy="256032"/>
-          </a:xfrm>
-          <a:prstGeom prst="rect">
-            <a:avLst/>
-          </a:prstGeom>
-          <a:noFill/>
-          <a:ln/>
-        </p:spPr>
-        <p:txBody>
-          <a:bodyPr wrap="square" lIns="0" tIns="0" rIns="0" bIns="0" rtlCol="0" anchor="ctr"/>
-          <a:lstStyle/>
-          <a:p>
-            <a:pPr algn="l" indent="0" marL="0">
-              <a:buNone/>
-            </a:pPr>
-            <a:r>
-              <a:rPr lang="en-US" sz="1050" dirty="0">
-                <a:solidFill>
-                  <a:srgbClr val="1A2433"/>
-                </a:solidFill>
-                <a:latin typeface="Calibri" pitchFamily="34" charset="0"/>
-                <a:ea typeface="Calibri" pitchFamily="34" charset="-122"/>
-                <a:cs typeface="Calibri" pitchFamily="34" charset="-120"/>
-              </a:rPr>
-              <a:t>95</a:t>
-            </a:r>
-            <a:endParaRPr lang="en-US" sz="1050" dirty="0"/>
-          </a:p>
-        </p:txBody>
-      </p:sp>
-      <p:sp>
-        <p:nvSpPr>
-          <p:cNvPr id="26" name="Text 23"/>
-          <p:cNvSpPr/>
-          <p:nvPr/>
-        </p:nvSpPr>
-        <p:spPr>
-          <a:xfrm>
-            <a:off x="1371600" y="2660904"/>
-            <a:ext cx="1508760" cy="256032"/>
-          </a:xfrm>
-          <a:prstGeom prst="rect">
-            <a:avLst/>
-          </a:prstGeom>
-          <a:noFill/>
-          <a:ln/>
-        </p:spPr>
-        <p:txBody>
-          <a:bodyPr wrap="square" lIns="0" tIns="0" rIns="0" bIns="0" rtlCol="0" anchor="ctr"/>
-          <a:lstStyle/>
-          <a:p>
-            <a:pPr algn="l" indent="0" marL="0">
-              <a:buNone/>
-            </a:pPr>
-            <a:r>
-              <a:rPr lang="en-US" sz="1050" dirty="0">
-                <a:solidFill>
-                  <a:srgbClr val="1A2433"/>
-                </a:solidFill>
-                <a:latin typeface="Calibri" pitchFamily="34" charset="0"/>
-                <a:ea typeface="Calibri" pitchFamily="34" charset="-122"/>
-                <a:cs typeface="Calibri" pitchFamily="34" charset="-120"/>
-              </a:rPr>
-              <a:t>No Conformidad</a:t>
-            </a:r>
-            <a:endParaRPr lang="en-US" sz="1050" dirty="0"/>
-          </a:p>
-        </p:txBody>
-      </p:sp>
-      <p:sp>
-        <p:nvSpPr>
-          <p:cNvPr id="27" name="Text 24"/>
-          <p:cNvSpPr/>
-          <p:nvPr/>
-        </p:nvSpPr>
-        <p:spPr>
-          <a:xfrm>
-            <a:off x="2926080" y="2660904"/>
-            <a:ext cx="1463040" cy="256032"/>
-          </a:xfrm>
-          <a:prstGeom prst="rect">
-            <a:avLst/>
-          </a:prstGeom>
-          <a:noFill/>
-          <a:ln/>
-        </p:spPr>
-        <p:txBody>
-          <a:bodyPr wrap="square" lIns="0" tIns="0" rIns="0" bIns="0" rtlCol="0" anchor="ctr"/>
-          <a:lstStyle/>
-          <a:p>
-            <a:pPr algn="l" indent="0" marL="0">
-              <a:buNone/>
-            </a:pPr>
-            <a:r>
-              <a:rPr lang="en-US" sz="1050" b="1" dirty="0">
-                <a:solidFill>
-                  <a:srgbClr val="C87A32"/>
-                </a:solidFill>
-                <a:latin typeface="Calibri" pitchFamily="34" charset="0"/>
-                <a:ea typeface="Calibri" pitchFamily="34" charset="-122"/>
-                <a:cs typeface="Calibri" pitchFamily="34" charset="-120"/>
-              </a:rPr>
-              <a:t>Externa · Cliente</a:t>
-            </a:r>
-            <a:endParaRPr lang="en-US" sz="1050" dirty="0"/>
-          </a:p>
-        </p:txBody>
-      </p:sp>
-      <p:sp>
-        <p:nvSpPr>
-          <p:cNvPr id="28" name="Text 25"/>
-          <p:cNvSpPr/>
-          <p:nvPr/>
-        </p:nvSpPr>
-        <p:spPr>
-          <a:xfrm>
-            <a:off x="4434840" y="2660904"/>
-            <a:ext cx="1280160" cy="256032"/>
-          </a:xfrm>
-          <a:prstGeom prst="rect">
-            <a:avLst/>
-          </a:prstGeom>
-          <a:noFill/>
-          <a:ln/>
-        </p:spPr>
-        <p:txBody>
-          <a:bodyPr wrap="square" lIns="0" tIns="0" rIns="0" bIns="0" rtlCol="0" anchor="ctr"/>
-          <a:lstStyle/>
-          <a:p>
-            <a:pPr algn="l" indent="0" marL="0">
-              <a:buNone/>
-            </a:pPr>
-            <a:r>
-              <a:rPr lang="en-US" sz="1050" dirty="0">
-                <a:solidFill>
-                  <a:srgbClr val="1A2433"/>
-                </a:solidFill>
-                <a:latin typeface="Calibri" pitchFamily="34" charset="0"/>
-                <a:ea typeface="Calibri" pitchFamily="34" charset="-122"/>
-                <a:cs typeface="Calibri" pitchFamily="34" charset="-120"/>
-              </a:rPr>
-              <a:t>MECÁNICA</a:t>
-            </a:r>
-            <a:endParaRPr lang="en-US" sz="1050" dirty="0"/>
-          </a:p>
-        </p:txBody>
-      </p:sp>
-      <p:sp>
-        <p:nvSpPr>
-          <p:cNvPr id="29" name="Text 26"/>
-          <p:cNvSpPr/>
-          <p:nvPr/>
-        </p:nvSpPr>
-        <p:spPr>
-          <a:xfrm>
-            <a:off x="5760720" y="2660904"/>
-            <a:ext cx="1508760" cy="256032"/>
-          </a:xfrm>
-          <a:prstGeom prst="rect">
-            <a:avLst/>
-          </a:prstGeom>
-          <a:noFill/>
-          <a:ln/>
-        </p:spPr>
-        <p:txBody>
-          <a:bodyPr wrap="square" lIns="0" tIns="0" rIns="0" bIns="0" rtlCol="0" anchor="ctr"/>
-          <a:lstStyle/>
-          <a:p>
-            <a:pPr algn="l" indent="0" marL="0">
-              <a:buNone/>
-            </a:pPr>
-            <a:r>
-              <a:rPr lang="en-US" sz="1050" dirty="0">
-                <a:solidFill>
-                  <a:srgbClr val="1A2433"/>
-                </a:solidFill>
-                <a:latin typeface="Calibri" pitchFamily="34" charset="0"/>
-                <a:ea typeface="Calibri" pitchFamily="34" charset="-122"/>
-                <a:cs typeface="Calibri" pitchFamily="34" charset="-120"/>
-              </a:rPr>
-              <a:t>Wilson Jara</a:t>
-            </a:r>
-            <a:endParaRPr lang="en-US" sz="1050" dirty="0"/>
-          </a:p>
-        </p:txBody>
-      </p:sp>
-      <p:sp>
-        <p:nvSpPr>
-          <p:cNvPr id="30" name="Text 27"/>
-          <p:cNvSpPr/>
-          <p:nvPr/>
-        </p:nvSpPr>
-        <p:spPr>
-          <a:xfrm>
-            <a:off x="7315200" y="2660904"/>
-            <a:ext cx="1325880" cy="256032"/>
-          </a:xfrm>
-          <a:prstGeom prst="rect">
-            <a:avLst/>
-          </a:prstGeom>
-          <a:noFill/>
-          <a:ln/>
-        </p:spPr>
-        <p:txBody>
-          <a:bodyPr wrap="square" lIns="0" tIns="0" rIns="0" bIns="0" rtlCol="0" anchor="ctr"/>
-          <a:lstStyle/>
-          <a:p>
-            <a:pPr algn="l" indent="0" marL="0">
-              <a:buNone/>
-            </a:pPr>
-            <a:r>
-              <a:rPr lang="en-US" sz="1050" dirty="0">
-                <a:solidFill>
-                  <a:srgbClr val="1A2433"/>
-                </a:solidFill>
-                <a:latin typeface="Calibri" pitchFamily="34" charset="0"/>
-                <a:ea typeface="Calibri" pitchFamily="34" charset="-122"/>
-                <a:cs typeface="Calibri" pitchFamily="34" charset="-120"/>
-              </a:rPr>
-              <a:t>Iniciado</a:t>
-            </a:r>
-            <a:endParaRPr lang="en-US" sz="1050" dirty="0"/>
-          </a:p>
-        </p:txBody>
-      </p:sp>
-      <p:sp>
-        <p:nvSpPr>
-          <p:cNvPr id="31" name="Text 28"/>
-          <p:cNvSpPr/>
-          <p:nvPr/>
-        </p:nvSpPr>
-        <p:spPr>
-          <a:xfrm>
-            <a:off x="8686800" y="2660904"/>
-            <a:ext cx="640080" cy="256032"/>
-          </a:xfrm>
-          <a:prstGeom prst="rect">
-            <a:avLst/>
-          </a:prstGeom>
-          <a:noFill/>
-          <a:ln/>
-        </p:spPr>
-        <p:txBody>
-          <a:bodyPr wrap="square" lIns="0" tIns="0" rIns="0" bIns="0" rtlCol="0" anchor="ctr"/>
-          <a:lstStyle/>
-          <a:p>
-            <a:pPr algn="r" indent="0" marL="0">
-              <a:buNone/>
-            </a:pPr>
-            <a:r>
-              <a:rPr lang="en-US" sz="1050" dirty="0">
-                <a:solidFill>
-                  <a:srgbClr val="1A2433"/>
-                </a:solidFill>
-                <a:latin typeface="Calibri" pitchFamily="34" charset="0"/>
-                <a:ea typeface="Calibri" pitchFamily="34" charset="-122"/>
-                <a:cs typeface="Calibri" pitchFamily="34" charset="-120"/>
-              </a:rPr>
-              <a:t>7</a:t>
-            </a:r>
-            <a:endParaRPr lang="en-US" sz="1050" dirty="0"/>
-          </a:p>
-        </p:txBody>
-      </p:sp>
-      <p:sp>
-        <p:nvSpPr>
-          <p:cNvPr id="32" name="Text 29"/>
-          <p:cNvSpPr/>
-          <p:nvPr/>
-        </p:nvSpPr>
-        <p:spPr>
-          <a:xfrm>
-            <a:off x="9464040" y="2660904"/>
-            <a:ext cx="2286000" cy="256032"/>
-          </a:xfrm>
-          <a:prstGeom prst="rect">
-            <a:avLst/>
-          </a:prstGeom>
-          <a:noFill/>
-          <a:ln/>
-        </p:spPr>
-        <p:txBody>
-          <a:bodyPr wrap="square" lIns="0" tIns="0" rIns="0" bIns="0" rtlCol="0" anchor="ctr"/>
-          <a:lstStyle/>
-          <a:p>
-            <a:pPr algn="l" indent="0" marL="0">
-              <a:buNone/>
-            </a:pPr>
-            <a:r>
-              <a:rPr lang="en-US" sz="1000" dirty="0">
-                <a:solidFill>
-                  <a:srgbClr val="1A2433"/>
-                </a:solidFill>
-                <a:latin typeface="Calibri" pitchFamily="34" charset="0"/>
-                <a:ea typeface="Calibri" pitchFamily="34" charset="-122"/>
-                <a:cs typeface="Calibri" pitchFamily="34" charset="-120"/>
-              </a:rPr>
-              <a:t>Verificación de Preservación</a:t>
-            </a:r>
-            <a:endParaRPr lang="en-US" sz="1000" dirty="0"/>
-          </a:p>
-        </p:txBody>
-      </p:sp>
-      <p:sp>
-        <p:nvSpPr>
-          <p:cNvPr id="33" name="Shape 30"/>
-          <p:cNvSpPr/>
-          <p:nvPr/>
-        </p:nvSpPr>
-        <p:spPr>
-          <a:xfrm>
-            <a:off x="502920" y="2953512"/>
-            <a:ext cx="11247120" cy="0"/>
-          </a:xfrm>
-          <a:prstGeom prst="line">
-            <a:avLst/>
-          </a:prstGeom>
-          <a:noFill/>
-          <a:ln w="9525">
-            <a:solidFill>
-              <a:srgbClr val="D9DFE6"/>
-            </a:solidFill>
-            <a:prstDash val="solid"/>
-          </a:ln>
-        </p:spPr>
-      </p:sp>
-      <p:sp>
-        <p:nvSpPr>
-          <p:cNvPr id="34" name="Shape 31"/>
-          <p:cNvSpPr/>
-          <p:nvPr/>
-        </p:nvSpPr>
-        <p:spPr>
-          <a:xfrm>
             <a:off x="457200" y="5806440"/>
             <a:ext cx="11274552" cy="566928"/>
           </a:xfrm>
@@ -7291,14 +6936,14 @@
             </a:avLst>
           </a:prstGeom>
           <a:solidFill>
-            <a:srgbClr val="12233B"/>
+            <a:srgbClr val="E9EDF2"/>
           </a:solidFill>
           <a:ln/>
         </p:spPr>
       </p:sp>
       <p:sp>
         <p:nvSpPr>
-          <p:cNvPr id="35" name="Text 32"/>
+          <p:cNvPr id="25" name="Text 22"/>
           <p:cNvSpPr/>
           <p:nvPr/>
         </p:nvSpPr>
@@ -7323,13 +6968,13 @@
             <a:r>
               <a:rPr lang="en-US" sz="1000" b="1" spc="100" kern="0" dirty="0">
                 <a:solidFill>
-                  <a:srgbClr val="E3A55B"/>
-                </a:solidFill>
-                <a:latin typeface="Calibri" pitchFamily="34" charset="0"/>
-                <a:ea typeface="Calibri" pitchFamily="34" charset="-122"/>
-                <a:cs typeface="Calibri" pitchFamily="34" charset="-120"/>
-              </a:rPr>
-              <a:t>SEMANA 27-07-2026 — 02-08-2026</a:t>
+                  <a:srgbClr val="56606E"/>
+                </a:solidFill>
+                <a:latin typeface="Calibri" pitchFamily="34" charset="0"/>
+                <a:ea typeface="Calibri" pitchFamily="34" charset="-122"/>
+                <a:cs typeface="Calibri" pitchFamily="34" charset="-120"/>
+              </a:rPr>
+              <a:t>SEMANA 03-08-2026 — 09-08-2026</a:t>
             </a:r>
             <a:endParaRPr lang="en-US" sz="1000" dirty="0"/>
           </a:p>
@@ -7337,7 +6982,7 @@
       </p:sp>
       <p:sp>
         <p:nvSpPr>
-          <p:cNvPr id="36" name="Text 33"/>
+          <p:cNvPr id="26" name="Text 23"/>
           <p:cNvSpPr/>
           <p:nvPr/>
         </p:nvSpPr>
@@ -7362,13 +7007,13 @@
             <a:r>
               <a:rPr lang="en-US" sz="1150" dirty="0">
                 <a:solidFill>
-                  <a:srgbClr val="FFFFFF"/>
-                </a:solidFill>
-                <a:latin typeface="Calibri" pitchFamily="34" charset="0"/>
-                <a:ea typeface="Calibri" pitchFamily="34" charset="-122"/>
-                <a:cs typeface="Calibri" pitchFamily="34" charset="-120"/>
-              </a:rPr>
-              <a:t>1 hallazgo nuevo · 0 internas · 1 del cliente · MECÁNICA 1 · 1 sigue abierto</a:t>
+                  <a:srgbClr val="56606E"/>
+                </a:solidFill>
+                <a:latin typeface="Calibri" pitchFamily="34" charset="0"/>
+                <a:ea typeface="Calibri" pitchFamily="34" charset="-122"/>
+                <a:cs typeface="Calibri" pitchFamily="34" charset="-120"/>
+              </a:rPr>
+              <a:t>Sin hallazgos nuevos en el período.</a:t>
             </a:r>
             <a:endParaRPr lang="en-US" sz="1150" dirty="0"/>
           </a:p>
@@ -7376,7 +7021,7 @@
       </p:sp>
       <p:sp>
         <p:nvSpPr>
-          <p:cNvPr id="37" name="Text 34"/>
+          <p:cNvPr id="27" name="Text 24"/>
           <p:cNvSpPr/>
           <p:nvPr/>
         </p:nvSpPr>
@@ -7407,7 +7052,7 @@
                 <a:ea typeface="Calibri" pitchFamily="34" charset="-122"/>
                 <a:cs typeface="Calibri" pitchFamily="34" charset="-120"/>
               </a:rPr>
-              <a:t>Fuente: b73c9c4f-Data_NCR_2.xlsx — hoja «Observaciones» · Corte 03-08-2026 · 493 registros desde 10-02-2023</a:t>
+              <a:t>Fuente: 5f2decc2-Data_NCR10082026.xlsx — hoja «Observaciones» · Corte 10-08-2026 · 496 registros desde 10-02-2023</a:t>
             </a:r>
             <a:endParaRPr lang="en-US" sz="850" dirty="0"/>
           </a:p>
@@ -7415,7 +7060,7 @@
       </p:sp>
       <p:sp>
         <p:nvSpPr>
-          <p:cNvPr id="38" name="Text 35"/>
+          <p:cNvPr id="28" name="Text 25"/>
           <p:cNvSpPr/>
           <p:nvPr/>
         </p:nvSpPr>
@@ -7454,7 +7099,7 @@
       </p:sp>
       <p:sp>
         <p:nvSpPr>
-          <p:cNvPr id="39" name="Text 36"/>
+          <p:cNvPr id="29" name="Text 26"/>
           <p:cNvSpPr/>
           <p:nvPr/>
         </p:nvSpPr>
@@ -7760,7 +7405,7 @@
                 <a:ea typeface="Calibri" pitchFamily="34" charset="-122"/>
                 <a:cs typeface="Calibri" pitchFamily="34" charset="-120"/>
               </a:rPr>
-              <a:t>240 hallazgos levantados · 52 internas · 188 del cliente · 12 especialidades involucradas.</a:t>
+              <a:t>241 hallazgos levantados · 52 internas · 189 del cliente · 12 especialidades involucradas.</a:t>
             </a:r>
             <a:endParaRPr lang="en-US" sz="1350" dirty="0"/>
           </a:p>
@@ -8053,7 +7698,7 @@
                 <a:ea typeface="Cambria" pitchFamily="34" charset="-122"/>
                 <a:cs typeface="Cambria" pitchFamily="34" charset="-120"/>
               </a:rPr>
-              <a:t>21,7%</a:t>
+              <a:t>21,6%</a:t>
             </a:r>
             <a:endParaRPr lang="en-US" sz="3400" dirty="0"/>
           </a:p>
@@ -8131,7 +7776,7 @@
                 <a:ea typeface="Calibri" pitchFamily="34" charset="-122"/>
                 <a:cs typeface="Calibri" pitchFamily="34" charset="-120"/>
               </a:rPr>
-              <a:t>Corte: 03-08-2026</a:t>
+              <a:t>Corte: 10-08-2026</a:t>
             </a:r>
             <a:endParaRPr lang="en-US" sz="1100" dirty="0"/>
           </a:p>
@@ -8170,7 +7815,7 @@
                 <a:ea typeface="Calibri" pitchFamily="34" charset="-122"/>
                 <a:cs typeface="Calibri" pitchFamily="34" charset="-120"/>
               </a:rPr>
-              <a:t>Fuente: b73c9c4f-Data_NCR_2.xlsx — hoja «Observaciones» · Corte 03-08-2026 · 493 registros desde 10-02-2023</a:t>
+              <a:t>Fuente: 5f2decc2-Data_NCR10082026.xlsx — hoja «Observaciones» · Corte 10-08-2026 · 496 registros desde 10-02-2023</a:t>
             </a:r>
             <a:endParaRPr lang="en-US" sz="850" dirty="0"/>
           </a:p>
@@ -8436,7 +8081,7 @@
                 <a:ea typeface="Cambria" pitchFamily="34" charset="-122"/>
                 <a:cs typeface="Cambria" pitchFamily="34" charset="-120"/>
               </a:rPr>
-              <a:t>240</a:t>
+              <a:t>241</a:t>
             </a:r>
             <a:endParaRPr lang="en-US" sz="4000" dirty="0"/>
           </a:p>
@@ -8475,7 +8120,7 @@
                 <a:ea typeface="Calibri" pitchFamily="34" charset="-122"/>
                 <a:cs typeface="Calibri" pitchFamily="34" charset="-120"/>
               </a:rPr>
-              <a:t>225 cerrados</a:t>
+              <a:t>226 cerrados</a:t>
             </a:r>
             <a:endParaRPr lang="en-US" sz="1400" dirty="0"/>
           </a:p>
@@ -8553,7 +8198,7 @@
                 <a:ea typeface="Calibri" pitchFamily="34" charset="-122"/>
                 <a:cs typeface="Calibri" pitchFamily="34" charset="-120"/>
               </a:rPr>
-              <a:t>52 internas · 188 del cliente</a:t>
+              <a:t>52 internas · 189 del cliente</a:t>
             </a:r>
             <a:endParaRPr lang="en-US" sz="950" dirty="0"/>
           </a:p>
@@ -8685,7 +8330,7 @@
                 <a:ea typeface="Calibri" pitchFamily="34" charset="-122"/>
                 <a:cs typeface="Calibri" pitchFamily="34" charset="-120"/>
               </a:rPr>
-              <a:t>225/240</a:t>
+              <a:t>226/241</a:t>
             </a:r>
             <a:endParaRPr lang="en-US" sz="1400" dirty="0"/>
           </a:p>
@@ -8763,7 +8408,7 @@
                 <a:ea typeface="Calibri" pitchFamily="34" charset="-122"/>
                 <a:cs typeface="Calibri" pitchFamily="34" charset="-120"/>
               </a:rPr>
-              <a:t>Global del módulo: 89,2%</a:t>
+              <a:t>Global del módulo: 89,3%</a:t>
             </a:r>
             <a:endParaRPr lang="en-US" sz="950" dirty="0"/>
           </a:p>
@@ -9299,7 +8944,7 @@
                 <a:ea typeface="Cambria" pitchFamily="34" charset="-122"/>
                 <a:cs typeface="Cambria" pitchFamily="34" charset="-120"/>
               </a:rPr>
-              <a:t>21,7%</a:t>
+              <a:t>21,6%</a:t>
             </a:r>
             <a:endParaRPr lang="en-US" sz="2600" dirty="0"/>
           </a:p>
@@ -9361,7 +9006,7 @@
                 <a:ea typeface="Calibri" pitchFamily="34" charset="-122"/>
                 <a:cs typeface="Calibri" pitchFamily="34" charset="-120"/>
               </a:rPr>
-              <a:t>global del módulo 32,9%</a:t>
+              <a:t>global del módulo 32,6%</a:t>
             </a:r>
             <a:endParaRPr lang="en-US" sz="1000" dirty="0"/>
           </a:p>
@@ -9658,7 +9303,7 @@
                 <a:ea typeface="Cambria" pitchFamily="34" charset="-122"/>
                 <a:cs typeface="Cambria" pitchFamily="34" charset="-120"/>
               </a:rPr>
-              <a:t>188</a:t>
+              <a:t>189</a:t>
             </a:r>
             <a:endParaRPr lang="en-US" sz="1600" dirty="0"/>
           </a:p>
@@ -9697,7 +9342,7 @@
                 <a:ea typeface="Calibri" pitchFamily="34" charset="-122"/>
                 <a:cs typeface="Calibri" pitchFamily="34" charset="-120"/>
               </a:rPr>
-              <a:t>Fuente: b73c9c4f-Data_NCR_2.xlsx — hoja «Observaciones» · Corte 03-08-2026 · 493 registros desde 10-02-2023</a:t>
+              <a:t>Fuente: 5f2decc2-Data_NCR10082026.xlsx — hoja «Observaciones» · Corte 10-08-2026 · 496 registros desde 10-02-2023</a:t>
             </a:r>
             <a:endParaRPr lang="en-US" sz="850" dirty="0"/>
           </a:p>
@@ -10556,7 +10201,7 @@
                 <a:ea typeface="Calibri" pitchFamily="34" charset="-122"/>
                 <a:cs typeface="Calibri" pitchFamily="34" charset="-120"/>
               </a:rPr>
-              <a:t>392</a:t>
+              <a:t>399</a:t>
             </a:r>
             <a:endParaRPr lang="en-US" sz="1050" dirty="0"/>
           </a:p>
@@ -10911,7 +10556,7 @@
                 <a:ea typeface="Calibri" pitchFamily="34" charset="-122"/>
                 <a:cs typeface="Calibri" pitchFamily="34" charset="-120"/>
               </a:rPr>
-              <a:t>328</a:t>
+              <a:t>335</a:t>
             </a:r>
             <a:endParaRPr lang="en-US" sz="1050" dirty="0"/>
           </a:p>
@@ -11246,7 +10891,7 @@
                 <a:ea typeface="Calibri" pitchFamily="34" charset="-122"/>
                 <a:cs typeface="Calibri" pitchFamily="34" charset="-120"/>
               </a:rPr>
-              <a:t>224</a:t>
+              <a:t>231</a:t>
             </a:r>
             <a:endParaRPr lang="en-US" sz="1050" dirty="0"/>
           </a:p>
@@ -11601,7 +11246,7 @@
                 <a:ea typeface="Calibri" pitchFamily="34" charset="-122"/>
                 <a:cs typeface="Calibri" pitchFamily="34" charset="-120"/>
               </a:rPr>
-              <a:t>139</a:t>
+              <a:t>146</a:t>
             </a:r>
             <a:endParaRPr lang="en-US" sz="1050" dirty="0"/>
           </a:p>
@@ -11936,7 +11581,7 @@
                 <a:ea typeface="Calibri" pitchFamily="34" charset="-122"/>
                 <a:cs typeface="Calibri" pitchFamily="34" charset="-120"/>
               </a:rPr>
-              <a:t>133</a:t>
+              <a:t>140</a:t>
             </a:r>
             <a:endParaRPr lang="en-US" sz="1050" dirty="0"/>
           </a:p>
@@ -12291,7 +11936,7 @@
                 <a:ea typeface="Calibri" pitchFamily="34" charset="-122"/>
                 <a:cs typeface="Calibri" pitchFamily="34" charset="-120"/>
               </a:rPr>
-              <a:t>119</a:t>
+              <a:t>126</a:t>
             </a:r>
             <a:endParaRPr lang="en-US" sz="1050" dirty="0"/>
           </a:p>
@@ -12626,7 +12271,7 @@
                 <a:ea typeface="Calibri" pitchFamily="34" charset="-122"/>
                 <a:cs typeface="Calibri" pitchFamily="34" charset="-120"/>
               </a:rPr>
-              <a:t>111</a:t>
+              <a:t>118</a:t>
             </a:r>
             <a:endParaRPr lang="en-US" sz="1050" dirty="0"/>
           </a:p>
@@ -12981,7 +12626,7 @@
                 <a:ea typeface="Calibri" pitchFamily="34" charset="-122"/>
                 <a:cs typeface="Calibri" pitchFamily="34" charset="-120"/>
               </a:rPr>
-              <a:t>55</a:t>
+              <a:t>62</a:t>
             </a:r>
             <a:endParaRPr lang="en-US" sz="1050" dirty="0"/>
           </a:p>
@@ -13316,7 +12961,7 @@
                 <a:ea typeface="Calibri" pitchFamily="34" charset="-122"/>
                 <a:cs typeface="Calibri" pitchFamily="34" charset="-120"/>
               </a:rPr>
-              <a:t>55</a:t>
+              <a:t>62</a:t>
             </a:r>
             <a:endParaRPr lang="en-US" sz="1050" dirty="0"/>
           </a:p>
@@ -13478,7 +13123,7 @@
                 <a:ea typeface="Calibri" pitchFamily="34" charset="-122"/>
                 <a:cs typeface="Calibri" pitchFamily="34" charset="-120"/>
               </a:rPr>
-              <a:t>SEMANA 27-07-2026 — 02-08-2026</a:t>
+              <a:t>SEMANA 03-08-2026 — 09-08-2026</a:t>
             </a:r>
             <a:endParaRPr lang="en-US" sz="1000" dirty="0"/>
           </a:p>
@@ -13517,7 +13162,7 @@
                 <a:ea typeface="Calibri" pitchFamily="34" charset="-122"/>
                 <a:cs typeface="Calibri" pitchFamily="34" charset="-120"/>
               </a:rPr>
-              <a:t>2 hallazgos nuevos · 0 internas · 2 del cliente · OO.CC 1 · CALIDAD 1 · 2 siguen abiertos</a:t>
+              <a:t>1 hallazgo nuevo · 0 internas · 1 del cliente · PIPING 1 · 0 siguen abiertos</a:t>
             </a:r>
             <a:endParaRPr lang="en-US" sz="1150" dirty="0"/>
           </a:p>
@@ -13556,7 +13201,7 @@
                 <a:ea typeface="Calibri" pitchFamily="34" charset="-122"/>
                 <a:cs typeface="Calibri" pitchFamily="34" charset="-120"/>
               </a:rPr>
-              <a:t>Fuente: b73c9c4f-Data_NCR_2.xlsx — hoja «Observaciones» · Corte 03-08-2026 · 493 registros desde 10-02-2023</a:t>
+              <a:t>Fuente: 5f2decc2-Data_NCR10082026.xlsx — hoja «Observaciones» · Corte 10-08-2026 · 496 registros desde 10-02-2023</a:t>
             </a:r>
             <a:endParaRPr lang="en-US" sz="850" dirty="0"/>
           </a:p>
@@ -13909,7 +13554,7 @@
                 <a:ea typeface="Calibri" pitchFamily="34" charset="-122"/>
                 <a:cs typeface="Calibri" pitchFamily="34" charset="-120"/>
               </a:rPr>
-              <a:t>163 hallazgos levantados · 53 internas · 70 del cliente · 40 de subcontrato · 18 especialidades involucradas.</a:t>
+              <a:t>165 hallazgos levantados · 53 internas · 72 del cliente · 40 de subcontrato · 18 especialidades involucradas.</a:t>
             </a:r>
             <a:endParaRPr lang="en-US" sz="1350" dirty="0"/>
           </a:p>
@@ -13968,7 +13613,7 @@
                 <a:ea typeface="Cambria" pitchFamily="34" charset="-122"/>
                 <a:cs typeface="Cambria" pitchFamily="34" charset="-120"/>
               </a:rPr>
-              <a:t>77,9%</a:t>
+              <a:t>77,6%</a:t>
             </a:r>
             <a:endParaRPr lang="en-US" sz="3400" dirty="0"/>
           </a:p>
@@ -14046,7 +13691,7 @@
                 <a:ea typeface="Cambria" pitchFamily="34" charset="-122"/>
                 <a:cs typeface="Cambria" pitchFamily="34" charset="-120"/>
               </a:rPr>
-              <a:t>36</a:t>
+              <a:t>37</a:t>
             </a:r>
             <a:endParaRPr lang="en-US" sz="3400" dirty="0"/>
           </a:p>
@@ -14124,7 +13769,7 @@
                 <a:ea typeface="Cambria" pitchFamily="34" charset="-122"/>
                 <a:cs typeface="Cambria" pitchFamily="34" charset="-120"/>
               </a:rPr>
-              <a:t>129 d</a:t>
+              <a:t>131 d</a:t>
             </a:r>
             <a:endParaRPr lang="en-US" sz="3400" dirty="0"/>
           </a:p>
@@ -14202,7 +13847,7 @@
                 <a:ea typeface="Cambria" pitchFamily="34" charset="-122"/>
                 <a:cs typeface="Cambria" pitchFamily="34" charset="-120"/>
               </a:rPr>
-              <a:t>32,5%</a:t>
+              <a:t>32,1%</a:t>
             </a:r>
             <a:endParaRPr lang="en-US" sz="3400" dirty="0"/>
           </a:p>
@@ -14280,7 +13925,7 @@
                 <a:ea typeface="Calibri" pitchFamily="34" charset="-122"/>
                 <a:cs typeface="Calibri" pitchFamily="34" charset="-120"/>
               </a:rPr>
-              <a:t>Corte: 03-08-2026</a:t>
+              <a:t>Corte: 10-08-2026</a:t>
             </a:r>
             <a:endParaRPr lang="en-US" sz="1100" dirty="0"/>
           </a:p>
@@ -14319,7 +13964,7 @@
                 <a:ea typeface="Calibri" pitchFamily="34" charset="-122"/>
                 <a:cs typeface="Calibri" pitchFamily="34" charset="-120"/>
               </a:rPr>
-              <a:t>Fuente: b73c9c4f-Data_NCR_2.xlsx — hoja «Observaciones» · Corte 03-08-2026 · 493 registros desde 10-02-2023</a:t>
+              <a:t>Fuente: 5f2decc2-Data_NCR10082026.xlsx — hoja «Observaciones» · Corte 10-08-2026 · 496 registros desde 10-02-2023</a:t>
             </a:r>
             <a:endParaRPr lang="en-US" sz="850" dirty="0"/>
           </a:p>
@@ -14585,7 +14230,7 @@
                 <a:ea typeface="Cambria" pitchFamily="34" charset="-122"/>
                 <a:cs typeface="Cambria" pitchFamily="34" charset="-120"/>
               </a:rPr>
-              <a:t>163</a:t>
+              <a:t>165</a:t>
             </a:r>
             <a:endParaRPr lang="en-US" sz="4000" dirty="0"/>
           </a:p>
@@ -14624,7 +14269,7 @@
                 <a:ea typeface="Calibri" pitchFamily="34" charset="-122"/>
                 <a:cs typeface="Calibri" pitchFamily="34" charset="-120"/>
               </a:rPr>
-              <a:t>127 cerrados</a:t>
+              <a:t>128 cerrados</a:t>
             </a:r>
             <a:endParaRPr lang="en-US" sz="1400" dirty="0"/>
           </a:p>
@@ -14702,7 +14347,7 @@
                 <a:ea typeface="Calibri" pitchFamily="34" charset="-122"/>
                 <a:cs typeface="Calibri" pitchFamily="34" charset="-120"/>
               </a:rPr>
-              <a:t>53 internas · 70 del cliente · 40 de subcontrato</a:t>
+              <a:t>53 internas · 72 del cliente · 40 de subcontrato</a:t>
             </a:r>
             <a:endParaRPr lang="en-US" sz="950" dirty="0"/>
           </a:p>
@@ -14795,7 +14440,7 @@
                 <a:ea typeface="Cambria" pitchFamily="34" charset="-122"/>
                 <a:cs typeface="Cambria" pitchFamily="34" charset="-120"/>
               </a:rPr>
-              <a:t>77,9%</a:t>
+              <a:t>77,6%</a:t>
             </a:r>
             <a:endParaRPr lang="en-US" sz="4000" dirty="0"/>
           </a:p>
@@ -14834,7 +14479,7 @@
                 <a:ea typeface="Calibri" pitchFamily="34" charset="-122"/>
                 <a:cs typeface="Calibri" pitchFamily="34" charset="-120"/>
               </a:rPr>
-              <a:t>127/163</a:t>
+              <a:t>128/165</a:t>
             </a:r>
             <a:endParaRPr lang="en-US" sz="1400" dirty="0"/>
           </a:p>
@@ -14912,7 +14557,7 @@
                 <a:ea typeface="Calibri" pitchFamily="34" charset="-122"/>
                 <a:cs typeface="Calibri" pitchFamily="34" charset="-120"/>
               </a:rPr>
-              <a:t>Global del módulo: 89,2%</a:t>
+              <a:t>Global del módulo: 89,3%</a:t>
             </a:r>
             <a:endParaRPr lang="en-US" sz="950" dirty="0"/>
           </a:p>
@@ -15005,7 +14650,7 @@
                 <a:ea typeface="Cambria" pitchFamily="34" charset="-122"/>
                 <a:cs typeface="Cambria" pitchFamily="34" charset="-120"/>
               </a:rPr>
-              <a:t>36</a:t>
+              <a:t>37</a:t>
             </a:r>
             <a:endParaRPr lang="en-US" sz="4000" dirty="0"/>
           </a:p>
@@ -15122,7 +14767,7 @@
                 <a:ea typeface="Calibri" pitchFamily="34" charset="-122"/>
                 <a:cs typeface="Calibri" pitchFamily="34" charset="-120"/>
               </a:rPr>
-              <a:t>1 iniciado · 20 listo para revisión · 12 observada · 3 pendiente</a:t>
+              <a:t>1 iniciado · 25 listo para revisión · 10 stand by · 1 observada</a:t>
             </a:r>
             <a:endParaRPr lang="en-US" sz="950" dirty="0"/>
           </a:p>
@@ -15215,7 +14860,7 @@
                 <a:ea typeface="Cambria" pitchFamily="34" charset="-122"/>
                 <a:cs typeface="Cambria" pitchFamily="34" charset="-120"/>
               </a:rPr>
-              <a:t>129</a:t>
+              <a:t>131</a:t>
             </a:r>
             <a:endParaRPr lang="en-US" sz="4000" dirty="0"/>
           </a:p>
@@ -15448,7 +15093,7 @@
                 <a:ea typeface="Cambria" pitchFamily="34" charset="-122"/>
                 <a:cs typeface="Cambria" pitchFamily="34" charset="-120"/>
               </a:rPr>
-              <a:t>32,5%</a:t>
+              <a:t>32,1%</a:t>
             </a:r>
             <a:endParaRPr lang="en-US" sz="2600" dirty="0"/>
           </a:p>
@@ -15510,7 +15155,7 @@
                 <a:ea typeface="Calibri" pitchFamily="34" charset="-122"/>
                 <a:cs typeface="Calibri" pitchFamily="34" charset="-120"/>
               </a:rPr>
-              <a:t>global del módulo 32,9%</a:t>
+              <a:t>global del módulo 32,6%</a:t>
             </a:r>
             <a:endParaRPr lang="en-US" sz="1000" dirty="0"/>
           </a:p>
@@ -15768,7 +15413,7 @@
                 <a:ea typeface="Calibri" pitchFamily="34" charset="-122"/>
                 <a:cs typeface="Calibri" pitchFamily="34" charset="-120"/>
               </a:rPr>
-              <a:t>35 ab.</a:t>
+              <a:t>36 ab.</a:t>
             </a:r>
             <a:endParaRPr lang="en-US" sz="950" dirty="0"/>
           </a:p>
@@ -15807,7 +15452,7 @@
                 <a:ea typeface="Cambria" pitchFamily="34" charset="-122"/>
                 <a:cs typeface="Cambria" pitchFamily="34" charset="-120"/>
               </a:rPr>
-              <a:t>70</a:t>
+              <a:t>72</a:t>
             </a:r>
             <a:endParaRPr lang="en-US" sz="1600" dirty="0"/>
           </a:p>
@@ -15983,7 +15628,7 @@
                 <a:ea typeface="Calibri" pitchFamily="34" charset="-122"/>
                 <a:cs typeface="Calibri" pitchFamily="34" charset="-120"/>
               </a:rPr>
-              <a:t>Fuente: b73c9c4f-Data_NCR_2.xlsx — hoja «Observaciones» · Corte 03-08-2026 · 493 registros desde 10-02-2023</a:t>
+              <a:t>Fuente: 5f2decc2-Data_NCR10082026.xlsx — hoja «Observaciones» · Corte 10-08-2026 · 496 registros desde 10-02-2023</a:t>
             </a:r>
             <a:endParaRPr lang="en-US" sz="850" dirty="0"/>
           </a:p>
@@ -16234,7 +15879,7 @@
                 <a:ea typeface="Calibri" pitchFamily="34" charset="-122"/>
                 <a:cs typeface="Calibri" pitchFamily="34" charset="-120"/>
               </a:rPr>
-              <a:t>36 hallazgos siguen abiertos; 14 con más de 180 días. Se listan del más antiguo al más reciente.</a:t>
+              <a:t>37 hallazgos siguen abiertos; 16 con más de 180 días. Se listan del más antiguo al más reciente.</a:t>
             </a:r>
             <a:endParaRPr lang="en-US" sz="1350" dirty="0"/>
           </a:p>
@@ -16842,7 +16487,7 @@
                 <a:ea typeface="Calibri" pitchFamily="34" charset="-122"/>
                 <a:cs typeface="Calibri" pitchFamily="34" charset="-120"/>
               </a:rPr>
-              <a:t>395</a:t>
+              <a:t>402</a:t>
             </a:r>
             <a:endParaRPr lang="en-US" sz="1050" dirty="0"/>
           </a:p>
@@ -17197,7 +16842,7 @@
                 <a:ea typeface="Calibri" pitchFamily="34" charset="-122"/>
                 <a:cs typeface="Calibri" pitchFamily="34" charset="-120"/>
               </a:rPr>
-              <a:t>392</a:t>
+              <a:t>399</a:t>
             </a:r>
             <a:endParaRPr lang="en-US" sz="1050" dirty="0"/>
           </a:p>
@@ -17532,7 +17177,7 @@
                 <a:ea typeface="Calibri" pitchFamily="34" charset="-122"/>
                 <a:cs typeface="Calibri" pitchFamily="34" charset="-120"/>
               </a:rPr>
-              <a:t>361</a:t>
+              <a:t>368</a:t>
             </a:r>
             <a:endParaRPr lang="en-US" sz="1050" dirty="0"/>
           </a:p>
@@ -17887,7 +17532,7 @@
                 <a:ea typeface="Calibri" pitchFamily="34" charset="-122"/>
                 <a:cs typeface="Calibri" pitchFamily="34" charset="-120"/>
               </a:rPr>
-              <a:t>349</a:t>
+              <a:t>356</a:t>
             </a:r>
             <a:endParaRPr lang="en-US" sz="1050" dirty="0"/>
           </a:p>
@@ -18222,7 +17867,7 @@
                 <a:ea typeface="Calibri" pitchFamily="34" charset="-122"/>
                 <a:cs typeface="Calibri" pitchFamily="34" charset="-120"/>
               </a:rPr>
-              <a:t>321</a:t>
+              <a:t>328</a:t>
             </a:r>
             <a:endParaRPr lang="en-US" sz="1050" dirty="0"/>
           </a:p>
@@ -18538,7 +18183,7 @@
                 <a:ea typeface="Calibri" pitchFamily="34" charset="-122"/>
                 <a:cs typeface="Calibri" pitchFamily="34" charset="-120"/>
               </a:rPr>
-              <a:t>Observada</a:t>
+              <a:t>Listo para revisi…</a:t>
             </a:r>
             <a:endParaRPr lang="en-US" sz="1050" dirty="0"/>
           </a:p>
@@ -18577,7 +18222,7 @@
                 <a:ea typeface="Calibri" pitchFamily="34" charset="-122"/>
                 <a:cs typeface="Calibri" pitchFamily="34" charset="-120"/>
               </a:rPr>
-              <a:t>291</a:t>
+              <a:t>298</a:t>
             </a:r>
             <a:endParaRPr lang="en-US" sz="1050" dirty="0"/>
           </a:p>
@@ -18873,7 +18518,7 @@
                 <a:ea typeface="Calibri" pitchFamily="34" charset="-122"/>
                 <a:cs typeface="Calibri" pitchFamily="34" charset="-120"/>
               </a:rPr>
-              <a:t>Observada</a:t>
+              <a:t>Stand By</a:t>
             </a:r>
             <a:endParaRPr lang="en-US" sz="1050" dirty="0"/>
           </a:p>
@@ -18912,7 +18557,7 @@
                 <a:ea typeface="Calibri" pitchFamily="34" charset="-122"/>
                 <a:cs typeface="Calibri" pitchFamily="34" charset="-120"/>
               </a:rPr>
-              <a:t>291</a:t>
+              <a:t>298</a:t>
             </a:r>
             <a:endParaRPr lang="en-US" sz="1050" dirty="0"/>
           </a:p>
@@ -19267,7 +18912,7 @@
                 <a:ea typeface="Calibri" pitchFamily="34" charset="-122"/>
                 <a:cs typeface="Calibri" pitchFamily="34" charset="-120"/>
               </a:rPr>
-              <a:t>270</a:t>
+              <a:t>277</a:t>
             </a:r>
             <a:endParaRPr lang="en-US" sz="1050" dirty="0"/>
           </a:p>
@@ -19563,7 +19208,7 @@
                 <a:ea typeface="Calibri" pitchFamily="34" charset="-122"/>
                 <a:cs typeface="Calibri" pitchFamily="34" charset="-120"/>
               </a:rPr>
-              <a:t>Observada</a:t>
+              <a:t>Listo para revisi…</a:t>
             </a:r>
             <a:endParaRPr lang="en-US" sz="1050" dirty="0"/>
           </a:p>
@@ -19602,7 +19247,7 @@
                 <a:ea typeface="Calibri" pitchFamily="34" charset="-122"/>
                 <a:cs typeface="Calibri" pitchFamily="34" charset="-120"/>
               </a:rPr>
-              <a:t>266</a:t>
+              <a:t>273</a:t>
             </a:r>
             <a:endParaRPr lang="en-US" sz="1050" dirty="0"/>
           </a:p>
@@ -19703,7 +19348,7 @@
                 <a:ea typeface="Calibri" pitchFamily="34" charset="-122"/>
                 <a:cs typeface="Calibri" pitchFamily="34" charset="-120"/>
               </a:rPr>
-              <a:t>Se listan los 9 más antiguos de 36 abiertos; el detalle completo está en el panel.</a:t>
+              <a:t>Se listan los 9 más antiguos de 37 abiertos; el detalle completo está en el panel.</a:t>
             </a:r>
             <a:endParaRPr lang="en-US" sz="950" dirty="0"/>
           </a:p>
@@ -19764,7 +19409,7 @@
                 <a:ea typeface="Calibri" pitchFamily="34" charset="-122"/>
                 <a:cs typeface="Calibri" pitchFamily="34" charset="-120"/>
               </a:rPr>
-              <a:t>SEMANA 27-07-2026 — 02-08-2026</a:t>
+              <a:t>SEMANA 03-08-2026 — 09-08-2026</a:t>
             </a:r>
             <a:endParaRPr lang="en-US" sz="1000" dirty="0"/>
           </a:p>
@@ -19842,7 +19487,7 @@
                 <a:ea typeface="Calibri" pitchFamily="34" charset="-122"/>
                 <a:cs typeface="Calibri" pitchFamily="34" charset="-120"/>
               </a:rPr>
-              <a:t>Fuente: b73c9c4f-Data_NCR_2.xlsx — hoja «Observaciones» · Corte 03-08-2026 · 493 registros desde 10-02-2023</a:t>
+              <a:t>Fuente: 5f2decc2-Data_NCR10082026.xlsx — hoja «Observaciones» · Corte 10-08-2026 · 496 registros desde 10-02-2023</a:t>
             </a:r>
             <a:endParaRPr lang="en-US" sz="850" dirty="0"/>
           </a:p>
@@ -20147,7 +19792,7 @@
                 <a:ea typeface="Cambria" pitchFamily="34" charset="-122"/>
                 <a:cs typeface="Cambria" pitchFamily="34" charset="-120"/>
               </a:rPr>
-              <a:t>89,2%</a:t>
+              <a:t>89,3%</a:t>
             </a:r>
             <a:endParaRPr lang="en-US" sz="4000" dirty="0"/>
           </a:p>
@@ -20186,7 +19831,7 @@
                 <a:ea typeface="Calibri" pitchFamily="34" charset="-122"/>
                 <a:cs typeface="Calibri" pitchFamily="34" charset="-120"/>
               </a:rPr>
-              <a:t>440/493</a:t>
+              <a:t>443/496</a:t>
             </a:r>
             <a:endParaRPr lang="en-US" sz="1400" dirty="0"/>
           </a:p>
@@ -20264,7 +19909,7 @@
                 <a:ea typeface="Calibri" pitchFamily="34" charset="-122"/>
                 <a:cs typeface="Calibri" pitchFamily="34" charset="-120"/>
               </a:rPr>
-              <a:t>53 abiertos · 17 con más de 180 días</a:t>
+              <a:t>53 abiertos · 19 con más de 180 días</a:t>
             </a:r>
             <a:endParaRPr lang="en-US" sz="950" dirty="0"/>
           </a:p>
@@ -20396,7 +20041,7 @@
                 <a:ea typeface="Calibri" pitchFamily="34" charset="-122"/>
                 <a:cs typeface="Calibri" pitchFamily="34" charset="-120"/>
               </a:rPr>
-              <a:t>de 493 levantados</a:t>
+              <a:t>de 496 levantados</a:t>
             </a:r>
             <a:endParaRPr lang="en-US" sz="1400" dirty="0"/>
           </a:p>
@@ -20474,7 +20119,7 @@
                 <a:ea typeface="Calibri" pitchFamily="34" charset="-122"/>
                 <a:cs typeface="Calibri" pitchFamily="34" charset="-120"/>
               </a:rPr>
-              <a:t>14 iniciado · 1 no aceptado · 23 listo para revisión · 12 observada · 3 pendiente</a:t>
+              <a:t>13 iniciado · 1 no aceptado · 28 listo para revisión · 10 stand by · 1 observada</a:t>
             </a:r>
             <a:endParaRPr lang="en-US" sz="950" dirty="0"/>
           </a:p>
@@ -20567,7 +20212,7 @@
                 <a:ea typeface="Cambria" pitchFamily="34" charset="-122"/>
                 <a:cs typeface="Cambria" pitchFamily="34" charset="-120"/>
               </a:rPr>
-              <a:t>32,9%</a:t>
+              <a:t>32,6%</a:t>
             </a:r>
             <a:endParaRPr lang="en-US" sz="4000" dirty="0"/>
           </a:p>
@@ -20606,7 +20251,7 @@
                 <a:ea typeface="Calibri" pitchFamily="34" charset="-122"/>
                 <a:cs typeface="Calibri" pitchFamily="34" charset="-120"/>
               </a:rPr>
-              <a:t>159/484 clasificados</a:t>
+              <a:t>159/487 clasificados</a:t>
             </a:r>
             <a:endParaRPr lang="en-US" sz="1400" dirty="0"/>
           </a:p>
@@ -20816,7 +20461,7 @@
                 <a:ea typeface="Calibri" pitchFamily="34" charset="-122"/>
                 <a:cs typeface="Calibri" pitchFamily="34" charset="-120"/>
               </a:rPr>
-              <a:t>249 de 493 con costo</a:t>
+              <a:t>251 de 496 con costo</a:t>
             </a:r>
             <a:endParaRPr lang="en-US" sz="1400" dirty="0"/>
           </a:p>
@@ -20894,7 +20539,7 @@
                 <a:ea typeface="Calibri" pitchFamily="34" charset="-122"/>
                 <a:cs typeface="Calibri" pitchFamily="34" charset="-120"/>
               </a:rPr>
-              <a:t>244 hallazgos no declaran costo: la cifra es un piso</a:t>
+              <a:t>245 hallazgos no declaran costo: la cifra es un piso</a:t>
             </a:r>
             <a:endParaRPr lang="en-US" sz="950" dirty="0"/>
           </a:p>
@@ -21034,7 +20679,7 @@
                 <a:ea typeface="Calibri" pitchFamily="34" charset="-122"/>
                 <a:cs typeface="Calibri" pitchFamily="34" charset="-120"/>
               </a:rPr>
-              <a:t>36 de los 53 hallazgos abiertos (67,9%), y es uno de los frentes donde el cliente levanta más de lo que detecta Besalco (70 del cliente contra 53 internas).</a:t>
+              <a:t>37 de los 53 hallazgos abiertos (69,8%), y es uno de los frentes donde el cliente levanta más de lo que detecta Besalco (72 del cliente contra 53 internas).</a:t>
             </a:r>
             <a:endParaRPr lang="en-US" sz="1250" dirty="0"/>
           </a:p>
@@ -21096,7 +20741,7 @@
                 <a:ea typeface="Calibri" pitchFamily="34" charset="-122"/>
                 <a:cs typeface="Calibri" pitchFamily="34" charset="-120"/>
               </a:rPr>
-              <a:t>La semana trajo 3 hallazgos nuevos, ninguno de autodetección.  </a:t>
+              <a:t>La semana trajo 1 hallazgo nuevo, ninguno de autodetección.  </a:t>
             </a:r>
             <a:pPr indent="0" marL="0">
               <a:lnSpc>
@@ -21113,7 +20758,7 @@
                 <a:ea typeface="Calibri" pitchFamily="34" charset="-122"/>
                 <a:cs typeface="Calibri" pitchFamily="34" charset="-120"/>
               </a:rPr>
-              <a:t>27-07-2026 al 02-08-2026: 3 del cliente en MECÁNICA (1) y OO.CC (1) y CALIDAD (1). Todos siguen abiertos; la semana anterior entraron 3.</a:t>
+              <a:t>03-08-2026 al 09-08-2026: 1 del cliente en PIPING (1). 0 siguen abiertos; la semana anterior entraron 4.</a:t>
             </a:r>
             <a:endParaRPr lang="en-US" sz="1250" dirty="0"/>
           </a:p>
@@ -21175,7 +20820,7 @@
                 <a:ea typeface="Calibri" pitchFamily="34" charset="-122"/>
                 <a:cs typeface="Calibri" pitchFamily="34" charset="-120"/>
               </a:rPr>
-              <a:t>50 de los 53 abiertos están fuera del plazo de respuesta.  </a:t>
+              <a:t>52 de los 53 abiertos están fuera del plazo de respuesta.  </a:t>
             </a:r>
             <a:pPr indent="0" marL="0">
               <a:lnSpc>
@@ -21192,7 +20837,7 @@
                 <a:ea typeface="Calibri" pitchFamily="34" charset="-122"/>
                 <a:cs typeface="Calibri" pitchFamily="34" charset="-120"/>
               </a:rPr>
-              <a:t>El plazo es de 10 días desde que se emite la NC. De los atrasados, 17 llevan más de 180 días abiertos y 3 más de un año: no es atraso de días, es deuda vieja.</a:t>
+              <a:t>El plazo es de 10 días desde que se emite la NC. De los atrasados, 19 llevan más de 180 días abiertos y 4 más de un año: no es atraso de días, es deuda vieja.</a:t>
             </a:r>
             <a:endParaRPr lang="en-US" sz="1250" dirty="0"/>
           </a:p>
@@ -21231,7 +20876,7 @@
                 <a:ea typeface="Calibri" pitchFamily="34" charset="-122"/>
                 <a:cs typeface="Calibri" pitchFamily="34" charset="-120"/>
               </a:rPr>
-              <a:t>Fuente: b73c9c4f-Data_NCR_2.xlsx — hoja «Observaciones» · Corte 03-08-2026 · 493 registros desde 10-02-2023</a:t>
+              <a:t>Fuente: 5f2decc2-Data_NCR10082026.xlsx — hoja «Observaciones» · Corte 10-08-2026 · 496 registros desde 10-02-2023</a:t>
             </a:r>
             <a:endParaRPr lang="en-US" sz="850" dirty="0"/>
           </a:p>
@@ -22051,7 +21696,7 @@
                 <a:ea typeface="Calibri" pitchFamily="34" charset="-122"/>
                 <a:cs typeface="Calibri" pitchFamily="34" charset="-120"/>
               </a:rPr>
-              <a:t>80</a:t>
+              <a:t>81</a:t>
             </a:r>
             <a:endParaRPr lang="en-US" sz="1300" dirty="0"/>
           </a:p>
@@ -22090,7 +21735,7 @@
                 <a:ea typeface="Calibri" pitchFamily="34" charset="-122"/>
                 <a:cs typeface="Calibri" pitchFamily="34" charset="-120"/>
               </a:rPr>
-              <a:t>2</a:t>
+              <a:t>1</a:t>
             </a:r>
             <a:endParaRPr lang="en-US" sz="1300" dirty="0"/>
           </a:p>
@@ -22129,7 +21774,7 @@
                 <a:ea typeface="Calibri" pitchFamily="34" charset="-122"/>
                 <a:cs typeface="Calibri" pitchFamily="34" charset="-120"/>
               </a:rPr>
-              <a:t>97,6%</a:t>
+              <a:t>98,8%</a:t>
             </a:r>
             <a:endParaRPr lang="en-US" sz="1300" dirty="0"/>
           </a:p>
@@ -22506,7 +22151,7 @@
                 <a:ea typeface="Calibri" pitchFamily="34" charset="-122"/>
                 <a:cs typeface="Calibri" pitchFamily="34" charset="-120"/>
               </a:rPr>
-              <a:t>240</a:t>
+              <a:t>241</a:t>
             </a:r>
             <a:endParaRPr lang="en-US" sz="1300" dirty="0"/>
           </a:p>
@@ -22545,7 +22190,7 @@
                 <a:ea typeface="Calibri" pitchFamily="34" charset="-122"/>
                 <a:cs typeface="Calibri" pitchFamily="34" charset="-120"/>
               </a:rPr>
-              <a:t>225</a:t>
+              <a:t>226</a:t>
             </a:r>
             <a:endParaRPr lang="en-US" sz="1300" dirty="0"/>
           </a:p>
@@ -22701,7 +22346,7 @@
                 <a:ea typeface="Calibri" pitchFamily="34" charset="-122"/>
                 <a:cs typeface="Calibri" pitchFamily="34" charset="-120"/>
               </a:rPr>
-              <a:t>188</a:t>
+              <a:t>189</a:t>
             </a:r>
             <a:endParaRPr lang="en-US" sz="1300" dirty="0"/>
           </a:p>
@@ -22980,7 +22625,7 @@
                 <a:ea typeface="Calibri" pitchFamily="34" charset="-122"/>
                 <a:cs typeface="Calibri" pitchFamily="34" charset="-120"/>
               </a:rPr>
-              <a:t>163</a:t>
+              <a:t>165</a:t>
             </a:r>
             <a:endParaRPr lang="en-US" sz="1300" dirty="0"/>
           </a:p>
@@ -23019,7 +22664,7 @@
                 <a:ea typeface="Calibri" pitchFamily="34" charset="-122"/>
                 <a:cs typeface="Calibri" pitchFamily="34" charset="-120"/>
               </a:rPr>
-              <a:t>127</a:t>
+              <a:t>128</a:t>
             </a:r>
             <a:endParaRPr lang="en-US" sz="1300" dirty="0"/>
           </a:p>
@@ -23058,7 +22703,7 @@
                 <a:ea typeface="Calibri" pitchFamily="34" charset="-122"/>
                 <a:cs typeface="Calibri" pitchFamily="34" charset="-120"/>
               </a:rPr>
-              <a:t>36</a:t>
+              <a:t>37</a:t>
             </a:r>
             <a:endParaRPr lang="en-US" sz="1300" dirty="0"/>
           </a:p>
@@ -23097,7 +22742,7 @@
                 <a:ea typeface="Calibri" pitchFamily="34" charset="-122"/>
                 <a:cs typeface="Calibri" pitchFamily="34" charset="-120"/>
               </a:rPr>
-              <a:t>77,9%</a:t>
+              <a:t>77,6%</a:t>
             </a:r>
             <a:endParaRPr lang="en-US" sz="1300" dirty="0"/>
           </a:p>
@@ -23175,7 +22820,7 @@
                 <a:ea typeface="Calibri" pitchFamily="34" charset="-122"/>
                 <a:cs typeface="Calibri" pitchFamily="34" charset="-120"/>
               </a:rPr>
-              <a:t>70</a:t>
+              <a:t>72</a:t>
             </a:r>
             <a:endParaRPr lang="en-US" sz="1300" dirty="0"/>
           </a:p>
@@ -23948,7 +23593,7 @@
                 <a:ea typeface="Calibri" pitchFamily="34" charset="-122"/>
                 <a:cs typeface="Calibri" pitchFamily="34" charset="-120"/>
               </a:rPr>
-              <a:t>485</a:t>
+              <a:t>488</a:t>
             </a:r>
             <a:endParaRPr lang="en-US" sz="1300" dirty="0"/>
           </a:p>
@@ -23987,7 +23632,7 @@
                 <a:ea typeface="Calibri" pitchFamily="34" charset="-122"/>
                 <a:cs typeface="Calibri" pitchFamily="34" charset="-120"/>
               </a:rPr>
-              <a:t>432</a:t>
+              <a:t>435</a:t>
             </a:r>
             <a:endParaRPr lang="en-US" sz="1300" dirty="0"/>
           </a:p>
@@ -24143,7 +23788,7 @@
                 <a:ea typeface="Calibri" pitchFamily="34" charset="-122"/>
                 <a:cs typeface="Calibri" pitchFamily="34" charset="-120"/>
               </a:rPr>
-              <a:t>277</a:t>
+              <a:t>280</a:t>
             </a:r>
             <a:endParaRPr lang="en-US" sz="1300" dirty="0"/>
           </a:p>
@@ -24260,7 +23905,7 @@
                 <a:ea typeface="Calibri" pitchFamily="34" charset="-122"/>
                 <a:cs typeface="Calibri" pitchFamily="34" charset="-120"/>
               </a:rPr>
-              <a:t>Mediana de cierre global 30 días · el hallazgo más lento tomó 389 días · 78 hallazgos sin especialidad declarada.</a:t>
+              <a:t>Mediana de cierre global 30 días · el hallazgo más lento tomó 389 días · 79 hallazgos sin especialidad declarada.</a:t>
             </a:r>
             <a:endParaRPr lang="en-US" sz="950" dirty="0"/>
           </a:p>
@@ -24299,7 +23944,7 @@
                 <a:ea typeface="Calibri" pitchFamily="34" charset="-122"/>
                 <a:cs typeface="Calibri" pitchFamily="34" charset="-120"/>
               </a:rPr>
-              <a:t>Fuente: b73c9c4f-Data_NCR_2.xlsx — hoja «Observaciones» · Corte 03-08-2026 · 493 registros desde 10-02-2023</a:t>
+              <a:t>Fuente: 5f2decc2-Data_NCR10082026.xlsx — hoja «Observaciones» · Corte 10-08-2026 · 496 registros desde 10-02-2023</a:t>
             </a:r>
             <a:endParaRPr lang="en-US" sz="850" dirty="0"/>
           </a:p>
@@ -24550,7 +24195,7 @@
                 <a:ea typeface="Calibri" pitchFamily="34" charset="-122"/>
                 <a:cs typeface="Calibri" pitchFamily="34" charset="-120"/>
               </a:rPr>
-              <a:t>Entre el 27-07-2026 y el 02-08-2026 se levantaron 3 hallazgos: 0 internas · 3 del cliente. Todos siguen abiertos.</a:t>
+              <a:t>Entre el 03-08-2026 y el 09-08-2026 se levantó 1 hallazgo: 0 internas · 1 del cliente. 0 siguen abiertos.</a:t>
             </a:r>
             <a:endParaRPr lang="en-US" sz="1350" dirty="0"/>
           </a:p>
@@ -24705,7 +24350,7 @@
                 <a:ea typeface="Calibri" pitchFamily="34" charset="-122"/>
                 <a:cs typeface="Calibri" pitchFamily="34" charset="-120"/>
               </a:rPr>
-              <a:t>MECÁNICA 1  ·  OO.CC 1  ·  CALIDAD 1</a:t>
+              <a:t>PIPING 1</a:t>
             </a:r>
             <a:endParaRPr lang="en-US" sz="1100" dirty="0"/>
           </a:p>
@@ -24783,7 +24428,7 @@
                 <a:ea typeface="Calibri" pitchFamily="34" charset="-122"/>
                 <a:cs typeface="Calibri" pitchFamily="34" charset="-120"/>
               </a:rPr>
-              <a:t>Talabre 2  ·  Desaladora 1</a:t>
+              <a:t>Talabre 1</a:t>
             </a:r>
             <a:endParaRPr lang="en-US" sz="1100" dirty="0"/>
           </a:p>
@@ -24861,7 +24506,7 @@
                 <a:ea typeface="Calibri" pitchFamily="34" charset="-122"/>
                 <a:cs typeface="Calibri" pitchFamily="34" charset="-120"/>
               </a:rPr>
-              <a:t>Externa · Cliente 3</a:t>
+              <a:t>Externa · Cliente 1</a:t>
             </a:r>
             <a:endParaRPr lang="en-US" sz="1100" dirty="0"/>
           </a:p>
@@ -24939,7 +24584,7 @@
                 <a:ea typeface="Calibri" pitchFamily="34" charset="-122"/>
                 <a:cs typeface="Calibri" pitchFamily="34" charset="-120"/>
               </a:rPr>
-              <a:t>No Conformidad 2  ·  Producto No Conforme 1</a:t>
+              <a:t>Producto No Conforme 1</a:t>
             </a:r>
             <a:endParaRPr lang="en-US" sz="1100" dirty="0"/>
           </a:p>
@@ -25391,7 +25036,7 @@
                 <a:ea typeface="Calibri" pitchFamily="34" charset="-122"/>
                 <a:cs typeface="Calibri" pitchFamily="34" charset="-120"/>
               </a:rPr>
-              <a:t>27-07-2026</a:t>
+              <a:t>05-08-2026</a:t>
             </a:r>
             <a:endParaRPr lang="en-US" sz="1050" dirty="0"/>
           </a:p>
@@ -25430,7 +25075,7 @@
                 <a:ea typeface="Calibri" pitchFamily="34" charset="-122"/>
                 <a:cs typeface="Calibri" pitchFamily="34" charset="-120"/>
               </a:rPr>
-              <a:t>Desaladora</a:t>
+              <a:t>Talabre</a:t>
             </a:r>
             <a:endParaRPr lang="en-US" sz="1050" dirty="0"/>
           </a:p>
@@ -25469,7 +25114,7 @@
                 <a:ea typeface="Calibri" pitchFamily="34" charset="-122"/>
                 <a:cs typeface="Calibri" pitchFamily="34" charset="-120"/>
               </a:rPr>
-              <a:t>95 · NCR-0535</a:t>
+              <a:t>242 · PNC N°183</a:t>
             </a:r>
             <a:endParaRPr lang="en-US" sz="1050" dirty="0"/>
           </a:p>
@@ -25508,7 +25153,7 @@
                 <a:ea typeface="Calibri" pitchFamily="34" charset="-122"/>
                 <a:cs typeface="Calibri" pitchFamily="34" charset="-120"/>
               </a:rPr>
-              <a:t>No Conformidad</a:t>
+              <a:t>Producto No Confor…</a:t>
             </a:r>
             <a:endParaRPr lang="en-US" sz="1050" dirty="0"/>
           </a:p>
@@ -25586,7 +25231,7 @@
                 <a:ea typeface="Calibri" pitchFamily="34" charset="-122"/>
                 <a:cs typeface="Calibri" pitchFamily="34" charset="-120"/>
               </a:rPr>
-              <a:t>MECÁNICA</a:t>
+              <a:t>PIPING</a:t>
             </a:r>
             <a:endParaRPr lang="en-US" sz="1050" dirty="0"/>
           </a:p>
@@ -25625,7 +25270,7 @@
                 <a:ea typeface="Calibri" pitchFamily="34" charset="-122"/>
                 <a:cs typeface="Calibri" pitchFamily="34" charset="-120"/>
               </a:rPr>
-              <a:t>Wilson Jara</a:t>
+              <a:t>Oscar Nahuel P.</a:t>
             </a:r>
             <a:endParaRPr lang="en-US" sz="1050" dirty="0"/>
           </a:p>
@@ -25658,13 +25303,13 @@
             <a:r>
               <a:rPr lang="en-US" sz="1050" dirty="0">
                 <a:solidFill>
-                  <a:srgbClr val="C0392B"/>
-                </a:solidFill>
-                <a:latin typeface="Calibri" pitchFamily="34" charset="0"/>
-                <a:ea typeface="Calibri" pitchFamily="34" charset="-122"/>
-                <a:cs typeface="Calibri" pitchFamily="34" charset="-120"/>
-              </a:rPr>
-              <a:t>Iniciado</a:t>
+                  <a:srgbClr val="1F7A44"/>
+                </a:solidFill>
+                <a:latin typeface="Calibri" pitchFamily="34" charset="0"/>
+                <a:ea typeface="Calibri" pitchFamily="34" charset="-122"/>
+                <a:cs typeface="Calibri" pitchFamily="34" charset="-120"/>
+              </a:rPr>
+              <a:t>Cerrado</a:t>
             </a:r>
             <a:endParaRPr lang="en-US" sz="1050" dirty="0"/>
           </a:p>
@@ -25703,7 +25348,7 @@
                 <a:ea typeface="Calibri" pitchFamily="34" charset="-122"/>
                 <a:cs typeface="Calibri" pitchFamily="34" charset="-120"/>
               </a:rPr>
-              <a:t>Verificación de Preservación</a:t>
+              <a:t>Línea 3716D-RW-36"-CI-0408-…</a:t>
             </a:r>
             <a:endParaRPr lang="en-US" sz="1000" dirty="0"/>
           </a:p>
@@ -25734,775 +25379,7 @@
       </p:sp>
       <p:sp>
         <p:nvSpPr>
-          <p:cNvPr id="38" name="Shape 34"/>
-          <p:cNvSpPr/>
-          <p:nvPr/>
-        </p:nvSpPr>
-        <p:spPr>
-          <a:xfrm>
-            <a:off x="457200" y="4709160"/>
-            <a:ext cx="11292840" cy="329184"/>
-          </a:xfrm>
-          <a:prstGeom prst="rect">
-            <a:avLst/>
-          </a:prstGeom>
-          <a:solidFill>
-            <a:srgbClr val="FFFFFF"/>
-          </a:solidFill>
-          <a:ln/>
-        </p:spPr>
-      </p:sp>
-      <p:sp>
-        <p:nvSpPr>
-          <p:cNvPr id="39" name="Text 35"/>
-          <p:cNvSpPr/>
-          <p:nvPr/>
-        </p:nvSpPr>
-        <p:spPr>
-          <a:xfrm>
-            <a:off x="502920" y="4754880"/>
-            <a:ext cx="822960" cy="237744"/>
-          </a:xfrm>
-          <a:prstGeom prst="rect">
-            <a:avLst/>
-          </a:prstGeom>
-          <a:noFill/>
-          <a:ln/>
-        </p:spPr>
-        <p:txBody>
-          <a:bodyPr wrap="square" lIns="0" tIns="0" rIns="0" bIns="0" rtlCol="0" anchor="ctr"/>
-          <a:lstStyle/>
-          <a:p>
-            <a:pPr algn="l" indent="0" marL="0">
-              <a:buNone/>
-            </a:pPr>
-            <a:r>
-              <a:rPr lang="en-US" sz="1050" dirty="0">
-                <a:solidFill>
-                  <a:srgbClr val="1A2433"/>
-                </a:solidFill>
-                <a:latin typeface="Calibri" pitchFamily="34" charset="0"/>
-                <a:ea typeface="Calibri" pitchFamily="34" charset="-122"/>
-                <a:cs typeface="Calibri" pitchFamily="34" charset="-120"/>
-              </a:rPr>
-              <a:t>27-07-2026</a:t>
-            </a:r>
-            <a:endParaRPr lang="en-US" sz="1050" dirty="0"/>
-          </a:p>
-        </p:txBody>
-      </p:sp>
-      <p:sp>
-        <p:nvSpPr>
-          <p:cNvPr id="40" name="Text 36"/>
-          <p:cNvSpPr/>
-          <p:nvPr/>
-        </p:nvSpPr>
-        <p:spPr>
-          <a:xfrm>
-            <a:off x="1371600" y="4754880"/>
-            <a:ext cx="1051560" cy="237744"/>
-          </a:xfrm>
-          <a:prstGeom prst="rect">
-            <a:avLst/>
-          </a:prstGeom>
-          <a:noFill/>
-          <a:ln/>
-        </p:spPr>
-        <p:txBody>
-          <a:bodyPr wrap="square" lIns="0" tIns="0" rIns="0" bIns="0" rtlCol="0" anchor="ctr"/>
-          <a:lstStyle/>
-          <a:p>
-            <a:pPr algn="l" indent="0" marL="0">
-              <a:buNone/>
-            </a:pPr>
-            <a:r>
-              <a:rPr lang="en-US" sz="1050" dirty="0">
-                <a:solidFill>
-                  <a:srgbClr val="1A2433"/>
-                </a:solidFill>
-                <a:latin typeface="Calibri" pitchFamily="34" charset="0"/>
-                <a:ea typeface="Calibri" pitchFamily="34" charset="-122"/>
-                <a:cs typeface="Calibri" pitchFamily="34" charset="-120"/>
-              </a:rPr>
-              <a:t>Talabre</a:t>
-            </a:r>
-            <a:endParaRPr lang="en-US" sz="1050" dirty="0"/>
-          </a:p>
-        </p:txBody>
-      </p:sp>
-      <p:sp>
-        <p:nvSpPr>
-          <p:cNvPr id="41" name="Text 37"/>
-          <p:cNvSpPr/>
-          <p:nvPr/>
-        </p:nvSpPr>
-        <p:spPr>
-          <a:xfrm>
-            <a:off x="2468880" y="4754880"/>
-            <a:ext cx="1051560" cy="237744"/>
-          </a:xfrm>
-          <a:prstGeom prst="rect">
-            <a:avLst/>
-          </a:prstGeom>
-          <a:noFill/>
-          <a:ln/>
-        </p:spPr>
-        <p:txBody>
-          <a:bodyPr wrap="square" lIns="0" tIns="0" rIns="0" bIns="0" rtlCol="0" anchor="ctr"/>
-          <a:lstStyle/>
-          <a:p>
-            <a:pPr algn="l" indent="0" marL="0">
-              <a:buNone/>
-            </a:pPr>
-            <a:r>
-              <a:rPr lang="en-US" sz="1050" dirty="0">
-                <a:solidFill>
-                  <a:srgbClr val="1A2433"/>
-                </a:solidFill>
-                <a:latin typeface="Calibri" pitchFamily="34" charset="0"/>
-                <a:ea typeface="Calibri" pitchFamily="34" charset="-122"/>
-                <a:cs typeface="Calibri" pitchFamily="34" charset="-120"/>
-              </a:rPr>
-              <a:t>240 · PNC N°182</a:t>
-            </a:r>
-            <a:endParaRPr lang="en-US" sz="1050" dirty="0"/>
-          </a:p>
-        </p:txBody>
-      </p:sp>
-      <p:sp>
-        <p:nvSpPr>
-          <p:cNvPr id="42" name="Text 38"/>
-          <p:cNvSpPr/>
-          <p:nvPr/>
-        </p:nvSpPr>
-        <p:spPr>
-          <a:xfrm>
-            <a:off x="3566160" y="4754880"/>
-            <a:ext cx="1371600" cy="237744"/>
-          </a:xfrm>
-          <a:prstGeom prst="rect">
-            <a:avLst/>
-          </a:prstGeom>
-          <a:noFill/>
-          <a:ln/>
-        </p:spPr>
-        <p:txBody>
-          <a:bodyPr wrap="square" lIns="0" tIns="0" rIns="0" bIns="0" rtlCol="0" anchor="ctr"/>
-          <a:lstStyle/>
-          <a:p>
-            <a:pPr algn="l" indent="0" marL="0">
-              <a:buNone/>
-            </a:pPr>
-            <a:r>
-              <a:rPr lang="en-US" sz="1050" dirty="0">
-                <a:solidFill>
-                  <a:srgbClr val="1A2433"/>
-                </a:solidFill>
-                <a:latin typeface="Calibri" pitchFamily="34" charset="0"/>
-                <a:ea typeface="Calibri" pitchFamily="34" charset="-122"/>
-                <a:cs typeface="Calibri" pitchFamily="34" charset="-120"/>
-              </a:rPr>
-              <a:t>Producto No Confor…</a:t>
-            </a:r>
-            <a:endParaRPr lang="en-US" sz="1050" dirty="0"/>
-          </a:p>
-        </p:txBody>
-      </p:sp>
-      <p:sp>
-        <p:nvSpPr>
-          <p:cNvPr id="43" name="Text 39"/>
-          <p:cNvSpPr/>
-          <p:nvPr/>
-        </p:nvSpPr>
-        <p:spPr>
-          <a:xfrm>
-            <a:off x="4983480" y="4754880"/>
-            <a:ext cx="1417320" cy="237744"/>
-          </a:xfrm>
-          <a:prstGeom prst="rect">
-            <a:avLst/>
-          </a:prstGeom>
-          <a:noFill/>
-          <a:ln/>
-        </p:spPr>
-        <p:txBody>
-          <a:bodyPr wrap="square" lIns="0" tIns="0" rIns="0" bIns="0" rtlCol="0" anchor="ctr"/>
-          <a:lstStyle/>
-          <a:p>
-            <a:pPr algn="l" indent="0" marL="0">
-              <a:buNone/>
-            </a:pPr>
-            <a:r>
-              <a:rPr lang="en-US" sz="1050" b="1" dirty="0">
-                <a:solidFill>
-                  <a:srgbClr val="C87A32"/>
-                </a:solidFill>
-                <a:latin typeface="Calibri" pitchFamily="34" charset="0"/>
-                <a:ea typeface="Calibri" pitchFamily="34" charset="-122"/>
-                <a:cs typeface="Calibri" pitchFamily="34" charset="-120"/>
-              </a:rPr>
-              <a:t>Externa · Cliente</a:t>
-            </a:r>
-            <a:endParaRPr lang="en-US" sz="1050" dirty="0"/>
-          </a:p>
-        </p:txBody>
-      </p:sp>
-      <p:sp>
-        <p:nvSpPr>
-          <p:cNvPr id="44" name="Text 40"/>
-          <p:cNvSpPr/>
-          <p:nvPr/>
-        </p:nvSpPr>
-        <p:spPr>
-          <a:xfrm>
-            <a:off x="6446520" y="4754880"/>
-            <a:ext cx="1097280" cy="237744"/>
-          </a:xfrm>
-          <a:prstGeom prst="rect">
-            <a:avLst/>
-          </a:prstGeom>
-          <a:noFill/>
-          <a:ln/>
-        </p:spPr>
-        <p:txBody>
-          <a:bodyPr wrap="square" lIns="0" tIns="0" rIns="0" bIns="0" rtlCol="0" anchor="ctr"/>
-          <a:lstStyle/>
-          <a:p>
-            <a:pPr algn="l" indent="0" marL="0">
-              <a:buNone/>
-            </a:pPr>
-            <a:r>
-              <a:rPr lang="en-US" sz="1050" dirty="0">
-                <a:solidFill>
-                  <a:srgbClr val="1A2433"/>
-                </a:solidFill>
-                <a:latin typeface="Calibri" pitchFamily="34" charset="0"/>
-                <a:ea typeface="Calibri" pitchFamily="34" charset="-122"/>
-                <a:cs typeface="Calibri" pitchFamily="34" charset="-120"/>
-              </a:rPr>
-              <a:t>OO.CC</a:t>
-            </a:r>
-            <a:endParaRPr lang="en-US" sz="1050" dirty="0"/>
-          </a:p>
-        </p:txBody>
-      </p:sp>
-      <p:sp>
-        <p:nvSpPr>
-          <p:cNvPr id="45" name="Text 41"/>
-          <p:cNvSpPr/>
-          <p:nvPr/>
-        </p:nvSpPr>
-        <p:spPr>
-          <a:xfrm>
-            <a:off x="7589520" y="4754880"/>
-            <a:ext cx="1371600" cy="237744"/>
-          </a:xfrm>
-          <a:prstGeom prst="rect">
-            <a:avLst/>
-          </a:prstGeom>
-          <a:noFill/>
-          <a:ln/>
-        </p:spPr>
-        <p:txBody>
-          <a:bodyPr wrap="square" lIns="0" tIns="0" rIns="0" bIns="0" rtlCol="0" anchor="ctr"/>
-          <a:lstStyle/>
-          <a:p>
-            <a:pPr algn="l" indent="0" marL="0">
-              <a:buNone/>
-            </a:pPr>
-            <a:r>
-              <a:rPr lang="en-US" sz="1050" dirty="0">
-                <a:solidFill>
-                  <a:srgbClr val="1A2433"/>
-                </a:solidFill>
-                <a:latin typeface="Calibri" pitchFamily="34" charset="0"/>
-                <a:ea typeface="Calibri" pitchFamily="34" charset="-122"/>
-                <a:cs typeface="Calibri" pitchFamily="34" charset="-120"/>
-              </a:rPr>
-              <a:t>Sebastián Ramos</a:t>
-            </a:r>
-            <a:endParaRPr lang="en-US" sz="1050" dirty="0"/>
-          </a:p>
-        </p:txBody>
-      </p:sp>
-      <p:sp>
-        <p:nvSpPr>
-          <p:cNvPr id="46" name="Text 42"/>
-          <p:cNvSpPr/>
-          <p:nvPr/>
-        </p:nvSpPr>
-        <p:spPr>
-          <a:xfrm>
-            <a:off x="9006840" y="4754880"/>
-            <a:ext cx="868680" cy="237744"/>
-          </a:xfrm>
-          <a:prstGeom prst="rect">
-            <a:avLst/>
-          </a:prstGeom>
-          <a:noFill/>
-          <a:ln/>
-        </p:spPr>
-        <p:txBody>
-          <a:bodyPr wrap="square" lIns="0" tIns="0" rIns="0" bIns="0" rtlCol="0" anchor="ctr"/>
-          <a:lstStyle/>
-          <a:p>
-            <a:pPr algn="l" indent="0" marL="0">
-              <a:buNone/>
-            </a:pPr>
-            <a:r>
-              <a:rPr lang="en-US" sz="1050" dirty="0">
-                <a:solidFill>
-                  <a:srgbClr val="C0392B"/>
-                </a:solidFill>
-                <a:latin typeface="Calibri" pitchFamily="34" charset="0"/>
-                <a:ea typeface="Calibri" pitchFamily="34" charset="-122"/>
-                <a:cs typeface="Calibri" pitchFamily="34" charset="-120"/>
-              </a:rPr>
-              <a:t>Iniciado</a:t>
-            </a:r>
-            <a:endParaRPr lang="en-US" sz="1050" dirty="0"/>
-          </a:p>
-        </p:txBody>
-      </p:sp>
-      <p:sp>
-        <p:nvSpPr>
-          <p:cNvPr id="47" name="Text 43"/>
-          <p:cNvSpPr/>
-          <p:nvPr/>
-        </p:nvSpPr>
-        <p:spPr>
-          <a:xfrm>
-            <a:off x="9921240" y="4754880"/>
-            <a:ext cx="1828800" cy="237744"/>
-          </a:xfrm>
-          <a:prstGeom prst="rect">
-            <a:avLst/>
-          </a:prstGeom>
-          <a:noFill/>
-          <a:ln/>
-        </p:spPr>
-        <p:txBody>
-          <a:bodyPr wrap="square" lIns="0" tIns="0" rIns="0" bIns="0" rtlCol="0" anchor="ctr"/>
-          <a:lstStyle/>
-          <a:p>
-            <a:pPr algn="l" indent="0" marL="0">
-              <a:buNone/>
-            </a:pPr>
-            <a:r>
-              <a:rPr lang="en-US" sz="1000" dirty="0">
-                <a:solidFill>
-                  <a:srgbClr val="1A2433"/>
-                </a:solidFill>
-                <a:latin typeface="Calibri" pitchFamily="34" charset="0"/>
-                <a:ea typeface="Calibri" pitchFamily="34" charset="-122"/>
-                <a:cs typeface="Calibri" pitchFamily="34" charset="-120"/>
-              </a:rPr>
-              <a:t>Soporte de Línea 405N, pern…</a:t>
-            </a:r>
-            <a:endParaRPr lang="en-US" sz="1000" dirty="0"/>
-          </a:p>
-        </p:txBody>
-      </p:sp>
-      <p:sp>
-        <p:nvSpPr>
-          <p:cNvPr id="48" name="Shape 44"/>
-          <p:cNvSpPr/>
-          <p:nvPr/>
-        </p:nvSpPr>
-        <p:spPr>
-          <a:xfrm>
-            <a:off x="502920" y="5029200"/>
-            <a:ext cx="11247120" cy="0"/>
-          </a:xfrm>
-          <a:prstGeom prst="line">
-            <a:avLst/>
-          </a:prstGeom>
-          <a:noFill/>
-          <a:ln w="9525">
-            <a:solidFill>
-              <a:srgbClr val="D9DFE6"/>
-            </a:solidFill>
-            <a:prstDash val="solid"/>
-          </a:ln>
-        </p:spPr>
-      </p:sp>
-      <p:sp>
-        <p:nvSpPr>
-          <p:cNvPr id="49" name="Text 45"/>
-          <p:cNvSpPr/>
-          <p:nvPr/>
-        </p:nvSpPr>
-        <p:spPr>
-          <a:xfrm>
-            <a:off x="502920" y="5084064"/>
-            <a:ext cx="822960" cy="237744"/>
-          </a:xfrm>
-          <a:prstGeom prst="rect">
-            <a:avLst/>
-          </a:prstGeom>
-          <a:noFill/>
-          <a:ln/>
-        </p:spPr>
-        <p:txBody>
-          <a:bodyPr wrap="square" lIns="0" tIns="0" rIns="0" bIns="0" rtlCol="0" anchor="ctr"/>
-          <a:lstStyle/>
-          <a:p>
-            <a:pPr algn="l" indent="0" marL="0">
-              <a:buNone/>
-            </a:pPr>
-            <a:r>
-              <a:rPr lang="en-US" sz="1050" dirty="0">
-                <a:solidFill>
-                  <a:srgbClr val="1A2433"/>
-                </a:solidFill>
-                <a:latin typeface="Calibri" pitchFamily="34" charset="0"/>
-                <a:ea typeface="Calibri" pitchFamily="34" charset="-122"/>
-                <a:cs typeface="Calibri" pitchFamily="34" charset="-120"/>
-              </a:rPr>
-              <a:t>28-07-2026</a:t>
-            </a:r>
-            <a:endParaRPr lang="en-US" sz="1050" dirty="0"/>
-          </a:p>
-        </p:txBody>
-      </p:sp>
-      <p:sp>
-        <p:nvSpPr>
-          <p:cNvPr id="50" name="Text 46"/>
-          <p:cNvSpPr/>
-          <p:nvPr/>
-        </p:nvSpPr>
-        <p:spPr>
-          <a:xfrm>
-            <a:off x="1371600" y="5084064"/>
-            <a:ext cx="1051560" cy="237744"/>
-          </a:xfrm>
-          <a:prstGeom prst="rect">
-            <a:avLst/>
-          </a:prstGeom>
-          <a:noFill/>
-          <a:ln/>
-        </p:spPr>
-        <p:txBody>
-          <a:bodyPr wrap="square" lIns="0" tIns="0" rIns="0" bIns="0" rtlCol="0" anchor="ctr"/>
-          <a:lstStyle/>
-          <a:p>
-            <a:pPr algn="l" indent="0" marL="0">
-              <a:buNone/>
-            </a:pPr>
-            <a:r>
-              <a:rPr lang="en-US" sz="1050" dirty="0">
-                <a:solidFill>
-                  <a:srgbClr val="1A2433"/>
-                </a:solidFill>
-                <a:latin typeface="Calibri" pitchFamily="34" charset="0"/>
-                <a:ea typeface="Calibri" pitchFamily="34" charset="-122"/>
-                <a:cs typeface="Calibri" pitchFamily="34" charset="-120"/>
-              </a:rPr>
-              <a:t>Talabre</a:t>
-            </a:r>
-            <a:endParaRPr lang="en-US" sz="1050" dirty="0"/>
-          </a:p>
-        </p:txBody>
-      </p:sp>
-      <p:sp>
-        <p:nvSpPr>
-          <p:cNvPr id="51" name="Text 47"/>
-          <p:cNvSpPr/>
-          <p:nvPr/>
-        </p:nvSpPr>
-        <p:spPr>
-          <a:xfrm>
-            <a:off x="2468880" y="5084064"/>
-            <a:ext cx="1051560" cy="237744"/>
-          </a:xfrm>
-          <a:prstGeom prst="rect">
-            <a:avLst/>
-          </a:prstGeom>
-          <a:noFill/>
-          <a:ln/>
-        </p:spPr>
-        <p:txBody>
-          <a:bodyPr wrap="square" lIns="0" tIns="0" rIns="0" bIns="0" rtlCol="0" anchor="ctr"/>
-          <a:lstStyle/>
-          <a:p>
-            <a:pPr algn="l" indent="0" marL="0">
-              <a:buNone/>
-            </a:pPr>
-            <a:r>
-              <a:rPr lang="en-US" sz="1050" dirty="0">
-                <a:solidFill>
-                  <a:srgbClr val="1A2433"/>
-                </a:solidFill>
-                <a:latin typeface="Calibri" pitchFamily="34" charset="0"/>
-                <a:ea typeface="Calibri" pitchFamily="34" charset="-122"/>
-                <a:cs typeface="Calibri" pitchFamily="34" charset="-120"/>
-              </a:rPr>
-              <a:t>241 · RNC N°449</a:t>
-            </a:r>
-            <a:endParaRPr lang="en-US" sz="1050" dirty="0"/>
-          </a:p>
-        </p:txBody>
-      </p:sp>
-      <p:sp>
-        <p:nvSpPr>
-          <p:cNvPr id="52" name="Text 48"/>
-          <p:cNvSpPr/>
-          <p:nvPr/>
-        </p:nvSpPr>
-        <p:spPr>
-          <a:xfrm>
-            <a:off x="3566160" y="5084064"/>
-            <a:ext cx="1371600" cy="237744"/>
-          </a:xfrm>
-          <a:prstGeom prst="rect">
-            <a:avLst/>
-          </a:prstGeom>
-          <a:noFill/>
-          <a:ln/>
-        </p:spPr>
-        <p:txBody>
-          <a:bodyPr wrap="square" lIns="0" tIns="0" rIns="0" bIns="0" rtlCol="0" anchor="ctr"/>
-          <a:lstStyle/>
-          <a:p>
-            <a:pPr algn="l" indent="0" marL="0">
-              <a:buNone/>
-            </a:pPr>
-            <a:r>
-              <a:rPr lang="en-US" sz="1050" dirty="0">
-                <a:solidFill>
-                  <a:srgbClr val="1A2433"/>
-                </a:solidFill>
-                <a:latin typeface="Calibri" pitchFamily="34" charset="0"/>
-                <a:ea typeface="Calibri" pitchFamily="34" charset="-122"/>
-                <a:cs typeface="Calibri" pitchFamily="34" charset="-120"/>
-              </a:rPr>
-              <a:t>No Conformidad</a:t>
-            </a:r>
-            <a:endParaRPr lang="en-US" sz="1050" dirty="0"/>
-          </a:p>
-        </p:txBody>
-      </p:sp>
-      <p:sp>
-        <p:nvSpPr>
-          <p:cNvPr id="53" name="Text 49"/>
-          <p:cNvSpPr/>
-          <p:nvPr/>
-        </p:nvSpPr>
-        <p:spPr>
-          <a:xfrm>
-            <a:off x="4983480" y="5084064"/>
-            <a:ext cx="1417320" cy="237744"/>
-          </a:xfrm>
-          <a:prstGeom prst="rect">
-            <a:avLst/>
-          </a:prstGeom>
-          <a:noFill/>
-          <a:ln/>
-        </p:spPr>
-        <p:txBody>
-          <a:bodyPr wrap="square" lIns="0" tIns="0" rIns="0" bIns="0" rtlCol="0" anchor="ctr"/>
-          <a:lstStyle/>
-          <a:p>
-            <a:pPr algn="l" indent="0" marL="0">
-              <a:buNone/>
-            </a:pPr>
-            <a:r>
-              <a:rPr lang="en-US" sz="1050" b="1" dirty="0">
-                <a:solidFill>
-                  <a:srgbClr val="C87A32"/>
-                </a:solidFill>
-                <a:latin typeface="Calibri" pitchFamily="34" charset="0"/>
-                <a:ea typeface="Calibri" pitchFamily="34" charset="-122"/>
-                <a:cs typeface="Calibri" pitchFamily="34" charset="-120"/>
-              </a:rPr>
-              <a:t>Externa · Cliente</a:t>
-            </a:r>
-            <a:endParaRPr lang="en-US" sz="1050" dirty="0"/>
-          </a:p>
-        </p:txBody>
-      </p:sp>
-      <p:sp>
-        <p:nvSpPr>
-          <p:cNvPr id="54" name="Text 50"/>
-          <p:cNvSpPr/>
-          <p:nvPr/>
-        </p:nvSpPr>
-        <p:spPr>
-          <a:xfrm>
-            <a:off x="6446520" y="5084064"/>
-            <a:ext cx="1097280" cy="237744"/>
-          </a:xfrm>
-          <a:prstGeom prst="rect">
-            <a:avLst/>
-          </a:prstGeom>
-          <a:noFill/>
-          <a:ln/>
-        </p:spPr>
-        <p:txBody>
-          <a:bodyPr wrap="square" lIns="0" tIns="0" rIns="0" bIns="0" rtlCol="0" anchor="ctr"/>
-          <a:lstStyle/>
-          <a:p>
-            <a:pPr algn="l" indent="0" marL="0">
-              <a:buNone/>
-            </a:pPr>
-            <a:r>
-              <a:rPr lang="en-US" sz="1050" dirty="0">
-                <a:solidFill>
-                  <a:srgbClr val="1A2433"/>
-                </a:solidFill>
-                <a:latin typeface="Calibri" pitchFamily="34" charset="0"/>
-                <a:ea typeface="Calibri" pitchFamily="34" charset="-122"/>
-                <a:cs typeface="Calibri" pitchFamily="34" charset="-120"/>
-              </a:rPr>
-              <a:t>CALIDAD</a:t>
-            </a:r>
-            <a:endParaRPr lang="en-US" sz="1050" dirty="0"/>
-          </a:p>
-        </p:txBody>
-      </p:sp>
-      <p:sp>
-        <p:nvSpPr>
-          <p:cNvPr id="55" name="Text 51"/>
-          <p:cNvSpPr/>
-          <p:nvPr/>
-        </p:nvSpPr>
-        <p:spPr>
-          <a:xfrm>
-            <a:off x="7589520" y="5084064"/>
-            <a:ext cx="1371600" cy="237744"/>
-          </a:xfrm>
-          <a:prstGeom prst="rect">
-            <a:avLst/>
-          </a:prstGeom>
-          <a:noFill/>
-          <a:ln/>
-        </p:spPr>
-        <p:txBody>
-          <a:bodyPr wrap="square" lIns="0" tIns="0" rIns="0" bIns="0" rtlCol="0" anchor="ctr"/>
-          <a:lstStyle/>
-          <a:p>
-            <a:pPr algn="l" indent="0" marL="0">
-              <a:buNone/>
-            </a:pPr>
-            <a:r>
-              <a:rPr lang="en-US" sz="1050" dirty="0">
-                <a:solidFill>
-                  <a:srgbClr val="1A2433"/>
-                </a:solidFill>
-                <a:latin typeface="Calibri" pitchFamily="34" charset="0"/>
-                <a:ea typeface="Calibri" pitchFamily="34" charset="-122"/>
-                <a:cs typeface="Calibri" pitchFamily="34" charset="-120"/>
-              </a:rPr>
-              <a:t>Daniel Ramirez B.</a:t>
-            </a:r>
-            <a:endParaRPr lang="en-US" sz="1050" dirty="0"/>
-          </a:p>
-        </p:txBody>
-      </p:sp>
-      <p:sp>
-        <p:nvSpPr>
-          <p:cNvPr id="56" name="Text 52"/>
-          <p:cNvSpPr/>
-          <p:nvPr/>
-        </p:nvSpPr>
-        <p:spPr>
-          <a:xfrm>
-            <a:off x="9006840" y="5084064"/>
-            <a:ext cx="868680" cy="237744"/>
-          </a:xfrm>
-          <a:prstGeom prst="rect">
-            <a:avLst/>
-          </a:prstGeom>
-          <a:noFill/>
-          <a:ln/>
-        </p:spPr>
-        <p:txBody>
-          <a:bodyPr wrap="square" lIns="0" tIns="0" rIns="0" bIns="0" rtlCol="0" anchor="ctr"/>
-          <a:lstStyle/>
-          <a:p>
-            <a:pPr algn="l" indent="0" marL="0">
-              <a:buNone/>
-            </a:pPr>
-            <a:r>
-              <a:rPr lang="en-US" sz="1050" dirty="0">
-                <a:solidFill>
-                  <a:srgbClr val="C0392B"/>
-                </a:solidFill>
-                <a:latin typeface="Calibri" pitchFamily="34" charset="0"/>
-                <a:ea typeface="Calibri" pitchFamily="34" charset="-122"/>
-                <a:cs typeface="Calibri" pitchFamily="34" charset="-120"/>
-              </a:rPr>
-              <a:t>Iniciado</a:t>
-            </a:r>
-            <a:endParaRPr lang="en-US" sz="1050" dirty="0"/>
-          </a:p>
-        </p:txBody>
-      </p:sp>
-      <p:sp>
-        <p:nvSpPr>
-          <p:cNvPr id="57" name="Text 53"/>
-          <p:cNvSpPr/>
-          <p:nvPr/>
-        </p:nvSpPr>
-        <p:spPr>
-          <a:xfrm>
-            <a:off x="9921240" y="5084064"/>
-            <a:ext cx="1828800" cy="237744"/>
-          </a:xfrm>
-          <a:prstGeom prst="rect">
-            <a:avLst/>
-          </a:prstGeom>
-          <a:noFill/>
-          <a:ln/>
-        </p:spPr>
-        <p:txBody>
-          <a:bodyPr wrap="square" lIns="0" tIns="0" rIns="0" bIns="0" rtlCol="0" anchor="ctr"/>
-          <a:lstStyle/>
-          <a:p>
-            <a:pPr algn="l" indent="0" marL="0">
-              <a:buNone/>
-            </a:pPr>
-            <a:r>
-              <a:rPr lang="en-US" sz="1000" dirty="0">
-                <a:solidFill>
-                  <a:srgbClr val="1A2433"/>
-                </a:solidFill>
-                <a:latin typeface="Calibri" pitchFamily="34" charset="0"/>
-                <a:ea typeface="Calibri" pitchFamily="34" charset="-122"/>
-                <a:cs typeface="Calibri" pitchFamily="34" charset="-120"/>
-              </a:rPr>
-              <a:t>Registros de construcción n…</a:t>
-            </a:r>
-            <a:endParaRPr lang="en-US" sz="1000" dirty="0"/>
-          </a:p>
-        </p:txBody>
-      </p:sp>
-      <p:sp>
-        <p:nvSpPr>
-          <p:cNvPr id="58" name="Shape 54"/>
-          <p:cNvSpPr/>
-          <p:nvPr/>
-        </p:nvSpPr>
-        <p:spPr>
-          <a:xfrm>
-            <a:off x="502920" y="5358384"/>
-            <a:ext cx="11247120" cy="0"/>
-          </a:xfrm>
-          <a:prstGeom prst="line">
-            <a:avLst/>
-          </a:prstGeom>
-          <a:noFill/>
-          <a:ln w="9525">
-            <a:solidFill>
-              <a:srgbClr val="D9DFE6"/>
-            </a:solidFill>
-            <a:prstDash val="solid"/>
-          </a:ln>
-        </p:spPr>
-      </p:sp>
-      <p:sp>
-        <p:nvSpPr>
-          <p:cNvPr id="59" name="Text 55"/>
+          <p:cNvPr id="38" name="Text 34"/>
           <p:cNvSpPr/>
           <p:nvPr/>
         </p:nvSpPr>
@@ -26533,7 +25410,7 @@
                 <a:ea typeface="Calibri" pitchFamily="34" charset="-122"/>
                 <a:cs typeface="Calibri" pitchFamily="34" charset="-120"/>
               </a:rPr>
-              <a:t>Fuente: b73c9c4f-Data_NCR_2.xlsx — hoja «Observaciones» · Corte 03-08-2026 · 493 registros desde 10-02-2023</a:t>
+              <a:t>Fuente: 5f2decc2-Data_NCR10082026.xlsx — hoja «Observaciones» · Corte 10-08-2026 · 496 registros desde 10-02-2023</a:t>
             </a:r>
             <a:endParaRPr lang="en-US" sz="850" dirty="0"/>
           </a:p>
@@ -26541,7 +25418,7 @@
       </p:sp>
       <p:sp>
         <p:nvSpPr>
-          <p:cNvPr id="60" name="Text 56"/>
+          <p:cNvPr id="39" name="Text 35"/>
           <p:cNvSpPr/>
           <p:nvPr/>
         </p:nvSpPr>
@@ -26580,7 +25457,7 @@
       </p:sp>
       <p:sp>
         <p:nvSpPr>
-          <p:cNvPr id="61" name="Text 57"/>
+          <p:cNvPr id="40" name="Text 36"/>
           <p:cNvSpPr/>
           <p:nvPr/>
         </p:nvSpPr>
@@ -26784,7 +25661,7 @@
                 <a:ea typeface="Calibri" pitchFamily="34" charset="-122"/>
                 <a:cs typeface="Calibri" pitchFamily="34" charset="-120"/>
               </a:rPr>
-              <a:t>Interna es autodetección: la levanta Besalco antes que nadie. Externa la levanta el cliente —compromete el contrato— o un subcontrato. Autodetección global: 32,9%.</a:t>
+              <a:t>Interna es autodetección: la levanta Besalco antes que nadie. Externa la levanta el cliente —compromete el contrato— o un subcontrato. Autodetección global: 32,6%.</a:t>
             </a:r>
             <a:endParaRPr lang="en-US" sz="1350" dirty="0"/>
           </a:p>
@@ -27529,7 +26406,7 @@
                 <a:ea typeface="Calibri" pitchFamily="34" charset="-122"/>
                 <a:cs typeface="Calibri" pitchFamily="34" charset="-120"/>
               </a:rPr>
-              <a:t>277</a:t>
+              <a:t>280</a:t>
             </a:r>
             <a:endParaRPr lang="en-US" sz="1050" dirty="0"/>
           </a:p>
@@ -27568,7 +26445,7 @@
                 <a:ea typeface="Calibri" pitchFamily="34" charset="-122"/>
                 <a:cs typeface="Calibri" pitchFamily="34" charset="-120"/>
               </a:rPr>
-              <a:t>229</a:t>
+              <a:t>232</a:t>
             </a:r>
             <a:endParaRPr lang="en-US" sz="1050" dirty="0"/>
           </a:p>
@@ -27607,7 +26484,7 @@
                 <a:ea typeface="Calibri" pitchFamily="34" charset="-122"/>
                 <a:cs typeface="Calibri" pitchFamily="34" charset="-120"/>
               </a:rPr>
-              <a:t>82,7%</a:t>
+              <a:t>82,9%</a:t>
             </a:r>
             <a:endParaRPr lang="en-US" sz="1050" dirty="0"/>
           </a:p>
@@ -27685,7 +26562,7 @@
                 <a:ea typeface="Calibri" pitchFamily="34" charset="-122"/>
                 <a:cs typeface="Calibri" pitchFamily="34" charset="-120"/>
               </a:rPr>
-              <a:t>45</a:t>
+              <a:t>47</a:t>
             </a:r>
             <a:endParaRPr lang="en-US" sz="1050" dirty="0"/>
           </a:p>
@@ -28437,7 +27314,7 @@
                 <a:ea typeface="Calibri" pitchFamily="34" charset="-122"/>
                 <a:cs typeface="Calibri" pitchFamily="34" charset="-120"/>
               </a:rPr>
-              <a:t>493</a:t>
+              <a:t>496</a:t>
             </a:r>
             <a:endParaRPr lang="en-US" sz="1050" dirty="0"/>
           </a:p>
@@ -28476,7 +27353,7 @@
                 <a:ea typeface="Calibri" pitchFamily="34" charset="-122"/>
                 <a:cs typeface="Calibri" pitchFamily="34" charset="-120"/>
               </a:rPr>
-              <a:t>440</a:t>
+              <a:t>443</a:t>
             </a:r>
             <a:endParaRPr lang="en-US" sz="1050" dirty="0"/>
           </a:p>
@@ -28515,7 +27392,7 @@
                 <a:ea typeface="Calibri" pitchFamily="34" charset="-122"/>
                 <a:cs typeface="Calibri" pitchFamily="34" charset="-120"/>
               </a:rPr>
-              <a:t>89,2%</a:t>
+              <a:t>89,3%</a:t>
             </a:r>
             <a:endParaRPr lang="en-US" sz="1050" dirty="0"/>
           </a:p>
@@ -28593,7 +27470,7 @@
                 <a:ea typeface="Calibri" pitchFamily="34" charset="-122"/>
                 <a:cs typeface="Calibri" pitchFamily="34" charset="-120"/>
               </a:rPr>
-              <a:t>50</a:t>
+              <a:t>52</a:t>
             </a:r>
             <a:endParaRPr lang="en-US" sz="1050" dirty="0"/>
           </a:p>
@@ -28849,7 +27726,7 @@
                 <a:ea typeface="Cambria" pitchFamily="34" charset="-122"/>
                 <a:cs typeface="Cambria" pitchFamily="34" charset="-120"/>
               </a:rPr>
-              <a:t>21,7%</a:t>
+              <a:t>21,6%</a:t>
             </a:r>
             <a:endParaRPr lang="en-US" sz="2400" dirty="0"/>
           </a:p>
@@ -28927,7 +27804,7 @@
                 <a:ea typeface="Cambria" pitchFamily="34" charset="-122"/>
                 <a:cs typeface="Cambria" pitchFamily="34" charset="-120"/>
               </a:rPr>
-              <a:t>32,5%</a:t>
+              <a:t>32,1%</a:t>
             </a:r>
             <a:endParaRPr lang="en-US" sz="2400" dirty="0"/>
           </a:p>
@@ -29005,7 +27882,7 @@
                 <a:ea typeface="Calibri" pitchFamily="34" charset="-122"/>
                 <a:cs typeface="Calibri" pitchFamily="34" charset="-120"/>
               </a:rPr>
-              <a:t>Fuente: b73c9c4f-Data_NCR_2.xlsx — hoja «Observaciones» · Corte 03-08-2026 · 493 registros desde 10-02-2023</a:t>
+              <a:t>Fuente: 5f2decc2-Data_NCR10082026.xlsx — hoja «Observaciones» · Corte 10-08-2026 · 496 registros desde 10-02-2023</a:t>
             </a:r>
             <a:endParaRPr lang="en-US" sz="850" dirty="0"/>
           </a:p>
@@ -29256,7 +28133,7 @@
                 <a:ea typeface="Calibri" pitchFamily="34" charset="-122"/>
                 <a:cs typeface="Calibri" pitchFamily="34" charset="-120"/>
               </a:rPr>
-              <a:t>De los 53 hallazgos abiertos, 17 llevan más de 180 días desde que se levantaron y 3 más de un año. La mediana de cierre global es de 30 días.</a:t>
+              <a:t>De los 53 hallazgos abiertos, 19 llevan más de 180 días desde que se levantaron y 4 más de un año. La mediana de cierre global es de 30 días.</a:t>
             </a:r>
             <a:endParaRPr lang="en-US" sz="1350" dirty="0"/>
           </a:p>
@@ -29393,7 +28270,7 @@
                 <a:ea typeface="Calibri" pitchFamily="34" charset="-122"/>
                 <a:cs typeface="Calibri" pitchFamily="34" charset="-120"/>
               </a:rPr>
-              <a:t>Al corte hay 50 hallazgos fuera de plazo de los 53 abiertos.</a:t>
+              <a:t>Al corte hay 52 hallazgos fuera de plazo de los 53 abiertos.</a:t>
             </a:r>
             <a:endParaRPr lang="en-US" sz="1150" dirty="0"/>
           </a:p>
@@ -29806,7 +28683,7 @@
                 <a:ea typeface="Calibri" pitchFamily="34" charset="-122"/>
                 <a:cs typeface="Calibri" pitchFamily="34" charset="-120"/>
               </a:rPr>
-              <a:t>80</a:t>
+              <a:t>81</a:t>
             </a:r>
             <a:endParaRPr lang="en-US" sz="1150" dirty="0"/>
           </a:p>
@@ -29845,7 +28722,7 @@
                 <a:ea typeface="Calibri" pitchFamily="34" charset="-122"/>
                 <a:cs typeface="Calibri" pitchFamily="34" charset="-120"/>
               </a:rPr>
-              <a:t>19 d</a:t>
+              <a:t>18 d</a:t>
             </a:r>
             <a:endParaRPr lang="en-US" sz="1150" dirty="0"/>
           </a:p>
@@ -29923,7 +28800,7 @@
                 <a:ea typeface="Calibri" pitchFamily="34" charset="-122"/>
                 <a:cs typeface="Calibri" pitchFamily="34" charset="-120"/>
               </a:rPr>
-              <a:t>2</a:t>
+              <a:t>1</a:t>
             </a:r>
             <a:endParaRPr lang="en-US" sz="1150" dirty="0"/>
           </a:p>
@@ -30072,7 +28949,7 @@
                 <a:ea typeface="Calibri" pitchFamily="34" charset="-122"/>
                 <a:cs typeface="Calibri" pitchFamily="34" charset="-120"/>
               </a:rPr>
-              <a:t>225</a:t>
+              <a:t>226</a:t>
             </a:r>
             <a:endParaRPr lang="en-US" sz="1150" dirty="0"/>
           </a:p>
@@ -30318,7 +29195,7 @@
                 <a:ea typeface="Calibri" pitchFamily="34" charset="-122"/>
                 <a:cs typeface="Calibri" pitchFamily="34" charset="-120"/>
               </a:rPr>
-              <a:t>127</a:t>
+              <a:t>128</a:t>
             </a:r>
             <a:endParaRPr lang="en-US" sz="1150" dirty="0"/>
           </a:p>
@@ -30357,7 +29234,7 @@
                 <a:ea typeface="Calibri" pitchFamily="34" charset="-122"/>
                 <a:cs typeface="Calibri" pitchFamily="34" charset="-120"/>
               </a:rPr>
-              <a:t>129 d</a:t>
+              <a:t>131 d</a:t>
             </a:r>
             <a:endParaRPr lang="en-US" sz="1150" dirty="0"/>
           </a:p>
@@ -30435,7 +29312,7 @@
                 <a:ea typeface="Calibri" pitchFamily="34" charset="-122"/>
                 <a:cs typeface="Calibri" pitchFamily="34" charset="-120"/>
               </a:rPr>
-              <a:t>36</a:t>
+              <a:t>37</a:t>
             </a:r>
             <a:endParaRPr lang="en-US" sz="1150" dirty="0"/>
           </a:p>
@@ -30813,7 +29690,7 @@
                 <a:ea typeface="Calibri" pitchFamily="34" charset="-122"/>
                 <a:cs typeface="Calibri" pitchFamily="34" charset="-120"/>
               </a:rPr>
-              <a:t>Fuente: b73c9c4f-Data_NCR_2.xlsx — hoja «Observaciones» · Corte 03-08-2026 · 493 registros desde 10-02-2023</a:t>
+              <a:t>Fuente: 5f2decc2-Data_NCR10082026.xlsx — hoja «Observaciones» · Corte 10-08-2026 · 496 registros desde 10-02-2023</a:t>
             </a:r>
             <a:endParaRPr lang="en-US" sz="850" dirty="0"/>
           </a:p>
@@ -31187,7 +30064,7 @@
                 <a:ea typeface="Calibri" pitchFamily="34" charset="-122"/>
                 <a:cs typeface="Calibri" pitchFamily="34" charset="-120"/>
               </a:rPr>
-              <a:t>36 de los 53 hallazgos abiertos (67,9%) y 77,9% de cierre, contra 89,2% global. Es la ruta crítica del módulo.</a:t>
+              <a:t>37 de los 53 hallazgos abiertos (69,8%) y 77,6% de cierre, contra 89,3% global. Es la ruta crítica del módulo.</a:t>
             </a:r>
             <a:endParaRPr lang="en-US" sz="1100" dirty="0"/>
           </a:p>
@@ -31329,7 +30206,7 @@
                 <a:ea typeface="Calibri" pitchFamily="34" charset="-122"/>
                 <a:cs typeface="Calibri" pitchFamily="34" charset="-120"/>
               </a:rPr>
-              <a:t>Solo 21,7% de sus hallazgos los detecta Besalco; el mejor frente va en 66,7%. Lo que no se detecta adentro llega como observación del cliente.</a:t>
+              <a:t>Solo 21,6% de sus hallazgos los detecta Besalco; el mejor frente va en 66,7%. Lo que no se detecta adentro llega como observación del cliente.</a:t>
             </a:r>
             <a:endParaRPr lang="en-US" sz="1100" dirty="0"/>
           </a:p>
@@ -31429,7 +30306,7 @@
                 <a:ea typeface="Calibri" pitchFamily="34" charset="-122"/>
                 <a:cs typeface="Calibri" pitchFamily="34" charset="-120"/>
               </a:rPr>
-              <a:t>Sacar los 17 hallazgos sobre 180 días</a:t>
+              <a:t>Sacar los 19 hallazgos sobre 180 días</a:t>
             </a:r>
             <a:endParaRPr lang="en-US" sz="1400" dirty="0"/>
           </a:p>
@@ -31471,7 +30348,7 @@
                 <a:ea typeface="Calibri" pitchFamily="34" charset="-122"/>
                 <a:cs typeface="Calibri" pitchFamily="34" charset="-120"/>
               </a:rPr>
-              <a:t>3 de ellos superan el año abiertos. Los tienen a cargo Sin asignar (14), Alvaro Cortés V. (3). Es deuda antigua que no se cierra sola.</a:t>
+              <a:t>4 de ellos superan el año abiertos. Los tienen a cargo Sin asignar (16), Alvaro Cortés V. (3). Es deuda antigua que no se cierra sola.</a:t>
             </a:r>
             <a:endParaRPr lang="en-US" sz="1100" dirty="0"/>
           </a:p>
@@ -31571,7 +30448,7 @@
                 <a:ea typeface="Calibri" pitchFamily="34" charset="-122"/>
                 <a:cs typeface="Calibri" pitchFamily="34" charset="-120"/>
               </a:rPr>
-              <a:t>Responder las 50 que pasaron el plazo</a:t>
+              <a:t>Responder las 52 que pasaron el plazo</a:t>
             </a:r>
             <a:endParaRPr lang="en-US" sz="1400" dirty="0"/>
           </a:p>
@@ -31613,7 +30490,7 @@
                 <a:ea typeface="Calibri" pitchFamily="34" charset="-122"/>
                 <a:cs typeface="Calibri" pitchFamily="34" charset="-120"/>
               </a:rPr>
-              <a:t>El plazo es de 10 días desde la emisión y hoy lo incumplen 94,3% de los abiertos. Solo 3 siguen dentro de plazo.</a:t>
+              <a:t>El plazo es de 10 días desde la emisión y hoy lo incumplen 98,1% de los abiertos. Solo 1 siguen dentro de plazo.</a:t>
             </a:r>
             <a:endParaRPr lang="en-US" sz="1100" dirty="0"/>
           </a:p>
@@ -31652,7 +30529,7 @@
                 <a:ea typeface="Calibri" pitchFamily="34" charset="-122"/>
                 <a:cs typeface="Calibri" pitchFamily="34" charset="-120"/>
               </a:rPr>
-              <a:t>Fuente: b73c9c4f-Data_NCR_2.xlsx — hoja «Observaciones» · Corte 03-08-2026 · 493 registros desde 10-02-2023</a:t>
+              <a:t>Fuente: 5f2decc2-Data_NCR10082026.xlsx — hoja «Observaciones» · Corte 10-08-2026 · 496 registros desde 10-02-2023</a:t>
             </a:r>
             <a:endParaRPr lang="en-US" sz="850" dirty="0"/>
           </a:p>
@@ -32064,7 +30941,7 @@
                 <a:ea typeface="Cambria" pitchFamily="34" charset="-122"/>
                 <a:cs typeface="Cambria" pitchFamily="34" charset="-120"/>
               </a:rPr>
-              <a:t>97,6%</a:t>
+              <a:t>98,8%</a:t>
             </a:r>
             <a:endParaRPr lang="en-US" sz="3400" dirty="0"/>
           </a:p>
@@ -32142,7 +31019,7 @@
                 <a:ea typeface="Cambria" pitchFamily="34" charset="-122"/>
                 <a:cs typeface="Cambria" pitchFamily="34" charset="-120"/>
               </a:rPr>
-              <a:t>2</a:t>
+              <a:t>1</a:t>
             </a:r>
             <a:endParaRPr lang="en-US" sz="3400" dirty="0"/>
           </a:p>
@@ -32220,7 +31097,7 @@
                 <a:ea typeface="Cambria" pitchFamily="34" charset="-122"/>
                 <a:cs typeface="Cambria" pitchFamily="34" charset="-120"/>
               </a:rPr>
-              <a:t>19 d</a:t>
+              <a:t>18 d</a:t>
             </a:r>
             <a:endParaRPr lang="en-US" sz="3400" dirty="0"/>
           </a:p>
@@ -32376,7 +31253,7 @@
                 <a:ea typeface="Calibri" pitchFamily="34" charset="-122"/>
                 <a:cs typeface="Calibri" pitchFamily="34" charset="-120"/>
               </a:rPr>
-              <a:t>Corte: 03-08-2026</a:t>
+              <a:t>Corte: 10-08-2026</a:t>
             </a:r>
             <a:endParaRPr lang="en-US" sz="1100" dirty="0"/>
           </a:p>
@@ -32415,7 +31292,7 @@
                 <a:ea typeface="Calibri" pitchFamily="34" charset="-122"/>
                 <a:cs typeface="Calibri" pitchFamily="34" charset="-120"/>
               </a:rPr>
-              <a:t>Fuente: b73c9c4f-Data_NCR_2.xlsx — hoja «Observaciones» · Corte 03-08-2026 · 493 registros desde 10-02-2023</a:t>
+              <a:t>Fuente: 5f2decc2-Data_NCR10082026.xlsx — hoja «Observaciones» · Corte 10-08-2026 · 496 registros desde 10-02-2023</a:t>
             </a:r>
             <a:endParaRPr lang="en-US" sz="850" dirty="0"/>
           </a:p>
@@ -32720,7 +31597,7 @@
                 <a:ea typeface="Calibri" pitchFamily="34" charset="-122"/>
                 <a:cs typeface="Calibri" pitchFamily="34" charset="-120"/>
               </a:rPr>
-              <a:t>80 cerrados</a:t>
+              <a:t>81 cerrados</a:t>
             </a:r>
             <a:endParaRPr lang="en-US" sz="1400" dirty="0"/>
           </a:p>
@@ -32891,7 +31768,7 @@
                 <a:ea typeface="Cambria" pitchFamily="34" charset="-122"/>
                 <a:cs typeface="Cambria" pitchFamily="34" charset="-120"/>
               </a:rPr>
-              <a:t>97,6%</a:t>
+              <a:t>98,8%</a:t>
             </a:r>
             <a:endParaRPr lang="en-US" sz="4000" dirty="0"/>
           </a:p>
@@ -32930,7 +31807,7 @@
                 <a:ea typeface="Calibri" pitchFamily="34" charset="-122"/>
                 <a:cs typeface="Calibri" pitchFamily="34" charset="-120"/>
               </a:rPr>
-              <a:t>80/82</a:t>
+              <a:t>81/82</a:t>
             </a:r>
             <a:endParaRPr lang="en-US" sz="1400" dirty="0"/>
           </a:p>
@@ -33008,7 +31885,7 @@
                 <a:ea typeface="Calibri" pitchFamily="34" charset="-122"/>
                 <a:cs typeface="Calibri" pitchFamily="34" charset="-120"/>
               </a:rPr>
-              <a:t>Global del módulo: 89,2%</a:t>
+              <a:t>Global del módulo: 89,3%</a:t>
             </a:r>
             <a:endParaRPr lang="en-US" sz="950" dirty="0"/>
           </a:p>
@@ -33101,7 +31978,7 @@
                 <a:ea typeface="Cambria" pitchFamily="34" charset="-122"/>
                 <a:cs typeface="Cambria" pitchFamily="34" charset="-120"/>
               </a:rPr>
-              <a:t>2</a:t>
+              <a:t>1</a:t>
             </a:r>
             <a:endParaRPr lang="en-US" sz="4000" dirty="0"/>
           </a:p>
@@ -33140,7 +32017,7 @@
                 <a:ea typeface="Calibri" pitchFamily="34" charset="-122"/>
                 <a:cs typeface="Calibri" pitchFamily="34" charset="-120"/>
               </a:rPr>
-              <a:t>hallazgos abiertos</a:t>
+              <a:t>hallazgo abierto</a:t>
             </a:r>
             <a:endParaRPr lang="en-US" sz="1400" dirty="0"/>
           </a:p>
@@ -33218,7 +32095,7 @@
                 <a:ea typeface="Calibri" pitchFamily="34" charset="-122"/>
                 <a:cs typeface="Calibri" pitchFamily="34" charset="-120"/>
               </a:rPr>
-              <a:t>1 listo para revisión · 1 iniciado</a:t>
+              <a:t>1 listo para revisión</a:t>
             </a:r>
             <a:endParaRPr lang="en-US" sz="950" dirty="0"/>
           </a:p>
@@ -33311,7 +32188,7 @@
                 <a:ea typeface="Cambria" pitchFamily="34" charset="-122"/>
                 <a:cs typeface="Cambria" pitchFamily="34" charset="-120"/>
               </a:rPr>
-              <a:t>19</a:t>
+              <a:t>18</a:t>
             </a:r>
             <a:endParaRPr lang="en-US" sz="4000" dirty="0"/>
           </a:p>
@@ -33606,7 +32483,7 @@
                 <a:ea typeface="Calibri" pitchFamily="34" charset="-122"/>
                 <a:cs typeface="Calibri" pitchFamily="34" charset="-120"/>
               </a:rPr>
-              <a:t>global del módulo 32,9%</a:t>
+              <a:t>global del módulo 32,6%</a:t>
             </a:r>
             <a:endParaRPr lang="en-US" sz="1000" dirty="0"/>
           </a:p>
@@ -33858,13 +32735,13 @@
             <a:r>
               <a:rPr lang="en-US" sz="950" dirty="0">
                 <a:solidFill>
-                  <a:srgbClr val="E3A55B"/>
-                </a:solidFill>
-                <a:latin typeface="Calibri" pitchFamily="34" charset="0"/>
-                <a:ea typeface="Calibri" pitchFamily="34" charset="-122"/>
-                <a:cs typeface="Calibri" pitchFamily="34" charset="-120"/>
-              </a:rPr>
-              <a:t>1 ab.</a:t>
+                  <a:srgbClr val="6E8CA8"/>
+                </a:solidFill>
+                <a:latin typeface="Calibri" pitchFamily="34" charset="0"/>
+                <a:ea typeface="Calibri" pitchFamily="34" charset="-122"/>
+                <a:cs typeface="Calibri" pitchFamily="34" charset="-120"/>
+              </a:rPr>
+              <a:t>0 ab.</a:t>
             </a:r>
             <a:endParaRPr lang="en-US" sz="950" dirty="0"/>
           </a:p>
@@ -34216,7 +33093,7 @@
                 <a:ea typeface="Calibri" pitchFamily="34" charset="-122"/>
                 <a:cs typeface="Calibri" pitchFamily="34" charset="-120"/>
               </a:rPr>
-              <a:t>Fuente: b73c9c4f-Data_NCR_2.xlsx — hoja «Observaciones» · Corte 03-08-2026 · 493 registros desde 10-02-2023</a:t>
+              <a:t>Fuente: 5f2decc2-Data_NCR10082026.xlsx — hoja «Observaciones» · Corte 10-08-2026 · 496 registros desde 10-02-2023</a:t>
             </a:r>
             <a:endParaRPr lang="en-US" sz="850" dirty="0"/>
           </a:p>

--- a/modulo_nc/Panel_No_Conformidades.pptx
+++ b/modulo_nc/Panel_No_Conformidades.pptx
@@ -736,7 +736,7 @@
                   <c:v>189</c:v>
                 </c:pt>
                 <c:pt idx="2">
-                  <c:v>72</c:v>
+                  <c:v>71</c:v>
                 </c:pt>
                 <c:pt idx="3">
                   <c:v/>
@@ -1198,7 +1198,7 @@
                 <c:formatCode>General</c:formatCode>
                 <c:ptCount val="4"/>
                 <c:pt idx="0">
-                  <c:v>280</c:v>
+                  <c:v>279</c:v>
                 </c:pt>
                 <c:pt idx="1">
                   <c:v>117</c:v>
@@ -2985,7 +2985,7 @@
                     <c:v>ESTRUCTURA</c:v>
                   </c:pt>
                   <c:pt idx="7">
-                    <c:v>MECÁNICA</c:v>
+                    <c:v>LOGÍSTICA</c:v>
                   </c:pt>
                 </c:lvl>
               </c:multiLvlStrCache>
@@ -3099,7 +3099,7 @@
                     <c:v>ESTRUCTURA</c:v>
                   </c:pt>
                   <c:pt idx="7">
-                    <c:v>MECÁNICA</c:v>
+                    <c:v>LOGÍSTICA</c:v>
                   </c:pt>
                 </c:lvl>
               </c:multiLvlStrCache>
@@ -5621,7 +5621,7 @@
                 <a:ea typeface="Calibri" pitchFamily="34" charset="-122"/>
                 <a:cs typeface="Calibri" pitchFamily="34" charset="-120"/>
               </a:rPr>
-              <a:t>496 hallazgos levantados entre 10-02-2023 y 05-08-2026 (Desaladora 82 · Talabre 241 · Arqueros 165 · Oficina Central 8).</a:t>
+              <a:t>495 hallazgos levantados entre 10-02-2023 y 05-08-2026 (Desaladora 82 · Talabre 241 · Arqueros 164 · Oficina Central 8).</a:t>
             </a:r>
             <a:endParaRPr lang="en-US" sz="1350" dirty="0"/>
           </a:p>
@@ -6031,7 +6031,7 @@
                 <a:ea typeface="Calibri" pitchFamily="34" charset="-122"/>
                 <a:cs typeface="Calibri" pitchFamily="34" charset="-120"/>
               </a:rPr>
-              <a:t>Fuente: 5f2decc2-Data_NCR10082026.xlsx — hoja «Observaciones» · Corte 10-08-2026 · 496 registros desde 10-02-2023</a:t>
+              <a:t>Fuente: 5f2decc2-Data_NCR10082026.xlsx — hoja «Observaciones» · Corte 10-08-2026 · 495 registros desde 10-02-2023</a:t>
             </a:r>
             <a:endParaRPr lang="en-US" sz="850" dirty="0"/>
           </a:p>
@@ -7052,7 +7052,7 @@
                 <a:ea typeface="Calibri" pitchFamily="34" charset="-122"/>
                 <a:cs typeface="Calibri" pitchFamily="34" charset="-120"/>
               </a:rPr>
-              <a:t>Fuente: 5f2decc2-Data_NCR10082026.xlsx — hoja «Observaciones» · Corte 10-08-2026 · 496 registros desde 10-02-2023</a:t>
+              <a:t>Fuente: 5f2decc2-Data_NCR10082026.xlsx — hoja «Observaciones» · Corte 10-08-2026 · 495 registros desde 10-02-2023</a:t>
             </a:r>
             <a:endParaRPr lang="en-US" sz="850" dirty="0"/>
           </a:p>
@@ -7815,7 +7815,7 @@
                 <a:ea typeface="Calibri" pitchFamily="34" charset="-122"/>
                 <a:cs typeface="Calibri" pitchFamily="34" charset="-120"/>
               </a:rPr>
-              <a:t>Fuente: 5f2decc2-Data_NCR10082026.xlsx — hoja «Observaciones» · Corte 10-08-2026 · 496 registros desde 10-02-2023</a:t>
+              <a:t>Fuente: 5f2decc2-Data_NCR10082026.xlsx — hoja «Observaciones» · Corte 10-08-2026 · 495 registros desde 10-02-2023</a:t>
             </a:r>
             <a:endParaRPr lang="en-US" sz="850" dirty="0"/>
           </a:p>
@@ -9006,7 +9006,7 @@
                 <a:ea typeface="Calibri" pitchFamily="34" charset="-122"/>
                 <a:cs typeface="Calibri" pitchFamily="34" charset="-120"/>
               </a:rPr>
-              <a:t>global del módulo 32,6%</a:t>
+              <a:t>global del módulo 32,7%</a:t>
             </a:r>
             <a:endParaRPr lang="en-US" sz="1000" dirty="0"/>
           </a:p>
@@ -9342,7 +9342,7 @@
                 <a:ea typeface="Calibri" pitchFamily="34" charset="-122"/>
                 <a:cs typeface="Calibri" pitchFamily="34" charset="-120"/>
               </a:rPr>
-              <a:t>Fuente: 5f2decc2-Data_NCR10082026.xlsx — hoja «Observaciones» · Corte 10-08-2026 · 496 registros desde 10-02-2023</a:t>
+              <a:t>Fuente: 5f2decc2-Data_NCR10082026.xlsx — hoja «Observaciones» · Corte 10-08-2026 · 495 registros desde 10-02-2023</a:t>
             </a:r>
             <a:endParaRPr lang="en-US" sz="850" dirty="0"/>
           </a:p>
@@ -13201,7 +13201,7 @@
                 <a:ea typeface="Calibri" pitchFamily="34" charset="-122"/>
                 <a:cs typeface="Calibri" pitchFamily="34" charset="-120"/>
               </a:rPr>
-              <a:t>Fuente: 5f2decc2-Data_NCR10082026.xlsx — hoja «Observaciones» · Corte 10-08-2026 · 496 registros desde 10-02-2023</a:t>
+              <a:t>Fuente: 5f2decc2-Data_NCR10082026.xlsx — hoja «Observaciones» · Corte 10-08-2026 · 495 registros desde 10-02-2023</a:t>
             </a:r>
             <a:endParaRPr lang="en-US" sz="850" dirty="0"/>
           </a:p>
@@ -13554,7 +13554,7 @@
                 <a:ea typeface="Calibri" pitchFamily="34" charset="-122"/>
                 <a:cs typeface="Calibri" pitchFamily="34" charset="-120"/>
               </a:rPr>
-              <a:t>165 hallazgos levantados · 53 internas · 72 del cliente · 40 de subcontrato · 18 especialidades involucradas.</a:t>
+              <a:t>164 hallazgos levantados · 53 internas · 71 del cliente · 40 de subcontrato · 18 especialidades involucradas.</a:t>
             </a:r>
             <a:endParaRPr lang="en-US" sz="1350" dirty="0"/>
           </a:p>
@@ -13613,7 +13613,7 @@
                 <a:ea typeface="Cambria" pitchFamily="34" charset="-122"/>
                 <a:cs typeface="Cambria" pitchFamily="34" charset="-120"/>
               </a:rPr>
-              <a:t>77,6%</a:t>
+              <a:t>77,4%</a:t>
             </a:r>
             <a:endParaRPr lang="en-US" sz="3400" dirty="0"/>
           </a:p>
@@ -13769,7 +13769,7 @@
                 <a:ea typeface="Cambria" pitchFamily="34" charset="-122"/>
                 <a:cs typeface="Cambria" pitchFamily="34" charset="-120"/>
               </a:rPr>
-              <a:t>131 d</a:t>
+              <a:t>129 d</a:t>
             </a:r>
             <a:endParaRPr lang="en-US" sz="3400" dirty="0"/>
           </a:p>
@@ -13847,7 +13847,7 @@
                 <a:ea typeface="Cambria" pitchFamily="34" charset="-122"/>
                 <a:cs typeface="Cambria" pitchFamily="34" charset="-120"/>
               </a:rPr>
-              <a:t>32,1%</a:t>
+              <a:t>32,3%</a:t>
             </a:r>
             <a:endParaRPr lang="en-US" sz="3400" dirty="0"/>
           </a:p>
@@ -13964,7 +13964,7 @@
                 <a:ea typeface="Calibri" pitchFamily="34" charset="-122"/>
                 <a:cs typeface="Calibri" pitchFamily="34" charset="-120"/>
               </a:rPr>
-              <a:t>Fuente: 5f2decc2-Data_NCR10082026.xlsx — hoja «Observaciones» · Corte 10-08-2026 · 496 registros desde 10-02-2023</a:t>
+              <a:t>Fuente: 5f2decc2-Data_NCR10082026.xlsx — hoja «Observaciones» · Corte 10-08-2026 · 495 registros desde 10-02-2023</a:t>
             </a:r>
             <a:endParaRPr lang="en-US" sz="850" dirty="0"/>
           </a:p>
@@ -14230,7 +14230,7 @@
                 <a:ea typeface="Cambria" pitchFamily="34" charset="-122"/>
                 <a:cs typeface="Cambria" pitchFamily="34" charset="-120"/>
               </a:rPr>
-              <a:t>165</a:t>
+              <a:t>164</a:t>
             </a:r>
             <a:endParaRPr lang="en-US" sz="4000" dirty="0"/>
           </a:p>
@@ -14269,7 +14269,7 @@
                 <a:ea typeface="Calibri" pitchFamily="34" charset="-122"/>
                 <a:cs typeface="Calibri" pitchFamily="34" charset="-120"/>
               </a:rPr>
-              <a:t>128 cerrados</a:t>
+              <a:t>127 cerrados</a:t>
             </a:r>
             <a:endParaRPr lang="en-US" sz="1400" dirty="0"/>
           </a:p>
@@ -14347,7 +14347,7 @@
                 <a:ea typeface="Calibri" pitchFamily="34" charset="-122"/>
                 <a:cs typeface="Calibri" pitchFamily="34" charset="-120"/>
               </a:rPr>
-              <a:t>53 internas · 72 del cliente · 40 de subcontrato</a:t>
+              <a:t>53 internas · 71 del cliente · 40 de subcontrato</a:t>
             </a:r>
             <a:endParaRPr lang="en-US" sz="950" dirty="0"/>
           </a:p>
@@ -14440,7 +14440,7 @@
                 <a:ea typeface="Cambria" pitchFamily="34" charset="-122"/>
                 <a:cs typeface="Cambria" pitchFamily="34" charset="-120"/>
               </a:rPr>
-              <a:t>77,6%</a:t>
+              <a:t>77,4%</a:t>
             </a:r>
             <a:endParaRPr lang="en-US" sz="4000" dirty="0"/>
           </a:p>
@@ -14479,7 +14479,7 @@
                 <a:ea typeface="Calibri" pitchFamily="34" charset="-122"/>
                 <a:cs typeface="Calibri" pitchFamily="34" charset="-120"/>
               </a:rPr>
-              <a:t>128/165</a:t>
+              <a:t>127/164</a:t>
             </a:r>
             <a:endParaRPr lang="en-US" sz="1400" dirty="0"/>
           </a:p>
@@ -14860,7 +14860,7 @@
                 <a:ea typeface="Cambria" pitchFamily="34" charset="-122"/>
                 <a:cs typeface="Cambria" pitchFamily="34" charset="-120"/>
               </a:rPr>
-              <a:t>131</a:t>
+              <a:t>129</a:t>
             </a:r>
             <a:endParaRPr lang="en-US" sz="4000" dirty="0"/>
           </a:p>
@@ -15093,7 +15093,7 @@
                 <a:ea typeface="Cambria" pitchFamily="34" charset="-122"/>
                 <a:cs typeface="Cambria" pitchFamily="34" charset="-120"/>
               </a:rPr>
-              <a:t>32,1%</a:t>
+              <a:t>32,3%</a:t>
             </a:r>
             <a:endParaRPr lang="en-US" sz="2600" dirty="0"/>
           </a:p>
@@ -15155,7 +15155,7 @@
                 <a:ea typeface="Calibri" pitchFamily="34" charset="-122"/>
                 <a:cs typeface="Calibri" pitchFamily="34" charset="-120"/>
               </a:rPr>
-              <a:t>global del módulo 32,6%</a:t>
+              <a:t>global del módulo 32,7%</a:t>
             </a:r>
             <a:endParaRPr lang="en-US" sz="1000" dirty="0"/>
           </a:p>
@@ -15452,7 +15452,7 @@
                 <a:ea typeface="Cambria" pitchFamily="34" charset="-122"/>
                 <a:cs typeface="Cambria" pitchFamily="34" charset="-120"/>
               </a:rPr>
-              <a:t>72</a:t>
+              <a:t>71</a:t>
             </a:r>
             <a:endParaRPr lang="en-US" sz="1600" dirty="0"/>
           </a:p>
@@ -15628,7 +15628,7 @@
                 <a:ea typeface="Calibri" pitchFamily="34" charset="-122"/>
                 <a:cs typeface="Calibri" pitchFamily="34" charset="-120"/>
               </a:rPr>
-              <a:t>Fuente: 5f2decc2-Data_NCR10082026.xlsx — hoja «Observaciones» · Corte 10-08-2026 · 496 registros desde 10-02-2023</a:t>
+              <a:t>Fuente: 5f2decc2-Data_NCR10082026.xlsx — hoja «Observaciones» · Corte 10-08-2026 · 495 registros desde 10-02-2023</a:t>
             </a:r>
             <a:endParaRPr lang="en-US" sz="850" dirty="0"/>
           </a:p>
@@ -19487,7 +19487,7 @@
                 <a:ea typeface="Calibri" pitchFamily="34" charset="-122"/>
                 <a:cs typeface="Calibri" pitchFamily="34" charset="-120"/>
               </a:rPr>
-              <a:t>Fuente: 5f2decc2-Data_NCR10082026.xlsx — hoja «Observaciones» · Corte 10-08-2026 · 496 registros desde 10-02-2023</a:t>
+              <a:t>Fuente: 5f2decc2-Data_NCR10082026.xlsx — hoja «Observaciones» · Corte 10-08-2026 · 495 registros desde 10-02-2023</a:t>
             </a:r>
             <a:endParaRPr lang="en-US" sz="850" dirty="0"/>
           </a:p>
@@ -19831,7 +19831,7 @@
                 <a:ea typeface="Calibri" pitchFamily="34" charset="-122"/>
                 <a:cs typeface="Calibri" pitchFamily="34" charset="-120"/>
               </a:rPr>
-              <a:t>443/496</a:t>
+              <a:t>442/495</a:t>
             </a:r>
             <a:endParaRPr lang="en-US" sz="1400" dirty="0"/>
           </a:p>
@@ -20041,7 +20041,7 @@
                 <a:ea typeface="Calibri" pitchFamily="34" charset="-122"/>
                 <a:cs typeface="Calibri" pitchFamily="34" charset="-120"/>
               </a:rPr>
-              <a:t>de 496 levantados</a:t>
+              <a:t>de 495 levantados</a:t>
             </a:r>
             <a:endParaRPr lang="en-US" sz="1400" dirty="0"/>
           </a:p>
@@ -20212,7 +20212,7 @@
                 <a:ea typeface="Cambria" pitchFamily="34" charset="-122"/>
                 <a:cs typeface="Cambria" pitchFamily="34" charset="-120"/>
               </a:rPr>
-              <a:t>32,6%</a:t>
+              <a:t>32,7%</a:t>
             </a:r>
             <a:endParaRPr lang="en-US" sz="4000" dirty="0"/>
           </a:p>
@@ -20251,7 +20251,7 @@
                 <a:ea typeface="Calibri" pitchFamily="34" charset="-122"/>
                 <a:cs typeface="Calibri" pitchFamily="34" charset="-120"/>
               </a:rPr>
-              <a:t>159/487 clasificados</a:t>
+              <a:t>159/486 clasificados</a:t>
             </a:r>
             <a:endParaRPr lang="en-US" sz="1400" dirty="0"/>
           </a:p>
@@ -20461,7 +20461,7 @@
                 <a:ea typeface="Calibri" pitchFamily="34" charset="-122"/>
                 <a:cs typeface="Calibri" pitchFamily="34" charset="-120"/>
               </a:rPr>
-              <a:t>251 de 496 con costo</a:t>
+              <a:t>251 de 495 con costo</a:t>
             </a:r>
             <a:endParaRPr lang="en-US" sz="1400" dirty="0"/>
           </a:p>
@@ -20539,7 +20539,7 @@
                 <a:ea typeface="Calibri" pitchFamily="34" charset="-122"/>
                 <a:cs typeface="Calibri" pitchFamily="34" charset="-120"/>
               </a:rPr>
-              <a:t>245 hallazgos no declaran costo: la cifra es un piso</a:t>
+              <a:t>244 hallazgos no declaran costo: la cifra es un piso</a:t>
             </a:r>
             <a:endParaRPr lang="en-US" sz="950" dirty="0"/>
           </a:p>
@@ -20679,7 +20679,7 @@
                 <a:ea typeface="Calibri" pitchFamily="34" charset="-122"/>
                 <a:cs typeface="Calibri" pitchFamily="34" charset="-120"/>
               </a:rPr>
-              <a:t>37 de los 53 hallazgos abiertos (69,8%), y es uno de los frentes donde el cliente levanta más de lo que detecta Besalco (72 del cliente contra 53 internas).</a:t>
+              <a:t>37 de los 53 hallazgos abiertos (69,8%), y es uno de los frentes donde el cliente levanta más de lo que detecta Besalco (71 del cliente contra 53 internas).</a:t>
             </a:r>
             <a:endParaRPr lang="en-US" sz="1250" dirty="0"/>
           </a:p>
@@ -20876,7 +20876,7 @@
                 <a:ea typeface="Calibri" pitchFamily="34" charset="-122"/>
                 <a:cs typeface="Calibri" pitchFamily="34" charset="-120"/>
               </a:rPr>
-              <a:t>Fuente: 5f2decc2-Data_NCR10082026.xlsx — hoja «Observaciones» · Corte 10-08-2026 · 496 registros desde 10-02-2023</a:t>
+              <a:t>Fuente: 5f2decc2-Data_NCR10082026.xlsx — hoja «Observaciones» · Corte 10-08-2026 · 495 registros desde 10-02-2023</a:t>
             </a:r>
             <a:endParaRPr lang="en-US" sz="850" dirty="0"/>
           </a:p>
@@ -22625,7 +22625,7 @@
                 <a:ea typeface="Calibri" pitchFamily="34" charset="-122"/>
                 <a:cs typeface="Calibri" pitchFamily="34" charset="-120"/>
               </a:rPr>
-              <a:t>165</a:t>
+              <a:t>164</a:t>
             </a:r>
             <a:endParaRPr lang="en-US" sz="1300" dirty="0"/>
           </a:p>
@@ -22664,7 +22664,7 @@
                 <a:ea typeface="Calibri" pitchFamily="34" charset="-122"/>
                 <a:cs typeface="Calibri" pitchFamily="34" charset="-120"/>
               </a:rPr>
-              <a:t>128</a:t>
+              <a:t>127</a:t>
             </a:r>
             <a:endParaRPr lang="en-US" sz="1300" dirty="0"/>
           </a:p>
@@ -22742,7 +22742,7 @@
                 <a:ea typeface="Calibri" pitchFamily="34" charset="-122"/>
                 <a:cs typeface="Calibri" pitchFamily="34" charset="-120"/>
               </a:rPr>
-              <a:t>77,6%</a:t>
+              <a:t>77,4%</a:t>
             </a:r>
             <a:endParaRPr lang="en-US" sz="1300" dirty="0"/>
           </a:p>
@@ -22820,7 +22820,7 @@
                 <a:ea typeface="Calibri" pitchFamily="34" charset="-122"/>
                 <a:cs typeface="Calibri" pitchFamily="34" charset="-120"/>
               </a:rPr>
-              <a:t>72</a:t>
+              <a:t>71</a:t>
             </a:r>
             <a:endParaRPr lang="en-US" sz="1300" dirty="0"/>
           </a:p>
@@ -23593,7 +23593,7 @@
                 <a:ea typeface="Calibri" pitchFamily="34" charset="-122"/>
                 <a:cs typeface="Calibri" pitchFamily="34" charset="-120"/>
               </a:rPr>
-              <a:t>488</a:t>
+              <a:t>487</a:t>
             </a:r>
             <a:endParaRPr lang="en-US" sz="1300" dirty="0"/>
           </a:p>
@@ -23632,7 +23632,7 @@
                 <a:ea typeface="Calibri" pitchFamily="34" charset="-122"/>
                 <a:cs typeface="Calibri" pitchFamily="34" charset="-120"/>
               </a:rPr>
-              <a:t>435</a:t>
+              <a:t>434</a:t>
             </a:r>
             <a:endParaRPr lang="en-US" sz="1300" dirty="0"/>
           </a:p>
@@ -23788,7 +23788,7 @@
                 <a:ea typeface="Calibri" pitchFamily="34" charset="-122"/>
                 <a:cs typeface="Calibri" pitchFamily="34" charset="-120"/>
               </a:rPr>
-              <a:t>280</a:t>
+              <a:t>279</a:t>
             </a:r>
             <a:endParaRPr lang="en-US" sz="1300" dirty="0"/>
           </a:p>
@@ -23944,7 +23944,7 @@
                 <a:ea typeface="Calibri" pitchFamily="34" charset="-122"/>
                 <a:cs typeface="Calibri" pitchFamily="34" charset="-120"/>
               </a:rPr>
-              <a:t>Fuente: 5f2decc2-Data_NCR10082026.xlsx — hoja «Observaciones» · Corte 10-08-2026 · 496 registros desde 10-02-2023</a:t>
+              <a:t>Fuente: 5f2decc2-Data_NCR10082026.xlsx — hoja «Observaciones» · Corte 10-08-2026 · 495 registros desde 10-02-2023</a:t>
             </a:r>
             <a:endParaRPr lang="en-US" sz="850" dirty="0"/>
           </a:p>
@@ -25410,7 +25410,7 @@
                 <a:ea typeface="Calibri" pitchFamily="34" charset="-122"/>
                 <a:cs typeface="Calibri" pitchFamily="34" charset="-120"/>
               </a:rPr>
-              <a:t>Fuente: 5f2decc2-Data_NCR10082026.xlsx — hoja «Observaciones» · Corte 10-08-2026 · 496 registros desde 10-02-2023</a:t>
+              <a:t>Fuente: 5f2decc2-Data_NCR10082026.xlsx — hoja «Observaciones» · Corte 10-08-2026 · 495 registros desde 10-02-2023</a:t>
             </a:r>
             <a:endParaRPr lang="en-US" sz="850" dirty="0"/>
           </a:p>
@@ -25661,7 +25661,7 @@
                 <a:ea typeface="Calibri" pitchFamily="34" charset="-122"/>
                 <a:cs typeface="Calibri" pitchFamily="34" charset="-120"/>
               </a:rPr>
-              <a:t>Interna es autodetección: la levanta Besalco antes que nadie. Externa la levanta el cliente —compromete el contrato— o un subcontrato. Autodetección global: 32,6%.</a:t>
+              <a:t>Interna es autodetección: la levanta Besalco antes que nadie. Externa la levanta el cliente —compromete el contrato— o un subcontrato. Autodetección global: 32,7%.</a:t>
             </a:r>
             <a:endParaRPr lang="en-US" sz="1350" dirty="0"/>
           </a:p>
@@ -26406,7 +26406,7 @@
                 <a:ea typeface="Calibri" pitchFamily="34" charset="-122"/>
                 <a:cs typeface="Calibri" pitchFamily="34" charset="-120"/>
               </a:rPr>
-              <a:t>280</a:t>
+              <a:t>279</a:t>
             </a:r>
             <a:endParaRPr lang="en-US" sz="1050" dirty="0"/>
           </a:p>
@@ -26445,7 +26445,7 @@
                 <a:ea typeface="Calibri" pitchFamily="34" charset="-122"/>
                 <a:cs typeface="Calibri" pitchFamily="34" charset="-120"/>
               </a:rPr>
-              <a:t>232</a:t>
+              <a:t>231</a:t>
             </a:r>
             <a:endParaRPr lang="en-US" sz="1050" dirty="0"/>
           </a:p>
@@ -26484,7 +26484,7 @@
                 <a:ea typeface="Calibri" pitchFamily="34" charset="-122"/>
                 <a:cs typeface="Calibri" pitchFamily="34" charset="-120"/>
               </a:rPr>
-              <a:t>82,9%</a:t>
+              <a:t>82,8%</a:t>
             </a:r>
             <a:endParaRPr lang="en-US" sz="1050" dirty="0"/>
           </a:p>
@@ -26601,7 +26601,7 @@
                 <a:ea typeface="Calibri" pitchFamily="34" charset="-122"/>
                 <a:cs typeface="Calibri" pitchFamily="34" charset="-120"/>
               </a:rPr>
-              <a:t>50 días</a:t>
+              <a:t>49 días</a:t>
             </a:r>
             <a:endParaRPr lang="en-US" sz="1050" dirty="0"/>
           </a:p>
@@ -27314,7 +27314,7 @@
                 <a:ea typeface="Calibri" pitchFamily="34" charset="-122"/>
                 <a:cs typeface="Calibri" pitchFamily="34" charset="-120"/>
               </a:rPr>
-              <a:t>496</a:t>
+              <a:t>495</a:t>
             </a:r>
             <a:endParaRPr lang="en-US" sz="1050" dirty="0"/>
           </a:p>
@@ -27353,7 +27353,7 @@
                 <a:ea typeface="Calibri" pitchFamily="34" charset="-122"/>
                 <a:cs typeface="Calibri" pitchFamily="34" charset="-120"/>
               </a:rPr>
-              <a:t>443</a:t>
+              <a:t>442</a:t>
             </a:r>
             <a:endParaRPr lang="en-US" sz="1050" dirty="0"/>
           </a:p>
@@ -27804,7 +27804,7 @@
                 <a:ea typeface="Cambria" pitchFamily="34" charset="-122"/>
                 <a:cs typeface="Cambria" pitchFamily="34" charset="-120"/>
               </a:rPr>
-              <a:t>32,1%</a:t>
+              <a:t>32,3%</a:t>
             </a:r>
             <a:endParaRPr lang="en-US" sz="2400" dirty="0"/>
           </a:p>
@@ -27882,7 +27882,7 @@
                 <a:ea typeface="Calibri" pitchFamily="34" charset="-122"/>
                 <a:cs typeface="Calibri" pitchFamily="34" charset="-120"/>
               </a:rPr>
-              <a:t>Fuente: 5f2decc2-Data_NCR10082026.xlsx — hoja «Observaciones» · Corte 10-08-2026 · 496 registros desde 10-02-2023</a:t>
+              <a:t>Fuente: 5f2decc2-Data_NCR10082026.xlsx — hoja «Observaciones» · Corte 10-08-2026 · 495 registros desde 10-02-2023</a:t>
             </a:r>
             <a:endParaRPr lang="en-US" sz="850" dirty="0"/>
           </a:p>
@@ -29195,7 +29195,7 @@
                 <a:ea typeface="Calibri" pitchFamily="34" charset="-122"/>
                 <a:cs typeface="Calibri" pitchFamily="34" charset="-120"/>
               </a:rPr>
-              <a:t>128</a:t>
+              <a:t>127</a:t>
             </a:r>
             <a:endParaRPr lang="en-US" sz="1150" dirty="0"/>
           </a:p>
@@ -29234,7 +29234,7 @@
                 <a:ea typeface="Calibri" pitchFamily="34" charset="-122"/>
                 <a:cs typeface="Calibri" pitchFamily="34" charset="-120"/>
               </a:rPr>
-              <a:t>131 d</a:t>
+              <a:t>129 d</a:t>
             </a:r>
             <a:endParaRPr lang="en-US" sz="1150" dirty="0"/>
           </a:p>
@@ -29690,7 +29690,7 @@
                 <a:ea typeface="Calibri" pitchFamily="34" charset="-122"/>
                 <a:cs typeface="Calibri" pitchFamily="34" charset="-120"/>
               </a:rPr>
-              <a:t>Fuente: 5f2decc2-Data_NCR10082026.xlsx — hoja «Observaciones» · Corte 10-08-2026 · 496 registros desde 10-02-2023</a:t>
+              <a:t>Fuente: 5f2decc2-Data_NCR10082026.xlsx — hoja «Observaciones» · Corte 10-08-2026 · 495 registros desde 10-02-2023</a:t>
             </a:r>
             <a:endParaRPr lang="en-US" sz="850" dirty="0"/>
           </a:p>
@@ -30064,7 +30064,7 @@
                 <a:ea typeface="Calibri" pitchFamily="34" charset="-122"/>
                 <a:cs typeface="Calibri" pitchFamily="34" charset="-120"/>
               </a:rPr>
-              <a:t>37 de los 53 hallazgos abiertos (69,8%) y 77,6% de cierre, contra 89,3% global. Es la ruta crítica del módulo.</a:t>
+              <a:t>37 de los 53 hallazgos abiertos (69,8%) y 77,4% de cierre, contra 89,3% global. Es la ruta crítica del módulo.</a:t>
             </a:r>
             <a:endParaRPr lang="en-US" sz="1100" dirty="0"/>
           </a:p>
@@ -30529,7 +30529,7 @@
                 <a:ea typeface="Calibri" pitchFamily="34" charset="-122"/>
                 <a:cs typeface="Calibri" pitchFamily="34" charset="-120"/>
               </a:rPr>
-              <a:t>Fuente: 5f2decc2-Data_NCR10082026.xlsx — hoja «Observaciones» · Corte 10-08-2026 · 496 registros desde 10-02-2023</a:t>
+              <a:t>Fuente: 5f2decc2-Data_NCR10082026.xlsx — hoja «Observaciones» · Corte 10-08-2026 · 495 registros desde 10-02-2023</a:t>
             </a:r>
             <a:endParaRPr lang="en-US" sz="850" dirty="0"/>
           </a:p>
@@ -31292,7 +31292,7 @@
                 <a:ea typeface="Calibri" pitchFamily="34" charset="-122"/>
                 <a:cs typeface="Calibri" pitchFamily="34" charset="-120"/>
               </a:rPr>
-              <a:t>Fuente: 5f2decc2-Data_NCR10082026.xlsx — hoja «Observaciones» · Corte 10-08-2026 · 496 registros desde 10-02-2023</a:t>
+              <a:t>Fuente: 5f2decc2-Data_NCR10082026.xlsx — hoja «Observaciones» · Corte 10-08-2026 · 495 registros desde 10-02-2023</a:t>
             </a:r>
             <a:endParaRPr lang="en-US" sz="850" dirty="0"/>
           </a:p>
@@ -32483,7 +32483,7 @@
                 <a:ea typeface="Calibri" pitchFamily="34" charset="-122"/>
                 <a:cs typeface="Calibri" pitchFamily="34" charset="-120"/>
               </a:rPr>
-              <a:t>global del módulo 32,6%</a:t>
+              <a:t>global del módulo 32,7%</a:t>
             </a:r>
             <a:endParaRPr lang="en-US" sz="1000" dirty="0"/>
           </a:p>
@@ -33093,7 +33093,7 @@
                 <a:ea typeface="Calibri" pitchFamily="34" charset="-122"/>
                 <a:cs typeface="Calibri" pitchFamily="34" charset="-120"/>
               </a:rPr>
-              <a:t>Fuente: 5f2decc2-Data_NCR10082026.xlsx — hoja «Observaciones» · Corte 10-08-2026 · 496 registros desde 10-02-2023</a:t>
+              <a:t>Fuente: 5f2decc2-Data_NCR10082026.xlsx — hoja «Observaciones» · Corte 10-08-2026 · 495 registros desde 10-02-2023</a:t>
             </a:r>
             <a:endParaRPr lang="en-US" sz="850" dirty="0"/>
           </a:p>

--- a/modulo_nc/Panel_No_Conformidades.pptx
+++ b/modulo_nc/Panel_No_Conformidades.pptx
@@ -219,19 +219,19 @@
                     <c:v>3 sem.</c:v>
                   </c:pt>
                   <c:pt idx="1">
-                    <c:v>06-07</c:v>
+                    <c:v>13-07</c:v>
                   </c:pt>
                   <c:pt idx="2">
-                    <c:v>13-07</c:v>
+                    <c:v>20-07</c:v>
                   </c:pt>
                   <c:pt idx="3">
-                    <c:v>20-07</c:v>
+                    <c:v>27-07</c:v>
                   </c:pt>
                   <c:pt idx="4">
-                    <c:v>27-07</c:v>
+                    <c:v>03-08</c:v>
                   </c:pt>
                   <c:pt idx="5">
-                    <c:v>03-08</c:v>
+                    <c:v>10-08</c:v>
                   </c:pt>
                 </c:lvl>
               </c:multiLvlStrCache>
@@ -247,19 +247,19 @@
                   <c:v>1</c:v>
                 </c:pt>
                 <c:pt idx="1">
+                  <c:v/>
+                </c:pt>
+                <c:pt idx="2">
                   <c:v>1</c:v>
                 </c:pt>
-                <c:pt idx="2">
+                <c:pt idx="3">
+                  <c:v>3</c:v>
+                </c:pt>
+                <c:pt idx="4">
                   <c:v/>
                 </c:pt>
-                <c:pt idx="3">
+                <c:pt idx="5">
                   <c:v>2</c:v>
-                </c:pt>
-                <c:pt idx="4">
-                  <c:v>3</c:v>
-                </c:pt>
-                <c:pt idx="5">
-                  <c:v/>
                 </c:pt>
               </c:numCache>
             </c:numRef>
@@ -321,19 +321,19 @@
                     <c:v>3 sem.</c:v>
                   </c:pt>
                   <c:pt idx="1">
-                    <c:v>06-07</c:v>
+                    <c:v>13-07</c:v>
                   </c:pt>
                   <c:pt idx="2">
-                    <c:v>13-07</c:v>
+                    <c:v>20-07</c:v>
                   </c:pt>
                   <c:pt idx="3">
-                    <c:v>20-07</c:v>
+                    <c:v>27-07</c:v>
                   </c:pt>
                   <c:pt idx="4">
-                    <c:v>27-07</c:v>
+                    <c:v>03-08</c:v>
                   </c:pt>
                   <c:pt idx="5">
-                    <c:v>03-08</c:v>
+                    <c:v>10-08</c:v>
                   </c:pt>
                 </c:lvl>
               </c:multiLvlStrCache>
@@ -346,13 +346,13 @@
                 <c:formatCode>General</c:formatCode>
                 <c:ptCount val="6"/>
                 <c:pt idx="0">
-                  <c:v>4</c:v>
+                  <c:v>5</c:v>
                 </c:pt>
                 <c:pt idx="1">
                   <c:v/>
                 </c:pt>
                 <c:pt idx="2">
-                  <c:v/>
+                  <c:v>2</c:v>
                 </c:pt>
                 <c:pt idx="3">
                   <c:v>1</c:v>
@@ -733,7 +733,7 @@
                   <c:v>19</c:v>
                 </c:pt>
                 <c:pt idx="1">
-                  <c:v>189</c:v>
+                  <c:v>192</c:v>
                 </c:pt>
                 <c:pt idx="2">
                   <c:v>71</c:v>
@@ -1198,7 +1198,7 @@
                 <c:formatCode>General</c:formatCode>
                 <c:ptCount val="4"/>
                 <c:pt idx="0">
-                  <c:v>279</c:v>
+                  <c:v>283</c:v>
                 </c:pt>
                 <c:pt idx="1">
                   <c:v>117</c:v>
@@ -1288,7 +1288,7 @@
                 <c:formatCode>General</c:formatCode>
                 <c:ptCount val="4"/>
                 <c:pt idx="0">
-                  <c:v>34</c:v>
+                  <c:v>33</c:v>
                 </c:pt>
                 <c:pt idx="1">
                   <c:v>4</c:v>
@@ -1486,7 +1486,7 @@
                 </a:solidFill>
                 <a:latin typeface="Calibri"/>
               </a:rPr>
-              <a:t>Antigüedad de los 53 hallazgos abiertos</a:t>
+              <a:t>Antigüedad de los 52 hallazgos abiertos</a:t>
             </a:r>
           </a:p>
         </c:rich>
@@ -1567,7 +1567,7 @@
                 <c:formatCode>General</c:formatCode>
                 <c:ptCount val="1"/>
                 <c:pt idx="0">
-                  <c:v>5</c:v>
+                  <c:v>6</c:v>
                 </c:pt>
               </c:numCache>
             </c:numRef>
@@ -1639,7 +1639,7 @@
                 <c:formatCode>General</c:formatCode>
                 <c:ptCount val="1"/>
                 <c:pt idx="0">
-                  <c:v>13</c:v>
+                  <c:v>10</c:v>
                 </c:pt>
               </c:numCache>
             </c:numRef>
@@ -1711,7 +1711,7 @@
                 <c:formatCode>General</c:formatCode>
                 <c:ptCount val="1"/>
                 <c:pt idx="0">
-                  <c:v>16</c:v>
+                  <c:v>17</c:v>
                 </c:pt>
               </c:numCache>
             </c:numRef>
@@ -2572,10 +2572,10 @@
                 <c:formatCode>General</c:formatCode>
                 <c:ptCount val="8"/>
                 <c:pt idx="0">
-                  <c:v>131</c:v>
+                  <c:v>134</c:v>
                 </c:pt>
                 <c:pt idx="1">
-                  <c:v>23</c:v>
+                  <c:v>24</c:v>
                 </c:pt>
                 <c:pt idx="2">
                   <c:v>16</c:v>
@@ -2689,7 +2689,7 @@
                   <c:v>9</c:v>
                 </c:pt>
                 <c:pt idx="1">
-                  <c:v>3</c:v>
+                  <c:v>2</c:v>
                 </c:pt>
                 <c:pt idx="2">
                   <c:v/>
@@ -5426,7 +5426,7 @@
       </p:sp>
       <p:pic>
         <p:nvPicPr>
-          <p:cNvPr id="4" name="Image 0" descr="/home/user/Inversiones/modulo_nc/besalco_logo.png">    </p:cNvPr>
+          <p:cNvPr id="4" name="Image 0" descr="/workspace/dashboard-hseq/panel_control_TOP_P1/besalco_logo.png">    </p:cNvPr>
           <p:cNvPicPr>
             <a:picLocks noChangeAspect="1"/>
           </p:cNvPicPr>
@@ -5621,7 +5621,7 @@
                 <a:ea typeface="Calibri" pitchFamily="34" charset="-122"/>
                 <a:cs typeface="Calibri" pitchFamily="34" charset="-120"/>
               </a:rPr>
-              <a:t>495 hallazgos levantados entre 10-02-2023 y 05-08-2026 (Desaladora 82 · Talabre 241 · Arqueros 164 · Oficina Central 8).</a:t>
+              <a:t>498 hallazgos levantados entre 10-02-2023 y 11-08-2026 (Desaladora 82 · Talabre 244 · Arqueros 164 · Oficina Central 8).</a:t>
             </a:r>
             <a:endParaRPr lang="en-US" sz="1350" dirty="0"/>
           </a:p>
@@ -5680,7 +5680,7 @@
                 <a:ea typeface="Cambria" pitchFamily="34" charset="-122"/>
                 <a:cs typeface="Cambria" pitchFamily="34" charset="-120"/>
               </a:rPr>
-              <a:t>89,3%</a:t>
+              <a:t>89,6%</a:t>
             </a:r>
             <a:endParaRPr lang="en-US" sz="3400" dirty="0"/>
           </a:p>
@@ -5758,7 +5758,7 @@
                 <a:ea typeface="Cambria" pitchFamily="34" charset="-122"/>
                 <a:cs typeface="Cambria" pitchFamily="34" charset="-120"/>
               </a:rPr>
-              <a:t>53</a:t>
+              <a:t>52</a:t>
             </a:r>
             <a:endParaRPr lang="en-US" sz="3400" dirty="0"/>
           </a:p>
@@ -5992,7 +5992,7 @@
                 <a:ea typeface="Calibri" pitchFamily="34" charset="-122"/>
                 <a:cs typeface="Calibri" pitchFamily="34" charset="-120"/>
               </a:rPr>
-              <a:t>Corte: 10-08-2026</a:t>
+              <a:t>Corte: 17-08-2026</a:t>
             </a:r>
             <a:endParaRPr lang="en-US" sz="1100" dirty="0"/>
           </a:p>
@@ -6031,7 +6031,7 @@
                 <a:ea typeface="Calibri" pitchFamily="34" charset="-122"/>
                 <a:cs typeface="Calibri" pitchFamily="34" charset="-120"/>
               </a:rPr>
-              <a:t>Fuente: 5f2decc2-Data_NCR10082026.xlsx — hoja «Observaciones» · Corte 10-08-2026 · 495 registros desde 10-02-2023</a:t>
+              <a:t>Fuente: 2da31d24-Data_NCR17082026.xlsx — hoja «Observaciones» · Corte 17-08-2026 · 498 registros desde 10-02-2023</a:t>
             </a:r>
             <a:endParaRPr lang="en-US" sz="850" dirty="0"/>
           </a:p>
@@ -6110,7 +6110,7 @@
       </p:grpSpPr>
       <p:pic>
         <p:nvPicPr>
-          <p:cNvPr id="2" name="Image 0" descr="/home/user/Inversiones/modulo_nc/besalco_logo.png">    </p:cNvPr>
+          <p:cNvPr id="2" name="Image 0" descr="/workspace/dashboard-hseq/panel_control_TOP_P1/besalco_logo.png">    </p:cNvPr>
           <p:cNvPicPr>
             <a:picLocks noChangeAspect="1"/>
           </p:cNvPicPr>
@@ -6851,7 +6851,7 @@
                 <a:ea typeface="Calibri" pitchFamily="34" charset="-122"/>
                 <a:cs typeface="Calibri" pitchFamily="34" charset="-120"/>
               </a:rPr>
-              <a:t>90</a:t>
+              <a:t>97</a:t>
             </a:r>
             <a:endParaRPr lang="en-US" sz="1050" dirty="0"/>
           </a:p>
@@ -6974,7 +6974,7 @@
                 <a:ea typeface="Calibri" pitchFamily="34" charset="-122"/>
                 <a:cs typeface="Calibri" pitchFamily="34" charset="-120"/>
               </a:rPr>
-              <a:t>SEMANA 03-08-2026 — 09-08-2026</a:t>
+              <a:t>SEMANA 10-08-2026 — 16-08-2026</a:t>
             </a:r>
             <a:endParaRPr lang="en-US" sz="1000" dirty="0"/>
           </a:p>
@@ -7052,7 +7052,7 @@
                 <a:ea typeface="Calibri" pitchFamily="34" charset="-122"/>
                 <a:cs typeface="Calibri" pitchFamily="34" charset="-120"/>
               </a:rPr>
-              <a:t>Fuente: 5f2decc2-Data_NCR10082026.xlsx — hoja «Observaciones» · Corte 10-08-2026 · 495 registros desde 10-02-2023</a:t>
+              <a:t>Fuente: 2da31d24-Data_NCR17082026.xlsx — hoja «Observaciones» · Corte 17-08-2026 · 498 registros desde 10-02-2023</a:t>
             </a:r>
             <a:endParaRPr lang="en-US" sz="850" dirty="0"/>
           </a:p>
@@ -7210,7 +7210,7 @@
       </p:sp>
       <p:pic>
         <p:nvPicPr>
-          <p:cNvPr id="4" name="Image 0" descr="/home/user/Inversiones/modulo_nc/besalco_logo.png">    </p:cNvPr>
+          <p:cNvPr id="4" name="Image 0" descr="/workspace/dashboard-hseq/panel_control_TOP_P1/besalco_logo.png">    </p:cNvPr>
           <p:cNvPicPr>
             <a:picLocks noChangeAspect="1"/>
           </p:cNvPicPr>
@@ -7405,7 +7405,7 @@
                 <a:ea typeface="Calibri" pitchFamily="34" charset="-122"/>
                 <a:cs typeface="Calibri" pitchFamily="34" charset="-120"/>
               </a:rPr>
-              <a:t>241 hallazgos levantados · 52 internas · 189 del cliente · 12 especialidades involucradas.</a:t>
+              <a:t>244 hallazgos levantados · 52 internas · 192 del cliente · 12 especialidades involucradas.</a:t>
             </a:r>
             <a:endParaRPr lang="en-US" sz="1350" dirty="0"/>
           </a:p>
@@ -7464,7 +7464,7 @@
                 <a:ea typeface="Cambria" pitchFamily="34" charset="-122"/>
                 <a:cs typeface="Cambria" pitchFamily="34" charset="-120"/>
               </a:rPr>
-              <a:t>93,8%</a:t>
+              <a:t>94,3%</a:t>
             </a:r>
             <a:endParaRPr lang="en-US" sz="3400" dirty="0"/>
           </a:p>
@@ -7542,7 +7542,7 @@
                 <a:ea typeface="Cambria" pitchFamily="34" charset="-122"/>
                 <a:cs typeface="Cambria" pitchFamily="34" charset="-120"/>
               </a:rPr>
-              <a:t>15</a:t>
+              <a:t>14</a:t>
             </a:r>
             <a:endParaRPr lang="en-US" sz="3400" dirty="0"/>
           </a:p>
@@ -7698,7 +7698,7 @@
                 <a:ea typeface="Cambria" pitchFamily="34" charset="-122"/>
                 <a:cs typeface="Cambria" pitchFamily="34" charset="-120"/>
               </a:rPr>
-              <a:t>21,6%</a:t>
+              <a:t>21,3%</a:t>
             </a:r>
             <a:endParaRPr lang="en-US" sz="3400" dirty="0"/>
           </a:p>
@@ -7776,7 +7776,7 @@
                 <a:ea typeface="Calibri" pitchFamily="34" charset="-122"/>
                 <a:cs typeface="Calibri" pitchFamily="34" charset="-120"/>
               </a:rPr>
-              <a:t>Corte: 10-08-2026</a:t>
+              <a:t>Corte: 17-08-2026</a:t>
             </a:r>
             <a:endParaRPr lang="en-US" sz="1100" dirty="0"/>
           </a:p>
@@ -7815,7 +7815,7 @@
                 <a:ea typeface="Calibri" pitchFamily="34" charset="-122"/>
                 <a:cs typeface="Calibri" pitchFamily="34" charset="-120"/>
               </a:rPr>
-              <a:t>Fuente: 5f2decc2-Data_NCR10082026.xlsx — hoja «Observaciones» · Corte 10-08-2026 · 495 registros desde 10-02-2023</a:t>
+              <a:t>Fuente: 2da31d24-Data_NCR17082026.xlsx — hoja «Observaciones» · Corte 17-08-2026 · 498 registros desde 10-02-2023</a:t>
             </a:r>
             <a:endParaRPr lang="en-US" sz="850" dirty="0"/>
           </a:p>
@@ -7894,7 +7894,7 @@
       </p:grpSpPr>
       <p:pic>
         <p:nvPicPr>
-          <p:cNvPr id="2" name="Image 0" descr="/home/user/Inversiones/modulo_nc/besalco_logo.png">    </p:cNvPr>
+          <p:cNvPr id="2" name="Image 0" descr="/workspace/dashboard-hseq/panel_control_TOP_P1/besalco_logo.png">    </p:cNvPr>
           <p:cNvPicPr>
             <a:picLocks noChangeAspect="1"/>
           </p:cNvPicPr>
@@ -8081,7 +8081,7 @@
                 <a:ea typeface="Cambria" pitchFamily="34" charset="-122"/>
                 <a:cs typeface="Cambria" pitchFamily="34" charset="-120"/>
               </a:rPr>
-              <a:t>241</a:t>
+              <a:t>244</a:t>
             </a:r>
             <a:endParaRPr lang="en-US" sz="4000" dirty="0"/>
           </a:p>
@@ -8120,7 +8120,7 @@
                 <a:ea typeface="Calibri" pitchFamily="34" charset="-122"/>
                 <a:cs typeface="Calibri" pitchFamily="34" charset="-120"/>
               </a:rPr>
-              <a:t>226 cerrados</a:t>
+              <a:t>230 cerrados</a:t>
             </a:r>
             <a:endParaRPr lang="en-US" sz="1400" dirty="0"/>
           </a:p>
@@ -8198,7 +8198,7 @@
                 <a:ea typeface="Calibri" pitchFamily="34" charset="-122"/>
                 <a:cs typeface="Calibri" pitchFamily="34" charset="-120"/>
               </a:rPr>
-              <a:t>52 internas · 189 del cliente</a:t>
+              <a:t>52 internas · 192 del cliente</a:t>
             </a:r>
             <a:endParaRPr lang="en-US" sz="950" dirty="0"/>
           </a:p>
@@ -8291,7 +8291,7 @@
                 <a:ea typeface="Cambria" pitchFamily="34" charset="-122"/>
                 <a:cs typeface="Cambria" pitchFamily="34" charset="-120"/>
               </a:rPr>
-              <a:t>93,8%</a:t>
+              <a:t>94,3%</a:t>
             </a:r>
             <a:endParaRPr lang="en-US" sz="4000" dirty="0"/>
           </a:p>
@@ -8330,7 +8330,7 @@
                 <a:ea typeface="Calibri" pitchFamily="34" charset="-122"/>
                 <a:cs typeface="Calibri" pitchFamily="34" charset="-120"/>
               </a:rPr>
-              <a:t>226/241</a:t>
+              <a:t>230/244</a:t>
             </a:r>
             <a:endParaRPr lang="en-US" sz="1400" dirty="0"/>
           </a:p>
@@ -8408,7 +8408,7 @@
                 <a:ea typeface="Calibri" pitchFamily="34" charset="-122"/>
                 <a:cs typeface="Calibri" pitchFamily="34" charset="-120"/>
               </a:rPr>
-              <a:t>Global del módulo: 89,3%</a:t>
+              <a:t>Global del módulo: 89,6%</a:t>
             </a:r>
             <a:endParaRPr lang="en-US" sz="950" dirty="0"/>
           </a:p>
@@ -8501,7 +8501,7 @@
                 <a:ea typeface="Cambria" pitchFamily="34" charset="-122"/>
                 <a:cs typeface="Cambria" pitchFamily="34" charset="-120"/>
               </a:rPr>
-              <a:t>15</a:t>
+              <a:t>14</a:t>
             </a:r>
             <a:endParaRPr lang="en-US" sz="4000" dirty="0"/>
           </a:p>
@@ -8618,7 +8618,7 @@
                 <a:ea typeface="Calibri" pitchFamily="34" charset="-122"/>
                 <a:cs typeface="Calibri" pitchFamily="34" charset="-120"/>
               </a:rPr>
-              <a:t>12 iniciado · 1 no aceptado · 2 listo para revisión</a:t>
+              <a:t>13 iniciado · 1 no aceptado</a:t>
             </a:r>
             <a:endParaRPr lang="en-US" sz="950" dirty="0"/>
           </a:p>
@@ -8944,7 +8944,7 @@
                 <a:ea typeface="Cambria" pitchFamily="34" charset="-122"/>
                 <a:cs typeface="Cambria" pitchFamily="34" charset="-120"/>
               </a:rPr>
-              <a:t>21,6%</a:t>
+              <a:t>21,3%</a:t>
             </a:r>
             <a:endParaRPr lang="en-US" sz="2600" dirty="0"/>
           </a:p>
@@ -9006,7 +9006,7 @@
                 <a:ea typeface="Calibri" pitchFamily="34" charset="-122"/>
                 <a:cs typeface="Calibri" pitchFamily="34" charset="-120"/>
               </a:rPr>
-              <a:t>global del módulo 32,7%</a:t>
+              <a:t>global del módulo 32,5%</a:t>
             </a:r>
             <a:endParaRPr lang="en-US" sz="1000" dirty="0"/>
           </a:p>
@@ -9264,7 +9264,7 @@
                 <a:ea typeface="Calibri" pitchFamily="34" charset="-122"/>
                 <a:cs typeface="Calibri" pitchFamily="34" charset="-120"/>
               </a:rPr>
-              <a:t>12 ab.</a:t>
+              <a:t>11 ab.</a:t>
             </a:r>
             <a:endParaRPr lang="en-US" sz="950" dirty="0"/>
           </a:p>
@@ -9303,7 +9303,7 @@
                 <a:ea typeface="Cambria" pitchFamily="34" charset="-122"/>
                 <a:cs typeface="Cambria" pitchFamily="34" charset="-120"/>
               </a:rPr>
-              <a:t>189</a:t>
+              <a:t>192</a:t>
             </a:r>
             <a:endParaRPr lang="en-US" sz="1600" dirty="0"/>
           </a:p>
@@ -9342,7 +9342,7 @@
                 <a:ea typeface="Calibri" pitchFamily="34" charset="-122"/>
                 <a:cs typeface="Calibri" pitchFamily="34" charset="-120"/>
               </a:rPr>
-              <a:t>Fuente: 5f2decc2-Data_NCR10082026.xlsx — hoja «Observaciones» · Corte 10-08-2026 · 495 registros desde 10-02-2023</a:t>
+              <a:t>Fuente: 2da31d24-Data_NCR17082026.xlsx — hoja «Observaciones» · Corte 17-08-2026 · 498 registros desde 10-02-2023</a:t>
             </a:r>
             <a:endParaRPr lang="en-US" sz="850" dirty="0"/>
           </a:p>
@@ -9460,7 +9460,7 @@
       </p:grpSpPr>
       <p:pic>
         <p:nvPicPr>
-          <p:cNvPr id="2" name="Image 0" descr="/home/user/Inversiones/modulo_nc/besalco_logo.png">    </p:cNvPr>
+          <p:cNvPr id="2" name="Image 0" descr="/workspace/dashboard-hseq/panel_control_TOP_P1/besalco_logo.png">    </p:cNvPr>
           <p:cNvPicPr>
             <a:picLocks noChangeAspect="1"/>
           </p:cNvPicPr>
@@ -9593,7 +9593,7 @@
                 <a:ea typeface="Calibri" pitchFamily="34" charset="-122"/>
                 <a:cs typeface="Calibri" pitchFamily="34" charset="-120"/>
               </a:rPr>
-              <a:t>15 hallazgos siguen abiertos; 3 con más de 180 días. Se listan del más antiguo al más reciente.</a:t>
+              <a:t>14 hallazgos siguen abiertos; 3 con más de 180 días. Se listan del más antiguo al más reciente.</a:t>
             </a:r>
             <a:endParaRPr lang="en-US" sz="1350" dirty="0"/>
           </a:p>
@@ -10201,7 +10201,7 @@
                 <a:ea typeface="Calibri" pitchFamily="34" charset="-122"/>
                 <a:cs typeface="Calibri" pitchFamily="34" charset="-120"/>
               </a:rPr>
-              <a:t>399</a:t>
+              <a:t>406</a:t>
             </a:r>
             <a:endParaRPr lang="en-US" sz="1050" dirty="0"/>
           </a:p>
@@ -10556,7 +10556,7 @@
                 <a:ea typeface="Calibri" pitchFamily="34" charset="-122"/>
                 <a:cs typeface="Calibri" pitchFamily="34" charset="-120"/>
               </a:rPr>
-              <a:t>335</a:t>
+              <a:t>342</a:t>
             </a:r>
             <a:endParaRPr lang="en-US" sz="1050" dirty="0"/>
           </a:p>
@@ -10891,7 +10891,7 @@
                 <a:ea typeface="Calibri" pitchFamily="34" charset="-122"/>
                 <a:cs typeface="Calibri" pitchFamily="34" charset="-120"/>
               </a:rPr>
-              <a:t>231</a:t>
+              <a:t>238</a:t>
             </a:r>
             <a:endParaRPr lang="en-US" sz="1050" dirty="0"/>
           </a:p>
@@ -11246,7 +11246,7 @@
                 <a:ea typeface="Calibri" pitchFamily="34" charset="-122"/>
                 <a:cs typeface="Calibri" pitchFamily="34" charset="-120"/>
               </a:rPr>
-              <a:t>146</a:t>
+              <a:t>153</a:t>
             </a:r>
             <a:endParaRPr lang="en-US" sz="1050" dirty="0"/>
           </a:p>
@@ -11581,7 +11581,7 @@
                 <a:ea typeface="Calibri" pitchFamily="34" charset="-122"/>
                 <a:cs typeface="Calibri" pitchFamily="34" charset="-120"/>
               </a:rPr>
-              <a:t>140</a:t>
+              <a:t>147</a:t>
             </a:r>
             <a:endParaRPr lang="en-US" sz="1050" dirty="0"/>
           </a:p>
@@ -11936,7 +11936,7 @@
                 <a:ea typeface="Calibri" pitchFamily="34" charset="-122"/>
                 <a:cs typeface="Calibri" pitchFamily="34" charset="-120"/>
               </a:rPr>
-              <a:t>126</a:t>
+              <a:t>133</a:t>
             </a:r>
             <a:endParaRPr lang="en-US" sz="1050" dirty="0"/>
           </a:p>
@@ -12271,7 +12271,7 @@
                 <a:ea typeface="Calibri" pitchFamily="34" charset="-122"/>
                 <a:cs typeface="Calibri" pitchFamily="34" charset="-120"/>
               </a:rPr>
-              <a:t>118</a:t>
+              <a:t>125</a:t>
             </a:r>
             <a:endParaRPr lang="en-US" sz="1050" dirty="0"/>
           </a:p>
@@ -12392,7 +12392,7 @@
                 <a:ea typeface="Calibri" pitchFamily="34" charset="-122"/>
                 <a:cs typeface="Calibri" pitchFamily="34" charset="-120"/>
               </a:rPr>
-              <a:t>228</a:t>
+              <a:t>230</a:t>
             </a:r>
             <a:endParaRPr lang="en-US" sz="1050" dirty="0"/>
           </a:p>
@@ -12587,7 +12587,7 @@
                 <a:ea typeface="Calibri" pitchFamily="34" charset="-122"/>
                 <a:cs typeface="Calibri" pitchFamily="34" charset="-120"/>
               </a:rPr>
-              <a:t>Listo para revisi…</a:t>
+              <a:t>Iniciado</a:t>
             </a:r>
             <a:endParaRPr lang="en-US" sz="1050" dirty="0"/>
           </a:p>
@@ -12626,7 +12626,7 @@
                 <a:ea typeface="Calibri" pitchFamily="34" charset="-122"/>
                 <a:cs typeface="Calibri" pitchFamily="34" charset="-120"/>
               </a:rPr>
-              <a:t>62</a:t>
+              <a:t>69</a:t>
             </a:r>
             <a:endParaRPr lang="en-US" sz="1050" dirty="0"/>
           </a:p>
@@ -12665,7 +12665,7 @@
                 <a:ea typeface="Calibri" pitchFamily="34" charset="-122"/>
                 <a:cs typeface="Calibri" pitchFamily="34" charset="-120"/>
               </a:rPr>
-              <a:t>Durante la auditoría se identificar…</a:t>
+              <a:t>No se evidenció un Plan de Cierre d…</a:t>
             </a:r>
             <a:endParaRPr lang="en-US" sz="1000" dirty="0"/>
           </a:p>
@@ -12727,7 +12727,7 @@
                 <a:ea typeface="Calibri" pitchFamily="34" charset="-122"/>
                 <a:cs typeface="Calibri" pitchFamily="34" charset="-120"/>
               </a:rPr>
-              <a:t>230</a:t>
+              <a:t>235</a:t>
             </a:r>
             <a:endParaRPr lang="en-US" sz="1050" dirty="0"/>
           </a:p>
@@ -12844,7 +12844,7 @@
                 <a:ea typeface="Calibri" pitchFamily="34" charset="-122"/>
                 <a:cs typeface="Calibri" pitchFamily="34" charset="-120"/>
               </a:rPr>
-              <a:t>CALIDAD</a:t>
+              <a:t>OO.CC</a:t>
             </a:r>
             <a:endParaRPr lang="en-US" sz="1050" dirty="0"/>
           </a:p>
@@ -12883,7 +12883,7 @@
                 <a:ea typeface="Calibri" pitchFamily="34" charset="-122"/>
                 <a:cs typeface="Calibri" pitchFamily="34" charset="-120"/>
               </a:rPr>
-              <a:t>Mauricio Soto B.</a:t>
+              <a:t>Mauricio Rocha A.</a:t>
             </a:r>
             <a:endParaRPr lang="en-US" sz="1050" dirty="0"/>
           </a:p>
@@ -12961,7 +12961,7 @@
                 <a:ea typeface="Calibri" pitchFamily="34" charset="-122"/>
                 <a:cs typeface="Calibri" pitchFamily="34" charset="-120"/>
               </a:rPr>
-              <a:t>62</a:t>
+              <a:t>48</a:t>
             </a:r>
             <a:endParaRPr lang="en-US" sz="1050" dirty="0"/>
           </a:p>
@@ -13000,7 +13000,7 @@
                 <a:ea typeface="Calibri" pitchFamily="34" charset="-122"/>
                 <a:cs typeface="Calibri" pitchFamily="34" charset="-120"/>
               </a:rPr>
-              <a:t>No se evidenció un Plan de Cierre d…</a:t>
+              <a:t>Geomembrana presenta sectores en lo…</a:t>
             </a:r>
             <a:endParaRPr lang="en-US" sz="1000" dirty="0"/>
           </a:p>
@@ -13062,7 +13062,7 @@
                 <a:ea typeface="Calibri" pitchFamily="34" charset="-122"/>
                 <a:cs typeface="Calibri" pitchFamily="34" charset="-120"/>
               </a:rPr>
-              <a:t>Se listan los 9 más antiguos de 15 abiertos; el detalle completo está en el panel.</a:t>
+              <a:t>Se listan los 9 más antiguos de 14 abiertos; el detalle completo está en el panel.</a:t>
             </a:r>
             <a:endParaRPr lang="en-US" sz="950" dirty="0"/>
           </a:p>
@@ -13123,7 +13123,7 @@
                 <a:ea typeface="Calibri" pitchFamily="34" charset="-122"/>
                 <a:cs typeface="Calibri" pitchFamily="34" charset="-120"/>
               </a:rPr>
-              <a:t>SEMANA 03-08-2026 — 09-08-2026</a:t>
+              <a:t>SEMANA 10-08-2026 — 16-08-2026</a:t>
             </a:r>
             <a:endParaRPr lang="en-US" sz="1000" dirty="0"/>
           </a:p>
@@ -13162,7 +13162,7 @@
                 <a:ea typeface="Calibri" pitchFamily="34" charset="-122"/>
                 <a:cs typeface="Calibri" pitchFamily="34" charset="-120"/>
               </a:rPr>
-              <a:t>1 hallazgo nuevo · 0 internas · 1 del cliente · PIPING 1 · 0 siguen abiertos</a:t>
+              <a:t>3 hallazgos nuevos · 0 internas · 3 del cliente · OO.CC 3 · 2 siguen abiertos</a:t>
             </a:r>
             <a:endParaRPr lang="en-US" sz="1150" dirty="0"/>
           </a:p>
@@ -13201,7 +13201,7 @@
                 <a:ea typeface="Calibri" pitchFamily="34" charset="-122"/>
                 <a:cs typeface="Calibri" pitchFamily="34" charset="-120"/>
               </a:rPr>
-              <a:t>Fuente: 5f2decc2-Data_NCR10082026.xlsx — hoja «Observaciones» · Corte 10-08-2026 · 495 registros desde 10-02-2023</a:t>
+              <a:t>Fuente: 2da31d24-Data_NCR17082026.xlsx — hoja «Observaciones» · Corte 17-08-2026 · 498 registros desde 10-02-2023</a:t>
             </a:r>
             <a:endParaRPr lang="en-US" sz="850" dirty="0"/>
           </a:p>
@@ -13359,7 +13359,7 @@
       </p:sp>
       <p:pic>
         <p:nvPicPr>
-          <p:cNvPr id="4" name="Image 0" descr="/home/user/Inversiones/modulo_nc/besalco_logo.png">    </p:cNvPr>
+          <p:cNvPr id="4" name="Image 0" descr="/workspace/dashboard-hseq/panel_control_TOP_P1/besalco_logo.png">    </p:cNvPr>
           <p:cNvPicPr>
             <a:picLocks noChangeAspect="1"/>
           </p:cNvPicPr>
@@ -13925,7 +13925,7 @@
                 <a:ea typeface="Calibri" pitchFamily="34" charset="-122"/>
                 <a:cs typeface="Calibri" pitchFamily="34" charset="-120"/>
               </a:rPr>
-              <a:t>Corte: 10-08-2026</a:t>
+              <a:t>Corte: 17-08-2026</a:t>
             </a:r>
             <a:endParaRPr lang="en-US" sz="1100" dirty="0"/>
           </a:p>
@@ -13964,7 +13964,7 @@
                 <a:ea typeface="Calibri" pitchFamily="34" charset="-122"/>
                 <a:cs typeface="Calibri" pitchFamily="34" charset="-120"/>
               </a:rPr>
-              <a:t>Fuente: 5f2decc2-Data_NCR10082026.xlsx — hoja «Observaciones» · Corte 10-08-2026 · 495 registros desde 10-02-2023</a:t>
+              <a:t>Fuente: 2da31d24-Data_NCR17082026.xlsx — hoja «Observaciones» · Corte 17-08-2026 · 498 registros desde 10-02-2023</a:t>
             </a:r>
             <a:endParaRPr lang="en-US" sz="850" dirty="0"/>
           </a:p>
@@ -14043,7 +14043,7 @@
       </p:grpSpPr>
       <p:pic>
         <p:nvPicPr>
-          <p:cNvPr id="2" name="Image 0" descr="/home/user/Inversiones/modulo_nc/besalco_logo.png">    </p:cNvPr>
+          <p:cNvPr id="2" name="Image 0" descr="/workspace/dashboard-hseq/panel_control_TOP_P1/besalco_logo.png">    </p:cNvPr>
           <p:cNvPicPr>
             <a:picLocks noChangeAspect="1"/>
           </p:cNvPicPr>
@@ -14557,7 +14557,7 @@
                 <a:ea typeface="Calibri" pitchFamily="34" charset="-122"/>
                 <a:cs typeface="Calibri" pitchFamily="34" charset="-120"/>
               </a:rPr>
-              <a:t>Global del módulo: 89,3%</a:t>
+              <a:t>Global del módulo: 89,6%</a:t>
             </a:r>
             <a:endParaRPr lang="en-US" sz="950" dirty="0"/>
           </a:p>
@@ -15155,7 +15155,7 @@
                 <a:ea typeface="Calibri" pitchFamily="34" charset="-122"/>
                 <a:cs typeface="Calibri" pitchFamily="34" charset="-120"/>
               </a:rPr>
-              <a:t>global del módulo 32,7%</a:t>
+              <a:t>global del módulo 32,5%</a:t>
             </a:r>
             <a:endParaRPr lang="en-US" sz="1000" dirty="0"/>
           </a:p>
@@ -15628,7 +15628,7 @@
                 <a:ea typeface="Calibri" pitchFamily="34" charset="-122"/>
                 <a:cs typeface="Calibri" pitchFamily="34" charset="-120"/>
               </a:rPr>
-              <a:t>Fuente: 5f2decc2-Data_NCR10082026.xlsx — hoja «Observaciones» · Corte 10-08-2026 · 495 registros desde 10-02-2023</a:t>
+              <a:t>Fuente: 2da31d24-Data_NCR17082026.xlsx — hoja «Observaciones» · Corte 17-08-2026 · 498 registros desde 10-02-2023</a:t>
             </a:r>
             <a:endParaRPr lang="en-US" sz="850" dirty="0"/>
           </a:p>
@@ -15746,7 +15746,7 @@
       </p:grpSpPr>
       <p:pic>
         <p:nvPicPr>
-          <p:cNvPr id="2" name="Image 0" descr="/home/user/Inversiones/modulo_nc/besalco_logo.png">    </p:cNvPr>
+          <p:cNvPr id="2" name="Image 0" descr="/workspace/dashboard-hseq/panel_control_TOP_P1/besalco_logo.png">    </p:cNvPr>
           <p:cNvPicPr>
             <a:picLocks noChangeAspect="1"/>
           </p:cNvPicPr>
@@ -16487,7 +16487,7 @@
                 <a:ea typeface="Calibri" pitchFamily="34" charset="-122"/>
                 <a:cs typeface="Calibri" pitchFamily="34" charset="-120"/>
               </a:rPr>
-              <a:t>402</a:t>
+              <a:t>409</a:t>
             </a:r>
             <a:endParaRPr lang="en-US" sz="1050" dirty="0"/>
           </a:p>
@@ -16842,7 +16842,7 @@
                 <a:ea typeface="Calibri" pitchFamily="34" charset="-122"/>
                 <a:cs typeface="Calibri" pitchFamily="34" charset="-120"/>
               </a:rPr>
-              <a:t>399</a:t>
+              <a:t>406</a:t>
             </a:r>
             <a:endParaRPr lang="en-US" sz="1050" dirty="0"/>
           </a:p>
@@ -17177,7 +17177,7 @@
                 <a:ea typeface="Calibri" pitchFamily="34" charset="-122"/>
                 <a:cs typeface="Calibri" pitchFamily="34" charset="-120"/>
               </a:rPr>
-              <a:t>368</a:t>
+              <a:t>375</a:t>
             </a:r>
             <a:endParaRPr lang="en-US" sz="1050" dirty="0"/>
           </a:p>
@@ -17532,7 +17532,7 @@
                 <a:ea typeface="Calibri" pitchFamily="34" charset="-122"/>
                 <a:cs typeface="Calibri" pitchFamily="34" charset="-120"/>
               </a:rPr>
-              <a:t>356</a:t>
+              <a:t>363</a:t>
             </a:r>
             <a:endParaRPr lang="en-US" sz="1050" dirty="0"/>
           </a:p>
@@ -17867,7 +17867,7 @@
                 <a:ea typeface="Calibri" pitchFamily="34" charset="-122"/>
                 <a:cs typeface="Calibri" pitchFamily="34" charset="-120"/>
               </a:rPr>
-              <a:t>328</a:t>
+              <a:t>335</a:t>
             </a:r>
             <a:endParaRPr lang="en-US" sz="1050" dirty="0"/>
           </a:p>
@@ -18222,7 +18222,7 @@
                 <a:ea typeface="Calibri" pitchFamily="34" charset="-122"/>
                 <a:cs typeface="Calibri" pitchFamily="34" charset="-120"/>
               </a:rPr>
-              <a:t>298</a:t>
+              <a:t>305</a:t>
             </a:r>
             <a:endParaRPr lang="en-US" sz="1050" dirty="0"/>
           </a:p>
@@ -18557,7 +18557,7 @@
                 <a:ea typeface="Calibri" pitchFamily="34" charset="-122"/>
                 <a:cs typeface="Calibri" pitchFamily="34" charset="-120"/>
               </a:rPr>
-              <a:t>298</a:t>
+              <a:t>305</a:t>
             </a:r>
             <a:endParaRPr lang="en-US" sz="1050" dirty="0"/>
           </a:p>
@@ -18912,7 +18912,7 @@
                 <a:ea typeface="Calibri" pitchFamily="34" charset="-122"/>
                 <a:cs typeface="Calibri" pitchFamily="34" charset="-120"/>
               </a:rPr>
-              <a:t>277</a:t>
+              <a:t>284</a:t>
             </a:r>
             <a:endParaRPr lang="en-US" sz="1050" dirty="0"/>
           </a:p>
@@ -19247,7 +19247,7 @@
                 <a:ea typeface="Calibri" pitchFamily="34" charset="-122"/>
                 <a:cs typeface="Calibri" pitchFamily="34" charset="-120"/>
               </a:rPr>
-              <a:t>273</a:t>
+              <a:t>280</a:t>
             </a:r>
             <a:endParaRPr lang="en-US" sz="1050" dirty="0"/>
           </a:p>
@@ -19409,7 +19409,7 @@
                 <a:ea typeface="Calibri" pitchFamily="34" charset="-122"/>
                 <a:cs typeface="Calibri" pitchFamily="34" charset="-120"/>
               </a:rPr>
-              <a:t>SEMANA 03-08-2026 — 09-08-2026</a:t>
+              <a:t>SEMANA 10-08-2026 — 16-08-2026</a:t>
             </a:r>
             <a:endParaRPr lang="en-US" sz="1000" dirty="0"/>
           </a:p>
@@ -19487,7 +19487,7 @@
                 <a:ea typeface="Calibri" pitchFamily="34" charset="-122"/>
                 <a:cs typeface="Calibri" pitchFamily="34" charset="-120"/>
               </a:rPr>
-              <a:t>Fuente: 5f2decc2-Data_NCR10082026.xlsx — hoja «Observaciones» · Corte 10-08-2026 · 495 registros desde 10-02-2023</a:t>
+              <a:t>Fuente: 2da31d24-Data_NCR17082026.xlsx — hoja «Observaciones» · Corte 17-08-2026 · 498 registros desde 10-02-2023</a:t>
             </a:r>
             <a:endParaRPr lang="en-US" sz="850" dirty="0"/>
           </a:p>
@@ -19605,7 +19605,7 @@
       </p:grpSpPr>
       <p:pic>
         <p:nvPicPr>
-          <p:cNvPr id="2" name="Image 0" descr="/home/user/Inversiones/modulo_nc/besalco_logo.png">    </p:cNvPr>
+          <p:cNvPr id="2" name="Image 0" descr="/workspace/dashboard-hseq/panel_control_TOP_P1/besalco_logo.png">    </p:cNvPr>
           <p:cNvPicPr>
             <a:picLocks noChangeAspect="1"/>
           </p:cNvPicPr>
@@ -19792,7 +19792,7 @@
                 <a:ea typeface="Cambria" pitchFamily="34" charset="-122"/>
                 <a:cs typeface="Cambria" pitchFamily="34" charset="-120"/>
               </a:rPr>
-              <a:t>89,3%</a:t>
+              <a:t>89,6%</a:t>
             </a:r>
             <a:endParaRPr lang="en-US" sz="4000" dirty="0"/>
           </a:p>
@@ -19831,7 +19831,7 @@
                 <a:ea typeface="Calibri" pitchFamily="34" charset="-122"/>
                 <a:cs typeface="Calibri" pitchFamily="34" charset="-120"/>
               </a:rPr>
-              <a:t>442/495</a:t>
+              <a:t>446/498</a:t>
             </a:r>
             <a:endParaRPr lang="en-US" sz="1400" dirty="0"/>
           </a:p>
@@ -19909,7 +19909,7 @@
                 <a:ea typeface="Calibri" pitchFamily="34" charset="-122"/>
                 <a:cs typeface="Calibri" pitchFamily="34" charset="-120"/>
               </a:rPr>
-              <a:t>53 abiertos · 19 con más de 180 días</a:t>
+              <a:t>52 abiertos · 19 con más de 180 días</a:t>
             </a:r>
             <a:endParaRPr lang="en-US" sz="950" dirty="0"/>
           </a:p>
@@ -20002,7 +20002,7 @@
                 <a:ea typeface="Cambria" pitchFamily="34" charset="-122"/>
                 <a:cs typeface="Cambria" pitchFamily="34" charset="-120"/>
               </a:rPr>
-              <a:t>53</a:t>
+              <a:t>52</a:t>
             </a:r>
             <a:endParaRPr lang="en-US" sz="4000" dirty="0"/>
           </a:p>
@@ -20041,7 +20041,7 @@
                 <a:ea typeface="Calibri" pitchFamily="34" charset="-122"/>
                 <a:cs typeface="Calibri" pitchFamily="34" charset="-120"/>
               </a:rPr>
-              <a:t>de 495 levantados</a:t>
+              <a:t>de 498 levantados</a:t>
             </a:r>
             <a:endParaRPr lang="en-US" sz="1400" dirty="0"/>
           </a:p>
@@ -20119,7 +20119,7 @@
                 <a:ea typeface="Calibri" pitchFamily="34" charset="-122"/>
                 <a:cs typeface="Calibri" pitchFamily="34" charset="-120"/>
               </a:rPr>
-              <a:t>13 iniciado · 1 no aceptado · 28 listo para revisión · 10 stand by · 1 observada</a:t>
+              <a:t>14 iniciado · 1 no aceptado · 26 listo para revisión · 10 stand by · 1 observada</a:t>
             </a:r>
             <a:endParaRPr lang="en-US" sz="950" dirty="0"/>
           </a:p>
@@ -20212,7 +20212,7 @@
                 <a:ea typeface="Cambria" pitchFamily="34" charset="-122"/>
                 <a:cs typeface="Cambria" pitchFamily="34" charset="-120"/>
               </a:rPr>
-              <a:t>32,7%</a:t>
+              <a:t>32,5%</a:t>
             </a:r>
             <a:endParaRPr lang="en-US" sz="4000" dirty="0"/>
           </a:p>
@@ -20251,7 +20251,7 @@
                 <a:ea typeface="Calibri" pitchFamily="34" charset="-122"/>
                 <a:cs typeface="Calibri" pitchFamily="34" charset="-120"/>
               </a:rPr>
-              <a:t>159/486 clasificados</a:t>
+              <a:t>159/489 clasificados</a:t>
             </a:r>
             <a:endParaRPr lang="en-US" sz="1400" dirty="0"/>
           </a:p>
@@ -20461,7 +20461,7 @@
                 <a:ea typeface="Calibri" pitchFamily="34" charset="-122"/>
                 <a:cs typeface="Calibri" pitchFamily="34" charset="-120"/>
               </a:rPr>
-              <a:t>251 de 495 con costo</a:t>
+              <a:t>251 de 498 con costo</a:t>
             </a:r>
             <a:endParaRPr lang="en-US" sz="1400" dirty="0"/>
           </a:p>
@@ -20539,7 +20539,7 @@
                 <a:ea typeface="Calibri" pitchFamily="34" charset="-122"/>
                 <a:cs typeface="Calibri" pitchFamily="34" charset="-120"/>
               </a:rPr>
-              <a:t>244 hallazgos no declaran costo: la cifra es un piso</a:t>
+              <a:t>247 hallazgos no declaran costo: la cifra es un piso</a:t>
             </a:r>
             <a:endParaRPr lang="en-US" sz="950" dirty="0"/>
           </a:p>
@@ -20679,7 +20679,7 @@
                 <a:ea typeface="Calibri" pitchFamily="34" charset="-122"/>
                 <a:cs typeface="Calibri" pitchFamily="34" charset="-120"/>
               </a:rPr>
-              <a:t>37 de los 53 hallazgos abiertos (69,8%), y es uno de los frentes donde el cliente levanta más de lo que detecta Besalco (71 del cliente contra 53 internas).</a:t>
+              <a:t>37 de los 52 hallazgos abiertos (71,2%), y es uno de los frentes donde el cliente levanta más de lo que detecta Besalco (71 del cliente contra 53 internas).</a:t>
             </a:r>
             <a:endParaRPr lang="en-US" sz="1250" dirty="0"/>
           </a:p>
@@ -20741,7 +20741,7 @@
                 <a:ea typeface="Calibri" pitchFamily="34" charset="-122"/>
                 <a:cs typeface="Calibri" pitchFamily="34" charset="-120"/>
               </a:rPr>
-              <a:t>La semana trajo 1 hallazgo nuevo, ninguno de autodetección.  </a:t>
+              <a:t>La semana trajo 3 hallazgos nuevos, ninguno de autodetección.  </a:t>
             </a:r>
             <a:pPr indent="0" marL="0">
               <a:lnSpc>
@@ -20758,7 +20758,7 @@
                 <a:ea typeface="Calibri" pitchFamily="34" charset="-122"/>
                 <a:cs typeface="Calibri" pitchFamily="34" charset="-120"/>
               </a:rPr>
-              <a:t>03-08-2026 al 09-08-2026: 1 del cliente en PIPING (1). 0 siguen abiertos; la semana anterior entraron 4.</a:t>
+              <a:t>10-08-2026 al 16-08-2026: 3 del cliente en OO.CC (3). 2 siguen abiertos; la semana anterior entraron 1.</a:t>
             </a:r>
             <a:endParaRPr lang="en-US" sz="1250" dirty="0"/>
           </a:p>
@@ -20820,7 +20820,7 @@
                 <a:ea typeface="Calibri" pitchFamily="34" charset="-122"/>
                 <a:cs typeface="Calibri" pitchFamily="34" charset="-120"/>
               </a:rPr>
-              <a:t>52 de los 53 abiertos están fuera del plazo de respuesta.  </a:t>
+              <a:t>50 de los 52 abiertos están fuera del plazo de respuesta.  </a:t>
             </a:r>
             <a:pPr indent="0" marL="0">
               <a:lnSpc>
@@ -20876,7 +20876,7 @@
                 <a:ea typeface="Calibri" pitchFamily="34" charset="-122"/>
                 <a:cs typeface="Calibri" pitchFamily="34" charset="-120"/>
               </a:rPr>
-              <a:t>Fuente: 5f2decc2-Data_NCR10082026.xlsx — hoja «Observaciones» · Corte 10-08-2026 · 495 registros desde 10-02-2023</a:t>
+              <a:t>Fuente: 2da31d24-Data_NCR17082026.xlsx — hoja «Observaciones» · Corte 17-08-2026 · 498 registros desde 10-02-2023</a:t>
             </a:r>
             <a:endParaRPr lang="en-US" sz="850" dirty="0"/>
           </a:p>
@@ -20994,7 +20994,7 @@
       </p:grpSpPr>
       <p:pic>
         <p:nvPicPr>
-          <p:cNvPr id="2" name="Image 0" descr="/home/user/Inversiones/modulo_nc/besalco_logo.png">    </p:cNvPr>
+          <p:cNvPr id="2" name="Image 0" descr="/workspace/dashboard-hseq/panel_control_TOP_P1/besalco_logo.png">    </p:cNvPr>
           <p:cNvPicPr>
             <a:picLocks noChangeAspect="1"/>
           </p:cNvPicPr>
@@ -22151,7 +22151,7 @@
                 <a:ea typeface="Calibri" pitchFamily="34" charset="-122"/>
                 <a:cs typeface="Calibri" pitchFamily="34" charset="-120"/>
               </a:rPr>
-              <a:t>241</a:t>
+              <a:t>244</a:t>
             </a:r>
             <a:endParaRPr lang="en-US" sz="1300" dirty="0"/>
           </a:p>
@@ -22190,7 +22190,7 @@
                 <a:ea typeface="Calibri" pitchFamily="34" charset="-122"/>
                 <a:cs typeface="Calibri" pitchFamily="34" charset="-120"/>
               </a:rPr>
-              <a:t>226</a:t>
+              <a:t>230</a:t>
             </a:r>
             <a:endParaRPr lang="en-US" sz="1300" dirty="0"/>
           </a:p>
@@ -22229,7 +22229,7 @@
                 <a:ea typeface="Calibri" pitchFamily="34" charset="-122"/>
                 <a:cs typeface="Calibri" pitchFamily="34" charset="-120"/>
               </a:rPr>
-              <a:t>15</a:t>
+              <a:t>14</a:t>
             </a:r>
             <a:endParaRPr lang="en-US" sz="1300" dirty="0"/>
           </a:p>
@@ -22268,7 +22268,7 @@
                 <a:ea typeface="Calibri" pitchFamily="34" charset="-122"/>
                 <a:cs typeface="Calibri" pitchFamily="34" charset="-120"/>
               </a:rPr>
-              <a:t>93,8%</a:t>
+              <a:t>94,3%</a:t>
             </a:r>
             <a:endParaRPr lang="en-US" sz="1300" dirty="0"/>
           </a:p>
@@ -22346,7 +22346,7 @@
                 <a:ea typeface="Calibri" pitchFamily="34" charset="-122"/>
                 <a:cs typeface="Calibri" pitchFamily="34" charset="-120"/>
               </a:rPr>
-              <a:t>189</a:t>
+              <a:t>192</a:t>
             </a:r>
             <a:endParaRPr lang="en-US" sz="1300" dirty="0"/>
           </a:p>
@@ -23593,7 +23593,7 @@
                 <a:ea typeface="Calibri" pitchFamily="34" charset="-122"/>
                 <a:cs typeface="Calibri" pitchFamily="34" charset="-120"/>
               </a:rPr>
-              <a:t>487</a:t>
+              <a:t>490</a:t>
             </a:r>
             <a:endParaRPr lang="en-US" sz="1300" dirty="0"/>
           </a:p>
@@ -23632,7 +23632,7 @@
                 <a:ea typeface="Calibri" pitchFamily="34" charset="-122"/>
                 <a:cs typeface="Calibri" pitchFamily="34" charset="-120"/>
               </a:rPr>
-              <a:t>434</a:t>
+              <a:t>438</a:t>
             </a:r>
             <a:endParaRPr lang="en-US" sz="1300" dirty="0"/>
           </a:p>
@@ -23671,7 +23671,7 @@
                 <a:ea typeface="Calibri" pitchFamily="34" charset="-122"/>
                 <a:cs typeface="Calibri" pitchFamily="34" charset="-120"/>
               </a:rPr>
-              <a:t>53</a:t>
+              <a:t>52</a:t>
             </a:r>
             <a:endParaRPr lang="en-US" sz="1300" dirty="0"/>
           </a:p>
@@ -23710,7 +23710,7 @@
                 <a:ea typeface="Calibri" pitchFamily="34" charset="-122"/>
                 <a:cs typeface="Calibri" pitchFamily="34" charset="-120"/>
               </a:rPr>
-              <a:t>89,1%</a:t>
+              <a:t>89,4%</a:t>
             </a:r>
             <a:endParaRPr lang="en-US" sz="1300" dirty="0"/>
           </a:p>
@@ -23788,7 +23788,7 @@
                 <a:ea typeface="Calibri" pitchFamily="34" charset="-122"/>
                 <a:cs typeface="Calibri" pitchFamily="34" charset="-120"/>
               </a:rPr>
-              <a:t>279</a:t>
+              <a:t>282</a:t>
             </a:r>
             <a:endParaRPr lang="en-US" sz="1300" dirty="0"/>
           </a:p>
@@ -23944,7 +23944,7 @@
                 <a:ea typeface="Calibri" pitchFamily="34" charset="-122"/>
                 <a:cs typeface="Calibri" pitchFamily="34" charset="-120"/>
               </a:rPr>
-              <a:t>Fuente: 5f2decc2-Data_NCR10082026.xlsx — hoja «Observaciones» · Corte 10-08-2026 · 495 registros desde 10-02-2023</a:t>
+              <a:t>Fuente: 2da31d24-Data_NCR17082026.xlsx — hoja «Observaciones» · Corte 17-08-2026 · 498 registros desde 10-02-2023</a:t>
             </a:r>
             <a:endParaRPr lang="en-US" sz="850" dirty="0"/>
           </a:p>
@@ -24062,7 +24062,7 @@
       </p:grpSpPr>
       <p:pic>
         <p:nvPicPr>
-          <p:cNvPr id="2" name="Image 0" descr="/home/user/Inversiones/modulo_nc/besalco_logo.png">    </p:cNvPr>
+          <p:cNvPr id="2" name="Image 0" descr="/workspace/dashboard-hseq/panel_control_TOP_P1/besalco_logo.png">    </p:cNvPr>
           <p:cNvPicPr>
             <a:picLocks noChangeAspect="1"/>
           </p:cNvPicPr>
@@ -24195,7 +24195,7 @@
                 <a:ea typeface="Calibri" pitchFamily="34" charset="-122"/>
                 <a:cs typeface="Calibri" pitchFamily="34" charset="-120"/>
               </a:rPr>
-              <a:t>Entre el 03-08-2026 y el 09-08-2026 se levantó 1 hallazgo: 0 internas · 1 del cliente. 0 siguen abiertos.</a:t>
+              <a:t>Entre el 10-08-2026 y el 16-08-2026 se levantaron 3 hallazgos: 0 internas · 3 del cliente. 2 siguen abiertos.</a:t>
             </a:r>
             <a:endParaRPr lang="en-US" sz="1350" dirty="0"/>
           </a:p>
@@ -24350,7 +24350,7 @@
                 <a:ea typeface="Calibri" pitchFamily="34" charset="-122"/>
                 <a:cs typeface="Calibri" pitchFamily="34" charset="-120"/>
               </a:rPr>
-              <a:t>PIPING 1</a:t>
+              <a:t>OO.CC 3</a:t>
             </a:r>
             <a:endParaRPr lang="en-US" sz="1100" dirty="0"/>
           </a:p>
@@ -24428,7 +24428,7 @@
                 <a:ea typeface="Calibri" pitchFamily="34" charset="-122"/>
                 <a:cs typeface="Calibri" pitchFamily="34" charset="-120"/>
               </a:rPr>
-              <a:t>Talabre 1</a:t>
+              <a:t>Talabre 3</a:t>
             </a:r>
             <a:endParaRPr lang="en-US" sz="1100" dirty="0"/>
           </a:p>
@@ -24506,7 +24506,7 @@
                 <a:ea typeface="Calibri" pitchFamily="34" charset="-122"/>
                 <a:cs typeface="Calibri" pitchFamily="34" charset="-120"/>
               </a:rPr>
-              <a:t>Externa · Cliente 1</a:t>
+              <a:t>Externa · Cliente 3</a:t>
             </a:r>
             <a:endParaRPr lang="en-US" sz="1100" dirty="0"/>
           </a:p>
@@ -24584,7 +24584,7 @@
                 <a:ea typeface="Calibri" pitchFamily="34" charset="-122"/>
                 <a:cs typeface="Calibri" pitchFamily="34" charset="-120"/>
               </a:rPr>
-              <a:t>Producto No Conforme 1</a:t>
+              <a:t>No Conformidad 3</a:t>
             </a:r>
             <a:endParaRPr lang="en-US" sz="1100" dirty="0"/>
           </a:p>
@@ -25036,7 +25036,7 @@
                 <a:ea typeface="Calibri" pitchFamily="34" charset="-122"/>
                 <a:cs typeface="Calibri" pitchFamily="34" charset="-120"/>
               </a:rPr>
-              <a:t>05-08-2026</a:t>
+              <a:t>10-08-2026</a:t>
             </a:r>
             <a:endParaRPr lang="en-US" sz="1050" dirty="0"/>
           </a:p>
@@ -25114,7 +25114,7 @@
                 <a:ea typeface="Calibri" pitchFamily="34" charset="-122"/>
                 <a:cs typeface="Calibri" pitchFamily="34" charset="-120"/>
               </a:rPr>
-              <a:t>242 · PNC N°183</a:t>
+              <a:t>243 · RNC N°453</a:t>
             </a:r>
             <a:endParaRPr lang="en-US" sz="1050" dirty="0"/>
           </a:p>
@@ -25153,7 +25153,7 @@
                 <a:ea typeface="Calibri" pitchFamily="34" charset="-122"/>
                 <a:cs typeface="Calibri" pitchFamily="34" charset="-120"/>
               </a:rPr>
-              <a:t>Producto No Confor…</a:t>
+              <a:t>No Conformidad</a:t>
             </a:r>
             <a:endParaRPr lang="en-US" sz="1050" dirty="0"/>
           </a:p>
@@ -25231,7 +25231,7 @@
                 <a:ea typeface="Calibri" pitchFamily="34" charset="-122"/>
                 <a:cs typeface="Calibri" pitchFamily="34" charset="-120"/>
               </a:rPr>
-              <a:t>PIPING</a:t>
+              <a:t>OO.CC</a:t>
             </a:r>
             <a:endParaRPr lang="en-US" sz="1050" dirty="0"/>
           </a:p>
@@ -25270,7 +25270,7 @@
                 <a:ea typeface="Calibri" pitchFamily="34" charset="-122"/>
                 <a:cs typeface="Calibri" pitchFamily="34" charset="-120"/>
               </a:rPr>
-              <a:t>Oscar Nahuel P.</a:t>
+              <a:t>Mauricio Rocha A.</a:t>
             </a:r>
             <a:endParaRPr lang="en-US" sz="1050" dirty="0"/>
           </a:p>
@@ -25303,13 +25303,13 @@
             <a:r>
               <a:rPr lang="en-US" sz="1050" dirty="0">
                 <a:solidFill>
-                  <a:srgbClr val="1F7A44"/>
-                </a:solidFill>
-                <a:latin typeface="Calibri" pitchFamily="34" charset="0"/>
-                <a:ea typeface="Calibri" pitchFamily="34" charset="-122"/>
-                <a:cs typeface="Calibri" pitchFamily="34" charset="-120"/>
-              </a:rPr>
-              <a:t>Cerrado</a:t>
+                  <a:srgbClr val="C0392B"/>
+                </a:solidFill>
+                <a:latin typeface="Calibri" pitchFamily="34" charset="0"/>
+                <a:ea typeface="Calibri" pitchFamily="34" charset="-122"/>
+                <a:cs typeface="Calibri" pitchFamily="34" charset="-120"/>
+              </a:rPr>
+              <a:t>Iniciado</a:t>
             </a:r>
             <a:endParaRPr lang="en-US" sz="1050" dirty="0"/>
           </a:p>
@@ -25348,7 +25348,7 @@
                 <a:ea typeface="Calibri" pitchFamily="34" charset="-122"/>
                 <a:cs typeface="Calibri" pitchFamily="34" charset="-120"/>
               </a:rPr>
-              <a:t>Línea 3716D-RW-36"-CI-0408-…</a:t>
+              <a:t>Rollos de geomembrana KRAH …</a:t>
             </a:r>
             <a:endParaRPr lang="en-US" sz="1000" dirty="0"/>
           </a:p>
@@ -25379,7 +25379,775 @@
       </p:sp>
       <p:sp>
         <p:nvSpPr>
-          <p:cNvPr id="38" name="Text 34"/>
+          <p:cNvPr id="38" name="Shape 34"/>
+          <p:cNvSpPr/>
+          <p:nvPr/>
+        </p:nvSpPr>
+        <p:spPr>
+          <a:xfrm>
+            <a:off x="457200" y="4709160"/>
+            <a:ext cx="11292840" cy="329184"/>
+          </a:xfrm>
+          <a:prstGeom prst="rect">
+            <a:avLst/>
+          </a:prstGeom>
+          <a:solidFill>
+            <a:srgbClr val="FFFFFF"/>
+          </a:solidFill>
+          <a:ln/>
+        </p:spPr>
+      </p:sp>
+      <p:sp>
+        <p:nvSpPr>
+          <p:cNvPr id="39" name="Text 35"/>
+          <p:cNvSpPr/>
+          <p:nvPr/>
+        </p:nvSpPr>
+        <p:spPr>
+          <a:xfrm>
+            <a:off x="502920" y="4754880"/>
+            <a:ext cx="822960" cy="237744"/>
+          </a:xfrm>
+          <a:prstGeom prst="rect">
+            <a:avLst/>
+          </a:prstGeom>
+          <a:noFill/>
+          <a:ln/>
+        </p:spPr>
+        <p:txBody>
+          <a:bodyPr wrap="square" lIns="0" tIns="0" rIns="0" bIns="0" rtlCol="0" anchor="ctr"/>
+          <a:lstStyle/>
+          <a:p>
+            <a:pPr algn="l" indent="0" marL="0">
+              <a:buNone/>
+            </a:pPr>
+            <a:r>
+              <a:rPr lang="en-US" sz="1050" dirty="0">
+                <a:solidFill>
+                  <a:srgbClr val="1A2433"/>
+                </a:solidFill>
+                <a:latin typeface="Calibri" pitchFamily="34" charset="0"/>
+                <a:ea typeface="Calibri" pitchFamily="34" charset="-122"/>
+                <a:cs typeface="Calibri" pitchFamily="34" charset="-120"/>
+              </a:rPr>
+              <a:t>10-08-2026</a:t>
+            </a:r>
+            <a:endParaRPr lang="en-US" sz="1050" dirty="0"/>
+          </a:p>
+        </p:txBody>
+      </p:sp>
+      <p:sp>
+        <p:nvSpPr>
+          <p:cNvPr id="40" name="Text 36"/>
+          <p:cNvSpPr/>
+          <p:nvPr/>
+        </p:nvSpPr>
+        <p:spPr>
+          <a:xfrm>
+            <a:off x="1371600" y="4754880"/>
+            <a:ext cx="1051560" cy="237744"/>
+          </a:xfrm>
+          <a:prstGeom prst="rect">
+            <a:avLst/>
+          </a:prstGeom>
+          <a:noFill/>
+          <a:ln/>
+        </p:spPr>
+        <p:txBody>
+          <a:bodyPr wrap="square" lIns="0" tIns="0" rIns="0" bIns="0" rtlCol="0" anchor="ctr"/>
+          <a:lstStyle/>
+          <a:p>
+            <a:pPr algn="l" indent="0" marL="0">
+              <a:buNone/>
+            </a:pPr>
+            <a:r>
+              <a:rPr lang="en-US" sz="1050" dirty="0">
+                <a:solidFill>
+                  <a:srgbClr val="1A2433"/>
+                </a:solidFill>
+                <a:latin typeface="Calibri" pitchFamily="34" charset="0"/>
+                <a:ea typeface="Calibri" pitchFamily="34" charset="-122"/>
+                <a:cs typeface="Calibri" pitchFamily="34" charset="-120"/>
+              </a:rPr>
+              <a:t>Talabre</a:t>
+            </a:r>
+            <a:endParaRPr lang="en-US" sz="1050" dirty="0"/>
+          </a:p>
+        </p:txBody>
+      </p:sp>
+      <p:sp>
+        <p:nvSpPr>
+          <p:cNvPr id="41" name="Text 37"/>
+          <p:cNvSpPr/>
+          <p:nvPr/>
+        </p:nvSpPr>
+        <p:spPr>
+          <a:xfrm>
+            <a:off x="2468880" y="4754880"/>
+            <a:ext cx="1051560" cy="237744"/>
+          </a:xfrm>
+          <a:prstGeom prst="rect">
+            <a:avLst/>
+          </a:prstGeom>
+          <a:noFill/>
+          <a:ln/>
+        </p:spPr>
+        <p:txBody>
+          <a:bodyPr wrap="square" lIns="0" tIns="0" rIns="0" bIns="0" rtlCol="0" anchor="ctr"/>
+          <a:lstStyle/>
+          <a:p>
+            <a:pPr algn="l" indent="0" marL="0">
+              <a:buNone/>
+            </a:pPr>
+            <a:r>
+              <a:rPr lang="en-US" sz="1050" dirty="0">
+                <a:solidFill>
+                  <a:srgbClr val="1A2433"/>
+                </a:solidFill>
+                <a:latin typeface="Calibri" pitchFamily="34" charset="0"/>
+                <a:ea typeface="Calibri" pitchFamily="34" charset="-122"/>
+                <a:cs typeface="Calibri" pitchFamily="34" charset="-120"/>
+              </a:rPr>
+              <a:t>244 · RNC N°454</a:t>
+            </a:r>
+            <a:endParaRPr lang="en-US" sz="1050" dirty="0"/>
+          </a:p>
+        </p:txBody>
+      </p:sp>
+      <p:sp>
+        <p:nvSpPr>
+          <p:cNvPr id="42" name="Text 38"/>
+          <p:cNvSpPr/>
+          <p:nvPr/>
+        </p:nvSpPr>
+        <p:spPr>
+          <a:xfrm>
+            <a:off x="3566160" y="4754880"/>
+            <a:ext cx="1371600" cy="237744"/>
+          </a:xfrm>
+          <a:prstGeom prst="rect">
+            <a:avLst/>
+          </a:prstGeom>
+          <a:noFill/>
+          <a:ln/>
+        </p:spPr>
+        <p:txBody>
+          <a:bodyPr wrap="square" lIns="0" tIns="0" rIns="0" bIns="0" rtlCol="0" anchor="ctr"/>
+          <a:lstStyle/>
+          <a:p>
+            <a:pPr algn="l" indent="0" marL="0">
+              <a:buNone/>
+            </a:pPr>
+            <a:r>
+              <a:rPr lang="en-US" sz="1050" dirty="0">
+                <a:solidFill>
+                  <a:srgbClr val="1A2433"/>
+                </a:solidFill>
+                <a:latin typeface="Calibri" pitchFamily="34" charset="0"/>
+                <a:ea typeface="Calibri" pitchFamily="34" charset="-122"/>
+                <a:cs typeface="Calibri" pitchFamily="34" charset="-120"/>
+              </a:rPr>
+              <a:t>No Conformidad</a:t>
+            </a:r>
+            <a:endParaRPr lang="en-US" sz="1050" dirty="0"/>
+          </a:p>
+        </p:txBody>
+      </p:sp>
+      <p:sp>
+        <p:nvSpPr>
+          <p:cNvPr id="43" name="Text 39"/>
+          <p:cNvSpPr/>
+          <p:nvPr/>
+        </p:nvSpPr>
+        <p:spPr>
+          <a:xfrm>
+            <a:off x="4983480" y="4754880"/>
+            <a:ext cx="1417320" cy="237744"/>
+          </a:xfrm>
+          <a:prstGeom prst="rect">
+            <a:avLst/>
+          </a:prstGeom>
+          <a:noFill/>
+          <a:ln/>
+        </p:spPr>
+        <p:txBody>
+          <a:bodyPr wrap="square" lIns="0" tIns="0" rIns="0" bIns="0" rtlCol="0" anchor="ctr"/>
+          <a:lstStyle/>
+          <a:p>
+            <a:pPr algn="l" indent="0" marL="0">
+              <a:buNone/>
+            </a:pPr>
+            <a:r>
+              <a:rPr lang="en-US" sz="1050" b="1" dirty="0">
+                <a:solidFill>
+                  <a:srgbClr val="C87A32"/>
+                </a:solidFill>
+                <a:latin typeface="Calibri" pitchFamily="34" charset="0"/>
+                <a:ea typeface="Calibri" pitchFamily="34" charset="-122"/>
+                <a:cs typeface="Calibri" pitchFamily="34" charset="-120"/>
+              </a:rPr>
+              <a:t>Externa · Cliente</a:t>
+            </a:r>
+            <a:endParaRPr lang="en-US" sz="1050" dirty="0"/>
+          </a:p>
+        </p:txBody>
+      </p:sp>
+      <p:sp>
+        <p:nvSpPr>
+          <p:cNvPr id="44" name="Text 40"/>
+          <p:cNvSpPr/>
+          <p:nvPr/>
+        </p:nvSpPr>
+        <p:spPr>
+          <a:xfrm>
+            <a:off x="6446520" y="4754880"/>
+            <a:ext cx="1097280" cy="237744"/>
+          </a:xfrm>
+          <a:prstGeom prst="rect">
+            <a:avLst/>
+          </a:prstGeom>
+          <a:noFill/>
+          <a:ln/>
+        </p:spPr>
+        <p:txBody>
+          <a:bodyPr wrap="square" lIns="0" tIns="0" rIns="0" bIns="0" rtlCol="0" anchor="ctr"/>
+          <a:lstStyle/>
+          <a:p>
+            <a:pPr algn="l" indent="0" marL="0">
+              <a:buNone/>
+            </a:pPr>
+            <a:r>
+              <a:rPr lang="en-US" sz="1050" dirty="0">
+                <a:solidFill>
+                  <a:srgbClr val="1A2433"/>
+                </a:solidFill>
+                <a:latin typeface="Calibri" pitchFamily="34" charset="0"/>
+                <a:ea typeface="Calibri" pitchFamily="34" charset="-122"/>
+                <a:cs typeface="Calibri" pitchFamily="34" charset="-120"/>
+              </a:rPr>
+              <a:t>OO.CC</a:t>
+            </a:r>
+            <a:endParaRPr lang="en-US" sz="1050" dirty="0"/>
+          </a:p>
+        </p:txBody>
+      </p:sp>
+      <p:sp>
+        <p:nvSpPr>
+          <p:cNvPr id="45" name="Text 41"/>
+          <p:cNvSpPr/>
+          <p:nvPr/>
+        </p:nvSpPr>
+        <p:spPr>
+          <a:xfrm>
+            <a:off x="7589520" y="4754880"/>
+            <a:ext cx="1371600" cy="237744"/>
+          </a:xfrm>
+          <a:prstGeom prst="rect">
+            <a:avLst/>
+          </a:prstGeom>
+          <a:noFill/>
+          <a:ln/>
+        </p:spPr>
+        <p:txBody>
+          <a:bodyPr wrap="square" lIns="0" tIns="0" rIns="0" bIns="0" rtlCol="0" anchor="ctr"/>
+          <a:lstStyle/>
+          <a:p>
+            <a:pPr algn="l" indent="0" marL="0">
+              <a:buNone/>
+            </a:pPr>
+            <a:r>
+              <a:rPr lang="en-US" sz="1050" dirty="0">
+                <a:solidFill>
+                  <a:srgbClr val="1A2433"/>
+                </a:solidFill>
+                <a:latin typeface="Calibri" pitchFamily="34" charset="0"/>
+                <a:ea typeface="Calibri" pitchFamily="34" charset="-122"/>
+                <a:cs typeface="Calibri" pitchFamily="34" charset="-120"/>
+              </a:rPr>
+              <a:t>Mauricio Rocha A.</a:t>
+            </a:r>
+            <a:endParaRPr lang="en-US" sz="1050" dirty="0"/>
+          </a:p>
+        </p:txBody>
+      </p:sp>
+      <p:sp>
+        <p:nvSpPr>
+          <p:cNvPr id="46" name="Text 42"/>
+          <p:cNvSpPr/>
+          <p:nvPr/>
+        </p:nvSpPr>
+        <p:spPr>
+          <a:xfrm>
+            <a:off x="9006840" y="4754880"/>
+            <a:ext cx="868680" cy="237744"/>
+          </a:xfrm>
+          <a:prstGeom prst="rect">
+            <a:avLst/>
+          </a:prstGeom>
+          <a:noFill/>
+          <a:ln/>
+        </p:spPr>
+        <p:txBody>
+          <a:bodyPr wrap="square" lIns="0" tIns="0" rIns="0" bIns="0" rtlCol="0" anchor="ctr"/>
+          <a:lstStyle/>
+          <a:p>
+            <a:pPr algn="l" indent="0" marL="0">
+              <a:buNone/>
+            </a:pPr>
+            <a:r>
+              <a:rPr lang="en-US" sz="1050" dirty="0">
+                <a:solidFill>
+                  <a:srgbClr val="C0392B"/>
+                </a:solidFill>
+                <a:latin typeface="Calibri" pitchFamily="34" charset="0"/>
+                <a:ea typeface="Calibri" pitchFamily="34" charset="-122"/>
+                <a:cs typeface="Calibri" pitchFamily="34" charset="-120"/>
+              </a:rPr>
+              <a:t>Iniciado</a:t>
+            </a:r>
+            <a:endParaRPr lang="en-US" sz="1050" dirty="0"/>
+          </a:p>
+        </p:txBody>
+      </p:sp>
+      <p:sp>
+        <p:nvSpPr>
+          <p:cNvPr id="47" name="Text 43"/>
+          <p:cNvSpPr/>
+          <p:nvPr/>
+        </p:nvSpPr>
+        <p:spPr>
+          <a:xfrm>
+            <a:off x="9921240" y="4754880"/>
+            <a:ext cx="1828800" cy="237744"/>
+          </a:xfrm>
+          <a:prstGeom prst="rect">
+            <a:avLst/>
+          </a:prstGeom>
+          <a:noFill/>
+          <a:ln/>
+        </p:spPr>
+        <p:txBody>
+          <a:bodyPr wrap="square" lIns="0" tIns="0" rIns="0" bIns="0" rtlCol="0" anchor="ctr"/>
+          <a:lstStyle/>
+          <a:p>
+            <a:pPr algn="l" indent="0" marL="0">
+              <a:buNone/>
+            </a:pPr>
+            <a:r>
+              <a:rPr lang="en-US" sz="1000" dirty="0">
+                <a:solidFill>
+                  <a:srgbClr val="1A2433"/>
+                </a:solidFill>
+                <a:latin typeface="Calibri" pitchFamily="34" charset="0"/>
+                <a:ea typeface="Calibri" pitchFamily="34" charset="-122"/>
+                <a:cs typeface="Calibri" pitchFamily="34" charset="-120"/>
+              </a:rPr>
+              <a:t>En Piscina Quebrada Sur, se…</a:t>
+            </a:r>
+            <a:endParaRPr lang="en-US" sz="1000" dirty="0"/>
+          </a:p>
+        </p:txBody>
+      </p:sp>
+      <p:sp>
+        <p:nvSpPr>
+          <p:cNvPr id="48" name="Shape 44"/>
+          <p:cNvSpPr/>
+          <p:nvPr/>
+        </p:nvSpPr>
+        <p:spPr>
+          <a:xfrm>
+            <a:off x="502920" y="5029200"/>
+            <a:ext cx="11247120" cy="0"/>
+          </a:xfrm>
+          <a:prstGeom prst="line">
+            <a:avLst/>
+          </a:prstGeom>
+          <a:noFill/>
+          <a:ln w="9525">
+            <a:solidFill>
+              <a:srgbClr val="D9DFE6"/>
+            </a:solidFill>
+            <a:prstDash val="solid"/>
+          </a:ln>
+        </p:spPr>
+      </p:sp>
+      <p:sp>
+        <p:nvSpPr>
+          <p:cNvPr id="49" name="Text 45"/>
+          <p:cNvSpPr/>
+          <p:nvPr/>
+        </p:nvSpPr>
+        <p:spPr>
+          <a:xfrm>
+            <a:off x="502920" y="5084064"/>
+            <a:ext cx="822960" cy="237744"/>
+          </a:xfrm>
+          <a:prstGeom prst="rect">
+            <a:avLst/>
+          </a:prstGeom>
+          <a:noFill/>
+          <a:ln/>
+        </p:spPr>
+        <p:txBody>
+          <a:bodyPr wrap="square" lIns="0" tIns="0" rIns="0" bIns="0" rtlCol="0" anchor="ctr"/>
+          <a:lstStyle/>
+          <a:p>
+            <a:pPr algn="l" indent="0" marL="0">
+              <a:buNone/>
+            </a:pPr>
+            <a:r>
+              <a:rPr lang="en-US" sz="1050" dirty="0">
+                <a:solidFill>
+                  <a:srgbClr val="1A2433"/>
+                </a:solidFill>
+                <a:latin typeface="Calibri" pitchFamily="34" charset="0"/>
+                <a:ea typeface="Calibri" pitchFamily="34" charset="-122"/>
+                <a:cs typeface="Calibri" pitchFamily="34" charset="-120"/>
+              </a:rPr>
+              <a:t>11-08-2026</a:t>
+            </a:r>
+            <a:endParaRPr lang="en-US" sz="1050" dirty="0"/>
+          </a:p>
+        </p:txBody>
+      </p:sp>
+      <p:sp>
+        <p:nvSpPr>
+          <p:cNvPr id="50" name="Text 46"/>
+          <p:cNvSpPr/>
+          <p:nvPr/>
+        </p:nvSpPr>
+        <p:spPr>
+          <a:xfrm>
+            <a:off x="1371600" y="5084064"/>
+            <a:ext cx="1051560" cy="237744"/>
+          </a:xfrm>
+          <a:prstGeom prst="rect">
+            <a:avLst/>
+          </a:prstGeom>
+          <a:noFill/>
+          <a:ln/>
+        </p:spPr>
+        <p:txBody>
+          <a:bodyPr wrap="square" lIns="0" tIns="0" rIns="0" bIns="0" rtlCol="0" anchor="ctr"/>
+          <a:lstStyle/>
+          <a:p>
+            <a:pPr algn="l" indent="0" marL="0">
+              <a:buNone/>
+            </a:pPr>
+            <a:r>
+              <a:rPr lang="en-US" sz="1050" dirty="0">
+                <a:solidFill>
+                  <a:srgbClr val="1A2433"/>
+                </a:solidFill>
+                <a:latin typeface="Calibri" pitchFamily="34" charset="0"/>
+                <a:ea typeface="Calibri" pitchFamily="34" charset="-122"/>
+                <a:cs typeface="Calibri" pitchFamily="34" charset="-120"/>
+              </a:rPr>
+              <a:t>Talabre</a:t>
+            </a:r>
+            <a:endParaRPr lang="en-US" sz="1050" dirty="0"/>
+          </a:p>
+        </p:txBody>
+      </p:sp>
+      <p:sp>
+        <p:nvSpPr>
+          <p:cNvPr id="51" name="Text 47"/>
+          <p:cNvSpPr/>
+          <p:nvPr/>
+        </p:nvSpPr>
+        <p:spPr>
+          <a:xfrm>
+            <a:off x="2468880" y="5084064"/>
+            <a:ext cx="1051560" cy="237744"/>
+          </a:xfrm>
+          <a:prstGeom prst="rect">
+            <a:avLst/>
+          </a:prstGeom>
+          <a:noFill/>
+          <a:ln/>
+        </p:spPr>
+        <p:txBody>
+          <a:bodyPr wrap="square" lIns="0" tIns="0" rIns="0" bIns="0" rtlCol="0" anchor="ctr"/>
+          <a:lstStyle/>
+          <a:p>
+            <a:pPr algn="l" indent="0" marL="0">
+              <a:buNone/>
+            </a:pPr>
+            <a:r>
+              <a:rPr lang="en-US" sz="1050" dirty="0">
+                <a:solidFill>
+                  <a:srgbClr val="1A2433"/>
+                </a:solidFill>
+                <a:latin typeface="Calibri" pitchFamily="34" charset="0"/>
+                <a:ea typeface="Calibri" pitchFamily="34" charset="-122"/>
+                <a:cs typeface="Calibri" pitchFamily="34" charset="-120"/>
+              </a:rPr>
+              <a:t>245 · RNC N°455</a:t>
+            </a:r>
+            <a:endParaRPr lang="en-US" sz="1050" dirty="0"/>
+          </a:p>
+        </p:txBody>
+      </p:sp>
+      <p:sp>
+        <p:nvSpPr>
+          <p:cNvPr id="52" name="Text 48"/>
+          <p:cNvSpPr/>
+          <p:nvPr/>
+        </p:nvSpPr>
+        <p:spPr>
+          <a:xfrm>
+            <a:off x="3566160" y="5084064"/>
+            <a:ext cx="1371600" cy="237744"/>
+          </a:xfrm>
+          <a:prstGeom prst="rect">
+            <a:avLst/>
+          </a:prstGeom>
+          <a:noFill/>
+          <a:ln/>
+        </p:spPr>
+        <p:txBody>
+          <a:bodyPr wrap="square" lIns="0" tIns="0" rIns="0" bIns="0" rtlCol="0" anchor="ctr"/>
+          <a:lstStyle/>
+          <a:p>
+            <a:pPr algn="l" indent="0" marL="0">
+              <a:buNone/>
+            </a:pPr>
+            <a:r>
+              <a:rPr lang="en-US" sz="1050" dirty="0">
+                <a:solidFill>
+                  <a:srgbClr val="1A2433"/>
+                </a:solidFill>
+                <a:latin typeface="Calibri" pitchFamily="34" charset="0"/>
+                <a:ea typeface="Calibri" pitchFamily="34" charset="-122"/>
+                <a:cs typeface="Calibri" pitchFamily="34" charset="-120"/>
+              </a:rPr>
+              <a:t>No Conformidad</a:t>
+            </a:r>
+            <a:endParaRPr lang="en-US" sz="1050" dirty="0"/>
+          </a:p>
+        </p:txBody>
+      </p:sp>
+      <p:sp>
+        <p:nvSpPr>
+          <p:cNvPr id="53" name="Text 49"/>
+          <p:cNvSpPr/>
+          <p:nvPr/>
+        </p:nvSpPr>
+        <p:spPr>
+          <a:xfrm>
+            <a:off x="4983480" y="5084064"/>
+            <a:ext cx="1417320" cy="237744"/>
+          </a:xfrm>
+          <a:prstGeom prst="rect">
+            <a:avLst/>
+          </a:prstGeom>
+          <a:noFill/>
+          <a:ln/>
+        </p:spPr>
+        <p:txBody>
+          <a:bodyPr wrap="square" lIns="0" tIns="0" rIns="0" bIns="0" rtlCol="0" anchor="ctr"/>
+          <a:lstStyle/>
+          <a:p>
+            <a:pPr algn="l" indent="0" marL="0">
+              <a:buNone/>
+            </a:pPr>
+            <a:r>
+              <a:rPr lang="en-US" sz="1050" b="1" dirty="0">
+                <a:solidFill>
+                  <a:srgbClr val="C87A32"/>
+                </a:solidFill>
+                <a:latin typeface="Calibri" pitchFamily="34" charset="0"/>
+                <a:ea typeface="Calibri" pitchFamily="34" charset="-122"/>
+                <a:cs typeface="Calibri" pitchFamily="34" charset="-120"/>
+              </a:rPr>
+              <a:t>Externa · Cliente</a:t>
+            </a:r>
+            <a:endParaRPr lang="en-US" sz="1050" dirty="0"/>
+          </a:p>
+        </p:txBody>
+      </p:sp>
+      <p:sp>
+        <p:nvSpPr>
+          <p:cNvPr id="54" name="Text 50"/>
+          <p:cNvSpPr/>
+          <p:nvPr/>
+        </p:nvSpPr>
+        <p:spPr>
+          <a:xfrm>
+            <a:off x="6446520" y="5084064"/>
+            <a:ext cx="1097280" cy="237744"/>
+          </a:xfrm>
+          <a:prstGeom prst="rect">
+            <a:avLst/>
+          </a:prstGeom>
+          <a:noFill/>
+          <a:ln/>
+        </p:spPr>
+        <p:txBody>
+          <a:bodyPr wrap="square" lIns="0" tIns="0" rIns="0" bIns="0" rtlCol="0" anchor="ctr"/>
+          <a:lstStyle/>
+          <a:p>
+            <a:pPr algn="l" indent="0" marL="0">
+              <a:buNone/>
+            </a:pPr>
+            <a:r>
+              <a:rPr lang="en-US" sz="1050" dirty="0">
+                <a:solidFill>
+                  <a:srgbClr val="1A2433"/>
+                </a:solidFill>
+                <a:latin typeface="Calibri" pitchFamily="34" charset="0"/>
+                <a:ea typeface="Calibri" pitchFamily="34" charset="-122"/>
+                <a:cs typeface="Calibri" pitchFamily="34" charset="-120"/>
+              </a:rPr>
+              <a:t>OO.CC</a:t>
+            </a:r>
+            <a:endParaRPr lang="en-US" sz="1050" dirty="0"/>
+          </a:p>
+        </p:txBody>
+      </p:sp>
+      <p:sp>
+        <p:nvSpPr>
+          <p:cNvPr id="55" name="Text 51"/>
+          <p:cNvSpPr/>
+          <p:nvPr/>
+        </p:nvSpPr>
+        <p:spPr>
+          <a:xfrm>
+            <a:off x="7589520" y="5084064"/>
+            <a:ext cx="1371600" cy="237744"/>
+          </a:xfrm>
+          <a:prstGeom prst="rect">
+            <a:avLst/>
+          </a:prstGeom>
+          <a:noFill/>
+          <a:ln/>
+        </p:spPr>
+        <p:txBody>
+          <a:bodyPr wrap="square" lIns="0" tIns="0" rIns="0" bIns="0" rtlCol="0" anchor="ctr"/>
+          <a:lstStyle/>
+          <a:p>
+            <a:pPr algn="l" indent="0" marL="0">
+              <a:buNone/>
+            </a:pPr>
+            <a:r>
+              <a:rPr lang="en-US" sz="1050" dirty="0">
+                <a:solidFill>
+                  <a:srgbClr val="1A2433"/>
+                </a:solidFill>
+                <a:latin typeface="Calibri" pitchFamily="34" charset="0"/>
+                <a:ea typeface="Calibri" pitchFamily="34" charset="-122"/>
+                <a:cs typeface="Calibri" pitchFamily="34" charset="-120"/>
+              </a:rPr>
+              <a:t>Sebastián Ramos</a:t>
+            </a:r>
+            <a:endParaRPr lang="en-US" sz="1050" dirty="0"/>
+          </a:p>
+        </p:txBody>
+      </p:sp>
+      <p:sp>
+        <p:nvSpPr>
+          <p:cNvPr id="56" name="Text 52"/>
+          <p:cNvSpPr/>
+          <p:nvPr/>
+        </p:nvSpPr>
+        <p:spPr>
+          <a:xfrm>
+            <a:off x="9006840" y="5084064"/>
+            <a:ext cx="868680" cy="237744"/>
+          </a:xfrm>
+          <a:prstGeom prst="rect">
+            <a:avLst/>
+          </a:prstGeom>
+          <a:noFill/>
+          <a:ln/>
+        </p:spPr>
+        <p:txBody>
+          <a:bodyPr wrap="square" lIns="0" tIns="0" rIns="0" bIns="0" rtlCol="0" anchor="ctr"/>
+          <a:lstStyle/>
+          <a:p>
+            <a:pPr algn="l" indent="0" marL="0">
+              <a:buNone/>
+            </a:pPr>
+            <a:r>
+              <a:rPr lang="en-US" sz="1050" dirty="0">
+                <a:solidFill>
+                  <a:srgbClr val="1F7A44"/>
+                </a:solidFill>
+                <a:latin typeface="Calibri" pitchFamily="34" charset="0"/>
+                <a:ea typeface="Calibri" pitchFamily="34" charset="-122"/>
+                <a:cs typeface="Calibri" pitchFamily="34" charset="-120"/>
+              </a:rPr>
+              <a:t>Cerrado</a:t>
+            </a:r>
+            <a:endParaRPr lang="en-US" sz="1050" dirty="0"/>
+          </a:p>
+        </p:txBody>
+      </p:sp>
+      <p:sp>
+        <p:nvSpPr>
+          <p:cNvPr id="57" name="Text 53"/>
+          <p:cNvSpPr/>
+          <p:nvPr/>
+        </p:nvSpPr>
+        <p:spPr>
+          <a:xfrm>
+            <a:off x="9921240" y="5084064"/>
+            <a:ext cx="1828800" cy="237744"/>
+          </a:xfrm>
+          <a:prstGeom prst="rect">
+            <a:avLst/>
+          </a:prstGeom>
+          <a:noFill/>
+          <a:ln/>
+        </p:spPr>
+        <p:txBody>
+          <a:bodyPr wrap="square" lIns="0" tIns="0" rIns="0" bIns="0" rtlCol="0" anchor="ctr"/>
+          <a:lstStyle/>
+          <a:p>
+            <a:pPr algn="l" indent="0" marL="0">
+              <a:buNone/>
+            </a:pPr>
+            <a:r>
+              <a:rPr lang="en-US" sz="1000" dirty="0">
+                <a:solidFill>
+                  <a:srgbClr val="1A2433"/>
+                </a:solidFill>
+                <a:latin typeface="Calibri" pitchFamily="34" charset="0"/>
+                <a:ea typeface="Calibri" pitchFamily="34" charset="-122"/>
+                <a:cs typeface="Calibri" pitchFamily="34" charset="-120"/>
+              </a:rPr>
+              <a:t>Se utilizó la Solicitud de …</a:t>
+            </a:r>
+            <a:endParaRPr lang="en-US" sz="1000" dirty="0"/>
+          </a:p>
+        </p:txBody>
+      </p:sp>
+      <p:sp>
+        <p:nvSpPr>
+          <p:cNvPr id="58" name="Shape 54"/>
+          <p:cNvSpPr/>
+          <p:nvPr/>
+        </p:nvSpPr>
+        <p:spPr>
+          <a:xfrm>
+            <a:off x="502920" y="5358384"/>
+            <a:ext cx="11247120" cy="0"/>
+          </a:xfrm>
+          <a:prstGeom prst="line">
+            <a:avLst/>
+          </a:prstGeom>
+          <a:noFill/>
+          <a:ln w="9525">
+            <a:solidFill>
+              <a:srgbClr val="D9DFE6"/>
+            </a:solidFill>
+            <a:prstDash val="solid"/>
+          </a:ln>
+        </p:spPr>
+      </p:sp>
+      <p:sp>
+        <p:nvSpPr>
+          <p:cNvPr id="59" name="Text 55"/>
           <p:cNvSpPr/>
           <p:nvPr/>
         </p:nvSpPr>
@@ -25410,7 +26178,7 @@
                 <a:ea typeface="Calibri" pitchFamily="34" charset="-122"/>
                 <a:cs typeface="Calibri" pitchFamily="34" charset="-120"/>
               </a:rPr>
-              <a:t>Fuente: 5f2decc2-Data_NCR10082026.xlsx — hoja «Observaciones» · Corte 10-08-2026 · 495 registros desde 10-02-2023</a:t>
+              <a:t>Fuente: 2da31d24-Data_NCR17082026.xlsx — hoja «Observaciones» · Corte 17-08-2026 · 498 registros desde 10-02-2023</a:t>
             </a:r>
             <a:endParaRPr lang="en-US" sz="850" dirty="0"/>
           </a:p>
@@ -25418,7 +26186,7 @@
       </p:sp>
       <p:sp>
         <p:nvSpPr>
-          <p:cNvPr id="39" name="Text 35"/>
+          <p:cNvPr id="60" name="Text 56"/>
           <p:cNvSpPr/>
           <p:nvPr/>
         </p:nvSpPr>
@@ -25457,7 +26225,7 @@
       </p:sp>
       <p:sp>
         <p:nvSpPr>
-          <p:cNvPr id="40" name="Text 36"/>
+          <p:cNvPr id="61" name="Text 57"/>
           <p:cNvSpPr/>
           <p:nvPr/>
         </p:nvSpPr>
@@ -25528,7 +26296,7 @@
       </p:grpSpPr>
       <p:pic>
         <p:nvPicPr>
-          <p:cNvPr id="2" name="Image 0" descr="/home/user/Inversiones/modulo_nc/besalco_logo.png">    </p:cNvPr>
+          <p:cNvPr id="2" name="Image 0" descr="/workspace/dashboard-hseq/panel_control_TOP_P1/besalco_logo.png">    </p:cNvPr>
           <p:cNvPicPr>
             <a:picLocks noChangeAspect="1"/>
           </p:cNvPicPr>
@@ -25661,7 +26429,7 @@
                 <a:ea typeface="Calibri" pitchFamily="34" charset="-122"/>
                 <a:cs typeface="Calibri" pitchFamily="34" charset="-120"/>
               </a:rPr>
-              <a:t>Interna es autodetección: la levanta Besalco antes que nadie. Externa la levanta el cliente —compromete el contrato— o un subcontrato. Autodetección global: 32,7%.</a:t>
+              <a:t>Interna es autodetección: la levanta Besalco antes que nadie. Externa la levanta el cliente —compromete el contrato— o un subcontrato. Autodetección global: 32,5%.</a:t>
             </a:r>
             <a:endParaRPr lang="en-US" sz="1350" dirty="0"/>
           </a:p>
@@ -26406,7 +27174,7 @@
                 <a:ea typeface="Calibri" pitchFamily="34" charset="-122"/>
                 <a:cs typeface="Calibri" pitchFamily="34" charset="-120"/>
               </a:rPr>
-              <a:t>279</a:t>
+              <a:t>282</a:t>
             </a:r>
             <a:endParaRPr lang="en-US" sz="1050" dirty="0"/>
           </a:p>
@@ -26445,7 +27213,7 @@
                 <a:ea typeface="Calibri" pitchFamily="34" charset="-122"/>
                 <a:cs typeface="Calibri" pitchFamily="34" charset="-120"/>
               </a:rPr>
-              <a:t>231</a:t>
+              <a:t>235</a:t>
             </a:r>
             <a:endParaRPr lang="en-US" sz="1050" dirty="0"/>
           </a:p>
@@ -26484,7 +27252,7 @@
                 <a:ea typeface="Calibri" pitchFamily="34" charset="-122"/>
                 <a:cs typeface="Calibri" pitchFamily="34" charset="-120"/>
               </a:rPr>
-              <a:t>82,8%</a:t>
+              <a:t>83,3%</a:t>
             </a:r>
             <a:endParaRPr lang="en-US" sz="1050" dirty="0"/>
           </a:p>
@@ -26523,7 +27291,7 @@
                 <a:ea typeface="Calibri" pitchFamily="34" charset="-122"/>
                 <a:cs typeface="Calibri" pitchFamily="34" charset="-120"/>
               </a:rPr>
-              <a:t>48</a:t>
+              <a:t>47</a:t>
             </a:r>
             <a:endParaRPr lang="en-US" sz="1050" dirty="0"/>
           </a:p>
@@ -26562,7 +27330,7 @@
                 <a:ea typeface="Calibri" pitchFamily="34" charset="-122"/>
                 <a:cs typeface="Calibri" pitchFamily="34" charset="-120"/>
               </a:rPr>
-              <a:t>47</a:t>
+              <a:t>45</a:t>
             </a:r>
             <a:endParaRPr lang="en-US" sz="1050" dirty="0"/>
           </a:p>
@@ -27314,7 +28082,7 @@
                 <a:ea typeface="Calibri" pitchFamily="34" charset="-122"/>
                 <a:cs typeface="Calibri" pitchFamily="34" charset="-120"/>
               </a:rPr>
-              <a:t>495</a:t>
+              <a:t>498</a:t>
             </a:r>
             <a:endParaRPr lang="en-US" sz="1050" dirty="0"/>
           </a:p>
@@ -27353,7 +28121,7 @@
                 <a:ea typeface="Calibri" pitchFamily="34" charset="-122"/>
                 <a:cs typeface="Calibri" pitchFamily="34" charset="-120"/>
               </a:rPr>
-              <a:t>442</a:t>
+              <a:t>446</a:t>
             </a:r>
             <a:endParaRPr lang="en-US" sz="1050" dirty="0"/>
           </a:p>
@@ -27392,7 +28160,7 @@
                 <a:ea typeface="Calibri" pitchFamily="34" charset="-122"/>
                 <a:cs typeface="Calibri" pitchFamily="34" charset="-120"/>
               </a:rPr>
-              <a:t>89,3%</a:t>
+              <a:t>89,6%</a:t>
             </a:r>
             <a:endParaRPr lang="en-US" sz="1050" dirty="0"/>
           </a:p>
@@ -27431,7 +28199,7 @@
                 <a:ea typeface="Calibri" pitchFamily="34" charset="-122"/>
                 <a:cs typeface="Calibri" pitchFamily="34" charset="-120"/>
               </a:rPr>
-              <a:t>53</a:t>
+              <a:t>52</a:t>
             </a:r>
             <a:endParaRPr lang="en-US" sz="1050" dirty="0"/>
           </a:p>
@@ -27470,7 +28238,7 @@
                 <a:ea typeface="Calibri" pitchFamily="34" charset="-122"/>
                 <a:cs typeface="Calibri" pitchFamily="34" charset="-120"/>
               </a:rPr>
-              <a:t>52</a:t>
+              <a:t>50</a:t>
             </a:r>
             <a:endParaRPr lang="en-US" sz="1050" dirty="0"/>
           </a:p>
@@ -27726,7 +28494,7 @@
                 <a:ea typeface="Cambria" pitchFamily="34" charset="-122"/>
                 <a:cs typeface="Cambria" pitchFamily="34" charset="-120"/>
               </a:rPr>
-              <a:t>21,6%</a:t>
+              <a:t>21,3%</a:t>
             </a:r>
             <a:endParaRPr lang="en-US" sz="2400" dirty="0"/>
           </a:p>
@@ -27882,7 +28650,7 @@
                 <a:ea typeface="Calibri" pitchFamily="34" charset="-122"/>
                 <a:cs typeface="Calibri" pitchFamily="34" charset="-120"/>
               </a:rPr>
-              <a:t>Fuente: 5f2decc2-Data_NCR10082026.xlsx — hoja «Observaciones» · Corte 10-08-2026 · 495 registros desde 10-02-2023</a:t>
+              <a:t>Fuente: 2da31d24-Data_NCR17082026.xlsx — hoja «Observaciones» · Corte 17-08-2026 · 498 registros desde 10-02-2023</a:t>
             </a:r>
             <a:endParaRPr lang="en-US" sz="850" dirty="0"/>
           </a:p>
@@ -28000,7 +28768,7 @@
       </p:grpSpPr>
       <p:pic>
         <p:nvPicPr>
-          <p:cNvPr id="2" name="Image 0" descr="/home/user/Inversiones/modulo_nc/besalco_logo.png">    </p:cNvPr>
+          <p:cNvPr id="2" name="Image 0" descr="/workspace/dashboard-hseq/panel_control_TOP_P1/besalco_logo.png">    </p:cNvPr>
           <p:cNvPicPr>
             <a:picLocks noChangeAspect="1"/>
           </p:cNvPicPr>
@@ -28133,7 +28901,7 @@
                 <a:ea typeface="Calibri" pitchFamily="34" charset="-122"/>
                 <a:cs typeface="Calibri" pitchFamily="34" charset="-120"/>
               </a:rPr>
-              <a:t>De los 53 hallazgos abiertos, 19 llevan más de 180 días desde que se levantaron y 4 más de un año. La mediana de cierre global es de 30 días.</a:t>
+              <a:t>De los 52 hallazgos abiertos, 19 llevan más de 180 días desde que se levantaron y 4 más de un año. La mediana de cierre global es de 30 días.</a:t>
             </a:r>
             <a:endParaRPr lang="en-US" sz="1350" dirty="0"/>
           </a:p>
@@ -28270,7 +29038,7 @@
                 <a:ea typeface="Calibri" pitchFamily="34" charset="-122"/>
                 <a:cs typeface="Calibri" pitchFamily="34" charset="-120"/>
               </a:rPr>
-              <a:t>Al corte hay 52 hallazgos fuera de plazo de los 53 abiertos.</a:t>
+              <a:t>Al corte hay 50 hallazgos fuera de plazo de los 52 abiertos.</a:t>
             </a:r>
             <a:endParaRPr lang="en-US" sz="1150" dirty="0"/>
           </a:p>
@@ -28949,7 +29717,7 @@
                 <a:ea typeface="Calibri" pitchFamily="34" charset="-122"/>
                 <a:cs typeface="Calibri" pitchFamily="34" charset="-120"/>
               </a:rPr>
-              <a:t>226</a:t>
+              <a:t>230</a:t>
             </a:r>
             <a:endParaRPr lang="en-US" sz="1150" dirty="0"/>
           </a:p>
@@ -29066,7 +29834,7 @@
                 <a:ea typeface="Calibri" pitchFamily="34" charset="-122"/>
                 <a:cs typeface="Calibri" pitchFamily="34" charset="-120"/>
               </a:rPr>
-              <a:t>15</a:t>
+              <a:t>14</a:t>
             </a:r>
             <a:endParaRPr lang="en-US" sz="1150" dirty="0"/>
           </a:p>
@@ -29690,7 +30458,7 @@
                 <a:ea typeface="Calibri" pitchFamily="34" charset="-122"/>
                 <a:cs typeface="Calibri" pitchFamily="34" charset="-120"/>
               </a:rPr>
-              <a:t>Fuente: 5f2decc2-Data_NCR10082026.xlsx — hoja «Observaciones» · Corte 10-08-2026 · 495 registros desde 10-02-2023</a:t>
+              <a:t>Fuente: 2da31d24-Data_NCR17082026.xlsx — hoja «Observaciones» · Corte 17-08-2026 · 498 registros desde 10-02-2023</a:t>
             </a:r>
             <a:endParaRPr lang="en-US" sz="850" dirty="0"/>
           </a:p>
@@ -29808,7 +30576,7 @@
       </p:grpSpPr>
       <p:pic>
         <p:nvPicPr>
-          <p:cNvPr id="2" name="Image 0" descr="/home/user/Inversiones/modulo_nc/besalco_logo.png">    </p:cNvPr>
+          <p:cNvPr id="2" name="Image 0" descr="/workspace/dashboard-hseq/panel_control_TOP_P1/besalco_logo.png">    </p:cNvPr>
           <p:cNvPicPr>
             <a:picLocks noChangeAspect="1"/>
           </p:cNvPicPr>
@@ -30064,7 +30832,7 @@
                 <a:ea typeface="Calibri" pitchFamily="34" charset="-122"/>
                 <a:cs typeface="Calibri" pitchFamily="34" charset="-120"/>
               </a:rPr>
-              <a:t>37 de los 53 hallazgos abiertos (69,8%) y 77,4% de cierre, contra 89,3% global. Es la ruta crítica del módulo.</a:t>
+              <a:t>37 de los 52 hallazgos abiertos (71,2%) y 77,4% de cierre, contra 89,6% global. Es la ruta crítica del módulo.</a:t>
             </a:r>
             <a:endParaRPr lang="en-US" sz="1100" dirty="0"/>
           </a:p>
@@ -30206,7 +30974,7 @@
                 <a:ea typeface="Calibri" pitchFamily="34" charset="-122"/>
                 <a:cs typeface="Calibri" pitchFamily="34" charset="-120"/>
               </a:rPr>
-              <a:t>Solo 21,6% de sus hallazgos los detecta Besalco; el mejor frente va en 66,7%. Lo que no se detecta adentro llega como observación del cliente.</a:t>
+              <a:t>Solo 21,3% de sus hallazgos los detecta Besalco; el mejor frente va en 66,7%. Lo que no se detecta adentro llega como observación del cliente.</a:t>
             </a:r>
             <a:endParaRPr lang="en-US" sz="1100" dirty="0"/>
           </a:p>
@@ -30448,7 +31216,7 @@
                 <a:ea typeface="Calibri" pitchFamily="34" charset="-122"/>
                 <a:cs typeface="Calibri" pitchFamily="34" charset="-120"/>
               </a:rPr>
-              <a:t>Responder las 52 que pasaron el plazo</a:t>
+              <a:t>Responder las 50 que pasaron el plazo</a:t>
             </a:r>
             <a:endParaRPr lang="en-US" sz="1400" dirty="0"/>
           </a:p>
@@ -30490,7 +31258,7 @@
                 <a:ea typeface="Calibri" pitchFamily="34" charset="-122"/>
                 <a:cs typeface="Calibri" pitchFamily="34" charset="-120"/>
               </a:rPr>
-              <a:t>El plazo es de 10 días desde la emisión y hoy lo incumplen 98,1% de los abiertos. Solo 1 siguen dentro de plazo.</a:t>
+              <a:t>El plazo es de 10 días desde la emisión y hoy lo incumplen 96,2% de los abiertos. Solo 2 siguen dentro de plazo.</a:t>
             </a:r>
             <a:endParaRPr lang="en-US" sz="1100" dirty="0"/>
           </a:p>
@@ -30529,7 +31297,7 @@
                 <a:ea typeface="Calibri" pitchFamily="34" charset="-122"/>
                 <a:cs typeface="Calibri" pitchFamily="34" charset="-120"/>
               </a:rPr>
-              <a:t>Fuente: 5f2decc2-Data_NCR10082026.xlsx — hoja «Observaciones» · Corte 10-08-2026 · 495 registros desde 10-02-2023</a:t>
+              <a:t>Fuente: 2da31d24-Data_NCR17082026.xlsx — hoja «Observaciones» · Corte 17-08-2026 · 498 registros desde 10-02-2023</a:t>
             </a:r>
             <a:endParaRPr lang="en-US" sz="850" dirty="0"/>
           </a:p>
@@ -30687,7 +31455,7 @@
       </p:sp>
       <p:pic>
         <p:nvPicPr>
-          <p:cNvPr id="4" name="Image 0" descr="/home/user/Inversiones/modulo_nc/besalco_logo.png">    </p:cNvPr>
+          <p:cNvPr id="4" name="Image 0" descr="/workspace/dashboard-hseq/panel_control_TOP_P1/besalco_logo.png">    </p:cNvPr>
           <p:cNvPicPr>
             <a:picLocks noChangeAspect="1"/>
           </p:cNvPicPr>
@@ -31253,7 +32021,7 @@
                 <a:ea typeface="Calibri" pitchFamily="34" charset="-122"/>
                 <a:cs typeface="Calibri" pitchFamily="34" charset="-120"/>
               </a:rPr>
-              <a:t>Corte: 10-08-2026</a:t>
+              <a:t>Corte: 17-08-2026</a:t>
             </a:r>
             <a:endParaRPr lang="en-US" sz="1100" dirty="0"/>
           </a:p>
@@ -31292,7 +32060,7 @@
                 <a:ea typeface="Calibri" pitchFamily="34" charset="-122"/>
                 <a:cs typeface="Calibri" pitchFamily="34" charset="-120"/>
               </a:rPr>
-              <a:t>Fuente: 5f2decc2-Data_NCR10082026.xlsx — hoja «Observaciones» · Corte 10-08-2026 · 495 registros desde 10-02-2023</a:t>
+              <a:t>Fuente: 2da31d24-Data_NCR17082026.xlsx — hoja «Observaciones» · Corte 17-08-2026 · 498 registros desde 10-02-2023</a:t>
             </a:r>
             <a:endParaRPr lang="en-US" sz="850" dirty="0"/>
           </a:p>
@@ -31371,7 +32139,7 @@
       </p:grpSpPr>
       <p:pic>
         <p:nvPicPr>
-          <p:cNvPr id="2" name="Image 0" descr="/home/user/Inversiones/modulo_nc/besalco_logo.png">    </p:cNvPr>
+          <p:cNvPr id="2" name="Image 0" descr="/workspace/dashboard-hseq/panel_control_TOP_P1/besalco_logo.png">    </p:cNvPr>
           <p:cNvPicPr>
             <a:picLocks noChangeAspect="1"/>
           </p:cNvPicPr>
@@ -31885,7 +32653,7 @@
                 <a:ea typeface="Calibri" pitchFamily="34" charset="-122"/>
                 <a:cs typeface="Calibri" pitchFamily="34" charset="-120"/>
               </a:rPr>
-              <a:t>Global del módulo: 89,3%</a:t>
+              <a:t>Global del módulo: 89,6%</a:t>
             </a:r>
             <a:endParaRPr lang="en-US" sz="950" dirty="0"/>
           </a:p>
@@ -32483,7 +33251,7 @@
                 <a:ea typeface="Calibri" pitchFamily="34" charset="-122"/>
                 <a:cs typeface="Calibri" pitchFamily="34" charset="-120"/>
               </a:rPr>
-              <a:t>global del módulo 32,7%</a:t>
+              <a:t>global del módulo 32,5%</a:t>
             </a:r>
             <a:endParaRPr lang="en-US" sz="1000" dirty="0"/>
           </a:p>
@@ -33093,7 +33861,7 @@
                 <a:ea typeface="Calibri" pitchFamily="34" charset="-122"/>
                 <a:cs typeface="Calibri" pitchFamily="34" charset="-120"/>
               </a:rPr>
-              <a:t>Fuente: 5f2decc2-Data_NCR10082026.xlsx — hoja «Observaciones» · Corte 10-08-2026 · 495 registros desde 10-02-2023</a:t>
+              <a:t>Fuente: 2da31d24-Data_NCR17082026.xlsx — hoja «Observaciones» · Corte 17-08-2026 · 498 registros desde 10-02-2023</a:t>
             </a:r>
             <a:endParaRPr lang="en-US" sz="850" dirty="0"/>
           </a:p>

--- a/modulo_nc/Panel_No_Conformidades.pptx
+++ b/modulo_nc/Panel_No_Conformidades.pptx
@@ -220,19 +220,19 @@
                     <c:v>3 sem.</c:v>
                   </c:pt>
                   <c:pt idx="1">
-                    <c:v>13-07</c:v>
+                    <c:v>20-07</c:v>
                   </c:pt>
                   <c:pt idx="2">
-                    <c:v>20-07</c:v>
+                    <c:v>27-07</c:v>
                   </c:pt>
                   <c:pt idx="3">
-                    <c:v>27-07</c:v>
+                    <c:v>03-08</c:v>
                   </c:pt>
                   <c:pt idx="4">
-                    <c:v>03-08</c:v>
+                    <c:v>10-08</c:v>
                   </c:pt>
                   <c:pt idx="5">
-                    <c:v>10-08</c:v>
+                    <c:v>17-08</c:v>
                   </c:pt>
                 </c:lvl>
               </c:multiLvlStrCache>
@@ -251,13 +251,13 @@
                   <c:v/>
                 </c:pt>
                 <c:pt idx="2">
-                  <c:v>1</c:v>
+                  <c:v>2</c:v>
                 </c:pt>
                 <c:pt idx="3">
-                  <c:v>3</c:v>
+                  <c:v/>
                 </c:pt>
                 <c:pt idx="4">
-                  <c:v/>
+                  <c:v>2</c:v>
                 </c:pt>
                 <c:pt idx="5">
                   <c:v>2</c:v>
@@ -322,19 +322,19 @@
                     <c:v>3 sem.</c:v>
                   </c:pt>
                   <c:pt idx="1">
-                    <c:v>13-07</c:v>
+                    <c:v>20-07</c:v>
                   </c:pt>
                   <c:pt idx="2">
-                    <c:v>20-07</c:v>
+                    <c:v>27-07</c:v>
                   </c:pt>
                   <c:pt idx="3">
-                    <c:v>27-07</c:v>
+                    <c:v>03-08</c:v>
                   </c:pt>
                   <c:pt idx="4">
-                    <c:v>03-08</c:v>
+                    <c:v>10-08</c:v>
                   </c:pt>
                   <c:pt idx="5">
-                    <c:v>10-08</c:v>
+                    <c:v>17-08</c:v>
                   </c:pt>
                 </c:lvl>
               </c:multiLvlStrCache>
@@ -347,10 +347,10 @@
                 <c:formatCode>General</c:formatCode>
                 <c:ptCount val="6"/>
                 <c:pt idx="0">
-                  <c:v>5</c:v>
+                  <c:v>3</c:v>
                 </c:pt>
                 <c:pt idx="1">
-                  <c:v/>
+                  <c:v>3</c:v>
                 </c:pt>
                 <c:pt idx="2">
                   <c:v>2</c:v>
@@ -734,7 +734,7 @@
                   <c:v>19</c:v>
                 </c:pt>
                 <c:pt idx="1">
-                  <c:v>192</c:v>
+                  <c:v>195</c:v>
                 </c:pt>
                 <c:pt idx="2">
                   <c:v>71</c:v>
@@ -1199,10 +1199,10 @@
                 <c:formatCode>General</c:formatCode>
                 <c:ptCount val="4"/>
                 <c:pt idx="0">
-                  <c:v>283</c:v>
+                  <c:v>289</c:v>
                 </c:pt>
                 <c:pt idx="1">
-                  <c:v>117</c:v>
+                  <c:v>120</c:v>
                 </c:pt>
                 <c:pt idx="2">
                   <c:v>45</c:v>
@@ -1289,10 +1289,10 @@
                 <c:formatCode>General</c:formatCode>
                 <c:ptCount val="4"/>
                 <c:pt idx="0">
-                  <c:v>33</c:v>
+                  <c:v>29</c:v>
                 </c:pt>
                 <c:pt idx="1">
-                  <c:v>4</c:v>
+                  <c:v>2</c:v>
                 </c:pt>
                 <c:pt idx="2">
                   <c:v>15</c:v>
@@ -1487,7 +1487,7 @@
                 </a:solidFill>
                 <a:latin typeface="Calibri"/>
               </a:rPr>
-              <a:t>Antigüedad de los 52 hallazgos abiertos</a:t>
+              <a:t>Antigüedad de los 46 hallazgos abiertos</a:t>
             </a:r>
           </a:p>
         </c:rich>
@@ -1640,7 +1640,7 @@
                 <c:formatCode>General</c:formatCode>
                 <c:ptCount val="1"/>
                 <c:pt idx="0">
-                  <c:v>10</c:v>
+                  <c:v>6</c:v>
                 </c:pt>
               </c:numCache>
             </c:numRef>
@@ -1784,7 +1784,7 @@
                 <c:formatCode>General</c:formatCode>
                 <c:ptCount val="1"/>
                 <c:pt idx="0">
-                  <c:v>15</c:v>
+                  <c:v>14</c:v>
                 </c:pt>
               </c:numCache>
             </c:numRef>
@@ -1856,7 +1856,7 @@
                 <c:formatCode>General</c:formatCode>
                 <c:ptCount val="1"/>
                 <c:pt idx="0">
-                  <c:v>4</c:v>
+                  <c:v>3</c:v>
                 </c:pt>
               </c:numCache>
             </c:numRef>
@@ -2573,7 +2573,7 @@
                 <c:formatCode>General</c:formatCode>
                 <c:ptCount val="8"/>
                 <c:pt idx="0">
-                  <c:v>134</c:v>
+                  <c:v>139</c:v>
                 </c:pt>
                 <c:pt idx="1">
                   <c:v>24</c:v>
@@ -2687,13 +2687,13 @@
                 <c:formatCode>General</c:formatCode>
                 <c:ptCount val="8"/>
                 <c:pt idx="0">
-                  <c:v>9</c:v>
+                  <c:v>6</c:v>
                 </c:pt>
                 <c:pt idx="1">
                   <c:v>2</c:v>
                 </c:pt>
                 <c:pt idx="2">
-                  <c:v/>
+                  <c:v>1</c:v>
                 </c:pt>
                 <c:pt idx="3">
                   <c:v/>
@@ -2999,7 +2999,7 @@
                 <c:formatCode>General</c:formatCode>
                 <c:ptCount val="8"/>
                 <c:pt idx="0">
-                  <c:v>35</c:v>
+                  <c:v>36</c:v>
                 </c:pt>
                 <c:pt idx="1">
                   <c:v>37</c:v>
@@ -3113,7 +3113,7 @@
                 <c:formatCode>General</c:formatCode>
                 <c:ptCount val="8"/>
                 <c:pt idx="0">
-                  <c:v>36</c:v>
+                  <c:v>35</c:v>
                 </c:pt>
                 <c:pt idx="1">
                   <c:v/>
@@ -5710,7 +5710,7 @@
                 <a:ea typeface="Calibri" pitchFamily="34" charset="-122"/>
                 <a:cs typeface="Calibri" pitchFamily="34" charset="-120"/>
               </a:rPr>
-              <a:t>498 hallazgos levantados entre 10-02-2023 y 11-08-2026 (Desaladora 82 · Talabre 244 · Arqueros 164 · Oficina Central 8).</a:t>
+              <a:t>501 hallazgos levantados entre 10-02-2023 y 19-08-2026 (Desaladora 82 · Talabre 247 · Arqueros 164 · Oficina Central 8).</a:t>
             </a:r>
             <a:endParaRPr lang="en-US" sz="1350" dirty="0"/>
           </a:p>
@@ -5769,7 +5769,7 @@
                 <a:ea typeface="Cambria" pitchFamily="34" charset="-122"/>
                 <a:cs typeface="Cambria" pitchFamily="34" charset="-120"/>
               </a:rPr>
-              <a:t>89,6%</a:t>
+              <a:t>90,8%</a:t>
             </a:r>
             <a:endParaRPr lang="en-US" sz="3400" dirty="0"/>
           </a:p>
@@ -5847,7 +5847,7 @@
                 <a:ea typeface="Cambria" pitchFamily="34" charset="-122"/>
                 <a:cs typeface="Cambria" pitchFamily="34" charset="-120"/>
               </a:rPr>
-              <a:t>52</a:t>
+              <a:t>46</a:t>
             </a:r>
             <a:endParaRPr lang="en-US" sz="3400" dirty="0"/>
           </a:p>
@@ -6081,7 +6081,7 @@
                 <a:ea typeface="Calibri" pitchFamily="34" charset="-122"/>
                 <a:cs typeface="Calibri" pitchFamily="34" charset="-120"/>
               </a:rPr>
-              <a:t>Corte: 17-08-2026</a:t>
+              <a:t>Corte: 24-08-2026</a:t>
             </a:r>
             <a:endParaRPr lang="en-US" sz="1100" dirty="0"/>
           </a:p>
@@ -6120,7 +6120,7 @@
                 <a:ea typeface="Calibri" pitchFamily="34" charset="-122"/>
                 <a:cs typeface="Calibri" pitchFamily="34" charset="-120"/>
               </a:rPr>
-              <a:t>Fuente: Data_NCR17082026.xlsx — hoja «Observaciones» · Corte 17-08-2026 · 498 registros desde 10-02-2023</a:t>
+              <a:t>Fuente: Data_NCR24082026.xlsx — hoja «Observaciones» · Corte 24-08-2026 · 501 registros desde 10-02-2023</a:t>
             </a:r>
             <a:endParaRPr lang="en-US" sz="850" dirty="0"/>
           </a:p>
@@ -6713,7 +6713,7 @@
                 <a:ea typeface="Calibri" pitchFamily="34" charset="-122"/>
                 <a:cs typeface="Calibri" pitchFamily="34" charset="-120"/>
               </a:rPr>
-              <a:t>Global del módulo: 89,6%</a:t>
+              <a:t>Global del módulo: 90,8%</a:t>
             </a:r>
             <a:endParaRPr lang="en-US" sz="950" dirty="0"/>
           </a:p>
@@ -7311,7 +7311,7 @@
                 <a:ea typeface="Calibri" pitchFamily="34" charset="-122"/>
                 <a:cs typeface="Calibri" pitchFamily="34" charset="-120"/>
               </a:rPr>
-              <a:t>global del módulo 32,5%</a:t>
+              <a:t>global del módulo 32,3%</a:t>
             </a:r>
             <a:endParaRPr lang="en-US" sz="1000" dirty="0"/>
           </a:p>
@@ -7921,7 +7921,7 @@
                 <a:ea typeface="Calibri" pitchFamily="34" charset="-122"/>
                 <a:cs typeface="Calibri" pitchFamily="34" charset="-120"/>
               </a:rPr>
-              <a:t>Fuente: Data_NCR17082026.xlsx — hoja «Observaciones» · Corte 17-08-2026 · 498 registros desde 10-02-2023</a:t>
+              <a:t>Fuente: Data_NCR24082026.xlsx — hoja «Observaciones» · Corte 24-08-2026 · 501 registros desde 10-02-2023</a:t>
             </a:r>
             <a:endParaRPr lang="en-US" sz="850" dirty="0"/>
           </a:p>
@@ -8780,7 +8780,7 @@
                 <a:ea typeface="Calibri" pitchFamily="34" charset="-122"/>
                 <a:cs typeface="Calibri" pitchFamily="34" charset="-120"/>
               </a:rPr>
-              <a:t>97</a:t>
+              <a:t>104</a:t>
             </a:r>
             <a:endParaRPr lang="en-US" sz="1050" dirty="0"/>
           </a:p>
@@ -8903,7 +8903,7 @@
                 <a:ea typeface="Calibri" pitchFamily="34" charset="-122"/>
                 <a:cs typeface="Calibri" pitchFamily="34" charset="-120"/>
               </a:rPr>
-              <a:t>SEMANA 10-08-2026 — 16-08-2026</a:t>
+              <a:t>SEMANA 17-08-2026 — 23-08-2026</a:t>
             </a:r>
             <a:endParaRPr lang="en-US" sz="1000" dirty="0"/>
           </a:p>
@@ -8981,7 +8981,7 @@
                 <a:ea typeface="Calibri" pitchFamily="34" charset="-122"/>
                 <a:cs typeface="Calibri" pitchFamily="34" charset="-120"/>
               </a:rPr>
-              <a:t>Fuente: Data_NCR17082026.xlsx — hoja «Observaciones» · Corte 17-08-2026 · 498 registros desde 10-02-2023</a:t>
+              <a:t>Fuente: Data_NCR24082026.xlsx — hoja «Observaciones» · Corte 24-08-2026 · 501 registros desde 10-02-2023</a:t>
             </a:r>
             <a:endParaRPr lang="en-US" sz="850" dirty="0"/>
           </a:p>
@@ -9334,7 +9334,7 @@
                 <a:ea typeface="Calibri" pitchFamily="34" charset="-122"/>
                 <a:cs typeface="Calibri" pitchFamily="34" charset="-120"/>
               </a:rPr>
-              <a:t>244 hallazgos levantados · 52 internas · 192 del cliente · 12 especialidades involucradas.</a:t>
+              <a:t>247 hallazgos levantados · 52 internas · 195 del cliente · 12 especialidades involucradas.</a:t>
             </a:r>
             <a:endParaRPr lang="en-US" sz="1350" dirty="0"/>
           </a:p>
@@ -9393,7 +9393,7 @@
                 <a:ea typeface="Cambria" pitchFamily="34" charset="-122"/>
                 <a:cs typeface="Cambria" pitchFamily="34" charset="-120"/>
               </a:rPr>
-              <a:t>94,3%</a:t>
+              <a:t>96,4%</a:t>
             </a:r>
             <a:endParaRPr lang="en-US" sz="3400" dirty="0"/>
           </a:p>
@@ -9471,7 +9471,7 @@
                 <a:ea typeface="Cambria" pitchFamily="34" charset="-122"/>
                 <a:cs typeface="Cambria" pitchFamily="34" charset="-120"/>
               </a:rPr>
-              <a:t>14</a:t>
+              <a:t>9</a:t>
             </a:r>
             <a:endParaRPr lang="en-US" sz="3400" dirty="0"/>
           </a:p>
@@ -9627,7 +9627,7 @@
                 <a:ea typeface="Cambria" pitchFamily="34" charset="-122"/>
                 <a:cs typeface="Cambria" pitchFamily="34" charset="-120"/>
               </a:rPr>
-              <a:t>21,3%</a:t>
+              <a:t>21,1%</a:t>
             </a:r>
             <a:endParaRPr lang="en-US" sz="3400" dirty="0"/>
           </a:p>
@@ -9705,7 +9705,7 @@
                 <a:ea typeface="Calibri" pitchFamily="34" charset="-122"/>
                 <a:cs typeface="Calibri" pitchFamily="34" charset="-120"/>
               </a:rPr>
-              <a:t>Corte: 17-08-2026</a:t>
+              <a:t>Corte: 24-08-2026</a:t>
             </a:r>
             <a:endParaRPr lang="en-US" sz="1100" dirty="0"/>
           </a:p>
@@ -9744,7 +9744,7 @@
                 <a:ea typeface="Calibri" pitchFamily="34" charset="-122"/>
                 <a:cs typeface="Calibri" pitchFamily="34" charset="-120"/>
               </a:rPr>
-              <a:t>Fuente: Data_NCR17082026.xlsx — hoja «Observaciones» · Corte 17-08-2026 · 498 registros desde 10-02-2023</a:t>
+              <a:t>Fuente: Data_NCR24082026.xlsx — hoja «Observaciones» · Corte 24-08-2026 · 501 registros desde 10-02-2023</a:t>
             </a:r>
             <a:endParaRPr lang="en-US" sz="850" dirty="0"/>
           </a:p>
@@ -10010,7 +10010,7 @@
                 <a:ea typeface="Cambria" pitchFamily="34" charset="-122"/>
                 <a:cs typeface="Cambria" pitchFamily="34" charset="-120"/>
               </a:rPr>
-              <a:t>244</a:t>
+              <a:t>247</a:t>
             </a:r>
             <a:endParaRPr lang="en-US" sz="4000" dirty="0"/>
           </a:p>
@@ -10049,7 +10049,7 @@
                 <a:ea typeface="Calibri" pitchFamily="34" charset="-122"/>
                 <a:cs typeface="Calibri" pitchFamily="34" charset="-120"/>
               </a:rPr>
-              <a:t>230 cerrados</a:t>
+              <a:t>238 cerrados</a:t>
             </a:r>
             <a:endParaRPr lang="en-US" sz="1400" dirty="0"/>
           </a:p>
@@ -10127,7 +10127,7 @@
                 <a:ea typeface="Calibri" pitchFamily="34" charset="-122"/>
                 <a:cs typeface="Calibri" pitchFamily="34" charset="-120"/>
               </a:rPr>
-              <a:t>52 internas · 192 del cliente</a:t>
+              <a:t>52 internas · 195 del cliente</a:t>
             </a:r>
             <a:endParaRPr lang="en-US" sz="950" dirty="0"/>
           </a:p>
@@ -10220,7 +10220,7 @@
                 <a:ea typeface="Cambria" pitchFamily="34" charset="-122"/>
                 <a:cs typeface="Cambria" pitchFamily="34" charset="-120"/>
               </a:rPr>
-              <a:t>94,3%</a:t>
+              <a:t>96,4%</a:t>
             </a:r>
             <a:endParaRPr lang="en-US" sz="4000" dirty="0"/>
           </a:p>
@@ -10259,7 +10259,7 @@
                 <a:ea typeface="Calibri" pitchFamily="34" charset="-122"/>
                 <a:cs typeface="Calibri" pitchFamily="34" charset="-120"/>
               </a:rPr>
-              <a:t>230/244</a:t>
+              <a:t>238/247</a:t>
             </a:r>
             <a:endParaRPr lang="en-US" sz="1400" dirty="0"/>
           </a:p>
@@ -10337,7 +10337,7 @@
                 <a:ea typeface="Calibri" pitchFamily="34" charset="-122"/>
                 <a:cs typeface="Calibri" pitchFamily="34" charset="-120"/>
               </a:rPr>
-              <a:t>Global del módulo: 89,6%</a:t>
+              <a:t>Global del módulo: 90,8%</a:t>
             </a:r>
             <a:endParaRPr lang="en-US" sz="950" dirty="0"/>
           </a:p>
@@ -10430,7 +10430,7 @@
                 <a:ea typeface="Cambria" pitchFamily="34" charset="-122"/>
                 <a:cs typeface="Cambria" pitchFamily="34" charset="-120"/>
               </a:rPr>
-              <a:t>14</a:t>
+              <a:t>9</a:t>
             </a:r>
             <a:endParaRPr lang="en-US" sz="4000" dirty="0"/>
           </a:p>
@@ -10547,7 +10547,7 @@
                 <a:ea typeface="Calibri" pitchFamily="34" charset="-122"/>
                 <a:cs typeface="Calibri" pitchFamily="34" charset="-120"/>
               </a:rPr>
-              <a:t>13 iniciado · 1 no aceptado</a:t>
+              <a:t>5 iniciado · 1 no aceptado · 3 listo para revisión</a:t>
             </a:r>
             <a:endParaRPr lang="en-US" sz="950" dirty="0"/>
           </a:p>
@@ -10757,7 +10757,7 @@
                 <a:ea typeface="Calibri" pitchFamily="34" charset="-122"/>
                 <a:cs typeface="Calibri" pitchFamily="34" charset="-120"/>
               </a:rPr>
-              <a:t>el más lento tomó 389 días</a:t>
+              <a:t>el más lento tomó 407 días</a:t>
             </a:r>
             <a:endParaRPr lang="en-US" sz="950" dirty="0"/>
           </a:p>
@@ -10873,7 +10873,7 @@
                 <a:ea typeface="Cambria" pitchFamily="34" charset="-122"/>
                 <a:cs typeface="Cambria" pitchFamily="34" charset="-120"/>
               </a:rPr>
-              <a:t>21,3%</a:t>
+              <a:t>21,1%</a:t>
             </a:r>
             <a:endParaRPr lang="en-US" sz="2600" dirty="0"/>
           </a:p>
@@ -10935,7 +10935,7 @@
                 <a:ea typeface="Calibri" pitchFamily="34" charset="-122"/>
                 <a:cs typeface="Calibri" pitchFamily="34" charset="-120"/>
               </a:rPr>
-              <a:t>global del módulo 32,5%</a:t>
+              <a:t>global del módulo 32,3%</a:t>
             </a:r>
             <a:endParaRPr lang="en-US" sz="1000" dirty="0"/>
           </a:p>
@@ -11050,13 +11050,13 @@
             <a:r>
               <a:rPr lang="en-US" sz="950" dirty="0">
                 <a:solidFill>
-                  <a:srgbClr val="E3A55B"/>
-                </a:solidFill>
-                <a:latin typeface="Calibri" pitchFamily="34" charset="0"/>
-                <a:ea typeface="Calibri" pitchFamily="34" charset="-122"/>
-                <a:cs typeface="Calibri" pitchFamily="34" charset="-120"/>
-              </a:rPr>
-              <a:t>3 ab.</a:t>
+                  <a:srgbClr val="6E8CA8"/>
+                </a:solidFill>
+                <a:latin typeface="Calibri" pitchFamily="34" charset="0"/>
+                <a:ea typeface="Calibri" pitchFamily="34" charset="-122"/>
+                <a:cs typeface="Calibri" pitchFamily="34" charset="-120"/>
+              </a:rPr>
+              <a:t>0 ab.</a:t>
             </a:r>
             <a:endParaRPr lang="en-US" sz="950" dirty="0"/>
           </a:p>
@@ -11193,7 +11193,7 @@
                 <a:ea typeface="Calibri" pitchFamily="34" charset="-122"/>
                 <a:cs typeface="Calibri" pitchFamily="34" charset="-120"/>
               </a:rPr>
-              <a:t>11 ab.</a:t>
+              <a:t>9 ab.</a:t>
             </a:r>
             <a:endParaRPr lang="en-US" sz="950" dirty="0"/>
           </a:p>
@@ -11232,7 +11232,7 @@
                 <a:ea typeface="Cambria" pitchFamily="34" charset="-122"/>
                 <a:cs typeface="Cambria" pitchFamily="34" charset="-120"/>
               </a:rPr>
-              <a:t>192</a:t>
+              <a:t>195</a:t>
             </a:r>
             <a:endParaRPr lang="en-US" sz="1600" dirty="0"/>
           </a:p>
@@ -11271,7 +11271,7 @@
                 <a:ea typeface="Calibri" pitchFamily="34" charset="-122"/>
                 <a:cs typeface="Calibri" pitchFamily="34" charset="-120"/>
               </a:rPr>
-              <a:t>Fuente: Data_NCR17082026.xlsx — hoja «Observaciones» · Corte 17-08-2026 · 498 registros desde 10-02-2023</a:t>
+              <a:t>Fuente: Data_NCR24082026.xlsx — hoja «Observaciones» · Corte 24-08-2026 · 501 registros desde 10-02-2023</a:t>
             </a:r>
             <a:endParaRPr lang="en-US" sz="850" dirty="0"/>
           </a:p>
@@ -11522,7 +11522,7 @@
                 <a:ea typeface="Calibri" pitchFamily="34" charset="-122"/>
                 <a:cs typeface="Calibri" pitchFamily="34" charset="-120"/>
               </a:rPr>
-              <a:t>14 hallazgos siguen abiertos; 3 con más de 180 días. Se listan del más antiguo al más reciente.</a:t>
+              <a:t>9 hallazgos siguen abiertos; 0 con más de 180 días. Se listan del más antiguo al más reciente.</a:t>
             </a:r>
             <a:endParaRPr lang="en-US" sz="1350" dirty="0"/>
           </a:p>
@@ -11896,7 +11896,7 @@
                 <a:ea typeface="Calibri" pitchFamily="34" charset="-122"/>
                 <a:cs typeface="Calibri" pitchFamily="34" charset="-120"/>
               </a:rPr>
-              <a:t>21</a:t>
+              <a:t>198</a:t>
             </a:r>
             <a:endParaRPr lang="en-US" sz="1050" dirty="0"/>
           </a:p>
@@ -11935,7 +11935,7 @@
                 <a:ea typeface="Calibri" pitchFamily="34" charset="-122"/>
                 <a:cs typeface="Calibri" pitchFamily="34" charset="-120"/>
               </a:rPr>
-              <a:t>No Conformidad</a:t>
+              <a:t>Producto No Conforme</a:t>
             </a:r>
             <a:endParaRPr lang="en-US" sz="1050" dirty="0"/>
           </a:p>
@@ -11968,13 +11968,13 @@
             <a:r>
               <a:rPr lang="en-US" sz="1050" b="1" dirty="0">
                 <a:solidFill>
-                  <a:srgbClr val="2E6FB5"/>
-                </a:solidFill>
-                <a:latin typeface="Calibri" pitchFamily="34" charset="0"/>
-                <a:ea typeface="Calibri" pitchFamily="34" charset="-122"/>
-                <a:cs typeface="Calibri" pitchFamily="34" charset="-120"/>
-              </a:rPr>
-              <a:t>Interna (Besalco)</a:t>
+                  <a:srgbClr val="C87A32"/>
+                </a:solidFill>
+                <a:latin typeface="Calibri" pitchFamily="34" charset="0"/>
+                <a:ea typeface="Calibri" pitchFamily="34" charset="-122"/>
+                <a:cs typeface="Calibri" pitchFamily="34" charset="-120"/>
+              </a:rPr>
+              <a:t>Externa · Cliente</a:t>
             </a:r>
             <a:endParaRPr lang="en-US" sz="1050" dirty="0"/>
           </a:p>
@@ -12013,7 +12013,7 @@
                 <a:ea typeface="Calibri" pitchFamily="34" charset="-122"/>
                 <a:cs typeface="Calibri" pitchFamily="34" charset="-120"/>
               </a:rPr>
-              <a:t>EXPEDITORÍA</a:t>
+              <a:t>OO.CC</a:t>
             </a:r>
             <a:endParaRPr lang="en-US" sz="1050" dirty="0"/>
           </a:p>
@@ -12052,7 +12052,7 @@
                 <a:ea typeface="Calibri" pitchFamily="34" charset="-122"/>
                 <a:cs typeface="Calibri" pitchFamily="34" charset="-120"/>
               </a:rPr>
-              <a:t>Alvaro Cortés V.</a:t>
+              <a:t>Wladimir Carvajal …</a:t>
             </a:r>
             <a:endParaRPr lang="en-US" sz="1050" dirty="0"/>
           </a:p>
@@ -12122,15 +12122,15 @@
               <a:buNone/>
             </a:pPr>
             <a:r>
-              <a:rPr lang="en-US" sz="1050" b="1" dirty="0">
-                <a:solidFill>
-                  <a:srgbClr val="C0392B"/>
-                </a:solidFill>
-                <a:latin typeface="Calibri" pitchFamily="34" charset="0"/>
-                <a:ea typeface="Calibri" pitchFamily="34" charset="-122"/>
-                <a:cs typeface="Calibri" pitchFamily="34" charset="-120"/>
-              </a:rPr>
-              <a:t>406</a:t>
+              <a:rPr lang="en-US" sz="1050" dirty="0">
+                <a:solidFill>
+                  <a:srgbClr val="1A2433"/>
+                </a:solidFill>
+                <a:latin typeface="Calibri" pitchFamily="34" charset="0"/>
+                <a:ea typeface="Calibri" pitchFamily="34" charset="-122"/>
+                <a:cs typeface="Calibri" pitchFamily="34" charset="-120"/>
+              </a:rPr>
+              <a:t>154</a:t>
             </a:r>
             <a:endParaRPr lang="en-US" sz="1050" dirty="0"/>
           </a:p>
@@ -12169,7 +12169,7 @@
                 <a:ea typeface="Calibri" pitchFamily="34" charset="-122"/>
                 <a:cs typeface="Calibri" pitchFamily="34" charset="-120"/>
               </a:rPr>
-              <a:t>Incumplimiento a Plan de Calidad de…</a:t>
+              <a:t>Corte en geomembrana HDPE instalada…</a:t>
             </a:r>
             <a:endParaRPr lang="en-US" sz="1000" dirty="0"/>
           </a:p>
@@ -12251,7 +12251,7 @@
                 <a:ea typeface="Calibri" pitchFamily="34" charset="-122"/>
                 <a:cs typeface="Calibri" pitchFamily="34" charset="-120"/>
               </a:rPr>
-              <a:t>72</a:t>
+              <a:t>205</a:t>
             </a:r>
             <a:endParaRPr lang="en-US" sz="1050" dirty="0"/>
           </a:p>
@@ -12290,7 +12290,7 @@
                 <a:ea typeface="Calibri" pitchFamily="34" charset="-122"/>
                 <a:cs typeface="Calibri" pitchFamily="34" charset="-120"/>
               </a:rPr>
-              <a:t>No Conformidad</a:t>
+              <a:t>Producto No Conforme</a:t>
             </a:r>
             <a:endParaRPr lang="en-US" sz="1050" dirty="0"/>
           </a:p>
@@ -12323,13 +12323,13 @@
             <a:r>
               <a:rPr lang="en-US" sz="1050" b="1" dirty="0">
                 <a:solidFill>
-                  <a:srgbClr val="2E6FB5"/>
-                </a:solidFill>
-                <a:latin typeface="Calibri" pitchFamily="34" charset="0"/>
-                <a:ea typeface="Calibri" pitchFamily="34" charset="-122"/>
-                <a:cs typeface="Calibri" pitchFamily="34" charset="-120"/>
-              </a:rPr>
-              <a:t>Interna (Besalco)</a:t>
+                  <a:srgbClr val="C87A32"/>
+                </a:solidFill>
+                <a:latin typeface="Calibri" pitchFamily="34" charset="0"/>
+                <a:ea typeface="Calibri" pitchFamily="34" charset="-122"/>
+                <a:cs typeface="Calibri" pitchFamily="34" charset="-120"/>
+              </a:rPr>
+              <a:t>Externa · Cliente</a:t>
             </a:r>
             <a:endParaRPr lang="en-US" sz="1050" dirty="0"/>
           </a:p>
@@ -12368,7 +12368,7 @@
                 <a:ea typeface="Calibri" pitchFamily="34" charset="-122"/>
                 <a:cs typeface="Calibri" pitchFamily="34" charset="-120"/>
               </a:rPr>
-              <a:t>EXPEDITORÍA</a:t>
+              <a:t>OO.CC</a:t>
             </a:r>
             <a:endParaRPr lang="en-US" sz="1050" dirty="0"/>
           </a:p>
@@ -12407,7 +12407,7 @@
                 <a:ea typeface="Calibri" pitchFamily="34" charset="-122"/>
                 <a:cs typeface="Calibri" pitchFamily="34" charset="-120"/>
               </a:rPr>
-              <a:t>Alvaro Cortés V.</a:t>
+              <a:t>Sebastián Ramos</a:t>
             </a:r>
             <a:endParaRPr lang="en-US" sz="1050" dirty="0"/>
           </a:p>
@@ -12446,7 +12446,7 @@
                 <a:ea typeface="Calibri" pitchFamily="34" charset="-122"/>
                 <a:cs typeface="Calibri" pitchFamily="34" charset="-120"/>
               </a:rPr>
-              <a:t>Iniciado</a:t>
+              <a:t>No aceptado</a:t>
             </a:r>
             <a:endParaRPr lang="en-US" sz="1050" dirty="0"/>
           </a:p>
@@ -12477,15 +12477,15 @@
               <a:buNone/>
             </a:pPr>
             <a:r>
-              <a:rPr lang="en-US" sz="1050" b="1" dirty="0">
-                <a:solidFill>
-                  <a:srgbClr val="C0392B"/>
-                </a:solidFill>
-                <a:latin typeface="Calibri" pitchFamily="34" charset="0"/>
-                <a:ea typeface="Calibri" pitchFamily="34" charset="-122"/>
-                <a:cs typeface="Calibri" pitchFamily="34" charset="-120"/>
-              </a:rPr>
-              <a:t>342</a:t>
+              <a:rPr lang="en-US" sz="1050" dirty="0">
+                <a:solidFill>
+                  <a:srgbClr val="1A2433"/>
+                </a:solidFill>
+                <a:latin typeface="Calibri" pitchFamily="34" charset="0"/>
+                <a:ea typeface="Calibri" pitchFamily="34" charset="-122"/>
+                <a:cs typeface="Calibri" pitchFamily="34" charset="-120"/>
+              </a:rPr>
+              <a:t>140</a:t>
             </a:r>
             <a:endParaRPr lang="en-US" sz="1050" dirty="0"/>
           </a:p>
@@ -12524,7 +12524,7 @@
                 <a:ea typeface="Calibri" pitchFamily="34" charset="-122"/>
                 <a:cs typeface="Calibri" pitchFamily="34" charset="-120"/>
               </a:rPr>
-              <a:t>Incumplimiento a la recepción de ma…</a:t>
+              <a:t>Solución proyectada asociada al ele…</a:t>
             </a:r>
             <a:endParaRPr lang="en-US" sz="1000" dirty="0"/>
           </a:p>
@@ -12586,7 +12586,7 @@
                 <a:ea typeface="Calibri" pitchFamily="34" charset="-122"/>
                 <a:cs typeface="Calibri" pitchFamily="34" charset="-120"/>
               </a:rPr>
-              <a:t>142</a:t>
+              <a:t>230</a:t>
             </a:r>
             <a:endParaRPr lang="en-US" sz="1050" dirty="0"/>
           </a:p>
@@ -12658,13 +12658,13 @@
             <a:r>
               <a:rPr lang="en-US" sz="1050" b="1" dirty="0">
                 <a:solidFill>
-                  <a:srgbClr val="2E6FB5"/>
-                </a:solidFill>
-                <a:latin typeface="Calibri" pitchFamily="34" charset="0"/>
-                <a:ea typeface="Calibri" pitchFamily="34" charset="-122"/>
-                <a:cs typeface="Calibri" pitchFamily="34" charset="-120"/>
-              </a:rPr>
-              <a:t>Interna (Besalco)</a:t>
+                  <a:srgbClr val="C87A32"/>
+                </a:solidFill>
+                <a:latin typeface="Calibri" pitchFamily="34" charset="0"/>
+                <a:ea typeface="Calibri" pitchFamily="34" charset="-122"/>
+                <a:cs typeface="Calibri" pitchFamily="34" charset="-120"/>
+              </a:rPr>
+              <a:t>Externa · Cliente</a:t>
             </a:r>
             <a:endParaRPr lang="en-US" sz="1050" dirty="0"/>
           </a:p>
@@ -12703,7 +12703,7 @@
                 <a:ea typeface="Calibri" pitchFamily="34" charset="-122"/>
                 <a:cs typeface="Calibri" pitchFamily="34" charset="-120"/>
               </a:rPr>
-              <a:t>EXPEDITORÍA</a:t>
+              <a:t>CALIDAD</a:t>
             </a:r>
             <a:endParaRPr lang="en-US" sz="1050" dirty="0"/>
           </a:p>
@@ -12742,7 +12742,7 @@
                 <a:ea typeface="Calibri" pitchFamily="34" charset="-122"/>
                 <a:cs typeface="Calibri" pitchFamily="34" charset="-120"/>
               </a:rPr>
-              <a:t>Alvaro Cortés V.</a:t>
+              <a:t>Mauricio Soto B.</a:t>
             </a:r>
             <a:endParaRPr lang="en-US" sz="1050" dirty="0"/>
           </a:p>
@@ -12812,15 +12812,15 @@
               <a:buNone/>
             </a:pPr>
             <a:r>
-              <a:rPr lang="en-US" sz="1050" b="1" dirty="0">
-                <a:solidFill>
-                  <a:srgbClr val="C0392B"/>
-                </a:solidFill>
-                <a:latin typeface="Calibri" pitchFamily="34" charset="0"/>
-                <a:ea typeface="Calibri" pitchFamily="34" charset="-122"/>
-                <a:cs typeface="Calibri" pitchFamily="34" charset="-120"/>
-              </a:rPr>
-              <a:t>238</a:t>
+              <a:rPr lang="en-US" sz="1050" dirty="0">
+                <a:solidFill>
+                  <a:srgbClr val="1A2433"/>
+                </a:solidFill>
+                <a:latin typeface="Calibri" pitchFamily="34" charset="0"/>
+                <a:ea typeface="Calibri" pitchFamily="34" charset="-122"/>
+                <a:cs typeface="Calibri" pitchFamily="34" charset="-120"/>
+              </a:rPr>
+              <a:t>76</a:t>
             </a:r>
             <a:endParaRPr lang="en-US" sz="1050" dirty="0"/>
           </a:p>
@@ -12859,7 +12859,7 @@
                 <a:ea typeface="Calibri" pitchFamily="34" charset="-122"/>
                 <a:cs typeface="Calibri" pitchFamily="34" charset="-120"/>
               </a:rPr>
-              <a:t>Daños manguerotes en recepción/desc…</a:t>
+              <a:t>No se evidenció un Plan de Cierre d…</a:t>
             </a:r>
             <a:endParaRPr lang="en-US" sz="1000" dirty="0"/>
           </a:p>
@@ -12941,7 +12941,7 @@
                 <a:ea typeface="Calibri" pitchFamily="34" charset="-122"/>
                 <a:cs typeface="Calibri" pitchFamily="34" charset="-120"/>
               </a:rPr>
-              <a:t>192</a:t>
+              <a:t>235</a:t>
             </a:r>
             <a:endParaRPr lang="en-US" sz="1050" dirty="0"/>
           </a:p>
@@ -13097,7 +13097,7 @@
                 <a:ea typeface="Calibri" pitchFamily="34" charset="-122"/>
                 <a:cs typeface="Calibri" pitchFamily="34" charset="-120"/>
               </a:rPr>
-              <a:t>Sebastián Ramos</a:t>
+              <a:t>Mauricio Rocha A.</a:t>
             </a:r>
             <a:endParaRPr lang="en-US" sz="1050" dirty="0"/>
           </a:p>
@@ -13175,7 +13175,7 @@
                 <a:ea typeface="Calibri" pitchFamily="34" charset="-122"/>
                 <a:cs typeface="Calibri" pitchFamily="34" charset="-120"/>
               </a:rPr>
-              <a:t>153</a:t>
+              <a:t>55</a:t>
             </a:r>
             <a:endParaRPr lang="en-US" sz="1050" dirty="0"/>
           </a:p>
@@ -13214,7 +13214,7 @@
                 <a:ea typeface="Calibri" pitchFamily="34" charset="-122"/>
                 <a:cs typeface="Calibri" pitchFamily="34" charset="-120"/>
               </a:rPr>
-              <a:t>Fundaciones sin relleno estructural…</a:t>
+              <a:t>Geomembrana presenta sectores en lo…</a:t>
             </a:r>
             <a:endParaRPr lang="en-US" sz="1000" dirty="0"/>
           </a:p>
@@ -13276,7 +13276,7 @@
                 <a:ea typeface="Calibri" pitchFamily="34" charset="-122"/>
                 <a:cs typeface="Calibri" pitchFamily="34" charset="-120"/>
               </a:rPr>
-              <a:t>198</a:t>
+              <a:t>241</a:t>
             </a:r>
             <a:endParaRPr lang="en-US" sz="1050" dirty="0"/>
           </a:p>
@@ -13315,7 +13315,7 @@
                 <a:ea typeface="Calibri" pitchFamily="34" charset="-122"/>
                 <a:cs typeface="Calibri" pitchFamily="34" charset="-120"/>
               </a:rPr>
-              <a:t>Producto No Conforme</a:t>
+              <a:t>No Conformidad</a:t>
             </a:r>
             <a:endParaRPr lang="en-US" sz="1050" dirty="0"/>
           </a:p>
@@ -13393,7 +13393,7 @@
                 <a:ea typeface="Calibri" pitchFamily="34" charset="-122"/>
                 <a:cs typeface="Calibri" pitchFamily="34" charset="-120"/>
               </a:rPr>
-              <a:t>OO.CC</a:t>
+              <a:t>CALIDAD</a:t>
             </a:r>
             <a:endParaRPr lang="en-US" sz="1050" dirty="0"/>
           </a:p>
@@ -13432,7 +13432,7 @@
                 <a:ea typeface="Calibri" pitchFamily="34" charset="-122"/>
                 <a:cs typeface="Calibri" pitchFamily="34" charset="-120"/>
               </a:rPr>
-              <a:t>Wladimir Carvajal …</a:t>
+              <a:t>Daniel Ramirez B.</a:t>
             </a:r>
             <a:endParaRPr lang="en-US" sz="1050" dirty="0"/>
           </a:p>
@@ -13471,7 +13471,7 @@
                 <a:ea typeface="Calibri" pitchFamily="34" charset="-122"/>
                 <a:cs typeface="Calibri" pitchFamily="34" charset="-120"/>
               </a:rPr>
-              <a:t>Iniciado</a:t>
+              <a:t>Listo para revisi…</a:t>
             </a:r>
             <a:endParaRPr lang="en-US" sz="1050" dirty="0"/>
           </a:p>
@@ -13510,7 +13510,7 @@
                 <a:ea typeface="Calibri" pitchFamily="34" charset="-122"/>
                 <a:cs typeface="Calibri" pitchFamily="34" charset="-120"/>
               </a:rPr>
-              <a:t>147</a:t>
+              <a:t>27</a:t>
             </a:r>
             <a:endParaRPr lang="en-US" sz="1050" dirty="0"/>
           </a:p>
@@ -13549,7 +13549,7 @@
                 <a:ea typeface="Calibri" pitchFamily="34" charset="-122"/>
                 <a:cs typeface="Calibri" pitchFamily="34" charset="-120"/>
               </a:rPr>
-              <a:t>Corte en geomembrana HDPE instalada…</a:t>
+              <a:t>Registros de construcción no contie…</a:t>
             </a:r>
             <a:endParaRPr lang="en-US" sz="1000" dirty="0"/>
           </a:p>
@@ -13631,7 +13631,7 @@
                 <a:ea typeface="Calibri" pitchFamily="34" charset="-122"/>
                 <a:cs typeface="Calibri" pitchFamily="34" charset="-120"/>
               </a:rPr>
-              <a:t>205</a:t>
+              <a:t>243</a:t>
             </a:r>
             <a:endParaRPr lang="en-US" sz="1050" dirty="0"/>
           </a:p>
@@ -13670,7 +13670,7 @@
                 <a:ea typeface="Calibri" pitchFamily="34" charset="-122"/>
                 <a:cs typeface="Calibri" pitchFamily="34" charset="-120"/>
               </a:rPr>
-              <a:t>Producto No Conforme</a:t>
+              <a:t>No Conformidad</a:t>
             </a:r>
             <a:endParaRPr lang="en-US" sz="1050" dirty="0"/>
           </a:p>
@@ -13787,7 +13787,7 @@
                 <a:ea typeface="Calibri" pitchFamily="34" charset="-122"/>
                 <a:cs typeface="Calibri" pitchFamily="34" charset="-120"/>
               </a:rPr>
-              <a:t>Sebastián Ramos</a:t>
+              <a:t>Mauricio Rocha A.</a:t>
             </a:r>
             <a:endParaRPr lang="en-US" sz="1050" dirty="0"/>
           </a:p>
@@ -13826,7 +13826,7 @@
                 <a:ea typeface="Calibri" pitchFamily="34" charset="-122"/>
                 <a:cs typeface="Calibri" pitchFamily="34" charset="-120"/>
               </a:rPr>
-              <a:t>No aceptado</a:t>
+              <a:t>Listo para revisi…</a:t>
             </a:r>
             <a:endParaRPr lang="en-US" sz="1050" dirty="0"/>
           </a:p>
@@ -13865,7 +13865,7 @@
                 <a:ea typeface="Calibri" pitchFamily="34" charset="-122"/>
                 <a:cs typeface="Calibri" pitchFamily="34" charset="-120"/>
               </a:rPr>
-              <a:t>133</a:t>
+              <a:t>14</a:t>
             </a:r>
             <a:endParaRPr lang="en-US" sz="1050" dirty="0"/>
           </a:p>
@@ -13904,7 +13904,7 @@
                 <a:ea typeface="Calibri" pitchFamily="34" charset="-122"/>
                 <a:cs typeface="Calibri" pitchFamily="34" charset="-120"/>
               </a:rPr>
-              <a:t>Solución proyectada asociada al ele…</a:t>
+              <a:t>Rollos de geomembrana KRAH (2 mm es…</a:t>
             </a:r>
             <a:endParaRPr lang="en-US" sz="1000" dirty="0"/>
           </a:p>
@@ -13966,7 +13966,7 @@
                 <a:ea typeface="Calibri" pitchFamily="34" charset="-122"/>
                 <a:cs typeface="Calibri" pitchFamily="34" charset="-120"/>
               </a:rPr>
-              <a:t>209</a:t>
+              <a:t>244</a:t>
             </a:r>
             <a:endParaRPr lang="en-US" sz="1050" dirty="0"/>
           </a:p>
@@ -14122,7 +14122,7 @@
                 <a:ea typeface="Calibri" pitchFamily="34" charset="-122"/>
                 <a:cs typeface="Calibri" pitchFamily="34" charset="-120"/>
               </a:rPr>
-              <a:t>Sebastián Ramos</a:t>
+              <a:t>Mauricio Rocha A.</a:t>
             </a:r>
             <a:endParaRPr lang="en-US" sz="1050" dirty="0"/>
           </a:p>
@@ -14161,7 +14161,7 @@
                 <a:ea typeface="Calibri" pitchFamily="34" charset="-122"/>
                 <a:cs typeface="Calibri" pitchFamily="34" charset="-120"/>
               </a:rPr>
-              <a:t>Iniciado</a:t>
+              <a:t>Listo para revisi…</a:t>
             </a:r>
             <a:endParaRPr lang="en-US" sz="1050" dirty="0"/>
           </a:p>
@@ -14200,7 +14200,7 @@
                 <a:ea typeface="Calibri" pitchFamily="34" charset="-122"/>
                 <a:cs typeface="Calibri" pitchFamily="34" charset="-120"/>
               </a:rPr>
-              <a:t>125</a:t>
+              <a:t>14</a:t>
             </a:r>
             <a:endParaRPr lang="en-US" sz="1050" dirty="0"/>
           </a:p>
@@ -14239,7 +14239,7 @@
                 <a:ea typeface="Calibri" pitchFamily="34" charset="-122"/>
                 <a:cs typeface="Calibri" pitchFamily="34" charset="-120"/>
               </a:rPr>
-              <a:t>Sector Manifold EBMS, Fundaciones F…</a:t>
+              <a:t>En Piscina Quebrada Sur, se evidenc…</a:t>
             </a:r>
             <a:endParaRPr lang="en-US" sz="1000" dirty="0"/>
           </a:p>
@@ -14321,7 +14321,7 @@
                 <a:ea typeface="Calibri" pitchFamily="34" charset="-122"/>
                 <a:cs typeface="Calibri" pitchFamily="34" charset="-120"/>
               </a:rPr>
-              <a:t>230</a:t>
+              <a:t>247</a:t>
             </a:r>
             <a:endParaRPr lang="en-US" sz="1050" dirty="0"/>
           </a:p>
@@ -14438,7 +14438,7 @@
                 <a:ea typeface="Calibri" pitchFamily="34" charset="-122"/>
                 <a:cs typeface="Calibri" pitchFamily="34" charset="-120"/>
               </a:rPr>
-              <a:t>CALIDAD</a:t>
+              <a:t>OO.CC</a:t>
             </a:r>
             <a:endParaRPr lang="en-US" sz="1050" dirty="0"/>
           </a:p>
@@ -14477,7 +14477,7 @@
                 <a:ea typeface="Calibri" pitchFamily="34" charset="-122"/>
                 <a:cs typeface="Calibri" pitchFamily="34" charset="-120"/>
               </a:rPr>
-              <a:t>Mauricio Soto B.</a:t>
+              <a:t>Luis Ogalde H.</a:t>
             </a:r>
             <a:endParaRPr lang="en-US" sz="1050" dirty="0"/>
           </a:p>
@@ -14555,7 +14555,7 @@
                 <a:ea typeface="Calibri" pitchFamily="34" charset="-122"/>
                 <a:cs typeface="Calibri" pitchFamily="34" charset="-120"/>
               </a:rPr>
-              <a:t>69</a:t>
+              <a:t>5</a:t>
             </a:r>
             <a:endParaRPr lang="en-US" sz="1050" dirty="0"/>
           </a:p>
@@ -14594,7 +14594,7 @@
                 <a:ea typeface="Calibri" pitchFamily="34" charset="-122"/>
                 <a:cs typeface="Calibri" pitchFamily="34" charset="-120"/>
               </a:rPr>
-              <a:t>No se evidenció un Plan de Cierre d…</a:t>
+              <a:t>Fundaciones FS-01 (10 elementos) no…</a:t>
             </a:r>
             <a:endParaRPr lang="en-US" sz="1000" dirty="0"/>
           </a:p>
@@ -14656,7 +14656,7 @@
                 <a:ea typeface="Calibri" pitchFamily="34" charset="-122"/>
                 <a:cs typeface="Calibri" pitchFamily="34" charset="-120"/>
               </a:rPr>
-              <a:t>235</a:t>
+              <a:t>248</a:t>
             </a:r>
             <a:endParaRPr lang="en-US" sz="1050" dirty="0"/>
           </a:p>
@@ -14773,7 +14773,7 @@
                 <a:ea typeface="Calibri" pitchFamily="34" charset="-122"/>
                 <a:cs typeface="Calibri" pitchFamily="34" charset="-120"/>
               </a:rPr>
-              <a:t>OO.CC</a:t>
+              <a:t>PIPING</a:t>
             </a:r>
             <a:endParaRPr lang="en-US" sz="1050" dirty="0"/>
           </a:p>
@@ -14812,7 +14812,7 @@
                 <a:ea typeface="Calibri" pitchFamily="34" charset="-122"/>
                 <a:cs typeface="Calibri" pitchFamily="34" charset="-120"/>
               </a:rPr>
-              <a:t>Mauricio Rocha A.</a:t>
+              <a:t>Oscar Nahuel P.</a:t>
             </a:r>
             <a:endParaRPr lang="en-US" sz="1050" dirty="0"/>
           </a:p>
@@ -14890,7 +14890,7 @@
                 <a:ea typeface="Calibri" pitchFamily="34" charset="-122"/>
                 <a:cs typeface="Calibri" pitchFamily="34" charset="-120"/>
               </a:rPr>
-              <a:t>48</a:t>
+              <a:t>5</a:t>
             </a:r>
             <a:endParaRPr lang="en-US" sz="1050" dirty="0"/>
           </a:p>
@@ -14929,7 +14929,7 @@
                 <a:ea typeface="Calibri" pitchFamily="34" charset="-122"/>
                 <a:cs typeface="Calibri" pitchFamily="34" charset="-120"/>
               </a:rPr>
-              <a:t>Geomembrana presenta sectores en lo…</a:t>
+              <a:t>Línea TAG N° 3716D-RW-24-H1-0425-N …</a:t>
             </a:r>
             <a:endParaRPr lang="en-US" sz="1000" dirty="0"/>
           </a:p>
@@ -14960,46 +14960,7 @@
       </p:sp>
       <p:sp>
         <p:nvSpPr>
-          <p:cNvPr id="100" name="Text 97"/>
-          <p:cNvSpPr/>
-          <p:nvPr/>
-        </p:nvSpPr>
-        <p:spPr>
-          <a:xfrm>
-            <a:off x="502920" y="5440680"/>
-            <a:ext cx="8229600" cy="256032"/>
-          </a:xfrm>
-          <a:prstGeom prst="rect">
-            <a:avLst/>
-          </a:prstGeom>
-          <a:noFill/>
-          <a:ln/>
-        </p:spPr>
-        <p:txBody>
-          <a:bodyPr wrap="square" lIns="0" tIns="0" rIns="0" bIns="0" rtlCol="0" anchor="ctr"/>
-          <a:lstStyle/>
-          <a:p>
-            <a:pPr indent="0" marL="0">
-              <a:buNone/>
-            </a:pPr>
-            <a:r>
-              <a:rPr lang="en-US" sz="950" i="1" dirty="0">
-                <a:solidFill>
-                  <a:srgbClr val="56606E"/>
-                </a:solidFill>
-                <a:latin typeface="Calibri" pitchFamily="34" charset="0"/>
-                <a:ea typeface="Calibri" pitchFamily="34" charset="-122"/>
-                <a:cs typeface="Calibri" pitchFamily="34" charset="-120"/>
-              </a:rPr>
-              <a:t>Se listan los 9 más antiguos de 14 abiertos; el detalle completo está en el panel.</a:t>
-            </a:r>
-            <a:endParaRPr lang="en-US" sz="950" dirty="0"/>
-          </a:p>
-        </p:txBody>
-      </p:sp>
-      <p:sp>
-        <p:nvSpPr>
-          <p:cNvPr id="101" name="Shape 98"/>
+          <p:cNvPr id="100" name="Shape 97"/>
           <p:cNvSpPr/>
           <p:nvPr/>
         </p:nvSpPr>
@@ -15021,7 +14982,7 @@
       </p:sp>
       <p:sp>
         <p:nvSpPr>
-          <p:cNvPr id="102" name="Text 99"/>
+          <p:cNvPr id="101" name="Text 98"/>
           <p:cNvSpPr/>
           <p:nvPr/>
         </p:nvSpPr>
@@ -15052,7 +15013,7 @@
                 <a:ea typeface="Calibri" pitchFamily="34" charset="-122"/>
                 <a:cs typeface="Calibri" pitchFamily="34" charset="-120"/>
               </a:rPr>
-              <a:t>SEMANA 10-08-2026 — 16-08-2026</a:t>
+              <a:t>SEMANA 17-08-2026 — 23-08-2026</a:t>
             </a:r>
             <a:endParaRPr lang="en-US" sz="1000" dirty="0"/>
           </a:p>
@@ -15060,7 +15021,7 @@
       </p:sp>
       <p:sp>
         <p:nvSpPr>
-          <p:cNvPr id="103" name="Text 100"/>
+          <p:cNvPr id="102" name="Text 99"/>
           <p:cNvSpPr/>
           <p:nvPr/>
         </p:nvSpPr>
@@ -15091,7 +15052,7 @@
                 <a:ea typeface="Calibri" pitchFamily="34" charset="-122"/>
                 <a:cs typeface="Calibri" pitchFamily="34" charset="-120"/>
               </a:rPr>
-              <a:t>3 hallazgos nuevos · 0 internas · 3 del cliente · OO.CC 3 · 2 siguen abiertos</a:t>
+              <a:t>3 hallazgos nuevos · 0 internas · 3 del cliente · OO.CC 2 · PIPING 1 · 2 siguen abiertos</a:t>
             </a:r>
             <a:endParaRPr lang="en-US" sz="1150" dirty="0"/>
           </a:p>
@@ -15099,7 +15060,7 @@
       </p:sp>
       <p:sp>
         <p:nvSpPr>
-          <p:cNvPr id="104" name="Text 101"/>
+          <p:cNvPr id="103" name="Text 100"/>
           <p:cNvSpPr/>
           <p:nvPr/>
         </p:nvSpPr>
@@ -15130,7 +15091,7 @@
                 <a:ea typeface="Calibri" pitchFamily="34" charset="-122"/>
                 <a:cs typeface="Calibri" pitchFamily="34" charset="-120"/>
               </a:rPr>
-              <a:t>Fuente: Data_NCR17082026.xlsx — hoja «Observaciones» · Corte 17-08-2026 · 498 registros desde 10-02-2023</a:t>
+              <a:t>Fuente: Data_NCR24082026.xlsx — hoja «Observaciones» · Corte 24-08-2026 · 501 registros desde 10-02-2023</a:t>
             </a:r>
             <a:endParaRPr lang="en-US" sz="850" dirty="0"/>
           </a:p>
@@ -15138,7 +15099,7 @@
       </p:sp>
       <p:sp>
         <p:nvSpPr>
-          <p:cNvPr id="105" name="Text 102"/>
+          <p:cNvPr id="104" name="Text 101"/>
           <p:cNvSpPr/>
           <p:nvPr/>
         </p:nvSpPr>
@@ -15177,7 +15138,7 @@
       </p:sp>
       <p:sp>
         <p:nvSpPr>
-          <p:cNvPr id="106" name="Text 103"/>
+          <p:cNvPr id="105" name="Text 102"/>
           <p:cNvSpPr/>
           <p:nvPr/>
         </p:nvSpPr>
@@ -15542,7 +15503,7 @@
                 <a:ea typeface="Cambria" pitchFamily="34" charset="-122"/>
                 <a:cs typeface="Cambria" pitchFamily="34" charset="-120"/>
               </a:rPr>
-              <a:t>77,4%</a:t>
+              <a:t>78%</a:t>
             </a:r>
             <a:endParaRPr lang="en-US" sz="3400" dirty="0"/>
           </a:p>
@@ -15620,7 +15581,7 @@
                 <a:ea typeface="Cambria" pitchFamily="34" charset="-122"/>
                 <a:cs typeface="Cambria" pitchFamily="34" charset="-120"/>
               </a:rPr>
-              <a:t>37</a:t>
+              <a:t>36</a:t>
             </a:r>
             <a:endParaRPr lang="en-US" sz="3400" dirty="0"/>
           </a:p>
@@ -15698,7 +15659,7 @@
                 <a:ea typeface="Cambria" pitchFamily="34" charset="-122"/>
                 <a:cs typeface="Cambria" pitchFamily="34" charset="-120"/>
               </a:rPr>
-              <a:t>129 d</a:t>
+              <a:t>131 d</a:t>
             </a:r>
             <a:endParaRPr lang="en-US" sz="3400" dirty="0"/>
           </a:p>
@@ -15854,7 +15815,7 @@
                 <a:ea typeface="Calibri" pitchFamily="34" charset="-122"/>
                 <a:cs typeface="Calibri" pitchFamily="34" charset="-120"/>
               </a:rPr>
-              <a:t>Corte: 17-08-2026</a:t>
+              <a:t>Corte: 24-08-2026</a:t>
             </a:r>
             <a:endParaRPr lang="en-US" sz="1100" dirty="0"/>
           </a:p>
@@ -15893,7 +15854,7 @@
                 <a:ea typeface="Calibri" pitchFamily="34" charset="-122"/>
                 <a:cs typeface="Calibri" pitchFamily="34" charset="-120"/>
               </a:rPr>
-              <a:t>Fuente: Data_NCR17082026.xlsx — hoja «Observaciones» · Corte 17-08-2026 · 498 registros desde 10-02-2023</a:t>
+              <a:t>Fuente: Data_NCR24082026.xlsx — hoja «Observaciones» · Corte 24-08-2026 · 501 registros desde 10-02-2023</a:t>
             </a:r>
             <a:endParaRPr lang="en-US" sz="850" dirty="0"/>
           </a:p>
@@ -16198,7 +16159,7 @@
                 <a:ea typeface="Calibri" pitchFamily="34" charset="-122"/>
                 <a:cs typeface="Calibri" pitchFamily="34" charset="-120"/>
               </a:rPr>
-              <a:t>127 cerrados</a:t>
+              <a:t>128 cerrados</a:t>
             </a:r>
             <a:endParaRPr lang="en-US" sz="1400" dirty="0"/>
           </a:p>
@@ -16369,7 +16330,7 @@
                 <a:ea typeface="Cambria" pitchFamily="34" charset="-122"/>
                 <a:cs typeface="Cambria" pitchFamily="34" charset="-120"/>
               </a:rPr>
-              <a:t>77,4%</a:t>
+              <a:t>78%</a:t>
             </a:r>
             <a:endParaRPr lang="en-US" sz="4000" dirty="0"/>
           </a:p>
@@ -16408,7 +16369,7 @@
                 <a:ea typeface="Calibri" pitchFamily="34" charset="-122"/>
                 <a:cs typeface="Calibri" pitchFamily="34" charset="-120"/>
               </a:rPr>
-              <a:t>127/164</a:t>
+              <a:t>128/164</a:t>
             </a:r>
             <a:endParaRPr lang="en-US" sz="1400" dirty="0"/>
           </a:p>
@@ -16486,7 +16447,7 @@
                 <a:ea typeface="Calibri" pitchFamily="34" charset="-122"/>
                 <a:cs typeface="Calibri" pitchFamily="34" charset="-120"/>
               </a:rPr>
-              <a:t>Global del módulo: 89,6%</a:t>
+              <a:t>Global del módulo: 90,8%</a:t>
             </a:r>
             <a:endParaRPr lang="en-US" sz="950" dirty="0"/>
           </a:p>
@@ -16579,7 +16540,7 @@
                 <a:ea typeface="Cambria" pitchFamily="34" charset="-122"/>
                 <a:cs typeface="Cambria" pitchFamily="34" charset="-120"/>
               </a:rPr>
-              <a:t>37</a:t>
+              <a:t>36</a:t>
             </a:r>
             <a:endParaRPr lang="en-US" sz="4000" dirty="0"/>
           </a:p>
@@ -16696,7 +16657,7 @@
                 <a:ea typeface="Calibri" pitchFamily="34" charset="-122"/>
                 <a:cs typeface="Calibri" pitchFamily="34" charset="-120"/>
               </a:rPr>
-              <a:t>1 iniciado · 25 listo para revisión · 10 stand by · 1 observada</a:t>
+              <a:t>1 iniciado · 25 listo para revisión · 10 stand by</a:t>
             </a:r>
             <a:endParaRPr lang="en-US" sz="950" dirty="0"/>
           </a:p>
@@ -16789,7 +16750,7 @@
                 <a:ea typeface="Cambria" pitchFamily="34" charset="-122"/>
                 <a:cs typeface="Cambria" pitchFamily="34" charset="-120"/>
               </a:rPr>
-              <a:t>129</a:t>
+              <a:t>131</a:t>
             </a:r>
             <a:endParaRPr lang="en-US" sz="4000" dirty="0"/>
           </a:p>
@@ -16906,7 +16867,7 @@
                 <a:ea typeface="Calibri" pitchFamily="34" charset="-122"/>
                 <a:cs typeface="Calibri" pitchFamily="34" charset="-120"/>
               </a:rPr>
-              <a:t>el más lento tomó 313 días</a:t>
+              <a:t>el más lento tomó 409 días</a:t>
             </a:r>
             <a:endParaRPr lang="en-US" sz="950" dirty="0"/>
           </a:p>
@@ -17084,7 +17045,7 @@
                 <a:ea typeface="Calibri" pitchFamily="34" charset="-122"/>
                 <a:cs typeface="Calibri" pitchFamily="34" charset="-120"/>
               </a:rPr>
-              <a:t>global del módulo 32,5%</a:t>
+              <a:t>global del módulo 32,3%</a:t>
             </a:r>
             <a:endParaRPr lang="en-US" sz="1000" dirty="0"/>
           </a:p>
@@ -17342,7 +17303,7 @@
                 <a:ea typeface="Calibri" pitchFamily="34" charset="-122"/>
                 <a:cs typeface="Calibri" pitchFamily="34" charset="-120"/>
               </a:rPr>
-              <a:t>36 ab.</a:t>
+              <a:t>35 ab.</a:t>
             </a:r>
             <a:endParaRPr lang="en-US" sz="950" dirty="0"/>
           </a:p>
@@ -17557,7 +17518,7 @@
                 <a:ea typeface="Calibri" pitchFamily="34" charset="-122"/>
                 <a:cs typeface="Calibri" pitchFamily="34" charset="-120"/>
               </a:rPr>
-              <a:t>Fuente: Data_NCR17082026.xlsx — hoja «Observaciones» · Corte 17-08-2026 · 498 registros desde 10-02-2023</a:t>
+              <a:t>Fuente: Data_NCR24082026.xlsx — hoja «Observaciones» · Corte 24-08-2026 · 501 registros desde 10-02-2023</a:t>
             </a:r>
             <a:endParaRPr lang="en-US" sz="850" dirty="0"/>
           </a:p>
@@ -17808,7 +17769,7 @@
                 <a:ea typeface="Calibri" pitchFamily="34" charset="-122"/>
                 <a:cs typeface="Calibri" pitchFamily="34" charset="-120"/>
               </a:rPr>
-              <a:t>37 hallazgos siguen abiertos; 16 con más de 180 días. Se listan del más antiguo al más reciente.</a:t>
+              <a:t>36 hallazgos siguen abiertos; 17 con más de 180 días. Se listan del más antiguo al más reciente.</a:t>
             </a:r>
             <a:endParaRPr lang="en-US" sz="1350" dirty="0"/>
           </a:p>
@@ -18416,7 +18377,7 @@
                 <a:ea typeface="Calibri" pitchFamily="34" charset="-122"/>
                 <a:cs typeface="Calibri" pitchFamily="34" charset="-120"/>
               </a:rPr>
-              <a:t>409</a:t>
+              <a:t>416</a:t>
             </a:r>
             <a:endParaRPr lang="en-US" sz="1050" dirty="0"/>
           </a:p>
@@ -18537,7 +18498,7 @@
                 <a:ea typeface="Calibri" pitchFamily="34" charset="-122"/>
                 <a:cs typeface="Calibri" pitchFamily="34" charset="-120"/>
               </a:rPr>
-              <a:t>MASA-2</a:t>
+              <a:t>MASA-6</a:t>
             </a:r>
             <a:endParaRPr lang="en-US" sz="1050" dirty="0"/>
           </a:p>
@@ -18576,7 +18537,7 @@
                 <a:ea typeface="Calibri" pitchFamily="34" charset="-122"/>
                 <a:cs typeface="Calibri" pitchFamily="34" charset="-120"/>
               </a:rPr>
-              <a:t>No Conformidad</a:t>
+              <a:t>Observación</a:t>
             </a:r>
             <a:endParaRPr lang="en-US" sz="1050" dirty="0"/>
           </a:p>
@@ -18771,7 +18732,7 @@
                 <a:ea typeface="Calibri" pitchFamily="34" charset="-122"/>
                 <a:cs typeface="Calibri" pitchFamily="34" charset="-120"/>
               </a:rPr>
-              <a:t>406</a:t>
+              <a:t>382</a:t>
             </a:r>
             <a:endParaRPr lang="en-US" sz="1050" dirty="0"/>
           </a:p>
@@ -18810,7 +18771,7 @@
                 <a:ea typeface="Calibri" pitchFamily="34" charset="-122"/>
                 <a:cs typeface="Calibri" pitchFamily="34" charset="-120"/>
               </a:rPr>
-              <a:t>Uniones soldadas y touch-up en tolv…</a:t>
+              <a:t>Condición del grout de nivelación e…</a:t>
             </a:r>
             <a:endParaRPr lang="en-US" sz="1000" dirty="0"/>
           </a:p>
@@ -18872,7 +18833,7 @@
                 <a:ea typeface="Calibri" pitchFamily="34" charset="-122"/>
                 <a:cs typeface="Calibri" pitchFamily="34" charset="-120"/>
               </a:rPr>
-              <a:t>MASA-6</a:t>
+              <a:t>MASA-8</a:t>
             </a:r>
             <a:endParaRPr lang="en-US" sz="1050" dirty="0"/>
           </a:p>
@@ -19106,7 +19067,7 @@
                 <a:ea typeface="Calibri" pitchFamily="34" charset="-122"/>
                 <a:cs typeface="Calibri" pitchFamily="34" charset="-120"/>
               </a:rPr>
-              <a:t>375</a:t>
+              <a:t>370</a:t>
             </a:r>
             <a:endParaRPr lang="en-US" sz="1050" dirty="0"/>
           </a:p>
@@ -19145,7 +19106,7 @@
                 <a:ea typeface="Calibri" pitchFamily="34" charset="-122"/>
                 <a:cs typeface="Calibri" pitchFamily="34" charset="-120"/>
               </a:rPr>
-              <a:t>Condición del grout de nivelación e…</a:t>
+              <a:t>Montaje de estructura metálica sin …</a:t>
             </a:r>
             <a:endParaRPr lang="en-US" sz="1000" dirty="0"/>
           </a:p>
@@ -19227,7 +19188,7 @@
                 <a:ea typeface="Calibri" pitchFamily="34" charset="-122"/>
                 <a:cs typeface="Calibri" pitchFamily="34" charset="-120"/>
               </a:rPr>
-              <a:t>MASA-8</a:t>
+              <a:t>MASA-10</a:t>
             </a:r>
             <a:endParaRPr lang="en-US" sz="1050" dirty="0"/>
           </a:p>
@@ -19461,7 +19422,7 @@
                 <a:ea typeface="Calibri" pitchFamily="34" charset="-122"/>
                 <a:cs typeface="Calibri" pitchFamily="34" charset="-120"/>
               </a:rPr>
-              <a:t>363</a:t>
+              <a:t>342</a:t>
             </a:r>
             <a:endParaRPr lang="en-US" sz="1050" dirty="0"/>
           </a:p>
@@ -19500,7 +19461,7 @@
                 <a:ea typeface="Calibri" pitchFamily="34" charset="-122"/>
                 <a:cs typeface="Calibri" pitchFamily="34" charset="-120"/>
               </a:rPr>
-              <a:t>Montaje de estructura metálica sin …</a:t>
+              <a:t>Vigas (puntales) Montadas Fuera de …</a:t>
             </a:r>
             <a:endParaRPr lang="en-US" sz="1000" dirty="0"/>
           </a:p>
@@ -19562,7 +19523,7 @@
                 <a:ea typeface="Calibri" pitchFamily="34" charset="-122"/>
                 <a:cs typeface="Calibri" pitchFamily="34" charset="-120"/>
               </a:rPr>
-              <a:t>MASA-10</a:t>
+              <a:t>MASA-21</a:t>
             </a:r>
             <a:endParaRPr lang="en-US" sz="1050" dirty="0"/>
           </a:p>
@@ -19601,7 +19562,7 @@
                 <a:ea typeface="Calibri" pitchFamily="34" charset="-122"/>
                 <a:cs typeface="Calibri" pitchFamily="34" charset="-120"/>
               </a:rPr>
-              <a:t>Observación</a:t>
+              <a:t>No Conformidad</a:t>
             </a:r>
             <a:endParaRPr lang="en-US" sz="1050" dirty="0"/>
           </a:p>
@@ -19796,7 +19757,7 @@
                 <a:ea typeface="Calibri" pitchFamily="34" charset="-122"/>
                 <a:cs typeface="Calibri" pitchFamily="34" charset="-120"/>
               </a:rPr>
-              <a:t>335</a:t>
+              <a:t>312</a:t>
             </a:r>
             <a:endParaRPr lang="en-US" sz="1050" dirty="0"/>
           </a:p>
@@ -19835,7 +19796,7 @@
                 <a:ea typeface="Calibri" pitchFamily="34" charset="-122"/>
                 <a:cs typeface="Calibri" pitchFamily="34" charset="-120"/>
               </a:rPr>
-              <a:t>Vigas (puntales) Montadas Fuera de …</a:t>
+              <a:t>Informe Técnico de Inspección – Fis…</a:t>
             </a:r>
             <a:endParaRPr lang="en-US" sz="1000" dirty="0"/>
           </a:p>
@@ -19917,7 +19878,7 @@
                 <a:ea typeface="Calibri" pitchFamily="34" charset="-122"/>
                 <a:cs typeface="Calibri" pitchFamily="34" charset="-120"/>
               </a:rPr>
-              <a:t>MASA-21</a:t>
+              <a:t>MASA-24</a:t>
             </a:r>
             <a:endParaRPr lang="en-US" sz="1050" dirty="0"/>
           </a:p>
@@ -20112,7 +20073,7 @@
                 <a:ea typeface="Calibri" pitchFamily="34" charset="-122"/>
                 <a:cs typeface="Calibri" pitchFamily="34" charset="-120"/>
               </a:rPr>
-              <a:t>Listo para revisi…</a:t>
+              <a:t>Stand By</a:t>
             </a:r>
             <a:endParaRPr lang="en-US" sz="1050" dirty="0"/>
           </a:p>
@@ -20151,7 +20112,7 @@
                 <a:ea typeface="Calibri" pitchFamily="34" charset="-122"/>
                 <a:cs typeface="Calibri" pitchFamily="34" charset="-120"/>
               </a:rPr>
-              <a:t>305</a:t>
+              <a:t>312</a:t>
             </a:r>
             <a:endParaRPr lang="en-US" sz="1050" dirty="0"/>
           </a:p>
@@ -20190,7 +20151,7 @@
                 <a:ea typeface="Calibri" pitchFamily="34" charset="-122"/>
                 <a:cs typeface="Calibri" pitchFamily="34" charset="-120"/>
               </a:rPr>
-              <a:t>Informe Técnico de Inspección – Fis…</a:t>
+              <a:t>Inspección grout de los recesos de …</a:t>
             </a:r>
             <a:endParaRPr lang="en-US" sz="1000" dirty="0"/>
           </a:p>
@@ -20252,7 +20213,7 @@
                 <a:ea typeface="Calibri" pitchFamily="34" charset="-122"/>
                 <a:cs typeface="Calibri" pitchFamily="34" charset="-120"/>
               </a:rPr>
-              <a:t>MASA-24</a:t>
+              <a:t>MASA-28</a:t>
             </a:r>
             <a:endParaRPr lang="en-US" sz="1050" dirty="0"/>
           </a:p>
@@ -20291,7 +20252,7 @@
                 <a:ea typeface="Calibri" pitchFamily="34" charset="-122"/>
                 <a:cs typeface="Calibri" pitchFamily="34" charset="-120"/>
               </a:rPr>
-              <a:t>No Conformidad</a:t>
+              <a:t>Observación</a:t>
             </a:r>
             <a:endParaRPr lang="en-US" sz="1050" dirty="0"/>
           </a:p>
@@ -20447,7 +20408,7 @@
                 <a:ea typeface="Calibri" pitchFamily="34" charset="-122"/>
                 <a:cs typeface="Calibri" pitchFamily="34" charset="-120"/>
               </a:rPr>
-              <a:t>Stand By</a:t>
+              <a:t>Listo para revisi…</a:t>
             </a:r>
             <a:endParaRPr lang="en-US" sz="1050" dirty="0"/>
           </a:p>
@@ -20486,7 +20447,7 @@
                 <a:ea typeface="Calibri" pitchFamily="34" charset="-122"/>
                 <a:cs typeface="Calibri" pitchFamily="34" charset="-120"/>
               </a:rPr>
-              <a:t>305</a:t>
+              <a:t>291</a:t>
             </a:r>
             <a:endParaRPr lang="en-US" sz="1050" dirty="0"/>
           </a:p>
@@ -20525,7 +20486,7 @@
                 <a:ea typeface="Calibri" pitchFamily="34" charset="-122"/>
                 <a:cs typeface="Calibri" pitchFamily="34" charset="-120"/>
               </a:rPr>
-              <a:t>Inspección grout de los recesos de …</a:t>
+              <a:t>Cámara 3700-MH-002, salida sala elé…</a:t>
             </a:r>
             <a:endParaRPr lang="en-US" sz="1000" dirty="0"/>
           </a:p>
@@ -20607,7 +20568,7 @@
                 <a:ea typeface="Calibri" pitchFamily="34" charset="-122"/>
                 <a:cs typeface="Calibri" pitchFamily="34" charset="-120"/>
               </a:rPr>
-              <a:t>MASA-28</a:t>
+              <a:t>MASA-30</a:t>
             </a:r>
             <a:endParaRPr lang="en-US" sz="1050" dirty="0"/>
           </a:p>
@@ -20841,7 +20802,7 @@
                 <a:ea typeface="Calibri" pitchFamily="34" charset="-122"/>
                 <a:cs typeface="Calibri" pitchFamily="34" charset="-120"/>
               </a:rPr>
-              <a:t>284</a:t>
+              <a:t>287</a:t>
             </a:r>
             <a:endParaRPr lang="en-US" sz="1050" dirty="0"/>
           </a:p>
@@ -20880,7 +20841,7 @@
                 <a:ea typeface="Calibri" pitchFamily="34" charset="-122"/>
                 <a:cs typeface="Calibri" pitchFamily="34" charset="-120"/>
               </a:rPr>
-              <a:t>Cámara 3700-MH-002, salida sala elé…</a:t>
+              <a:t>Fundaciones faltantes para apoyo de…</a:t>
             </a:r>
             <a:endParaRPr lang="en-US" sz="1000" dirty="0"/>
           </a:p>
@@ -20942,7 +20903,7 @@
                 <a:ea typeface="Calibri" pitchFamily="34" charset="-122"/>
                 <a:cs typeface="Calibri" pitchFamily="34" charset="-120"/>
               </a:rPr>
-              <a:t>MASA-30</a:t>
+              <a:t>MASA-37</a:t>
             </a:r>
             <a:endParaRPr lang="en-US" sz="1050" dirty="0"/>
           </a:p>
@@ -20981,7 +20942,7 @@
                 <a:ea typeface="Calibri" pitchFamily="34" charset="-122"/>
                 <a:cs typeface="Calibri" pitchFamily="34" charset="-120"/>
               </a:rPr>
-              <a:t>Observación</a:t>
+              <a:t>No Conformidad</a:t>
             </a:r>
             <a:endParaRPr lang="en-US" sz="1050" dirty="0"/>
           </a:p>
@@ -21176,7 +21137,7 @@
                 <a:ea typeface="Calibri" pitchFamily="34" charset="-122"/>
                 <a:cs typeface="Calibri" pitchFamily="34" charset="-120"/>
               </a:rPr>
-              <a:t>280</a:t>
+              <a:t>250</a:t>
             </a:r>
             <a:endParaRPr lang="en-US" sz="1050" dirty="0"/>
           </a:p>
@@ -21215,7 +21176,7 @@
                 <a:ea typeface="Calibri" pitchFamily="34" charset="-122"/>
                 <a:cs typeface="Calibri" pitchFamily="34" charset="-120"/>
               </a:rPr>
-              <a:t>Fundaciones faltantes para apoyo de…</a:t>
+              <a:t>Tolerancia transversal en chutes de…</a:t>
             </a:r>
             <a:endParaRPr lang="en-US" sz="1000" dirty="0"/>
           </a:p>
@@ -21277,7 +21238,7 @@
                 <a:ea typeface="Calibri" pitchFamily="34" charset="-122"/>
                 <a:cs typeface="Calibri" pitchFamily="34" charset="-120"/>
               </a:rPr>
-              <a:t>Se listan los 9 más antiguos de 37 abiertos; el detalle completo está en el panel.</a:t>
+              <a:t>Se listan los 9 más antiguos de 36 abiertos; el detalle completo está en el panel.</a:t>
             </a:r>
             <a:endParaRPr lang="en-US" sz="950" dirty="0"/>
           </a:p>
@@ -21338,7 +21299,7 @@
                 <a:ea typeface="Calibri" pitchFamily="34" charset="-122"/>
                 <a:cs typeface="Calibri" pitchFamily="34" charset="-120"/>
               </a:rPr>
-              <a:t>SEMANA 10-08-2026 — 16-08-2026</a:t>
+              <a:t>SEMANA 17-08-2026 — 23-08-2026</a:t>
             </a:r>
             <a:endParaRPr lang="en-US" sz="1000" dirty="0"/>
           </a:p>
@@ -21416,7 +21377,7 @@
                 <a:ea typeface="Calibri" pitchFamily="34" charset="-122"/>
                 <a:cs typeface="Calibri" pitchFamily="34" charset="-120"/>
               </a:rPr>
-              <a:t>Fuente: Data_NCR17082026.xlsx — hoja «Observaciones» · Corte 17-08-2026 · 498 registros desde 10-02-2023</a:t>
+              <a:t>Fuente: Data_NCR24082026.xlsx — hoja «Observaciones» · Corte 24-08-2026 · 501 registros desde 10-02-2023</a:t>
             </a:r>
             <a:endParaRPr lang="en-US" sz="850" dirty="0"/>
           </a:p>
@@ -21721,7 +21682,7 @@
                 <a:ea typeface="Cambria" pitchFamily="34" charset="-122"/>
                 <a:cs typeface="Cambria" pitchFamily="34" charset="-120"/>
               </a:rPr>
-              <a:t>89,6%</a:t>
+              <a:t>90,8%</a:t>
             </a:r>
             <a:endParaRPr lang="en-US" sz="4000" dirty="0"/>
           </a:p>
@@ -21760,7 +21721,7 @@
                 <a:ea typeface="Calibri" pitchFamily="34" charset="-122"/>
                 <a:cs typeface="Calibri" pitchFamily="34" charset="-120"/>
               </a:rPr>
-              <a:t>446/498</a:t>
+              <a:t>455/501</a:t>
             </a:r>
             <a:endParaRPr lang="en-US" sz="1400" dirty="0"/>
           </a:p>
@@ -21838,7 +21799,7 @@
                 <a:ea typeface="Calibri" pitchFamily="34" charset="-122"/>
                 <a:cs typeface="Calibri" pitchFamily="34" charset="-120"/>
               </a:rPr>
-              <a:t>52 abiertos · 19 con más de 180 días</a:t>
+              <a:t>46 abiertos · 17 con más de 180 días</a:t>
             </a:r>
             <a:endParaRPr lang="en-US" sz="950" dirty="0"/>
           </a:p>
@@ -21931,7 +21892,7 @@
                 <a:ea typeface="Cambria" pitchFamily="34" charset="-122"/>
                 <a:cs typeface="Cambria" pitchFamily="34" charset="-120"/>
               </a:rPr>
-              <a:t>52</a:t>
+              <a:t>46</a:t>
             </a:r>
             <a:endParaRPr lang="en-US" sz="4000" dirty="0"/>
           </a:p>
@@ -21970,7 +21931,7 @@
                 <a:ea typeface="Calibri" pitchFamily="34" charset="-122"/>
                 <a:cs typeface="Calibri" pitchFamily="34" charset="-120"/>
               </a:rPr>
-              <a:t>de 498 levantados</a:t>
+              <a:t>de 501 levantados</a:t>
             </a:r>
             <a:endParaRPr lang="en-US" sz="1400" dirty="0"/>
           </a:p>
@@ -22048,7 +22009,7 @@
                 <a:ea typeface="Calibri" pitchFamily="34" charset="-122"/>
                 <a:cs typeface="Calibri" pitchFamily="34" charset="-120"/>
               </a:rPr>
-              <a:t>14 iniciado · 1 no aceptado · 26 listo para revisión · 10 stand by · 1 observada</a:t>
+              <a:t>6 iniciado · 1 no aceptado · 29 listo para revisión · 10 stand by</a:t>
             </a:r>
             <a:endParaRPr lang="en-US" sz="950" dirty="0"/>
           </a:p>
@@ -22141,7 +22102,7 @@
                 <a:ea typeface="Cambria" pitchFamily="34" charset="-122"/>
                 <a:cs typeface="Cambria" pitchFamily="34" charset="-120"/>
               </a:rPr>
-              <a:t>32,5%</a:t>
+              <a:t>32,3%</a:t>
             </a:r>
             <a:endParaRPr lang="en-US" sz="4000" dirty="0"/>
           </a:p>
@@ -22180,7 +22141,7 @@
                 <a:ea typeface="Calibri" pitchFamily="34" charset="-122"/>
                 <a:cs typeface="Calibri" pitchFamily="34" charset="-120"/>
               </a:rPr>
-              <a:t>159/489 clasificados</a:t>
+              <a:t>159/492 clasificados</a:t>
             </a:r>
             <a:endParaRPr lang="en-US" sz="1400" dirty="0"/>
           </a:p>
@@ -22390,7 +22351,7 @@
                 <a:ea typeface="Calibri" pitchFamily="34" charset="-122"/>
                 <a:cs typeface="Calibri" pitchFamily="34" charset="-120"/>
               </a:rPr>
-              <a:t>251 de 498 con costo</a:t>
+              <a:t>251 de 501 con costo</a:t>
             </a:r>
             <a:endParaRPr lang="en-US" sz="1400" dirty="0"/>
           </a:p>
@@ -22468,7 +22429,7 @@
                 <a:ea typeface="Calibri" pitchFamily="34" charset="-122"/>
                 <a:cs typeface="Calibri" pitchFamily="34" charset="-120"/>
               </a:rPr>
-              <a:t>247 hallazgos no declaran costo: la cifra es un piso</a:t>
+              <a:t>250 hallazgos no declaran costo: la cifra es un piso</a:t>
             </a:r>
             <a:endParaRPr lang="en-US" sz="950" dirty="0"/>
           </a:p>
@@ -22608,7 +22569,7 @@
                 <a:ea typeface="Calibri" pitchFamily="34" charset="-122"/>
                 <a:cs typeface="Calibri" pitchFamily="34" charset="-120"/>
               </a:rPr>
-              <a:t>37 de los 52 hallazgos abiertos (71,2%), y es uno de los frentes donde el cliente levanta más de lo que detecta Besalco (71 del cliente contra 53 internas).</a:t>
+              <a:t>36 de los 46 hallazgos abiertos (78,3%), y es uno de los frentes donde el cliente levanta más de lo que detecta Besalco (71 del cliente contra 53 internas).</a:t>
             </a:r>
             <a:endParaRPr lang="en-US" sz="1250" dirty="0"/>
           </a:p>
@@ -22687,7 +22648,7 @@
                 <a:ea typeface="Calibri" pitchFamily="34" charset="-122"/>
                 <a:cs typeface="Calibri" pitchFamily="34" charset="-120"/>
               </a:rPr>
-              <a:t>10-08-2026 al 16-08-2026: 3 del cliente en OO.CC (3). 2 siguen abiertos; la semana anterior entraron 1.</a:t>
+              <a:t>17-08-2026 al 23-08-2026: 3 del cliente en OO.CC (2) y PIPING (1). 2 siguen abiertos; la semana anterior entraron 3.</a:t>
             </a:r>
             <a:endParaRPr lang="en-US" sz="1250" dirty="0"/>
           </a:p>
@@ -22749,7 +22710,7 @@
                 <a:ea typeface="Calibri" pitchFamily="34" charset="-122"/>
                 <a:cs typeface="Calibri" pitchFamily="34" charset="-120"/>
               </a:rPr>
-              <a:t>50 de los 52 abiertos están fuera del plazo de respuesta.  </a:t>
+              <a:t>44 de los 46 abiertos están fuera del plazo de respuesta.  </a:t>
             </a:r>
             <a:pPr indent="0" marL="0">
               <a:lnSpc>
@@ -22766,7 +22727,7 @@
                 <a:ea typeface="Calibri" pitchFamily="34" charset="-122"/>
                 <a:cs typeface="Calibri" pitchFamily="34" charset="-120"/>
               </a:rPr>
-              <a:t>El plazo es de 10 días desde que se emite la NC. De los atrasados, 19 llevan más de 180 días abiertos y 4 más de un año: no es atraso de días, es deuda vieja.</a:t>
+              <a:t>El plazo es de 10 días desde que se emite la NC. De los atrasados, 17 llevan más de 180 días abiertos y 3 más de un año: no es atraso de días, es deuda vieja.</a:t>
             </a:r>
             <a:endParaRPr lang="en-US" sz="1250" dirty="0"/>
           </a:p>
@@ -22805,7 +22766,7 @@
                 <a:ea typeface="Calibri" pitchFamily="34" charset="-122"/>
                 <a:cs typeface="Calibri" pitchFamily="34" charset="-120"/>
               </a:rPr>
-              <a:t>Fuente: Data_NCR17082026.xlsx — hoja «Observaciones» · Corte 17-08-2026 · 498 registros desde 10-02-2023</a:t>
+              <a:t>Fuente: Data_NCR24082026.xlsx — hoja «Observaciones» · Corte 24-08-2026 · 501 registros desde 10-02-2023</a:t>
             </a:r>
             <a:endParaRPr lang="en-US" sz="850" dirty="0"/>
           </a:p>
@@ -24080,7 +24041,7 @@
                 <a:ea typeface="Calibri" pitchFamily="34" charset="-122"/>
                 <a:cs typeface="Calibri" pitchFamily="34" charset="-120"/>
               </a:rPr>
-              <a:t>244</a:t>
+              <a:t>247</a:t>
             </a:r>
             <a:endParaRPr lang="en-US" sz="1300" dirty="0"/>
           </a:p>
@@ -24119,7 +24080,7 @@
                 <a:ea typeface="Calibri" pitchFamily="34" charset="-122"/>
                 <a:cs typeface="Calibri" pitchFamily="34" charset="-120"/>
               </a:rPr>
-              <a:t>230</a:t>
+              <a:t>238</a:t>
             </a:r>
             <a:endParaRPr lang="en-US" sz="1300" dirty="0"/>
           </a:p>
@@ -24158,7 +24119,7 @@
                 <a:ea typeface="Calibri" pitchFamily="34" charset="-122"/>
                 <a:cs typeface="Calibri" pitchFamily="34" charset="-120"/>
               </a:rPr>
-              <a:t>14</a:t>
+              <a:t>9</a:t>
             </a:r>
             <a:endParaRPr lang="en-US" sz="1300" dirty="0"/>
           </a:p>
@@ -24197,7 +24158,7 @@
                 <a:ea typeface="Calibri" pitchFamily="34" charset="-122"/>
                 <a:cs typeface="Calibri" pitchFamily="34" charset="-120"/>
               </a:rPr>
-              <a:t>94,3%</a:t>
+              <a:t>96,4%</a:t>
             </a:r>
             <a:endParaRPr lang="en-US" sz="1300" dirty="0"/>
           </a:p>
@@ -24275,7 +24236,7 @@
                 <a:ea typeface="Calibri" pitchFamily="34" charset="-122"/>
                 <a:cs typeface="Calibri" pitchFamily="34" charset="-120"/>
               </a:rPr>
-              <a:t>192</a:t>
+              <a:t>195</a:t>
             </a:r>
             <a:endParaRPr lang="en-US" sz="1300" dirty="0"/>
           </a:p>
@@ -24593,7 +24554,7 @@
                 <a:ea typeface="Calibri" pitchFamily="34" charset="-122"/>
                 <a:cs typeface="Calibri" pitchFamily="34" charset="-120"/>
               </a:rPr>
-              <a:t>127</a:t>
+              <a:t>128</a:t>
             </a:r>
             <a:endParaRPr lang="en-US" sz="1300" dirty="0"/>
           </a:p>
@@ -24632,7 +24593,7 @@
                 <a:ea typeface="Calibri" pitchFamily="34" charset="-122"/>
                 <a:cs typeface="Calibri" pitchFamily="34" charset="-120"/>
               </a:rPr>
-              <a:t>37</a:t>
+              <a:t>36</a:t>
             </a:r>
             <a:endParaRPr lang="en-US" sz="1300" dirty="0"/>
           </a:p>
@@ -24671,7 +24632,7 @@
                 <a:ea typeface="Calibri" pitchFamily="34" charset="-122"/>
                 <a:cs typeface="Calibri" pitchFamily="34" charset="-120"/>
               </a:rPr>
-              <a:t>77,4%</a:t>
+              <a:t>78%</a:t>
             </a:r>
             <a:endParaRPr lang="en-US" sz="1300" dirty="0"/>
           </a:p>
@@ -25522,7 +25483,7 @@
                 <a:ea typeface="Calibri" pitchFamily="34" charset="-122"/>
                 <a:cs typeface="Calibri" pitchFamily="34" charset="-120"/>
               </a:rPr>
-              <a:t>490</a:t>
+              <a:t>493</a:t>
             </a:r>
             <a:endParaRPr lang="en-US" sz="1300" dirty="0"/>
           </a:p>
@@ -25561,7 +25522,7 @@
                 <a:ea typeface="Calibri" pitchFamily="34" charset="-122"/>
                 <a:cs typeface="Calibri" pitchFamily="34" charset="-120"/>
               </a:rPr>
-              <a:t>438</a:t>
+              <a:t>447</a:t>
             </a:r>
             <a:endParaRPr lang="en-US" sz="1300" dirty="0"/>
           </a:p>
@@ -25600,7 +25561,7 @@
                 <a:ea typeface="Calibri" pitchFamily="34" charset="-122"/>
                 <a:cs typeface="Calibri" pitchFamily="34" charset="-120"/>
               </a:rPr>
-              <a:t>52</a:t>
+              <a:t>46</a:t>
             </a:r>
             <a:endParaRPr lang="en-US" sz="1300" dirty="0"/>
           </a:p>
@@ -25639,7 +25600,7 @@
                 <a:ea typeface="Calibri" pitchFamily="34" charset="-122"/>
                 <a:cs typeface="Calibri" pitchFamily="34" charset="-120"/>
               </a:rPr>
-              <a:t>89,4%</a:t>
+              <a:t>90,7%</a:t>
             </a:r>
             <a:endParaRPr lang="en-US" sz="1300" dirty="0"/>
           </a:p>
@@ -25717,7 +25678,7 @@
                 <a:ea typeface="Calibri" pitchFamily="34" charset="-122"/>
                 <a:cs typeface="Calibri" pitchFamily="34" charset="-120"/>
               </a:rPr>
-              <a:t>282</a:t>
+              <a:t>285</a:t>
             </a:r>
             <a:endParaRPr lang="en-US" sz="1300" dirty="0"/>
           </a:p>
@@ -25834,7 +25795,7 @@
                 <a:ea typeface="Calibri" pitchFamily="34" charset="-122"/>
                 <a:cs typeface="Calibri" pitchFamily="34" charset="-120"/>
               </a:rPr>
-              <a:t>Mediana de cierre global 30 días · el hallazgo más lento tomó 389 días · 79 hallazgos sin especialidad declarada.</a:t>
+              <a:t>Mediana de cierre global 30 días · el hallazgo más lento tomó 409 días · 79 hallazgos sin especialidad declarada.</a:t>
             </a:r>
             <a:endParaRPr lang="en-US" sz="950" dirty="0"/>
           </a:p>
@@ -25873,7 +25834,7 @@
                 <a:ea typeface="Calibri" pitchFamily="34" charset="-122"/>
                 <a:cs typeface="Calibri" pitchFamily="34" charset="-120"/>
               </a:rPr>
-              <a:t>Fuente: Data_NCR17082026.xlsx — hoja «Observaciones» · Corte 17-08-2026 · 498 registros desde 10-02-2023</a:t>
+              <a:t>Fuente: Data_NCR24082026.xlsx — hoja «Observaciones» · Corte 24-08-2026 · 501 registros desde 10-02-2023</a:t>
             </a:r>
             <a:endParaRPr lang="en-US" sz="850" dirty="0"/>
           </a:p>
@@ -26124,7 +26085,7 @@
                 <a:ea typeface="Calibri" pitchFamily="34" charset="-122"/>
                 <a:cs typeface="Calibri" pitchFamily="34" charset="-120"/>
               </a:rPr>
-              <a:t>Entre el 10-08-2026 y el 16-08-2026 se levantaron 3 hallazgos: 0 internas · 3 del cliente. 2 siguen abiertos.</a:t>
+              <a:t>Entre el 17-08-2026 y el 23-08-2026 se levantaron 3 hallazgos: 0 internas · 3 del cliente. 2 siguen abiertos.</a:t>
             </a:r>
             <a:endParaRPr lang="en-US" sz="1350" dirty="0"/>
           </a:p>
@@ -26279,7 +26240,7 @@
                 <a:ea typeface="Calibri" pitchFamily="34" charset="-122"/>
                 <a:cs typeface="Calibri" pitchFamily="34" charset="-120"/>
               </a:rPr>
-              <a:t>OO.CC 3</a:t>
+              <a:t>OO.CC 2  ·  PIPING 1</a:t>
             </a:r>
             <a:endParaRPr lang="en-US" sz="1100" dirty="0"/>
           </a:p>
@@ -26513,7 +26474,7 @@
                 <a:ea typeface="Calibri" pitchFamily="34" charset="-122"/>
                 <a:cs typeface="Calibri" pitchFamily="34" charset="-120"/>
               </a:rPr>
-              <a:t>No Conformidad 3</a:t>
+              <a:t>No Conformidad 2  ·  Producto No Conforme 1</a:t>
             </a:r>
             <a:endParaRPr lang="en-US" sz="1100" dirty="0"/>
           </a:p>
@@ -26965,7 +26926,7 @@
                 <a:ea typeface="Calibri" pitchFamily="34" charset="-122"/>
                 <a:cs typeface="Calibri" pitchFamily="34" charset="-120"/>
               </a:rPr>
-              <a:t>10-08-2026</a:t>
+              <a:t>18-08-2026</a:t>
             </a:r>
             <a:endParaRPr lang="en-US" sz="1050" dirty="0"/>
           </a:p>
@@ -27043,7 +27004,7 @@
                 <a:ea typeface="Calibri" pitchFamily="34" charset="-122"/>
                 <a:cs typeface="Calibri" pitchFamily="34" charset="-120"/>
               </a:rPr>
-              <a:t>243 · RNC N°453</a:t>
+              <a:t>246 · PNC N°189</a:t>
             </a:r>
             <a:endParaRPr lang="en-US" sz="1050" dirty="0"/>
           </a:p>
@@ -27082,7 +27043,7 @@
                 <a:ea typeface="Calibri" pitchFamily="34" charset="-122"/>
                 <a:cs typeface="Calibri" pitchFamily="34" charset="-120"/>
               </a:rPr>
-              <a:t>No Conformidad</a:t>
+              <a:t>Producto No Confor…</a:t>
             </a:r>
             <a:endParaRPr lang="en-US" sz="1050" dirty="0"/>
           </a:p>
@@ -27199,7 +27160,7 @@
                 <a:ea typeface="Calibri" pitchFamily="34" charset="-122"/>
                 <a:cs typeface="Calibri" pitchFamily="34" charset="-120"/>
               </a:rPr>
-              <a:t>Mauricio Rocha A.</a:t>
+              <a:t>Luis Ogalde H.</a:t>
             </a:r>
             <a:endParaRPr lang="en-US" sz="1050" dirty="0"/>
           </a:p>
@@ -27232,13 +27193,13 @@
             <a:r>
               <a:rPr lang="en-US" sz="1050" dirty="0">
                 <a:solidFill>
-                  <a:srgbClr val="C0392B"/>
-                </a:solidFill>
-                <a:latin typeface="Calibri" pitchFamily="34" charset="0"/>
-                <a:ea typeface="Calibri" pitchFamily="34" charset="-122"/>
-                <a:cs typeface="Calibri" pitchFamily="34" charset="-120"/>
-              </a:rPr>
-              <a:t>Iniciado</a:t>
+                  <a:srgbClr val="1F7A44"/>
+                </a:solidFill>
+                <a:latin typeface="Calibri" pitchFamily="34" charset="0"/>
+                <a:ea typeface="Calibri" pitchFamily="34" charset="-122"/>
+                <a:cs typeface="Calibri" pitchFamily="34" charset="-120"/>
+              </a:rPr>
+              <a:t>Cerrado</a:t>
             </a:r>
             <a:endParaRPr lang="en-US" sz="1050" dirty="0"/>
           </a:p>
@@ -27277,7 +27238,7 @@
                 <a:ea typeface="Calibri" pitchFamily="34" charset="-122"/>
                 <a:cs typeface="Calibri" pitchFamily="34" charset="-120"/>
               </a:rPr>
-              <a:t>Rollos de geomembrana KRAH …</a:t>
+              <a:t>Daño estructural en la pare…</a:t>
             </a:r>
             <a:endParaRPr lang="en-US" sz="1000" dirty="0"/>
           </a:p>
@@ -27359,7 +27320,7 @@
                 <a:ea typeface="Calibri" pitchFamily="34" charset="-122"/>
                 <a:cs typeface="Calibri" pitchFamily="34" charset="-120"/>
               </a:rPr>
-              <a:t>10-08-2026</a:t>
+              <a:t>19-08-2026</a:t>
             </a:r>
             <a:endParaRPr lang="en-US" sz="1050" dirty="0"/>
           </a:p>
@@ -27437,7 +27398,7 @@
                 <a:ea typeface="Calibri" pitchFamily="34" charset="-122"/>
                 <a:cs typeface="Calibri" pitchFamily="34" charset="-120"/>
               </a:rPr>
-              <a:t>244 · RNC N°454</a:t>
+              <a:t>247 · RNC N°458</a:t>
             </a:r>
             <a:endParaRPr lang="en-US" sz="1050" dirty="0"/>
           </a:p>
@@ -27593,7 +27554,7 @@
                 <a:ea typeface="Calibri" pitchFamily="34" charset="-122"/>
                 <a:cs typeface="Calibri" pitchFamily="34" charset="-120"/>
               </a:rPr>
-              <a:t>Mauricio Rocha A.</a:t>
+              <a:t>Luis Ogalde H.</a:t>
             </a:r>
             <a:endParaRPr lang="en-US" sz="1050" dirty="0"/>
           </a:p>
@@ -27671,7 +27632,7 @@
                 <a:ea typeface="Calibri" pitchFamily="34" charset="-122"/>
                 <a:cs typeface="Calibri" pitchFamily="34" charset="-120"/>
               </a:rPr>
-              <a:t>En Piscina Quebrada Sur, se…</a:t>
+              <a:t>Fundaciones FS-01 (10 eleme…</a:t>
             </a:r>
             <a:endParaRPr lang="en-US" sz="1000" dirty="0"/>
           </a:p>
@@ -27733,7 +27694,7 @@
                 <a:ea typeface="Calibri" pitchFamily="34" charset="-122"/>
                 <a:cs typeface="Calibri" pitchFamily="34" charset="-120"/>
               </a:rPr>
-              <a:t>11-08-2026</a:t>
+              <a:t>19-08-2026</a:t>
             </a:r>
             <a:endParaRPr lang="en-US" sz="1050" dirty="0"/>
           </a:p>
@@ -27811,7 +27772,7 @@
                 <a:ea typeface="Calibri" pitchFamily="34" charset="-122"/>
                 <a:cs typeface="Calibri" pitchFamily="34" charset="-120"/>
               </a:rPr>
-              <a:t>245 · RNC N°455</a:t>
+              <a:t>248 · RNC N°463</a:t>
             </a:r>
             <a:endParaRPr lang="en-US" sz="1050" dirty="0"/>
           </a:p>
@@ -27928,7 +27889,7 @@
                 <a:ea typeface="Calibri" pitchFamily="34" charset="-122"/>
                 <a:cs typeface="Calibri" pitchFamily="34" charset="-120"/>
               </a:rPr>
-              <a:t>OO.CC</a:t>
+              <a:t>PIPING</a:t>
             </a:r>
             <a:endParaRPr lang="en-US" sz="1050" dirty="0"/>
           </a:p>
@@ -27967,7 +27928,7 @@
                 <a:ea typeface="Calibri" pitchFamily="34" charset="-122"/>
                 <a:cs typeface="Calibri" pitchFamily="34" charset="-120"/>
               </a:rPr>
-              <a:t>Sebastián Ramos</a:t>
+              <a:t>Oscar Nahuel P.</a:t>
             </a:r>
             <a:endParaRPr lang="en-US" sz="1050" dirty="0"/>
           </a:p>
@@ -28000,13 +27961,13 @@
             <a:r>
               <a:rPr lang="en-US" sz="1050" dirty="0">
                 <a:solidFill>
-                  <a:srgbClr val="1F7A44"/>
-                </a:solidFill>
-                <a:latin typeface="Calibri" pitchFamily="34" charset="0"/>
-                <a:ea typeface="Calibri" pitchFamily="34" charset="-122"/>
-                <a:cs typeface="Calibri" pitchFamily="34" charset="-120"/>
-              </a:rPr>
-              <a:t>Cerrado</a:t>
+                  <a:srgbClr val="C0392B"/>
+                </a:solidFill>
+                <a:latin typeface="Calibri" pitchFamily="34" charset="0"/>
+                <a:ea typeface="Calibri" pitchFamily="34" charset="-122"/>
+                <a:cs typeface="Calibri" pitchFamily="34" charset="-120"/>
+              </a:rPr>
+              <a:t>Iniciado</a:t>
             </a:r>
             <a:endParaRPr lang="en-US" sz="1050" dirty="0"/>
           </a:p>
@@ -28045,7 +28006,7 @@
                 <a:ea typeface="Calibri" pitchFamily="34" charset="-122"/>
                 <a:cs typeface="Calibri" pitchFamily="34" charset="-120"/>
               </a:rPr>
-              <a:t>Se utilizó la Solicitud de …</a:t>
+              <a:t>Línea TAG N° 3716D-RW-24-H1…</a:t>
             </a:r>
             <a:endParaRPr lang="en-US" sz="1000" dirty="0"/>
           </a:p>
@@ -28107,7 +28068,7 @@
                 <a:ea typeface="Calibri" pitchFamily="34" charset="-122"/>
                 <a:cs typeface="Calibri" pitchFamily="34" charset="-120"/>
               </a:rPr>
-              <a:t>Fuente: Data_NCR17082026.xlsx — hoja «Observaciones» · Corte 17-08-2026 · 498 registros desde 10-02-2023</a:t>
+              <a:t>Fuente: Data_NCR24082026.xlsx — hoja «Observaciones» · Corte 24-08-2026 · 501 registros desde 10-02-2023</a:t>
             </a:r>
             <a:endParaRPr lang="en-US" sz="850" dirty="0"/>
           </a:p>
@@ -28358,7 +28319,7 @@
                 <a:ea typeface="Calibri" pitchFamily="34" charset="-122"/>
                 <a:cs typeface="Calibri" pitchFamily="34" charset="-120"/>
               </a:rPr>
-              <a:t>Interna es autodetección: la levanta Besalco antes que nadie. Externa la levanta el cliente —compromete el contrato— o un subcontrato. Autodetección global: 32,5%.</a:t>
+              <a:t>Interna es autodetección: la levanta Besalco antes que nadie. Externa la levanta el cliente —compromete el contrato— o un subcontrato. Autodetección global: 32,3%.</a:t>
             </a:r>
             <a:endParaRPr lang="en-US" sz="1350" dirty="0"/>
           </a:p>
@@ -28826,7 +28787,7 @@
                 <a:ea typeface="Calibri" pitchFamily="34" charset="-122"/>
                 <a:cs typeface="Calibri" pitchFamily="34" charset="-120"/>
               </a:rPr>
-              <a:t>154</a:t>
+              <a:t>157</a:t>
             </a:r>
             <a:endParaRPr lang="en-US" sz="1050" dirty="0"/>
           </a:p>
@@ -28865,7 +28826,7 @@
                 <a:ea typeface="Calibri" pitchFamily="34" charset="-122"/>
                 <a:cs typeface="Calibri" pitchFamily="34" charset="-120"/>
               </a:rPr>
-              <a:t>96,9%</a:t>
+              <a:t>98,7%</a:t>
             </a:r>
             <a:endParaRPr lang="en-US" sz="1050" dirty="0"/>
           </a:p>
@@ -28904,7 +28865,7 @@
                 <a:ea typeface="Calibri" pitchFamily="34" charset="-122"/>
                 <a:cs typeface="Calibri" pitchFamily="34" charset="-120"/>
               </a:rPr>
-              <a:t>5</a:t>
+              <a:t>2</a:t>
             </a:r>
             <a:endParaRPr lang="en-US" sz="1050" dirty="0"/>
           </a:p>
@@ -28943,7 +28904,7 @@
                 <a:ea typeface="Calibri" pitchFamily="34" charset="-122"/>
                 <a:cs typeface="Calibri" pitchFamily="34" charset="-120"/>
               </a:rPr>
-              <a:t>5</a:t>
+              <a:t>2</a:t>
             </a:r>
             <a:endParaRPr lang="en-US" sz="1050" dirty="0"/>
           </a:p>
@@ -28982,7 +28943,7 @@
                 <a:ea typeface="Calibri" pitchFamily="34" charset="-122"/>
                 <a:cs typeface="Calibri" pitchFamily="34" charset="-120"/>
               </a:rPr>
-              <a:t>64 días</a:t>
+              <a:t>69 días</a:t>
             </a:r>
             <a:endParaRPr lang="en-US" sz="1050" dirty="0"/>
           </a:p>
@@ -29103,7 +29064,7 @@
                 <a:ea typeface="Calibri" pitchFamily="34" charset="-122"/>
                 <a:cs typeface="Calibri" pitchFamily="34" charset="-120"/>
               </a:rPr>
-              <a:t>282</a:t>
+              <a:t>285</a:t>
             </a:r>
             <a:endParaRPr lang="en-US" sz="1050" dirty="0"/>
           </a:p>
@@ -29142,7 +29103,7 @@
                 <a:ea typeface="Calibri" pitchFamily="34" charset="-122"/>
                 <a:cs typeface="Calibri" pitchFamily="34" charset="-120"/>
               </a:rPr>
-              <a:t>235</a:t>
+              <a:t>241</a:t>
             </a:r>
             <a:endParaRPr lang="en-US" sz="1050" dirty="0"/>
           </a:p>
@@ -29181,7 +29142,7 @@
                 <a:ea typeface="Calibri" pitchFamily="34" charset="-122"/>
                 <a:cs typeface="Calibri" pitchFamily="34" charset="-120"/>
               </a:rPr>
-              <a:t>83,3%</a:t>
+              <a:t>84,6%</a:t>
             </a:r>
             <a:endParaRPr lang="en-US" sz="1050" dirty="0"/>
           </a:p>
@@ -29220,7 +29181,7 @@
                 <a:ea typeface="Calibri" pitchFamily="34" charset="-122"/>
                 <a:cs typeface="Calibri" pitchFamily="34" charset="-120"/>
               </a:rPr>
-              <a:t>47</a:t>
+              <a:t>44</a:t>
             </a:r>
             <a:endParaRPr lang="en-US" sz="1050" dirty="0"/>
           </a:p>
@@ -29259,7 +29220,7 @@
                 <a:ea typeface="Calibri" pitchFamily="34" charset="-122"/>
                 <a:cs typeface="Calibri" pitchFamily="34" charset="-120"/>
               </a:rPr>
-              <a:t>45</a:t>
+              <a:t>42</a:t>
             </a:r>
             <a:endParaRPr lang="en-US" sz="1050" dirty="0"/>
           </a:p>
@@ -29298,7 +29259,7 @@
                 <a:ea typeface="Calibri" pitchFamily="34" charset="-122"/>
                 <a:cs typeface="Calibri" pitchFamily="34" charset="-120"/>
               </a:rPr>
-              <a:t>49 días</a:t>
+              <a:t>51 días</a:t>
             </a:r>
             <a:endParaRPr lang="en-US" sz="1050" dirty="0"/>
           </a:p>
@@ -30011,7 +29972,7 @@
                 <a:ea typeface="Calibri" pitchFamily="34" charset="-122"/>
                 <a:cs typeface="Calibri" pitchFamily="34" charset="-120"/>
               </a:rPr>
-              <a:t>498</a:t>
+              <a:t>501</a:t>
             </a:r>
             <a:endParaRPr lang="en-US" sz="1050" dirty="0"/>
           </a:p>
@@ -30050,7 +30011,7 @@
                 <a:ea typeface="Calibri" pitchFamily="34" charset="-122"/>
                 <a:cs typeface="Calibri" pitchFamily="34" charset="-120"/>
               </a:rPr>
-              <a:t>446</a:t>
+              <a:t>455</a:t>
             </a:r>
             <a:endParaRPr lang="en-US" sz="1050" dirty="0"/>
           </a:p>
@@ -30089,7 +30050,7 @@
                 <a:ea typeface="Calibri" pitchFamily="34" charset="-122"/>
                 <a:cs typeface="Calibri" pitchFamily="34" charset="-120"/>
               </a:rPr>
-              <a:t>89,6%</a:t>
+              <a:t>90,8%</a:t>
             </a:r>
             <a:endParaRPr lang="en-US" sz="1050" dirty="0"/>
           </a:p>
@@ -30128,7 +30089,7 @@
                 <a:ea typeface="Calibri" pitchFamily="34" charset="-122"/>
                 <a:cs typeface="Calibri" pitchFamily="34" charset="-120"/>
               </a:rPr>
-              <a:t>52</a:t>
+              <a:t>46</a:t>
             </a:r>
             <a:endParaRPr lang="en-US" sz="1050" dirty="0"/>
           </a:p>
@@ -30167,7 +30128,7 @@
                 <a:ea typeface="Calibri" pitchFamily="34" charset="-122"/>
                 <a:cs typeface="Calibri" pitchFamily="34" charset="-120"/>
               </a:rPr>
-              <a:t>50</a:t>
+              <a:t>44</a:t>
             </a:r>
             <a:endParaRPr lang="en-US" sz="1050" dirty="0"/>
           </a:p>
@@ -30206,7 +30167,7 @@
                 <a:ea typeface="Calibri" pitchFamily="34" charset="-122"/>
                 <a:cs typeface="Calibri" pitchFamily="34" charset="-120"/>
               </a:rPr>
-              <a:t>69 días</a:t>
+              <a:t>71 días</a:t>
             </a:r>
             <a:endParaRPr lang="en-US" sz="1050" dirty="0"/>
           </a:p>
@@ -30423,7 +30384,7 @@
                 <a:ea typeface="Cambria" pitchFamily="34" charset="-122"/>
                 <a:cs typeface="Cambria" pitchFamily="34" charset="-120"/>
               </a:rPr>
-              <a:t>21,3%</a:t>
+              <a:t>21,1%</a:t>
             </a:r>
             <a:endParaRPr lang="en-US" sz="2400" dirty="0"/>
           </a:p>
@@ -30579,7 +30540,7 @@
                 <a:ea typeface="Calibri" pitchFamily="34" charset="-122"/>
                 <a:cs typeface="Calibri" pitchFamily="34" charset="-120"/>
               </a:rPr>
-              <a:t>Fuente: Data_NCR17082026.xlsx — hoja «Observaciones» · Corte 17-08-2026 · 498 registros desde 10-02-2023</a:t>
+              <a:t>Fuente: Data_NCR24082026.xlsx — hoja «Observaciones» · Corte 24-08-2026 · 501 registros desde 10-02-2023</a:t>
             </a:r>
             <a:endParaRPr lang="en-US" sz="850" dirty="0"/>
           </a:p>
@@ -30830,7 +30791,7 @@
                 <a:ea typeface="Calibri" pitchFamily="34" charset="-122"/>
                 <a:cs typeface="Calibri" pitchFamily="34" charset="-120"/>
               </a:rPr>
-              <a:t>De los 52 hallazgos abiertos, 19 llevan más de 180 días desde que se levantaron y 4 más de un año. La mediana de cierre global es de 30 días.</a:t>
+              <a:t>De los 46 hallazgos abiertos, 17 llevan más de 180 días desde que se levantaron y 3 más de un año. La mediana de cierre global es de 30 días.</a:t>
             </a:r>
             <a:endParaRPr lang="en-US" sz="1350" dirty="0"/>
           </a:p>
@@ -30967,7 +30928,7 @@
                 <a:ea typeface="Calibri" pitchFamily="34" charset="-122"/>
                 <a:cs typeface="Calibri" pitchFamily="34" charset="-120"/>
               </a:rPr>
-              <a:t>Al corte hay 50 hallazgos fuera de plazo de los 52 abiertos.</a:t>
+              <a:t>Al corte hay 44 hallazgos fuera de plazo de los 46 abiertos.</a:t>
             </a:r>
             <a:endParaRPr lang="en-US" sz="1150" dirty="0"/>
           </a:p>
@@ -31646,7 +31607,7 @@
                 <a:ea typeface="Calibri" pitchFamily="34" charset="-122"/>
                 <a:cs typeface="Calibri" pitchFamily="34" charset="-120"/>
               </a:rPr>
-              <a:t>230</a:t>
+              <a:t>238</a:t>
             </a:r>
             <a:endParaRPr lang="en-US" sz="1150" dirty="0"/>
           </a:p>
@@ -31724,7 +31685,7 @@
                 <a:ea typeface="Calibri" pitchFamily="34" charset="-122"/>
                 <a:cs typeface="Calibri" pitchFamily="34" charset="-120"/>
               </a:rPr>
-              <a:t>389 d</a:t>
+              <a:t>407 d</a:t>
             </a:r>
             <a:endParaRPr lang="en-US" sz="1150" dirty="0"/>
           </a:p>
@@ -31763,7 +31724,7 @@
                 <a:ea typeface="Calibri" pitchFamily="34" charset="-122"/>
                 <a:cs typeface="Calibri" pitchFamily="34" charset="-120"/>
               </a:rPr>
-              <a:t>14</a:t>
+              <a:t>9</a:t>
             </a:r>
             <a:endParaRPr lang="en-US" sz="1150" dirty="0"/>
           </a:p>
@@ -31892,7 +31853,7 @@
                 <a:ea typeface="Calibri" pitchFamily="34" charset="-122"/>
                 <a:cs typeface="Calibri" pitchFamily="34" charset="-120"/>
               </a:rPr>
-              <a:t>127</a:t>
+              <a:t>128</a:t>
             </a:r>
             <a:endParaRPr lang="en-US" sz="1150" dirty="0"/>
           </a:p>
@@ -31931,7 +31892,7 @@
                 <a:ea typeface="Calibri" pitchFamily="34" charset="-122"/>
                 <a:cs typeface="Calibri" pitchFamily="34" charset="-120"/>
               </a:rPr>
-              <a:t>129 d</a:t>
+              <a:t>131 d</a:t>
             </a:r>
             <a:endParaRPr lang="en-US" sz="1150" dirty="0"/>
           </a:p>
@@ -31970,7 +31931,7 @@
                 <a:ea typeface="Calibri" pitchFamily="34" charset="-122"/>
                 <a:cs typeface="Calibri" pitchFamily="34" charset="-120"/>
               </a:rPr>
-              <a:t>313 d</a:t>
+              <a:t>409 d</a:t>
             </a:r>
             <a:endParaRPr lang="en-US" sz="1150" dirty="0"/>
           </a:p>
@@ -32009,7 +31970,7 @@
                 <a:ea typeface="Calibri" pitchFamily="34" charset="-122"/>
                 <a:cs typeface="Calibri" pitchFamily="34" charset="-120"/>
               </a:rPr>
-              <a:t>37</a:t>
+              <a:t>36</a:t>
             </a:r>
             <a:endParaRPr lang="en-US" sz="1150" dirty="0"/>
           </a:p>
@@ -32387,7 +32348,7 @@
                 <a:ea typeface="Calibri" pitchFamily="34" charset="-122"/>
                 <a:cs typeface="Calibri" pitchFamily="34" charset="-120"/>
               </a:rPr>
-              <a:t>Fuente: Data_NCR17082026.xlsx — hoja «Observaciones» · Corte 17-08-2026 · 498 registros desde 10-02-2023</a:t>
+              <a:t>Fuente: Data_NCR24082026.xlsx — hoja «Observaciones» · Corte 24-08-2026 · 501 registros desde 10-02-2023</a:t>
             </a:r>
             <a:endParaRPr lang="en-US" sz="850" dirty="0"/>
           </a:p>
@@ -32638,7 +32599,7 @@
                 <a:ea typeface="Calibri" pitchFamily="34" charset="-122"/>
                 <a:cs typeface="Calibri" pitchFamily="34" charset="-120"/>
               </a:rPr>
-              <a:t>10.613 UF declaradas entre nov-24 y ago-26, imputadas al mes en que se levantó cada hallazgo. Las declaran 108 de 487 hallazgos del período.</a:t>
+              <a:t>10.613 UF declaradas entre nov-24 y ago-26, imputadas al mes en que se levantó cada hallazgo. Las declaran 108 de 490 hallazgos del período.</a:t>
             </a:r>
             <a:endParaRPr lang="en-US" sz="1350" dirty="0"/>
           </a:p>
@@ -49468,7 +49429,7 @@
                           <a:ea typeface="Calibri" pitchFamily="34" charset="-122"/>
                           <a:cs typeface="Calibri" pitchFamily="34" charset="-120"/>
                         </a:rPr>
-                        <a:t>0/4</a:t>
+                        <a:t>0/7</a:t>
                       </a:r>
                       <a:endParaRPr lang="en-US" sz="750" dirty="0">
                         <a:latin typeface="Calibri" charset="0"/>
@@ -49536,7 +49497,7 @@
                           <a:ea typeface="Calibri" pitchFamily="34" charset="-122"/>
                           <a:cs typeface="Calibri" pitchFamily="34" charset="-120"/>
                         </a:rPr>
-                        <a:t>108/487</a:t>
+                        <a:t>108/490</a:t>
                       </a:r>
                       <a:endParaRPr lang="en-US" sz="750" dirty="0">
                         <a:latin typeface="Calibri" charset="0"/>
@@ -50200,7 +50161,7 @@
                 <a:ea typeface="Cambria" pitchFamily="34" charset="-122"/>
                 <a:cs typeface="Cambria" pitchFamily="34" charset="-120"/>
               </a:rPr>
-              <a:t>247</a:t>
+              <a:t>250</a:t>
             </a:r>
             <a:endParaRPr lang="en-US" sz="2100" dirty="0"/>
           </a:p>
@@ -50317,7 +50278,7 @@
                 <a:ea typeface="Calibri" pitchFamily="34" charset="-122"/>
                 <a:cs typeface="Calibri" pitchFamily="34" charset="-120"/>
               </a:rPr>
-              <a:t>Fuente: Data_NCR17082026.xlsx — hoja «Observaciones» · Corte 17-08-2026 · 498 registros desde 10-02-2023</a:t>
+              <a:t>Fuente: Data_NCR24082026.xlsx — hoja «Observaciones» · Corte 24-08-2026 · 501 registros desde 10-02-2023</a:t>
             </a:r>
             <a:endParaRPr lang="en-US" sz="850" dirty="0"/>
           </a:p>
@@ -50691,7 +50652,7 @@
                 <a:ea typeface="Calibri" pitchFamily="34" charset="-122"/>
                 <a:cs typeface="Calibri" pitchFamily="34" charset="-120"/>
               </a:rPr>
-              <a:t>37 de los 52 hallazgos abiertos (71,2%) y 77,4% de cierre, contra 89,6% global. Es la ruta crítica del módulo.</a:t>
+              <a:t>36 de los 46 hallazgos abiertos (78,3%) y 78% de cierre, contra 90,8% global. Es la ruta crítica del módulo.</a:t>
             </a:r>
             <a:endParaRPr lang="en-US" sz="1100" dirty="0"/>
           </a:p>
@@ -50833,7 +50794,7 @@
                 <a:ea typeface="Calibri" pitchFamily="34" charset="-122"/>
                 <a:cs typeface="Calibri" pitchFamily="34" charset="-120"/>
               </a:rPr>
-              <a:t>Solo 21,3% de sus hallazgos los detecta Besalco; el mejor frente va en 66,7%. Lo que no se detecta adentro llega como observación del cliente.</a:t>
+              <a:t>Solo 21,1% de sus hallazgos los detecta Besalco; el mejor frente va en 66,7%. Lo que no se detecta adentro llega como observación del cliente.</a:t>
             </a:r>
             <a:endParaRPr lang="en-US" sz="1100" dirty="0"/>
           </a:p>
@@ -50933,7 +50894,7 @@
                 <a:ea typeface="Calibri" pitchFamily="34" charset="-122"/>
                 <a:cs typeface="Calibri" pitchFamily="34" charset="-120"/>
               </a:rPr>
-              <a:t>Sacar los 19 hallazgos sobre 180 días</a:t>
+              <a:t>Sacar los 17 hallazgos sobre 180 días</a:t>
             </a:r>
             <a:endParaRPr lang="en-US" sz="1400" dirty="0"/>
           </a:p>
@@ -50975,7 +50936,7 @@
                 <a:ea typeface="Calibri" pitchFamily="34" charset="-122"/>
                 <a:cs typeface="Calibri" pitchFamily="34" charset="-120"/>
               </a:rPr>
-              <a:t>4 de ellos superan el año abiertos. Los tienen a cargo Sin asignar (16), Alvaro Cortés V. (3). Es deuda antigua que no se cierra sola.</a:t>
+              <a:t>3 de ellos superan el año abiertos. Los tienen a cargo Sin asignar (17). Es deuda antigua que no se cierra sola.</a:t>
             </a:r>
             <a:endParaRPr lang="en-US" sz="1100" dirty="0"/>
           </a:p>
@@ -51075,7 +51036,7 @@
                 <a:ea typeface="Calibri" pitchFamily="34" charset="-122"/>
                 <a:cs typeface="Calibri" pitchFamily="34" charset="-120"/>
               </a:rPr>
-              <a:t>Responder las 50 que pasaron el plazo</a:t>
+              <a:t>Responder las 44 que pasaron el plazo</a:t>
             </a:r>
             <a:endParaRPr lang="en-US" sz="1400" dirty="0"/>
           </a:p>
@@ -51117,7 +51078,7 @@
                 <a:ea typeface="Calibri" pitchFamily="34" charset="-122"/>
                 <a:cs typeface="Calibri" pitchFamily="34" charset="-120"/>
               </a:rPr>
-              <a:t>El plazo es de 10 días desde la emisión y hoy lo incumplen 96,2% de los abiertos. Solo 2 siguen dentro de plazo.</a:t>
+              <a:t>El plazo es de 10 días desde la emisión y hoy lo incumplen 95,7% de los abiertos. Solo 2 siguen dentro de plazo.</a:t>
             </a:r>
             <a:endParaRPr lang="en-US" sz="1100" dirty="0"/>
           </a:p>
@@ -51156,7 +51117,7 @@
                 <a:ea typeface="Calibri" pitchFamily="34" charset="-122"/>
                 <a:cs typeface="Calibri" pitchFamily="34" charset="-120"/>
               </a:rPr>
-              <a:t>Fuente: Data_NCR17082026.xlsx — hoja «Observaciones» · Corte 17-08-2026 · 498 registros desde 10-02-2023</a:t>
+              <a:t>Fuente: Data_NCR24082026.xlsx — hoja «Observaciones» · Corte 24-08-2026 · 501 registros desde 10-02-2023</a:t>
             </a:r>
             <a:endParaRPr lang="en-US" sz="850" dirty="0"/>
           </a:p>
@@ -51880,7 +51841,7 @@
                 <a:ea typeface="Calibri" pitchFamily="34" charset="-122"/>
                 <a:cs typeface="Calibri" pitchFamily="34" charset="-120"/>
               </a:rPr>
-              <a:t>Corte: 17-08-2026</a:t>
+              <a:t>Corte: 24-08-2026</a:t>
             </a:r>
             <a:endParaRPr lang="en-US" sz="1100" dirty="0"/>
           </a:p>
@@ -51919,7 +51880,7 @@
                 <a:ea typeface="Calibri" pitchFamily="34" charset="-122"/>
                 <a:cs typeface="Calibri" pitchFamily="34" charset="-120"/>
               </a:rPr>
-              <a:t>Fuente: Data_NCR17082026.xlsx — hoja «Observaciones» · Corte 17-08-2026 · 498 registros desde 10-02-2023</a:t>
+              <a:t>Fuente: Data_NCR24082026.xlsx — hoja «Observaciones» · Corte 24-08-2026 · 501 registros desde 10-02-2023</a:t>
             </a:r>
             <a:endParaRPr lang="en-US" sz="850" dirty="0"/>
           </a:p>

--- a/modulo_nc/Panel_No_Conformidades.pptx
+++ b/modulo_nc/Panel_No_Conformidades.pptx
@@ -220,19 +220,19 @@
                     <c:v>3 sem.</c:v>
                   </c:pt>
                   <c:pt idx="1">
-                    <c:v>20-07</c:v>
+                    <c:v>27-07</c:v>
                   </c:pt>
                   <c:pt idx="2">
-                    <c:v>27-07</c:v>
+                    <c:v>03-08</c:v>
                   </c:pt>
                   <c:pt idx="3">
-                    <c:v>03-08</c:v>
+                    <c:v>10-08</c:v>
                   </c:pt>
                   <c:pt idx="4">
-                    <c:v>10-08</c:v>
+                    <c:v>17-08</c:v>
                   </c:pt>
                   <c:pt idx="5">
-                    <c:v>17-08</c:v>
+                    <c:v>24-08</c:v>
                   </c:pt>
                 </c:lvl>
               </c:multiLvlStrCache>
@@ -245,13 +245,13 @@
                 <c:formatCode>General</c:formatCode>
                 <c:ptCount val="6"/>
                 <c:pt idx="0">
-                  <c:v>1</c:v>
+                  <c:v/>
                 </c:pt>
                 <c:pt idx="1">
-                  <c:v/>
+                  <c:v>2</c:v>
                 </c:pt>
                 <c:pt idx="2">
-                  <c:v>2</c:v>
+                  <c:v/>
                 </c:pt>
                 <c:pt idx="3">
                   <c:v/>
@@ -260,7 +260,7 @@
                   <c:v>2</c:v>
                 </c:pt>
                 <c:pt idx="5">
-                  <c:v>2</c:v>
+                  <c:v>1</c:v>
                 </c:pt>
               </c:numCache>
             </c:numRef>
@@ -322,19 +322,19 @@
                     <c:v>3 sem.</c:v>
                   </c:pt>
                   <c:pt idx="1">
-                    <c:v>20-07</c:v>
+                    <c:v>27-07</c:v>
                   </c:pt>
                   <c:pt idx="2">
-                    <c:v>27-07</c:v>
+                    <c:v>03-08</c:v>
                   </c:pt>
                   <c:pt idx="3">
-                    <c:v>03-08</c:v>
+                    <c:v>10-08</c:v>
                   </c:pt>
                   <c:pt idx="4">
-                    <c:v>10-08</c:v>
+                    <c:v>17-08</c:v>
                   </c:pt>
                   <c:pt idx="5">
-                    <c:v>17-08</c:v>
+                    <c:v>24-08</c:v>
                   </c:pt>
                 </c:lvl>
               </c:multiLvlStrCache>
@@ -347,22 +347,22 @@
                 <c:formatCode>General</c:formatCode>
                 <c:ptCount val="6"/>
                 <c:pt idx="0">
-                  <c:v>3</c:v>
+                  <c:v>4</c:v>
                 </c:pt>
                 <c:pt idx="1">
-                  <c:v>3</c:v>
+                  <c:v>2</c:v>
                 </c:pt>
                 <c:pt idx="2">
-                  <c:v>2</c:v>
+                  <c:v>1</c:v>
                 </c:pt>
                 <c:pt idx="3">
-                  <c:v>1</c:v>
+                  <c:v>3</c:v>
                 </c:pt>
                 <c:pt idx="4">
                   <c:v>1</c:v>
                 </c:pt>
                 <c:pt idx="5">
-                  <c:v>1</c:v>
+                  <c:v/>
                 </c:pt>
               </c:numCache>
             </c:numRef>
@@ -734,7 +734,7 @@
                   <c:v>19</c:v>
                 </c:pt>
                 <c:pt idx="1">
-                  <c:v>195</c:v>
+                  <c:v>196</c:v>
                 </c:pt>
                 <c:pt idx="2">
                   <c:v>71</c:v>
@@ -1199,13 +1199,13 @@
                 <c:formatCode>General</c:formatCode>
                 <c:ptCount val="4"/>
                 <c:pt idx="0">
-                  <c:v>289</c:v>
+                  <c:v>292</c:v>
                 </c:pt>
                 <c:pt idx="1">
-                  <c:v>120</c:v>
+                  <c:v>121</c:v>
                 </c:pt>
                 <c:pt idx="2">
-                  <c:v>45</c:v>
+                  <c:v>49</c:v>
                 </c:pt>
                 <c:pt idx="3">
                   <c:v>1</c:v>
@@ -1289,13 +1289,13 @@
                 <c:formatCode>General</c:formatCode>
                 <c:ptCount val="4"/>
                 <c:pt idx="0">
-                  <c:v>29</c:v>
+                  <c:v>26</c:v>
                 </c:pt>
                 <c:pt idx="1">
                   <c:v>2</c:v>
                 </c:pt>
                 <c:pt idx="2">
-                  <c:v>15</c:v>
+                  <c:v>11</c:v>
                 </c:pt>
                 <c:pt idx="3">
                   <c:v/>
@@ -1487,7 +1487,7 @@
                 </a:solidFill>
                 <a:latin typeface="Calibri"/>
               </a:rPr>
-              <a:t>Antigüedad de los 46 hallazgos abiertos</a:t>
+              <a:t>Antigüedad de los 39 hallazgos abiertos</a:t>
             </a:r>
           </a:p>
         </c:rich>
@@ -1568,7 +1568,7 @@
                 <c:formatCode>General</c:formatCode>
                 <c:ptCount val="1"/>
                 <c:pt idx="0">
-                  <c:v>6</c:v>
+                  <c:v>3</c:v>
                 </c:pt>
               </c:numCache>
             </c:numRef>
@@ -1784,79 +1784,7 @@
                 <c:formatCode>General</c:formatCode>
                 <c:ptCount val="1"/>
                 <c:pt idx="0">
-                  <c:v>14</c:v>
-                </c:pt>
-              </c:numCache>
-            </c:numRef>
-          </c:val>
-        </c:ser>
-        <c:ser>
-          <c:idx val="4"/>
-          <c:order val="4"/>
-          <c:tx>
-            <c:strRef>
-              <c:f>Sheet1!$F$1</c:f>
-              <c:strCache>
-                <c:ptCount val="1"/>
-                <c:pt idx="0">
-                  <c:v>Más de un año</c:v>
-                </c:pt>
-              </c:strCache>
-            </c:strRef>
-          </c:tx>
-          <c:spPr>
-            <a:solidFill>
-              <a:srgbClr val="C0392B"/>
-            </a:solidFill>
-            <a:effectLst/>
-          </c:spPr>
-          <c:invertIfNegative val="0"/>
-          <c:dLbls>
-            <c:numFmt formatCode="#,##0" sourceLinked="0"/>
-            <c:txPr>
-              <a:bodyPr/>
-              <a:lstStyle/>
-              <a:p>
-                <a:pPr>
-                  <a:defRPr b="1" i="0" strike="noStrike" sz="1100" u="none">
-                    <a:solidFill>
-                      <a:srgbClr val="FFFFFF"/>
-                    </a:solidFill>
-                    <a:latin typeface="Calibri"/>
-                  </a:defRPr>
-                </a:pPr>
-              </a:p>
-            </c:txPr>
-            <c:dLblPos val="ctr"/>
-            <c:showLegendKey val="0"/>
-            <c:showVal val="1"/>
-            <c:showCatName val="0"/>
-            <c:showSerName val="0"/>
-            <c:showPercent val="0"/>
-            <c:showBubbleSize val="0"/>
-            <c:showLeaderLines val="0"/>
-          </c:dLbls>
-          <c:cat>
-            <c:multiLvlStrRef>
-              <c:f>Sheet1!$A$2:$A$2</c:f>
-              <c:multiLvlStrCache>
-                <c:ptCount val="1"/>
-                <c:lvl>
-                  <c:pt idx="0">
-                    <c:v>Abiertos</c:v>
-                  </c:pt>
-                </c:lvl>
-              </c:multiLvlStrCache>
-            </c:multiLvlStrRef>
-          </c:cat>
-          <c:val>
-            <c:numRef>
-              <c:f>Sheet1!$F$2:$F$2</c:f>
-              <c:numCache>
-                <c:formatCode>General</c:formatCode>
-                <c:ptCount val="1"/>
-                <c:pt idx="0">
-                  <c:v>3</c:v>
+                  <c:v>13</c:v>
                 </c:pt>
               </c:numCache>
             </c:numRef>
@@ -2573,10 +2501,10 @@
                 <c:formatCode>General</c:formatCode>
                 <c:ptCount val="8"/>
                 <c:pt idx="0">
-                  <c:v>139</c:v>
+                  <c:v>142</c:v>
                 </c:pt>
                 <c:pt idx="1">
-                  <c:v>24</c:v>
+                  <c:v>25</c:v>
                 </c:pt>
                 <c:pt idx="2">
                   <c:v>16</c:v>
@@ -2687,10 +2615,10 @@
                 <c:formatCode>General</c:formatCode>
                 <c:ptCount val="8"/>
                 <c:pt idx="0">
-                  <c:v>6</c:v>
+                  <c:v>4</c:v>
                 </c:pt>
                 <c:pt idx="1">
-                  <c:v>2</c:v>
+                  <c:v>1</c:v>
                 </c:pt>
                 <c:pt idx="2">
                   <c:v>1</c:v>
@@ -2999,7 +2927,7 @@
                 <c:formatCode>General</c:formatCode>
                 <c:ptCount val="8"/>
                 <c:pt idx="0">
-                  <c:v>36</c:v>
+                  <c:v>40</c:v>
                 </c:pt>
                 <c:pt idx="1">
                   <c:v>37</c:v>
@@ -3113,7 +3041,7 @@
                 <c:formatCode>General</c:formatCode>
                 <c:ptCount val="8"/>
                 <c:pt idx="0">
-                  <c:v>35</c:v>
+                  <c:v>31</c:v>
                 </c:pt>
                 <c:pt idx="1">
                   <c:v/>
@@ -5710,7 +5638,7 @@
                 <a:ea typeface="Calibri" pitchFamily="34" charset="-122"/>
                 <a:cs typeface="Calibri" pitchFamily="34" charset="-120"/>
               </a:rPr>
-              <a:t>501 hallazgos levantados entre 10-02-2023 y 19-08-2026 (Desaladora 82 · Talabre 247 · Arqueros 164 · Oficina Central 8).</a:t>
+              <a:t>502 hallazgos levantados entre 10-02-2023 y 24-08-2026 (Desaladora 82 · Talabre 248 · Arqueros 164 · Oficina Central 8).</a:t>
             </a:r>
             <a:endParaRPr lang="en-US" sz="1350" dirty="0"/>
           </a:p>
@@ -5769,7 +5697,7 @@
                 <a:ea typeface="Cambria" pitchFamily="34" charset="-122"/>
                 <a:cs typeface="Cambria" pitchFamily="34" charset="-120"/>
               </a:rPr>
-              <a:t>90,8%</a:t>
+              <a:t>92,2%</a:t>
             </a:r>
             <a:endParaRPr lang="en-US" sz="3400" dirty="0"/>
           </a:p>
@@ -5847,7 +5775,7 @@
                 <a:ea typeface="Cambria" pitchFamily="34" charset="-122"/>
                 <a:cs typeface="Cambria" pitchFamily="34" charset="-120"/>
               </a:rPr>
-              <a:t>46</a:t>
+              <a:t>39</a:t>
             </a:r>
             <a:endParaRPr lang="en-US" sz="3400" dirty="0"/>
           </a:p>
@@ -6081,7 +6009,7 @@
                 <a:ea typeface="Calibri" pitchFamily="34" charset="-122"/>
                 <a:cs typeface="Calibri" pitchFamily="34" charset="-120"/>
               </a:rPr>
-              <a:t>Corte: 24-08-2026</a:t>
+              <a:t>Corte: 31-08-2026</a:t>
             </a:r>
             <a:endParaRPr lang="en-US" sz="1100" dirty="0"/>
           </a:p>
@@ -6120,7 +6048,7 @@
                 <a:ea typeface="Calibri" pitchFamily="34" charset="-122"/>
                 <a:cs typeface="Calibri" pitchFamily="34" charset="-120"/>
               </a:rPr>
-              <a:t>Fuente: Data_NCR24082026.xlsx — hoja «Observaciones» · Corte 24-08-2026 · 501 registros desde 10-02-2023</a:t>
+              <a:t>Fuente: Data_NCR31082026.xlsx — hoja «Observaciones» · Corte 31-08-2026 · 502 registros desde 10-02-2023</a:t>
             </a:r>
             <a:endParaRPr lang="en-US" sz="850" dirty="0"/>
           </a:p>
@@ -6713,7 +6641,7 @@
                 <a:ea typeface="Calibri" pitchFamily="34" charset="-122"/>
                 <a:cs typeface="Calibri" pitchFamily="34" charset="-120"/>
               </a:rPr>
-              <a:t>Global del módulo: 90,8%</a:t>
+              <a:t>Global del módulo: 92,2%</a:t>
             </a:r>
             <a:endParaRPr lang="en-US" sz="950" dirty="0"/>
           </a:p>
@@ -7921,7 +7849,7 @@
                 <a:ea typeface="Calibri" pitchFamily="34" charset="-122"/>
                 <a:cs typeface="Calibri" pitchFamily="34" charset="-120"/>
               </a:rPr>
-              <a:t>Fuente: Data_NCR24082026.xlsx — hoja «Observaciones» · Corte 24-08-2026 · 501 registros desde 10-02-2023</a:t>
+              <a:t>Fuente: Data_NCR31082026.xlsx — hoja «Observaciones» · Corte 31-08-2026 · 502 registros desde 10-02-2023</a:t>
             </a:r>
             <a:endParaRPr lang="en-US" sz="850" dirty="0"/>
           </a:p>
@@ -8780,7 +8708,7 @@
                 <a:ea typeface="Calibri" pitchFamily="34" charset="-122"/>
                 <a:cs typeface="Calibri" pitchFamily="34" charset="-120"/>
               </a:rPr>
-              <a:t>104</a:t>
+              <a:t>111</a:t>
             </a:r>
             <a:endParaRPr lang="en-US" sz="1050" dirty="0"/>
           </a:p>
@@ -8903,7 +8831,7 @@
                 <a:ea typeface="Calibri" pitchFamily="34" charset="-122"/>
                 <a:cs typeface="Calibri" pitchFamily="34" charset="-120"/>
               </a:rPr>
-              <a:t>SEMANA 17-08-2026 — 23-08-2026</a:t>
+              <a:t>SEMANA 24-08-2026 — 30-08-2026</a:t>
             </a:r>
             <a:endParaRPr lang="en-US" sz="1000" dirty="0"/>
           </a:p>
@@ -8981,7 +8909,7 @@
                 <a:ea typeface="Calibri" pitchFamily="34" charset="-122"/>
                 <a:cs typeface="Calibri" pitchFamily="34" charset="-120"/>
               </a:rPr>
-              <a:t>Fuente: Data_NCR24082026.xlsx — hoja «Observaciones» · Corte 24-08-2026 · 501 registros desde 10-02-2023</a:t>
+              <a:t>Fuente: Data_NCR31082026.xlsx — hoja «Observaciones» · Corte 31-08-2026 · 502 registros desde 10-02-2023</a:t>
             </a:r>
             <a:endParaRPr lang="en-US" sz="850" dirty="0"/>
           </a:p>
@@ -9334,7 +9262,7 @@
                 <a:ea typeface="Calibri" pitchFamily="34" charset="-122"/>
                 <a:cs typeface="Calibri" pitchFamily="34" charset="-120"/>
               </a:rPr>
-              <a:t>247 hallazgos levantados · 52 internas · 195 del cliente · 12 especialidades involucradas.</a:t>
+              <a:t>248 hallazgos levantados · 52 internas · 196 del cliente · 12 especialidades involucradas.</a:t>
             </a:r>
             <a:endParaRPr lang="en-US" sz="1350" dirty="0"/>
           </a:p>
@@ -9393,7 +9321,7 @@
                 <a:ea typeface="Cambria" pitchFamily="34" charset="-122"/>
                 <a:cs typeface="Cambria" pitchFamily="34" charset="-120"/>
               </a:rPr>
-              <a:t>96,4%</a:t>
+              <a:t>97,6%</a:t>
             </a:r>
             <a:endParaRPr lang="en-US" sz="3400" dirty="0"/>
           </a:p>
@@ -9471,7 +9399,7 @@
                 <a:ea typeface="Cambria" pitchFamily="34" charset="-122"/>
                 <a:cs typeface="Cambria" pitchFamily="34" charset="-120"/>
               </a:rPr>
-              <a:t>9</a:t>
+              <a:t>6</a:t>
             </a:r>
             <a:endParaRPr lang="en-US" sz="3400" dirty="0"/>
           </a:p>
@@ -9627,7 +9555,7 @@
                 <a:ea typeface="Cambria" pitchFamily="34" charset="-122"/>
                 <a:cs typeface="Cambria" pitchFamily="34" charset="-120"/>
               </a:rPr>
-              <a:t>21,1%</a:t>
+              <a:t>21%</a:t>
             </a:r>
             <a:endParaRPr lang="en-US" sz="3400" dirty="0"/>
           </a:p>
@@ -9705,7 +9633,7 @@
                 <a:ea typeface="Calibri" pitchFamily="34" charset="-122"/>
                 <a:cs typeface="Calibri" pitchFamily="34" charset="-120"/>
               </a:rPr>
-              <a:t>Corte: 24-08-2026</a:t>
+              <a:t>Corte: 31-08-2026</a:t>
             </a:r>
             <a:endParaRPr lang="en-US" sz="1100" dirty="0"/>
           </a:p>
@@ -9744,7 +9672,7 @@
                 <a:ea typeface="Calibri" pitchFamily="34" charset="-122"/>
                 <a:cs typeface="Calibri" pitchFamily="34" charset="-120"/>
               </a:rPr>
-              <a:t>Fuente: Data_NCR24082026.xlsx — hoja «Observaciones» · Corte 24-08-2026 · 501 registros desde 10-02-2023</a:t>
+              <a:t>Fuente: Data_NCR31082026.xlsx — hoja «Observaciones» · Corte 31-08-2026 · 502 registros desde 10-02-2023</a:t>
             </a:r>
             <a:endParaRPr lang="en-US" sz="850" dirty="0"/>
           </a:p>
@@ -10010,7 +9938,7 @@
                 <a:ea typeface="Cambria" pitchFamily="34" charset="-122"/>
                 <a:cs typeface="Cambria" pitchFamily="34" charset="-120"/>
               </a:rPr>
-              <a:t>247</a:t>
+              <a:t>248</a:t>
             </a:r>
             <a:endParaRPr lang="en-US" sz="4000" dirty="0"/>
           </a:p>
@@ -10049,7 +9977,7 @@
                 <a:ea typeface="Calibri" pitchFamily="34" charset="-122"/>
                 <a:cs typeface="Calibri" pitchFamily="34" charset="-120"/>
               </a:rPr>
-              <a:t>238 cerrados</a:t>
+              <a:t>242 cerrados</a:t>
             </a:r>
             <a:endParaRPr lang="en-US" sz="1400" dirty="0"/>
           </a:p>
@@ -10127,7 +10055,7 @@
                 <a:ea typeface="Calibri" pitchFamily="34" charset="-122"/>
                 <a:cs typeface="Calibri" pitchFamily="34" charset="-120"/>
               </a:rPr>
-              <a:t>52 internas · 195 del cliente</a:t>
+              <a:t>52 internas · 196 del cliente</a:t>
             </a:r>
             <a:endParaRPr lang="en-US" sz="950" dirty="0"/>
           </a:p>
@@ -10220,7 +10148,7 @@
                 <a:ea typeface="Cambria" pitchFamily="34" charset="-122"/>
                 <a:cs typeface="Cambria" pitchFamily="34" charset="-120"/>
               </a:rPr>
-              <a:t>96,4%</a:t>
+              <a:t>97,6%</a:t>
             </a:r>
             <a:endParaRPr lang="en-US" sz="4000" dirty="0"/>
           </a:p>
@@ -10259,7 +10187,7 @@
                 <a:ea typeface="Calibri" pitchFamily="34" charset="-122"/>
                 <a:cs typeface="Calibri" pitchFamily="34" charset="-120"/>
               </a:rPr>
-              <a:t>238/247</a:t>
+              <a:t>242/248</a:t>
             </a:r>
             <a:endParaRPr lang="en-US" sz="1400" dirty="0"/>
           </a:p>
@@ -10337,7 +10265,7 @@
                 <a:ea typeface="Calibri" pitchFamily="34" charset="-122"/>
                 <a:cs typeface="Calibri" pitchFamily="34" charset="-120"/>
               </a:rPr>
-              <a:t>Global del módulo: 90,8%</a:t>
+              <a:t>Global del módulo: 92,2%</a:t>
             </a:r>
             <a:endParaRPr lang="en-US" sz="950" dirty="0"/>
           </a:p>
@@ -10430,7 +10358,7 @@
                 <a:ea typeface="Cambria" pitchFamily="34" charset="-122"/>
                 <a:cs typeface="Cambria" pitchFamily="34" charset="-120"/>
               </a:rPr>
-              <a:t>9</a:t>
+              <a:t>6</a:t>
             </a:r>
             <a:endParaRPr lang="en-US" sz="4000" dirty="0"/>
           </a:p>
@@ -10547,7 +10475,7 @@
                 <a:ea typeface="Calibri" pitchFamily="34" charset="-122"/>
                 <a:cs typeface="Calibri" pitchFamily="34" charset="-120"/>
               </a:rPr>
-              <a:t>5 iniciado · 1 no aceptado · 3 listo para revisión</a:t>
+              <a:t>5 iniciado · 1 listo para revisión</a:t>
             </a:r>
             <a:endParaRPr lang="en-US" sz="950" dirty="0"/>
           </a:p>
@@ -10873,7 +10801,7 @@
                 <a:ea typeface="Cambria" pitchFamily="34" charset="-122"/>
                 <a:cs typeface="Cambria" pitchFamily="34" charset="-120"/>
               </a:rPr>
-              <a:t>21,1%</a:t>
+              <a:t>21%</a:t>
             </a:r>
             <a:endParaRPr lang="en-US" sz="2600" dirty="0"/>
           </a:p>
@@ -11193,7 +11121,7 @@
                 <a:ea typeface="Calibri" pitchFamily="34" charset="-122"/>
                 <a:cs typeface="Calibri" pitchFamily="34" charset="-120"/>
               </a:rPr>
-              <a:t>9 ab.</a:t>
+              <a:t>6 ab.</a:t>
             </a:r>
             <a:endParaRPr lang="en-US" sz="950" dirty="0"/>
           </a:p>
@@ -11232,7 +11160,7 @@
                 <a:ea typeface="Cambria" pitchFamily="34" charset="-122"/>
                 <a:cs typeface="Cambria" pitchFamily="34" charset="-120"/>
               </a:rPr>
-              <a:t>195</a:t>
+              <a:t>196</a:t>
             </a:r>
             <a:endParaRPr lang="en-US" sz="1600" dirty="0"/>
           </a:p>
@@ -11271,7 +11199,7 @@
                 <a:ea typeface="Calibri" pitchFamily="34" charset="-122"/>
                 <a:cs typeface="Calibri" pitchFamily="34" charset="-120"/>
               </a:rPr>
-              <a:t>Fuente: Data_NCR24082026.xlsx — hoja «Observaciones» · Corte 24-08-2026 · 501 registros desde 10-02-2023</a:t>
+              <a:t>Fuente: Data_NCR31082026.xlsx — hoja «Observaciones» · Corte 31-08-2026 · 502 registros desde 10-02-2023</a:t>
             </a:r>
             <a:endParaRPr lang="en-US" sz="850" dirty="0"/>
           </a:p>
@@ -11522,7 +11450,7 @@
                 <a:ea typeface="Calibri" pitchFamily="34" charset="-122"/>
                 <a:cs typeface="Calibri" pitchFamily="34" charset="-120"/>
               </a:rPr>
-              <a:t>9 hallazgos siguen abiertos; 0 con más de 180 días. Se listan del más antiguo al más reciente.</a:t>
+              <a:t>6 hallazgos siguen abiertos; 0 con más de 180 días. Se listan del más antiguo al más reciente.</a:t>
             </a:r>
             <a:endParaRPr lang="en-US" sz="1350" dirty="0"/>
           </a:p>
@@ -12130,7 +12058,7 @@
                 <a:ea typeface="Calibri" pitchFamily="34" charset="-122"/>
                 <a:cs typeface="Calibri" pitchFamily="34" charset="-120"/>
               </a:rPr>
-              <a:t>154</a:t>
+              <a:t>161</a:t>
             </a:r>
             <a:endParaRPr lang="en-US" sz="1050" dirty="0"/>
           </a:p>
@@ -12251,7 +12179,7 @@
                 <a:ea typeface="Calibri" pitchFamily="34" charset="-122"/>
                 <a:cs typeface="Calibri" pitchFamily="34" charset="-120"/>
               </a:rPr>
-              <a:t>205</a:t>
+              <a:t>235</a:t>
             </a:r>
             <a:endParaRPr lang="en-US" sz="1050" dirty="0"/>
           </a:p>
@@ -12290,7 +12218,7 @@
                 <a:ea typeface="Calibri" pitchFamily="34" charset="-122"/>
                 <a:cs typeface="Calibri" pitchFamily="34" charset="-120"/>
               </a:rPr>
-              <a:t>Producto No Conforme</a:t>
+              <a:t>No Conformidad</a:t>
             </a:r>
             <a:endParaRPr lang="en-US" sz="1050" dirty="0"/>
           </a:p>
@@ -12407,7 +12335,7 @@
                 <a:ea typeface="Calibri" pitchFamily="34" charset="-122"/>
                 <a:cs typeface="Calibri" pitchFamily="34" charset="-120"/>
               </a:rPr>
-              <a:t>Sebastián Ramos</a:t>
+              <a:t>Mauricio Rocha A.</a:t>
             </a:r>
             <a:endParaRPr lang="en-US" sz="1050" dirty="0"/>
           </a:p>
@@ -12446,7 +12374,7 @@
                 <a:ea typeface="Calibri" pitchFamily="34" charset="-122"/>
                 <a:cs typeface="Calibri" pitchFamily="34" charset="-120"/>
               </a:rPr>
-              <a:t>No aceptado</a:t>
+              <a:t>Iniciado</a:t>
             </a:r>
             <a:endParaRPr lang="en-US" sz="1050" dirty="0"/>
           </a:p>
@@ -12485,7 +12413,7 @@
                 <a:ea typeface="Calibri" pitchFamily="34" charset="-122"/>
                 <a:cs typeface="Calibri" pitchFamily="34" charset="-120"/>
               </a:rPr>
-              <a:t>140</a:t>
+              <a:t>62</a:t>
             </a:r>
             <a:endParaRPr lang="en-US" sz="1050" dirty="0"/>
           </a:p>
@@ -12524,7 +12452,7 @@
                 <a:ea typeface="Calibri" pitchFamily="34" charset="-122"/>
                 <a:cs typeface="Calibri" pitchFamily="34" charset="-120"/>
               </a:rPr>
-              <a:t>Solución proyectada asociada al ele…</a:t>
+              <a:t>Geomembrana presenta sectores en lo…</a:t>
             </a:r>
             <a:endParaRPr lang="en-US" sz="1000" dirty="0"/>
           </a:p>
@@ -12586,7 +12514,7 @@
                 <a:ea typeface="Calibri" pitchFamily="34" charset="-122"/>
                 <a:cs typeface="Calibri" pitchFamily="34" charset="-120"/>
               </a:rPr>
-              <a:t>230</a:t>
+              <a:t>241</a:t>
             </a:r>
             <a:endParaRPr lang="en-US" sz="1050" dirty="0"/>
           </a:p>
@@ -12742,7 +12670,7 @@
                 <a:ea typeface="Calibri" pitchFamily="34" charset="-122"/>
                 <a:cs typeface="Calibri" pitchFamily="34" charset="-120"/>
               </a:rPr>
-              <a:t>Mauricio Soto B.</a:t>
+              <a:t>Daniel Ramirez B.</a:t>
             </a:r>
             <a:endParaRPr lang="en-US" sz="1050" dirty="0"/>
           </a:p>
@@ -12781,7 +12709,7 @@
                 <a:ea typeface="Calibri" pitchFamily="34" charset="-122"/>
                 <a:cs typeface="Calibri" pitchFamily="34" charset="-120"/>
               </a:rPr>
-              <a:t>Iniciado</a:t>
+              <a:t>Listo para revisi…</a:t>
             </a:r>
             <a:endParaRPr lang="en-US" sz="1050" dirty="0"/>
           </a:p>
@@ -12820,7 +12748,7 @@
                 <a:ea typeface="Calibri" pitchFamily="34" charset="-122"/>
                 <a:cs typeface="Calibri" pitchFamily="34" charset="-120"/>
               </a:rPr>
-              <a:t>76</a:t>
+              <a:t>34</a:t>
             </a:r>
             <a:endParaRPr lang="en-US" sz="1050" dirty="0"/>
           </a:p>
@@ -12859,7 +12787,7 @@
                 <a:ea typeface="Calibri" pitchFamily="34" charset="-122"/>
                 <a:cs typeface="Calibri" pitchFamily="34" charset="-120"/>
               </a:rPr>
-              <a:t>No se evidenció un Plan de Cierre d…</a:t>
+              <a:t>Registros de construcción no contie…</a:t>
             </a:r>
             <a:endParaRPr lang="en-US" sz="1000" dirty="0"/>
           </a:p>
@@ -12941,7 +12869,7 @@
                 <a:ea typeface="Calibri" pitchFamily="34" charset="-122"/>
                 <a:cs typeface="Calibri" pitchFamily="34" charset="-120"/>
               </a:rPr>
-              <a:t>235</a:t>
+              <a:t>247</a:t>
             </a:r>
             <a:endParaRPr lang="en-US" sz="1050" dirty="0"/>
           </a:p>
@@ -13097,7 +13025,7 @@
                 <a:ea typeface="Calibri" pitchFamily="34" charset="-122"/>
                 <a:cs typeface="Calibri" pitchFamily="34" charset="-120"/>
               </a:rPr>
-              <a:t>Mauricio Rocha A.</a:t>
+              <a:t>Luis Ogalde H.</a:t>
             </a:r>
             <a:endParaRPr lang="en-US" sz="1050" dirty="0"/>
           </a:p>
@@ -13175,7 +13103,7 @@
                 <a:ea typeface="Calibri" pitchFamily="34" charset="-122"/>
                 <a:cs typeface="Calibri" pitchFamily="34" charset="-120"/>
               </a:rPr>
-              <a:t>55</a:t>
+              <a:t>12</a:t>
             </a:r>
             <a:endParaRPr lang="en-US" sz="1050" dirty="0"/>
           </a:p>
@@ -13214,7 +13142,7 @@
                 <a:ea typeface="Calibri" pitchFamily="34" charset="-122"/>
                 <a:cs typeface="Calibri" pitchFamily="34" charset="-120"/>
               </a:rPr>
-              <a:t>Geomembrana presenta sectores en lo…</a:t>
+              <a:t>Fundaciones FS-01 (10 elementos) no…</a:t>
             </a:r>
             <a:endParaRPr lang="en-US" sz="1000" dirty="0"/>
           </a:p>
@@ -13276,7 +13204,7 @@
                 <a:ea typeface="Calibri" pitchFamily="34" charset="-122"/>
                 <a:cs typeface="Calibri" pitchFamily="34" charset="-120"/>
               </a:rPr>
-              <a:t>241</a:t>
+              <a:t>248</a:t>
             </a:r>
             <a:endParaRPr lang="en-US" sz="1050" dirty="0"/>
           </a:p>
@@ -13393,7 +13321,7 @@
                 <a:ea typeface="Calibri" pitchFamily="34" charset="-122"/>
                 <a:cs typeface="Calibri" pitchFamily="34" charset="-120"/>
               </a:rPr>
-              <a:t>CALIDAD</a:t>
+              <a:t>PIPING</a:t>
             </a:r>
             <a:endParaRPr lang="en-US" sz="1050" dirty="0"/>
           </a:p>
@@ -13432,7 +13360,7 @@
                 <a:ea typeface="Calibri" pitchFamily="34" charset="-122"/>
                 <a:cs typeface="Calibri" pitchFamily="34" charset="-120"/>
               </a:rPr>
-              <a:t>Daniel Ramirez B.</a:t>
+              <a:t>Oscar Nahuel P.</a:t>
             </a:r>
             <a:endParaRPr lang="en-US" sz="1050" dirty="0"/>
           </a:p>
@@ -13471,7 +13399,7 @@
                 <a:ea typeface="Calibri" pitchFamily="34" charset="-122"/>
                 <a:cs typeface="Calibri" pitchFamily="34" charset="-120"/>
               </a:rPr>
-              <a:t>Listo para revisi…</a:t>
+              <a:t>Iniciado</a:t>
             </a:r>
             <a:endParaRPr lang="en-US" sz="1050" dirty="0"/>
           </a:p>
@@ -13510,7 +13438,7 @@
                 <a:ea typeface="Calibri" pitchFamily="34" charset="-122"/>
                 <a:cs typeface="Calibri" pitchFamily="34" charset="-120"/>
               </a:rPr>
-              <a:t>27</a:t>
+              <a:t>12</a:t>
             </a:r>
             <a:endParaRPr lang="en-US" sz="1050" dirty="0"/>
           </a:p>
@@ -13549,7 +13477,7 @@
                 <a:ea typeface="Calibri" pitchFamily="34" charset="-122"/>
                 <a:cs typeface="Calibri" pitchFamily="34" charset="-120"/>
               </a:rPr>
-              <a:t>Registros de construcción no contie…</a:t>
+              <a:t>Línea TAG N° 3716D-RW-24-H1-0425-N …</a:t>
             </a:r>
             <a:endParaRPr lang="en-US" sz="1000" dirty="0"/>
           </a:p>
@@ -13631,7 +13559,7 @@
                 <a:ea typeface="Calibri" pitchFamily="34" charset="-122"/>
                 <a:cs typeface="Calibri" pitchFamily="34" charset="-120"/>
               </a:rPr>
-              <a:t>243</a:t>
+              <a:t>249</a:t>
             </a:r>
             <a:endParaRPr lang="en-US" sz="1050" dirty="0"/>
           </a:p>
@@ -13670,7 +13598,7 @@
                 <a:ea typeface="Calibri" pitchFamily="34" charset="-122"/>
                 <a:cs typeface="Calibri" pitchFamily="34" charset="-120"/>
               </a:rPr>
-              <a:t>No Conformidad</a:t>
+              <a:t>Producto No Conforme</a:t>
             </a:r>
             <a:endParaRPr lang="en-US" sz="1050" dirty="0"/>
           </a:p>
@@ -13826,7 +13754,7 @@
                 <a:ea typeface="Calibri" pitchFamily="34" charset="-122"/>
                 <a:cs typeface="Calibri" pitchFamily="34" charset="-120"/>
               </a:rPr>
-              <a:t>Listo para revisi…</a:t>
+              <a:t>Iniciado</a:t>
             </a:r>
             <a:endParaRPr lang="en-US" sz="1050" dirty="0"/>
           </a:p>
@@ -13865,7 +13793,7 @@
                 <a:ea typeface="Calibri" pitchFamily="34" charset="-122"/>
                 <a:cs typeface="Calibri" pitchFamily="34" charset="-120"/>
               </a:rPr>
-              <a:t>14</a:t>
+              <a:t>7</a:t>
             </a:r>
             <a:endParaRPr lang="en-US" sz="1050" dirty="0"/>
           </a:p>
@@ -13904,7 +13832,7 @@
                 <a:ea typeface="Calibri" pitchFamily="34" charset="-122"/>
                 <a:cs typeface="Calibri" pitchFamily="34" charset="-120"/>
               </a:rPr>
-              <a:t>Rollos de geomembrana KRAH (2 mm es…</a:t>
+              <a:t>Se evidencia daño físico en la geom…</a:t>
             </a:r>
             <a:endParaRPr lang="en-US" sz="1000" dirty="0"/>
           </a:p>
@@ -13935,1032 +13863,7 @@
       </p:sp>
       <p:sp>
         <p:nvSpPr>
-          <p:cNvPr id="72" name="Text 69"/>
-          <p:cNvSpPr/>
-          <p:nvPr/>
-        </p:nvSpPr>
-        <p:spPr>
-          <a:xfrm>
-            <a:off x="502920" y="4398264"/>
-            <a:ext cx="822960" cy="256032"/>
-          </a:xfrm>
-          <a:prstGeom prst="rect">
-            <a:avLst/>
-          </a:prstGeom>
-          <a:noFill/>
-          <a:ln/>
-        </p:spPr>
-        <p:txBody>
-          <a:bodyPr wrap="square" lIns="0" tIns="0" rIns="0" bIns="0" rtlCol="0" anchor="ctr"/>
-          <a:lstStyle/>
-          <a:p>
-            <a:pPr algn="l" indent="0" marL="0">
-              <a:buNone/>
-            </a:pPr>
-            <a:r>
-              <a:rPr lang="en-US" sz="1050" dirty="0">
-                <a:solidFill>
-                  <a:srgbClr val="1A2433"/>
-                </a:solidFill>
-                <a:latin typeface="Calibri" pitchFamily="34" charset="0"/>
-                <a:ea typeface="Calibri" pitchFamily="34" charset="-122"/>
-                <a:cs typeface="Calibri" pitchFamily="34" charset="-120"/>
-              </a:rPr>
-              <a:t>244</a:t>
-            </a:r>
-            <a:endParaRPr lang="en-US" sz="1050" dirty="0"/>
-          </a:p>
-        </p:txBody>
-      </p:sp>
-      <p:sp>
-        <p:nvSpPr>
-          <p:cNvPr id="73" name="Text 70"/>
-          <p:cNvSpPr/>
-          <p:nvPr/>
-        </p:nvSpPr>
-        <p:spPr>
-          <a:xfrm>
-            <a:off x="1371600" y="4398264"/>
-            <a:ext cx="1508760" cy="256032"/>
-          </a:xfrm>
-          <a:prstGeom prst="rect">
-            <a:avLst/>
-          </a:prstGeom>
-          <a:noFill/>
-          <a:ln/>
-        </p:spPr>
-        <p:txBody>
-          <a:bodyPr wrap="square" lIns="0" tIns="0" rIns="0" bIns="0" rtlCol="0" anchor="ctr"/>
-          <a:lstStyle/>
-          <a:p>
-            <a:pPr algn="l" indent="0" marL="0">
-              <a:buNone/>
-            </a:pPr>
-            <a:r>
-              <a:rPr lang="en-US" sz="1050" dirty="0">
-                <a:solidFill>
-                  <a:srgbClr val="1A2433"/>
-                </a:solidFill>
-                <a:latin typeface="Calibri" pitchFamily="34" charset="0"/>
-                <a:ea typeface="Calibri" pitchFamily="34" charset="-122"/>
-                <a:cs typeface="Calibri" pitchFamily="34" charset="-120"/>
-              </a:rPr>
-              <a:t>No Conformidad</a:t>
-            </a:r>
-            <a:endParaRPr lang="en-US" sz="1050" dirty="0"/>
-          </a:p>
-        </p:txBody>
-      </p:sp>
-      <p:sp>
-        <p:nvSpPr>
-          <p:cNvPr id="74" name="Text 71"/>
-          <p:cNvSpPr/>
-          <p:nvPr/>
-        </p:nvSpPr>
-        <p:spPr>
-          <a:xfrm>
-            <a:off x="2926080" y="4398264"/>
-            <a:ext cx="1463040" cy="256032"/>
-          </a:xfrm>
-          <a:prstGeom prst="rect">
-            <a:avLst/>
-          </a:prstGeom>
-          <a:noFill/>
-          <a:ln/>
-        </p:spPr>
-        <p:txBody>
-          <a:bodyPr wrap="square" lIns="0" tIns="0" rIns="0" bIns="0" rtlCol="0" anchor="ctr"/>
-          <a:lstStyle/>
-          <a:p>
-            <a:pPr algn="l" indent="0" marL="0">
-              <a:buNone/>
-            </a:pPr>
-            <a:r>
-              <a:rPr lang="en-US" sz="1050" b="1" dirty="0">
-                <a:solidFill>
-                  <a:srgbClr val="C87A32"/>
-                </a:solidFill>
-                <a:latin typeface="Calibri" pitchFamily="34" charset="0"/>
-                <a:ea typeface="Calibri" pitchFamily="34" charset="-122"/>
-                <a:cs typeface="Calibri" pitchFamily="34" charset="-120"/>
-              </a:rPr>
-              <a:t>Externa · Cliente</a:t>
-            </a:r>
-            <a:endParaRPr lang="en-US" sz="1050" dirty="0"/>
-          </a:p>
-        </p:txBody>
-      </p:sp>
-      <p:sp>
-        <p:nvSpPr>
-          <p:cNvPr id="75" name="Text 72"/>
-          <p:cNvSpPr/>
-          <p:nvPr/>
-        </p:nvSpPr>
-        <p:spPr>
-          <a:xfrm>
-            <a:off x="4434840" y="4398264"/>
-            <a:ext cx="1280160" cy="256032"/>
-          </a:xfrm>
-          <a:prstGeom prst="rect">
-            <a:avLst/>
-          </a:prstGeom>
-          <a:noFill/>
-          <a:ln/>
-        </p:spPr>
-        <p:txBody>
-          <a:bodyPr wrap="square" lIns="0" tIns="0" rIns="0" bIns="0" rtlCol="0" anchor="ctr"/>
-          <a:lstStyle/>
-          <a:p>
-            <a:pPr algn="l" indent="0" marL="0">
-              <a:buNone/>
-            </a:pPr>
-            <a:r>
-              <a:rPr lang="en-US" sz="1050" dirty="0">
-                <a:solidFill>
-                  <a:srgbClr val="1A2433"/>
-                </a:solidFill>
-                <a:latin typeface="Calibri" pitchFamily="34" charset="0"/>
-                <a:ea typeface="Calibri" pitchFamily="34" charset="-122"/>
-                <a:cs typeface="Calibri" pitchFamily="34" charset="-120"/>
-              </a:rPr>
-              <a:t>OO.CC</a:t>
-            </a:r>
-            <a:endParaRPr lang="en-US" sz="1050" dirty="0"/>
-          </a:p>
-        </p:txBody>
-      </p:sp>
-      <p:sp>
-        <p:nvSpPr>
-          <p:cNvPr id="76" name="Text 73"/>
-          <p:cNvSpPr/>
-          <p:nvPr/>
-        </p:nvSpPr>
-        <p:spPr>
-          <a:xfrm>
-            <a:off x="5760720" y="4398264"/>
-            <a:ext cx="1508760" cy="256032"/>
-          </a:xfrm>
-          <a:prstGeom prst="rect">
-            <a:avLst/>
-          </a:prstGeom>
-          <a:noFill/>
-          <a:ln/>
-        </p:spPr>
-        <p:txBody>
-          <a:bodyPr wrap="square" lIns="0" tIns="0" rIns="0" bIns="0" rtlCol="0" anchor="ctr"/>
-          <a:lstStyle/>
-          <a:p>
-            <a:pPr algn="l" indent="0" marL="0">
-              <a:buNone/>
-            </a:pPr>
-            <a:r>
-              <a:rPr lang="en-US" sz="1050" dirty="0">
-                <a:solidFill>
-                  <a:srgbClr val="1A2433"/>
-                </a:solidFill>
-                <a:latin typeface="Calibri" pitchFamily="34" charset="0"/>
-                <a:ea typeface="Calibri" pitchFamily="34" charset="-122"/>
-                <a:cs typeface="Calibri" pitchFamily="34" charset="-120"/>
-              </a:rPr>
-              <a:t>Mauricio Rocha A.</a:t>
-            </a:r>
-            <a:endParaRPr lang="en-US" sz="1050" dirty="0"/>
-          </a:p>
-        </p:txBody>
-      </p:sp>
-      <p:sp>
-        <p:nvSpPr>
-          <p:cNvPr id="77" name="Text 74"/>
-          <p:cNvSpPr/>
-          <p:nvPr/>
-        </p:nvSpPr>
-        <p:spPr>
-          <a:xfrm>
-            <a:off x="7315200" y="4398264"/>
-            <a:ext cx="1325880" cy="256032"/>
-          </a:xfrm>
-          <a:prstGeom prst="rect">
-            <a:avLst/>
-          </a:prstGeom>
-          <a:noFill/>
-          <a:ln/>
-        </p:spPr>
-        <p:txBody>
-          <a:bodyPr wrap="square" lIns="0" tIns="0" rIns="0" bIns="0" rtlCol="0" anchor="ctr"/>
-          <a:lstStyle/>
-          <a:p>
-            <a:pPr algn="l" indent="0" marL="0">
-              <a:buNone/>
-            </a:pPr>
-            <a:r>
-              <a:rPr lang="en-US" sz="1050" dirty="0">
-                <a:solidFill>
-                  <a:srgbClr val="1A2433"/>
-                </a:solidFill>
-                <a:latin typeface="Calibri" pitchFamily="34" charset="0"/>
-                <a:ea typeface="Calibri" pitchFamily="34" charset="-122"/>
-                <a:cs typeface="Calibri" pitchFamily="34" charset="-120"/>
-              </a:rPr>
-              <a:t>Listo para revisi…</a:t>
-            </a:r>
-            <a:endParaRPr lang="en-US" sz="1050" dirty="0"/>
-          </a:p>
-        </p:txBody>
-      </p:sp>
-      <p:sp>
-        <p:nvSpPr>
-          <p:cNvPr id="78" name="Text 75"/>
-          <p:cNvSpPr/>
-          <p:nvPr/>
-        </p:nvSpPr>
-        <p:spPr>
-          <a:xfrm>
-            <a:off x="8686800" y="4398264"/>
-            <a:ext cx="640080" cy="256032"/>
-          </a:xfrm>
-          <a:prstGeom prst="rect">
-            <a:avLst/>
-          </a:prstGeom>
-          <a:noFill/>
-          <a:ln/>
-        </p:spPr>
-        <p:txBody>
-          <a:bodyPr wrap="square" lIns="0" tIns="0" rIns="0" bIns="0" rtlCol="0" anchor="ctr"/>
-          <a:lstStyle/>
-          <a:p>
-            <a:pPr algn="r" indent="0" marL="0">
-              <a:buNone/>
-            </a:pPr>
-            <a:r>
-              <a:rPr lang="en-US" sz="1050" dirty="0">
-                <a:solidFill>
-                  <a:srgbClr val="1A2433"/>
-                </a:solidFill>
-                <a:latin typeface="Calibri" pitchFamily="34" charset="0"/>
-                <a:ea typeface="Calibri" pitchFamily="34" charset="-122"/>
-                <a:cs typeface="Calibri" pitchFamily="34" charset="-120"/>
-              </a:rPr>
-              <a:t>14</a:t>
-            </a:r>
-            <a:endParaRPr lang="en-US" sz="1050" dirty="0"/>
-          </a:p>
-        </p:txBody>
-      </p:sp>
-      <p:sp>
-        <p:nvSpPr>
-          <p:cNvPr id="79" name="Text 76"/>
-          <p:cNvSpPr/>
-          <p:nvPr/>
-        </p:nvSpPr>
-        <p:spPr>
-          <a:xfrm>
-            <a:off x="9464040" y="4398264"/>
-            <a:ext cx="2286000" cy="256032"/>
-          </a:xfrm>
-          <a:prstGeom prst="rect">
-            <a:avLst/>
-          </a:prstGeom>
-          <a:noFill/>
-          <a:ln/>
-        </p:spPr>
-        <p:txBody>
-          <a:bodyPr wrap="square" lIns="0" tIns="0" rIns="0" bIns="0" rtlCol="0" anchor="ctr"/>
-          <a:lstStyle/>
-          <a:p>
-            <a:pPr algn="l" indent="0" marL="0">
-              <a:buNone/>
-            </a:pPr>
-            <a:r>
-              <a:rPr lang="en-US" sz="1000" dirty="0">
-                <a:solidFill>
-                  <a:srgbClr val="1A2433"/>
-                </a:solidFill>
-                <a:latin typeface="Calibri" pitchFamily="34" charset="0"/>
-                <a:ea typeface="Calibri" pitchFamily="34" charset="-122"/>
-                <a:cs typeface="Calibri" pitchFamily="34" charset="-120"/>
-              </a:rPr>
-              <a:t>En Piscina Quebrada Sur, se evidenc…</a:t>
-            </a:r>
-            <a:endParaRPr lang="en-US" sz="1000" dirty="0"/>
-          </a:p>
-        </p:txBody>
-      </p:sp>
-      <p:sp>
-        <p:nvSpPr>
-          <p:cNvPr id="80" name="Shape 77"/>
-          <p:cNvSpPr/>
-          <p:nvPr/>
-        </p:nvSpPr>
-        <p:spPr>
-          <a:xfrm>
-            <a:off x="502920" y="4690872"/>
-            <a:ext cx="11247120" cy="0"/>
-          </a:xfrm>
-          <a:prstGeom prst="line">
-            <a:avLst/>
-          </a:prstGeom>
-          <a:noFill/>
-          <a:ln w="9525">
-            <a:solidFill>
-              <a:srgbClr val="D9DFE6"/>
-            </a:solidFill>
-            <a:prstDash val="solid"/>
-          </a:ln>
-        </p:spPr>
-      </p:sp>
-      <p:sp>
-        <p:nvSpPr>
-          <p:cNvPr id="81" name="Shape 78"/>
-          <p:cNvSpPr/>
-          <p:nvPr/>
-        </p:nvSpPr>
-        <p:spPr>
-          <a:xfrm>
-            <a:off x="457200" y="4700016"/>
-            <a:ext cx="11292840" cy="347472"/>
-          </a:xfrm>
-          <a:prstGeom prst="rect">
-            <a:avLst/>
-          </a:prstGeom>
-          <a:solidFill>
-            <a:srgbClr val="FFFFFF"/>
-          </a:solidFill>
-          <a:ln/>
-        </p:spPr>
-      </p:sp>
-      <p:sp>
-        <p:nvSpPr>
-          <p:cNvPr id="82" name="Text 79"/>
-          <p:cNvSpPr/>
-          <p:nvPr/>
-        </p:nvSpPr>
-        <p:spPr>
-          <a:xfrm>
-            <a:off x="502920" y="4745736"/>
-            <a:ext cx="822960" cy="256032"/>
-          </a:xfrm>
-          <a:prstGeom prst="rect">
-            <a:avLst/>
-          </a:prstGeom>
-          <a:noFill/>
-          <a:ln/>
-        </p:spPr>
-        <p:txBody>
-          <a:bodyPr wrap="square" lIns="0" tIns="0" rIns="0" bIns="0" rtlCol="0" anchor="ctr"/>
-          <a:lstStyle/>
-          <a:p>
-            <a:pPr algn="l" indent="0" marL="0">
-              <a:buNone/>
-            </a:pPr>
-            <a:r>
-              <a:rPr lang="en-US" sz="1050" dirty="0">
-                <a:solidFill>
-                  <a:srgbClr val="1A2433"/>
-                </a:solidFill>
-                <a:latin typeface="Calibri" pitchFamily="34" charset="0"/>
-                <a:ea typeface="Calibri" pitchFamily="34" charset="-122"/>
-                <a:cs typeface="Calibri" pitchFamily="34" charset="-120"/>
-              </a:rPr>
-              <a:t>247</a:t>
-            </a:r>
-            <a:endParaRPr lang="en-US" sz="1050" dirty="0"/>
-          </a:p>
-        </p:txBody>
-      </p:sp>
-      <p:sp>
-        <p:nvSpPr>
-          <p:cNvPr id="83" name="Text 80"/>
-          <p:cNvSpPr/>
-          <p:nvPr/>
-        </p:nvSpPr>
-        <p:spPr>
-          <a:xfrm>
-            <a:off x="1371600" y="4745736"/>
-            <a:ext cx="1508760" cy="256032"/>
-          </a:xfrm>
-          <a:prstGeom prst="rect">
-            <a:avLst/>
-          </a:prstGeom>
-          <a:noFill/>
-          <a:ln/>
-        </p:spPr>
-        <p:txBody>
-          <a:bodyPr wrap="square" lIns="0" tIns="0" rIns="0" bIns="0" rtlCol="0" anchor="ctr"/>
-          <a:lstStyle/>
-          <a:p>
-            <a:pPr algn="l" indent="0" marL="0">
-              <a:buNone/>
-            </a:pPr>
-            <a:r>
-              <a:rPr lang="en-US" sz="1050" dirty="0">
-                <a:solidFill>
-                  <a:srgbClr val="1A2433"/>
-                </a:solidFill>
-                <a:latin typeface="Calibri" pitchFamily="34" charset="0"/>
-                <a:ea typeface="Calibri" pitchFamily="34" charset="-122"/>
-                <a:cs typeface="Calibri" pitchFamily="34" charset="-120"/>
-              </a:rPr>
-              <a:t>No Conformidad</a:t>
-            </a:r>
-            <a:endParaRPr lang="en-US" sz="1050" dirty="0"/>
-          </a:p>
-        </p:txBody>
-      </p:sp>
-      <p:sp>
-        <p:nvSpPr>
-          <p:cNvPr id="84" name="Text 81"/>
-          <p:cNvSpPr/>
-          <p:nvPr/>
-        </p:nvSpPr>
-        <p:spPr>
-          <a:xfrm>
-            <a:off x="2926080" y="4745736"/>
-            <a:ext cx="1463040" cy="256032"/>
-          </a:xfrm>
-          <a:prstGeom prst="rect">
-            <a:avLst/>
-          </a:prstGeom>
-          <a:noFill/>
-          <a:ln/>
-        </p:spPr>
-        <p:txBody>
-          <a:bodyPr wrap="square" lIns="0" tIns="0" rIns="0" bIns="0" rtlCol="0" anchor="ctr"/>
-          <a:lstStyle/>
-          <a:p>
-            <a:pPr algn="l" indent="0" marL="0">
-              <a:buNone/>
-            </a:pPr>
-            <a:r>
-              <a:rPr lang="en-US" sz="1050" b="1" dirty="0">
-                <a:solidFill>
-                  <a:srgbClr val="C87A32"/>
-                </a:solidFill>
-                <a:latin typeface="Calibri" pitchFamily="34" charset="0"/>
-                <a:ea typeface="Calibri" pitchFamily="34" charset="-122"/>
-                <a:cs typeface="Calibri" pitchFamily="34" charset="-120"/>
-              </a:rPr>
-              <a:t>Externa · Cliente</a:t>
-            </a:r>
-            <a:endParaRPr lang="en-US" sz="1050" dirty="0"/>
-          </a:p>
-        </p:txBody>
-      </p:sp>
-      <p:sp>
-        <p:nvSpPr>
-          <p:cNvPr id="85" name="Text 82"/>
-          <p:cNvSpPr/>
-          <p:nvPr/>
-        </p:nvSpPr>
-        <p:spPr>
-          <a:xfrm>
-            <a:off x="4434840" y="4745736"/>
-            <a:ext cx="1280160" cy="256032"/>
-          </a:xfrm>
-          <a:prstGeom prst="rect">
-            <a:avLst/>
-          </a:prstGeom>
-          <a:noFill/>
-          <a:ln/>
-        </p:spPr>
-        <p:txBody>
-          <a:bodyPr wrap="square" lIns="0" tIns="0" rIns="0" bIns="0" rtlCol="0" anchor="ctr"/>
-          <a:lstStyle/>
-          <a:p>
-            <a:pPr algn="l" indent="0" marL="0">
-              <a:buNone/>
-            </a:pPr>
-            <a:r>
-              <a:rPr lang="en-US" sz="1050" dirty="0">
-                <a:solidFill>
-                  <a:srgbClr val="1A2433"/>
-                </a:solidFill>
-                <a:latin typeface="Calibri" pitchFamily="34" charset="0"/>
-                <a:ea typeface="Calibri" pitchFamily="34" charset="-122"/>
-                <a:cs typeface="Calibri" pitchFamily="34" charset="-120"/>
-              </a:rPr>
-              <a:t>OO.CC</a:t>
-            </a:r>
-            <a:endParaRPr lang="en-US" sz="1050" dirty="0"/>
-          </a:p>
-        </p:txBody>
-      </p:sp>
-      <p:sp>
-        <p:nvSpPr>
-          <p:cNvPr id="86" name="Text 83"/>
-          <p:cNvSpPr/>
-          <p:nvPr/>
-        </p:nvSpPr>
-        <p:spPr>
-          <a:xfrm>
-            <a:off x="5760720" y="4745736"/>
-            <a:ext cx="1508760" cy="256032"/>
-          </a:xfrm>
-          <a:prstGeom prst="rect">
-            <a:avLst/>
-          </a:prstGeom>
-          <a:noFill/>
-          <a:ln/>
-        </p:spPr>
-        <p:txBody>
-          <a:bodyPr wrap="square" lIns="0" tIns="0" rIns="0" bIns="0" rtlCol="0" anchor="ctr"/>
-          <a:lstStyle/>
-          <a:p>
-            <a:pPr algn="l" indent="0" marL="0">
-              <a:buNone/>
-            </a:pPr>
-            <a:r>
-              <a:rPr lang="en-US" sz="1050" dirty="0">
-                <a:solidFill>
-                  <a:srgbClr val="1A2433"/>
-                </a:solidFill>
-                <a:latin typeface="Calibri" pitchFamily="34" charset="0"/>
-                <a:ea typeface="Calibri" pitchFamily="34" charset="-122"/>
-                <a:cs typeface="Calibri" pitchFamily="34" charset="-120"/>
-              </a:rPr>
-              <a:t>Luis Ogalde H.</a:t>
-            </a:r>
-            <a:endParaRPr lang="en-US" sz="1050" dirty="0"/>
-          </a:p>
-        </p:txBody>
-      </p:sp>
-      <p:sp>
-        <p:nvSpPr>
-          <p:cNvPr id="87" name="Text 84"/>
-          <p:cNvSpPr/>
-          <p:nvPr/>
-        </p:nvSpPr>
-        <p:spPr>
-          <a:xfrm>
-            <a:off x="7315200" y="4745736"/>
-            <a:ext cx="1325880" cy="256032"/>
-          </a:xfrm>
-          <a:prstGeom prst="rect">
-            <a:avLst/>
-          </a:prstGeom>
-          <a:noFill/>
-          <a:ln/>
-        </p:spPr>
-        <p:txBody>
-          <a:bodyPr wrap="square" lIns="0" tIns="0" rIns="0" bIns="0" rtlCol="0" anchor="ctr"/>
-          <a:lstStyle/>
-          <a:p>
-            <a:pPr algn="l" indent="0" marL="0">
-              <a:buNone/>
-            </a:pPr>
-            <a:r>
-              <a:rPr lang="en-US" sz="1050" dirty="0">
-                <a:solidFill>
-                  <a:srgbClr val="1A2433"/>
-                </a:solidFill>
-                <a:latin typeface="Calibri" pitchFamily="34" charset="0"/>
-                <a:ea typeface="Calibri" pitchFamily="34" charset="-122"/>
-                <a:cs typeface="Calibri" pitchFamily="34" charset="-120"/>
-              </a:rPr>
-              <a:t>Iniciado</a:t>
-            </a:r>
-            <a:endParaRPr lang="en-US" sz="1050" dirty="0"/>
-          </a:p>
-        </p:txBody>
-      </p:sp>
-      <p:sp>
-        <p:nvSpPr>
-          <p:cNvPr id="88" name="Text 85"/>
-          <p:cNvSpPr/>
-          <p:nvPr/>
-        </p:nvSpPr>
-        <p:spPr>
-          <a:xfrm>
-            <a:off x="8686800" y="4745736"/>
-            <a:ext cx="640080" cy="256032"/>
-          </a:xfrm>
-          <a:prstGeom prst="rect">
-            <a:avLst/>
-          </a:prstGeom>
-          <a:noFill/>
-          <a:ln/>
-        </p:spPr>
-        <p:txBody>
-          <a:bodyPr wrap="square" lIns="0" tIns="0" rIns="0" bIns="0" rtlCol="0" anchor="ctr"/>
-          <a:lstStyle/>
-          <a:p>
-            <a:pPr algn="r" indent="0" marL="0">
-              <a:buNone/>
-            </a:pPr>
-            <a:r>
-              <a:rPr lang="en-US" sz="1050" dirty="0">
-                <a:solidFill>
-                  <a:srgbClr val="1A2433"/>
-                </a:solidFill>
-                <a:latin typeface="Calibri" pitchFamily="34" charset="0"/>
-                <a:ea typeface="Calibri" pitchFamily="34" charset="-122"/>
-                <a:cs typeface="Calibri" pitchFamily="34" charset="-120"/>
-              </a:rPr>
-              <a:t>5</a:t>
-            </a:r>
-            <a:endParaRPr lang="en-US" sz="1050" dirty="0"/>
-          </a:p>
-        </p:txBody>
-      </p:sp>
-      <p:sp>
-        <p:nvSpPr>
-          <p:cNvPr id="89" name="Text 86"/>
-          <p:cNvSpPr/>
-          <p:nvPr/>
-        </p:nvSpPr>
-        <p:spPr>
-          <a:xfrm>
-            <a:off x="9464040" y="4745736"/>
-            <a:ext cx="2286000" cy="256032"/>
-          </a:xfrm>
-          <a:prstGeom prst="rect">
-            <a:avLst/>
-          </a:prstGeom>
-          <a:noFill/>
-          <a:ln/>
-        </p:spPr>
-        <p:txBody>
-          <a:bodyPr wrap="square" lIns="0" tIns="0" rIns="0" bIns="0" rtlCol="0" anchor="ctr"/>
-          <a:lstStyle/>
-          <a:p>
-            <a:pPr algn="l" indent="0" marL="0">
-              <a:buNone/>
-            </a:pPr>
-            <a:r>
-              <a:rPr lang="en-US" sz="1000" dirty="0">
-                <a:solidFill>
-                  <a:srgbClr val="1A2433"/>
-                </a:solidFill>
-                <a:latin typeface="Calibri" pitchFamily="34" charset="0"/>
-                <a:ea typeface="Calibri" pitchFamily="34" charset="-122"/>
-                <a:cs typeface="Calibri" pitchFamily="34" charset="-120"/>
-              </a:rPr>
-              <a:t>Fundaciones FS-01 (10 elementos) no…</a:t>
-            </a:r>
-            <a:endParaRPr lang="en-US" sz="1000" dirty="0"/>
-          </a:p>
-        </p:txBody>
-      </p:sp>
-      <p:sp>
-        <p:nvSpPr>
-          <p:cNvPr id="90" name="Shape 87"/>
-          <p:cNvSpPr/>
-          <p:nvPr/>
-        </p:nvSpPr>
-        <p:spPr>
-          <a:xfrm>
-            <a:off x="502920" y="5038344"/>
-            <a:ext cx="11247120" cy="0"/>
-          </a:xfrm>
-          <a:prstGeom prst="line">
-            <a:avLst/>
-          </a:prstGeom>
-          <a:noFill/>
-          <a:ln w="9525">
-            <a:solidFill>
-              <a:srgbClr val="D9DFE6"/>
-            </a:solidFill>
-            <a:prstDash val="solid"/>
-          </a:ln>
-        </p:spPr>
-      </p:sp>
-      <p:sp>
-        <p:nvSpPr>
-          <p:cNvPr id="91" name="Text 88"/>
-          <p:cNvSpPr/>
-          <p:nvPr/>
-        </p:nvSpPr>
-        <p:spPr>
-          <a:xfrm>
-            <a:off x="502920" y="5093208"/>
-            <a:ext cx="822960" cy="256032"/>
-          </a:xfrm>
-          <a:prstGeom prst="rect">
-            <a:avLst/>
-          </a:prstGeom>
-          <a:noFill/>
-          <a:ln/>
-        </p:spPr>
-        <p:txBody>
-          <a:bodyPr wrap="square" lIns="0" tIns="0" rIns="0" bIns="0" rtlCol="0" anchor="ctr"/>
-          <a:lstStyle/>
-          <a:p>
-            <a:pPr algn="l" indent="0" marL="0">
-              <a:buNone/>
-            </a:pPr>
-            <a:r>
-              <a:rPr lang="en-US" sz="1050" dirty="0">
-                <a:solidFill>
-                  <a:srgbClr val="1A2433"/>
-                </a:solidFill>
-                <a:latin typeface="Calibri" pitchFamily="34" charset="0"/>
-                <a:ea typeface="Calibri" pitchFamily="34" charset="-122"/>
-                <a:cs typeface="Calibri" pitchFamily="34" charset="-120"/>
-              </a:rPr>
-              <a:t>248</a:t>
-            </a:r>
-            <a:endParaRPr lang="en-US" sz="1050" dirty="0"/>
-          </a:p>
-        </p:txBody>
-      </p:sp>
-      <p:sp>
-        <p:nvSpPr>
-          <p:cNvPr id="92" name="Text 89"/>
-          <p:cNvSpPr/>
-          <p:nvPr/>
-        </p:nvSpPr>
-        <p:spPr>
-          <a:xfrm>
-            <a:off x="1371600" y="5093208"/>
-            <a:ext cx="1508760" cy="256032"/>
-          </a:xfrm>
-          <a:prstGeom prst="rect">
-            <a:avLst/>
-          </a:prstGeom>
-          <a:noFill/>
-          <a:ln/>
-        </p:spPr>
-        <p:txBody>
-          <a:bodyPr wrap="square" lIns="0" tIns="0" rIns="0" bIns="0" rtlCol="0" anchor="ctr"/>
-          <a:lstStyle/>
-          <a:p>
-            <a:pPr algn="l" indent="0" marL="0">
-              <a:buNone/>
-            </a:pPr>
-            <a:r>
-              <a:rPr lang="en-US" sz="1050" dirty="0">
-                <a:solidFill>
-                  <a:srgbClr val="1A2433"/>
-                </a:solidFill>
-                <a:latin typeface="Calibri" pitchFamily="34" charset="0"/>
-                <a:ea typeface="Calibri" pitchFamily="34" charset="-122"/>
-                <a:cs typeface="Calibri" pitchFamily="34" charset="-120"/>
-              </a:rPr>
-              <a:t>No Conformidad</a:t>
-            </a:r>
-            <a:endParaRPr lang="en-US" sz="1050" dirty="0"/>
-          </a:p>
-        </p:txBody>
-      </p:sp>
-      <p:sp>
-        <p:nvSpPr>
-          <p:cNvPr id="93" name="Text 90"/>
-          <p:cNvSpPr/>
-          <p:nvPr/>
-        </p:nvSpPr>
-        <p:spPr>
-          <a:xfrm>
-            <a:off x="2926080" y="5093208"/>
-            <a:ext cx="1463040" cy="256032"/>
-          </a:xfrm>
-          <a:prstGeom prst="rect">
-            <a:avLst/>
-          </a:prstGeom>
-          <a:noFill/>
-          <a:ln/>
-        </p:spPr>
-        <p:txBody>
-          <a:bodyPr wrap="square" lIns="0" tIns="0" rIns="0" bIns="0" rtlCol="0" anchor="ctr"/>
-          <a:lstStyle/>
-          <a:p>
-            <a:pPr algn="l" indent="0" marL="0">
-              <a:buNone/>
-            </a:pPr>
-            <a:r>
-              <a:rPr lang="en-US" sz="1050" b="1" dirty="0">
-                <a:solidFill>
-                  <a:srgbClr val="C87A32"/>
-                </a:solidFill>
-                <a:latin typeface="Calibri" pitchFamily="34" charset="0"/>
-                <a:ea typeface="Calibri" pitchFamily="34" charset="-122"/>
-                <a:cs typeface="Calibri" pitchFamily="34" charset="-120"/>
-              </a:rPr>
-              <a:t>Externa · Cliente</a:t>
-            </a:r>
-            <a:endParaRPr lang="en-US" sz="1050" dirty="0"/>
-          </a:p>
-        </p:txBody>
-      </p:sp>
-      <p:sp>
-        <p:nvSpPr>
-          <p:cNvPr id="94" name="Text 91"/>
-          <p:cNvSpPr/>
-          <p:nvPr/>
-        </p:nvSpPr>
-        <p:spPr>
-          <a:xfrm>
-            <a:off x="4434840" y="5093208"/>
-            <a:ext cx="1280160" cy="256032"/>
-          </a:xfrm>
-          <a:prstGeom prst="rect">
-            <a:avLst/>
-          </a:prstGeom>
-          <a:noFill/>
-          <a:ln/>
-        </p:spPr>
-        <p:txBody>
-          <a:bodyPr wrap="square" lIns="0" tIns="0" rIns="0" bIns="0" rtlCol="0" anchor="ctr"/>
-          <a:lstStyle/>
-          <a:p>
-            <a:pPr algn="l" indent="0" marL="0">
-              <a:buNone/>
-            </a:pPr>
-            <a:r>
-              <a:rPr lang="en-US" sz="1050" dirty="0">
-                <a:solidFill>
-                  <a:srgbClr val="1A2433"/>
-                </a:solidFill>
-                <a:latin typeface="Calibri" pitchFamily="34" charset="0"/>
-                <a:ea typeface="Calibri" pitchFamily="34" charset="-122"/>
-                <a:cs typeface="Calibri" pitchFamily="34" charset="-120"/>
-              </a:rPr>
-              <a:t>PIPING</a:t>
-            </a:r>
-            <a:endParaRPr lang="en-US" sz="1050" dirty="0"/>
-          </a:p>
-        </p:txBody>
-      </p:sp>
-      <p:sp>
-        <p:nvSpPr>
-          <p:cNvPr id="95" name="Text 92"/>
-          <p:cNvSpPr/>
-          <p:nvPr/>
-        </p:nvSpPr>
-        <p:spPr>
-          <a:xfrm>
-            <a:off x="5760720" y="5093208"/>
-            <a:ext cx="1508760" cy="256032"/>
-          </a:xfrm>
-          <a:prstGeom prst="rect">
-            <a:avLst/>
-          </a:prstGeom>
-          <a:noFill/>
-          <a:ln/>
-        </p:spPr>
-        <p:txBody>
-          <a:bodyPr wrap="square" lIns="0" tIns="0" rIns="0" bIns="0" rtlCol="0" anchor="ctr"/>
-          <a:lstStyle/>
-          <a:p>
-            <a:pPr algn="l" indent="0" marL="0">
-              <a:buNone/>
-            </a:pPr>
-            <a:r>
-              <a:rPr lang="en-US" sz="1050" dirty="0">
-                <a:solidFill>
-                  <a:srgbClr val="1A2433"/>
-                </a:solidFill>
-                <a:latin typeface="Calibri" pitchFamily="34" charset="0"/>
-                <a:ea typeface="Calibri" pitchFamily="34" charset="-122"/>
-                <a:cs typeface="Calibri" pitchFamily="34" charset="-120"/>
-              </a:rPr>
-              <a:t>Oscar Nahuel P.</a:t>
-            </a:r>
-            <a:endParaRPr lang="en-US" sz="1050" dirty="0"/>
-          </a:p>
-        </p:txBody>
-      </p:sp>
-      <p:sp>
-        <p:nvSpPr>
-          <p:cNvPr id="96" name="Text 93"/>
-          <p:cNvSpPr/>
-          <p:nvPr/>
-        </p:nvSpPr>
-        <p:spPr>
-          <a:xfrm>
-            <a:off x="7315200" y="5093208"/>
-            <a:ext cx="1325880" cy="256032"/>
-          </a:xfrm>
-          <a:prstGeom prst="rect">
-            <a:avLst/>
-          </a:prstGeom>
-          <a:noFill/>
-          <a:ln/>
-        </p:spPr>
-        <p:txBody>
-          <a:bodyPr wrap="square" lIns="0" tIns="0" rIns="0" bIns="0" rtlCol="0" anchor="ctr"/>
-          <a:lstStyle/>
-          <a:p>
-            <a:pPr algn="l" indent="0" marL="0">
-              <a:buNone/>
-            </a:pPr>
-            <a:r>
-              <a:rPr lang="en-US" sz="1050" dirty="0">
-                <a:solidFill>
-                  <a:srgbClr val="1A2433"/>
-                </a:solidFill>
-                <a:latin typeface="Calibri" pitchFamily="34" charset="0"/>
-                <a:ea typeface="Calibri" pitchFamily="34" charset="-122"/>
-                <a:cs typeface="Calibri" pitchFamily="34" charset="-120"/>
-              </a:rPr>
-              <a:t>Iniciado</a:t>
-            </a:r>
-            <a:endParaRPr lang="en-US" sz="1050" dirty="0"/>
-          </a:p>
-        </p:txBody>
-      </p:sp>
-      <p:sp>
-        <p:nvSpPr>
-          <p:cNvPr id="97" name="Text 94"/>
-          <p:cNvSpPr/>
-          <p:nvPr/>
-        </p:nvSpPr>
-        <p:spPr>
-          <a:xfrm>
-            <a:off x="8686800" y="5093208"/>
-            <a:ext cx="640080" cy="256032"/>
-          </a:xfrm>
-          <a:prstGeom prst="rect">
-            <a:avLst/>
-          </a:prstGeom>
-          <a:noFill/>
-          <a:ln/>
-        </p:spPr>
-        <p:txBody>
-          <a:bodyPr wrap="square" lIns="0" tIns="0" rIns="0" bIns="0" rtlCol="0" anchor="ctr"/>
-          <a:lstStyle/>
-          <a:p>
-            <a:pPr algn="r" indent="0" marL="0">
-              <a:buNone/>
-            </a:pPr>
-            <a:r>
-              <a:rPr lang="en-US" sz="1050" dirty="0">
-                <a:solidFill>
-                  <a:srgbClr val="1A2433"/>
-                </a:solidFill>
-                <a:latin typeface="Calibri" pitchFamily="34" charset="0"/>
-                <a:ea typeface="Calibri" pitchFamily="34" charset="-122"/>
-                <a:cs typeface="Calibri" pitchFamily="34" charset="-120"/>
-              </a:rPr>
-              <a:t>5</a:t>
-            </a:r>
-            <a:endParaRPr lang="en-US" sz="1050" dirty="0"/>
-          </a:p>
-        </p:txBody>
-      </p:sp>
-      <p:sp>
-        <p:nvSpPr>
-          <p:cNvPr id="98" name="Text 95"/>
-          <p:cNvSpPr/>
-          <p:nvPr/>
-        </p:nvSpPr>
-        <p:spPr>
-          <a:xfrm>
-            <a:off x="9464040" y="5093208"/>
-            <a:ext cx="2286000" cy="256032"/>
-          </a:xfrm>
-          <a:prstGeom prst="rect">
-            <a:avLst/>
-          </a:prstGeom>
-          <a:noFill/>
-          <a:ln/>
-        </p:spPr>
-        <p:txBody>
-          <a:bodyPr wrap="square" lIns="0" tIns="0" rIns="0" bIns="0" rtlCol="0" anchor="ctr"/>
-          <a:lstStyle/>
-          <a:p>
-            <a:pPr algn="l" indent="0" marL="0">
-              <a:buNone/>
-            </a:pPr>
-            <a:r>
-              <a:rPr lang="en-US" sz="1000" dirty="0">
-                <a:solidFill>
-                  <a:srgbClr val="1A2433"/>
-                </a:solidFill>
-                <a:latin typeface="Calibri" pitchFamily="34" charset="0"/>
-                <a:ea typeface="Calibri" pitchFamily="34" charset="-122"/>
-                <a:cs typeface="Calibri" pitchFamily="34" charset="-120"/>
-              </a:rPr>
-              <a:t>Línea TAG N° 3716D-RW-24-H1-0425-N …</a:t>
-            </a:r>
-            <a:endParaRPr lang="en-US" sz="1000" dirty="0"/>
-          </a:p>
-        </p:txBody>
-      </p:sp>
-      <p:sp>
-        <p:nvSpPr>
-          <p:cNvPr id="99" name="Shape 96"/>
-          <p:cNvSpPr/>
-          <p:nvPr/>
-        </p:nvSpPr>
-        <p:spPr>
-          <a:xfrm>
-            <a:off x="502920" y="5385816"/>
-            <a:ext cx="11247120" cy="0"/>
-          </a:xfrm>
-          <a:prstGeom prst="line">
-            <a:avLst/>
-          </a:prstGeom>
-          <a:noFill/>
-          <a:ln w="9525">
-            <a:solidFill>
-              <a:srgbClr val="D9DFE6"/>
-            </a:solidFill>
-            <a:prstDash val="solid"/>
-          </a:ln>
-        </p:spPr>
-      </p:sp>
-      <p:sp>
-        <p:nvSpPr>
-          <p:cNvPr id="100" name="Shape 97"/>
+          <p:cNvPr id="72" name="Shape 69"/>
           <p:cNvSpPr/>
           <p:nvPr/>
         </p:nvSpPr>
@@ -14982,7 +13885,7 @@
       </p:sp>
       <p:sp>
         <p:nvSpPr>
-          <p:cNvPr id="101" name="Text 98"/>
+          <p:cNvPr id="73" name="Text 70"/>
           <p:cNvSpPr/>
           <p:nvPr/>
         </p:nvSpPr>
@@ -15013,7 +13916,7 @@
                 <a:ea typeface="Calibri" pitchFamily="34" charset="-122"/>
                 <a:cs typeface="Calibri" pitchFamily="34" charset="-120"/>
               </a:rPr>
-              <a:t>SEMANA 17-08-2026 — 23-08-2026</a:t>
+              <a:t>SEMANA 24-08-2026 — 30-08-2026</a:t>
             </a:r>
             <a:endParaRPr lang="en-US" sz="1000" dirty="0"/>
           </a:p>
@@ -15021,7 +13924,7 @@
       </p:sp>
       <p:sp>
         <p:nvSpPr>
-          <p:cNvPr id="102" name="Text 99"/>
+          <p:cNvPr id="74" name="Text 71"/>
           <p:cNvSpPr/>
           <p:nvPr/>
         </p:nvSpPr>
@@ -15052,7 +13955,7 @@
                 <a:ea typeface="Calibri" pitchFamily="34" charset="-122"/>
                 <a:cs typeface="Calibri" pitchFamily="34" charset="-120"/>
               </a:rPr>
-              <a:t>3 hallazgos nuevos · 0 internas · 3 del cliente · OO.CC 2 · PIPING 1 · 2 siguen abiertos</a:t>
+              <a:t>1 hallazgo nuevo · 0 internas · 1 del cliente · OO.CC 1 · 1 sigue abierto</a:t>
             </a:r>
             <a:endParaRPr lang="en-US" sz="1150" dirty="0"/>
           </a:p>
@@ -15060,7 +13963,7 @@
       </p:sp>
       <p:sp>
         <p:nvSpPr>
-          <p:cNvPr id="103" name="Text 100"/>
+          <p:cNvPr id="75" name="Text 72"/>
           <p:cNvSpPr/>
           <p:nvPr/>
         </p:nvSpPr>
@@ -15091,7 +13994,7 @@
                 <a:ea typeface="Calibri" pitchFamily="34" charset="-122"/>
                 <a:cs typeface="Calibri" pitchFamily="34" charset="-120"/>
               </a:rPr>
-              <a:t>Fuente: Data_NCR24082026.xlsx — hoja «Observaciones» · Corte 24-08-2026 · 501 registros desde 10-02-2023</a:t>
+              <a:t>Fuente: Data_NCR31082026.xlsx — hoja «Observaciones» · Corte 31-08-2026 · 502 registros desde 10-02-2023</a:t>
             </a:r>
             <a:endParaRPr lang="en-US" sz="850" dirty="0"/>
           </a:p>
@@ -15099,7 +14002,7 @@
       </p:sp>
       <p:sp>
         <p:nvSpPr>
-          <p:cNvPr id="104" name="Text 101"/>
+          <p:cNvPr id="76" name="Text 73"/>
           <p:cNvSpPr/>
           <p:nvPr/>
         </p:nvSpPr>
@@ -15138,7 +14041,7 @@
       </p:sp>
       <p:sp>
         <p:nvSpPr>
-          <p:cNvPr id="105" name="Text 102"/>
+          <p:cNvPr id="77" name="Text 74"/>
           <p:cNvSpPr/>
           <p:nvPr/>
         </p:nvSpPr>
@@ -15503,7 +14406,7 @@
                 <a:ea typeface="Cambria" pitchFamily="34" charset="-122"/>
                 <a:cs typeface="Cambria" pitchFamily="34" charset="-120"/>
               </a:rPr>
-              <a:t>78%</a:t>
+              <a:t>80,5%</a:t>
             </a:r>
             <a:endParaRPr lang="en-US" sz="3400" dirty="0"/>
           </a:p>
@@ -15581,7 +14484,7 @@
                 <a:ea typeface="Cambria" pitchFamily="34" charset="-122"/>
                 <a:cs typeface="Cambria" pitchFamily="34" charset="-120"/>
               </a:rPr>
-              <a:t>36</a:t>
+              <a:t>32</a:t>
             </a:r>
             <a:endParaRPr lang="en-US" sz="3400" dirty="0"/>
           </a:p>
@@ -15659,7 +14562,7 @@
                 <a:ea typeface="Cambria" pitchFamily="34" charset="-122"/>
                 <a:cs typeface="Cambria" pitchFamily="34" charset="-120"/>
               </a:rPr>
-              <a:t>131 d</a:t>
+              <a:t>139 d</a:t>
             </a:r>
             <a:endParaRPr lang="en-US" sz="3400" dirty="0"/>
           </a:p>
@@ -15815,7 +14718,7 @@
                 <a:ea typeface="Calibri" pitchFamily="34" charset="-122"/>
                 <a:cs typeface="Calibri" pitchFamily="34" charset="-120"/>
               </a:rPr>
-              <a:t>Corte: 24-08-2026</a:t>
+              <a:t>Corte: 31-08-2026</a:t>
             </a:r>
             <a:endParaRPr lang="en-US" sz="1100" dirty="0"/>
           </a:p>
@@ -15854,7 +14757,7 @@
                 <a:ea typeface="Calibri" pitchFamily="34" charset="-122"/>
                 <a:cs typeface="Calibri" pitchFamily="34" charset="-120"/>
               </a:rPr>
-              <a:t>Fuente: Data_NCR24082026.xlsx — hoja «Observaciones» · Corte 24-08-2026 · 501 registros desde 10-02-2023</a:t>
+              <a:t>Fuente: Data_NCR31082026.xlsx — hoja «Observaciones» · Corte 31-08-2026 · 502 registros desde 10-02-2023</a:t>
             </a:r>
             <a:endParaRPr lang="en-US" sz="850" dirty="0"/>
           </a:p>
@@ -16159,7 +15062,7 @@
                 <a:ea typeface="Calibri" pitchFamily="34" charset="-122"/>
                 <a:cs typeface="Calibri" pitchFamily="34" charset="-120"/>
               </a:rPr>
-              <a:t>128 cerrados</a:t>
+              <a:t>132 cerrados</a:t>
             </a:r>
             <a:endParaRPr lang="en-US" sz="1400" dirty="0"/>
           </a:p>
@@ -16330,7 +15233,7 @@
                 <a:ea typeface="Cambria" pitchFamily="34" charset="-122"/>
                 <a:cs typeface="Cambria" pitchFamily="34" charset="-120"/>
               </a:rPr>
-              <a:t>78%</a:t>
+              <a:t>80,5%</a:t>
             </a:r>
             <a:endParaRPr lang="en-US" sz="4000" dirty="0"/>
           </a:p>
@@ -16369,7 +15272,7 @@
                 <a:ea typeface="Calibri" pitchFamily="34" charset="-122"/>
                 <a:cs typeface="Calibri" pitchFamily="34" charset="-120"/>
               </a:rPr>
-              <a:t>128/164</a:t>
+              <a:t>132/164</a:t>
             </a:r>
             <a:endParaRPr lang="en-US" sz="1400" dirty="0"/>
           </a:p>
@@ -16447,7 +15350,7 @@
                 <a:ea typeface="Calibri" pitchFamily="34" charset="-122"/>
                 <a:cs typeface="Calibri" pitchFamily="34" charset="-120"/>
               </a:rPr>
-              <a:t>Global del módulo: 90,8%</a:t>
+              <a:t>Global del módulo: 92,2%</a:t>
             </a:r>
             <a:endParaRPr lang="en-US" sz="950" dirty="0"/>
           </a:p>
@@ -16540,7 +15443,7 @@
                 <a:ea typeface="Cambria" pitchFamily="34" charset="-122"/>
                 <a:cs typeface="Cambria" pitchFamily="34" charset="-120"/>
               </a:rPr>
-              <a:t>36</a:t>
+              <a:t>32</a:t>
             </a:r>
             <a:endParaRPr lang="en-US" sz="4000" dirty="0"/>
           </a:p>
@@ -16657,7 +15560,7 @@
                 <a:ea typeface="Calibri" pitchFamily="34" charset="-122"/>
                 <a:cs typeface="Calibri" pitchFamily="34" charset="-120"/>
               </a:rPr>
-              <a:t>1 iniciado · 25 listo para revisión · 10 stand by</a:t>
+              <a:t>1 iniciado · 21 listo para revisión · 9 stand by · 1 observada</a:t>
             </a:r>
             <a:endParaRPr lang="en-US" sz="950" dirty="0"/>
           </a:p>
@@ -16750,7 +15653,7 @@
                 <a:ea typeface="Cambria" pitchFamily="34" charset="-122"/>
                 <a:cs typeface="Cambria" pitchFamily="34" charset="-120"/>
               </a:rPr>
-              <a:t>131</a:t>
+              <a:t>139</a:t>
             </a:r>
             <a:endParaRPr lang="en-US" sz="4000" dirty="0"/>
           </a:p>
@@ -16867,7 +15770,7 @@
                 <a:ea typeface="Calibri" pitchFamily="34" charset="-122"/>
                 <a:cs typeface="Calibri" pitchFamily="34" charset="-120"/>
               </a:rPr>
-              <a:t>el más lento tomó 409 días</a:t>
+              <a:t>el más lento tomó 419 días</a:t>
             </a:r>
             <a:endParaRPr lang="en-US" sz="950" dirty="0"/>
           </a:p>
@@ -17303,7 +16206,7 @@
                 <a:ea typeface="Calibri" pitchFamily="34" charset="-122"/>
                 <a:cs typeface="Calibri" pitchFamily="34" charset="-120"/>
               </a:rPr>
-              <a:t>35 ab.</a:t>
+              <a:t>31 ab.</a:t>
             </a:r>
             <a:endParaRPr lang="en-US" sz="950" dirty="0"/>
           </a:p>
@@ -17518,7 +16421,7 @@
                 <a:ea typeface="Calibri" pitchFamily="34" charset="-122"/>
                 <a:cs typeface="Calibri" pitchFamily="34" charset="-120"/>
               </a:rPr>
-              <a:t>Fuente: Data_NCR24082026.xlsx — hoja «Observaciones» · Corte 24-08-2026 · 501 registros desde 10-02-2023</a:t>
+              <a:t>Fuente: Data_NCR31082026.xlsx — hoja «Observaciones» · Corte 31-08-2026 · 502 registros desde 10-02-2023</a:t>
             </a:r>
             <a:endParaRPr lang="en-US" sz="850" dirty="0"/>
           </a:p>
@@ -17769,7 +16672,7 @@
                 <a:ea typeface="Calibri" pitchFamily="34" charset="-122"/>
                 <a:cs typeface="Calibri" pitchFamily="34" charset="-120"/>
               </a:rPr>
-              <a:t>36 hallazgos siguen abiertos; 17 con más de 180 días. Se listan del más antiguo al más reciente.</a:t>
+              <a:t>32 hallazgos siguen abiertos; 13 con más de 180 días. Se listan del más antiguo al más reciente.</a:t>
             </a:r>
             <a:endParaRPr lang="en-US" sz="1350" dirty="0"/>
           </a:p>
@@ -18143,7 +17046,7 @@
                 <a:ea typeface="Calibri" pitchFamily="34" charset="-122"/>
                 <a:cs typeface="Calibri" pitchFamily="34" charset="-120"/>
               </a:rPr>
-              <a:t>MASA-4</a:t>
+              <a:t>MASA-21</a:t>
             </a:r>
             <a:endParaRPr lang="en-US" sz="1050" dirty="0"/>
           </a:p>
@@ -18182,7 +17085,7 @@
                 <a:ea typeface="Calibri" pitchFamily="34" charset="-122"/>
                 <a:cs typeface="Calibri" pitchFamily="34" charset="-120"/>
               </a:rPr>
-              <a:t>Observación</a:t>
+              <a:t>No Conformidad</a:t>
             </a:r>
             <a:endParaRPr lang="en-US" sz="1050" dirty="0"/>
           </a:p>
@@ -18377,7 +17280,7 @@
                 <a:ea typeface="Calibri" pitchFamily="34" charset="-122"/>
                 <a:cs typeface="Calibri" pitchFamily="34" charset="-120"/>
               </a:rPr>
-              <a:t>416</a:t>
+              <a:t>319</a:t>
             </a:r>
             <a:endParaRPr lang="en-US" sz="1050" dirty="0"/>
           </a:p>
@@ -18416,7 +17319,7 @@
                 <a:ea typeface="Calibri" pitchFamily="34" charset="-122"/>
                 <a:cs typeface="Calibri" pitchFamily="34" charset="-120"/>
               </a:rPr>
-              <a:t>Sistema de conexión desde chute 220…</a:t>
+              <a:t>Informe Técnico de Inspección – Fis…</a:t>
             </a:r>
             <a:endParaRPr lang="en-US" sz="1000" dirty="0"/>
           </a:p>
@@ -18498,7 +17401,7 @@
                 <a:ea typeface="Calibri" pitchFamily="34" charset="-122"/>
                 <a:cs typeface="Calibri" pitchFamily="34" charset="-120"/>
               </a:rPr>
-              <a:t>MASA-6</a:t>
+              <a:t>MASA-24</a:t>
             </a:r>
             <a:endParaRPr lang="en-US" sz="1050" dirty="0"/>
           </a:p>
@@ -18537,7 +17440,7 @@
                 <a:ea typeface="Calibri" pitchFamily="34" charset="-122"/>
                 <a:cs typeface="Calibri" pitchFamily="34" charset="-120"/>
               </a:rPr>
-              <a:t>Observación</a:t>
+              <a:t>No Conformidad</a:t>
             </a:r>
             <a:endParaRPr lang="en-US" sz="1050" dirty="0"/>
           </a:p>
@@ -18693,7 +17596,7 @@
                 <a:ea typeface="Calibri" pitchFamily="34" charset="-122"/>
                 <a:cs typeface="Calibri" pitchFamily="34" charset="-120"/>
               </a:rPr>
-              <a:t>Listo para revisi…</a:t>
+              <a:t>Stand By</a:t>
             </a:r>
             <a:endParaRPr lang="en-US" sz="1050" dirty="0"/>
           </a:p>
@@ -18732,7 +17635,7 @@
                 <a:ea typeface="Calibri" pitchFamily="34" charset="-122"/>
                 <a:cs typeface="Calibri" pitchFamily="34" charset="-120"/>
               </a:rPr>
-              <a:t>382</a:t>
+              <a:t>319</a:t>
             </a:r>
             <a:endParaRPr lang="en-US" sz="1050" dirty="0"/>
           </a:p>
@@ -18771,7 +17674,7 @@
                 <a:ea typeface="Calibri" pitchFamily="34" charset="-122"/>
                 <a:cs typeface="Calibri" pitchFamily="34" charset="-120"/>
               </a:rPr>
-              <a:t>Condición del grout de nivelación e…</a:t>
+              <a:t>Inspección grout de los recesos de …</a:t>
             </a:r>
             <a:endParaRPr lang="en-US" sz="1000" dirty="0"/>
           </a:p>
@@ -18833,7 +17736,7 @@
                 <a:ea typeface="Calibri" pitchFamily="34" charset="-122"/>
                 <a:cs typeface="Calibri" pitchFamily="34" charset="-120"/>
               </a:rPr>
-              <a:t>MASA-8</a:t>
+              <a:t>MASA-28</a:t>
             </a:r>
             <a:endParaRPr lang="en-US" sz="1050" dirty="0"/>
           </a:p>
@@ -19067,7 +17970,7 @@
                 <a:ea typeface="Calibri" pitchFamily="34" charset="-122"/>
                 <a:cs typeface="Calibri" pitchFamily="34" charset="-120"/>
               </a:rPr>
-              <a:t>370</a:t>
+              <a:t>298</a:t>
             </a:r>
             <a:endParaRPr lang="en-US" sz="1050" dirty="0"/>
           </a:p>
@@ -19106,7 +18009,7 @@
                 <a:ea typeface="Calibri" pitchFamily="34" charset="-122"/>
                 <a:cs typeface="Calibri" pitchFamily="34" charset="-120"/>
               </a:rPr>
-              <a:t>Montaje de estructura metálica sin …</a:t>
+              <a:t>Cámara 3700-MH-002, salida sala elé…</a:t>
             </a:r>
             <a:endParaRPr lang="en-US" sz="1000" dirty="0"/>
           </a:p>
@@ -19188,7 +18091,7 @@
                 <a:ea typeface="Calibri" pitchFamily="34" charset="-122"/>
                 <a:cs typeface="Calibri" pitchFamily="34" charset="-120"/>
               </a:rPr>
-              <a:t>MASA-10</a:t>
+              <a:t>MASA-30</a:t>
             </a:r>
             <a:endParaRPr lang="en-US" sz="1050" dirty="0"/>
           </a:p>
@@ -19422,7 +18325,7 @@
                 <a:ea typeface="Calibri" pitchFamily="34" charset="-122"/>
                 <a:cs typeface="Calibri" pitchFamily="34" charset="-120"/>
               </a:rPr>
-              <a:t>342</a:t>
+              <a:t>294</a:t>
             </a:r>
             <a:endParaRPr lang="en-US" sz="1050" dirty="0"/>
           </a:p>
@@ -19461,7 +18364,7 @@
                 <a:ea typeface="Calibri" pitchFamily="34" charset="-122"/>
                 <a:cs typeface="Calibri" pitchFamily="34" charset="-120"/>
               </a:rPr>
-              <a:t>Vigas (puntales) Montadas Fuera de …</a:t>
+              <a:t>Fundaciones faltantes para apoyo de…</a:t>
             </a:r>
             <a:endParaRPr lang="en-US" sz="1000" dirty="0"/>
           </a:p>
@@ -19523,7 +18426,7 @@
                 <a:ea typeface="Calibri" pitchFamily="34" charset="-122"/>
                 <a:cs typeface="Calibri" pitchFamily="34" charset="-120"/>
               </a:rPr>
-              <a:t>MASA-21</a:t>
+              <a:t>MASA-37</a:t>
             </a:r>
             <a:endParaRPr lang="en-US" sz="1050" dirty="0"/>
           </a:p>
@@ -19718,7 +18621,7 @@
                 <a:ea typeface="Calibri" pitchFamily="34" charset="-122"/>
                 <a:cs typeface="Calibri" pitchFamily="34" charset="-120"/>
               </a:rPr>
-              <a:t>Listo para revisi…</a:t>
+              <a:t>Observada</a:t>
             </a:r>
             <a:endParaRPr lang="en-US" sz="1050" dirty="0"/>
           </a:p>
@@ -19757,7 +18660,7 @@
                 <a:ea typeface="Calibri" pitchFamily="34" charset="-122"/>
                 <a:cs typeface="Calibri" pitchFamily="34" charset="-120"/>
               </a:rPr>
-              <a:t>312</a:t>
+              <a:t>257</a:t>
             </a:r>
             <a:endParaRPr lang="en-US" sz="1050" dirty="0"/>
           </a:p>
@@ -19796,7 +18699,7 @@
                 <a:ea typeface="Calibri" pitchFamily="34" charset="-122"/>
                 <a:cs typeface="Calibri" pitchFamily="34" charset="-120"/>
               </a:rPr>
-              <a:t>Informe Técnico de Inspección – Fis…</a:t>
+              <a:t>Tolerancia transversal en chutes de…</a:t>
             </a:r>
             <a:endParaRPr lang="en-US" sz="1000" dirty="0"/>
           </a:p>
@@ -19878,7 +18781,7 @@
                 <a:ea typeface="Calibri" pitchFamily="34" charset="-122"/>
                 <a:cs typeface="Calibri" pitchFamily="34" charset="-120"/>
               </a:rPr>
-              <a:t>MASA-24</a:t>
+              <a:t>MASA-42</a:t>
             </a:r>
             <a:endParaRPr lang="en-US" sz="1050" dirty="0"/>
           </a:p>
@@ -19917,7 +18820,7 @@
                 <a:ea typeface="Calibri" pitchFamily="34" charset="-122"/>
                 <a:cs typeface="Calibri" pitchFamily="34" charset="-120"/>
               </a:rPr>
-              <a:t>No Conformidad</a:t>
+              <a:t>Observación</a:t>
             </a:r>
             <a:endParaRPr lang="en-US" sz="1050" dirty="0"/>
           </a:p>
@@ -20112,7 +19015,7 @@
                 <a:ea typeface="Calibri" pitchFamily="34" charset="-122"/>
                 <a:cs typeface="Calibri" pitchFamily="34" charset="-120"/>
               </a:rPr>
-              <a:t>312</a:t>
+              <a:t>228</a:t>
             </a:r>
             <a:endParaRPr lang="en-US" sz="1050" dirty="0"/>
           </a:p>
@@ -20151,7 +19054,7 @@
                 <a:ea typeface="Calibri" pitchFamily="34" charset="-122"/>
                 <a:cs typeface="Calibri" pitchFamily="34" charset="-120"/>
               </a:rPr>
-              <a:t>Inspección grout de los recesos de …</a:t>
+              <a:t>Estructura de correa 2100-CV-001 mo…</a:t>
             </a:r>
             <a:endParaRPr lang="en-US" sz="1000" dirty="0"/>
           </a:p>
@@ -20213,7 +19116,7 @@
                 <a:ea typeface="Calibri" pitchFamily="34" charset="-122"/>
                 <a:cs typeface="Calibri" pitchFamily="34" charset="-120"/>
               </a:rPr>
-              <a:t>MASA-28</a:t>
+              <a:t>MASA-43</a:t>
             </a:r>
             <a:endParaRPr lang="en-US" sz="1050" dirty="0"/>
           </a:p>
@@ -20252,7 +19155,7 @@
                 <a:ea typeface="Calibri" pitchFamily="34" charset="-122"/>
                 <a:cs typeface="Calibri" pitchFamily="34" charset="-120"/>
               </a:rPr>
-              <a:t>Observación</a:t>
+              <a:t>No Conformidad</a:t>
             </a:r>
             <a:endParaRPr lang="en-US" sz="1050" dirty="0"/>
           </a:p>
@@ -20447,7 +19350,7 @@
                 <a:ea typeface="Calibri" pitchFamily="34" charset="-122"/>
                 <a:cs typeface="Calibri" pitchFamily="34" charset="-120"/>
               </a:rPr>
-              <a:t>291</a:t>
+              <a:t>228</a:t>
             </a:r>
             <a:endParaRPr lang="en-US" sz="1050" dirty="0"/>
           </a:p>
@@ -20486,7 +19389,7 @@
                 <a:ea typeface="Calibri" pitchFamily="34" charset="-122"/>
                 <a:cs typeface="Calibri" pitchFamily="34" charset="-120"/>
               </a:rPr>
-              <a:t>Cámara 3700-MH-002, salida sala elé…</a:t>
+              <a:t>Perforaciones faltantes en estructu…</a:t>
             </a:r>
             <a:endParaRPr lang="en-US" sz="1000" dirty="0"/>
           </a:p>
@@ -20568,7 +19471,7 @@
                 <a:ea typeface="Calibri" pitchFamily="34" charset="-122"/>
                 <a:cs typeface="Calibri" pitchFamily="34" charset="-120"/>
               </a:rPr>
-              <a:t>MASA-30</a:t>
+              <a:t>MASA-45</a:t>
             </a:r>
             <a:endParaRPr lang="en-US" sz="1050" dirty="0"/>
           </a:p>
@@ -20802,7 +19705,7 @@
                 <a:ea typeface="Calibri" pitchFamily="34" charset="-122"/>
                 <a:cs typeface="Calibri" pitchFamily="34" charset="-120"/>
               </a:rPr>
-              <a:t>287</a:t>
+              <a:t>228</a:t>
             </a:r>
             <a:endParaRPr lang="en-US" sz="1050" dirty="0"/>
           </a:p>
@@ -20841,7 +19744,7 @@
                 <a:ea typeface="Calibri" pitchFamily="34" charset="-122"/>
                 <a:cs typeface="Calibri" pitchFamily="34" charset="-120"/>
               </a:rPr>
-              <a:t>Fundaciones faltantes para apoyo de…</a:t>
+              <a:t>(i) Cable de comunicación dañado - …</a:t>
             </a:r>
             <a:endParaRPr lang="en-US" sz="1000" dirty="0"/>
           </a:p>
@@ -20903,7 +19806,7 @@
                 <a:ea typeface="Calibri" pitchFamily="34" charset="-122"/>
                 <a:cs typeface="Calibri" pitchFamily="34" charset="-120"/>
               </a:rPr>
-              <a:t>MASA-37</a:t>
+              <a:t>MASA-48</a:t>
             </a:r>
             <a:endParaRPr lang="en-US" sz="1050" dirty="0"/>
           </a:p>
@@ -21098,7 +20001,7 @@
                 <a:ea typeface="Calibri" pitchFamily="34" charset="-122"/>
                 <a:cs typeface="Calibri" pitchFamily="34" charset="-120"/>
               </a:rPr>
-              <a:t>Listo para revisi…</a:t>
+              <a:t>Stand By</a:t>
             </a:r>
             <a:endParaRPr lang="en-US" sz="1050" dirty="0"/>
           </a:p>
@@ -21137,7 +20040,7 @@
                 <a:ea typeface="Calibri" pitchFamily="34" charset="-122"/>
                 <a:cs typeface="Calibri" pitchFamily="34" charset="-120"/>
               </a:rPr>
-              <a:t>250</a:t>
+              <a:t>228</a:t>
             </a:r>
             <a:endParaRPr lang="en-US" sz="1050" dirty="0"/>
           </a:p>
@@ -21176,7 +20079,7 @@
                 <a:ea typeface="Calibri" pitchFamily="34" charset="-122"/>
                 <a:cs typeface="Calibri" pitchFamily="34" charset="-120"/>
               </a:rPr>
-              <a:t>Tolerancia transversal en chutes de…</a:t>
+              <a:t>FISURACIÓN DE RADIER CELDAS COLUMNA…</a:t>
             </a:r>
             <a:endParaRPr lang="en-US" sz="1000" dirty="0"/>
           </a:p>
@@ -21238,7 +20141,7 @@
                 <a:ea typeface="Calibri" pitchFamily="34" charset="-122"/>
                 <a:cs typeface="Calibri" pitchFamily="34" charset="-120"/>
               </a:rPr>
-              <a:t>Se listan los 9 más antiguos de 36 abiertos; el detalle completo está en el panel.</a:t>
+              <a:t>Se listan los 9 más antiguos de 32 abiertos; el detalle completo está en el panel.</a:t>
             </a:r>
             <a:endParaRPr lang="en-US" sz="950" dirty="0"/>
           </a:p>
@@ -21299,7 +20202,7 @@
                 <a:ea typeface="Calibri" pitchFamily="34" charset="-122"/>
                 <a:cs typeface="Calibri" pitchFamily="34" charset="-120"/>
               </a:rPr>
-              <a:t>SEMANA 17-08-2026 — 23-08-2026</a:t>
+              <a:t>SEMANA 24-08-2026 — 30-08-2026</a:t>
             </a:r>
             <a:endParaRPr lang="en-US" sz="1000" dirty="0"/>
           </a:p>
@@ -21377,7 +20280,7 @@
                 <a:ea typeface="Calibri" pitchFamily="34" charset="-122"/>
                 <a:cs typeface="Calibri" pitchFamily="34" charset="-120"/>
               </a:rPr>
-              <a:t>Fuente: Data_NCR24082026.xlsx — hoja «Observaciones» · Corte 24-08-2026 · 501 registros desde 10-02-2023</a:t>
+              <a:t>Fuente: Data_NCR31082026.xlsx — hoja «Observaciones» · Corte 31-08-2026 · 502 registros desde 10-02-2023</a:t>
             </a:r>
             <a:endParaRPr lang="en-US" sz="850" dirty="0"/>
           </a:p>
@@ -21682,7 +20585,7 @@
                 <a:ea typeface="Cambria" pitchFamily="34" charset="-122"/>
                 <a:cs typeface="Cambria" pitchFamily="34" charset="-120"/>
               </a:rPr>
-              <a:t>90,8%</a:t>
+              <a:t>92,2%</a:t>
             </a:r>
             <a:endParaRPr lang="en-US" sz="4000" dirty="0"/>
           </a:p>
@@ -21721,7 +20624,7 @@
                 <a:ea typeface="Calibri" pitchFamily="34" charset="-122"/>
                 <a:cs typeface="Calibri" pitchFamily="34" charset="-120"/>
               </a:rPr>
-              <a:t>455/501</a:t>
+              <a:t>463/502</a:t>
             </a:r>
             <a:endParaRPr lang="en-US" sz="1400" dirty="0"/>
           </a:p>
@@ -21799,7 +20702,7 @@
                 <a:ea typeface="Calibri" pitchFamily="34" charset="-122"/>
                 <a:cs typeface="Calibri" pitchFamily="34" charset="-120"/>
               </a:rPr>
-              <a:t>46 abiertos · 17 con más de 180 días</a:t>
+              <a:t>39 abiertos · 13 con más de 180 días</a:t>
             </a:r>
             <a:endParaRPr lang="en-US" sz="950" dirty="0"/>
           </a:p>
@@ -21892,7 +20795,7 @@
                 <a:ea typeface="Cambria" pitchFamily="34" charset="-122"/>
                 <a:cs typeface="Cambria" pitchFamily="34" charset="-120"/>
               </a:rPr>
-              <a:t>46</a:t>
+              <a:t>39</a:t>
             </a:r>
             <a:endParaRPr lang="en-US" sz="4000" dirty="0"/>
           </a:p>
@@ -21931,7 +20834,7 @@
                 <a:ea typeface="Calibri" pitchFamily="34" charset="-122"/>
                 <a:cs typeface="Calibri" pitchFamily="34" charset="-120"/>
               </a:rPr>
-              <a:t>de 501 levantados</a:t>
+              <a:t>de 502 levantados</a:t>
             </a:r>
             <a:endParaRPr lang="en-US" sz="1400" dirty="0"/>
           </a:p>
@@ -22009,7 +20912,7 @@
                 <a:ea typeface="Calibri" pitchFamily="34" charset="-122"/>
                 <a:cs typeface="Calibri" pitchFamily="34" charset="-120"/>
               </a:rPr>
-              <a:t>6 iniciado · 1 no aceptado · 29 listo para revisión · 10 stand by</a:t>
+              <a:t>6 iniciado · 23 listo para revisión · 9 stand by · 1 observada</a:t>
             </a:r>
             <a:endParaRPr lang="en-US" sz="950" dirty="0"/>
           </a:p>
@@ -22141,7 +21044,7 @@
                 <a:ea typeface="Calibri" pitchFamily="34" charset="-122"/>
                 <a:cs typeface="Calibri" pitchFamily="34" charset="-120"/>
               </a:rPr>
-              <a:t>159/492 clasificados</a:t>
+              <a:t>159/493 clasificados</a:t>
             </a:r>
             <a:endParaRPr lang="en-US" sz="1400" dirty="0"/>
           </a:p>
@@ -22351,7 +21254,7 @@
                 <a:ea typeface="Calibri" pitchFamily="34" charset="-122"/>
                 <a:cs typeface="Calibri" pitchFamily="34" charset="-120"/>
               </a:rPr>
-              <a:t>251 de 501 con costo</a:t>
+              <a:t>251 de 502 con costo</a:t>
             </a:r>
             <a:endParaRPr lang="en-US" sz="1400" dirty="0"/>
           </a:p>
@@ -22429,7 +21332,7 @@
                 <a:ea typeface="Calibri" pitchFamily="34" charset="-122"/>
                 <a:cs typeface="Calibri" pitchFamily="34" charset="-120"/>
               </a:rPr>
-              <a:t>250 hallazgos no declaran costo: la cifra es un piso</a:t>
+              <a:t>251 hallazgos no declaran costo: la cifra es un piso</a:t>
             </a:r>
             <a:endParaRPr lang="en-US" sz="950" dirty="0"/>
           </a:p>
@@ -22569,7 +21472,7 @@
                 <a:ea typeface="Calibri" pitchFamily="34" charset="-122"/>
                 <a:cs typeface="Calibri" pitchFamily="34" charset="-120"/>
               </a:rPr>
-              <a:t>36 de los 46 hallazgos abiertos (78,3%), y es uno de los frentes donde el cliente levanta más de lo que detecta Besalco (71 del cliente contra 53 internas).</a:t>
+              <a:t>32 de los 39 hallazgos abiertos (82,1%), y es uno de los frentes donde el cliente levanta más de lo que detecta Besalco (71 del cliente contra 53 internas).</a:t>
             </a:r>
             <a:endParaRPr lang="en-US" sz="1250" dirty="0"/>
           </a:p>
@@ -22631,7 +21534,7 @@
                 <a:ea typeface="Calibri" pitchFamily="34" charset="-122"/>
                 <a:cs typeface="Calibri" pitchFamily="34" charset="-120"/>
               </a:rPr>
-              <a:t>La semana trajo 3 hallazgos nuevos, ninguno de autodetección.  </a:t>
+              <a:t>La semana trajo 1 hallazgo nuevo, ninguno de autodetección.  </a:t>
             </a:r>
             <a:pPr indent="0" marL="0">
               <a:lnSpc>
@@ -22648,7 +21551,7 @@
                 <a:ea typeface="Calibri" pitchFamily="34" charset="-122"/>
                 <a:cs typeface="Calibri" pitchFamily="34" charset="-120"/>
               </a:rPr>
-              <a:t>17-08-2026 al 23-08-2026: 3 del cliente en OO.CC (2) y PIPING (1). 2 siguen abiertos; la semana anterior entraron 3.</a:t>
+              <a:t>24-08-2026 al 30-08-2026: 1 del cliente en OO.CC (1). Todos siguen abiertos; la semana anterior entraron 3.</a:t>
             </a:r>
             <a:endParaRPr lang="en-US" sz="1250" dirty="0"/>
           </a:p>
@@ -22710,7 +21613,7 @@
                 <a:ea typeface="Calibri" pitchFamily="34" charset="-122"/>
                 <a:cs typeface="Calibri" pitchFamily="34" charset="-120"/>
               </a:rPr>
-              <a:t>44 de los 46 abiertos están fuera del plazo de respuesta.  </a:t>
+              <a:t>38 de los 39 abiertos están fuera del plazo de respuesta.  </a:t>
             </a:r>
             <a:pPr indent="0" marL="0">
               <a:lnSpc>
@@ -22727,7 +21630,7 @@
                 <a:ea typeface="Calibri" pitchFamily="34" charset="-122"/>
                 <a:cs typeface="Calibri" pitchFamily="34" charset="-120"/>
               </a:rPr>
-              <a:t>El plazo es de 10 días desde que se emite la NC. De los atrasados, 17 llevan más de 180 días abiertos y 3 más de un año: no es atraso de días, es deuda vieja.</a:t>
+              <a:t>El plazo es de 10 días desde que se emite la NC. De los atrasados, 13 llevan más de 180 días abiertos y 0 más de un año: no es atraso de días, es deuda vieja.</a:t>
             </a:r>
             <a:endParaRPr lang="en-US" sz="1250" dirty="0"/>
           </a:p>
@@ -22766,7 +21669,7 @@
                 <a:ea typeface="Calibri" pitchFamily="34" charset="-122"/>
                 <a:cs typeface="Calibri" pitchFamily="34" charset="-120"/>
               </a:rPr>
-              <a:t>Fuente: Data_NCR24082026.xlsx — hoja «Observaciones» · Corte 24-08-2026 · 501 registros desde 10-02-2023</a:t>
+              <a:t>Fuente: Data_NCR31082026.xlsx — hoja «Observaciones» · Corte 31-08-2026 · 502 registros desde 10-02-2023</a:t>
             </a:r>
             <a:endParaRPr lang="en-US" sz="850" dirty="0"/>
           </a:p>
@@ -24041,7 +22944,7 @@
                 <a:ea typeface="Calibri" pitchFamily="34" charset="-122"/>
                 <a:cs typeface="Calibri" pitchFamily="34" charset="-120"/>
               </a:rPr>
-              <a:t>247</a:t>
+              <a:t>248</a:t>
             </a:r>
             <a:endParaRPr lang="en-US" sz="1300" dirty="0"/>
           </a:p>
@@ -24080,7 +22983,7 @@
                 <a:ea typeface="Calibri" pitchFamily="34" charset="-122"/>
                 <a:cs typeface="Calibri" pitchFamily="34" charset="-120"/>
               </a:rPr>
-              <a:t>238</a:t>
+              <a:t>242</a:t>
             </a:r>
             <a:endParaRPr lang="en-US" sz="1300" dirty="0"/>
           </a:p>
@@ -24119,7 +23022,7 @@
                 <a:ea typeface="Calibri" pitchFamily="34" charset="-122"/>
                 <a:cs typeface="Calibri" pitchFamily="34" charset="-120"/>
               </a:rPr>
-              <a:t>9</a:t>
+              <a:t>6</a:t>
             </a:r>
             <a:endParaRPr lang="en-US" sz="1300" dirty="0"/>
           </a:p>
@@ -24158,7 +23061,7 @@
                 <a:ea typeface="Calibri" pitchFamily="34" charset="-122"/>
                 <a:cs typeface="Calibri" pitchFamily="34" charset="-120"/>
               </a:rPr>
-              <a:t>96,4%</a:t>
+              <a:t>97,6%</a:t>
             </a:r>
             <a:endParaRPr lang="en-US" sz="1300" dirty="0"/>
           </a:p>
@@ -24236,7 +23139,7 @@
                 <a:ea typeface="Calibri" pitchFamily="34" charset="-122"/>
                 <a:cs typeface="Calibri" pitchFamily="34" charset="-120"/>
               </a:rPr>
-              <a:t>195</a:t>
+              <a:t>196</a:t>
             </a:r>
             <a:endParaRPr lang="en-US" sz="1300" dirty="0"/>
           </a:p>
@@ -24554,7 +23457,7 @@
                 <a:ea typeface="Calibri" pitchFamily="34" charset="-122"/>
                 <a:cs typeface="Calibri" pitchFamily="34" charset="-120"/>
               </a:rPr>
-              <a:t>128</a:t>
+              <a:t>132</a:t>
             </a:r>
             <a:endParaRPr lang="en-US" sz="1300" dirty="0"/>
           </a:p>
@@ -24593,7 +23496,7 @@
                 <a:ea typeface="Calibri" pitchFamily="34" charset="-122"/>
                 <a:cs typeface="Calibri" pitchFamily="34" charset="-120"/>
               </a:rPr>
-              <a:t>36</a:t>
+              <a:t>32</a:t>
             </a:r>
             <a:endParaRPr lang="en-US" sz="1300" dirty="0"/>
           </a:p>
@@ -24632,7 +23535,7 @@
                 <a:ea typeface="Calibri" pitchFamily="34" charset="-122"/>
                 <a:cs typeface="Calibri" pitchFamily="34" charset="-120"/>
               </a:rPr>
-              <a:t>78%</a:t>
+              <a:t>80,5%</a:t>
             </a:r>
             <a:endParaRPr lang="en-US" sz="1300" dirty="0"/>
           </a:p>
@@ -25483,7 +24386,7 @@
                 <a:ea typeface="Calibri" pitchFamily="34" charset="-122"/>
                 <a:cs typeface="Calibri" pitchFamily="34" charset="-120"/>
               </a:rPr>
-              <a:t>493</a:t>
+              <a:t>494</a:t>
             </a:r>
             <a:endParaRPr lang="en-US" sz="1300" dirty="0"/>
           </a:p>
@@ -25522,7 +24425,7 @@
                 <a:ea typeface="Calibri" pitchFamily="34" charset="-122"/>
                 <a:cs typeface="Calibri" pitchFamily="34" charset="-120"/>
               </a:rPr>
-              <a:t>447</a:t>
+              <a:t>455</a:t>
             </a:r>
             <a:endParaRPr lang="en-US" sz="1300" dirty="0"/>
           </a:p>
@@ -25561,7 +24464,7 @@
                 <a:ea typeface="Calibri" pitchFamily="34" charset="-122"/>
                 <a:cs typeface="Calibri" pitchFamily="34" charset="-120"/>
               </a:rPr>
-              <a:t>46</a:t>
+              <a:t>39</a:t>
             </a:r>
             <a:endParaRPr lang="en-US" sz="1300" dirty="0"/>
           </a:p>
@@ -25600,7 +24503,7 @@
                 <a:ea typeface="Calibri" pitchFamily="34" charset="-122"/>
                 <a:cs typeface="Calibri" pitchFamily="34" charset="-120"/>
               </a:rPr>
-              <a:t>90,7%</a:t>
+              <a:t>92,1%</a:t>
             </a:r>
             <a:endParaRPr lang="en-US" sz="1300" dirty="0"/>
           </a:p>
@@ -25678,7 +24581,7 @@
                 <a:ea typeface="Calibri" pitchFamily="34" charset="-122"/>
                 <a:cs typeface="Calibri" pitchFamily="34" charset="-120"/>
               </a:rPr>
-              <a:t>285</a:t>
+              <a:t>286</a:t>
             </a:r>
             <a:endParaRPr lang="en-US" sz="1300" dirty="0"/>
           </a:p>
@@ -25795,7 +24698,7 @@
                 <a:ea typeface="Calibri" pitchFamily="34" charset="-122"/>
                 <a:cs typeface="Calibri" pitchFamily="34" charset="-120"/>
               </a:rPr>
-              <a:t>Mediana de cierre global 30 días · el hallazgo más lento tomó 409 días · 79 hallazgos sin especialidad declarada.</a:t>
+              <a:t>Mediana de cierre global 30 días · el hallazgo más lento tomó 419 días · 79 hallazgos sin especialidad declarada.</a:t>
             </a:r>
             <a:endParaRPr lang="en-US" sz="950" dirty="0"/>
           </a:p>
@@ -25834,7 +24737,7 @@
                 <a:ea typeface="Calibri" pitchFamily="34" charset="-122"/>
                 <a:cs typeface="Calibri" pitchFamily="34" charset="-120"/>
               </a:rPr>
-              <a:t>Fuente: Data_NCR24082026.xlsx — hoja «Observaciones» · Corte 24-08-2026 · 501 registros desde 10-02-2023</a:t>
+              <a:t>Fuente: Data_NCR31082026.xlsx — hoja «Observaciones» · Corte 31-08-2026 · 502 registros desde 10-02-2023</a:t>
             </a:r>
             <a:endParaRPr lang="en-US" sz="850" dirty="0"/>
           </a:p>
@@ -26085,7 +24988,7 @@
                 <a:ea typeface="Calibri" pitchFamily="34" charset="-122"/>
                 <a:cs typeface="Calibri" pitchFamily="34" charset="-120"/>
               </a:rPr>
-              <a:t>Entre el 17-08-2026 y el 23-08-2026 se levantaron 3 hallazgos: 0 internas · 3 del cliente. 2 siguen abiertos.</a:t>
+              <a:t>Entre el 24-08-2026 y el 30-08-2026 se levantó 1 hallazgo: 0 internas · 1 del cliente. Sigue abierto.</a:t>
             </a:r>
             <a:endParaRPr lang="en-US" sz="1350" dirty="0"/>
           </a:p>
@@ -26240,7 +25143,7 @@
                 <a:ea typeface="Calibri" pitchFamily="34" charset="-122"/>
                 <a:cs typeface="Calibri" pitchFamily="34" charset="-120"/>
               </a:rPr>
-              <a:t>OO.CC 2  ·  PIPING 1</a:t>
+              <a:t>OO.CC 1</a:t>
             </a:r>
             <a:endParaRPr lang="en-US" sz="1100" dirty="0"/>
           </a:p>
@@ -26318,7 +25221,7 @@
                 <a:ea typeface="Calibri" pitchFamily="34" charset="-122"/>
                 <a:cs typeface="Calibri" pitchFamily="34" charset="-120"/>
               </a:rPr>
-              <a:t>Talabre 3</a:t>
+              <a:t>Talabre 1</a:t>
             </a:r>
             <a:endParaRPr lang="en-US" sz="1100" dirty="0"/>
           </a:p>
@@ -26396,7 +25299,7 @@
                 <a:ea typeface="Calibri" pitchFamily="34" charset="-122"/>
                 <a:cs typeface="Calibri" pitchFamily="34" charset="-120"/>
               </a:rPr>
-              <a:t>Externa · Cliente 3</a:t>
+              <a:t>Externa · Cliente 1</a:t>
             </a:r>
             <a:endParaRPr lang="en-US" sz="1100" dirty="0"/>
           </a:p>
@@ -26474,7 +25377,7 @@
                 <a:ea typeface="Calibri" pitchFamily="34" charset="-122"/>
                 <a:cs typeface="Calibri" pitchFamily="34" charset="-120"/>
               </a:rPr>
-              <a:t>No Conformidad 2  ·  Producto No Conforme 1</a:t>
+              <a:t>Producto No Conforme 1</a:t>
             </a:r>
             <a:endParaRPr lang="en-US" sz="1100" dirty="0"/>
           </a:p>
@@ -26926,7 +25829,7 @@
                 <a:ea typeface="Calibri" pitchFamily="34" charset="-122"/>
                 <a:cs typeface="Calibri" pitchFamily="34" charset="-120"/>
               </a:rPr>
-              <a:t>18-08-2026</a:t>
+              <a:t>24-08-2026</a:t>
             </a:r>
             <a:endParaRPr lang="en-US" sz="1050" dirty="0"/>
           </a:p>
@@ -27004,7 +25907,7 @@
                 <a:ea typeface="Calibri" pitchFamily="34" charset="-122"/>
                 <a:cs typeface="Calibri" pitchFamily="34" charset="-120"/>
               </a:rPr>
-              <a:t>246 · PNC N°189</a:t>
+              <a:t>249 · PNC N°192</a:t>
             </a:r>
             <a:endParaRPr lang="en-US" sz="1050" dirty="0"/>
           </a:p>
@@ -27160,7 +26063,7 @@
                 <a:ea typeface="Calibri" pitchFamily="34" charset="-122"/>
                 <a:cs typeface="Calibri" pitchFamily="34" charset="-120"/>
               </a:rPr>
-              <a:t>Luis Ogalde H.</a:t>
+              <a:t>Mauricio Rocha A.</a:t>
             </a:r>
             <a:endParaRPr lang="en-US" sz="1050" dirty="0"/>
           </a:p>
@@ -27193,13 +26096,13 @@
             <a:r>
               <a:rPr lang="en-US" sz="1050" dirty="0">
                 <a:solidFill>
-                  <a:srgbClr val="1F7A44"/>
-                </a:solidFill>
-                <a:latin typeface="Calibri" pitchFamily="34" charset="0"/>
-                <a:ea typeface="Calibri" pitchFamily="34" charset="-122"/>
-                <a:cs typeface="Calibri" pitchFamily="34" charset="-120"/>
-              </a:rPr>
-              <a:t>Cerrado</a:t>
+                  <a:srgbClr val="C0392B"/>
+                </a:solidFill>
+                <a:latin typeface="Calibri" pitchFamily="34" charset="0"/>
+                <a:ea typeface="Calibri" pitchFamily="34" charset="-122"/>
+                <a:cs typeface="Calibri" pitchFamily="34" charset="-120"/>
+              </a:rPr>
+              <a:t>Iniciado</a:t>
             </a:r>
             <a:endParaRPr lang="en-US" sz="1050" dirty="0"/>
           </a:p>
@@ -27238,7 +26141,7 @@
                 <a:ea typeface="Calibri" pitchFamily="34" charset="-122"/>
                 <a:cs typeface="Calibri" pitchFamily="34" charset="-120"/>
               </a:rPr>
-              <a:t>Daño estructural en la pare…</a:t>
+              <a:t>Se evidencia daño físico en…</a:t>
             </a:r>
             <a:endParaRPr lang="en-US" sz="1000" dirty="0"/>
           </a:p>
@@ -27269,775 +26172,7 @@
       </p:sp>
       <p:sp>
         <p:nvSpPr>
-          <p:cNvPr id="38" name="Shape 34"/>
-          <p:cNvSpPr/>
-          <p:nvPr/>
-        </p:nvSpPr>
-        <p:spPr>
-          <a:xfrm>
-            <a:off x="457200" y="4709160"/>
-            <a:ext cx="11292840" cy="329184"/>
-          </a:xfrm>
-          <a:prstGeom prst="rect">
-            <a:avLst/>
-          </a:prstGeom>
-          <a:solidFill>
-            <a:srgbClr val="FFFFFF"/>
-          </a:solidFill>
-          <a:ln/>
-        </p:spPr>
-      </p:sp>
-      <p:sp>
-        <p:nvSpPr>
-          <p:cNvPr id="39" name="Text 35"/>
-          <p:cNvSpPr/>
-          <p:nvPr/>
-        </p:nvSpPr>
-        <p:spPr>
-          <a:xfrm>
-            <a:off x="502920" y="4754880"/>
-            <a:ext cx="822960" cy="237744"/>
-          </a:xfrm>
-          <a:prstGeom prst="rect">
-            <a:avLst/>
-          </a:prstGeom>
-          <a:noFill/>
-          <a:ln/>
-        </p:spPr>
-        <p:txBody>
-          <a:bodyPr wrap="square" lIns="0" tIns="0" rIns="0" bIns="0" rtlCol="0" anchor="ctr"/>
-          <a:lstStyle/>
-          <a:p>
-            <a:pPr algn="l" indent="0" marL="0">
-              <a:buNone/>
-            </a:pPr>
-            <a:r>
-              <a:rPr lang="en-US" sz="1050" dirty="0">
-                <a:solidFill>
-                  <a:srgbClr val="1A2433"/>
-                </a:solidFill>
-                <a:latin typeface="Calibri" pitchFamily="34" charset="0"/>
-                <a:ea typeface="Calibri" pitchFamily="34" charset="-122"/>
-                <a:cs typeface="Calibri" pitchFamily="34" charset="-120"/>
-              </a:rPr>
-              <a:t>19-08-2026</a:t>
-            </a:r>
-            <a:endParaRPr lang="en-US" sz="1050" dirty="0"/>
-          </a:p>
-        </p:txBody>
-      </p:sp>
-      <p:sp>
-        <p:nvSpPr>
-          <p:cNvPr id="40" name="Text 36"/>
-          <p:cNvSpPr/>
-          <p:nvPr/>
-        </p:nvSpPr>
-        <p:spPr>
-          <a:xfrm>
-            <a:off x="1371600" y="4754880"/>
-            <a:ext cx="1051560" cy="237744"/>
-          </a:xfrm>
-          <a:prstGeom prst="rect">
-            <a:avLst/>
-          </a:prstGeom>
-          <a:noFill/>
-          <a:ln/>
-        </p:spPr>
-        <p:txBody>
-          <a:bodyPr wrap="square" lIns="0" tIns="0" rIns="0" bIns="0" rtlCol="0" anchor="ctr"/>
-          <a:lstStyle/>
-          <a:p>
-            <a:pPr algn="l" indent="0" marL="0">
-              <a:buNone/>
-            </a:pPr>
-            <a:r>
-              <a:rPr lang="en-US" sz="1050" dirty="0">
-                <a:solidFill>
-                  <a:srgbClr val="1A2433"/>
-                </a:solidFill>
-                <a:latin typeface="Calibri" pitchFamily="34" charset="0"/>
-                <a:ea typeface="Calibri" pitchFamily="34" charset="-122"/>
-                <a:cs typeface="Calibri" pitchFamily="34" charset="-120"/>
-              </a:rPr>
-              <a:t>Talabre</a:t>
-            </a:r>
-            <a:endParaRPr lang="en-US" sz="1050" dirty="0"/>
-          </a:p>
-        </p:txBody>
-      </p:sp>
-      <p:sp>
-        <p:nvSpPr>
-          <p:cNvPr id="41" name="Text 37"/>
-          <p:cNvSpPr/>
-          <p:nvPr/>
-        </p:nvSpPr>
-        <p:spPr>
-          <a:xfrm>
-            <a:off x="2468880" y="4754880"/>
-            <a:ext cx="1051560" cy="237744"/>
-          </a:xfrm>
-          <a:prstGeom prst="rect">
-            <a:avLst/>
-          </a:prstGeom>
-          <a:noFill/>
-          <a:ln/>
-        </p:spPr>
-        <p:txBody>
-          <a:bodyPr wrap="square" lIns="0" tIns="0" rIns="0" bIns="0" rtlCol="0" anchor="ctr"/>
-          <a:lstStyle/>
-          <a:p>
-            <a:pPr algn="l" indent="0" marL="0">
-              <a:buNone/>
-            </a:pPr>
-            <a:r>
-              <a:rPr lang="en-US" sz="1050" dirty="0">
-                <a:solidFill>
-                  <a:srgbClr val="1A2433"/>
-                </a:solidFill>
-                <a:latin typeface="Calibri" pitchFamily="34" charset="0"/>
-                <a:ea typeface="Calibri" pitchFamily="34" charset="-122"/>
-                <a:cs typeface="Calibri" pitchFamily="34" charset="-120"/>
-              </a:rPr>
-              <a:t>247 · RNC N°458</a:t>
-            </a:r>
-            <a:endParaRPr lang="en-US" sz="1050" dirty="0"/>
-          </a:p>
-        </p:txBody>
-      </p:sp>
-      <p:sp>
-        <p:nvSpPr>
-          <p:cNvPr id="42" name="Text 38"/>
-          <p:cNvSpPr/>
-          <p:nvPr/>
-        </p:nvSpPr>
-        <p:spPr>
-          <a:xfrm>
-            <a:off x="3566160" y="4754880"/>
-            <a:ext cx="1371600" cy="237744"/>
-          </a:xfrm>
-          <a:prstGeom prst="rect">
-            <a:avLst/>
-          </a:prstGeom>
-          <a:noFill/>
-          <a:ln/>
-        </p:spPr>
-        <p:txBody>
-          <a:bodyPr wrap="square" lIns="0" tIns="0" rIns="0" bIns="0" rtlCol="0" anchor="ctr"/>
-          <a:lstStyle/>
-          <a:p>
-            <a:pPr algn="l" indent="0" marL="0">
-              <a:buNone/>
-            </a:pPr>
-            <a:r>
-              <a:rPr lang="en-US" sz="1050" dirty="0">
-                <a:solidFill>
-                  <a:srgbClr val="1A2433"/>
-                </a:solidFill>
-                <a:latin typeface="Calibri" pitchFamily="34" charset="0"/>
-                <a:ea typeface="Calibri" pitchFamily="34" charset="-122"/>
-                <a:cs typeface="Calibri" pitchFamily="34" charset="-120"/>
-              </a:rPr>
-              <a:t>No Conformidad</a:t>
-            </a:r>
-            <a:endParaRPr lang="en-US" sz="1050" dirty="0"/>
-          </a:p>
-        </p:txBody>
-      </p:sp>
-      <p:sp>
-        <p:nvSpPr>
-          <p:cNvPr id="43" name="Text 39"/>
-          <p:cNvSpPr/>
-          <p:nvPr/>
-        </p:nvSpPr>
-        <p:spPr>
-          <a:xfrm>
-            <a:off x="4983480" y="4754880"/>
-            <a:ext cx="1417320" cy="237744"/>
-          </a:xfrm>
-          <a:prstGeom prst="rect">
-            <a:avLst/>
-          </a:prstGeom>
-          <a:noFill/>
-          <a:ln/>
-        </p:spPr>
-        <p:txBody>
-          <a:bodyPr wrap="square" lIns="0" tIns="0" rIns="0" bIns="0" rtlCol="0" anchor="ctr"/>
-          <a:lstStyle/>
-          <a:p>
-            <a:pPr algn="l" indent="0" marL="0">
-              <a:buNone/>
-            </a:pPr>
-            <a:r>
-              <a:rPr lang="en-US" sz="1050" b="1" dirty="0">
-                <a:solidFill>
-                  <a:srgbClr val="C87A32"/>
-                </a:solidFill>
-                <a:latin typeface="Calibri" pitchFamily="34" charset="0"/>
-                <a:ea typeface="Calibri" pitchFamily="34" charset="-122"/>
-                <a:cs typeface="Calibri" pitchFamily="34" charset="-120"/>
-              </a:rPr>
-              <a:t>Externa · Cliente</a:t>
-            </a:r>
-            <a:endParaRPr lang="en-US" sz="1050" dirty="0"/>
-          </a:p>
-        </p:txBody>
-      </p:sp>
-      <p:sp>
-        <p:nvSpPr>
-          <p:cNvPr id="44" name="Text 40"/>
-          <p:cNvSpPr/>
-          <p:nvPr/>
-        </p:nvSpPr>
-        <p:spPr>
-          <a:xfrm>
-            <a:off x="6446520" y="4754880"/>
-            <a:ext cx="1097280" cy="237744"/>
-          </a:xfrm>
-          <a:prstGeom prst="rect">
-            <a:avLst/>
-          </a:prstGeom>
-          <a:noFill/>
-          <a:ln/>
-        </p:spPr>
-        <p:txBody>
-          <a:bodyPr wrap="square" lIns="0" tIns="0" rIns="0" bIns="0" rtlCol="0" anchor="ctr"/>
-          <a:lstStyle/>
-          <a:p>
-            <a:pPr algn="l" indent="0" marL="0">
-              <a:buNone/>
-            </a:pPr>
-            <a:r>
-              <a:rPr lang="en-US" sz="1050" dirty="0">
-                <a:solidFill>
-                  <a:srgbClr val="1A2433"/>
-                </a:solidFill>
-                <a:latin typeface="Calibri" pitchFamily="34" charset="0"/>
-                <a:ea typeface="Calibri" pitchFamily="34" charset="-122"/>
-                <a:cs typeface="Calibri" pitchFamily="34" charset="-120"/>
-              </a:rPr>
-              <a:t>OO.CC</a:t>
-            </a:r>
-            <a:endParaRPr lang="en-US" sz="1050" dirty="0"/>
-          </a:p>
-        </p:txBody>
-      </p:sp>
-      <p:sp>
-        <p:nvSpPr>
-          <p:cNvPr id="45" name="Text 41"/>
-          <p:cNvSpPr/>
-          <p:nvPr/>
-        </p:nvSpPr>
-        <p:spPr>
-          <a:xfrm>
-            <a:off x="7589520" y="4754880"/>
-            <a:ext cx="1371600" cy="237744"/>
-          </a:xfrm>
-          <a:prstGeom prst="rect">
-            <a:avLst/>
-          </a:prstGeom>
-          <a:noFill/>
-          <a:ln/>
-        </p:spPr>
-        <p:txBody>
-          <a:bodyPr wrap="square" lIns="0" tIns="0" rIns="0" bIns="0" rtlCol="0" anchor="ctr"/>
-          <a:lstStyle/>
-          <a:p>
-            <a:pPr algn="l" indent="0" marL="0">
-              <a:buNone/>
-            </a:pPr>
-            <a:r>
-              <a:rPr lang="en-US" sz="1050" dirty="0">
-                <a:solidFill>
-                  <a:srgbClr val="1A2433"/>
-                </a:solidFill>
-                <a:latin typeface="Calibri" pitchFamily="34" charset="0"/>
-                <a:ea typeface="Calibri" pitchFamily="34" charset="-122"/>
-                <a:cs typeface="Calibri" pitchFamily="34" charset="-120"/>
-              </a:rPr>
-              <a:t>Luis Ogalde H.</a:t>
-            </a:r>
-            <a:endParaRPr lang="en-US" sz="1050" dirty="0"/>
-          </a:p>
-        </p:txBody>
-      </p:sp>
-      <p:sp>
-        <p:nvSpPr>
-          <p:cNvPr id="46" name="Text 42"/>
-          <p:cNvSpPr/>
-          <p:nvPr/>
-        </p:nvSpPr>
-        <p:spPr>
-          <a:xfrm>
-            <a:off x="9006840" y="4754880"/>
-            <a:ext cx="868680" cy="237744"/>
-          </a:xfrm>
-          <a:prstGeom prst="rect">
-            <a:avLst/>
-          </a:prstGeom>
-          <a:noFill/>
-          <a:ln/>
-        </p:spPr>
-        <p:txBody>
-          <a:bodyPr wrap="square" lIns="0" tIns="0" rIns="0" bIns="0" rtlCol="0" anchor="ctr"/>
-          <a:lstStyle/>
-          <a:p>
-            <a:pPr algn="l" indent="0" marL="0">
-              <a:buNone/>
-            </a:pPr>
-            <a:r>
-              <a:rPr lang="en-US" sz="1050" dirty="0">
-                <a:solidFill>
-                  <a:srgbClr val="C0392B"/>
-                </a:solidFill>
-                <a:latin typeface="Calibri" pitchFamily="34" charset="0"/>
-                <a:ea typeface="Calibri" pitchFamily="34" charset="-122"/>
-                <a:cs typeface="Calibri" pitchFamily="34" charset="-120"/>
-              </a:rPr>
-              <a:t>Iniciado</a:t>
-            </a:r>
-            <a:endParaRPr lang="en-US" sz="1050" dirty="0"/>
-          </a:p>
-        </p:txBody>
-      </p:sp>
-      <p:sp>
-        <p:nvSpPr>
-          <p:cNvPr id="47" name="Text 43"/>
-          <p:cNvSpPr/>
-          <p:nvPr/>
-        </p:nvSpPr>
-        <p:spPr>
-          <a:xfrm>
-            <a:off x="9921240" y="4754880"/>
-            <a:ext cx="1828800" cy="237744"/>
-          </a:xfrm>
-          <a:prstGeom prst="rect">
-            <a:avLst/>
-          </a:prstGeom>
-          <a:noFill/>
-          <a:ln/>
-        </p:spPr>
-        <p:txBody>
-          <a:bodyPr wrap="square" lIns="0" tIns="0" rIns="0" bIns="0" rtlCol="0" anchor="ctr"/>
-          <a:lstStyle/>
-          <a:p>
-            <a:pPr algn="l" indent="0" marL="0">
-              <a:buNone/>
-            </a:pPr>
-            <a:r>
-              <a:rPr lang="en-US" sz="1000" dirty="0">
-                <a:solidFill>
-                  <a:srgbClr val="1A2433"/>
-                </a:solidFill>
-                <a:latin typeface="Calibri" pitchFamily="34" charset="0"/>
-                <a:ea typeface="Calibri" pitchFamily="34" charset="-122"/>
-                <a:cs typeface="Calibri" pitchFamily="34" charset="-120"/>
-              </a:rPr>
-              <a:t>Fundaciones FS-01 (10 eleme…</a:t>
-            </a:r>
-            <a:endParaRPr lang="en-US" sz="1000" dirty="0"/>
-          </a:p>
-        </p:txBody>
-      </p:sp>
-      <p:sp>
-        <p:nvSpPr>
-          <p:cNvPr id="48" name="Shape 44"/>
-          <p:cNvSpPr/>
-          <p:nvPr/>
-        </p:nvSpPr>
-        <p:spPr>
-          <a:xfrm>
-            <a:off x="502920" y="5029200"/>
-            <a:ext cx="11247120" cy="0"/>
-          </a:xfrm>
-          <a:prstGeom prst="line">
-            <a:avLst/>
-          </a:prstGeom>
-          <a:noFill/>
-          <a:ln w="9525">
-            <a:solidFill>
-              <a:srgbClr val="D9DFE6"/>
-            </a:solidFill>
-            <a:prstDash val="solid"/>
-          </a:ln>
-        </p:spPr>
-      </p:sp>
-      <p:sp>
-        <p:nvSpPr>
-          <p:cNvPr id="49" name="Text 45"/>
-          <p:cNvSpPr/>
-          <p:nvPr/>
-        </p:nvSpPr>
-        <p:spPr>
-          <a:xfrm>
-            <a:off x="502920" y="5084064"/>
-            <a:ext cx="822960" cy="237744"/>
-          </a:xfrm>
-          <a:prstGeom prst="rect">
-            <a:avLst/>
-          </a:prstGeom>
-          <a:noFill/>
-          <a:ln/>
-        </p:spPr>
-        <p:txBody>
-          <a:bodyPr wrap="square" lIns="0" tIns="0" rIns="0" bIns="0" rtlCol="0" anchor="ctr"/>
-          <a:lstStyle/>
-          <a:p>
-            <a:pPr algn="l" indent="0" marL="0">
-              <a:buNone/>
-            </a:pPr>
-            <a:r>
-              <a:rPr lang="en-US" sz="1050" dirty="0">
-                <a:solidFill>
-                  <a:srgbClr val="1A2433"/>
-                </a:solidFill>
-                <a:latin typeface="Calibri" pitchFamily="34" charset="0"/>
-                <a:ea typeface="Calibri" pitchFamily="34" charset="-122"/>
-                <a:cs typeface="Calibri" pitchFamily="34" charset="-120"/>
-              </a:rPr>
-              <a:t>19-08-2026</a:t>
-            </a:r>
-            <a:endParaRPr lang="en-US" sz="1050" dirty="0"/>
-          </a:p>
-        </p:txBody>
-      </p:sp>
-      <p:sp>
-        <p:nvSpPr>
-          <p:cNvPr id="50" name="Text 46"/>
-          <p:cNvSpPr/>
-          <p:nvPr/>
-        </p:nvSpPr>
-        <p:spPr>
-          <a:xfrm>
-            <a:off x="1371600" y="5084064"/>
-            <a:ext cx="1051560" cy="237744"/>
-          </a:xfrm>
-          <a:prstGeom prst="rect">
-            <a:avLst/>
-          </a:prstGeom>
-          <a:noFill/>
-          <a:ln/>
-        </p:spPr>
-        <p:txBody>
-          <a:bodyPr wrap="square" lIns="0" tIns="0" rIns="0" bIns="0" rtlCol="0" anchor="ctr"/>
-          <a:lstStyle/>
-          <a:p>
-            <a:pPr algn="l" indent="0" marL="0">
-              <a:buNone/>
-            </a:pPr>
-            <a:r>
-              <a:rPr lang="en-US" sz="1050" dirty="0">
-                <a:solidFill>
-                  <a:srgbClr val="1A2433"/>
-                </a:solidFill>
-                <a:latin typeface="Calibri" pitchFamily="34" charset="0"/>
-                <a:ea typeface="Calibri" pitchFamily="34" charset="-122"/>
-                <a:cs typeface="Calibri" pitchFamily="34" charset="-120"/>
-              </a:rPr>
-              <a:t>Talabre</a:t>
-            </a:r>
-            <a:endParaRPr lang="en-US" sz="1050" dirty="0"/>
-          </a:p>
-        </p:txBody>
-      </p:sp>
-      <p:sp>
-        <p:nvSpPr>
-          <p:cNvPr id="51" name="Text 47"/>
-          <p:cNvSpPr/>
-          <p:nvPr/>
-        </p:nvSpPr>
-        <p:spPr>
-          <a:xfrm>
-            <a:off x="2468880" y="5084064"/>
-            <a:ext cx="1051560" cy="237744"/>
-          </a:xfrm>
-          <a:prstGeom prst="rect">
-            <a:avLst/>
-          </a:prstGeom>
-          <a:noFill/>
-          <a:ln/>
-        </p:spPr>
-        <p:txBody>
-          <a:bodyPr wrap="square" lIns="0" tIns="0" rIns="0" bIns="0" rtlCol="0" anchor="ctr"/>
-          <a:lstStyle/>
-          <a:p>
-            <a:pPr algn="l" indent="0" marL="0">
-              <a:buNone/>
-            </a:pPr>
-            <a:r>
-              <a:rPr lang="en-US" sz="1050" dirty="0">
-                <a:solidFill>
-                  <a:srgbClr val="1A2433"/>
-                </a:solidFill>
-                <a:latin typeface="Calibri" pitchFamily="34" charset="0"/>
-                <a:ea typeface="Calibri" pitchFamily="34" charset="-122"/>
-                <a:cs typeface="Calibri" pitchFamily="34" charset="-120"/>
-              </a:rPr>
-              <a:t>248 · RNC N°463</a:t>
-            </a:r>
-            <a:endParaRPr lang="en-US" sz="1050" dirty="0"/>
-          </a:p>
-        </p:txBody>
-      </p:sp>
-      <p:sp>
-        <p:nvSpPr>
-          <p:cNvPr id="52" name="Text 48"/>
-          <p:cNvSpPr/>
-          <p:nvPr/>
-        </p:nvSpPr>
-        <p:spPr>
-          <a:xfrm>
-            <a:off x="3566160" y="5084064"/>
-            <a:ext cx="1371600" cy="237744"/>
-          </a:xfrm>
-          <a:prstGeom prst="rect">
-            <a:avLst/>
-          </a:prstGeom>
-          <a:noFill/>
-          <a:ln/>
-        </p:spPr>
-        <p:txBody>
-          <a:bodyPr wrap="square" lIns="0" tIns="0" rIns="0" bIns="0" rtlCol="0" anchor="ctr"/>
-          <a:lstStyle/>
-          <a:p>
-            <a:pPr algn="l" indent="0" marL="0">
-              <a:buNone/>
-            </a:pPr>
-            <a:r>
-              <a:rPr lang="en-US" sz="1050" dirty="0">
-                <a:solidFill>
-                  <a:srgbClr val="1A2433"/>
-                </a:solidFill>
-                <a:latin typeface="Calibri" pitchFamily="34" charset="0"/>
-                <a:ea typeface="Calibri" pitchFamily="34" charset="-122"/>
-                <a:cs typeface="Calibri" pitchFamily="34" charset="-120"/>
-              </a:rPr>
-              <a:t>No Conformidad</a:t>
-            </a:r>
-            <a:endParaRPr lang="en-US" sz="1050" dirty="0"/>
-          </a:p>
-        </p:txBody>
-      </p:sp>
-      <p:sp>
-        <p:nvSpPr>
-          <p:cNvPr id="53" name="Text 49"/>
-          <p:cNvSpPr/>
-          <p:nvPr/>
-        </p:nvSpPr>
-        <p:spPr>
-          <a:xfrm>
-            <a:off x="4983480" y="5084064"/>
-            <a:ext cx="1417320" cy="237744"/>
-          </a:xfrm>
-          <a:prstGeom prst="rect">
-            <a:avLst/>
-          </a:prstGeom>
-          <a:noFill/>
-          <a:ln/>
-        </p:spPr>
-        <p:txBody>
-          <a:bodyPr wrap="square" lIns="0" tIns="0" rIns="0" bIns="0" rtlCol="0" anchor="ctr"/>
-          <a:lstStyle/>
-          <a:p>
-            <a:pPr algn="l" indent="0" marL="0">
-              <a:buNone/>
-            </a:pPr>
-            <a:r>
-              <a:rPr lang="en-US" sz="1050" b="1" dirty="0">
-                <a:solidFill>
-                  <a:srgbClr val="C87A32"/>
-                </a:solidFill>
-                <a:latin typeface="Calibri" pitchFamily="34" charset="0"/>
-                <a:ea typeface="Calibri" pitchFamily="34" charset="-122"/>
-                <a:cs typeface="Calibri" pitchFamily="34" charset="-120"/>
-              </a:rPr>
-              <a:t>Externa · Cliente</a:t>
-            </a:r>
-            <a:endParaRPr lang="en-US" sz="1050" dirty="0"/>
-          </a:p>
-        </p:txBody>
-      </p:sp>
-      <p:sp>
-        <p:nvSpPr>
-          <p:cNvPr id="54" name="Text 50"/>
-          <p:cNvSpPr/>
-          <p:nvPr/>
-        </p:nvSpPr>
-        <p:spPr>
-          <a:xfrm>
-            <a:off x="6446520" y="5084064"/>
-            <a:ext cx="1097280" cy="237744"/>
-          </a:xfrm>
-          <a:prstGeom prst="rect">
-            <a:avLst/>
-          </a:prstGeom>
-          <a:noFill/>
-          <a:ln/>
-        </p:spPr>
-        <p:txBody>
-          <a:bodyPr wrap="square" lIns="0" tIns="0" rIns="0" bIns="0" rtlCol="0" anchor="ctr"/>
-          <a:lstStyle/>
-          <a:p>
-            <a:pPr algn="l" indent="0" marL="0">
-              <a:buNone/>
-            </a:pPr>
-            <a:r>
-              <a:rPr lang="en-US" sz="1050" dirty="0">
-                <a:solidFill>
-                  <a:srgbClr val="1A2433"/>
-                </a:solidFill>
-                <a:latin typeface="Calibri" pitchFamily="34" charset="0"/>
-                <a:ea typeface="Calibri" pitchFamily="34" charset="-122"/>
-                <a:cs typeface="Calibri" pitchFamily="34" charset="-120"/>
-              </a:rPr>
-              <a:t>PIPING</a:t>
-            </a:r>
-            <a:endParaRPr lang="en-US" sz="1050" dirty="0"/>
-          </a:p>
-        </p:txBody>
-      </p:sp>
-      <p:sp>
-        <p:nvSpPr>
-          <p:cNvPr id="55" name="Text 51"/>
-          <p:cNvSpPr/>
-          <p:nvPr/>
-        </p:nvSpPr>
-        <p:spPr>
-          <a:xfrm>
-            <a:off x="7589520" y="5084064"/>
-            <a:ext cx="1371600" cy="237744"/>
-          </a:xfrm>
-          <a:prstGeom prst="rect">
-            <a:avLst/>
-          </a:prstGeom>
-          <a:noFill/>
-          <a:ln/>
-        </p:spPr>
-        <p:txBody>
-          <a:bodyPr wrap="square" lIns="0" tIns="0" rIns="0" bIns="0" rtlCol="0" anchor="ctr"/>
-          <a:lstStyle/>
-          <a:p>
-            <a:pPr algn="l" indent="0" marL="0">
-              <a:buNone/>
-            </a:pPr>
-            <a:r>
-              <a:rPr lang="en-US" sz="1050" dirty="0">
-                <a:solidFill>
-                  <a:srgbClr val="1A2433"/>
-                </a:solidFill>
-                <a:latin typeface="Calibri" pitchFamily="34" charset="0"/>
-                <a:ea typeface="Calibri" pitchFamily="34" charset="-122"/>
-                <a:cs typeface="Calibri" pitchFamily="34" charset="-120"/>
-              </a:rPr>
-              <a:t>Oscar Nahuel P.</a:t>
-            </a:r>
-            <a:endParaRPr lang="en-US" sz="1050" dirty="0"/>
-          </a:p>
-        </p:txBody>
-      </p:sp>
-      <p:sp>
-        <p:nvSpPr>
-          <p:cNvPr id="56" name="Text 52"/>
-          <p:cNvSpPr/>
-          <p:nvPr/>
-        </p:nvSpPr>
-        <p:spPr>
-          <a:xfrm>
-            <a:off x="9006840" y="5084064"/>
-            <a:ext cx="868680" cy="237744"/>
-          </a:xfrm>
-          <a:prstGeom prst="rect">
-            <a:avLst/>
-          </a:prstGeom>
-          <a:noFill/>
-          <a:ln/>
-        </p:spPr>
-        <p:txBody>
-          <a:bodyPr wrap="square" lIns="0" tIns="0" rIns="0" bIns="0" rtlCol="0" anchor="ctr"/>
-          <a:lstStyle/>
-          <a:p>
-            <a:pPr algn="l" indent="0" marL="0">
-              <a:buNone/>
-            </a:pPr>
-            <a:r>
-              <a:rPr lang="en-US" sz="1050" dirty="0">
-                <a:solidFill>
-                  <a:srgbClr val="C0392B"/>
-                </a:solidFill>
-                <a:latin typeface="Calibri" pitchFamily="34" charset="0"/>
-                <a:ea typeface="Calibri" pitchFamily="34" charset="-122"/>
-                <a:cs typeface="Calibri" pitchFamily="34" charset="-120"/>
-              </a:rPr>
-              <a:t>Iniciado</a:t>
-            </a:r>
-            <a:endParaRPr lang="en-US" sz="1050" dirty="0"/>
-          </a:p>
-        </p:txBody>
-      </p:sp>
-      <p:sp>
-        <p:nvSpPr>
-          <p:cNvPr id="57" name="Text 53"/>
-          <p:cNvSpPr/>
-          <p:nvPr/>
-        </p:nvSpPr>
-        <p:spPr>
-          <a:xfrm>
-            <a:off x="9921240" y="5084064"/>
-            <a:ext cx="1828800" cy="237744"/>
-          </a:xfrm>
-          <a:prstGeom prst="rect">
-            <a:avLst/>
-          </a:prstGeom>
-          <a:noFill/>
-          <a:ln/>
-        </p:spPr>
-        <p:txBody>
-          <a:bodyPr wrap="square" lIns="0" tIns="0" rIns="0" bIns="0" rtlCol="0" anchor="ctr"/>
-          <a:lstStyle/>
-          <a:p>
-            <a:pPr algn="l" indent="0" marL="0">
-              <a:buNone/>
-            </a:pPr>
-            <a:r>
-              <a:rPr lang="en-US" sz="1000" dirty="0">
-                <a:solidFill>
-                  <a:srgbClr val="1A2433"/>
-                </a:solidFill>
-                <a:latin typeface="Calibri" pitchFamily="34" charset="0"/>
-                <a:ea typeface="Calibri" pitchFamily="34" charset="-122"/>
-                <a:cs typeface="Calibri" pitchFamily="34" charset="-120"/>
-              </a:rPr>
-              <a:t>Línea TAG N° 3716D-RW-24-H1…</a:t>
-            </a:r>
-            <a:endParaRPr lang="en-US" sz="1000" dirty="0"/>
-          </a:p>
-        </p:txBody>
-      </p:sp>
-      <p:sp>
-        <p:nvSpPr>
-          <p:cNvPr id="58" name="Shape 54"/>
-          <p:cNvSpPr/>
-          <p:nvPr/>
-        </p:nvSpPr>
-        <p:spPr>
-          <a:xfrm>
-            <a:off x="502920" y="5358384"/>
-            <a:ext cx="11247120" cy="0"/>
-          </a:xfrm>
-          <a:prstGeom prst="line">
-            <a:avLst/>
-          </a:prstGeom>
-          <a:noFill/>
-          <a:ln w="9525">
-            <a:solidFill>
-              <a:srgbClr val="D9DFE6"/>
-            </a:solidFill>
-            <a:prstDash val="solid"/>
-          </a:ln>
-        </p:spPr>
-      </p:sp>
-      <p:sp>
-        <p:nvSpPr>
-          <p:cNvPr id="59" name="Text 55"/>
+          <p:cNvPr id="38" name="Text 34"/>
           <p:cNvSpPr/>
           <p:nvPr/>
         </p:nvSpPr>
@@ -28068,7 +26203,7 @@
                 <a:ea typeface="Calibri" pitchFamily="34" charset="-122"/>
                 <a:cs typeface="Calibri" pitchFamily="34" charset="-120"/>
               </a:rPr>
-              <a:t>Fuente: Data_NCR24082026.xlsx — hoja «Observaciones» · Corte 24-08-2026 · 501 registros desde 10-02-2023</a:t>
+              <a:t>Fuente: Data_NCR31082026.xlsx — hoja «Observaciones» · Corte 31-08-2026 · 502 registros desde 10-02-2023</a:t>
             </a:r>
             <a:endParaRPr lang="en-US" sz="850" dirty="0"/>
           </a:p>
@@ -28076,7 +26211,7 @@
       </p:sp>
       <p:sp>
         <p:nvSpPr>
-          <p:cNvPr id="60" name="Text 56"/>
+          <p:cNvPr id="39" name="Text 35"/>
           <p:cNvSpPr/>
           <p:nvPr/>
         </p:nvSpPr>
@@ -28115,7 +26250,7 @@
       </p:sp>
       <p:sp>
         <p:nvSpPr>
-          <p:cNvPr id="61" name="Text 57"/>
+          <p:cNvPr id="40" name="Text 36"/>
           <p:cNvSpPr/>
           <p:nvPr/>
         </p:nvSpPr>
@@ -29064,7 +27199,7 @@
                 <a:ea typeface="Calibri" pitchFamily="34" charset="-122"/>
                 <a:cs typeface="Calibri" pitchFamily="34" charset="-120"/>
               </a:rPr>
-              <a:t>285</a:t>
+              <a:t>286</a:t>
             </a:r>
             <a:endParaRPr lang="en-US" sz="1050" dirty="0"/>
           </a:p>
@@ -29103,7 +27238,7 @@
                 <a:ea typeface="Calibri" pitchFamily="34" charset="-122"/>
                 <a:cs typeface="Calibri" pitchFamily="34" charset="-120"/>
               </a:rPr>
-              <a:t>241</a:t>
+              <a:t>249</a:t>
             </a:r>
             <a:endParaRPr lang="en-US" sz="1050" dirty="0"/>
           </a:p>
@@ -29142,7 +27277,7 @@
                 <a:ea typeface="Calibri" pitchFamily="34" charset="-122"/>
                 <a:cs typeface="Calibri" pitchFamily="34" charset="-120"/>
               </a:rPr>
-              <a:t>84,6%</a:t>
+              <a:t>87,1%</a:t>
             </a:r>
             <a:endParaRPr lang="en-US" sz="1050" dirty="0"/>
           </a:p>
@@ -29181,7 +27316,7 @@
                 <a:ea typeface="Calibri" pitchFamily="34" charset="-122"/>
                 <a:cs typeface="Calibri" pitchFamily="34" charset="-120"/>
               </a:rPr>
-              <a:t>44</a:t>
+              <a:t>37</a:t>
             </a:r>
             <a:endParaRPr lang="en-US" sz="1050" dirty="0"/>
           </a:p>
@@ -29220,7 +27355,7 @@
                 <a:ea typeface="Calibri" pitchFamily="34" charset="-122"/>
                 <a:cs typeface="Calibri" pitchFamily="34" charset="-120"/>
               </a:rPr>
-              <a:t>42</a:t>
+              <a:t>36</a:t>
             </a:r>
             <a:endParaRPr lang="en-US" sz="1050" dirty="0"/>
           </a:p>
@@ -29259,7 +27394,7 @@
                 <a:ea typeface="Calibri" pitchFamily="34" charset="-122"/>
                 <a:cs typeface="Calibri" pitchFamily="34" charset="-120"/>
               </a:rPr>
-              <a:t>51 días</a:t>
+              <a:t>57 días</a:t>
             </a:r>
             <a:endParaRPr lang="en-US" sz="1050" dirty="0"/>
           </a:p>
@@ -29972,7 +28107,7 @@
                 <a:ea typeface="Calibri" pitchFamily="34" charset="-122"/>
                 <a:cs typeface="Calibri" pitchFamily="34" charset="-120"/>
               </a:rPr>
-              <a:t>501</a:t>
+              <a:t>502</a:t>
             </a:r>
             <a:endParaRPr lang="en-US" sz="1050" dirty="0"/>
           </a:p>
@@ -30011,7 +28146,7 @@
                 <a:ea typeface="Calibri" pitchFamily="34" charset="-122"/>
                 <a:cs typeface="Calibri" pitchFamily="34" charset="-120"/>
               </a:rPr>
-              <a:t>455</a:t>
+              <a:t>463</a:t>
             </a:r>
             <a:endParaRPr lang="en-US" sz="1050" dirty="0"/>
           </a:p>
@@ -30050,7 +28185,7 @@
                 <a:ea typeface="Calibri" pitchFamily="34" charset="-122"/>
                 <a:cs typeface="Calibri" pitchFamily="34" charset="-120"/>
               </a:rPr>
-              <a:t>90,8%</a:t>
+              <a:t>92,2%</a:t>
             </a:r>
             <a:endParaRPr lang="en-US" sz="1050" dirty="0"/>
           </a:p>
@@ -30089,7 +28224,7 @@
                 <a:ea typeface="Calibri" pitchFamily="34" charset="-122"/>
                 <a:cs typeface="Calibri" pitchFamily="34" charset="-120"/>
               </a:rPr>
-              <a:t>46</a:t>
+              <a:t>39</a:t>
             </a:r>
             <a:endParaRPr lang="en-US" sz="1050" dirty="0"/>
           </a:p>
@@ -30128,7 +28263,7 @@
                 <a:ea typeface="Calibri" pitchFamily="34" charset="-122"/>
                 <a:cs typeface="Calibri" pitchFamily="34" charset="-120"/>
               </a:rPr>
-              <a:t>44</a:t>
+              <a:t>38</a:t>
             </a:r>
             <a:endParaRPr lang="en-US" sz="1050" dirty="0"/>
           </a:p>
@@ -30167,7 +28302,7 @@
                 <a:ea typeface="Calibri" pitchFamily="34" charset="-122"/>
                 <a:cs typeface="Calibri" pitchFamily="34" charset="-120"/>
               </a:rPr>
-              <a:t>71 días</a:t>
+              <a:t>74 días</a:t>
             </a:r>
             <a:endParaRPr lang="en-US" sz="1050" dirty="0"/>
           </a:p>
@@ -30384,7 +28519,7 @@
                 <a:ea typeface="Cambria" pitchFamily="34" charset="-122"/>
                 <a:cs typeface="Cambria" pitchFamily="34" charset="-120"/>
               </a:rPr>
-              <a:t>21,1%</a:t>
+              <a:t>21%</a:t>
             </a:r>
             <a:endParaRPr lang="en-US" sz="2400" dirty="0"/>
           </a:p>
@@ -30540,7 +28675,7 @@
                 <a:ea typeface="Calibri" pitchFamily="34" charset="-122"/>
                 <a:cs typeface="Calibri" pitchFamily="34" charset="-120"/>
               </a:rPr>
-              <a:t>Fuente: Data_NCR24082026.xlsx — hoja «Observaciones» · Corte 24-08-2026 · 501 registros desde 10-02-2023</a:t>
+              <a:t>Fuente: Data_NCR31082026.xlsx — hoja «Observaciones» · Corte 31-08-2026 · 502 registros desde 10-02-2023</a:t>
             </a:r>
             <a:endParaRPr lang="en-US" sz="850" dirty="0"/>
           </a:p>
@@ -30791,7 +28926,7 @@
                 <a:ea typeface="Calibri" pitchFamily="34" charset="-122"/>
                 <a:cs typeface="Calibri" pitchFamily="34" charset="-120"/>
               </a:rPr>
-              <a:t>De los 46 hallazgos abiertos, 17 llevan más de 180 días desde que se levantaron y 3 más de un año. La mediana de cierre global es de 30 días.</a:t>
+              <a:t>De los 39 hallazgos abiertos, 13 llevan más de 180 días desde que se levantaron y 0 más de un año. La mediana de cierre global es de 30 días.</a:t>
             </a:r>
             <a:endParaRPr lang="en-US" sz="1350" dirty="0"/>
           </a:p>
@@ -30928,7 +29063,7 @@
                 <a:ea typeface="Calibri" pitchFamily="34" charset="-122"/>
                 <a:cs typeface="Calibri" pitchFamily="34" charset="-120"/>
               </a:rPr>
-              <a:t>Al corte hay 44 hallazgos fuera de plazo de los 46 abiertos.</a:t>
+              <a:t>Al corte hay 38 hallazgos fuera de plazo de los 39 abiertos.</a:t>
             </a:r>
             <a:endParaRPr lang="en-US" sz="1150" dirty="0"/>
           </a:p>
@@ -31607,7 +29742,7 @@
                 <a:ea typeface="Calibri" pitchFamily="34" charset="-122"/>
                 <a:cs typeface="Calibri" pitchFamily="34" charset="-120"/>
               </a:rPr>
-              <a:t>238</a:t>
+              <a:t>242</a:t>
             </a:r>
             <a:endParaRPr lang="en-US" sz="1150" dirty="0"/>
           </a:p>
@@ -31724,7 +29859,7 @@
                 <a:ea typeface="Calibri" pitchFamily="34" charset="-122"/>
                 <a:cs typeface="Calibri" pitchFamily="34" charset="-120"/>
               </a:rPr>
-              <a:t>9</a:t>
+              <a:t>6</a:t>
             </a:r>
             <a:endParaRPr lang="en-US" sz="1150" dirty="0"/>
           </a:p>
@@ -31853,7 +29988,7 @@
                 <a:ea typeface="Calibri" pitchFamily="34" charset="-122"/>
                 <a:cs typeface="Calibri" pitchFamily="34" charset="-120"/>
               </a:rPr>
-              <a:t>128</a:t>
+              <a:t>132</a:t>
             </a:r>
             <a:endParaRPr lang="en-US" sz="1150" dirty="0"/>
           </a:p>
@@ -31892,7 +30027,7 @@
                 <a:ea typeface="Calibri" pitchFamily="34" charset="-122"/>
                 <a:cs typeface="Calibri" pitchFamily="34" charset="-120"/>
               </a:rPr>
-              <a:t>131 d</a:t>
+              <a:t>139 d</a:t>
             </a:r>
             <a:endParaRPr lang="en-US" sz="1150" dirty="0"/>
           </a:p>
@@ -31931,7 +30066,7 @@
                 <a:ea typeface="Calibri" pitchFamily="34" charset="-122"/>
                 <a:cs typeface="Calibri" pitchFamily="34" charset="-120"/>
               </a:rPr>
-              <a:t>409 d</a:t>
+              <a:t>419 d</a:t>
             </a:r>
             <a:endParaRPr lang="en-US" sz="1150" dirty="0"/>
           </a:p>
@@ -31970,7 +30105,7 @@
                 <a:ea typeface="Calibri" pitchFamily="34" charset="-122"/>
                 <a:cs typeface="Calibri" pitchFamily="34" charset="-120"/>
               </a:rPr>
-              <a:t>36</a:t>
+              <a:t>32</a:t>
             </a:r>
             <a:endParaRPr lang="en-US" sz="1150" dirty="0"/>
           </a:p>
@@ -32009,7 +30144,7 @@
                 <a:ea typeface="Calibri" pitchFamily="34" charset="-122"/>
                 <a:cs typeface="Calibri" pitchFamily="34" charset="-120"/>
               </a:rPr>
-              <a:t>7× más lento que el mejor frente</a:t>
+              <a:t>8× más lento que el mejor frente</a:t>
             </a:r>
             <a:endParaRPr lang="en-US" sz="1150" dirty="0"/>
           </a:p>
@@ -32348,7 +30483,7 @@
                 <a:ea typeface="Calibri" pitchFamily="34" charset="-122"/>
                 <a:cs typeface="Calibri" pitchFamily="34" charset="-120"/>
               </a:rPr>
-              <a:t>Fuente: Data_NCR24082026.xlsx — hoja «Observaciones» · Corte 24-08-2026 · 501 registros desde 10-02-2023</a:t>
+              <a:t>Fuente: Data_NCR31082026.xlsx — hoja «Observaciones» · Corte 31-08-2026 · 502 registros desde 10-02-2023</a:t>
             </a:r>
             <a:endParaRPr lang="en-US" sz="850" dirty="0"/>
           </a:p>
@@ -32599,7 +30734,7 @@
                 <a:ea typeface="Calibri" pitchFamily="34" charset="-122"/>
                 <a:cs typeface="Calibri" pitchFamily="34" charset="-120"/>
               </a:rPr>
-              <a:t>10.613 UF declaradas entre nov-24 y ago-26, imputadas al mes en que se levantó cada hallazgo. Las declaran 108 de 490 hallazgos del período.</a:t>
+              <a:t>10.613 UF declaradas entre nov-24 y ago-26, imputadas al mes en que se levantó cada hallazgo. Las declaran 108 de 491 hallazgos del período.</a:t>
             </a:r>
             <a:endParaRPr lang="en-US" sz="1350" dirty="0"/>
           </a:p>
@@ -49429,7 +47564,7 @@
                           <a:ea typeface="Calibri" pitchFamily="34" charset="-122"/>
                           <a:cs typeface="Calibri" pitchFamily="34" charset="-120"/>
                         </a:rPr>
-                        <a:t>0/7</a:t>
+                        <a:t>0/8</a:t>
                       </a:r>
                       <a:endParaRPr lang="en-US" sz="750" dirty="0">
                         <a:latin typeface="Calibri" charset="0"/>
@@ -49497,7 +47632,7 @@
                           <a:ea typeface="Calibri" pitchFamily="34" charset="-122"/>
                           <a:cs typeface="Calibri" pitchFamily="34" charset="-120"/>
                         </a:rPr>
-                        <a:t>108/490</a:t>
+                        <a:t>108/491</a:t>
                       </a:r>
                       <a:endParaRPr lang="en-US" sz="750" dirty="0">
                         <a:latin typeface="Calibri" charset="0"/>
@@ -50161,7 +48296,7 @@
                 <a:ea typeface="Cambria" pitchFamily="34" charset="-122"/>
                 <a:cs typeface="Cambria" pitchFamily="34" charset="-120"/>
               </a:rPr>
-              <a:t>250</a:t>
+              <a:t>251</a:t>
             </a:r>
             <a:endParaRPr lang="en-US" sz="2100" dirty="0"/>
           </a:p>
@@ -50278,7 +48413,7 @@
                 <a:ea typeface="Calibri" pitchFamily="34" charset="-122"/>
                 <a:cs typeface="Calibri" pitchFamily="34" charset="-120"/>
               </a:rPr>
-              <a:t>Fuente: Data_NCR24082026.xlsx — hoja «Observaciones» · Corte 24-08-2026 · 501 registros desde 10-02-2023</a:t>
+              <a:t>Fuente: Data_NCR31082026.xlsx — hoja «Observaciones» · Corte 31-08-2026 · 502 registros desde 10-02-2023</a:t>
             </a:r>
             <a:endParaRPr lang="en-US" sz="850" dirty="0"/>
           </a:p>
@@ -50652,7 +48787,7 @@
                 <a:ea typeface="Calibri" pitchFamily="34" charset="-122"/>
                 <a:cs typeface="Calibri" pitchFamily="34" charset="-120"/>
               </a:rPr>
-              <a:t>36 de los 46 hallazgos abiertos (78,3%) y 78% de cierre, contra 90,8% global. Es la ruta crítica del módulo.</a:t>
+              <a:t>32 de los 39 hallazgos abiertos (82,1%) y 80,5% de cierre, contra 92,2% global. Es la ruta crítica del módulo.</a:t>
             </a:r>
             <a:endParaRPr lang="en-US" sz="1100" dirty="0"/>
           </a:p>
@@ -50794,7 +48929,7 @@
                 <a:ea typeface="Calibri" pitchFamily="34" charset="-122"/>
                 <a:cs typeface="Calibri" pitchFamily="34" charset="-120"/>
               </a:rPr>
-              <a:t>Solo 21,1% de sus hallazgos los detecta Besalco; el mejor frente va en 66,7%. Lo que no se detecta adentro llega como observación del cliente.</a:t>
+              <a:t>Solo 21% de sus hallazgos los detecta Besalco; el mejor frente va en 66,7%. Lo que no se detecta adentro llega como observación del cliente.</a:t>
             </a:r>
             <a:endParaRPr lang="en-US" sz="1100" dirty="0"/>
           </a:p>
@@ -50894,7 +49029,7 @@
                 <a:ea typeface="Calibri" pitchFamily="34" charset="-122"/>
                 <a:cs typeface="Calibri" pitchFamily="34" charset="-120"/>
               </a:rPr>
-              <a:t>Sacar los 17 hallazgos sobre 180 días</a:t>
+              <a:t>Sacar los 13 hallazgos sobre 180 días</a:t>
             </a:r>
             <a:endParaRPr lang="en-US" sz="1400" dirty="0"/>
           </a:p>
@@ -50936,7 +49071,7 @@
                 <a:ea typeface="Calibri" pitchFamily="34" charset="-122"/>
                 <a:cs typeface="Calibri" pitchFamily="34" charset="-120"/>
               </a:rPr>
-              <a:t>3 de ellos superan el año abiertos. Los tienen a cargo Sin asignar (17). Es deuda antigua que no se cierra sola.</a:t>
+              <a:t>0 de ellos superan el año abiertos. Los tienen a cargo Sin asignar (13). Es deuda antigua que no se cierra sola.</a:t>
             </a:r>
             <a:endParaRPr lang="en-US" sz="1100" dirty="0"/>
           </a:p>
@@ -51036,7 +49171,7 @@
                 <a:ea typeface="Calibri" pitchFamily="34" charset="-122"/>
                 <a:cs typeface="Calibri" pitchFamily="34" charset="-120"/>
               </a:rPr>
-              <a:t>Responder las 44 que pasaron el plazo</a:t>
+              <a:t>Responder las 38 que pasaron el plazo</a:t>
             </a:r>
             <a:endParaRPr lang="en-US" sz="1400" dirty="0"/>
           </a:p>
@@ -51078,7 +49213,7 @@
                 <a:ea typeface="Calibri" pitchFamily="34" charset="-122"/>
                 <a:cs typeface="Calibri" pitchFamily="34" charset="-120"/>
               </a:rPr>
-              <a:t>El plazo es de 10 días desde la emisión y hoy lo incumplen 95,7% de los abiertos. Solo 2 siguen dentro de plazo.</a:t>
+              <a:t>El plazo es de 10 días desde la emisión y hoy lo incumplen 97,4% de los abiertos. Solo 1 siguen dentro de plazo.</a:t>
             </a:r>
             <a:endParaRPr lang="en-US" sz="1100" dirty="0"/>
           </a:p>
@@ -51117,7 +49252,7 @@
                 <a:ea typeface="Calibri" pitchFamily="34" charset="-122"/>
                 <a:cs typeface="Calibri" pitchFamily="34" charset="-120"/>
               </a:rPr>
-              <a:t>Fuente: Data_NCR24082026.xlsx — hoja «Observaciones» · Corte 24-08-2026 · 501 registros desde 10-02-2023</a:t>
+              <a:t>Fuente: Data_NCR31082026.xlsx — hoja «Observaciones» · Corte 31-08-2026 · 502 registros desde 10-02-2023</a:t>
             </a:r>
             <a:endParaRPr lang="en-US" sz="850" dirty="0"/>
           </a:p>
@@ -51841,7 +49976,7 @@
                 <a:ea typeface="Calibri" pitchFamily="34" charset="-122"/>
                 <a:cs typeface="Calibri" pitchFamily="34" charset="-120"/>
               </a:rPr>
-              <a:t>Corte: 24-08-2026</a:t>
+              <a:t>Corte: 31-08-2026</a:t>
             </a:r>
             <a:endParaRPr lang="en-US" sz="1100" dirty="0"/>
           </a:p>
@@ -51880,7 +50015,7 @@
                 <a:ea typeface="Calibri" pitchFamily="34" charset="-122"/>
                 <a:cs typeface="Calibri" pitchFamily="34" charset="-120"/>
               </a:rPr>
-              <a:t>Fuente: Data_NCR24082026.xlsx — hoja «Observaciones» · Corte 24-08-2026 · 501 registros desde 10-02-2023</a:t>
+              <a:t>Fuente: Data_NCR31082026.xlsx — hoja «Observaciones» · Corte 31-08-2026 · 502 registros desde 10-02-2023</a:t>
             </a:r>
             <a:endParaRPr lang="en-US" sz="850" dirty="0"/>
           </a:p>

--- a/modulo_nc/Panel_No_Conformidades.pptx
+++ b/modulo_nc/Panel_No_Conformidades.pptx
@@ -220,19 +220,19 @@
                     <c:v>3 sem.</c:v>
                   </c:pt>
                   <c:pt idx="1">
-                    <c:v>27-07</c:v>
+                    <c:v>03-08</c:v>
                   </c:pt>
                   <c:pt idx="2">
-                    <c:v>03-08</c:v>
+                    <c:v>10-08</c:v>
                   </c:pt>
                   <c:pt idx="3">
-                    <c:v>10-08</c:v>
+                    <c:v>17-08</c:v>
                   </c:pt>
                   <c:pt idx="4">
-                    <c:v>17-08</c:v>
+                    <c:v>24-08</c:v>
                   </c:pt>
                   <c:pt idx="5">
-                    <c:v>24-08</c:v>
+                    <c:v>31-08</c:v>
                   </c:pt>
                 </c:lvl>
               </c:multiLvlStrCache>
@@ -245,22 +245,22 @@
                 <c:formatCode>General</c:formatCode>
                 <c:ptCount val="6"/>
                 <c:pt idx="0">
-                  <c:v/>
+                  <c:v>2</c:v>
                 </c:pt>
                 <c:pt idx="1">
-                  <c:v>2</c:v>
+                  <c:v/>
                 </c:pt>
                 <c:pt idx="2">
                   <c:v/>
                 </c:pt>
                 <c:pt idx="3">
-                  <c:v/>
+                  <c:v>2</c:v>
                 </c:pt>
                 <c:pt idx="4">
-                  <c:v>2</c:v>
+                  <c:v>1</c:v>
                 </c:pt>
                 <c:pt idx="5">
-                  <c:v>1</c:v>
+                  <c:v>7</c:v>
                 </c:pt>
               </c:numCache>
             </c:numRef>
@@ -322,19 +322,19 @@
                     <c:v>3 sem.</c:v>
                   </c:pt>
                   <c:pt idx="1">
-                    <c:v>27-07</c:v>
+                    <c:v>03-08</c:v>
                   </c:pt>
                   <c:pt idx="2">
-                    <c:v>03-08</c:v>
+                    <c:v>10-08</c:v>
                   </c:pt>
                   <c:pt idx="3">
-                    <c:v>10-08</c:v>
+                    <c:v>17-08</c:v>
                   </c:pt>
                   <c:pt idx="4">
-                    <c:v>17-08</c:v>
+                    <c:v>24-08</c:v>
                   </c:pt>
                   <c:pt idx="5">
-                    <c:v>24-08</c:v>
+                    <c:v>31-08</c:v>
                   </c:pt>
                 </c:lvl>
               </c:multiLvlStrCache>
@@ -347,19 +347,19 @@
                 <c:formatCode>General</c:formatCode>
                 <c:ptCount val="6"/>
                 <c:pt idx="0">
-                  <c:v>4</c:v>
+                  <c:v>5</c:v>
                 </c:pt>
                 <c:pt idx="1">
-                  <c:v>2</c:v>
+                  <c:v>1</c:v>
                 </c:pt>
                 <c:pt idx="2">
+                  <c:v>3</c:v>
+                </c:pt>
+                <c:pt idx="3">
                   <c:v>1</c:v>
                 </c:pt>
-                <c:pt idx="3">
-                  <c:v>3</c:v>
-                </c:pt>
                 <c:pt idx="4">
-                  <c:v>1</c:v>
+                  <c:v/>
                 </c:pt>
                 <c:pt idx="5">
                   <c:v/>
@@ -734,10 +734,10 @@
                   <c:v>19</c:v>
                 </c:pt>
                 <c:pt idx="1">
-                  <c:v>196</c:v>
+                  <c:v>197</c:v>
                 </c:pt>
                 <c:pt idx="2">
-                  <c:v>71</c:v>
+                  <c:v>77</c:v>
                 </c:pt>
                 <c:pt idx="3">
                   <c:v/>
@@ -1289,7 +1289,7 @@
                 <c:formatCode>General</c:formatCode>
                 <c:ptCount val="4"/>
                 <c:pt idx="0">
-                  <c:v>26</c:v>
+                  <c:v>33</c:v>
                 </c:pt>
                 <c:pt idx="1">
                   <c:v>2</c:v>
@@ -1487,7 +1487,7 @@
                 </a:solidFill>
                 <a:latin typeface="Calibri"/>
               </a:rPr>
-              <a:t>Antigüedad de los 39 hallazgos abiertos</a:t>
+              <a:t>Antigüedad de los 46 hallazgos abiertos</a:t>
             </a:r>
           </a:p>
         </c:rich>
@@ -1568,7 +1568,7 @@
                 <c:formatCode>General</c:formatCode>
                 <c:ptCount val="1"/>
                 <c:pt idx="0">
-                  <c:v>3</c:v>
+                  <c:v>10</c:v>
                 </c:pt>
               </c:numCache>
             </c:numRef>
@@ -1640,7 +1640,7 @@
                 <c:formatCode>General</c:formatCode>
                 <c:ptCount val="1"/>
                 <c:pt idx="0">
-                  <c:v>6</c:v>
+                  <c:v>4</c:v>
                 </c:pt>
               </c:numCache>
             </c:numRef>
@@ -1712,7 +1712,7 @@
                 <c:formatCode>General</c:formatCode>
                 <c:ptCount val="1"/>
                 <c:pt idx="0">
-                  <c:v>17</c:v>
+                  <c:v>15</c:v>
                 </c:pt>
               </c:numCache>
             </c:numRef>
@@ -1784,7 +1784,7 @@
                 <c:formatCode>General</c:formatCode>
                 <c:ptCount val="1"/>
                 <c:pt idx="0">
-                  <c:v>13</c:v>
+                  <c:v>17</c:v>
                 </c:pt>
               </c:numCache>
             </c:numRef>
@@ -2615,7 +2615,7 @@
                 <c:formatCode>General</c:formatCode>
                 <c:ptCount val="8"/>
                 <c:pt idx="0">
-                  <c:v>4</c:v>
+                  <c:v>5</c:v>
                 </c:pt>
                 <c:pt idx="1">
                   <c:v>1</c:v>
@@ -3041,7 +3041,7 @@
                 <c:formatCode>General</c:formatCode>
                 <c:ptCount val="8"/>
                 <c:pt idx="0">
-                  <c:v>31</c:v>
+                  <c:v>37</c:v>
                 </c:pt>
                 <c:pt idx="1">
                   <c:v/>
@@ -5638,7 +5638,7 @@
                 <a:ea typeface="Calibri" pitchFamily="34" charset="-122"/>
                 <a:cs typeface="Calibri" pitchFamily="34" charset="-120"/>
               </a:rPr>
-              <a:t>502 hallazgos levantados entre 10-02-2023 y 24-08-2026 (Desaladora 82 · Talabre 248 · Arqueros 164 · Oficina Central 8).</a:t>
+              <a:t>509 hallazgos levantados entre 10-02-2023 y 03-09-2026 (Desaladora 82 · Talabre 249 · Arqueros 170 · Oficina Central 8).</a:t>
             </a:r>
             <a:endParaRPr lang="en-US" sz="1350" dirty="0"/>
           </a:p>
@@ -5697,7 +5697,7 @@
                 <a:ea typeface="Cambria" pitchFamily="34" charset="-122"/>
                 <a:cs typeface="Cambria" pitchFamily="34" charset="-120"/>
               </a:rPr>
-              <a:t>92,2%</a:t>
+              <a:t>91%</a:t>
             </a:r>
             <a:endParaRPr lang="en-US" sz="3400" dirty="0"/>
           </a:p>
@@ -5775,7 +5775,7 @@
                 <a:ea typeface="Cambria" pitchFamily="34" charset="-122"/>
                 <a:cs typeface="Cambria" pitchFamily="34" charset="-120"/>
               </a:rPr>
-              <a:t>39</a:t>
+              <a:t>46</a:t>
             </a:r>
             <a:endParaRPr lang="en-US" sz="3400" dirty="0"/>
           </a:p>
@@ -6009,7 +6009,7 @@
                 <a:ea typeface="Calibri" pitchFamily="34" charset="-122"/>
                 <a:cs typeface="Calibri" pitchFamily="34" charset="-120"/>
               </a:rPr>
-              <a:t>Corte: 31-08-2026</a:t>
+              <a:t>Corte: 07-09-2026</a:t>
             </a:r>
             <a:endParaRPr lang="en-US" sz="1100" dirty="0"/>
           </a:p>
@@ -6048,7 +6048,7 @@
                 <a:ea typeface="Calibri" pitchFamily="34" charset="-122"/>
                 <a:cs typeface="Calibri" pitchFamily="34" charset="-120"/>
               </a:rPr>
-              <a:t>Fuente: Data_NCR31082026.xlsx — hoja «Observaciones» · Corte 31-08-2026 · 502 registros desde 10-02-2023</a:t>
+              <a:t>Fuente: Data_NCR07092026.xlsx — hoja «Observaciones» · Corte 07-09-2026 · 509 registros desde 10-02-2023</a:t>
             </a:r>
             <a:endParaRPr lang="en-US" sz="850" dirty="0"/>
           </a:p>
@@ -6641,7 +6641,7 @@
                 <a:ea typeface="Calibri" pitchFamily="34" charset="-122"/>
                 <a:cs typeface="Calibri" pitchFamily="34" charset="-120"/>
               </a:rPr>
-              <a:t>Global del módulo: 92,2%</a:t>
+              <a:t>Global del módulo: 91%</a:t>
             </a:r>
             <a:endParaRPr lang="en-US" sz="950" dirty="0"/>
           </a:p>
@@ -7239,7 +7239,7 @@
                 <a:ea typeface="Calibri" pitchFamily="34" charset="-122"/>
                 <a:cs typeface="Calibri" pitchFamily="34" charset="-120"/>
               </a:rPr>
-              <a:t>global del módulo 32,3%</a:t>
+              <a:t>global del módulo 31,8%</a:t>
             </a:r>
             <a:endParaRPr lang="en-US" sz="1000" dirty="0"/>
           </a:p>
@@ -7849,7 +7849,7 @@
                 <a:ea typeface="Calibri" pitchFamily="34" charset="-122"/>
                 <a:cs typeface="Calibri" pitchFamily="34" charset="-120"/>
               </a:rPr>
-              <a:t>Fuente: Data_NCR31082026.xlsx — hoja «Observaciones» · Corte 31-08-2026 · 502 registros desde 10-02-2023</a:t>
+              <a:t>Fuente: Data_NCR07092026.xlsx — hoja «Observaciones» · Corte 07-09-2026 · 509 registros desde 10-02-2023</a:t>
             </a:r>
             <a:endParaRPr lang="en-US" sz="850" dirty="0"/>
           </a:p>
@@ -8708,7 +8708,7 @@
                 <a:ea typeface="Calibri" pitchFamily="34" charset="-122"/>
                 <a:cs typeface="Calibri" pitchFamily="34" charset="-120"/>
               </a:rPr>
-              <a:t>111</a:t>
+              <a:t>118</a:t>
             </a:r>
             <a:endParaRPr lang="en-US" sz="1050" dirty="0"/>
           </a:p>
@@ -8831,7 +8831,7 @@
                 <a:ea typeface="Calibri" pitchFamily="34" charset="-122"/>
                 <a:cs typeface="Calibri" pitchFamily="34" charset="-120"/>
               </a:rPr>
-              <a:t>SEMANA 24-08-2026 — 30-08-2026</a:t>
+              <a:t>SEMANA 31-08-2026 — 06-09-2026</a:t>
             </a:r>
             <a:endParaRPr lang="en-US" sz="1000" dirty="0"/>
           </a:p>
@@ -8909,7 +8909,7 @@
                 <a:ea typeface="Calibri" pitchFamily="34" charset="-122"/>
                 <a:cs typeface="Calibri" pitchFamily="34" charset="-120"/>
               </a:rPr>
-              <a:t>Fuente: Data_NCR31082026.xlsx — hoja «Observaciones» · Corte 31-08-2026 · 502 registros desde 10-02-2023</a:t>
+              <a:t>Fuente: Data_NCR07092026.xlsx — hoja «Observaciones» · Corte 07-09-2026 · 509 registros desde 10-02-2023</a:t>
             </a:r>
             <a:endParaRPr lang="en-US" sz="850" dirty="0"/>
           </a:p>
@@ -9262,7 +9262,7 @@
                 <a:ea typeface="Calibri" pitchFamily="34" charset="-122"/>
                 <a:cs typeface="Calibri" pitchFamily="34" charset="-120"/>
               </a:rPr>
-              <a:t>248 hallazgos levantados · 52 internas · 196 del cliente · 12 especialidades involucradas.</a:t>
+              <a:t>249 hallazgos levantados · 52 internas · 197 del cliente · 12 especialidades involucradas.</a:t>
             </a:r>
             <a:endParaRPr lang="en-US" sz="1350" dirty="0"/>
           </a:p>
@@ -9321,7 +9321,7 @@
                 <a:ea typeface="Cambria" pitchFamily="34" charset="-122"/>
                 <a:cs typeface="Cambria" pitchFamily="34" charset="-120"/>
               </a:rPr>
-              <a:t>97,6%</a:t>
+              <a:t>97,2%</a:t>
             </a:r>
             <a:endParaRPr lang="en-US" sz="3400" dirty="0"/>
           </a:p>
@@ -9399,7 +9399,7 @@
                 <a:ea typeface="Cambria" pitchFamily="34" charset="-122"/>
                 <a:cs typeface="Cambria" pitchFamily="34" charset="-120"/>
               </a:rPr>
-              <a:t>6</a:t>
+              <a:t>7</a:t>
             </a:r>
             <a:endParaRPr lang="en-US" sz="3400" dirty="0"/>
           </a:p>
@@ -9555,7 +9555,7 @@
                 <a:ea typeface="Cambria" pitchFamily="34" charset="-122"/>
                 <a:cs typeface="Cambria" pitchFamily="34" charset="-120"/>
               </a:rPr>
-              <a:t>21%</a:t>
+              <a:t>20,9%</a:t>
             </a:r>
             <a:endParaRPr lang="en-US" sz="3400" dirty="0"/>
           </a:p>
@@ -9633,7 +9633,7 @@
                 <a:ea typeface="Calibri" pitchFamily="34" charset="-122"/>
                 <a:cs typeface="Calibri" pitchFamily="34" charset="-120"/>
               </a:rPr>
-              <a:t>Corte: 31-08-2026</a:t>
+              <a:t>Corte: 07-09-2026</a:t>
             </a:r>
             <a:endParaRPr lang="en-US" sz="1100" dirty="0"/>
           </a:p>
@@ -9672,7 +9672,7 @@
                 <a:ea typeface="Calibri" pitchFamily="34" charset="-122"/>
                 <a:cs typeface="Calibri" pitchFamily="34" charset="-120"/>
               </a:rPr>
-              <a:t>Fuente: Data_NCR31082026.xlsx — hoja «Observaciones» · Corte 31-08-2026 · 502 registros desde 10-02-2023</a:t>
+              <a:t>Fuente: Data_NCR07092026.xlsx — hoja «Observaciones» · Corte 07-09-2026 · 509 registros desde 10-02-2023</a:t>
             </a:r>
             <a:endParaRPr lang="en-US" sz="850" dirty="0"/>
           </a:p>
@@ -9938,7 +9938,7 @@
                 <a:ea typeface="Cambria" pitchFamily="34" charset="-122"/>
                 <a:cs typeface="Cambria" pitchFamily="34" charset="-120"/>
               </a:rPr>
-              <a:t>248</a:t>
+              <a:t>249</a:t>
             </a:r>
             <a:endParaRPr lang="en-US" sz="4000" dirty="0"/>
           </a:p>
@@ -10055,7 +10055,7 @@
                 <a:ea typeface="Calibri" pitchFamily="34" charset="-122"/>
                 <a:cs typeface="Calibri" pitchFamily="34" charset="-120"/>
               </a:rPr>
-              <a:t>52 internas · 196 del cliente</a:t>
+              <a:t>52 internas · 197 del cliente</a:t>
             </a:r>
             <a:endParaRPr lang="en-US" sz="950" dirty="0"/>
           </a:p>
@@ -10148,7 +10148,7 @@
                 <a:ea typeface="Cambria" pitchFamily="34" charset="-122"/>
                 <a:cs typeface="Cambria" pitchFamily="34" charset="-120"/>
               </a:rPr>
-              <a:t>97,6%</a:t>
+              <a:t>97,2%</a:t>
             </a:r>
             <a:endParaRPr lang="en-US" sz="4000" dirty="0"/>
           </a:p>
@@ -10187,7 +10187,7 @@
                 <a:ea typeface="Calibri" pitchFamily="34" charset="-122"/>
                 <a:cs typeface="Calibri" pitchFamily="34" charset="-120"/>
               </a:rPr>
-              <a:t>242/248</a:t>
+              <a:t>242/249</a:t>
             </a:r>
             <a:endParaRPr lang="en-US" sz="1400" dirty="0"/>
           </a:p>
@@ -10265,7 +10265,7 @@
                 <a:ea typeface="Calibri" pitchFamily="34" charset="-122"/>
                 <a:cs typeface="Calibri" pitchFamily="34" charset="-120"/>
               </a:rPr>
-              <a:t>Global del módulo: 92,2%</a:t>
+              <a:t>Global del módulo: 91%</a:t>
             </a:r>
             <a:endParaRPr lang="en-US" sz="950" dirty="0"/>
           </a:p>
@@ -10358,7 +10358,7 @@
                 <a:ea typeface="Cambria" pitchFamily="34" charset="-122"/>
                 <a:cs typeface="Cambria" pitchFamily="34" charset="-120"/>
               </a:rPr>
-              <a:t>6</a:t>
+              <a:t>7</a:t>
             </a:r>
             <a:endParaRPr lang="en-US" sz="4000" dirty="0"/>
           </a:p>
@@ -10475,7 +10475,7 @@
                 <a:ea typeface="Calibri" pitchFamily="34" charset="-122"/>
                 <a:cs typeface="Calibri" pitchFamily="34" charset="-120"/>
               </a:rPr>
-              <a:t>5 iniciado · 1 listo para revisión</a:t>
+              <a:t>6 iniciado · 1 listo para revisión</a:t>
             </a:r>
             <a:endParaRPr lang="en-US" sz="950" dirty="0"/>
           </a:p>
@@ -10801,7 +10801,7 @@
                 <a:ea typeface="Cambria" pitchFamily="34" charset="-122"/>
                 <a:cs typeface="Cambria" pitchFamily="34" charset="-120"/>
               </a:rPr>
-              <a:t>21%</a:t>
+              <a:t>20,9%</a:t>
             </a:r>
             <a:endParaRPr lang="en-US" sz="2600" dirty="0"/>
           </a:p>
@@ -10863,7 +10863,7 @@
                 <a:ea typeface="Calibri" pitchFamily="34" charset="-122"/>
                 <a:cs typeface="Calibri" pitchFamily="34" charset="-120"/>
               </a:rPr>
-              <a:t>global del módulo 32,3%</a:t>
+              <a:t>global del módulo 31,8%</a:t>
             </a:r>
             <a:endParaRPr lang="en-US" sz="1000" dirty="0"/>
           </a:p>
@@ -11121,7 +11121,7 @@
                 <a:ea typeface="Calibri" pitchFamily="34" charset="-122"/>
                 <a:cs typeface="Calibri" pitchFamily="34" charset="-120"/>
               </a:rPr>
-              <a:t>6 ab.</a:t>
+              <a:t>7 ab.</a:t>
             </a:r>
             <a:endParaRPr lang="en-US" sz="950" dirty="0"/>
           </a:p>
@@ -11160,7 +11160,7 @@
                 <a:ea typeface="Cambria" pitchFamily="34" charset="-122"/>
                 <a:cs typeface="Cambria" pitchFamily="34" charset="-120"/>
               </a:rPr>
-              <a:t>196</a:t>
+              <a:t>197</a:t>
             </a:r>
             <a:endParaRPr lang="en-US" sz="1600" dirty="0"/>
           </a:p>
@@ -11199,7 +11199,7 @@
                 <a:ea typeface="Calibri" pitchFamily="34" charset="-122"/>
                 <a:cs typeface="Calibri" pitchFamily="34" charset="-120"/>
               </a:rPr>
-              <a:t>Fuente: Data_NCR31082026.xlsx — hoja «Observaciones» · Corte 31-08-2026 · 502 registros desde 10-02-2023</a:t>
+              <a:t>Fuente: Data_NCR07092026.xlsx — hoja «Observaciones» · Corte 07-09-2026 · 509 registros desde 10-02-2023</a:t>
             </a:r>
             <a:endParaRPr lang="en-US" sz="850" dirty="0"/>
           </a:p>
@@ -11450,7 +11450,7 @@
                 <a:ea typeface="Calibri" pitchFamily="34" charset="-122"/>
                 <a:cs typeface="Calibri" pitchFamily="34" charset="-120"/>
               </a:rPr>
-              <a:t>6 hallazgos siguen abiertos; 0 con más de 180 días. Se listan del más antiguo al más reciente.</a:t>
+              <a:t>7 hallazgos siguen abiertos; 0 con más de 180 días. Se listan del más antiguo al más reciente.</a:t>
             </a:r>
             <a:endParaRPr lang="en-US" sz="1350" dirty="0"/>
           </a:p>
@@ -12058,7 +12058,7 @@
                 <a:ea typeface="Calibri" pitchFamily="34" charset="-122"/>
                 <a:cs typeface="Calibri" pitchFamily="34" charset="-120"/>
               </a:rPr>
-              <a:t>161</a:t>
+              <a:t>168</a:t>
             </a:r>
             <a:endParaRPr lang="en-US" sz="1050" dirty="0"/>
           </a:p>
@@ -12413,7 +12413,7 @@
                 <a:ea typeface="Calibri" pitchFamily="34" charset="-122"/>
                 <a:cs typeface="Calibri" pitchFamily="34" charset="-120"/>
               </a:rPr>
-              <a:t>62</a:t>
+              <a:t>69</a:t>
             </a:r>
             <a:endParaRPr lang="en-US" sz="1050" dirty="0"/>
           </a:p>
@@ -12748,7 +12748,7 @@
                 <a:ea typeface="Calibri" pitchFamily="34" charset="-122"/>
                 <a:cs typeface="Calibri" pitchFamily="34" charset="-120"/>
               </a:rPr>
-              <a:t>34</a:t>
+              <a:t>41</a:t>
             </a:r>
             <a:endParaRPr lang="en-US" sz="1050" dirty="0"/>
           </a:p>
@@ -13103,7 +13103,7 @@
                 <a:ea typeface="Calibri" pitchFamily="34" charset="-122"/>
                 <a:cs typeface="Calibri" pitchFamily="34" charset="-120"/>
               </a:rPr>
-              <a:t>12</a:t>
+              <a:t>19</a:t>
             </a:r>
             <a:endParaRPr lang="en-US" sz="1050" dirty="0"/>
           </a:p>
@@ -13438,7 +13438,7 @@
                 <a:ea typeface="Calibri" pitchFamily="34" charset="-122"/>
                 <a:cs typeface="Calibri" pitchFamily="34" charset="-120"/>
               </a:rPr>
-              <a:t>12</a:t>
+              <a:t>19</a:t>
             </a:r>
             <a:endParaRPr lang="en-US" sz="1050" dirty="0"/>
           </a:p>
@@ -13793,7 +13793,7 @@
                 <a:ea typeface="Calibri" pitchFamily="34" charset="-122"/>
                 <a:cs typeface="Calibri" pitchFamily="34" charset="-120"/>
               </a:rPr>
-              <a:t>7</a:t>
+              <a:t>14</a:t>
             </a:r>
             <a:endParaRPr lang="en-US" sz="1050" dirty="0"/>
           </a:p>
@@ -13863,7 +13863,342 @@
       </p:sp>
       <p:sp>
         <p:nvSpPr>
-          <p:cNvPr id="72" name="Shape 69"/>
+          <p:cNvPr id="72" name="Text 69"/>
+          <p:cNvSpPr/>
+          <p:nvPr/>
+        </p:nvSpPr>
+        <p:spPr>
+          <a:xfrm>
+            <a:off x="502920" y="4398264"/>
+            <a:ext cx="822960" cy="256032"/>
+          </a:xfrm>
+          <a:prstGeom prst="rect">
+            <a:avLst/>
+          </a:prstGeom>
+          <a:noFill/>
+          <a:ln/>
+        </p:spPr>
+        <p:txBody>
+          <a:bodyPr wrap="square" lIns="0" tIns="0" rIns="0" bIns="0" rtlCol="0" anchor="ctr"/>
+          <a:lstStyle/>
+          <a:p>
+            <a:pPr algn="l" indent="0" marL="0">
+              <a:buNone/>
+            </a:pPr>
+            <a:r>
+              <a:rPr lang="en-US" sz="1050" dirty="0">
+                <a:solidFill>
+                  <a:srgbClr val="1A2433"/>
+                </a:solidFill>
+                <a:latin typeface="Calibri" pitchFamily="34" charset="0"/>
+                <a:ea typeface="Calibri" pitchFamily="34" charset="-122"/>
+                <a:cs typeface="Calibri" pitchFamily="34" charset="-120"/>
+              </a:rPr>
+              <a:t>250</a:t>
+            </a:r>
+            <a:endParaRPr lang="en-US" sz="1050" dirty="0"/>
+          </a:p>
+        </p:txBody>
+      </p:sp>
+      <p:sp>
+        <p:nvSpPr>
+          <p:cNvPr id="73" name="Text 70"/>
+          <p:cNvSpPr/>
+          <p:nvPr/>
+        </p:nvSpPr>
+        <p:spPr>
+          <a:xfrm>
+            <a:off x="1371600" y="4398264"/>
+            <a:ext cx="1508760" cy="256032"/>
+          </a:xfrm>
+          <a:prstGeom prst="rect">
+            <a:avLst/>
+          </a:prstGeom>
+          <a:noFill/>
+          <a:ln/>
+        </p:spPr>
+        <p:txBody>
+          <a:bodyPr wrap="square" lIns="0" tIns="0" rIns="0" bIns="0" rtlCol="0" anchor="ctr"/>
+          <a:lstStyle/>
+          <a:p>
+            <a:pPr algn="l" indent="0" marL="0">
+              <a:buNone/>
+            </a:pPr>
+            <a:r>
+              <a:rPr lang="en-US" sz="1050" dirty="0">
+                <a:solidFill>
+                  <a:srgbClr val="1A2433"/>
+                </a:solidFill>
+                <a:latin typeface="Calibri" pitchFamily="34" charset="0"/>
+                <a:ea typeface="Calibri" pitchFamily="34" charset="-122"/>
+                <a:cs typeface="Calibri" pitchFamily="34" charset="-120"/>
+              </a:rPr>
+              <a:t>No Conformidad</a:t>
+            </a:r>
+            <a:endParaRPr lang="en-US" sz="1050" dirty="0"/>
+          </a:p>
+        </p:txBody>
+      </p:sp>
+      <p:sp>
+        <p:nvSpPr>
+          <p:cNvPr id="74" name="Text 71"/>
+          <p:cNvSpPr/>
+          <p:nvPr/>
+        </p:nvSpPr>
+        <p:spPr>
+          <a:xfrm>
+            <a:off x="2926080" y="4398264"/>
+            <a:ext cx="1463040" cy="256032"/>
+          </a:xfrm>
+          <a:prstGeom prst="rect">
+            <a:avLst/>
+          </a:prstGeom>
+          <a:noFill/>
+          <a:ln/>
+        </p:spPr>
+        <p:txBody>
+          <a:bodyPr wrap="square" lIns="0" tIns="0" rIns="0" bIns="0" rtlCol="0" anchor="ctr"/>
+          <a:lstStyle/>
+          <a:p>
+            <a:pPr algn="l" indent="0" marL="0">
+              <a:buNone/>
+            </a:pPr>
+            <a:r>
+              <a:rPr lang="en-US" sz="1050" b="1" dirty="0">
+                <a:solidFill>
+                  <a:srgbClr val="C87A32"/>
+                </a:solidFill>
+                <a:latin typeface="Calibri" pitchFamily="34" charset="0"/>
+                <a:ea typeface="Calibri" pitchFamily="34" charset="-122"/>
+                <a:cs typeface="Calibri" pitchFamily="34" charset="-120"/>
+              </a:rPr>
+              <a:t>Externa · Cliente</a:t>
+            </a:r>
+            <a:endParaRPr lang="en-US" sz="1050" dirty="0"/>
+          </a:p>
+        </p:txBody>
+      </p:sp>
+      <p:sp>
+        <p:nvSpPr>
+          <p:cNvPr id="75" name="Text 72"/>
+          <p:cNvSpPr/>
+          <p:nvPr/>
+        </p:nvSpPr>
+        <p:spPr>
+          <a:xfrm>
+            <a:off x="4434840" y="4398264"/>
+            <a:ext cx="1280160" cy="256032"/>
+          </a:xfrm>
+          <a:prstGeom prst="rect">
+            <a:avLst/>
+          </a:prstGeom>
+          <a:noFill/>
+          <a:ln/>
+        </p:spPr>
+        <p:txBody>
+          <a:bodyPr wrap="square" lIns="0" tIns="0" rIns="0" bIns="0" rtlCol="0" anchor="ctr"/>
+          <a:lstStyle/>
+          <a:p>
+            <a:pPr algn="l" indent="0" marL="0">
+              <a:buNone/>
+            </a:pPr>
+            <a:r>
+              <a:rPr lang="en-US" sz="1050" dirty="0">
+                <a:solidFill>
+                  <a:srgbClr val="1A2433"/>
+                </a:solidFill>
+                <a:latin typeface="Calibri" pitchFamily="34" charset="0"/>
+                <a:ea typeface="Calibri" pitchFamily="34" charset="-122"/>
+                <a:cs typeface="Calibri" pitchFamily="34" charset="-120"/>
+              </a:rPr>
+              <a:t>OO.CC</a:t>
+            </a:r>
+            <a:endParaRPr lang="en-US" sz="1050" dirty="0"/>
+          </a:p>
+        </p:txBody>
+      </p:sp>
+      <p:sp>
+        <p:nvSpPr>
+          <p:cNvPr id="76" name="Text 73"/>
+          <p:cNvSpPr/>
+          <p:nvPr/>
+        </p:nvSpPr>
+        <p:spPr>
+          <a:xfrm>
+            <a:off x="5760720" y="4398264"/>
+            <a:ext cx="1508760" cy="256032"/>
+          </a:xfrm>
+          <a:prstGeom prst="rect">
+            <a:avLst/>
+          </a:prstGeom>
+          <a:noFill/>
+          <a:ln/>
+        </p:spPr>
+        <p:txBody>
+          <a:bodyPr wrap="square" lIns="0" tIns="0" rIns="0" bIns="0" rtlCol="0" anchor="ctr"/>
+          <a:lstStyle/>
+          <a:p>
+            <a:pPr algn="l" indent="0" marL="0">
+              <a:buNone/>
+            </a:pPr>
+            <a:r>
+              <a:rPr lang="en-US" sz="1050" dirty="0">
+                <a:solidFill>
+                  <a:srgbClr val="1A2433"/>
+                </a:solidFill>
+                <a:latin typeface="Calibri" pitchFamily="34" charset="0"/>
+                <a:ea typeface="Calibri" pitchFamily="34" charset="-122"/>
+                <a:cs typeface="Calibri" pitchFamily="34" charset="-120"/>
+              </a:rPr>
+              <a:t>Daniel Ramirez B.</a:t>
+            </a:r>
+            <a:endParaRPr lang="en-US" sz="1050" dirty="0"/>
+          </a:p>
+        </p:txBody>
+      </p:sp>
+      <p:sp>
+        <p:nvSpPr>
+          <p:cNvPr id="77" name="Text 74"/>
+          <p:cNvSpPr/>
+          <p:nvPr/>
+        </p:nvSpPr>
+        <p:spPr>
+          <a:xfrm>
+            <a:off x="7315200" y="4398264"/>
+            <a:ext cx="1325880" cy="256032"/>
+          </a:xfrm>
+          <a:prstGeom prst="rect">
+            <a:avLst/>
+          </a:prstGeom>
+          <a:noFill/>
+          <a:ln/>
+        </p:spPr>
+        <p:txBody>
+          <a:bodyPr wrap="square" lIns="0" tIns="0" rIns="0" bIns="0" rtlCol="0" anchor="ctr"/>
+          <a:lstStyle/>
+          <a:p>
+            <a:pPr algn="l" indent="0" marL="0">
+              <a:buNone/>
+            </a:pPr>
+            <a:r>
+              <a:rPr lang="en-US" sz="1050" dirty="0">
+                <a:solidFill>
+                  <a:srgbClr val="1A2433"/>
+                </a:solidFill>
+                <a:latin typeface="Calibri" pitchFamily="34" charset="0"/>
+                <a:ea typeface="Calibri" pitchFamily="34" charset="-122"/>
+                <a:cs typeface="Calibri" pitchFamily="34" charset="-120"/>
+              </a:rPr>
+              <a:t>Iniciado</a:t>
+            </a:r>
+            <a:endParaRPr lang="en-US" sz="1050" dirty="0"/>
+          </a:p>
+        </p:txBody>
+      </p:sp>
+      <p:sp>
+        <p:nvSpPr>
+          <p:cNvPr id="78" name="Text 75"/>
+          <p:cNvSpPr/>
+          <p:nvPr/>
+        </p:nvSpPr>
+        <p:spPr>
+          <a:xfrm>
+            <a:off x="8686800" y="4398264"/>
+            <a:ext cx="640080" cy="256032"/>
+          </a:xfrm>
+          <a:prstGeom prst="rect">
+            <a:avLst/>
+          </a:prstGeom>
+          <a:noFill/>
+          <a:ln/>
+        </p:spPr>
+        <p:txBody>
+          <a:bodyPr wrap="square" lIns="0" tIns="0" rIns="0" bIns="0" rtlCol="0" anchor="ctr"/>
+          <a:lstStyle/>
+          <a:p>
+            <a:pPr algn="r" indent="0" marL="0">
+              <a:buNone/>
+            </a:pPr>
+            <a:r>
+              <a:rPr lang="en-US" sz="1050" dirty="0">
+                <a:solidFill>
+                  <a:srgbClr val="1A2433"/>
+                </a:solidFill>
+                <a:latin typeface="Calibri" pitchFamily="34" charset="0"/>
+                <a:ea typeface="Calibri" pitchFamily="34" charset="-122"/>
+                <a:cs typeface="Calibri" pitchFamily="34" charset="-120"/>
+              </a:rPr>
+              <a:t>4</a:t>
+            </a:r>
+            <a:endParaRPr lang="en-US" sz="1050" dirty="0"/>
+          </a:p>
+        </p:txBody>
+      </p:sp>
+      <p:sp>
+        <p:nvSpPr>
+          <p:cNvPr id="79" name="Text 76"/>
+          <p:cNvSpPr/>
+          <p:nvPr/>
+        </p:nvSpPr>
+        <p:spPr>
+          <a:xfrm>
+            <a:off x="9464040" y="4398264"/>
+            <a:ext cx="2286000" cy="256032"/>
+          </a:xfrm>
+          <a:prstGeom prst="rect">
+            <a:avLst/>
+          </a:prstGeom>
+          <a:noFill/>
+          <a:ln/>
+        </p:spPr>
+        <p:txBody>
+          <a:bodyPr wrap="square" lIns="0" tIns="0" rIns="0" bIns="0" rtlCol="0" anchor="ctr"/>
+          <a:lstStyle/>
+          <a:p>
+            <a:pPr algn="l" indent="0" marL="0">
+              <a:buNone/>
+            </a:pPr>
+            <a:r>
+              <a:rPr lang="en-US" sz="1000" dirty="0">
+                <a:solidFill>
+                  <a:srgbClr val="1A2433"/>
+                </a:solidFill>
+                <a:latin typeface="Calibri" pitchFamily="34" charset="0"/>
+                <a:ea typeface="Calibri" pitchFamily="34" charset="-122"/>
+                <a:cs typeface="Calibri" pitchFamily="34" charset="-120"/>
+              </a:rPr>
+              <a:t>Determinadas actas de liberación y …</a:t>
+            </a:r>
+            <a:endParaRPr lang="en-US" sz="1000" dirty="0"/>
+          </a:p>
+        </p:txBody>
+      </p:sp>
+      <p:sp>
+        <p:nvSpPr>
+          <p:cNvPr id="80" name="Shape 77"/>
+          <p:cNvSpPr/>
+          <p:nvPr/>
+        </p:nvSpPr>
+        <p:spPr>
+          <a:xfrm>
+            <a:off x="502920" y="4690872"/>
+            <a:ext cx="11247120" cy="0"/>
+          </a:xfrm>
+          <a:prstGeom prst="line">
+            <a:avLst/>
+          </a:prstGeom>
+          <a:noFill/>
+          <a:ln w="9525">
+            <a:solidFill>
+              <a:srgbClr val="D9DFE6"/>
+            </a:solidFill>
+            <a:prstDash val="solid"/>
+          </a:ln>
+        </p:spPr>
+      </p:sp>
+      <p:sp>
+        <p:nvSpPr>
+          <p:cNvPr id="81" name="Shape 78"/>
           <p:cNvSpPr/>
           <p:nvPr/>
         </p:nvSpPr>
@@ -13885,7 +14220,7 @@
       </p:sp>
       <p:sp>
         <p:nvSpPr>
-          <p:cNvPr id="73" name="Text 70"/>
+          <p:cNvPr id="82" name="Text 79"/>
           <p:cNvSpPr/>
           <p:nvPr/>
         </p:nvSpPr>
@@ -13916,7 +14251,7 @@
                 <a:ea typeface="Calibri" pitchFamily="34" charset="-122"/>
                 <a:cs typeface="Calibri" pitchFamily="34" charset="-120"/>
               </a:rPr>
-              <a:t>SEMANA 24-08-2026 — 30-08-2026</a:t>
+              <a:t>SEMANA 31-08-2026 — 06-09-2026</a:t>
             </a:r>
             <a:endParaRPr lang="en-US" sz="1000" dirty="0"/>
           </a:p>
@@ -13924,7 +14259,7 @@
       </p:sp>
       <p:sp>
         <p:nvSpPr>
-          <p:cNvPr id="74" name="Text 71"/>
+          <p:cNvPr id="83" name="Text 80"/>
           <p:cNvSpPr/>
           <p:nvPr/>
         </p:nvSpPr>
@@ -13963,7 +14298,7 @@
       </p:sp>
       <p:sp>
         <p:nvSpPr>
-          <p:cNvPr id="75" name="Text 72"/>
+          <p:cNvPr id="84" name="Text 81"/>
           <p:cNvSpPr/>
           <p:nvPr/>
         </p:nvSpPr>
@@ -13994,7 +14329,7 @@
                 <a:ea typeface="Calibri" pitchFamily="34" charset="-122"/>
                 <a:cs typeface="Calibri" pitchFamily="34" charset="-120"/>
               </a:rPr>
-              <a:t>Fuente: Data_NCR31082026.xlsx — hoja «Observaciones» · Corte 31-08-2026 · 502 registros desde 10-02-2023</a:t>
+              <a:t>Fuente: Data_NCR07092026.xlsx — hoja «Observaciones» · Corte 07-09-2026 · 509 registros desde 10-02-2023</a:t>
             </a:r>
             <a:endParaRPr lang="en-US" sz="850" dirty="0"/>
           </a:p>
@@ -14002,7 +14337,7 @@
       </p:sp>
       <p:sp>
         <p:nvSpPr>
-          <p:cNvPr id="76" name="Text 73"/>
+          <p:cNvPr id="85" name="Text 82"/>
           <p:cNvSpPr/>
           <p:nvPr/>
         </p:nvSpPr>
@@ -14041,7 +14376,7 @@
       </p:sp>
       <p:sp>
         <p:nvSpPr>
-          <p:cNvPr id="77" name="Text 74"/>
+          <p:cNvPr id="86" name="Text 83"/>
           <p:cNvSpPr/>
           <p:nvPr/>
         </p:nvSpPr>
@@ -14347,7 +14682,7 @@
                 <a:ea typeface="Calibri" pitchFamily="34" charset="-122"/>
                 <a:cs typeface="Calibri" pitchFamily="34" charset="-120"/>
               </a:rPr>
-              <a:t>164 hallazgos levantados · 53 internas · 71 del cliente · 40 de subcontrato · 18 especialidades involucradas.</a:t>
+              <a:t>170 hallazgos levantados · 53 internas · 77 del cliente · 40 de subcontrato · 18 especialidades involucradas.</a:t>
             </a:r>
             <a:endParaRPr lang="en-US" sz="1350" dirty="0"/>
           </a:p>
@@ -14406,7 +14741,7 @@
                 <a:ea typeface="Cambria" pitchFamily="34" charset="-122"/>
                 <a:cs typeface="Cambria" pitchFamily="34" charset="-120"/>
               </a:rPr>
-              <a:t>80,5%</a:t>
+              <a:t>77,6%</a:t>
             </a:r>
             <a:endParaRPr lang="en-US" sz="3400" dirty="0"/>
           </a:p>
@@ -14484,7 +14819,7 @@
                 <a:ea typeface="Cambria" pitchFamily="34" charset="-122"/>
                 <a:cs typeface="Cambria" pitchFamily="34" charset="-120"/>
               </a:rPr>
-              <a:t>32</a:t>
+              <a:t>38</a:t>
             </a:r>
             <a:endParaRPr lang="en-US" sz="3400" dirty="0"/>
           </a:p>
@@ -14640,7 +14975,7 @@
                 <a:ea typeface="Cambria" pitchFamily="34" charset="-122"/>
                 <a:cs typeface="Cambria" pitchFamily="34" charset="-120"/>
               </a:rPr>
-              <a:t>32,3%</a:t>
+              <a:t>31,2%</a:t>
             </a:r>
             <a:endParaRPr lang="en-US" sz="3400" dirty="0"/>
           </a:p>
@@ -14718,7 +15053,7 @@
                 <a:ea typeface="Calibri" pitchFamily="34" charset="-122"/>
                 <a:cs typeface="Calibri" pitchFamily="34" charset="-120"/>
               </a:rPr>
-              <a:t>Corte: 31-08-2026</a:t>
+              <a:t>Corte: 07-09-2026</a:t>
             </a:r>
             <a:endParaRPr lang="en-US" sz="1100" dirty="0"/>
           </a:p>
@@ -14757,7 +15092,7 @@
                 <a:ea typeface="Calibri" pitchFamily="34" charset="-122"/>
                 <a:cs typeface="Calibri" pitchFamily="34" charset="-120"/>
               </a:rPr>
-              <a:t>Fuente: Data_NCR31082026.xlsx — hoja «Observaciones» · Corte 31-08-2026 · 502 registros desde 10-02-2023</a:t>
+              <a:t>Fuente: Data_NCR07092026.xlsx — hoja «Observaciones» · Corte 07-09-2026 · 509 registros desde 10-02-2023</a:t>
             </a:r>
             <a:endParaRPr lang="en-US" sz="850" dirty="0"/>
           </a:p>
@@ -15023,7 +15358,7 @@
                 <a:ea typeface="Cambria" pitchFamily="34" charset="-122"/>
                 <a:cs typeface="Cambria" pitchFamily="34" charset="-120"/>
               </a:rPr>
-              <a:t>164</a:t>
+              <a:t>170</a:t>
             </a:r>
             <a:endParaRPr lang="en-US" sz="4000" dirty="0"/>
           </a:p>
@@ -15140,7 +15475,7 @@
                 <a:ea typeface="Calibri" pitchFamily="34" charset="-122"/>
                 <a:cs typeface="Calibri" pitchFamily="34" charset="-120"/>
               </a:rPr>
-              <a:t>53 internas · 71 del cliente · 40 de subcontrato</a:t>
+              <a:t>53 internas · 77 del cliente · 40 de subcontrato</a:t>
             </a:r>
             <a:endParaRPr lang="en-US" sz="950" dirty="0"/>
           </a:p>
@@ -15233,7 +15568,7 @@
                 <a:ea typeface="Cambria" pitchFamily="34" charset="-122"/>
                 <a:cs typeface="Cambria" pitchFamily="34" charset="-120"/>
               </a:rPr>
-              <a:t>80,5%</a:t>
+              <a:t>77,6%</a:t>
             </a:r>
             <a:endParaRPr lang="en-US" sz="4000" dirty="0"/>
           </a:p>
@@ -15272,7 +15607,7 @@
                 <a:ea typeface="Calibri" pitchFamily="34" charset="-122"/>
                 <a:cs typeface="Calibri" pitchFamily="34" charset="-120"/>
               </a:rPr>
-              <a:t>132/164</a:t>
+              <a:t>132/170</a:t>
             </a:r>
             <a:endParaRPr lang="en-US" sz="1400" dirty="0"/>
           </a:p>
@@ -15350,7 +15685,7 @@
                 <a:ea typeface="Calibri" pitchFamily="34" charset="-122"/>
                 <a:cs typeface="Calibri" pitchFamily="34" charset="-120"/>
               </a:rPr>
-              <a:t>Global del módulo: 92,2%</a:t>
+              <a:t>Global del módulo: 91%</a:t>
             </a:r>
             <a:endParaRPr lang="en-US" sz="950" dirty="0"/>
           </a:p>
@@ -15443,7 +15778,7 @@
                 <a:ea typeface="Cambria" pitchFamily="34" charset="-122"/>
                 <a:cs typeface="Cambria" pitchFamily="34" charset="-120"/>
               </a:rPr>
-              <a:t>32</a:t>
+              <a:t>38</a:t>
             </a:r>
             <a:endParaRPr lang="en-US" sz="4000" dirty="0"/>
           </a:p>
@@ -15560,7 +15895,7 @@
                 <a:ea typeface="Calibri" pitchFamily="34" charset="-122"/>
                 <a:cs typeface="Calibri" pitchFamily="34" charset="-120"/>
               </a:rPr>
-              <a:t>1 iniciado · 21 listo para revisión · 9 stand by · 1 observada</a:t>
+              <a:t>1 iniciado · 21 listo para revisión · 9 stand by · 1 observada · 6 pendiente</a:t>
             </a:r>
             <a:endParaRPr lang="en-US" sz="950" dirty="0"/>
           </a:p>
@@ -15886,7 +16221,7 @@
                 <a:ea typeface="Cambria" pitchFamily="34" charset="-122"/>
                 <a:cs typeface="Cambria" pitchFamily="34" charset="-120"/>
               </a:rPr>
-              <a:t>32,3%</a:t>
+              <a:t>31,2%</a:t>
             </a:r>
             <a:endParaRPr lang="en-US" sz="2600" dirty="0"/>
           </a:p>
@@ -15948,7 +16283,7 @@
                 <a:ea typeface="Calibri" pitchFamily="34" charset="-122"/>
                 <a:cs typeface="Calibri" pitchFamily="34" charset="-120"/>
               </a:rPr>
-              <a:t>global del módulo 32,3%</a:t>
+              <a:t>global del módulo 31,8%</a:t>
             </a:r>
             <a:endParaRPr lang="en-US" sz="1000" dirty="0"/>
           </a:p>
@@ -16206,7 +16541,7 @@
                 <a:ea typeface="Calibri" pitchFamily="34" charset="-122"/>
                 <a:cs typeface="Calibri" pitchFamily="34" charset="-120"/>
               </a:rPr>
-              <a:t>31 ab.</a:t>
+              <a:t>37 ab.</a:t>
             </a:r>
             <a:endParaRPr lang="en-US" sz="950" dirty="0"/>
           </a:p>
@@ -16245,7 +16580,7 @@
                 <a:ea typeface="Cambria" pitchFamily="34" charset="-122"/>
                 <a:cs typeface="Cambria" pitchFamily="34" charset="-120"/>
               </a:rPr>
-              <a:t>71</a:t>
+              <a:t>77</a:t>
             </a:r>
             <a:endParaRPr lang="en-US" sz="1600" dirty="0"/>
           </a:p>
@@ -16421,7 +16756,7 @@
                 <a:ea typeface="Calibri" pitchFamily="34" charset="-122"/>
                 <a:cs typeface="Calibri" pitchFamily="34" charset="-120"/>
               </a:rPr>
-              <a:t>Fuente: Data_NCR31082026.xlsx — hoja «Observaciones» · Corte 31-08-2026 · 502 registros desde 10-02-2023</a:t>
+              <a:t>Fuente: Data_NCR07092026.xlsx — hoja «Observaciones» · Corte 07-09-2026 · 509 registros desde 10-02-2023</a:t>
             </a:r>
             <a:endParaRPr lang="en-US" sz="850" dirty="0"/>
           </a:p>
@@ -16672,7 +17007,7 @@
                 <a:ea typeface="Calibri" pitchFamily="34" charset="-122"/>
                 <a:cs typeface="Calibri" pitchFamily="34" charset="-120"/>
               </a:rPr>
-              <a:t>32 hallazgos siguen abiertos; 13 con más de 180 días. Se listan del más antiguo al más reciente.</a:t>
+              <a:t>38 hallazgos siguen abiertos; 17 con más de 180 días. Se listan del más antiguo al más reciente.</a:t>
             </a:r>
             <a:endParaRPr lang="en-US" sz="1350" dirty="0"/>
           </a:p>
@@ -17280,7 +17615,7 @@
                 <a:ea typeface="Calibri" pitchFamily="34" charset="-122"/>
                 <a:cs typeface="Calibri" pitchFamily="34" charset="-120"/>
               </a:rPr>
-              <a:t>319</a:t>
+              <a:t>326</a:t>
             </a:r>
             <a:endParaRPr lang="en-US" sz="1050" dirty="0"/>
           </a:p>
@@ -17635,7 +17970,7 @@
                 <a:ea typeface="Calibri" pitchFamily="34" charset="-122"/>
                 <a:cs typeface="Calibri" pitchFamily="34" charset="-120"/>
               </a:rPr>
-              <a:t>319</a:t>
+              <a:t>326</a:t>
             </a:r>
             <a:endParaRPr lang="en-US" sz="1050" dirty="0"/>
           </a:p>
@@ -17970,7 +18305,7 @@
                 <a:ea typeface="Calibri" pitchFamily="34" charset="-122"/>
                 <a:cs typeface="Calibri" pitchFamily="34" charset="-120"/>
               </a:rPr>
-              <a:t>298</a:t>
+              <a:t>305</a:t>
             </a:r>
             <a:endParaRPr lang="en-US" sz="1050" dirty="0"/>
           </a:p>
@@ -18325,7 +18660,7 @@
                 <a:ea typeface="Calibri" pitchFamily="34" charset="-122"/>
                 <a:cs typeface="Calibri" pitchFamily="34" charset="-120"/>
               </a:rPr>
-              <a:t>294</a:t>
+              <a:t>301</a:t>
             </a:r>
             <a:endParaRPr lang="en-US" sz="1050" dirty="0"/>
           </a:p>
@@ -18660,7 +18995,7 @@
                 <a:ea typeface="Calibri" pitchFamily="34" charset="-122"/>
                 <a:cs typeface="Calibri" pitchFamily="34" charset="-120"/>
               </a:rPr>
-              <a:t>257</a:t>
+              <a:t>264</a:t>
             </a:r>
             <a:endParaRPr lang="en-US" sz="1050" dirty="0"/>
           </a:p>
@@ -19015,7 +19350,7 @@
                 <a:ea typeface="Calibri" pitchFamily="34" charset="-122"/>
                 <a:cs typeface="Calibri" pitchFamily="34" charset="-120"/>
               </a:rPr>
-              <a:t>228</a:t>
+              <a:t>235</a:t>
             </a:r>
             <a:endParaRPr lang="en-US" sz="1050" dirty="0"/>
           </a:p>
@@ -19350,7 +19685,7 @@
                 <a:ea typeface="Calibri" pitchFamily="34" charset="-122"/>
                 <a:cs typeface="Calibri" pitchFamily="34" charset="-120"/>
               </a:rPr>
-              <a:t>228</a:t>
+              <a:t>235</a:t>
             </a:r>
             <a:endParaRPr lang="en-US" sz="1050" dirty="0"/>
           </a:p>
@@ -19705,7 +20040,7 @@
                 <a:ea typeface="Calibri" pitchFamily="34" charset="-122"/>
                 <a:cs typeface="Calibri" pitchFamily="34" charset="-120"/>
               </a:rPr>
-              <a:t>228</a:t>
+              <a:t>235</a:t>
             </a:r>
             <a:endParaRPr lang="en-US" sz="1050" dirty="0"/>
           </a:p>
@@ -20040,7 +20375,7 @@
                 <a:ea typeface="Calibri" pitchFamily="34" charset="-122"/>
                 <a:cs typeface="Calibri" pitchFamily="34" charset="-120"/>
               </a:rPr>
-              <a:t>228</a:t>
+              <a:t>235</a:t>
             </a:r>
             <a:endParaRPr lang="en-US" sz="1050" dirty="0"/>
           </a:p>
@@ -20141,7 +20476,7 @@
                 <a:ea typeface="Calibri" pitchFamily="34" charset="-122"/>
                 <a:cs typeface="Calibri" pitchFamily="34" charset="-120"/>
               </a:rPr>
-              <a:t>Se listan los 9 más antiguos de 32 abiertos; el detalle completo está en el panel.</a:t>
+              <a:t>Se listan los 9 más antiguos de 38 abiertos; el detalle completo está en el panel.</a:t>
             </a:r>
             <a:endParaRPr lang="en-US" sz="950" dirty="0"/>
           </a:p>
@@ -20164,7 +20499,7 @@
             </a:avLst>
           </a:prstGeom>
           <a:solidFill>
-            <a:srgbClr val="E9EDF2"/>
+            <a:srgbClr val="12233B"/>
           </a:solidFill>
           <a:ln/>
         </p:spPr>
@@ -20196,13 +20531,13 @@
             <a:r>
               <a:rPr lang="en-US" sz="1000" b="1" spc="100" kern="0" dirty="0">
                 <a:solidFill>
-                  <a:srgbClr val="56606E"/>
-                </a:solidFill>
-                <a:latin typeface="Calibri" pitchFamily="34" charset="0"/>
-                <a:ea typeface="Calibri" pitchFamily="34" charset="-122"/>
-                <a:cs typeface="Calibri" pitchFamily="34" charset="-120"/>
-              </a:rPr>
-              <a:t>SEMANA 24-08-2026 — 30-08-2026</a:t>
+                  <a:srgbClr val="E3A55B"/>
+                </a:solidFill>
+                <a:latin typeface="Calibri" pitchFamily="34" charset="0"/>
+                <a:ea typeface="Calibri" pitchFamily="34" charset="-122"/>
+                <a:cs typeface="Calibri" pitchFamily="34" charset="-120"/>
+              </a:rPr>
+              <a:t>SEMANA 31-08-2026 — 06-09-2026</a:t>
             </a:r>
             <a:endParaRPr lang="en-US" sz="1000" dirty="0"/>
           </a:p>
@@ -20235,13 +20570,13 @@
             <a:r>
               <a:rPr lang="en-US" sz="1150" dirty="0">
                 <a:solidFill>
-                  <a:srgbClr val="56606E"/>
-                </a:solidFill>
-                <a:latin typeface="Calibri" pitchFamily="34" charset="0"/>
-                <a:ea typeface="Calibri" pitchFamily="34" charset="-122"/>
-                <a:cs typeface="Calibri" pitchFamily="34" charset="-120"/>
-              </a:rPr>
-              <a:t>Sin hallazgos nuevos en el período.</a:t>
+                  <a:srgbClr val="FFFFFF"/>
+                </a:solidFill>
+                <a:latin typeface="Calibri" pitchFamily="34" charset="0"/>
+                <a:ea typeface="Calibri" pitchFamily="34" charset="-122"/>
+                <a:cs typeface="Calibri" pitchFamily="34" charset="-120"/>
+              </a:rPr>
+              <a:t>6 hallazgos nuevos · 0 internas · 6 del cliente · Sin especialidad 6 · 6 siguen abiertos</a:t>
             </a:r>
             <a:endParaRPr lang="en-US" sz="1150" dirty="0"/>
           </a:p>
@@ -20280,7 +20615,7 @@
                 <a:ea typeface="Calibri" pitchFamily="34" charset="-122"/>
                 <a:cs typeface="Calibri" pitchFamily="34" charset="-120"/>
               </a:rPr>
-              <a:t>Fuente: Data_NCR31082026.xlsx — hoja «Observaciones» · Corte 31-08-2026 · 502 registros desde 10-02-2023</a:t>
+              <a:t>Fuente: Data_NCR07092026.xlsx — hoja «Observaciones» · Corte 07-09-2026 · 509 registros desde 10-02-2023</a:t>
             </a:r>
             <a:endParaRPr lang="en-US" sz="850" dirty="0"/>
           </a:p>
@@ -20585,7 +20920,7 @@
                 <a:ea typeface="Cambria" pitchFamily="34" charset="-122"/>
                 <a:cs typeface="Cambria" pitchFamily="34" charset="-120"/>
               </a:rPr>
-              <a:t>92,2%</a:t>
+              <a:t>91%</a:t>
             </a:r>
             <a:endParaRPr lang="en-US" sz="4000" dirty="0"/>
           </a:p>
@@ -20624,7 +20959,7 @@
                 <a:ea typeface="Calibri" pitchFamily="34" charset="-122"/>
                 <a:cs typeface="Calibri" pitchFamily="34" charset="-120"/>
               </a:rPr>
-              <a:t>463/502</a:t>
+              <a:t>463/509</a:t>
             </a:r>
             <a:endParaRPr lang="en-US" sz="1400" dirty="0"/>
           </a:p>
@@ -20702,7 +21037,7 @@
                 <a:ea typeface="Calibri" pitchFamily="34" charset="-122"/>
                 <a:cs typeface="Calibri" pitchFamily="34" charset="-120"/>
               </a:rPr>
-              <a:t>39 abiertos · 13 con más de 180 días</a:t>
+              <a:t>46 abiertos · 17 con más de 180 días</a:t>
             </a:r>
             <a:endParaRPr lang="en-US" sz="950" dirty="0"/>
           </a:p>
@@ -20795,7 +21130,7 @@
                 <a:ea typeface="Cambria" pitchFamily="34" charset="-122"/>
                 <a:cs typeface="Cambria" pitchFamily="34" charset="-120"/>
               </a:rPr>
-              <a:t>39</a:t>
+              <a:t>46</a:t>
             </a:r>
             <a:endParaRPr lang="en-US" sz="4000" dirty="0"/>
           </a:p>
@@ -20834,7 +21169,7 @@
                 <a:ea typeface="Calibri" pitchFamily="34" charset="-122"/>
                 <a:cs typeface="Calibri" pitchFamily="34" charset="-120"/>
               </a:rPr>
-              <a:t>de 502 levantados</a:t>
+              <a:t>de 509 levantados</a:t>
             </a:r>
             <a:endParaRPr lang="en-US" sz="1400" dirty="0"/>
           </a:p>
@@ -20912,7 +21247,7 @@
                 <a:ea typeface="Calibri" pitchFamily="34" charset="-122"/>
                 <a:cs typeface="Calibri" pitchFamily="34" charset="-120"/>
               </a:rPr>
-              <a:t>6 iniciado · 23 listo para revisión · 9 stand by · 1 observada</a:t>
+              <a:t>7 iniciado · 23 listo para revisión · 9 stand by · 1 observada · 6 pendiente</a:t>
             </a:r>
             <a:endParaRPr lang="en-US" sz="950" dirty="0"/>
           </a:p>
@@ -21005,7 +21340,7 @@
                 <a:ea typeface="Cambria" pitchFamily="34" charset="-122"/>
                 <a:cs typeface="Cambria" pitchFamily="34" charset="-120"/>
               </a:rPr>
-              <a:t>32,3%</a:t>
+              <a:t>31,8%</a:t>
             </a:r>
             <a:endParaRPr lang="en-US" sz="4000" dirty="0"/>
           </a:p>
@@ -21044,7 +21379,7 @@
                 <a:ea typeface="Calibri" pitchFamily="34" charset="-122"/>
                 <a:cs typeface="Calibri" pitchFamily="34" charset="-120"/>
               </a:rPr>
-              <a:t>159/493 clasificados</a:t>
+              <a:t>159/500 clasificados</a:t>
             </a:r>
             <a:endParaRPr lang="en-US" sz="1400" dirty="0"/>
           </a:p>
@@ -21254,7 +21589,7 @@
                 <a:ea typeface="Calibri" pitchFamily="34" charset="-122"/>
                 <a:cs typeface="Calibri" pitchFamily="34" charset="-120"/>
               </a:rPr>
-              <a:t>251 de 502 con costo</a:t>
+              <a:t>251 de 509 con costo</a:t>
             </a:r>
             <a:endParaRPr lang="en-US" sz="1400" dirty="0"/>
           </a:p>
@@ -21332,7 +21667,7 @@
                 <a:ea typeface="Calibri" pitchFamily="34" charset="-122"/>
                 <a:cs typeface="Calibri" pitchFamily="34" charset="-120"/>
               </a:rPr>
-              <a:t>251 hallazgos no declaran costo: la cifra es un piso</a:t>
+              <a:t>258 hallazgos no declaran costo: la cifra es un piso</a:t>
             </a:r>
             <a:endParaRPr lang="en-US" sz="950" dirty="0"/>
           </a:p>
@@ -21472,7 +21807,7 @@
                 <a:ea typeface="Calibri" pitchFamily="34" charset="-122"/>
                 <a:cs typeface="Calibri" pitchFamily="34" charset="-120"/>
               </a:rPr>
-              <a:t>32 de los 39 hallazgos abiertos (82,1%), y es uno de los frentes donde el cliente levanta más de lo que detecta Besalco (71 del cliente contra 53 internas).</a:t>
+              <a:t>38 de los 46 hallazgos abiertos (82,6%), y es uno de los frentes donde el cliente levanta más de lo que detecta Besalco (77 del cliente contra 53 internas).</a:t>
             </a:r>
             <a:endParaRPr lang="en-US" sz="1250" dirty="0"/>
           </a:p>
@@ -21534,7 +21869,7 @@
                 <a:ea typeface="Calibri" pitchFamily="34" charset="-122"/>
                 <a:cs typeface="Calibri" pitchFamily="34" charset="-120"/>
               </a:rPr>
-              <a:t>La semana trajo 1 hallazgo nuevo, ninguno de autodetección.  </a:t>
+              <a:t>La semana trajo 7 hallazgos nuevos, ninguno de autodetección.  </a:t>
             </a:r>
             <a:pPr indent="0" marL="0">
               <a:lnSpc>
@@ -21551,7 +21886,7 @@
                 <a:ea typeface="Calibri" pitchFamily="34" charset="-122"/>
                 <a:cs typeface="Calibri" pitchFamily="34" charset="-120"/>
               </a:rPr>
-              <a:t>24-08-2026 al 30-08-2026: 1 del cliente en OO.CC (1). Todos siguen abiertos; la semana anterior entraron 3.</a:t>
+              <a:t>31-08-2026 al 06-09-2026: 7 del cliente en Sin especialidad (6) y OO.CC (1). Todos siguen abiertos; la semana anterior entraron 1.</a:t>
             </a:r>
             <a:endParaRPr lang="en-US" sz="1250" dirty="0"/>
           </a:p>
@@ -21613,7 +21948,7 @@
                 <a:ea typeface="Calibri" pitchFamily="34" charset="-122"/>
                 <a:cs typeface="Calibri" pitchFamily="34" charset="-120"/>
               </a:rPr>
-              <a:t>38 de los 39 abiertos están fuera del plazo de respuesta.  </a:t>
+              <a:t>39 de los 46 abiertos están fuera del plazo de respuesta.  </a:t>
             </a:r>
             <a:pPr indent="0" marL="0">
               <a:lnSpc>
@@ -21630,7 +21965,7 @@
                 <a:ea typeface="Calibri" pitchFamily="34" charset="-122"/>
                 <a:cs typeface="Calibri" pitchFamily="34" charset="-120"/>
               </a:rPr>
-              <a:t>El plazo es de 10 días desde que se emite la NC. De los atrasados, 13 llevan más de 180 días abiertos y 0 más de un año: no es atraso de días, es deuda vieja.</a:t>
+              <a:t>El plazo es de 10 días desde que se emite la NC. De los atrasados, 17 llevan más de 180 días abiertos y 0 más de un año: no es atraso de días, es deuda vieja.</a:t>
             </a:r>
             <a:endParaRPr lang="en-US" sz="1250" dirty="0"/>
           </a:p>
@@ -21669,7 +22004,7 @@
                 <a:ea typeface="Calibri" pitchFamily="34" charset="-122"/>
                 <a:cs typeface="Calibri" pitchFamily="34" charset="-120"/>
               </a:rPr>
-              <a:t>Fuente: Data_NCR31082026.xlsx — hoja «Observaciones» · Corte 31-08-2026 · 502 registros desde 10-02-2023</a:t>
+              <a:t>Fuente: Data_NCR07092026.xlsx — hoja «Observaciones» · Corte 07-09-2026 · 509 registros desde 10-02-2023</a:t>
             </a:r>
             <a:endParaRPr lang="en-US" sz="850" dirty="0"/>
           </a:p>
@@ -22944,7 +23279,7 @@
                 <a:ea typeface="Calibri" pitchFamily="34" charset="-122"/>
                 <a:cs typeface="Calibri" pitchFamily="34" charset="-120"/>
               </a:rPr>
-              <a:t>248</a:t>
+              <a:t>249</a:t>
             </a:r>
             <a:endParaRPr lang="en-US" sz="1300" dirty="0"/>
           </a:p>
@@ -23022,7 +23357,7 @@
                 <a:ea typeface="Calibri" pitchFamily="34" charset="-122"/>
                 <a:cs typeface="Calibri" pitchFamily="34" charset="-120"/>
               </a:rPr>
-              <a:t>6</a:t>
+              <a:t>7</a:t>
             </a:r>
             <a:endParaRPr lang="en-US" sz="1300" dirty="0"/>
           </a:p>
@@ -23061,7 +23396,7 @@
                 <a:ea typeface="Calibri" pitchFamily="34" charset="-122"/>
                 <a:cs typeface="Calibri" pitchFamily="34" charset="-120"/>
               </a:rPr>
-              <a:t>97,6%</a:t>
+              <a:t>97,2%</a:t>
             </a:r>
             <a:endParaRPr lang="en-US" sz="1300" dirty="0"/>
           </a:p>
@@ -23139,7 +23474,7 @@
                 <a:ea typeface="Calibri" pitchFamily="34" charset="-122"/>
                 <a:cs typeface="Calibri" pitchFamily="34" charset="-120"/>
               </a:rPr>
-              <a:t>196</a:t>
+              <a:t>197</a:t>
             </a:r>
             <a:endParaRPr lang="en-US" sz="1300" dirty="0"/>
           </a:p>
@@ -23418,7 +23753,7 @@
                 <a:ea typeface="Calibri" pitchFamily="34" charset="-122"/>
                 <a:cs typeface="Calibri" pitchFamily="34" charset="-120"/>
               </a:rPr>
-              <a:t>164</a:t>
+              <a:t>170</a:t>
             </a:r>
             <a:endParaRPr lang="en-US" sz="1300" dirty="0"/>
           </a:p>
@@ -23496,7 +23831,7 @@
                 <a:ea typeface="Calibri" pitchFamily="34" charset="-122"/>
                 <a:cs typeface="Calibri" pitchFamily="34" charset="-120"/>
               </a:rPr>
-              <a:t>32</a:t>
+              <a:t>38</a:t>
             </a:r>
             <a:endParaRPr lang="en-US" sz="1300" dirty="0"/>
           </a:p>
@@ -23535,7 +23870,7 @@
                 <a:ea typeface="Calibri" pitchFamily="34" charset="-122"/>
                 <a:cs typeface="Calibri" pitchFamily="34" charset="-120"/>
               </a:rPr>
-              <a:t>80,5%</a:t>
+              <a:t>77,6%</a:t>
             </a:r>
             <a:endParaRPr lang="en-US" sz="1300" dirty="0"/>
           </a:p>
@@ -23613,7 +23948,7 @@
                 <a:ea typeface="Calibri" pitchFamily="34" charset="-122"/>
                 <a:cs typeface="Calibri" pitchFamily="34" charset="-120"/>
               </a:rPr>
-              <a:t>71</a:t>
+              <a:t>77</a:t>
             </a:r>
             <a:endParaRPr lang="en-US" sz="1300" dirty="0"/>
           </a:p>
@@ -24386,7 +24721,7 @@
                 <a:ea typeface="Calibri" pitchFamily="34" charset="-122"/>
                 <a:cs typeface="Calibri" pitchFamily="34" charset="-120"/>
               </a:rPr>
-              <a:t>494</a:t>
+              <a:t>501</a:t>
             </a:r>
             <a:endParaRPr lang="en-US" sz="1300" dirty="0"/>
           </a:p>
@@ -24464,7 +24799,7 @@
                 <a:ea typeface="Calibri" pitchFamily="34" charset="-122"/>
                 <a:cs typeface="Calibri" pitchFamily="34" charset="-120"/>
               </a:rPr>
-              <a:t>39</a:t>
+              <a:t>46</a:t>
             </a:r>
             <a:endParaRPr lang="en-US" sz="1300" dirty="0"/>
           </a:p>
@@ -24503,7 +24838,7 @@
                 <a:ea typeface="Calibri" pitchFamily="34" charset="-122"/>
                 <a:cs typeface="Calibri" pitchFamily="34" charset="-120"/>
               </a:rPr>
-              <a:t>92,1%</a:t>
+              <a:t>90,8%</a:t>
             </a:r>
             <a:endParaRPr lang="en-US" sz="1300" dirty="0"/>
           </a:p>
@@ -24581,7 +24916,7 @@
                 <a:ea typeface="Calibri" pitchFamily="34" charset="-122"/>
                 <a:cs typeface="Calibri" pitchFamily="34" charset="-120"/>
               </a:rPr>
-              <a:t>286</a:t>
+              <a:t>293</a:t>
             </a:r>
             <a:endParaRPr lang="en-US" sz="1300" dirty="0"/>
           </a:p>
@@ -24698,7 +25033,7 @@
                 <a:ea typeface="Calibri" pitchFamily="34" charset="-122"/>
                 <a:cs typeface="Calibri" pitchFamily="34" charset="-120"/>
               </a:rPr>
-              <a:t>Mediana de cierre global 30 días · el hallazgo más lento tomó 419 días · 79 hallazgos sin especialidad declarada.</a:t>
+              <a:t>Mediana de cierre global 30 días · el hallazgo más lento tomó 419 días · 85 hallazgos sin especialidad declarada.</a:t>
             </a:r>
             <a:endParaRPr lang="en-US" sz="950" dirty="0"/>
           </a:p>
@@ -24737,7 +25072,7 @@
                 <a:ea typeface="Calibri" pitchFamily="34" charset="-122"/>
                 <a:cs typeface="Calibri" pitchFamily="34" charset="-120"/>
               </a:rPr>
-              <a:t>Fuente: Data_NCR31082026.xlsx — hoja «Observaciones» · Corte 31-08-2026 · 502 registros desde 10-02-2023</a:t>
+              <a:t>Fuente: Data_NCR07092026.xlsx — hoja «Observaciones» · Corte 07-09-2026 · 509 registros desde 10-02-2023</a:t>
             </a:r>
             <a:endParaRPr lang="en-US" sz="850" dirty="0"/>
           </a:p>
@@ -24988,7 +25323,7 @@
                 <a:ea typeface="Calibri" pitchFamily="34" charset="-122"/>
                 <a:cs typeface="Calibri" pitchFamily="34" charset="-120"/>
               </a:rPr>
-              <a:t>Entre el 24-08-2026 y el 30-08-2026 se levantó 1 hallazgo: 0 internas · 1 del cliente. Sigue abierto.</a:t>
+              <a:t>Entre el 31-08-2026 y el 06-09-2026 se levantaron 7 hallazgos: 0 internas · 7 del cliente. Todos siguen abiertos.</a:t>
             </a:r>
             <a:endParaRPr lang="en-US" sz="1350" dirty="0"/>
           </a:p>
@@ -25143,7 +25478,7 @@
                 <a:ea typeface="Calibri" pitchFamily="34" charset="-122"/>
                 <a:cs typeface="Calibri" pitchFamily="34" charset="-120"/>
               </a:rPr>
-              <a:t>OO.CC 1</a:t>
+              <a:t>Sin especialidad 6  ·  OO.CC 1</a:t>
             </a:r>
             <a:endParaRPr lang="en-US" sz="1100" dirty="0"/>
           </a:p>
@@ -25221,7 +25556,7 @@
                 <a:ea typeface="Calibri" pitchFamily="34" charset="-122"/>
                 <a:cs typeface="Calibri" pitchFamily="34" charset="-120"/>
               </a:rPr>
-              <a:t>Talabre 1</a:t>
+              <a:t>Arqueros 6  ·  Talabre 1</a:t>
             </a:r>
             <a:endParaRPr lang="en-US" sz="1100" dirty="0"/>
           </a:p>
@@ -25299,7 +25634,7 @@
                 <a:ea typeface="Calibri" pitchFamily="34" charset="-122"/>
                 <a:cs typeface="Calibri" pitchFamily="34" charset="-120"/>
               </a:rPr>
-              <a:t>Externa · Cliente 1</a:t>
+              <a:t>Externa · Cliente 7</a:t>
             </a:r>
             <a:endParaRPr lang="en-US" sz="1100" dirty="0"/>
           </a:p>
@@ -25377,7 +25712,7 @@
                 <a:ea typeface="Calibri" pitchFamily="34" charset="-122"/>
                 <a:cs typeface="Calibri" pitchFamily="34" charset="-120"/>
               </a:rPr>
-              <a:t>Producto No Conforme 1</a:t>
+              <a:t>No Conformidad 7</a:t>
             </a:r>
             <a:endParaRPr lang="en-US" sz="1100" dirty="0"/>
           </a:p>
@@ -25416,7 +25751,7 @@
                 <a:ea typeface="Calibri" pitchFamily="34" charset="-122"/>
                 <a:cs typeface="Calibri" pitchFamily="34" charset="-120"/>
               </a:rPr>
-              <a:t>DETALLE DE LOS HALLAZGOS NUEVOS</a:t>
+              <a:t>DETALLE DE LOS HALLAZGOS NUEVOS — SE LISTAN 6 DE 7; EL RESTO ESTÁ EN EL PANEL</a:t>
             </a:r>
             <a:endParaRPr lang="en-US" sz="1050" dirty="0"/>
           </a:p>
@@ -25829,7 +26164,7 @@
                 <a:ea typeface="Calibri" pitchFamily="34" charset="-122"/>
                 <a:cs typeface="Calibri" pitchFamily="34" charset="-120"/>
               </a:rPr>
-              <a:t>24-08-2026</a:t>
+              <a:t>01-09-2026</a:t>
             </a:r>
             <a:endParaRPr lang="en-US" sz="1050" dirty="0"/>
           </a:p>
@@ -25868,7 +26203,7 @@
                 <a:ea typeface="Calibri" pitchFamily="34" charset="-122"/>
                 <a:cs typeface="Calibri" pitchFamily="34" charset="-120"/>
               </a:rPr>
-              <a:t>Talabre</a:t>
+              <a:t>Arqueros</a:t>
             </a:r>
             <a:endParaRPr lang="en-US" sz="1050" dirty="0"/>
           </a:p>
@@ -25907,7 +26242,7 @@
                 <a:ea typeface="Calibri" pitchFamily="34" charset="-122"/>
                 <a:cs typeface="Calibri" pitchFamily="34" charset="-120"/>
               </a:rPr>
-              <a:t>249 · PNC N°192</a:t>
+              <a:t>MASA-86 · EB-NE-1412</a:t>
             </a:r>
             <a:endParaRPr lang="en-US" sz="1050" dirty="0"/>
           </a:p>
@@ -25946,7 +26281,7 @@
                 <a:ea typeface="Calibri" pitchFamily="34" charset="-122"/>
                 <a:cs typeface="Calibri" pitchFamily="34" charset="-120"/>
               </a:rPr>
-              <a:t>Producto No Confor…</a:t>
+              <a:t>No Conformidad</a:t>
             </a:r>
             <a:endParaRPr lang="en-US" sz="1050" dirty="0"/>
           </a:p>
@@ -26024,7 +26359,7 @@
                 <a:ea typeface="Calibri" pitchFamily="34" charset="-122"/>
                 <a:cs typeface="Calibri" pitchFamily="34" charset="-120"/>
               </a:rPr>
-              <a:t>OO.CC</a:t>
+              <a:t>Sin especial…</a:t>
             </a:r>
             <a:endParaRPr lang="en-US" sz="1050" dirty="0"/>
           </a:p>
@@ -26063,7 +26398,7 @@
                 <a:ea typeface="Calibri" pitchFamily="34" charset="-122"/>
                 <a:cs typeface="Calibri" pitchFamily="34" charset="-120"/>
               </a:rPr>
-              <a:t>Mauricio Rocha A.</a:t>
+              <a:t>Sin asignar</a:t>
             </a:r>
             <a:endParaRPr lang="en-US" sz="1050" dirty="0"/>
           </a:p>
@@ -26102,7 +26437,7 @@
                 <a:ea typeface="Calibri" pitchFamily="34" charset="-122"/>
                 <a:cs typeface="Calibri" pitchFamily="34" charset="-120"/>
               </a:rPr>
-              <a:t>Iniciado</a:t>
+              <a:t>Pendiente</a:t>
             </a:r>
             <a:endParaRPr lang="en-US" sz="1050" dirty="0"/>
           </a:p>
@@ -26141,7 +26476,7 @@
                 <a:ea typeface="Calibri" pitchFamily="34" charset="-122"/>
                 <a:cs typeface="Calibri" pitchFamily="34" charset="-120"/>
               </a:rPr>
-              <a:t>Se evidencia daño físico en…</a:t>
+              <a:t>Perdida de torque en pernos</a:t>
             </a:r>
             <a:endParaRPr lang="en-US" sz="1000" dirty="0"/>
           </a:p>
@@ -26172,7 +26507,1937 @@
       </p:sp>
       <p:sp>
         <p:nvSpPr>
-          <p:cNvPr id="38" name="Text 34"/>
+          <p:cNvPr id="38" name="Shape 34"/>
+          <p:cNvSpPr/>
+          <p:nvPr/>
+        </p:nvSpPr>
+        <p:spPr>
+          <a:xfrm>
+            <a:off x="457200" y="4709160"/>
+            <a:ext cx="11292840" cy="329184"/>
+          </a:xfrm>
+          <a:prstGeom prst="rect">
+            <a:avLst/>
+          </a:prstGeom>
+          <a:solidFill>
+            <a:srgbClr val="FFFFFF"/>
+          </a:solidFill>
+          <a:ln/>
+        </p:spPr>
+      </p:sp>
+      <p:sp>
+        <p:nvSpPr>
+          <p:cNvPr id="39" name="Text 35"/>
+          <p:cNvSpPr/>
+          <p:nvPr/>
+        </p:nvSpPr>
+        <p:spPr>
+          <a:xfrm>
+            <a:off x="502920" y="4754880"/>
+            <a:ext cx="822960" cy="237744"/>
+          </a:xfrm>
+          <a:prstGeom prst="rect">
+            <a:avLst/>
+          </a:prstGeom>
+          <a:noFill/>
+          <a:ln/>
+        </p:spPr>
+        <p:txBody>
+          <a:bodyPr wrap="square" lIns="0" tIns="0" rIns="0" bIns="0" rtlCol="0" anchor="ctr"/>
+          <a:lstStyle/>
+          <a:p>
+            <a:pPr algn="l" indent="0" marL="0">
+              <a:buNone/>
+            </a:pPr>
+            <a:r>
+              <a:rPr lang="en-US" sz="1050" dirty="0">
+                <a:solidFill>
+                  <a:srgbClr val="1A2433"/>
+                </a:solidFill>
+                <a:latin typeface="Calibri" pitchFamily="34" charset="0"/>
+                <a:ea typeface="Calibri" pitchFamily="34" charset="-122"/>
+                <a:cs typeface="Calibri" pitchFamily="34" charset="-120"/>
+              </a:rPr>
+              <a:t>01-09-2026</a:t>
+            </a:r>
+            <a:endParaRPr lang="en-US" sz="1050" dirty="0"/>
+          </a:p>
+        </p:txBody>
+      </p:sp>
+      <p:sp>
+        <p:nvSpPr>
+          <p:cNvPr id="40" name="Text 36"/>
+          <p:cNvSpPr/>
+          <p:nvPr/>
+        </p:nvSpPr>
+        <p:spPr>
+          <a:xfrm>
+            <a:off x="1371600" y="4754880"/>
+            <a:ext cx="1051560" cy="237744"/>
+          </a:xfrm>
+          <a:prstGeom prst="rect">
+            <a:avLst/>
+          </a:prstGeom>
+          <a:noFill/>
+          <a:ln/>
+        </p:spPr>
+        <p:txBody>
+          <a:bodyPr wrap="square" lIns="0" tIns="0" rIns="0" bIns="0" rtlCol="0" anchor="ctr"/>
+          <a:lstStyle/>
+          <a:p>
+            <a:pPr algn="l" indent="0" marL="0">
+              <a:buNone/>
+            </a:pPr>
+            <a:r>
+              <a:rPr lang="en-US" sz="1050" dirty="0">
+                <a:solidFill>
+                  <a:srgbClr val="1A2433"/>
+                </a:solidFill>
+                <a:latin typeface="Calibri" pitchFamily="34" charset="0"/>
+                <a:ea typeface="Calibri" pitchFamily="34" charset="-122"/>
+                <a:cs typeface="Calibri" pitchFamily="34" charset="-120"/>
+              </a:rPr>
+              <a:t>Arqueros</a:t>
+            </a:r>
+            <a:endParaRPr lang="en-US" sz="1050" dirty="0"/>
+          </a:p>
+        </p:txBody>
+      </p:sp>
+      <p:sp>
+        <p:nvSpPr>
+          <p:cNvPr id="41" name="Text 37"/>
+          <p:cNvSpPr/>
+          <p:nvPr/>
+        </p:nvSpPr>
+        <p:spPr>
+          <a:xfrm>
+            <a:off x="2468880" y="4754880"/>
+            <a:ext cx="1051560" cy="237744"/>
+          </a:xfrm>
+          <a:prstGeom prst="rect">
+            <a:avLst/>
+          </a:prstGeom>
+          <a:noFill/>
+          <a:ln/>
+        </p:spPr>
+        <p:txBody>
+          <a:bodyPr wrap="square" lIns="0" tIns="0" rIns="0" bIns="0" rtlCol="0" anchor="ctr"/>
+          <a:lstStyle/>
+          <a:p>
+            <a:pPr algn="l" indent="0" marL="0">
+              <a:buNone/>
+            </a:pPr>
+            <a:r>
+              <a:rPr lang="en-US" sz="1050" dirty="0">
+                <a:solidFill>
+                  <a:srgbClr val="1A2433"/>
+                </a:solidFill>
+                <a:latin typeface="Calibri" pitchFamily="34" charset="0"/>
+                <a:ea typeface="Calibri" pitchFamily="34" charset="-122"/>
+                <a:cs typeface="Calibri" pitchFamily="34" charset="-120"/>
+              </a:rPr>
+              <a:t>MASA-87 · EB-NE-1412</a:t>
+            </a:r>
+            <a:endParaRPr lang="en-US" sz="1050" dirty="0"/>
+          </a:p>
+        </p:txBody>
+      </p:sp>
+      <p:sp>
+        <p:nvSpPr>
+          <p:cNvPr id="42" name="Text 38"/>
+          <p:cNvSpPr/>
+          <p:nvPr/>
+        </p:nvSpPr>
+        <p:spPr>
+          <a:xfrm>
+            <a:off x="3566160" y="4754880"/>
+            <a:ext cx="1371600" cy="237744"/>
+          </a:xfrm>
+          <a:prstGeom prst="rect">
+            <a:avLst/>
+          </a:prstGeom>
+          <a:noFill/>
+          <a:ln/>
+        </p:spPr>
+        <p:txBody>
+          <a:bodyPr wrap="square" lIns="0" tIns="0" rIns="0" bIns="0" rtlCol="0" anchor="ctr"/>
+          <a:lstStyle/>
+          <a:p>
+            <a:pPr algn="l" indent="0" marL="0">
+              <a:buNone/>
+            </a:pPr>
+            <a:r>
+              <a:rPr lang="en-US" sz="1050" dirty="0">
+                <a:solidFill>
+                  <a:srgbClr val="1A2433"/>
+                </a:solidFill>
+                <a:latin typeface="Calibri" pitchFamily="34" charset="0"/>
+                <a:ea typeface="Calibri" pitchFamily="34" charset="-122"/>
+                <a:cs typeface="Calibri" pitchFamily="34" charset="-120"/>
+              </a:rPr>
+              <a:t>No Conformidad</a:t>
+            </a:r>
+            <a:endParaRPr lang="en-US" sz="1050" dirty="0"/>
+          </a:p>
+        </p:txBody>
+      </p:sp>
+      <p:sp>
+        <p:nvSpPr>
+          <p:cNvPr id="43" name="Text 39"/>
+          <p:cNvSpPr/>
+          <p:nvPr/>
+        </p:nvSpPr>
+        <p:spPr>
+          <a:xfrm>
+            <a:off x="4983480" y="4754880"/>
+            <a:ext cx="1417320" cy="237744"/>
+          </a:xfrm>
+          <a:prstGeom prst="rect">
+            <a:avLst/>
+          </a:prstGeom>
+          <a:noFill/>
+          <a:ln/>
+        </p:spPr>
+        <p:txBody>
+          <a:bodyPr wrap="square" lIns="0" tIns="0" rIns="0" bIns="0" rtlCol="0" anchor="ctr"/>
+          <a:lstStyle/>
+          <a:p>
+            <a:pPr algn="l" indent="0" marL="0">
+              <a:buNone/>
+            </a:pPr>
+            <a:r>
+              <a:rPr lang="en-US" sz="1050" b="1" dirty="0">
+                <a:solidFill>
+                  <a:srgbClr val="C87A32"/>
+                </a:solidFill>
+                <a:latin typeface="Calibri" pitchFamily="34" charset="0"/>
+                <a:ea typeface="Calibri" pitchFamily="34" charset="-122"/>
+                <a:cs typeface="Calibri" pitchFamily="34" charset="-120"/>
+              </a:rPr>
+              <a:t>Externa · Cliente</a:t>
+            </a:r>
+            <a:endParaRPr lang="en-US" sz="1050" dirty="0"/>
+          </a:p>
+        </p:txBody>
+      </p:sp>
+      <p:sp>
+        <p:nvSpPr>
+          <p:cNvPr id="44" name="Text 40"/>
+          <p:cNvSpPr/>
+          <p:nvPr/>
+        </p:nvSpPr>
+        <p:spPr>
+          <a:xfrm>
+            <a:off x="6446520" y="4754880"/>
+            <a:ext cx="1097280" cy="237744"/>
+          </a:xfrm>
+          <a:prstGeom prst="rect">
+            <a:avLst/>
+          </a:prstGeom>
+          <a:noFill/>
+          <a:ln/>
+        </p:spPr>
+        <p:txBody>
+          <a:bodyPr wrap="square" lIns="0" tIns="0" rIns="0" bIns="0" rtlCol="0" anchor="ctr"/>
+          <a:lstStyle/>
+          <a:p>
+            <a:pPr algn="l" indent="0" marL="0">
+              <a:buNone/>
+            </a:pPr>
+            <a:r>
+              <a:rPr lang="en-US" sz="1050" dirty="0">
+                <a:solidFill>
+                  <a:srgbClr val="1A2433"/>
+                </a:solidFill>
+                <a:latin typeface="Calibri" pitchFamily="34" charset="0"/>
+                <a:ea typeface="Calibri" pitchFamily="34" charset="-122"/>
+                <a:cs typeface="Calibri" pitchFamily="34" charset="-120"/>
+              </a:rPr>
+              <a:t>Sin especial…</a:t>
+            </a:r>
+            <a:endParaRPr lang="en-US" sz="1050" dirty="0"/>
+          </a:p>
+        </p:txBody>
+      </p:sp>
+      <p:sp>
+        <p:nvSpPr>
+          <p:cNvPr id="45" name="Text 41"/>
+          <p:cNvSpPr/>
+          <p:nvPr/>
+        </p:nvSpPr>
+        <p:spPr>
+          <a:xfrm>
+            <a:off x="7589520" y="4754880"/>
+            <a:ext cx="1371600" cy="237744"/>
+          </a:xfrm>
+          <a:prstGeom prst="rect">
+            <a:avLst/>
+          </a:prstGeom>
+          <a:noFill/>
+          <a:ln/>
+        </p:spPr>
+        <p:txBody>
+          <a:bodyPr wrap="square" lIns="0" tIns="0" rIns="0" bIns="0" rtlCol="0" anchor="ctr"/>
+          <a:lstStyle/>
+          <a:p>
+            <a:pPr algn="l" indent="0" marL="0">
+              <a:buNone/>
+            </a:pPr>
+            <a:r>
+              <a:rPr lang="en-US" sz="1050" dirty="0">
+                <a:solidFill>
+                  <a:srgbClr val="1A2433"/>
+                </a:solidFill>
+                <a:latin typeface="Calibri" pitchFamily="34" charset="0"/>
+                <a:ea typeface="Calibri" pitchFamily="34" charset="-122"/>
+                <a:cs typeface="Calibri" pitchFamily="34" charset="-120"/>
+              </a:rPr>
+              <a:t>Sin asignar</a:t>
+            </a:r>
+            <a:endParaRPr lang="en-US" sz="1050" dirty="0"/>
+          </a:p>
+        </p:txBody>
+      </p:sp>
+      <p:sp>
+        <p:nvSpPr>
+          <p:cNvPr id="46" name="Text 42"/>
+          <p:cNvSpPr/>
+          <p:nvPr/>
+        </p:nvSpPr>
+        <p:spPr>
+          <a:xfrm>
+            <a:off x="9006840" y="4754880"/>
+            <a:ext cx="868680" cy="237744"/>
+          </a:xfrm>
+          <a:prstGeom prst="rect">
+            <a:avLst/>
+          </a:prstGeom>
+          <a:noFill/>
+          <a:ln/>
+        </p:spPr>
+        <p:txBody>
+          <a:bodyPr wrap="square" lIns="0" tIns="0" rIns="0" bIns="0" rtlCol="0" anchor="ctr"/>
+          <a:lstStyle/>
+          <a:p>
+            <a:pPr algn="l" indent="0" marL="0">
+              <a:buNone/>
+            </a:pPr>
+            <a:r>
+              <a:rPr lang="en-US" sz="1050" dirty="0">
+                <a:solidFill>
+                  <a:srgbClr val="C0392B"/>
+                </a:solidFill>
+                <a:latin typeface="Calibri" pitchFamily="34" charset="0"/>
+                <a:ea typeface="Calibri" pitchFamily="34" charset="-122"/>
+                <a:cs typeface="Calibri" pitchFamily="34" charset="-120"/>
+              </a:rPr>
+              <a:t>Pendiente</a:t>
+            </a:r>
+            <a:endParaRPr lang="en-US" sz="1050" dirty="0"/>
+          </a:p>
+        </p:txBody>
+      </p:sp>
+      <p:sp>
+        <p:nvSpPr>
+          <p:cNvPr id="47" name="Text 43"/>
+          <p:cNvSpPr/>
+          <p:nvPr/>
+        </p:nvSpPr>
+        <p:spPr>
+          <a:xfrm>
+            <a:off x="9921240" y="4754880"/>
+            <a:ext cx="1828800" cy="237744"/>
+          </a:xfrm>
+          <a:prstGeom prst="rect">
+            <a:avLst/>
+          </a:prstGeom>
+          <a:noFill/>
+          <a:ln/>
+        </p:spPr>
+        <p:txBody>
+          <a:bodyPr wrap="square" lIns="0" tIns="0" rIns="0" bIns="0" rtlCol="0" anchor="ctr"/>
+          <a:lstStyle/>
+          <a:p>
+            <a:pPr algn="l" indent="0" marL="0">
+              <a:buNone/>
+            </a:pPr>
+            <a:r>
+              <a:rPr lang="en-US" sz="1000" dirty="0">
+                <a:solidFill>
+                  <a:srgbClr val="1A2433"/>
+                </a:solidFill>
+                <a:latin typeface="Calibri" pitchFamily="34" charset="0"/>
+                <a:ea typeface="Calibri" pitchFamily="34" charset="-122"/>
+                <a:cs typeface="Calibri" pitchFamily="34" charset="-120"/>
+              </a:rPr>
+              <a:t>Elevación bomba de cizalle.…</a:t>
+            </a:r>
+            <a:endParaRPr lang="en-US" sz="1000" dirty="0"/>
+          </a:p>
+        </p:txBody>
+      </p:sp>
+      <p:sp>
+        <p:nvSpPr>
+          <p:cNvPr id="48" name="Shape 44"/>
+          <p:cNvSpPr/>
+          <p:nvPr/>
+        </p:nvSpPr>
+        <p:spPr>
+          <a:xfrm>
+            <a:off x="502920" y="5029200"/>
+            <a:ext cx="11247120" cy="0"/>
+          </a:xfrm>
+          <a:prstGeom prst="line">
+            <a:avLst/>
+          </a:prstGeom>
+          <a:noFill/>
+          <a:ln w="9525">
+            <a:solidFill>
+              <a:srgbClr val="D9DFE6"/>
+            </a:solidFill>
+            <a:prstDash val="solid"/>
+          </a:ln>
+        </p:spPr>
+      </p:sp>
+      <p:sp>
+        <p:nvSpPr>
+          <p:cNvPr id="49" name="Text 45"/>
+          <p:cNvSpPr/>
+          <p:nvPr/>
+        </p:nvSpPr>
+        <p:spPr>
+          <a:xfrm>
+            <a:off x="502920" y="5084064"/>
+            <a:ext cx="822960" cy="237744"/>
+          </a:xfrm>
+          <a:prstGeom prst="rect">
+            <a:avLst/>
+          </a:prstGeom>
+          <a:noFill/>
+          <a:ln/>
+        </p:spPr>
+        <p:txBody>
+          <a:bodyPr wrap="square" lIns="0" tIns="0" rIns="0" bIns="0" rtlCol="0" anchor="ctr"/>
+          <a:lstStyle/>
+          <a:p>
+            <a:pPr algn="l" indent="0" marL="0">
+              <a:buNone/>
+            </a:pPr>
+            <a:r>
+              <a:rPr lang="en-US" sz="1050" dirty="0">
+                <a:solidFill>
+                  <a:srgbClr val="1A2433"/>
+                </a:solidFill>
+                <a:latin typeface="Calibri" pitchFamily="34" charset="0"/>
+                <a:ea typeface="Calibri" pitchFamily="34" charset="-122"/>
+                <a:cs typeface="Calibri" pitchFamily="34" charset="-120"/>
+              </a:rPr>
+              <a:t>01-09-2026</a:t>
+            </a:r>
+            <a:endParaRPr lang="en-US" sz="1050" dirty="0"/>
+          </a:p>
+        </p:txBody>
+      </p:sp>
+      <p:sp>
+        <p:nvSpPr>
+          <p:cNvPr id="50" name="Text 46"/>
+          <p:cNvSpPr/>
+          <p:nvPr/>
+        </p:nvSpPr>
+        <p:spPr>
+          <a:xfrm>
+            <a:off x="1371600" y="5084064"/>
+            <a:ext cx="1051560" cy="237744"/>
+          </a:xfrm>
+          <a:prstGeom prst="rect">
+            <a:avLst/>
+          </a:prstGeom>
+          <a:noFill/>
+          <a:ln/>
+        </p:spPr>
+        <p:txBody>
+          <a:bodyPr wrap="square" lIns="0" tIns="0" rIns="0" bIns="0" rtlCol="0" anchor="ctr"/>
+          <a:lstStyle/>
+          <a:p>
+            <a:pPr algn="l" indent="0" marL="0">
+              <a:buNone/>
+            </a:pPr>
+            <a:r>
+              <a:rPr lang="en-US" sz="1050" dirty="0">
+                <a:solidFill>
+                  <a:srgbClr val="1A2433"/>
+                </a:solidFill>
+                <a:latin typeface="Calibri" pitchFamily="34" charset="0"/>
+                <a:ea typeface="Calibri" pitchFamily="34" charset="-122"/>
+                <a:cs typeface="Calibri" pitchFamily="34" charset="-120"/>
+              </a:rPr>
+              <a:t>Arqueros</a:t>
+            </a:r>
+            <a:endParaRPr lang="en-US" sz="1050" dirty="0"/>
+          </a:p>
+        </p:txBody>
+      </p:sp>
+      <p:sp>
+        <p:nvSpPr>
+          <p:cNvPr id="51" name="Text 47"/>
+          <p:cNvSpPr/>
+          <p:nvPr/>
+        </p:nvSpPr>
+        <p:spPr>
+          <a:xfrm>
+            <a:off x="2468880" y="5084064"/>
+            <a:ext cx="1051560" cy="237744"/>
+          </a:xfrm>
+          <a:prstGeom prst="rect">
+            <a:avLst/>
+          </a:prstGeom>
+          <a:noFill/>
+          <a:ln/>
+        </p:spPr>
+        <p:txBody>
+          <a:bodyPr wrap="square" lIns="0" tIns="0" rIns="0" bIns="0" rtlCol="0" anchor="ctr"/>
+          <a:lstStyle/>
+          <a:p>
+            <a:pPr algn="l" indent="0" marL="0">
+              <a:buNone/>
+            </a:pPr>
+            <a:r>
+              <a:rPr lang="en-US" sz="1050" dirty="0">
+                <a:solidFill>
+                  <a:srgbClr val="1A2433"/>
+                </a:solidFill>
+                <a:latin typeface="Calibri" pitchFamily="34" charset="0"/>
+                <a:ea typeface="Calibri" pitchFamily="34" charset="-122"/>
+                <a:cs typeface="Calibri" pitchFamily="34" charset="-120"/>
+              </a:rPr>
+              <a:t>MASA-88 · EB-NE-1412</a:t>
+            </a:r>
+            <a:endParaRPr lang="en-US" sz="1050" dirty="0"/>
+          </a:p>
+        </p:txBody>
+      </p:sp>
+      <p:sp>
+        <p:nvSpPr>
+          <p:cNvPr id="52" name="Text 48"/>
+          <p:cNvSpPr/>
+          <p:nvPr/>
+        </p:nvSpPr>
+        <p:spPr>
+          <a:xfrm>
+            <a:off x="3566160" y="5084064"/>
+            <a:ext cx="1371600" cy="237744"/>
+          </a:xfrm>
+          <a:prstGeom prst="rect">
+            <a:avLst/>
+          </a:prstGeom>
+          <a:noFill/>
+          <a:ln/>
+        </p:spPr>
+        <p:txBody>
+          <a:bodyPr wrap="square" lIns="0" tIns="0" rIns="0" bIns="0" rtlCol="0" anchor="ctr"/>
+          <a:lstStyle/>
+          <a:p>
+            <a:pPr algn="l" indent="0" marL="0">
+              <a:buNone/>
+            </a:pPr>
+            <a:r>
+              <a:rPr lang="en-US" sz="1050" dirty="0">
+                <a:solidFill>
+                  <a:srgbClr val="1A2433"/>
+                </a:solidFill>
+                <a:latin typeface="Calibri" pitchFamily="34" charset="0"/>
+                <a:ea typeface="Calibri" pitchFamily="34" charset="-122"/>
+                <a:cs typeface="Calibri" pitchFamily="34" charset="-120"/>
+              </a:rPr>
+              <a:t>No Conformidad</a:t>
+            </a:r>
+            <a:endParaRPr lang="en-US" sz="1050" dirty="0"/>
+          </a:p>
+        </p:txBody>
+      </p:sp>
+      <p:sp>
+        <p:nvSpPr>
+          <p:cNvPr id="53" name="Text 49"/>
+          <p:cNvSpPr/>
+          <p:nvPr/>
+        </p:nvSpPr>
+        <p:spPr>
+          <a:xfrm>
+            <a:off x="4983480" y="5084064"/>
+            <a:ext cx="1417320" cy="237744"/>
+          </a:xfrm>
+          <a:prstGeom prst="rect">
+            <a:avLst/>
+          </a:prstGeom>
+          <a:noFill/>
+          <a:ln/>
+        </p:spPr>
+        <p:txBody>
+          <a:bodyPr wrap="square" lIns="0" tIns="0" rIns="0" bIns="0" rtlCol="0" anchor="ctr"/>
+          <a:lstStyle/>
+          <a:p>
+            <a:pPr algn="l" indent="0" marL="0">
+              <a:buNone/>
+            </a:pPr>
+            <a:r>
+              <a:rPr lang="en-US" sz="1050" b="1" dirty="0">
+                <a:solidFill>
+                  <a:srgbClr val="C87A32"/>
+                </a:solidFill>
+                <a:latin typeface="Calibri" pitchFamily="34" charset="0"/>
+                <a:ea typeface="Calibri" pitchFamily="34" charset="-122"/>
+                <a:cs typeface="Calibri" pitchFamily="34" charset="-120"/>
+              </a:rPr>
+              <a:t>Externa · Cliente</a:t>
+            </a:r>
+            <a:endParaRPr lang="en-US" sz="1050" dirty="0"/>
+          </a:p>
+        </p:txBody>
+      </p:sp>
+      <p:sp>
+        <p:nvSpPr>
+          <p:cNvPr id="54" name="Text 50"/>
+          <p:cNvSpPr/>
+          <p:nvPr/>
+        </p:nvSpPr>
+        <p:spPr>
+          <a:xfrm>
+            <a:off x="6446520" y="5084064"/>
+            <a:ext cx="1097280" cy="237744"/>
+          </a:xfrm>
+          <a:prstGeom prst="rect">
+            <a:avLst/>
+          </a:prstGeom>
+          <a:noFill/>
+          <a:ln/>
+        </p:spPr>
+        <p:txBody>
+          <a:bodyPr wrap="square" lIns="0" tIns="0" rIns="0" bIns="0" rtlCol="0" anchor="ctr"/>
+          <a:lstStyle/>
+          <a:p>
+            <a:pPr algn="l" indent="0" marL="0">
+              <a:buNone/>
+            </a:pPr>
+            <a:r>
+              <a:rPr lang="en-US" sz="1050" dirty="0">
+                <a:solidFill>
+                  <a:srgbClr val="1A2433"/>
+                </a:solidFill>
+                <a:latin typeface="Calibri" pitchFamily="34" charset="0"/>
+                <a:ea typeface="Calibri" pitchFamily="34" charset="-122"/>
+                <a:cs typeface="Calibri" pitchFamily="34" charset="-120"/>
+              </a:rPr>
+              <a:t>Sin especial…</a:t>
+            </a:r>
+            <a:endParaRPr lang="en-US" sz="1050" dirty="0"/>
+          </a:p>
+        </p:txBody>
+      </p:sp>
+      <p:sp>
+        <p:nvSpPr>
+          <p:cNvPr id="55" name="Text 51"/>
+          <p:cNvSpPr/>
+          <p:nvPr/>
+        </p:nvSpPr>
+        <p:spPr>
+          <a:xfrm>
+            <a:off x="7589520" y="5084064"/>
+            <a:ext cx="1371600" cy="237744"/>
+          </a:xfrm>
+          <a:prstGeom prst="rect">
+            <a:avLst/>
+          </a:prstGeom>
+          <a:noFill/>
+          <a:ln/>
+        </p:spPr>
+        <p:txBody>
+          <a:bodyPr wrap="square" lIns="0" tIns="0" rIns="0" bIns="0" rtlCol="0" anchor="ctr"/>
+          <a:lstStyle/>
+          <a:p>
+            <a:pPr algn="l" indent="0" marL="0">
+              <a:buNone/>
+            </a:pPr>
+            <a:r>
+              <a:rPr lang="en-US" sz="1050" dirty="0">
+                <a:solidFill>
+                  <a:srgbClr val="1A2433"/>
+                </a:solidFill>
+                <a:latin typeface="Calibri" pitchFamily="34" charset="0"/>
+                <a:ea typeface="Calibri" pitchFamily="34" charset="-122"/>
+                <a:cs typeface="Calibri" pitchFamily="34" charset="-120"/>
+              </a:rPr>
+              <a:t>Sin asignar</a:t>
+            </a:r>
+            <a:endParaRPr lang="en-US" sz="1050" dirty="0"/>
+          </a:p>
+        </p:txBody>
+      </p:sp>
+      <p:sp>
+        <p:nvSpPr>
+          <p:cNvPr id="56" name="Text 52"/>
+          <p:cNvSpPr/>
+          <p:nvPr/>
+        </p:nvSpPr>
+        <p:spPr>
+          <a:xfrm>
+            <a:off x="9006840" y="5084064"/>
+            <a:ext cx="868680" cy="237744"/>
+          </a:xfrm>
+          <a:prstGeom prst="rect">
+            <a:avLst/>
+          </a:prstGeom>
+          <a:noFill/>
+          <a:ln/>
+        </p:spPr>
+        <p:txBody>
+          <a:bodyPr wrap="square" lIns="0" tIns="0" rIns="0" bIns="0" rtlCol="0" anchor="ctr"/>
+          <a:lstStyle/>
+          <a:p>
+            <a:pPr algn="l" indent="0" marL="0">
+              <a:buNone/>
+            </a:pPr>
+            <a:r>
+              <a:rPr lang="en-US" sz="1050" dirty="0">
+                <a:solidFill>
+                  <a:srgbClr val="C0392B"/>
+                </a:solidFill>
+                <a:latin typeface="Calibri" pitchFamily="34" charset="0"/>
+                <a:ea typeface="Calibri" pitchFamily="34" charset="-122"/>
+                <a:cs typeface="Calibri" pitchFamily="34" charset="-120"/>
+              </a:rPr>
+              <a:t>Pendiente</a:t>
+            </a:r>
+            <a:endParaRPr lang="en-US" sz="1050" dirty="0"/>
+          </a:p>
+        </p:txBody>
+      </p:sp>
+      <p:sp>
+        <p:nvSpPr>
+          <p:cNvPr id="57" name="Text 53"/>
+          <p:cNvSpPr/>
+          <p:nvPr/>
+        </p:nvSpPr>
+        <p:spPr>
+          <a:xfrm>
+            <a:off x="9921240" y="5084064"/>
+            <a:ext cx="1828800" cy="237744"/>
+          </a:xfrm>
+          <a:prstGeom prst="rect">
+            <a:avLst/>
+          </a:prstGeom>
+          <a:noFill/>
+          <a:ln/>
+        </p:spPr>
+        <p:txBody>
+          <a:bodyPr wrap="square" lIns="0" tIns="0" rIns="0" bIns="0" rtlCol="0" anchor="ctr"/>
+          <a:lstStyle/>
+          <a:p>
+            <a:pPr algn="l" indent="0" marL="0">
+              <a:buNone/>
+            </a:pPr>
+            <a:r>
+              <a:rPr lang="en-US" sz="1000" dirty="0">
+                <a:solidFill>
+                  <a:srgbClr val="1A2433"/>
+                </a:solidFill>
+                <a:latin typeface="Calibri" pitchFamily="34" charset="0"/>
+                <a:ea typeface="Calibri" pitchFamily="34" charset="-122"/>
+                <a:cs typeface="Calibri" pitchFamily="34" charset="-120"/>
+              </a:rPr>
+              <a:t>Desviación en línea de succ…</a:t>
+            </a:r>
+            <a:endParaRPr lang="en-US" sz="1000" dirty="0"/>
+          </a:p>
+        </p:txBody>
+      </p:sp>
+      <p:sp>
+        <p:nvSpPr>
+          <p:cNvPr id="58" name="Shape 54"/>
+          <p:cNvSpPr/>
+          <p:nvPr/>
+        </p:nvSpPr>
+        <p:spPr>
+          <a:xfrm>
+            <a:off x="502920" y="5358384"/>
+            <a:ext cx="11247120" cy="0"/>
+          </a:xfrm>
+          <a:prstGeom prst="line">
+            <a:avLst/>
+          </a:prstGeom>
+          <a:noFill/>
+          <a:ln w="9525">
+            <a:solidFill>
+              <a:srgbClr val="D9DFE6"/>
+            </a:solidFill>
+            <a:prstDash val="solid"/>
+          </a:ln>
+        </p:spPr>
+      </p:sp>
+      <p:sp>
+        <p:nvSpPr>
+          <p:cNvPr id="59" name="Shape 55"/>
+          <p:cNvSpPr/>
+          <p:nvPr/>
+        </p:nvSpPr>
+        <p:spPr>
+          <a:xfrm>
+            <a:off x="457200" y="5367528"/>
+            <a:ext cx="11292840" cy="329184"/>
+          </a:xfrm>
+          <a:prstGeom prst="rect">
+            <a:avLst/>
+          </a:prstGeom>
+          <a:solidFill>
+            <a:srgbClr val="FFFFFF"/>
+          </a:solidFill>
+          <a:ln/>
+        </p:spPr>
+      </p:sp>
+      <p:sp>
+        <p:nvSpPr>
+          <p:cNvPr id="60" name="Text 56"/>
+          <p:cNvSpPr/>
+          <p:nvPr/>
+        </p:nvSpPr>
+        <p:spPr>
+          <a:xfrm>
+            <a:off x="502920" y="5413248"/>
+            <a:ext cx="822960" cy="237744"/>
+          </a:xfrm>
+          <a:prstGeom prst="rect">
+            <a:avLst/>
+          </a:prstGeom>
+          <a:noFill/>
+          <a:ln/>
+        </p:spPr>
+        <p:txBody>
+          <a:bodyPr wrap="square" lIns="0" tIns="0" rIns="0" bIns="0" rtlCol="0" anchor="ctr"/>
+          <a:lstStyle/>
+          <a:p>
+            <a:pPr algn="l" indent="0" marL="0">
+              <a:buNone/>
+            </a:pPr>
+            <a:r>
+              <a:rPr lang="en-US" sz="1050" dirty="0">
+                <a:solidFill>
+                  <a:srgbClr val="1A2433"/>
+                </a:solidFill>
+                <a:latin typeface="Calibri" pitchFamily="34" charset="0"/>
+                <a:ea typeface="Calibri" pitchFamily="34" charset="-122"/>
+                <a:cs typeface="Calibri" pitchFamily="34" charset="-120"/>
+              </a:rPr>
+              <a:t>01-09-2026</a:t>
+            </a:r>
+            <a:endParaRPr lang="en-US" sz="1050" dirty="0"/>
+          </a:p>
+        </p:txBody>
+      </p:sp>
+      <p:sp>
+        <p:nvSpPr>
+          <p:cNvPr id="61" name="Text 57"/>
+          <p:cNvSpPr/>
+          <p:nvPr/>
+        </p:nvSpPr>
+        <p:spPr>
+          <a:xfrm>
+            <a:off x="1371600" y="5413248"/>
+            <a:ext cx="1051560" cy="237744"/>
+          </a:xfrm>
+          <a:prstGeom prst="rect">
+            <a:avLst/>
+          </a:prstGeom>
+          <a:noFill/>
+          <a:ln/>
+        </p:spPr>
+        <p:txBody>
+          <a:bodyPr wrap="square" lIns="0" tIns="0" rIns="0" bIns="0" rtlCol="0" anchor="ctr"/>
+          <a:lstStyle/>
+          <a:p>
+            <a:pPr algn="l" indent="0" marL="0">
+              <a:buNone/>
+            </a:pPr>
+            <a:r>
+              <a:rPr lang="en-US" sz="1050" dirty="0">
+                <a:solidFill>
+                  <a:srgbClr val="1A2433"/>
+                </a:solidFill>
+                <a:latin typeface="Calibri" pitchFamily="34" charset="0"/>
+                <a:ea typeface="Calibri" pitchFamily="34" charset="-122"/>
+                <a:cs typeface="Calibri" pitchFamily="34" charset="-120"/>
+              </a:rPr>
+              <a:t>Arqueros</a:t>
+            </a:r>
+            <a:endParaRPr lang="en-US" sz="1050" dirty="0"/>
+          </a:p>
+        </p:txBody>
+      </p:sp>
+      <p:sp>
+        <p:nvSpPr>
+          <p:cNvPr id="62" name="Text 58"/>
+          <p:cNvSpPr/>
+          <p:nvPr/>
+        </p:nvSpPr>
+        <p:spPr>
+          <a:xfrm>
+            <a:off x="2468880" y="5413248"/>
+            <a:ext cx="1051560" cy="237744"/>
+          </a:xfrm>
+          <a:prstGeom prst="rect">
+            <a:avLst/>
+          </a:prstGeom>
+          <a:noFill/>
+          <a:ln/>
+        </p:spPr>
+        <p:txBody>
+          <a:bodyPr wrap="square" lIns="0" tIns="0" rIns="0" bIns="0" rtlCol="0" anchor="ctr"/>
+          <a:lstStyle/>
+          <a:p>
+            <a:pPr algn="l" indent="0" marL="0">
+              <a:buNone/>
+            </a:pPr>
+            <a:r>
+              <a:rPr lang="en-US" sz="1050" dirty="0">
+                <a:solidFill>
+                  <a:srgbClr val="1A2433"/>
+                </a:solidFill>
+                <a:latin typeface="Calibri" pitchFamily="34" charset="0"/>
+                <a:ea typeface="Calibri" pitchFamily="34" charset="-122"/>
+                <a:cs typeface="Calibri" pitchFamily="34" charset="-120"/>
+              </a:rPr>
+              <a:t>MASA-89 · EB-NE-1412</a:t>
+            </a:r>
+            <a:endParaRPr lang="en-US" sz="1050" dirty="0"/>
+          </a:p>
+        </p:txBody>
+      </p:sp>
+      <p:sp>
+        <p:nvSpPr>
+          <p:cNvPr id="63" name="Text 59"/>
+          <p:cNvSpPr/>
+          <p:nvPr/>
+        </p:nvSpPr>
+        <p:spPr>
+          <a:xfrm>
+            <a:off x="3566160" y="5413248"/>
+            <a:ext cx="1371600" cy="237744"/>
+          </a:xfrm>
+          <a:prstGeom prst="rect">
+            <a:avLst/>
+          </a:prstGeom>
+          <a:noFill/>
+          <a:ln/>
+        </p:spPr>
+        <p:txBody>
+          <a:bodyPr wrap="square" lIns="0" tIns="0" rIns="0" bIns="0" rtlCol="0" anchor="ctr"/>
+          <a:lstStyle/>
+          <a:p>
+            <a:pPr algn="l" indent="0" marL="0">
+              <a:buNone/>
+            </a:pPr>
+            <a:r>
+              <a:rPr lang="en-US" sz="1050" dirty="0">
+                <a:solidFill>
+                  <a:srgbClr val="1A2433"/>
+                </a:solidFill>
+                <a:latin typeface="Calibri" pitchFamily="34" charset="0"/>
+                <a:ea typeface="Calibri" pitchFamily="34" charset="-122"/>
+                <a:cs typeface="Calibri" pitchFamily="34" charset="-120"/>
+              </a:rPr>
+              <a:t>No Conformidad</a:t>
+            </a:r>
+            <a:endParaRPr lang="en-US" sz="1050" dirty="0"/>
+          </a:p>
+        </p:txBody>
+      </p:sp>
+      <p:sp>
+        <p:nvSpPr>
+          <p:cNvPr id="64" name="Text 60"/>
+          <p:cNvSpPr/>
+          <p:nvPr/>
+        </p:nvSpPr>
+        <p:spPr>
+          <a:xfrm>
+            <a:off x="4983480" y="5413248"/>
+            <a:ext cx="1417320" cy="237744"/>
+          </a:xfrm>
+          <a:prstGeom prst="rect">
+            <a:avLst/>
+          </a:prstGeom>
+          <a:noFill/>
+          <a:ln/>
+        </p:spPr>
+        <p:txBody>
+          <a:bodyPr wrap="square" lIns="0" tIns="0" rIns="0" bIns="0" rtlCol="0" anchor="ctr"/>
+          <a:lstStyle/>
+          <a:p>
+            <a:pPr algn="l" indent="0" marL="0">
+              <a:buNone/>
+            </a:pPr>
+            <a:r>
+              <a:rPr lang="en-US" sz="1050" b="1" dirty="0">
+                <a:solidFill>
+                  <a:srgbClr val="C87A32"/>
+                </a:solidFill>
+                <a:latin typeface="Calibri" pitchFamily="34" charset="0"/>
+                <a:ea typeface="Calibri" pitchFamily="34" charset="-122"/>
+                <a:cs typeface="Calibri" pitchFamily="34" charset="-120"/>
+              </a:rPr>
+              <a:t>Externa · Cliente</a:t>
+            </a:r>
+            <a:endParaRPr lang="en-US" sz="1050" dirty="0"/>
+          </a:p>
+        </p:txBody>
+      </p:sp>
+      <p:sp>
+        <p:nvSpPr>
+          <p:cNvPr id="65" name="Text 61"/>
+          <p:cNvSpPr/>
+          <p:nvPr/>
+        </p:nvSpPr>
+        <p:spPr>
+          <a:xfrm>
+            <a:off x="6446520" y="5413248"/>
+            <a:ext cx="1097280" cy="237744"/>
+          </a:xfrm>
+          <a:prstGeom prst="rect">
+            <a:avLst/>
+          </a:prstGeom>
+          <a:noFill/>
+          <a:ln/>
+        </p:spPr>
+        <p:txBody>
+          <a:bodyPr wrap="square" lIns="0" tIns="0" rIns="0" bIns="0" rtlCol="0" anchor="ctr"/>
+          <a:lstStyle/>
+          <a:p>
+            <a:pPr algn="l" indent="0" marL="0">
+              <a:buNone/>
+            </a:pPr>
+            <a:r>
+              <a:rPr lang="en-US" sz="1050" dirty="0">
+                <a:solidFill>
+                  <a:srgbClr val="1A2433"/>
+                </a:solidFill>
+                <a:latin typeface="Calibri" pitchFamily="34" charset="0"/>
+                <a:ea typeface="Calibri" pitchFamily="34" charset="-122"/>
+                <a:cs typeface="Calibri" pitchFamily="34" charset="-120"/>
+              </a:rPr>
+              <a:t>Sin especial…</a:t>
+            </a:r>
+            <a:endParaRPr lang="en-US" sz="1050" dirty="0"/>
+          </a:p>
+        </p:txBody>
+      </p:sp>
+      <p:sp>
+        <p:nvSpPr>
+          <p:cNvPr id="66" name="Text 62"/>
+          <p:cNvSpPr/>
+          <p:nvPr/>
+        </p:nvSpPr>
+        <p:spPr>
+          <a:xfrm>
+            <a:off x="7589520" y="5413248"/>
+            <a:ext cx="1371600" cy="237744"/>
+          </a:xfrm>
+          <a:prstGeom prst="rect">
+            <a:avLst/>
+          </a:prstGeom>
+          <a:noFill/>
+          <a:ln/>
+        </p:spPr>
+        <p:txBody>
+          <a:bodyPr wrap="square" lIns="0" tIns="0" rIns="0" bIns="0" rtlCol="0" anchor="ctr"/>
+          <a:lstStyle/>
+          <a:p>
+            <a:pPr algn="l" indent="0" marL="0">
+              <a:buNone/>
+            </a:pPr>
+            <a:r>
+              <a:rPr lang="en-US" sz="1050" dirty="0">
+                <a:solidFill>
+                  <a:srgbClr val="1A2433"/>
+                </a:solidFill>
+                <a:latin typeface="Calibri" pitchFamily="34" charset="0"/>
+                <a:ea typeface="Calibri" pitchFamily="34" charset="-122"/>
+                <a:cs typeface="Calibri" pitchFamily="34" charset="-120"/>
+              </a:rPr>
+              <a:t>Sin asignar</a:t>
+            </a:r>
+            <a:endParaRPr lang="en-US" sz="1050" dirty="0"/>
+          </a:p>
+        </p:txBody>
+      </p:sp>
+      <p:sp>
+        <p:nvSpPr>
+          <p:cNvPr id="67" name="Text 63"/>
+          <p:cNvSpPr/>
+          <p:nvPr/>
+        </p:nvSpPr>
+        <p:spPr>
+          <a:xfrm>
+            <a:off x="9006840" y="5413248"/>
+            <a:ext cx="868680" cy="237744"/>
+          </a:xfrm>
+          <a:prstGeom prst="rect">
+            <a:avLst/>
+          </a:prstGeom>
+          <a:noFill/>
+          <a:ln/>
+        </p:spPr>
+        <p:txBody>
+          <a:bodyPr wrap="square" lIns="0" tIns="0" rIns="0" bIns="0" rtlCol="0" anchor="ctr"/>
+          <a:lstStyle/>
+          <a:p>
+            <a:pPr algn="l" indent="0" marL="0">
+              <a:buNone/>
+            </a:pPr>
+            <a:r>
+              <a:rPr lang="en-US" sz="1050" dirty="0">
+                <a:solidFill>
+                  <a:srgbClr val="C0392B"/>
+                </a:solidFill>
+                <a:latin typeface="Calibri" pitchFamily="34" charset="0"/>
+                <a:ea typeface="Calibri" pitchFamily="34" charset="-122"/>
+                <a:cs typeface="Calibri" pitchFamily="34" charset="-120"/>
+              </a:rPr>
+              <a:t>Pendiente</a:t>
+            </a:r>
+            <a:endParaRPr lang="en-US" sz="1050" dirty="0"/>
+          </a:p>
+        </p:txBody>
+      </p:sp>
+      <p:sp>
+        <p:nvSpPr>
+          <p:cNvPr id="68" name="Text 64"/>
+          <p:cNvSpPr/>
+          <p:nvPr/>
+        </p:nvSpPr>
+        <p:spPr>
+          <a:xfrm>
+            <a:off x="9921240" y="5413248"/>
+            <a:ext cx="1828800" cy="237744"/>
+          </a:xfrm>
+          <a:prstGeom prst="rect">
+            <a:avLst/>
+          </a:prstGeom>
+          <a:noFill/>
+          <a:ln/>
+        </p:spPr>
+        <p:txBody>
+          <a:bodyPr wrap="square" lIns="0" tIns="0" rIns="0" bIns="0" rtlCol="0" anchor="ctr"/>
+          <a:lstStyle/>
+          <a:p>
+            <a:pPr algn="l" indent="0" marL="0">
+              <a:buNone/>
+            </a:pPr>
+            <a:r>
+              <a:rPr lang="en-US" sz="1000" dirty="0">
+                <a:solidFill>
+                  <a:srgbClr val="1A2433"/>
+                </a:solidFill>
+                <a:latin typeface="Calibri" pitchFamily="34" charset="0"/>
+                <a:ea typeface="Calibri" pitchFamily="34" charset="-122"/>
+                <a:cs typeface="Calibri" pitchFamily="34" charset="-120"/>
+              </a:rPr>
+              <a:t>Desviación en alturagrado d…</a:t>
+            </a:r>
+            <a:endParaRPr lang="en-US" sz="1000" dirty="0"/>
+          </a:p>
+        </p:txBody>
+      </p:sp>
+      <p:sp>
+        <p:nvSpPr>
+          <p:cNvPr id="69" name="Shape 65"/>
+          <p:cNvSpPr/>
+          <p:nvPr/>
+        </p:nvSpPr>
+        <p:spPr>
+          <a:xfrm>
+            <a:off x="502920" y="5687568"/>
+            <a:ext cx="11247120" cy="0"/>
+          </a:xfrm>
+          <a:prstGeom prst="line">
+            <a:avLst/>
+          </a:prstGeom>
+          <a:noFill/>
+          <a:ln w="9525">
+            <a:solidFill>
+              <a:srgbClr val="D9DFE6"/>
+            </a:solidFill>
+            <a:prstDash val="solid"/>
+          </a:ln>
+        </p:spPr>
+      </p:sp>
+      <p:sp>
+        <p:nvSpPr>
+          <p:cNvPr id="70" name="Text 66"/>
+          <p:cNvSpPr/>
+          <p:nvPr/>
+        </p:nvSpPr>
+        <p:spPr>
+          <a:xfrm>
+            <a:off x="502920" y="5742432"/>
+            <a:ext cx="822960" cy="237744"/>
+          </a:xfrm>
+          <a:prstGeom prst="rect">
+            <a:avLst/>
+          </a:prstGeom>
+          <a:noFill/>
+          <a:ln/>
+        </p:spPr>
+        <p:txBody>
+          <a:bodyPr wrap="square" lIns="0" tIns="0" rIns="0" bIns="0" rtlCol="0" anchor="ctr"/>
+          <a:lstStyle/>
+          <a:p>
+            <a:pPr algn="l" indent="0" marL="0">
+              <a:buNone/>
+            </a:pPr>
+            <a:r>
+              <a:rPr lang="en-US" sz="1050" dirty="0">
+                <a:solidFill>
+                  <a:srgbClr val="1A2433"/>
+                </a:solidFill>
+                <a:latin typeface="Calibri" pitchFamily="34" charset="0"/>
+                <a:ea typeface="Calibri" pitchFamily="34" charset="-122"/>
+                <a:cs typeface="Calibri" pitchFamily="34" charset="-120"/>
+              </a:rPr>
+              <a:t>01-09-2026</a:t>
+            </a:r>
+            <a:endParaRPr lang="en-US" sz="1050" dirty="0"/>
+          </a:p>
+        </p:txBody>
+      </p:sp>
+      <p:sp>
+        <p:nvSpPr>
+          <p:cNvPr id="71" name="Text 67"/>
+          <p:cNvSpPr/>
+          <p:nvPr/>
+        </p:nvSpPr>
+        <p:spPr>
+          <a:xfrm>
+            <a:off x="1371600" y="5742432"/>
+            <a:ext cx="1051560" cy="237744"/>
+          </a:xfrm>
+          <a:prstGeom prst="rect">
+            <a:avLst/>
+          </a:prstGeom>
+          <a:noFill/>
+          <a:ln/>
+        </p:spPr>
+        <p:txBody>
+          <a:bodyPr wrap="square" lIns="0" tIns="0" rIns="0" bIns="0" rtlCol="0" anchor="ctr"/>
+          <a:lstStyle/>
+          <a:p>
+            <a:pPr algn="l" indent="0" marL="0">
+              <a:buNone/>
+            </a:pPr>
+            <a:r>
+              <a:rPr lang="en-US" sz="1050" dirty="0">
+                <a:solidFill>
+                  <a:srgbClr val="1A2433"/>
+                </a:solidFill>
+                <a:latin typeface="Calibri" pitchFamily="34" charset="0"/>
+                <a:ea typeface="Calibri" pitchFamily="34" charset="-122"/>
+                <a:cs typeface="Calibri" pitchFamily="34" charset="-120"/>
+              </a:rPr>
+              <a:t>Arqueros</a:t>
+            </a:r>
+            <a:endParaRPr lang="en-US" sz="1050" dirty="0"/>
+          </a:p>
+        </p:txBody>
+      </p:sp>
+      <p:sp>
+        <p:nvSpPr>
+          <p:cNvPr id="72" name="Text 68"/>
+          <p:cNvSpPr/>
+          <p:nvPr/>
+        </p:nvSpPr>
+        <p:spPr>
+          <a:xfrm>
+            <a:off x="2468880" y="5742432"/>
+            <a:ext cx="1051560" cy="237744"/>
+          </a:xfrm>
+          <a:prstGeom prst="rect">
+            <a:avLst/>
+          </a:prstGeom>
+          <a:noFill/>
+          <a:ln/>
+        </p:spPr>
+        <p:txBody>
+          <a:bodyPr wrap="square" lIns="0" tIns="0" rIns="0" bIns="0" rtlCol="0" anchor="ctr"/>
+          <a:lstStyle/>
+          <a:p>
+            <a:pPr algn="l" indent="0" marL="0">
+              <a:buNone/>
+            </a:pPr>
+            <a:r>
+              <a:rPr lang="en-US" sz="1050" dirty="0">
+                <a:solidFill>
+                  <a:srgbClr val="1A2433"/>
+                </a:solidFill>
+                <a:latin typeface="Calibri" pitchFamily="34" charset="0"/>
+                <a:ea typeface="Calibri" pitchFamily="34" charset="-122"/>
+                <a:cs typeface="Calibri" pitchFamily="34" charset="-120"/>
+              </a:rPr>
+              <a:t>MASA-90 · EB-NE-1412</a:t>
+            </a:r>
+            <a:endParaRPr lang="en-US" sz="1050" dirty="0"/>
+          </a:p>
+        </p:txBody>
+      </p:sp>
+      <p:sp>
+        <p:nvSpPr>
+          <p:cNvPr id="73" name="Text 69"/>
+          <p:cNvSpPr/>
+          <p:nvPr/>
+        </p:nvSpPr>
+        <p:spPr>
+          <a:xfrm>
+            <a:off x="3566160" y="5742432"/>
+            <a:ext cx="1371600" cy="237744"/>
+          </a:xfrm>
+          <a:prstGeom prst="rect">
+            <a:avLst/>
+          </a:prstGeom>
+          <a:noFill/>
+          <a:ln/>
+        </p:spPr>
+        <p:txBody>
+          <a:bodyPr wrap="square" lIns="0" tIns="0" rIns="0" bIns="0" rtlCol="0" anchor="ctr"/>
+          <a:lstStyle/>
+          <a:p>
+            <a:pPr algn="l" indent="0" marL="0">
+              <a:buNone/>
+            </a:pPr>
+            <a:r>
+              <a:rPr lang="en-US" sz="1050" dirty="0">
+                <a:solidFill>
+                  <a:srgbClr val="1A2433"/>
+                </a:solidFill>
+                <a:latin typeface="Calibri" pitchFamily="34" charset="0"/>
+                <a:ea typeface="Calibri" pitchFamily="34" charset="-122"/>
+                <a:cs typeface="Calibri" pitchFamily="34" charset="-120"/>
+              </a:rPr>
+              <a:t>No Conformidad</a:t>
+            </a:r>
+            <a:endParaRPr lang="en-US" sz="1050" dirty="0"/>
+          </a:p>
+        </p:txBody>
+      </p:sp>
+      <p:sp>
+        <p:nvSpPr>
+          <p:cNvPr id="74" name="Text 70"/>
+          <p:cNvSpPr/>
+          <p:nvPr/>
+        </p:nvSpPr>
+        <p:spPr>
+          <a:xfrm>
+            <a:off x="4983480" y="5742432"/>
+            <a:ext cx="1417320" cy="237744"/>
+          </a:xfrm>
+          <a:prstGeom prst="rect">
+            <a:avLst/>
+          </a:prstGeom>
+          <a:noFill/>
+          <a:ln/>
+        </p:spPr>
+        <p:txBody>
+          <a:bodyPr wrap="square" lIns="0" tIns="0" rIns="0" bIns="0" rtlCol="0" anchor="ctr"/>
+          <a:lstStyle/>
+          <a:p>
+            <a:pPr algn="l" indent="0" marL="0">
+              <a:buNone/>
+            </a:pPr>
+            <a:r>
+              <a:rPr lang="en-US" sz="1050" b="1" dirty="0">
+                <a:solidFill>
+                  <a:srgbClr val="C87A32"/>
+                </a:solidFill>
+                <a:latin typeface="Calibri" pitchFamily="34" charset="0"/>
+                <a:ea typeface="Calibri" pitchFamily="34" charset="-122"/>
+                <a:cs typeface="Calibri" pitchFamily="34" charset="-120"/>
+              </a:rPr>
+              <a:t>Externa · Cliente</a:t>
+            </a:r>
+            <a:endParaRPr lang="en-US" sz="1050" dirty="0"/>
+          </a:p>
+        </p:txBody>
+      </p:sp>
+      <p:sp>
+        <p:nvSpPr>
+          <p:cNvPr id="75" name="Text 71"/>
+          <p:cNvSpPr/>
+          <p:nvPr/>
+        </p:nvSpPr>
+        <p:spPr>
+          <a:xfrm>
+            <a:off x="6446520" y="5742432"/>
+            <a:ext cx="1097280" cy="237744"/>
+          </a:xfrm>
+          <a:prstGeom prst="rect">
+            <a:avLst/>
+          </a:prstGeom>
+          <a:noFill/>
+          <a:ln/>
+        </p:spPr>
+        <p:txBody>
+          <a:bodyPr wrap="square" lIns="0" tIns="0" rIns="0" bIns="0" rtlCol="0" anchor="ctr"/>
+          <a:lstStyle/>
+          <a:p>
+            <a:pPr algn="l" indent="0" marL="0">
+              <a:buNone/>
+            </a:pPr>
+            <a:r>
+              <a:rPr lang="en-US" sz="1050" dirty="0">
+                <a:solidFill>
+                  <a:srgbClr val="1A2433"/>
+                </a:solidFill>
+                <a:latin typeface="Calibri" pitchFamily="34" charset="0"/>
+                <a:ea typeface="Calibri" pitchFamily="34" charset="-122"/>
+                <a:cs typeface="Calibri" pitchFamily="34" charset="-120"/>
+              </a:rPr>
+              <a:t>Sin especial…</a:t>
+            </a:r>
+            <a:endParaRPr lang="en-US" sz="1050" dirty="0"/>
+          </a:p>
+        </p:txBody>
+      </p:sp>
+      <p:sp>
+        <p:nvSpPr>
+          <p:cNvPr id="76" name="Text 72"/>
+          <p:cNvSpPr/>
+          <p:nvPr/>
+        </p:nvSpPr>
+        <p:spPr>
+          <a:xfrm>
+            <a:off x="7589520" y="5742432"/>
+            <a:ext cx="1371600" cy="237744"/>
+          </a:xfrm>
+          <a:prstGeom prst="rect">
+            <a:avLst/>
+          </a:prstGeom>
+          <a:noFill/>
+          <a:ln/>
+        </p:spPr>
+        <p:txBody>
+          <a:bodyPr wrap="square" lIns="0" tIns="0" rIns="0" bIns="0" rtlCol="0" anchor="ctr"/>
+          <a:lstStyle/>
+          <a:p>
+            <a:pPr algn="l" indent="0" marL="0">
+              <a:buNone/>
+            </a:pPr>
+            <a:r>
+              <a:rPr lang="en-US" sz="1050" dirty="0">
+                <a:solidFill>
+                  <a:srgbClr val="1A2433"/>
+                </a:solidFill>
+                <a:latin typeface="Calibri" pitchFamily="34" charset="0"/>
+                <a:ea typeface="Calibri" pitchFamily="34" charset="-122"/>
+                <a:cs typeface="Calibri" pitchFamily="34" charset="-120"/>
+              </a:rPr>
+              <a:t>Sin asignar</a:t>
+            </a:r>
+            <a:endParaRPr lang="en-US" sz="1050" dirty="0"/>
+          </a:p>
+        </p:txBody>
+      </p:sp>
+      <p:sp>
+        <p:nvSpPr>
+          <p:cNvPr id="77" name="Text 73"/>
+          <p:cNvSpPr/>
+          <p:nvPr/>
+        </p:nvSpPr>
+        <p:spPr>
+          <a:xfrm>
+            <a:off x="9006840" y="5742432"/>
+            <a:ext cx="868680" cy="237744"/>
+          </a:xfrm>
+          <a:prstGeom prst="rect">
+            <a:avLst/>
+          </a:prstGeom>
+          <a:noFill/>
+          <a:ln/>
+        </p:spPr>
+        <p:txBody>
+          <a:bodyPr wrap="square" lIns="0" tIns="0" rIns="0" bIns="0" rtlCol="0" anchor="ctr"/>
+          <a:lstStyle/>
+          <a:p>
+            <a:pPr algn="l" indent="0" marL="0">
+              <a:buNone/>
+            </a:pPr>
+            <a:r>
+              <a:rPr lang="en-US" sz="1050" dirty="0">
+                <a:solidFill>
+                  <a:srgbClr val="C0392B"/>
+                </a:solidFill>
+                <a:latin typeface="Calibri" pitchFamily="34" charset="0"/>
+                <a:ea typeface="Calibri" pitchFamily="34" charset="-122"/>
+                <a:cs typeface="Calibri" pitchFamily="34" charset="-120"/>
+              </a:rPr>
+              <a:t>Pendiente</a:t>
+            </a:r>
+            <a:endParaRPr lang="en-US" sz="1050" dirty="0"/>
+          </a:p>
+        </p:txBody>
+      </p:sp>
+      <p:sp>
+        <p:nvSpPr>
+          <p:cNvPr id="78" name="Text 74"/>
+          <p:cNvSpPr/>
+          <p:nvPr/>
+        </p:nvSpPr>
+        <p:spPr>
+          <a:xfrm>
+            <a:off x="9921240" y="5742432"/>
+            <a:ext cx="1828800" cy="237744"/>
+          </a:xfrm>
+          <a:prstGeom prst="rect">
+            <a:avLst/>
+          </a:prstGeom>
+          <a:noFill/>
+          <a:ln/>
+        </p:spPr>
+        <p:txBody>
+          <a:bodyPr wrap="square" lIns="0" tIns="0" rIns="0" bIns="0" rtlCol="0" anchor="ctr"/>
+          <a:lstStyle/>
+          <a:p>
+            <a:pPr algn="l" indent="0" marL="0">
+              <a:buNone/>
+            </a:pPr>
+            <a:r>
+              <a:rPr lang="en-US" sz="1000" dirty="0">
+                <a:solidFill>
+                  <a:srgbClr val="1A2433"/>
+                </a:solidFill>
+                <a:latin typeface="Calibri" pitchFamily="34" charset="0"/>
+                <a:ea typeface="Calibri" pitchFamily="34" charset="-122"/>
+                <a:cs typeface="Calibri" pitchFamily="34" charset="-120"/>
+              </a:rPr>
+              <a:t>Desviación en soportación d…</a:t>
+            </a:r>
+            <a:endParaRPr lang="en-US" sz="1000" dirty="0"/>
+          </a:p>
+        </p:txBody>
+      </p:sp>
+      <p:sp>
+        <p:nvSpPr>
+          <p:cNvPr id="79" name="Shape 75"/>
+          <p:cNvSpPr/>
+          <p:nvPr/>
+        </p:nvSpPr>
+        <p:spPr>
+          <a:xfrm>
+            <a:off x="502920" y="6016752"/>
+            <a:ext cx="11247120" cy="0"/>
+          </a:xfrm>
+          <a:prstGeom prst="line">
+            <a:avLst/>
+          </a:prstGeom>
+          <a:noFill/>
+          <a:ln w="9525">
+            <a:solidFill>
+              <a:srgbClr val="D9DFE6"/>
+            </a:solidFill>
+            <a:prstDash val="solid"/>
+          </a:ln>
+        </p:spPr>
+      </p:sp>
+      <p:sp>
+        <p:nvSpPr>
+          <p:cNvPr id="80" name="Shape 76"/>
+          <p:cNvSpPr/>
+          <p:nvPr/>
+        </p:nvSpPr>
+        <p:spPr>
+          <a:xfrm>
+            <a:off x="457200" y="6025896"/>
+            <a:ext cx="11292840" cy="329184"/>
+          </a:xfrm>
+          <a:prstGeom prst="rect">
+            <a:avLst/>
+          </a:prstGeom>
+          <a:solidFill>
+            <a:srgbClr val="FFFFFF"/>
+          </a:solidFill>
+          <a:ln/>
+        </p:spPr>
+      </p:sp>
+      <p:sp>
+        <p:nvSpPr>
+          <p:cNvPr id="81" name="Text 77"/>
+          <p:cNvSpPr/>
+          <p:nvPr/>
+        </p:nvSpPr>
+        <p:spPr>
+          <a:xfrm>
+            <a:off x="502920" y="6071616"/>
+            <a:ext cx="822960" cy="237744"/>
+          </a:xfrm>
+          <a:prstGeom prst="rect">
+            <a:avLst/>
+          </a:prstGeom>
+          <a:noFill/>
+          <a:ln/>
+        </p:spPr>
+        <p:txBody>
+          <a:bodyPr wrap="square" lIns="0" tIns="0" rIns="0" bIns="0" rtlCol="0" anchor="ctr"/>
+          <a:lstStyle/>
+          <a:p>
+            <a:pPr algn="l" indent="0" marL="0">
+              <a:buNone/>
+            </a:pPr>
+            <a:r>
+              <a:rPr lang="en-US" sz="1050" dirty="0">
+                <a:solidFill>
+                  <a:srgbClr val="1A2433"/>
+                </a:solidFill>
+                <a:latin typeface="Calibri" pitchFamily="34" charset="0"/>
+                <a:ea typeface="Calibri" pitchFamily="34" charset="-122"/>
+                <a:cs typeface="Calibri" pitchFamily="34" charset="-120"/>
+              </a:rPr>
+              <a:t>01-09-2026</a:t>
+            </a:r>
+            <a:endParaRPr lang="en-US" sz="1050" dirty="0"/>
+          </a:p>
+        </p:txBody>
+      </p:sp>
+      <p:sp>
+        <p:nvSpPr>
+          <p:cNvPr id="82" name="Text 78"/>
+          <p:cNvSpPr/>
+          <p:nvPr/>
+        </p:nvSpPr>
+        <p:spPr>
+          <a:xfrm>
+            <a:off x="1371600" y="6071616"/>
+            <a:ext cx="1051560" cy="237744"/>
+          </a:xfrm>
+          <a:prstGeom prst="rect">
+            <a:avLst/>
+          </a:prstGeom>
+          <a:noFill/>
+          <a:ln/>
+        </p:spPr>
+        <p:txBody>
+          <a:bodyPr wrap="square" lIns="0" tIns="0" rIns="0" bIns="0" rtlCol="0" anchor="ctr"/>
+          <a:lstStyle/>
+          <a:p>
+            <a:pPr algn="l" indent="0" marL="0">
+              <a:buNone/>
+            </a:pPr>
+            <a:r>
+              <a:rPr lang="en-US" sz="1050" dirty="0">
+                <a:solidFill>
+                  <a:srgbClr val="1A2433"/>
+                </a:solidFill>
+                <a:latin typeface="Calibri" pitchFamily="34" charset="0"/>
+                <a:ea typeface="Calibri" pitchFamily="34" charset="-122"/>
+                <a:cs typeface="Calibri" pitchFamily="34" charset="-120"/>
+              </a:rPr>
+              <a:t>Arqueros</a:t>
+            </a:r>
+            <a:endParaRPr lang="en-US" sz="1050" dirty="0"/>
+          </a:p>
+        </p:txBody>
+      </p:sp>
+      <p:sp>
+        <p:nvSpPr>
+          <p:cNvPr id="83" name="Text 79"/>
+          <p:cNvSpPr/>
+          <p:nvPr/>
+        </p:nvSpPr>
+        <p:spPr>
+          <a:xfrm>
+            <a:off x="2468880" y="6071616"/>
+            <a:ext cx="1051560" cy="237744"/>
+          </a:xfrm>
+          <a:prstGeom prst="rect">
+            <a:avLst/>
+          </a:prstGeom>
+          <a:noFill/>
+          <a:ln/>
+        </p:spPr>
+        <p:txBody>
+          <a:bodyPr wrap="square" lIns="0" tIns="0" rIns="0" bIns="0" rtlCol="0" anchor="ctr"/>
+          <a:lstStyle/>
+          <a:p>
+            <a:pPr algn="l" indent="0" marL="0">
+              <a:buNone/>
+            </a:pPr>
+            <a:r>
+              <a:rPr lang="en-US" sz="1050" dirty="0">
+                <a:solidFill>
+                  <a:srgbClr val="1A2433"/>
+                </a:solidFill>
+                <a:latin typeface="Calibri" pitchFamily="34" charset="0"/>
+                <a:ea typeface="Calibri" pitchFamily="34" charset="-122"/>
+                <a:cs typeface="Calibri" pitchFamily="34" charset="-120"/>
+              </a:rPr>
+              <a:t>MASA-91 · EB-NE-1412</a:t>
+            </a:r>
+            <a:endParaRPr lang="en-US" sz="1050" dirty="0"/>
+          </a:p>
+        </p:txBody>
+      </p:sp>
+      <p:sp>
+        <p:nvSpPr>
+          <p:cNvPr id="84" name="Text 80"/>
+          <p:cNvSpPr/>
+          <p:nvPr/>
+        </p:nvSpPr>
+        <p:spPr>
+          <a:xfrm>
+            <a:off x="3566160" y="6071616"/>
+            <a:ext cx="1371600" cy="237744"/>
+          </a:xfrm>
+          <a:prstGeom prst="rect">
+            <a:avLst/>
+          </a:prstGeom>
+          <a:noFill/>
+          <a:ln/>
+        </p:spPr>
+        <p:txBody>
+          <a:bodyPr wrap="square" lIns="0" tIns="0" rIns="0" bIns="0" rtlCol="0" anchor="ctr"/>
+          <a:lstStyle/>
+          <a:p>
+            <a:pPr algn="l" indent="0" marL="0">
+              <a:buNone/>
+            </a:pPr>
+            <a:r>
+              <a:rPr lang="en-US" sz="1050" dirty="0">
+                <a:solidFill>
+                  <a:srgbClr val="1A2433"/>
+                </a:solidFill>
+                <a:latin typeface="Calibri" pitchFamily="34" charset="0"/>
+                <a:ea typeface="Calibri" pitchFamily="34" charset="-122"/>
+                <a:cs typeface="Calibri" pitchFamily="34" charset="-120"/>
+              </a:rPr>
+              <a:t>No Conformidad</a:t>
+            </a:r>
+            <a:endParaRPr lang="en-US" sz="1050" dirty="0"/>
+          </a:p>
+        </p:txBody>
+      </p:sp>
+      <p:sp>
+        <p:nvSpPr>
+          <p:cNvPr id="85" name="Text 81"/>
+          <p:cNvSpPr/>
+          <p:nvPr/>
+        </p:nvSpPr>
+        <p:spPr>
+          <a:xfrm>
+            <a:off x="4983480" y="6071616"/>
+            <a:ext cx="1417320" cy="237744"/>
+          </a:xfrm>
+          <a:prstGeom prst="rect">
+            <a:avLst/>
+          </a:prstGeom>
+          <a:noFill/>
+          <a:ln/>
+        </p:spPr>
+        <p:txBody>
+          <a:bodyPr wrap="square" lIns="0" tIns="0" rIns="0" bIns="0" rtlCol="0" anchor="ctr"/>
+          <a:lstStyle/>
+          <a:p>
+            <a:pPr algn="l" indent="0" marL="0">
+              <a:buNone/>
+            </a:pPr>
+            <a:r>
+              <a:rPr lang="en-US" sz="1050" b="1" dirty="0">
+                <a:solidFill>
+                  <a:srgbClr val="C87A32"/>
+                </a:solidFill>
+                <a:latin typeface="Calibri" pitchFamily="34" charset="0"/>
+                <a:ea typeface="Calibri" pitchFamily="34" charset="-122"/>
+                <a:cs typeface="Calibri" pitchFamily="34" charset="-120"/>
+              </a:rPr>
+              <a:t>Externa · Cliente</a:t>
+            </a:r>
+            <a:endParaRPr lang="en-US" sz="1050" dirty="0"/>
+          </a:p>
+        </p:txBody>
+      </p:sp>
+      <p:sp>
+        <p:nvSpPr>
+          <p:cNvPr id="86" name="Text 82"/>
+          <p:cNvSpPr/>
+          <p:nvPr/>
+        </p:nvSpPr>
+        <p:spPr>
+          <a:xfrm>
+            <a:off x="6446520" y="6071616"/>
+            <a:ext cx="1097280" cy="237744"/>
+          </a:xfrm>
+          <a:prstGeom prst="rect">
+            <a:avLst/>
+          </a:prstGeom>
+          <a:noFill/>
+          <a:ln/>
+        </p:spPr>
+        <p:txBody>
+          <a:bodyPr wrap="square" lIns="0" tIns="0" rIns="0" bIns="0" rtlCol="0" anchor="ctr"/>
+          <a:lstStyle/>
+          <a:p>
+            <a:pPr algn="l" indent="0" marL="0">
+              <a:buNone/>
+            </a:pPr>
+            <a:r>
+              <a:rPr lang="en-US" sz="1050" dirty="0">
+                <a:solidFill>
+                  <a:srgbClr val="1A2433"/>
+                </a:solidFill>
+                <a:latin typeface="Calibri" pitchFamily="34" charset="0"/>
+                <a:ea typeface="Calibri" pitchFamily="34" charset="-122"/>
+                <a:cs typeface="Calibri" pitchFamily="34" charset="-120"/>
+              </a:rPr>
+              <a:t>Sin especial…</a:t>
+            </a:r>
+            <a:endParaRPr lang="en-US" sz="1050" dirty="0"/>
+          </a:p>
+        </p:txBody>
+      </p:sp>
+      <p:sp>
+        <p:nvSpPr>
+          <p:cNvPr id="87" name="Text 83"/>
+          <p:cNvSpPr/>
+          <p:nvPr/>
+        </p:nvSpPr>
+        <p:spPr>
+          <a:xfrm>
+            <a:off x="7589520" y="6071616"/>
+            <a:ext cx="1371600" cy="237744"/>
+          </a:xfrm>
+          <a:prstGeom prst="rect">
+            <a:avLst/>
+          </a:prstGeom>
+          <a:noFill/>
+          <a:ln/>
+        </p:spPr>
+        <p:txBody>
+          <a:bodyPr wrap="square" lIns="0" tIns="0" rIns="0" bIns="0" rtlCol="0" anchor="ctr"/>
+          <a:lstStyle/>
+          <a:p>
+            <a:pPr algn="l" indent="0" marL="0">
+              <a:buNone/>
+            </a:pPr>
+            <a:r>
+              <a:rPr lang="en-US" sz="1050" dirty="0">
+                <a:solidFill>
+                  <a:srgbClr val="1A2433"/>
+                </a:solidFill>
+                <a:latin typeface="Calibri" pitchFamily="34" charset="0"/>
+                <a:ea typeface="Calibri" pitchFamily="34" charset="-122"/>
+                <a:cs typeface="Calibri" pitchFamily="34" charset="-120"/>
+              </a:rPr>
+              <a:t>Sin asignar</a:t>
+            </a:r>
+            <a:endParaRPr lang="en-US" sz="1050" dirty="0"/>
+          </a:p>
+        </p:txBody>
+      </p:sp>
+      <p:sp>
+        <p:nvSpPr>
+          <p:cNvPr id="88" name="Text 84"/>
+          <p:cNvSpPr/>
+          <p:nvPr/>
+        </p:nvSpPr>
+        <p:spPr>
+          <a:xfrm>
+            <a:off x="9006840" y="6071616"/>
+            <a:ext cx="868680" cy="237744"/>
+          </a:xfrm>
+          <a:prstGeom prst="rect">
+            <a:avLst/>
+          </a:prstGeom>
+          <a:noFill/>
+          <a:ln/>
+        </p:spPr>
+        <p:txBody>
+          <a:bodyPr wrap="square" lIns="0" tIns="0" rIns="0" bIns="0" rtlCol="0" anchor="ctr"/>
+          <a:lstStyle/>
+          <a:p>
+            <a:pPr algn="l" indent="0" marL="0">
+              <a:buNone/>
+            </a:pPr>
+            <a:r>
+              <a:rPr lang="en-US" sz="1050" dirty="0">
+                <a:solidFill>
+                  <a:srgbClr val="C0392B"/>
+                </a:solidFill>
+                <a:latin typeface="Calibri" pitchFamily="34" charset="0"/>
+                <a:ea typeface="Calibri" pitchFamily="34" charset="-122"/>
+                <a:cs typeface="Calibri" pitchFamily="34" charset="-120"/>
+              </a:rPr>
+              <a:t>Pendiente</a:t>
+            </a:r>
+            <a:endParaRPr lang="en-US" sz="1050" dirty="0"/>
+          </a:p>
+        </p:txBody>
+      </p:sp>
+      <p:sp>
+        <p:nvSpPr>
+          <p:cNvPr id="89" name="Text 85"/>
+          <p:cNvSpPr/>
+          <p:nvPr/>
+        </p:nvSpPr>
+        <p:spPr>
+          <a:xfrm>
+            <a:off x="9921240" y="6071616"/>
+            <a:ext cx="1828800" cy="237744"/>
+          </a:xfrm>
+          <a:prstGeom prst="rect">
+            <a:avLst/>
+          </a:prstGeom>
+          <a:noFill/>
+          <a:ln/>
+        </p:spPr>
+        <p:txBody>
+          <a:bodyPr wrap="square" lIns="0" tIns="0" rIns="0" bIns="0" rtlCol="0" anchor="ctr"/>
+          <a:lstStyle/>
+          <a:p>
+            <a:pPr algn="l" indent="0" marL="0">
+              <a:buNone/>
+            </a:pPr>
+            <a:r>
+              <a:rPr lang="en-US" sz="1000" dirty="0">
+                <a:solidFill>
+                  <a:srgbClr val="1A2433"/>
+                </a:solidFill>
+                <a:latin typeface="Calibri" pitchFamily="34" charset="0"/>
+                <a:ea typeface="Calibri" pitchFamily="34" charset="-122"/>
+                <a:cs typeface="Calibri" pitchFamily="34" charset="-120"/>
+              </a:rPr>
+              <a:t>gap en piping bombas celdas…</a:t>
+            </a:r>
+            <a:endParaRPr lang="en-US" sz="1000" dirty="0"/>
+          </a:p>
+        </p:txBody>
+      </p:sp>
+      <p:sp>
+        <p:nvSpPr>
+          <p:cNvPr id="90" name="Shape 86"/>
+          <p:cNvSpPr/>
+          <p:nvPr/>
+        </p:nvSpPr>
+        <p:spPr>
+          <a:xfrm>
+            <a:off x="502920" y="6345936"/>
+            <a:ext cx="11247120" cy="0"/>
+          </a:xfrm>
+          <a:prstGeom prst="line">
+            <a:avLst/>
+          </a:prstGeom>
+          <a:noFill/>
+          <a:ln w="9525">
+            <a:solidFill>
+              <a:srgbClr val="D9DFE6"/>
+            </a:solidFill>
+            <a:prstDash val="solid"/>
+          </a:ln>
+        </p:spPr>
+      </p:sp>
+      <p:sp>
+        <p:nvSpPr>
+          <p:cNvPr id="91" name="Text 87"/>
           <p:cNvSpPr/>
           <p:nvPr/>
         </p:nvSpPr>
@@ -26203,7 +28468,7 @@
                 <a:ea typeface="Calibri" pitchFamily="34" charset="-122"/>
                 <a:cs typeface="Calibri" pitchFamily="34" charset="-120"/>
               </a:rPr>
-              <a:t>Fuente: Data_NCR31082026.xlsx — hoja «Observaciones» · Corte 31-08-2026 · 502 registros desde 10-02-2023</a:t>
+              <a:t>Fuente: Data_NCR07092026.xlsx — hoja «Observaciones» · Corte 07-09-2026 · 509 registros desde 10-02-2023</a:t>
             </a:r>
             <a:endParaRPr lang="en-US" sz="850" dirty="0"/>
           </a:p>
@@ -26211,7 +28476,7 @@
       </p:sp>
       <p:sp>
         <p:nvSpPr>
-          <p:cNvPr id="39" name="Text 35"/>
+          <p:cNvPr id="92" name="Text 88"/>
           <p:cNvSpPr/>
           <p:nvPr/>
         </p:nvSpPr>
@@ -26250,7 +28515,7 @@
       </p:sp>
       <p:sp>
         <p:nvSpPr>
-          <p:cNvPr id="40" name="Text 36"/>
+          <p:cNvPr id="93" name="Text 89"/>
           <p:cNvSpPr/>
           <p:nvPr/>
         </p:nvSpPr>
@@ -26454,7 +28719,7 @@
                 <a:ea typeface="Calibri" pitchFamily="34" charset="-122"/>
                 <a:cs typeface="Calibri" pitchFamily="34" charset="-120"/>
               </a:rPr>
-              <a:t>Interna es autodetección: la levanta Besalco antes que nadie. Externa la levanta el cliente —compromete el contrato— o un subcontrato. Autodetección global: 32,3%.</a:t>
+              <a:t>Interna es autodetección: la levanta Besalco antes que nadie. Externa la levanta el cliente —compromete el contrato— o un subcontrato. Autodetección global: 31,8%.</a:t>
             </a:r>
             <a:endParaRPr lang="en-US" sz="1350" dirty="0"/>
           </a:p>
@@ -27199,7 +29464,7 @@
                 <a:ea typeface="Calibri" pitchFamily="34" charset="-122"/>
                 <a:cs typeface="Calibri" pitchFamily="34" charset="-120"/>
               </a:rPr>
-              <a:t>286</a:t>
+              <a:t>293</a:t>
             </a:r>
             <a:endParaRPr lang="en-US" sz="1050" dirty="0"/>
           </a:p>
@@ -27277,7 +29542,7 @@
                 <a:ea typeface="Calibri" pitchFamily="34" charset="-122"/>
                 <a:cs typeface="Calibri" pitchFamily="34" charset="-120"/>
               </a:rPr>
-              <a:t>87,1%</a:t>
+              <a:t>85%</a:t>
             </a:r>
             <a:endParaRPr lang="en-US" sz="1050" dirty="0"/>
           </a:p>
@@ -27316,7 +29581,7 @@
                 <a:ea typeface="Calibri" pitchFamily="34" charset="-122"/>
                 <a:cs typeface="Calibri" pitchFamily="34" charset="-120"/>
               </a:rPr>
-              <a:t>37</a:t>
+              <a:t>44</a:t>
             </a:r>
             <a:endParaRPr lang="en-US" sz="1050" dirty="0"/>
           </a:p>
@@ -27355,7 +29620,7 @@
                 <a:ea typeface="Calibri" pitchFamily="34" charset="-122"/>
                 <a:cs typeface="Calibri" pitchFamily="34" charset="-120"/>
               </a:rPr>
-              <a:t>36</a:t>
+              <a:t>37</a:t>
             </a:r>
             <a:endParaRPr lang="en-US" sz="1050" dirty="0"/>
           </a:p>
@@ -28107,7 +30372,7 @@
                 <a:ea typeface="Calibri" pitchFamily="34" charset="-122"/>
                 <a:cs typeface="Calibri" pitchFamily="34" charset="-120"/>
               </a:rPr>
-              <a:t>502</a:t>
+              <a:t>509</a:t>
             </a:r>
             <a:endParaRPr lang="en-US" sz="1050" dirty="0"/>
           </a:p>
@@ -28185,7 +30450,7 @@
                 <a:ea typeface="Calibri" pitchFamily="34" charset="-122"/>
                 <a:cs typeface="Calibri" pitchFamily="34" charset="-120"/>
               </a:rPr>
-              <a:t>92,2%</a:t>
+              <a:t>91%</a:t>
             </a:r>
             <a:endParaRPr lang="en-US" sz="1050" dirty="0"/>
           </a:p>
@@ -28224,7 +30489,7 @@
                 <a:ea typeface="Calibri" pitchFamily="34" charset="-122"/>
                 <a:cs typeface="Calibri" pitchFamily="34" charset="-120"/>
               </a:rPr>
-              <a:t>39</a:t>
+              <a:t>46</a:t>
             </a:r>
             <a:endParaRPr lang="en-US" sz="1050" dirty="0"/>
           </a:p>
@@ -28263,7 +30528,7 @@
                 <a:ea typeface="Calibri" pitchFamily="34" charset="-122"/>
                 <a:cs typeface="Calibri" pitchFamily="34" charset="-120"/>
               </a:rPr>
-              <a:t>38</a:t>
+              <a:t>39</a:t>
             </a:r>
             <a:endParaRPr lang="en-US" sz="1050" dirty="0"/>
           </a:p>
@@ -28519,7 +30784,7 @@
                 <a:ea typeface="Cambria" pitchFamily="34" charset="-122"/>
                 <a:cs typeface="Cambria" pitchFamily="34" charset="-120"/>
               </a:rPr>
-              <a:t>21%</a:t>
+              <a:t>20,9%</a:t>
             </a:r>
             <a:endParaRPr lang="en-US" sz="2400" dirty="0"/>
           </a:p>
@@ -28597,7 +30862,7 @@
                 <a:ea typeface="Cambria" pitchFamily="34" charset="-122"/>
                 <a:cs typeface="Cambria" pitchFamily="34" charset="-120"/>
               </a:rPr>
-              <a:t>32,3%</a:t>
+              <a:t>31,2%</a:t>
             </a:r>
             <a:endParaRPr lang="en-US" sz="2400" dirty="0"/>
           </a:p>
@@ -28675,7 +30940,7 @@
                 <a:ea typeface="Calibri" pitchFamily="34" charset="-122"/>
                 <a:cs typeface="Calibri" pitchFamily="34" charset="-120"/>
               </a:rPr>
-              <a:t>Fuente: Data_NCR31082026.xlsx — hoja «Observaciones» · Corte 31-08-2026 · 502 registros desde 10-02-2023</a:t>
+              <a:t>Fuente: Data_NCR07092026.xlsx — hoja «Observaciones» · Corte 07-09-2026 · 509 registros desde 10-02-2023</a:t>
             </a:r>
             <a:endParaRPr lang="en-US" sz="850" dirty="0"/>
           </a:p>
@@ -28926,7 +31191,7 @@
                 <a:ea typeface="Calibri" pitchFamily="34" charset="-122"/>
                 <a:cs typeface="Calibri" pitchFamily="34" charset="-120"/>
               </a:rPr>
-              <a:t>De los 39 hallazgos abiertos, 13 llevan más de 180 días desde que se levantaron y 0 más de un año. La mediana de cierre global es de 30 días.</a:t>
+              <a:t>De los 46 hallazgos abiertos, 17 llevan más de 180 días desde que se levantaron y 0 más de un año. La mediana de cierre global es de 30 días.</a:t>
             </a:r>
             <a:endParaRPr lang="en-US" sz="1350" dirty="0"/>
           </a:p>
@@ -29063,7 +31328,7 @@
                 <a:ea typeface="Calibri" pitchFamily="34" charset="-122"/>
                 <a:cs typeface="Calibri" pitchFamily="34" charset="-120"/>
               </a:rPr>
-              <a:t>Al corte hay 38 hallazgos fuera de plazo de los 39 abiertos.</a:t>
+              <a:t>Al corte hay 39 hallazgos fuera de plazo de los 46 abiertos.</a:t>
             </a:r>
             <a:endParaRPr lang="en-US" sz="1150" dirty="0"/>
           </a:p>
@@ -29859,7 +32124,7 @@
                 <a:ea typeface="Calibri" pitchFamily="34" charset="-122"/>
                 <a:cs typeface="Calibri" pitchFamily="34" charset="-120"/>
               </a:rPr>
-              <a:t>6</a:t>
+              <a:t>7</a:t>
             </a:r>
             <a:endParaRPr lang="en-US" sz="1150" dirty="0"/>
           </a:p>
@@ -30105,7 +32370,7 @@
                 <a:ea typeface="Calibri" pitchFamily="34" charset="-122"/>
                 <a:cs typeface="Calibri" pitchFamily="34" charset="-120"/>
               </a:rPr>
-              <a:t>32</a:t>
+              <a:t>38</a:t>
             </a:r>
             <a:endParaRPr lang="en-US" sz="1150" dirty="0"/>
           </a:p>
@@ -30483,7 +32748,7 @@
                 <a:ea typeface="Calibri" pitchFamily="34" charset="-122"/>
                 <a:cs typeface="Calibri" pitchFamily="34" charset="-120"/>
               </a:rPr>
-              <a:t>Fuente: Data_NCR31082026.xlsx — hoja «Observaciones» · Corte 31-08-2026 · 502 registros desde 10-02-2023</a:t>
+              <a:t>Fuente: Data_NCR07092026.xlsx — hoja «Observaciones» · Corte 07-09-2026 · 509 registros desde 10-02-2023</a:t>
             </a:r>
             <a:endParaRPr lang="en-US" sz="850" dirty="0"/>
           </a:p>
@@ -30734,7 +32999,7 @@
                 <a:ea typeface="Calibri" pitchFamily="34" charset="-122"/>
                 <a:cs typeface="Calibri" pitchFamily="34" charset="-120"/>
               </a:rPr>
-              <a:t>10.613 UF declaradas entre nov-24 y ago-26, imputadas al mes en que se levantó cada hallazgo. Las declaran 108 de 491 hallazgos del período.</a:t>
+              <a:t>10.613 UF declaradas entre nov-24 y sep-26, imputadas al mes en que se levantó cada hallazgo. Las declaran 108 de 498 hallazgos del período.</a:t>
             </a:r>
             <a:endParaRPr lang="en-US" sz="1350" dirty="0"/>
           </a:p>
@@ -30756,7 +33021,7 @@
         </p:nvGraphicFramePr>
         <p:xfrm>
           <a:off x="411480" y="1810512"/>
-          <a:ext cx="11594592" cy="914400"/>
+          <a:ext cx="11996928" cy="914400"/>
         </p:xfrm>
         <a:graphic>
           <a:graphicData uri="http://schemas.openxmlformats.org/drawingml/2006/table">
@@ -30764,6 +33029,7 @@
               <a:tblPr/>
               <a:tblGrid>
                 <a:gridCol w="1920240"/>
+                <a:gridCol w="402336"/>
                 <a:gridCol w="402336"/>
                 <a:gridCol w="402336"/>
                 <a:gridCol w="402336"/>
@@ -32832,6 +35098,95 @@
                           <a:ea typeface="Calibri" pitchFamily="34" charset="-122"/>
                           <a:cs typeface="Calibri" pitchFamily="34" charset="-120"/>
                         </a:rPr>
+                        <a:t>sep</a:t>
+                      </a:r>
+                      <a:endParaRPr lang="en-US" sz="750" dirty="0">
+                        <a:latin typeface="Calibri" charset="0"/>
+                        <a:ea typeface="Calibri" charset="0"/>
+                        <a:cs typeface="Calibri" charset="0"/>
+                      </a:endParaRPr>
+                    </a:p>
+                    <a:p>
+                      <a:pPr algn="r" indent="0" marL="0">
+                        <a:buNone/>
+                      </a:pPr>
+                      <a:r>
+                        <a:rPr lang="en-US" sz="750" b="1" dirty="0">
+                          <a:solidFill>
+                            <a:srgbClr val="56606E"/>
+                          </a:solidFill>
+                          <a:latin typeface="Calibri" pitchFamily="34" charset="0"/>
+                          <a:ea typeface="Calibri" pitchFamily="34" charset="-122"/>
+                          <a:cs typeface="Calibri" pitchFamily="34" charset="-120"/>
+                        </a:rPr>
+                        <a:t>26</a:t>
+                      </a:r>
+                      <a:endParaRPr lang="en-US" sz="750" dirty="0">
+                        <a:latin typeface="Calibri" charset="0"/>
+                        <a:ea typeface="Calibri" charset="0"/>
+                        <a:cs typeface="Calibri" charset="0"/>
+                      </a:endParaRPr>
+                    </a:p>
+                  </a:txBody>
+                  <a:tcPr marL="25400" marR="25400" marT="25400" marB="25400" anchor="b">
+                    <a:lnL w="12700" cap="flat" cmpd="sng" algn="ctr">
+                      <a:solidFill>
+                        <a:srgbClr val="F4F6F9"/>
+                      </a:solidFill>
+                      <a:prstDash val="solid"/>
+                      <a:round/>
+                      <a:headEnd type="none" w="med" len="med"/>
+                      <a:tailEnd type="none" w="med" len="med"/>
+                    </a:lnL>
+                    <a:lnR w="12700" cap="flat" cmpd="sng" algn="ctr">
+                      <a:solidFill>
+                        <a:srgbClr val="F4F6F9"/>
+                      </a:solidFill>
+                      <a:prstDash val="solid"/>
+                      <a:round/>
+                      <a:headEnd type="none" w="med" len="med"/>
+                      <a:tailEnd type="none" w="med" len="med"/>
+                    </a:lnR>
+                    <a:lnT w="12700" cap="flat" cmpd="sng" algn="ctr">
+                      <a:solidFill>
+                        <a:srgbClr val="F4F6F9"/>
+                      </a:solidFill>
+                      <a:prstDash val="solid"/>
+                      <a:round/>
+                      <a:headEnd type="none" w="med" len="med"/>
+                      <a:tailEnd type="none" w="med" len="med"/>
+                    </a:lnT>
+                    <a:lnB w="12700" cap="flat" cmpd="sng" algn="ctr">
+                      <a:solidFill>
+                        <a:srgbClr val="F4F6F9"/>
+                      </a:solidFill>
+                      <a:prstDash val="solid"/>
+                      <a:round/>
+                      <a:headEnd type="none" w="med" len="med"/>
+                      <a:tailEnd type="none" w="med" len="med"/>
+                    </a:lnB>
+                    <a:solidFill>
+                      <a:srgbClr val="F4F6F9"/>
+                    </a:solidFill>
+                  </a:tcPr>
+                </a:tc>
+                <a:tc>
+                  <a:txBody>
+                    <a:bodyPr/>
+                    <a:lstStyle/>
+                    <a:p>
+                      <a:pPr algn="r" indent="0" marL="0">
+                        <a:buNone/>
+                      </a:pPr>
+                      <a:r>
+                        <a:rPr lang="en-US" sz="750" b="1" dirty="0">
+                          <a:solidFill>
+                            <a:srgbClr val="56606E"/>
+                          </a:solidFill>
+                          <a:latin typeface="Calibri" pitchFamily="34" charset="0"/>
+                          <a:ea typeface="Calibri" pitchFamily="34" charset="-122"/>
+                          <a:cs typeface="Calibri" pitchFamily="34" charset="-120"/>
+                        </a:rPr>
                         <a:t>TOTAL UF</a:t>
                       </a:r>
                       <a:endParaRPr lang="en-US" sz="750" dirty="0">
@@ -34226,6 +36581,63 @@
                       <a:pPr algn="r" indent="0" marL="0">
                         <a:buNone/>
                       </a:pPr>
+                      <a:endParaRPr lang="en-US" sz="750" dirty="0">
+                        <a:latin typeface="Calibri" charset="0"/>
+                        <a:ea typeface="Calibri" charset="0"/>
+                        <a:cs typeface="Calibri" charset="0"/>
+                      </a:endParaRPr>
+                    </a:p>
+                  </a:txBody>
+                  <a:tcPr marL="25400" marR="25400" marT="25400" marB="25400" anchor="ctr">
+                    <a:lnL w="12700" cap="flat" cmpd="sng" algn="ctr">
+                      <a:solidFill>
+                        <a:srgbClr val="F4F6F9"/>
+                      </a:solidFill>
+                      <a:prstDash val="solid"/>
+                      <a:round/>
+                      <a:headEnd type="none" w="med" len="med"/>
+                      <a:tailEnd type="none" w="med" len="med"/>
+                    </a:lnL>
+                    <a:lnR w="12700" cap="flat" cmpd="sng" algn="ctr">
+                      <a:solidFill>
+                        <a:srgbClr val="F4F6F9"/>
+                      </a:solidFill>
+                      <a:prstDash val="solid"/>
+                      <a:round/>
+                      <a:headEnd type="none" w="med" len="med"/>
+                      <a:tailEnd type="none" w="med" len="med"/>
+                    </a:lnR>
+                    <a:lnT w="12700" cap="flat" cmpd="sng" algn="ctr">
+                      <a:solidFill>
+                        <a:srgbClr val="F4F6F9"/>
+                      </a:solidFill>
+                      <a:prstDash val="solid"/>
+                      <a:round/>
+                      <a:headEnd type="none" w="med" len="med"/>
+                      <a:tailEnd type="none" w="med" len="med"/>
+                    </a:lnT>
+                    <a:lnB w="12700" cap="flat" cmpd="sng" algn="ctr">
+                      <a:solidFill>
+                        <a:srgbClr val="F4F6F9"/>
+                      </a:solidFill>
+                      <a:prstDash val="solid"/>
+                      <a:round/>
+                      <a:headEnd type="none" w="med" len="med"/>
+                      <a:tailEnd type="none" w="med" len="med"/>
+                    </a:lnB>
+                    <a:solidFill>
+                      <a:srgbClr val="EFF2F6"/>
+                    </a:solidFill>
+                  </a:tcPr>
+                </a:tc>
+                <a:tc>
+                  <a:txBody>
+                    <a:bodyPr/>
+                    <a:lstStyle/>
+                    <a:p>
+                      <a:pPr algn="r" indent="0" marL="0">
+                        <a:buNone/>
+                      </a:pPr>
                       <a:r>
                         <a:rPr lang="en-US" sz="750" b="1" dirty="0">
                           <a:solidFill>
@@ -35772,6 +38184,63 @@
                       <a:pPr algn="r" indent="0" marL="0">
                         <a:buNone/>
                       </a:pPr>
+                      <a:endParaRPr lang="en-US" sz="750" dirty="0">
+                        <a:latin typeface="Calibri" charset="0"/>
+                        <a:ea typeface="Calibri" charset="0"/>
+                        <a:cs typeface="Calibri" charset="0"/>
+                      </a:endParaRPr>
+                    </a:p>
+                  </a:txBody>
+                  <a:tcPr marL="25400" marR="25400" marT="25400" marB="25400" anchor="ctr">
+                    <a:lnL w="12700" cap="flat" cmpd="sng" algn="ctr">
+                      <a:solidFill>
+                        <a:srgbClr val="F4F6F9"/>
+                      </a:solidFill>
+                      <a:prstDash val="solid"/>
+                      <a:round/>
+                      <a:headEnd type="none" w="med" len="med"/>
+                      <a:tailEnd type="none" w="med" len="med"/>
+                    </a:lnL>
+                    <a:lnR w="12700" cap="flat" cmpd="sng" algn="ctr">
+                      <a:solidFill>
+                        <a:srgbClr val="F4F6F9"/>
+                      </a:solidFill>
+                      <a:prstDash val="solid"/>
+                      <a:round/>
+                      <a:headEnd type="none" w="med" len="med"/>
+                      <a:tailEnd type="none" w="med" len="med"/>
+                    </a:lnR>
+                    <a:lnT w="12700" cap="flat" cmpd="sng" algn="ctr">
+                      <a:solidFill>
+                        <a:srgbClr val="F4F6F9"/>
+                      </a:solidFill>
+                      <a:prstDash val="solid"/>
+                      <a:round/>
+                      <a:headEnd type="none" w="med" len="med"/>
+                      <a:tailEnd type="none" w="med" len="med"/>
+                    </a:lnT>
+                    <a:lnB w="12700" cap="flat" cmpd="sng" algn="ctr">
+                      <a:solidFill>
+                        <a:srgbClr val="F4F6F9"/>
+                      </a:solidFill>
+                      <a:prstDash val="solid"/>
+                      <a:round/>
+                      <a:headEnd type="none" w="med" len="med"/>
+                      <a:tailEnd type="none" w="med" len="med"/>
+                    </a:lnB>
+                    <a:solidFill>
+                      <a:srgbClr val="EFF2F6"/>
+                    </a:solidFill>
+                  </a:tcPr>
+                </a:tc>
+                <a:tc>
+                  <a:txBody>
+                    <a:bodyPr/>
+                    <a:lstStyle/>
+                    <a:p>
+                      <a:pPr algn="r" indent="0" marL="0">
+                        <a:buNone/>
+                      </a:pPr>
                       <a:r>
                         <a:rPr lang="en-US" sz="750" b="1" dirty="0">
                           <a:solidFill>
@@ -37274,6 +39743,63 @@
                       <a:pPr algn="r" indent="0" marL="0">
                         <a:buNone/>
                       </a:pPr>
+                      <a:endParaRPr lang="en-US" sz="750" dirty="0">
+                        <a:latin typeface="Calibri" charset="0"/>
+                        <a:ea typeface="Calibri" charset="0"/>
+                        <a:cs typeface="Calibri" charset="0"/>
+                      </a:endParaRPr>
+                    </a:p>
+                  </a:txBody>
+                  <a:tcPr marL="25400" marR="25400" marT="25400" marB="25400" anchor="ctr">
+                    <a:lnL w="12700" cap="flat" cmpd="sng" algn="ctr">
+                      <a:solidFill>
+                        <a:srgbClr val="F4F6F9"/>
+                      </a:solidFill>
+                      <a:prstDash val="solid"/>
+                      <a:round/>
+                      <a:headEnd type="none" w="med" len="med"/>
+                      <a:tailEnd type="none" w="med" len="med"/>
+                    </a:lnL>
+                    <a:lnR w="12700" cap="flat" cmpd="sng" algn="ctr">
+                      <a:solidFill>
+                        <a:srgbClr val="F4F6F9"/>
+                      </a:solidFill>
+                      <a:prstDash val="solid"/>
+                      <a:round/>
+                      <a:headEnd type="none" w="med" len="med"/>
+                      <a:tailEnd type="none" w="med" len="med"/>
+                    </a:lnR>
+                    <a:lnT w="12700" cap="flat" cmpd="sng" algn="ctr">
+                      <a:solidFill>
+                        <a:srgbClr val="F4F6F9"/>
+                      </a:solidFill>
+                      <a:prstDash val="solid"/>
+                      <a:round/>
+                      <a:headEnd type="none" w="med" len="med"/>
+                      <a:tailEnd type="none" w="med" len="med"/>
+                    </a:lnT>
+                    <a:lnB w="12700" cap="flat" cmpd="sng" algn="ctr">
+                      <a:solidFill>
+                        <a:srgbClr val="F4F6F9"/>
+                      </a:solidFill>
+                      <a:prstDash val="solid"/>
+                      <a:round/>
+                      <a:headEnd type="none" w="med" len="med"/>
+                      <a:tailEnd type="none" w="med" len="med"/>
+                    </a:lnB>
+                    <a:solidFill>
+                      <a:srgbClr val="EFF2F6"/>
+                    </a:solidFill>
+                  </a:tcPr>
+                </a:tc>
+                <a:tc>
+                  <a:txBody>
+                    <a:bodyPr/>
+                    <a:lstStyle/>
+                    <a:p>
+                      <a:pPr algn="r" indent="0" marL="0">
+                        <a:buNone/>
+                      </a:pPr>
                       <a:r>
                         <a:rPr lang="en-US" sz="750" b="1" dirty="0">
                           <a:solidFill>
@@ -38721,6 +41247,63 @@
                       <a:pPr algn="r" indent="0" marL="0">
                         <a:buNone/>
                       </a:pPr>
+                      <a:endParaRPr lang="en-US" sz="750" dirty="0">
+                        <a:latin typeface="Calibri" charset="0"/>
+                        <a:ea typeface="Calibri" charset="0"/>
+                        <a:cs typeface="Calibri" charset="0"/>
+                      </a:endParaRPr>
+                    </a:p>
+                  </a:txBody>
+                  <a:tcPr marL="25400" marR="25400" marT="25400" marB="25400" anchor="ctr">
+                    <a:lnL w="12700" cap="flat" cmpd="sng" algn="ctr">
+                      <a:solidFill>
+                        <a:srgbClr val="F4F6F9"/>
+                      </a:solidFill>
+                      <a:prstDash val="solid"/>
+                      <a:round/>
+                      <a:headEnd type="none" w="med" len="med"/>
+                      <a:tailEnd type="none" w="med" len="med"/>
+                    </a:lnL>
+                    <a:lnR w="12700" cap="flat" cmpd="sng" algn="ctr">
+                      <a:solidFill>
+                        <a:srgbClr val="F4F6F9"/>
+                      </a:solidFill>
+                      <a:prstDash val="solid"/>
+                      <a:round/>
+                      <a:headEnd type="none" w="med" len="med"/>
+                      <a:tailEnd type="none" w="med" len="med"/>
+                    </a:lnR>
+                    <a:lnT w="12700" cap="flat" cmpd="sng" algn="ctr">
+                      <a:solidFill>
+                        <a:srgbClr val="F4F6F9"/>
+                      </a:solidFill>
+                      <a:prstDash val="solid"/>
+                      <a:round/>
+                      <a:headEnd type="none" w="med" len="med"/>
+                      <a:tailEnd type="none" w="med" len="med"/>
+                    </a:lnT>
+                    <a:lnB w="12700" cap="flat" cmpd="sng" algn="ctr">
+                      <a:solidFill>
+                        <a:srgbClr val="F4F6F9"/>
+                      </a:solidFill>
+                      <a:prstDash val="solid"/>
+                      <a:round/>
+                      <a:headEnd type="none" w="med" len="med"/>
+                      <a:tailEnd type="none" w="med" len="med"/>
+                    </a:lnB>
+                    <a:solidFill>
+                      <a:srgbClr val="EFF2F6"/>
+                    </a:solidFill>
+                  </a:tcPr>
+                </a:tc>
+                <a:tc>
+                  <a:txBody>
+                    <a:bodyPr/>
+                    <a:lstStyle/>
+                    <a:p>
+                      <a:pPr algn="r" indent="0" marL="0">
+                        <a:buNone/>
+                      </a:pPr>
                       <a:r>
                         <a:rPr lang="en-US" sz="750" b="1" dirty="0">
                           <a:solidFill>
@@ -40168,6 +42751,63 @@
                       <a:pPr algn="r" indent="0" marL="0">
                         <a:buNone/>
                       </a:pPr>
+                      <a:endParaRPr lang="en-US" sz="750" dirty="0">
+                        <a:latin typeface="Calibri" charset="0"/>
+                        <a:ea typeface="Calibri" charset="0"/>
+                        <a:cs typeface="Calibri" charset="0"/>
+                      </a:endParaRPr>
+                    </a:p>
+                  </a:txBody>
+                  <a:tcPr marL="25400" marR="25400" marT="25400" marB="25400" anchor="ctr">
+                    <a:lnL w="12700" cap="flat" cmpd="sng" algn="ctr">
+                      <a:solidFill>
+                        <a:srgbClr val="F4F6F9"/>
+                      </a:solidFill>
+                      <a:prstDash val="solid"/>
+                      <a:round/>
+                      <a:headEnd type="none" w="med" len="med"/>
+                      <a:tailEnd type="none" w="med" len="med"/>
+                    </a:lnL>
+                    <a:lnR w="12700" cap="flat" cmpd="sng" algn="ctr">
+                      <a:solidFill>
+                        <a:srgbClr val="F4F6F9"/>
+                      </a:solidFill>
+                      <a:prstDash val="solid"/>
+                      <a:round/>
+                      <a:headEnd type="none" w="med" len="med"/>
+                      <a:tailEnd type="none" w="med" len="med"/>
+                    </a:lnR>
+                    <a:lnT w="12700" cap="flat" cmpd="sng" algn="ctr">
+                      <a:solidFill>
+                        <a:srgbClr val="F4F6F9"/>
+                      </a:solidFill>
+                      <a:prstDash val="solid"/>
+                      <a:round/>
+                      <a:headEnd type="none" w="med" len="med"/>
+                      <a:tailEnd type="none" w="med" len="med"/>
+                    </a:lnT>
+                    <a:lnB w="12700" cap="flat" cmpd="sng" algn="ctr">
+                      <a:solidFill>
+                        <a:srgbClr val="F4F6F9"/>
+                      </a:solidFill>
+                      <a:prstDash val="solid"/>
+                      <a:round/>
+                      <a:headEnd type="none" w="med" len="med"/>
+                      <a:tailEnd type="none" w="med" len="med"/>
+                    </a:lnB>
+                    <a:solidFill>
+                      <a:srgbClr val="EFF2F6"/>
+                    </a:solidFill>
+                  </a:tcPr>
+                </a:tc>
+                <a:tc>
+                  <a:txBody>
+                    <a:bodyPr/>
+                    <a:lstStyle/>
+                    <a:p>
+                      <a:pPr algn="r" indent="0" marL="0">
+                        <a:buNone/>
+                      </a:pPr>
                       <a:r>
                         <a:rPr lang="en-US" sz="750" b="1" dirty="0">
                           <a:solidFill>
@@ -41582,6 +44222,63 @@
                       <a:pPr algn="r" indent="0" marL="0">
                         <a:buNone/>
                       </a:pPr>
+                      <a:endParaRPr lang="en-US" sz="750" dirty="0">
+                        <a:latin typeface="Calibri" charset="0"/>
+                        <a:ea typeface="Calibri" charset="0"/>
+                        <a:cs typeface="Calibri" charset="0"/>
+                      </a:endParaRPr>
+                    </a:p>
+                  </a:txBody>
+                  <a:tcPr marL="25400" marR="25400" marT="25400" marB="25400" anchor="ctr">
+                    <a:lnL w="12700" cap="flat" cmpd="sng" algn="ctr">
+                      <a:solidFill>
+                        <a:srgbClr val="F4F6F9"/>
+                      </a:solidFill>
+                      <a:prstDash val="solid"/>
+                      <a:round/>
+                      <a:headEnd type="none" w="med" len="med"/>
+                      <a:tailEnd type="none" w="med" len="med"/>
+                    </a:lnL>
+                    <a:lnR w="12700" cap="flat" cmpd="sng" algn="ctr">
+                      <a:solidFill>
+                        <a:srgbClr val="F4F6F9"/>
+                      </a:solidFill>
+                      <a:prstDash val="solid"/>
+                      <a:round/>
+                      <a:headEnd type="none" w="med" len="med"/>
+                      <a:tailEnd type="none" w="med" len="med"/>
+                    </a:lnR>
+                    <a:lnT w="12700" cap="flat" cmpd="sng" algn="ctr">
+                      <a:solidFill>
+                        <a:srgbClr val="F4F6F9"/>
+                      </a:solidFill>
+                      <a:prstDash val="solid"/>
+                      <a:round/>
+                      <a:headEnd type="none" w="med" len="med"/>
+                      <a:tailEnd type="none" w="med" len="med"/>
+                    </a:lnT>
+                    <a:lnB w="12700" cap="flat" cmpd="sng" algn="ctr">
+                      <a:solidFill>
+                        <a:srgbClr val="F4F6F9"/>
+                      </a:solidFill>
+                      <a:prstDash val="solid"/>
+                      <a:round/>
+                      <a:headEnd type="none" w="med" len="med"/>
+                      <a:tailEnd type="none" w="med" len="med"/>
+                    </a:lnB>
+                    <a:solidFill>
+                      <a:srgbClr val="EFF2F6"/>
+                    </a:solidFill>
+                  </a:tcPr>
+                </a:tc>
+                <a:tc>
+                  <a:txBody>
+                    <a:bodyPr/>
+                    <a:lstStyle/>
+                    <a:p>
+                      <a:pPr algn="r" indent="0" marL="0">
+                        <a:buNone/>
+                      </a:pPr>
                       <a:r>
                         <a:rPr lang="en-US" sz="750" b="1" dirty="0">
                           <a:solidFill>
@@ -42996,6 +45693,63 @@
                       <a:pPr algn="r" indent="0" marL="0">
                         <a:buNone/>
                       </a:pPr>
+                      <a:endParaRPr lang="en-US" sz="750" dirty="0">
+                        <a:latin typeface="Calibri" charset="0"/>
+                        <a:ea typeface="Calibri" charset="0"/>
+                        <a:cs typeface="Calibri" charset="0"/>
+                      </a:endParaRPr>
+                    </a:p>
+                  </a:txBody>
+                  <a:tcPr marL="25400" marR="25400" marT="25400" marB="25400" anchor="ctr">
+                    <a:lnL w="12700" cap="flat" cmpd="sng" algn="ctr">
+                      <a:solidFill>
+                        <a:srgbClr val="F4F6F9"/>
+                      </a:solidFill>
+                      <a:prstDash val="solid"/>
+                      <a:round/>
+                      <a:headEnd type="none" w="med" len="med"/>
+                      <a:tailEnd type="none" w="med" len="med"/>
+                    </a:lnL>
+                    <a:lnR w="12700" cap="flat" cmpd="sng" algn="ctr">
+                      <a:solidFill>
+                        <a:srgbClr val="F4F6F9"/>
+                      </a:solidFill>
+                      <a:prstDash val="solid"/>
+                      <a:round/>
+                      <a:headEnd type="none" w="med" len="med"/>
+                      <a:tailEnd type="none" w="med" len="med"/>
+                    </a:lnR>
+                    <a:lnT w="12700" cap="flat" cmpd="sng" algn="ctr">
+                      <a:solidFill>
+                        <a:srgbClr val="F4F6F9"/>
+                      </a:solidFill>
+                      <a:prstDash val="solid"/>
+                      <a:round/>
+                      <a:headEnd type="none" w="med" len="med"/>
+                      <a:tailEnd type="none" w="med" len="med"/>
+                    </a:lnT>
+                    <a:lnB w="12700" cap="flat" cmpd="sng" algn="ctr">
+                      <a:solidFill>
+                        <a:srgbClr val="F4F6F9"/>
+                      </a:solidFill>
+                      <a:prstDash val="solid"/>
+                      <a:round/>
+                      <a:headEnd type="none" w="med" len="med"/>
+                      <a:tailEnd type="none" w="med" len="med"/>
+                    </a:lnB>
+                    <a:solidFill>
+                      <a:srgbClr val="EFF2F6"/>
+                    </a:solidFill>
+                  </a:tcPr>
+                </a:tc>
+                <a:tc>
+                  <a:txBody>
+                    <a:bodyPr/>
+                    <a:lstStyle/>
+                    <a:p>
+                      <a:pPr algn="r" indent="0" marL="0">
+                        <a:buNone/>
+                      </a:pPr>
                       <a:r>
                         <a:rPr lang="en-US" sz="750" b="1" dirty="0">
                           <a:solidFill>
@@ -44421,6 +47175,63 @@
                       <a:pPr algn="r" indent="0" marL="0">
                         <a:buNone/>
                       </a:pPr>
+                      <a:endParaRPr lang="en-US" sz="750" dirty="0">
+                        <a:latin typeface="Calibri" charset="0"/>
+                        <a:ea typeface="Calibri" charset="0"/>
+                        <a:cs typeface="Calibri" charset="0"/>
+                      </a:endParaRPr>
+                    </a:p>
+                  </a:txBody>
+                  <a:tcPr marL="25400" marR="25400" marT="25400" marB="25400" anchor="ctr">
+                    <a:lnL w="12700" cap="flat" cmpd="sng" algn="ctr">
+                      <a:solidFill>
+                        <a:srgbClr val="F4F6F9"/>
+                      </a:solidFill>
+                      <a:prstDash val="solid"/>
+                      <a:round/>
+                      <a:headEnd type="none" w="med" len="med"/>
+                      <a:tailEnd type="none" w="med" len="med"/>
+                    </a:lnL>
+                    <a:lnR w="12700" cap="flat" cmpd="sng" algn="ctr">
+                      <a:solidFill>
+                        <a:srgbClr val="F4F6F9"/>
+                      </a:solidFill>
+                      <a:prstDash val="solid"/>
+                      <a:round/>
+                      <a:headEnd type="none" w="med" len="med"/>
+                      <a:tailEnd type="none" w="med" len="med"/>
+                    </a:lnR>
+                    <a:lnT w="12700" cap="flat" cmpd="sng" algn="ctr">
+                      <a:solidFill>
+                        <a:srgbClr val="F4F6F9"/>
+                      </a:solidFill>
+                      <a:prstDash val="solid"/>
+                      <a:round/>
+                      <a:headEnd type="none" w="med" len="med"/>
+                      <a:tailEnd type="none" w="med" len="med"/>
+                    </a:lnT>
+                    <a:lnB w="12700" cap="flat" cmpd="sng" algn="ctr">
+                      <a:solidFill>
+                        <a:srgbClr val="F4F6F9"/>
+                      </a:solidFill>
+                      <a:prstDash val="solid"/>
+                      <a:round/>
+                      <a:headEnd type="none" w="med" len="med"/>
+                      <a:tailEnd type="none" w="med" len="med"/>
+                    </a:lnB>
+                    <a:solidFill>
+                      <a:srgbClr val="EFF2F6"/>
+                    </a:solidFill>
+                  </a:tcPr>
+                </a:tc>
+                <a:tc>
+                  <a:txBody>
+                    <a:bodyPr/>
+                    <a:lstStyle/>
+                    <a:p>
+                      <a:pPr algn="r" indent="0" marL="0">
+                        <a:buNone/>
+                      </a:pPr>
                       <a:r>
                         <a:rPr lang="en-US" sz="750" b="1" dirty="0">
                           <a:solidFill>
@@ -45989,6 +48800,63 @@
                       <a:pPr algn="r" indent="0" marL="0">
                         <a:buNone/>
                       </a:pPr>
+                      <a:endParaRPr lang="en-US" sz="750" dirty="0">
+                        <a:latin typeface="Calibri" charset="0"/>
+                        <a:ea typeface="Calibri" charset="0"/>
+                        <a:cs typeface="Calibri" charset="0"/>
+                      </a:endParaRPr>
+                    </a:p>
+                  </a:txBody>
+                  <a:tcPr marL="25400" marR="25400" marT="25400" marB="25400" anchor="ctr">
+                    <a:lnL w="12700" cap="flat" cmpd="sng" algn="ctr">
+                      <a:solidFill>
+                        <a:srgbClr val="F4F6F9"/>
+                      </a:solidFill>
+                      <a:prstDash val="solid"/>
+                      <a:round/>
+                      <a:headEnd type="none" w="med" len="med"/>
+                      <a:tailEnd type="none" w="med" len="med"/>
+                    </a:lnL>
+                    <a:lnR w="12700" cap="flat" cmpd="sng" algn="ctr">
+                      <a:solidFill>
+                        <a:srgbClr val="F4F6F9"/>
+                      </a:solidFill>
+                      <a:prstDash val="solid"/>
+                      <a:round/>
+                      <a:headEnd type="none" w="med" len="med"/>
+                      <a:tailEnd type="none" w="med" len="med"/>
+                    </a:lnR>
+                    <a:lnT w="12700" cap="flat" cmpd="sng" algn="ctr">
+                      <a:solidFill>
+                        <a:srgbClr val="F4F6F9"/>
+                      </a:solidFill>
+                      <a:prstDash val="solid"/>
+                      <a:round/>
+                      <a:headEnd type="none" w="med" len="med"/>
+                      <a:tailEnd type="none" w="med" len="med"/>
+                    </a:lnT>
+                    <a:lnB w="12700" cap="flat" cmpd="sng" algn="ctr">
+                      <a:solidFill>
+                        <a:srgbClr val="F4F6F9"/>
+                      </a:solidFill>
+                      <a:prstDash val="solid"/>
+                      <a:round/>
+                      <a:headEnd type="none" w="med" len="med"/>
+                      <a:tailEnd type="none" w="med" len="med"/>
+                    </a:lnB>
+                    <a:solidFill>
+                      <a:srgbClr val="EFF2F6"/>
+                    </a:solidFill>
+                  </a:tcPr>
+                </a:tc>
+                <a:tc>
+                  <a:txBody>
+                    <a:bodyPr/>
+                    <a:lstStyle/>
+                    <a:p>
+                      <a:pPr algn="r" indent="0" marL="0">
+                        <a:buNone/>
+                      </a:pPr>
                       <a:r>
                         <a:rPr lang="en-US" sz="750" b="1" dirty="0">
                           <a:solidFill>
@@ -47626,13 +50494,81 @@
                       <a:r>
                         <a:rPr lang="en-US" sz="750" b="1" dirty="0">
                           <a:solidFill>
+                            <a:srgbClr val="C0392B"/>
+                          </a:solidFill>
+                          <a:latin typeface="Calibri" pitchFamily="34" charset="0"/>
+                          <a:ea typeface="Calibri" pitchFamily="34" charset="-122"/>
+                          <a:cs typeface="Calibri" pitchFamily="34" charset="-120"/>
+                        </a:rPr>
+                        <a:t>0/7</a:t>
+                      </a:r>
+                      <a:endParaRPr lang="en-US" sz="750" dirty="0">
+                        <a:latin typeface="Calibri" charset="0"/>
+                        <a:ea typeface="Calibri" charset="0"/>
+                        <a:cs typeface="Calibri" charset="0"/>
+                      </a:endParaRPr>
+                    </a:p>
+                  </a:txBody>
+                  <a:tcPr marL="25400" marR="25400" marT="25400" marB="25400" anchor="ctr">
+                    <a:lnL w="12700" cap="flat" cmpd="sng" algn="ctr">
+                      <a:solidFill>
+                        <a:srgbClr val="F4F6F9"/>
+                      </a:solidFill>
+                      <a:prstDash val="solid"/>
+                      <a:round/>
+                      <a:headEnd type="none" w="med" len="med"/>
+                      <a:tailEnd type="none" w="med" len="med"/>
+                    </a:lnL>
+                    <a:lnR w="12700" cap="flat" cmpd="sng" algn="ctr">
+                      <a:solidFill>
+                        <a:srgbClr val="F4F6F9"/>
+                      </a:solidFill>
+                      <a:prstDash val="solid"/>
+                      <a:round/>
+                      <a:headEnd type="none" w="med" len="med"/>
+                      <a:tailEnd type="none" w="med" len="med"/>
+                    </a:lnR>
+                    <a:lnT w="12700" cap="flat" cmpd="sng" algn="ctr">
+                      <a:solidFill>
+                        <a:srgbClr val="F4F6F9"/>
+                      </a:solidFill>
+                      <a:prstDash val="solid"/>
+                      <a:round/>
+                      <a:headEnd type="none" w="med" len="med"/>
+                      <a:tailEnd type="none" w="med" len="med"/>
+                    </a:lnT>
+                    <a:lnB w="12700" cap="flat" cmpd="sng" algn="ctr">
+                      <a:solidFill>
+                        <a:srgbClr val="F4F6F9"/>
+                      </a:solidFill>
+                      <a:prstDash val="solid"/>
+                      <a:round/>
+                      <a:headEnd type="none" w="med" len="med"/>
+                      <a:tailEnd type="none" w="med" len="med"/>
+                    </a:lnB>
+                    <a:solidFill>
+                      <a:srgbClr val="F4F6F9"/>
+                    </a:solidFill>
+                  </a:tcPr>
+                </a:tc>
+                <a:tc>
+                  <a:txBody>
+                    <a:bodyPr/>
+                    <a:lstStyle/>
+                    <a:p>
+                      <a:pPr algn="r" indent="0" marL="0">
+                        <a:buNone/>
+                      </a:pPr>
+                      <a:r>
+                        <a:rPr lang="en-US" sz="750" b="1" dirty="0">
+                          <a:solidFill>
                             <a:srgbClr val="56606E"/>
                           </a:solidFill>
                           <a:latin typeface="Calibri" pitchFamily="34" charset="0"/>
                           <a:ea typeface="Calibri" pitchFamily="34" charset="-122"/>
                           <a:cs typeface="Calibri" pitchFamily="34" charset="-120"/>
                         </a:rPr>
-                        <a:t>108/491</a:t>
+                        <a:t>108/498</a:t>
                       </a:r>
                       <a:endParaRPr lang="en-US" sz="750" dirty="0">
                         <a:latin typeface="Calibri" charset="0"/>
@@ -48296,7 +51232,7 @@
                 <a:ea typeface="Cambria" pitchFamily="34" charset="-122"/>
                 <a:cs typeface="Cambria" pitchFamily="34" charset="-120"/>
               </a:rPr>
-              <a:t>251</a:t>
+              <a:t>258</a:t>
             </a:r>
             <a:endParaRPr lang="en-US" sz="2100" dirty="0"/>
           </a:p>
@@ -48374,7 +51310,7 @@
                 <a:ea typeface="Calibri" pitchFamily="34" charset="-122"/>
                 <a:cs typeface="Calibri" pitchFamily="34" charset="-120"/>
               </a:rPr>
-              <a:t>El costo se imputa al mes de emisión: la columna «Costo De La No Conformidad» no trae fecha propia. El mes más caro es jul-25 con 4.382 UF. Los últimos 4 meses no traen ningún monto declarado —un mes en blanco es «sin declarar», no «sin costo»—. La cifra es un piso del costo real.</a:t>
+              <a:t>El costo se imputa al mes de emisión: la columna «Costo De La No Conformidad» no trae fecha propia. El mes más caro es jul-25 con 4.382 UF. Los últimos 5 meses no traen ningún monto declarado —un mes en blanco es «sin declarar», no «sin costo»—. La cifra es un piso del costo real.</a:t>
             </a:r>
             <a:endParaRPr lang="en-US" sz="950" dirty="0"/>
           </a:p>
@@ -48413,7 +51349,7 @@
                 <a:ea typeface="Calibri" pitchFamily="34" charset="-122"/>
                 <a:cs typeface="Calibri" pitchFamily="34" charset="-120"/>
               </a:rPr>
-              <a:t>Fuente: Data_NCR31082026.xlsx — hoja «Observaciones» · Corte 31-08-2026 · 502 registros desde 10-02-2023</a:t>
+              <a:t>Fuente: Data_NCR07092026.xlsx — hoja «Observaciones» · Corte 07-09-2026 · 509 registros desde 10-02-2023</a:t>
             </a:r>
             <a:endParaRPr lang="en-US" sz="850" dirty="0"/>
           </a:p>
@@ -48787,7 +51723,7 @@
                 <a:ea typeface="Calibri" pitchFamily="34" charset="-122"/>
                 <a:cs typeface="Calibri" pitchFamily="34" charset="-120"/>
               </a:rPr>
-              <a:t>32 de los 39 hallazgos abiertos (82,1%) y 80,5% de cierre, contra 92,2% global. Es la ruta crítica del módulo.</a:t>
+              <a:t>38 de los 46 hallazgos abiertos (82,6%) y 77,6% de cierre, contra 91% global. Es la ruta crítica del módulo.</a:t>
             </a:r>
             <a:endParaRPr lang="en-US" sz="1100" dirty="0"/>
           </a:p>
@@ -48929,7 +51865,7 @@
                 <a:ea typeface="Calibri" pitchFamily="34" charset="-122"/>
                 <a:cs typeface="Calibri" pitchFamily="34" charset="-120"/>
               </a:rPr>
-              <a:t>Solo 21% de sus hallazgos los detecta Besalco; el mejor frente va en 66,7%. Lo que no se detecta adentro llega como observación del cliente.</a:t>
+              <a:t>Solo 20,9% de sus hallazgos los detecta Besalco; el mejor frente va en 66,7%. Lo que no se detecta adentro llega como observación del cliente.</a:t>
             </a:r>
             <a:endParaRPr lang="en-US" sz="1100" dirty="0"/>
           </a:p>
@@ -49029,7 +51965,7 @@
                 <a:ea typeface="Calibri" pitchFamily="34" charset="-122"/>
                 <a:cs typeface="Calibri" pitchFamily="34" charset="-120"/>
               </a:rPr>
-              <a:t>Sacar los 13 hallazgos sobre 180 días</a:t>
+              <a:t>Sacar los 17 hallazgos sobre 180 días</a:t>
             </a:r>
             <a:endParaRPr lang="en-US" sz="1400" dirty="0"/>
           </a:p>
@@ -49071,7 +52007,7 @@
                 <a:ea typeface="Calibri" pitchFamily="34" charset="-122"/>
                 <a:cs typeface="Calibri" pitchFamily="34" charset="-120"/>
               </a:rPr>
-              <a:t>0 de ellos superan el año abiertos. Los tienen a cargo Sin asignar (13). Es deuda antigua que no se cierra sola.</a:t>
+              <a:t>0 de ellos superan el año abiertos. Los tienen a cargo Sin asignar (17). Es deuda antigua que no se cierra sola.</a:t>
             </a:r>
             <a:endParaRPr lang="en-US" sz="1100" dirty="0"/>
           </a:p>
@@ -49171,7 +52107,7 @@
                 <a:ea typeface="Calibri" pitchFamily="34" charset="-122"/>
                 <a:cs typeface="Calibri" pitchFamily="34" charset="-120"/>
               </a:rPr>
-              <a:t>Responder las 38 que pasaron el plazo</a:t>
+              <a:t>Responder las 39 que pasaron el plazo</a:t>
             </a:r>
             <a:endParaRPr lang="en-US" sz="1400" dirty="0"/>
           </a:p>
@@ -49213,7 +52149,7 @@
                 <a:ea typeface="Calibri" pitchFamily="34" charset="-122"/>
                 <a:cs typeface="Calibri" pitchFamily="34" charset="-120"/>
               </a:rPr>
-              <a:t>El plazo es de 10 días desde la emisión y hoy lo incumplen 97,4% de los abiertos. Solo 1 siguen dentro de plazo.</a:t>
+              <a:t>El plazo es de 10 días desde la emisión y hoy lo incumplen 84,8% de los abiertos. Solo 7 siguen dentro de plazo.</a:t>
             </a:r>
             <a:endParaRPr lang="en-US" sz="1100" dirty="0"/>
           </a:p>
@@ -49252,7 +52188,7 @@
                 <a:ea typeface="Calibri" pitchFamily="34" charset="-122"/>
                 <a:cs typeface="Calibri" pitchFamily="34" charset="-120"/>
               </a:rPr>
-              <a:t>Fuente: Data_NCR31082026.xlsx — hoja «Observaciones» · Corte 31-08-2026 · 502 registros desde 10-02-2023</a:t>
+              <a:t>Fuente: Data_NCR07092026.xlsx — hoja «Observaciones» · Corte 07-09-2026 · 509 registros desde 10-02-2023</a:t>
             </a:r>
             <a:endParaRPr lang="en-US" sz="850" dirty="0"/>
           </a:p>
@@ -49976,7 +52912,7 @@
                 <a:ea typeface="Calibri" pitchFamily="34" charset="-122"/>
                 <a:cs typeface="Calibri" pitchFamily="34" charset="-120"/>
               </a:rPr>
-              <a:t>Corte: 31-08-2026</a:t>
+              <a:t>Corte: 07-09-2026</a:t>
             </a:r>
             <a:endParaRPr lang="en-US" sz="1100" dirty="0"/>
           </a:p>
@@ -50015,7 +52951,7 @@
                 <a:ea typeface="Calibri" pitchFamily="34" charset="-122"/>
                 <a:cs typeface="Calibri" pitchFamily="34" charset="-120"/>
               </a:rPr>
-              <a:t>Fuente: Data_NCR31082026.xlsx — hoja «Observaciones» · Corte 31-08-2026 · 502 registros desde 10-02-2023</a:t>
+              <a:t>Fuente: Data_NCR07092026.xlsx — hoja «Observaciones» · Corte 07-09-2026 · 509 registros desde 10-02-2023</a:t>
             </a:r>
             <a:endParaRPr lang="en-US" sz="850" dirty="0"/>
           </a:p>
